--- a/Pregrado/Trabajo de grado 3/Clases/Sesion 01 - Presentación del curso · docente · estudiantes · ACAs/Presentacion.pptx
+++ b/Pregrado/Trabajo de grado 3/Clases/Sesion 01 - Presentación del curso · docente · estudiantes · ACAs/Presentacion.pptx
@@ -13,6 +13,20 @@
     <p:sldId id="261" r:id="rId12"/>
     <p:sldId id="262" r:id="rId13"/>
     <p:sldId id="263" r:id="rId14"/>
+    <p:sldId id="264" r:id="rId15"/>
+    <p:sldId id="265" r:id="rId16"/>
+    <p:sldId id="266" r:id="rId17"/>
+    <p:sldId id="267" r:id="rId18"/>
+    <p:sldId id="268" r:id="rId19"/>
+    <p:sldId id="269" r:id="rId20"/>
+    <p:sldId id="270" r:id="rId21"/>
+    <p:sldId id="271" r:id="rId22"/>
+    <p:sldId id="272" r:id="rId23"/>
+    <p:sldId id="273" r:id="rId24"/>
+    <p:sldId id="274" r:id="rId25"/>
+    <p:sldId id="275" r:id="rId26"/>
+    <p:sldId id="276" r:id="rId27"/>
+    <p:sldId id="277" r:id="rId28"/>
   </p:sldIdLst>
   <p:sldSz cx="12191695" cy="6858000" type="screen4x3"/>
   <p:notesSz cx="6858000" cy="9144000"/>
@@ -3407,6 +3421,5513 @@
 </p:sld>
 </file>
 
+<file path=ppt/slides/slide10.xml><?xml version="1.0" encoding="utf-8"?>
+<p:sld xmlns:a="http://schemas.openxmlformats.org/drawingml/2006/main" xmlns:p="http://schemas.openxmlformats.org/presentationml/2006/main" xmlns:r="http://schemas.openxmlformats.org/officeDocument/2006/relationships">
+  <p:cSld>
+    <p:bg>
+      <p:bgPr>
+        <a:solidFill>
+          <a:srgbClr val="FFFFFF"/>
+        </a:solidFill>
+        <a:effectLst/>
+      </p:bgPr>
+    </p:bg>
+    <p:spTree>
+      <p:nvGrpSpPr>
+        <p:cNvPr id="1" name=""/>
+        <p:cNvGrpSpPr/>
+        <p:nvPr/>
+      </p:nvGrpSpPr>
+      <p:grpSpPr/>
+      <p:sp>
+        <p:nvSpPr>
+          <p:cNvPr id="2" name="Rectangle 1"/>
+          <p:cNvSpPr/>
+          <p:nvPr/>
+        </p:nvSpPr>
+        <p:spPr>
+          <a:xfrm>
+            <a:off x="0" y="0"/>
+            <a:ext cx="12191695" cy="1188720"/>
+          </a:xfrm>
+          <a:prstGeom prst="rect">
+            <a:avLst/>
+          </a:prstGeom>
+          <a:solidFill>
+            <a:srgbClr val="0C2340"/>
+          </a:solidFill>
+          <a:ln>
+            <a:noFill/>
+          </a:ln>
+          <a:effectLst/>
+        </p:spPr>
+        <p:style>
+          <a:lnRef idx="1">
+            <a:schemeClr val="accent1"/>
+          </a:lnRef>
+          <a:fillRef idx="3">
+            <a:schemeClr val="accent1"/>
+          </a:fillRef>
+          <a:effectRef idx="2">
+            <a:schemeClr val="accent1"/>
+          </a:effectRef>
+          <a:fontRef idx="minor">
+            <a:schemeClr val="lt1"/>
+          </a:fontRef>
+        </p:style>
+        <p:txBody>
+          <a:bodyPr rtlCol="0" anchor="ctr"/>
+          <a:lstStyle/>
+          <a:p>
+            <a:pPr algn="ctr"/>
+          </a:p>
+        </p:txBody>
+      </p:sp>
+      <p:sp>
+        <p:nvSpPr>
+          <p:cNvPr id="3" name="TextBox 2"/>
+          <p:cNvSpPr txBox="1"/>
+          <p:nvPr/>
+        </p:nvSpPr>
+        <p:spPr>
+          <a:xfrm>
+            <a:off x="640080" y="0"/>
+            <a:ext cx="9082735" cy="1188720"/>
+          </a:xfrm>
+          <a:prstGeom prst="rect">
+            <a:avLst/>
+          </a:prstGeom>
+          <a:noFill/>
+        </p:spPr>
+        <p:txBody>
+          <a:bodyPr wrap="square" anchor="ctr" lIns="0" rIns="0" tIns="0" bIns="0">
+            <a:spAutoFit/>
+          </a:bodyPr>
+          <a:lstStyle/>
+          <a:p>
+            <a:pPr algn="ctr"/>
+            <a:r>
+              <a:rPr sz="2600" b="1" i="0">
+                <a:solidFill>
+                  <a:srgbClr val="FFFFFF"/>
+                </a:solidFill>
+                <a:latin typeface="Calibri"/>
+              </a:rPr>
+              <a:t>El acuerdo pedagógico: qué pactamos hoy</a:t>
+            </a:r>
+          </a:p>
+        </p:txBody>
+      </p:sp>
+      <p:sp>
+        <p:nvSpPr>
+          <p:cNvPr id="4" name="TextBox 3"/>
+          <p:cNvSpPr txBox="1"/>
+          <p:nvPr/>
+        </p:nvSpPr>
+        <p:spPr>
+          <a:xfrm>
+            <a:off x="640080" y="1691639"/>
+            <a:ext cx="10911535" cy="4617720"/>
+          </a:xfrm>
+          <a:prstGeom prst="rect">
+            <a:avLst/>
+          </a:prstGeom>
+          <a:noFill/>
+        </p:spPr>
+        <p:txBody>
+          <a:bodyPr wrap="square" anchor="t" lIns="0" rIns="0" tIns="0" bIns="0">
+            <a:spAutoFit/>
+          </a:bodyPr>
+          <a:lstStyle/>
+          <a:p>
+            <a:pPr>
+              <a:spcAft>
+                <a:spcPts val="1000"/>
+              </a:spcAft>
+            </a:pPr>
+            <a:r>
+              <a:rPr sz="1600" b="0" i="0">
+                <a:solidFill>
+                  <a:srgbClr val="2B2B2B"/>
+                </a:solidFill>
+                <a:latin typeface="Calibri"/>
+              </a:rPr>
+              <a:t>–   Es el </a:t>
+            </a:r>
+            <a:r>
+              <a:rPr sz="1600" b="1" i="0">
+                <a:solidFill>
+                  <a:srgbClr val="2B2B2B"/>
+                </a:solidFill>
+                <a:latin typeface="Calibri"/>
+              </a:rPr>
+              <a:t>pacto de trabajo del curso</a:t>
+            </a:r>
+            <a:r>
+              <a:rPr sz="1600" b="0" i="0">
+                <a:solidFill>
+                  <a:srgbClr val="2B2B2B"/>
+                </a:solidFill>
+                <a:latin typeface="Calibri"/>
+              </a:rPr>
+              <a:t> y se deja por escrito hoy, en el espacio del curso en CDigital.</a:t>
+            </a:r>
+          </a:p>
+          <a:p>
+            <a:pPr>
+              <a:spcAft>
+                <a:spcPts val="1000"/>
+              </a:spcAft>
+            </a:pPr>
+            <a:r>
+              <a:rPr sz="1600" b="0" i="0">
+                <a:solidFill>
+                  <a:srgbClr val="2B2B2B"/>
+                </a:solidFill>
+                <a:latin typeface="Calibri"/>
+              </a:rPr>
+              <a:t>–   Qué contiene:</a:t>
+            </a:r>
+          </a:p>
+          <a:p>
+            <a:pPr lvl="1">
+              <a:spcAft>
+                <a:spcPts val="600"/>
+              </a:spcAft>
+            </a:pPr>
+            <a:r>
+              <a:rPr sz="1500" b="0" i="0">
+                <a:solidFill>
+                  <a:srgbClr val="2B2B2B"/>
+                </a:solidFill>
+                <a:latin typeface="Calibri"/>
+              </a:rPr>
+              <a:t>●   </a:t>
+            </a:r>
+            <a:r>
+              <a:rPr sz="1500" b="1" i="0">
+                <a:solidFill>
+                  <a:srgbClr val="2B2B2B"/>
+                </a:solidFill>
+                <a:latin typeface="Calibri"/>
+              </a:rPr>
+              <a:t>Ritmo:</a:t>
+            </a:r>
+            <a:r>
+              <a:rPr sz="1500" b="0" i="0">
+                <a:solidFill>
+                  <a:srgbClr val="2B2B2B"/>
+                </a:solidFill>
+                <a:latin typeface="Calibri"/>
+              </a:rPr>
+              <a:t> una sección del artículo por sesión, subida antes del siguiente encuentro.</a:t>
+            </a:r>
+          </a:p>
+          <a:p>
+            <a:pPr lvl="1">
+              <a:spcAft>
+                <a:spcPts val="600"/>
+              </a:spcAft>
+            </a:pPr>
+            <a:r>
+              <a:rPr sz="1500" b="0" i="0">
+                <a:solidFill>
+                  <a:srgbClr val="2B2B2B"/>
+                </a:solidFill>
+                <a:latin typeface="Calibri"/>
+              </a:rPr>
+              <a:t>●   </a:t>
+            </a:r>
+            <a:r>
+              <a:rPr sz="1500" b="1" i="0">
+                <a:solidFill>
+                  <a:srgbClr val="2B2B2B"/>
+                </a:solidFill>
+                <a:latin typeface="Calibri"/>
+              </a:rPr>
+              <a:t>Formato:</a:t>
+            </a:r>
+            <a:r>
+              <a:rPr sz="1500" b="0" i="0">
+                <a:solidFill>
+                  <a:srgbClr val="2B2B2B"/>
+                </a:solidFill>
+                <a:latin typeface="Calibri"/>
+              </a:rPr>
+              <a:t> plantilla APA CUN abierta en Google Docs, con referencias en APA 7 desde el primer día.</a:t>
+            </a:r>
+          </a:p>
+          <a:p>
+            <a:pPr lvl="1">
+              <a:spcAft>
+                <a:spcPts val="600"/>
+              </a:spcAft>
+            </a:pPr>
+            <a:r>
+              <a:rPr sz="1500" b="0" i="0">
+                <a:solidFill>
+                  <a:srgbClr val="2B2B2B"/>
+                </a:solidFill>
+                <a:latin typeface="Calibri"/>
+              </a:rPr>
+              <a:t>●   </a:t>
+            </a:r>
+            <a:r>
+              <a:rPr sz="1500" b="1" i="0">
+                <a:solidFill>
+                  <a:srgbClr val="2B2B2B"/>
+                </a:solidFill>
+                <a:latin typeface="Calibri"/>
+              </a:rPr>
+              <a:t>Canal:</a:t>
+            </a:r>
+            <a:r>
+              <a:rPr sz="1500" b="0" i="0">
+                <a:solidFill>
+                  <a:srgbClr val="2B2B2B"/>
+                </a:solidFill>
+                <a:latin typeface="Calibri"/>
+              </a:rPr>
+              <a:t> CDigital para todo lo que se entrega, se comenta y se califica.</a:t>
+            </a:r>
+          </a:p>
+          <a:p>
+            <a:pPr lvl="1">
+              <a:spcAft>
+                <a:spcPts val="600"/>
+              </a:spcAft>
+            </a:pPr>
+            <a:r>
+              <a:rPr sz="1500" b="0" i="0">
+                <a:solidFill>
+                  <a:srgbClr val="2B2B2B"/>
+                </a:solidFill>
+                <a:latin typeface="Calibri"/>
+              </a:rPr>
+              <a:t>●   </a:t>
+            </a:r>
+            <a:r>
+              <a:rPr sz="1500" b="1" i="0">
+                <a:solidFill>
+                  <a:srgbClr val="2B2B2B"/>
+                </a:solidFill>
+                <a:latin typeface="Calibri"/>
+              </a:rPr>
+              <a:t>Retroalimentación:</a:t>
+            </a:r>
+            <a:r>
+              <a:rPr sz="1500" b="0" i="0">
+                <a:solidFill>
+                  <a:srgbClr val="2B2B2B"/>
+                </a:solidFill>
+                <a:latin typeface="Calibri"/>
+              </a:rPr>
+              <a:t> el Docente comenta sobre lo entregado. Sin texto entregado no hay corrección posible.</a:t>
+            </a:r>
+          </a:p>
+          <a:p>
+            <a:pPr lvl="1">
+              <a:spcAft>
+                <a:spcPts val="600"/>
+              </a:spcAft>
+            </a:pPr>
+            <a:r>
+              <a:rPr sz="1500" b="0" i="0">
+                <a:solidFill>
+                  <a:srgbClr val="2B2B2B"/>
+                </a:solidFill>
+                <a:latin typeface="Calibri"/>
+              </a:rPr>
+              <a:t>●   </a:t>
+            </a:r>
+            <a:r>
+              <a:rPr sz="1500" b="1" i="0">
+                <a:solidFill>
+                  <a:srgbClr val="2B2B2B"/>
+                </a:solidFill>
+                <a:latin typeface="Calibri"/>
+              </a:rPr>
+              <a:t>Sustentación:</a:t>
+            </a:r>
+            <a:r>
+              <a:rPr sz="1500" b="0" i="0">
+                <a:solidFill>
+                  <a:srgbClr val="2B2B2B"/>
+                </a:solidFill>
+                <a:latin typeface="Calibri"/>
+              </a:rPr>
+              <a:t> se prepara desde ahora, no la semana anterior; el guion de defensa nace del artículo.</a:t>
+            </a:r>
+          </a:p>
+          <a:p>
+            <a:pPr>
+              <a:spcAft>
+                <a:spcPts val="1000"/>
+              </a:spcAft>
+            </a:pPr>
+            <a:r>
+              <a:rPr sz="1600" b="0" i="0">
+                <a:solidFill>
+                  <a:srgbClr val="2B2B2B"/>
+                </a:solidFill>
+                <a:latin typeface="Calibri"/>
+              </a:rPr>
+              <a:t>–   No es un formalismo: es lo que se invoca cuando alguien dice “yo no sabía”. Léalo antes de aceptarlo.</a:t>
+            </a:r>
+          </a:p>
+        </p:txBody>
+      </p:sp>
+      <p:sp>
+        <p:nvSpPr>
+          <p:cNvPr id="5" name="TextBox 4"/>
+          <p:cNvSpPr txBox="1"/>
+          <p:nvPr/>
+        </p:nvSpPr>
+        <p:spPr>
+          <a:xfrm>
+            <a:off x="2194560" y="6446520"/>
+            <a:ext cx="5943600" cy="274320"/>
+          </a:xfrm>
+          <a:prstGeom prst="rect">
+            <a:avLst/>
+          </a:prstGeom>
+          <a:noFill/>
+        </p:spPr>
+        <p:txBody>
+          <a:bodyPr wrap="square" anchor="t" lIns="0" rIns="0" tIns="0" bIns="0">
+            <a:spAutoFit/>
+          </a:bodyPr>
+          <a:lstStyle/>
+          <a:p>
+            <a:pPr algn="l"/>
+            <a:r>
+              <a:rPr sz="1000" b="1" i="0">
+                <a:solidFill>
+                  <a:srgbClr val="8F989D"/>
+                </a:solidFill>
+                <a:latin typeface="Calibri"/>
+              </a:rPr>
+              <a:t>Inicio 5:10 pm</a:t>
+            </a:r>
+          </a:p>
+        </p:txBody>
+      </p:sp>
+      <p:sp>
+        <p:nvSpPr>
+          <p:cNvPr id="6" name="TextBox 5"/>
+          <p:cNvSpPr txBox="1"/>
+          <p:nvPr/>
+        </p:nvSpPr>
+        <p:spPr>
+          <a:xfrm>
+            <a:off x="11094415" y="6446520"/>
+            <a:ext cx="548640" cy="274320"/>
+          </a:xfrm>
+          <a:prstGeom prst="rect">
+            <a:avLst/>
+          </a:prstGeom>
+          <a:noFill/>
+        </p:spPr>
+        <p:txBody>
+          <a:bodyPr wrap="square" anchor="t" lIns="0" rIns="0" tIns="0" bIns="0">
+            <a:spAutoFit/>
+          </a:bodyPr>
+          <a:lstStyle/>
+          <a:p>
+            <a:pPr algn="r"/>
+            <a:r>
+              <a:rPr sz="1000" b="1" i="0">
+                <a:solidFill>
+                  <a:srgbClr val="8F989D"/>
+                </a:solidFill>
+                <a:latin typeface="Calibri"/>
+              </a:rPr>
+              <a:t>10</a:t>
+            </a:r>
+          </a:p>
+        </p:txBody>
+      </p:sp>
+    </p:spTree>
+  </p:cSld>
+  <p:clrMapOvr>
+    <a:masterClrMapping/>
+  </p:clrMapOvr>
+</p:sld>
+</file>
+
+<file path=ppt/slides/slide11.xml><?xml version="1.0" encoding="utf-8"?>
+<p:sld xmlns:a="http://schemas.openxmlformats.org/drawingml/2006/main" xmlns:p="http://schemas.openxmlformats.org/presentationml/2006/main" xmlns:r="http://schemas.openxmlformats.org/officeDocument/2006/relationships">
+  <p:cSld>
+    <p:bg>
+      <p:bgPr>
+        <a:solidFill>
+          <a:srgbClr val="FFFFFF"/>
+        </a:solidFill>
+        <a:effectLst/>
+      </p:bgPr>
+    </p:bg>
+    <p:spTree>
+      <p:nvGrpSpPr>
+        <p:cNvPr id="1" name=""/>
+        <p:cNvGrpSpPr/>
+        <p:nvPr/>
+      </p:nvGrpSpPr>
+      <p:grpSpPr/>
+      <p:sp>
+        <p:nvSpPr>
+          <p:cNvPr id="2" name="Rectangle 1"/>
+          <p:cNvSpPr/>
+          <p:nvPr/>
+        </p:nvSpPr>
+        <p:spPr>
+          <a:xfrm>
+            <a:off x="0" y="0"/>
+            <a:ext cx="12191695" cy="1188720"/>
+          </a:xfrm>
+          <a:prstGeom prst="rect">
+            <a:avLst/>
+          </a:prstGeom>
+          <a:solidFill>
+            <a:srgbClr val="0C2340"/>
+          </a:solidFill>
+          <a:ln>
+            <a:noFill/>
+          </a:ln>
+          <a:effectLst/>
+        </p:spPr>
+        <p:style>
+          <a:lnRef idx="1">
+            <a:schemeClr val="accent1"/>
+          </a:lnRef>
+          <a:fillRef idx="3">
+            <a:schemeClr val="accent1"/>
+          </a:fillRef>
+          <a:effectRef idx="2">
+            <a:schemeClr val="accent1"/>
+          </a:effectRef>
+          <a:fontRef idx="minor">
+            <a:schemeClr val="lt1"/>
+          </a:fontRef>
+        </p:style>
+        <p:txBody>
+          <a:bodyPr rtlCol="0" anchor="ctr"/>
+          <a:lstStyle/>
+          <a:p>
+            <a:pPr algn="ctr"/>
+          </a:p>
+        </p:txBody>
+      </p:sp>
+      <p:sp>
+        <p:nvSpPr>
+          <p:cNvPr id="3" name="TextBox 2"/>
+          <p:cNvSpPr txBox="1"/>
+          <p:nvPr/>
+        </p:nvSpPr>
+        <p:spPr>
+          <a:xfrm>
+            <a:off x="640080" y="0"/>
+            <a:ext cx="9082735" cy="1188720"/>
+          </a:xfrm>
+          <a:prstGeom prst="rect">
+            <a:avLst/>
+          </a:prstGeom>
+          <a:noFill/>
+        </p:spPr>
+        <p:txBody>
+          <a:bodyPr wrap="square" anchor="ctr" lIns="0" rIns="0" tIns="0" bIns="0">
+            <a:spAutoFit/>
+          </a:bodyPr>
+          <a:lstStyle/>
+          <a:p>
+            <a:pPr algn="ctr"/>
+            <a:r>
+              <a:rPr sz="2600" b="1" i="0">
+                <a:solidFill>
+                  <a:srgbClr val="FFFFFF"/>
+                </a:solidFill>
+                <a:latin typeface="Calibri"/>
+              </a:rPr>
+              <a:t>Las dos ACAs: qué se entrega y qué se mira</a:t>
+            </a:r>
+          </a:p>
+        </p:txBody>
+      </p:sp>
+      <p:graphicFrame>
+        <p:nvGraphicFramePr>
+          <p:cNvPr id="4" name="Table 3"/>
+          <p:cNvGraphicFramePr>
+            <a:graphicFrameLocks noGrp="1"/>
+          </p:cNvGraphicFramePr>
+          <p:nvPr/>
+        </p:nvGraphicFramePr>
+        <p:xfrm>
+          <a:off x="640080" y="1691639"/>
+          <a:ext cx="10911533" cy="1508760"/>
+        </p:xfrm>
+        <a:graphic>
+          <a:graphicData uri="http://schemas.openxmlformats.org/drawingml/2006/table">
+            <a:tbl>
+              <a:tblPr>
+                <a:tableStyleId>{2D5ABB26-0587-4C30-8999-92F81FD0307C}</a:tableStyleId>
+              </a:tblPr>
+              <a:tblGrid>
+                <a:gridCol w="2017258"/>
+                <a:gridCol w="2934194"/>
+                <a:gridCol w="2934194"/>
+                <a:gridCol w="3025887"/>
+              </a:tblGrid>
+              <a:tr h="502920">
+                <a:tc>
+                  <a:txBody>
+                    <a:bodyPr/>
+                    <a:lstStyle/>
+                    <a:p>
+                      <a:pPr algn="l"/>
+                      <a:r>
+                        <a:rPr sz="1300" b="1" i="0">
+                          <a:solidFill>
+                            <a:srgbClr val="FFFFFF"/>
+                          </a:solidFill>
+                          <a:latin typeface="Calibri"/>
+                        </a:rPr>
+                        <a:t>ACA</a:t>
+                      </a:r>
+                    </a:p>
+                  </a:txBody>
+                  <a:tcPr anchor="ctr" marL="109728" marR="91440" marT="36576" marB="36576">
+                    <a:solidFill>
+                      <a:srgbClr val="0C2340"/>
+                    </a:solidFill>
+                  </a:tcPr>
+                </a:tc>
+                <a:tc>
+                  <a:txBody>
+                    <a:bodyPr/>
+                    <a:lstStyle/>
+                    <a:p>
+                      <a:pPr algn="l"/>
+                      <a:r>
+                        <a:rPr sz="1300" b="1" i="0">
+                          <a:solidFill>
+                            <a:srgbClr val="FFFFFF"/>
+                          </a:solidFill>
+                          <a:latin typeface="Calibri"/>
+                        </a:rPr>
+                        <a:t>Qué entrega</a:t>
+                      </a:r>
+                    </a:p>
+                  </a:txBody>
+                  <a:tcPr anchor="ctr" marL="109728" marR="91440" marT="36576" marB="36576">
+                    <a:solidFill>
+                      <a:srgbClr val="0C2340"/>
+                    </a:solidFill>
+                  </a:tcPr>
+                </a:tc>
+                <a:tc>
+                  <a:txBody>
+                    <a:bodyPr/>
+                    <a:lstStyle/>
+                    <a:p>
+                      <a:pPr algn="l"/>
+                      <a:r>
+                        <a:rPr sz="1300" b="1" i="0">
+                          <a:solidFill>
+                            <a:srgbClr val="FFFFFF"/>
+                          </a:solidFill>
+                          <a:latin typeface="Calibri"/>
+                        </a:rPr>
+                        <a:t>Qué mira el Docente / el jurado</a:t>
+                      </a:r>
+                    </a:p>
+                  </a:txBody>
+                  <a:tcPr anchor="ctr" marL="109728" marR="91440" marT="36576" marB="36576">
+                    <a:solidFill>
+                      <a:srgbClr val="0C2340"/>
+                    </a:solidFill>
+                  </a:tcPr>
+                </a:tc>
+                <a:tc>
+                  <a:txBody>
+                    <a:bodyPr/>
+                    <a:lstStyle/>
+                    <a:p>
+                      <a:pPr algn="l"/>
+                      <a:r>
+                        <a:rPr sz="1300" b="1" i="0">
+                          <a:solidFill>
+                            <a:srgbClr val="FFFFFF"/>
+                          </a:solidFill>
+                          <a:latin typeface="Calibri"/>
+                        </a:rPr>
+                        <a:t>Flojo vs. bueno</a:t>
+                      </a:r>
+                    </a:p>
+                  </a:txBody>
+                  <a:tcPr anchor="ctr" marL="109728" marR="91440" marT="36576" marB="36576">
+                    <a:solidFill>
+                      <a:srgbClr val="0C2340"/>
+                    </a:solidFill>
+                  </a:tcPr>
+                </a:tc>
+              </a:tr>
+              <a:tr h="502920">
+                <a:tc>
+                  <a:txBody>
+                    <a:bodyPr/>
+                    <a:lstStyle/>
+                    <a:p>
+                      <a:pPr algn="l"/>
+                      <a:r>
+                        <a:rPr sz="1100" b="1" i="0">
+                          <a:solidFill>
+                            <a:srgbClr val="2B2B2B"/>
+                          </a:solidFill>
+                          <a:latin typeface="Calibri"/>
+                        </a:rPr>
+                        <a:t>ACA 1 · EV05</a:t>
+                      </a:r>
+                      <a:r>
+                        <a:rPr sz="1100" b="0" i="0">
+                          <a:solidFill>
+                            <a:srgbClr val="2B2B2B"/>
+                          </a:solidFill>
+                          <a:latin typeface="Calibri"/>
+                        </a:rPr>
+                        <a:t> (proceso académico)</a:t>
+                      </a:r>
+                    </a:p>
+                  </a:txBody>
+                  <a:tcPr anchor="ctr" marL="109728" marR="91440" marT="36576" marB="36576">
+                    <a:solidFill>
+                      <a:srgbClr val="FFFFFF"/>
+                    </a:solidFill>
+                  </a:tcPr>
+                </a:tc>
+                <a:tc>
+                  <a:txBody>
+                    <a:bodyPr/>
+                    <a:lstStyle/>
+                    <a:p>
+                      <a:pPr algn="l"/>
+                      <a:r>
+                        <a:rPr sz="1100" b="0" i="0">
+                          <a:solidFill>
+                            <a:srgbClr val="2B2B2B"/>
+                          </a:solidFill>
+                          <a:latin typeface="Calibri"/>
+                        </a:rPr>
+                        <a:t>El artículo y sus avances por sesión: introducción, marco, método, resultados, discusión y referencias</a:t>
+                      </a:r>
+                    </a:p>
+                  </a:txBody>
+                  <a:tcPr anchor="ctr" marL="109728" marR="91440" marT="36576" marB="36576">
+                    <a:solidFill>
+                      <a:srgbClr val="FFFFFF"/>
+                    </a:solidFill>
+                  </a:tcPr>
+                </a:tc>
+                <a:tc>
+                  <a:txBody>
+                    <a:bodyPr/>
+                    <a:lstStyle/>
+                    <a:p>
+                      <a:pPr algn="l"/>
+                      <a:r>
+                        <a:rPr sz="1100" b="0" i="0">
+                          <a:solidFill>
+                            <a:srgbClr val="2B2B2B"/>
+                          </a:solidFill>
+                          <a:latin typeface="Calibri"/>
+                        </a:rPr>
+                        <a:t>Coherencia de cabo a rabo (problema → pregunta → objetivos → método → resultados → discusión) y referencias realmente citadas en el cuerpo</a:t>
+                      </a:r>
+                    </a:p>
+                  </a:txBody>
+                  <a:tcPr anchor="ctr" marL="109728" marR="91440" marT="36576" marB="36576">
+                    <a:solidFill>
+                      <a:srgbClr val="FFFFFF"/>
+                    </a:solidFill>
+                  </a:tcPr>
+                </a:tc>
+                <a:tc>
+                  <a:txBody>
+                    <a:bodyPr/>
+                    <a:lstStyle/>
+                    <a:p>
+                      <a:pPr algn="l"/>
+                      <a:r>
+                        <a:rPr sz="1100" b="0" i="0">
+                          <a:solidFill>
+                            <a:srgbClr val="2B2B2B"/>
+                          </a:solidFill>
+                          <a:latin typeface="Calibri"/>
+                        </a:rPr>
+                        <a:t>Flojo: 50 referencias listadas y ninguna citada; resultados que no responden la pregunta · Bueno: cada sección se apoya en la anterior y la discusión dialoga con autores</a:t>
+                      </a:r>
+                    </a:p>
+                  </a:txBody>
+                  <a:tcPr anchor="ctr" marL="109728" marR="91440" marT="36576" marB="36576">
+                    <a:solidFill>
+                      <a:srgbClr val="FFFFFF"/>
+                    </a:solidFill>
+                  </a:tcPr>
+                </a:tc>
+              </a:tr>
+              <a:tr h="502920">
+                <a:tc>
+                  <a:txBody>
+                    <a:bodyPr/>
+                    <a:lstStyle/>
+                    <a:p>
+                      <a:pPr algn="l"/>
+                      <a:r>
+                        <a:rPr sz="1100" b="1" i="0">
+                          <a:solidFill>
+                            <a:srgbClr val="2B2B2B"/>
+                          </a:solidFill>
+                          <a:latin typeface="Calibri"/>
+                        </a:rPr>
+                        <a:t>ACA 2 · EXAM</a:t>
+                      </a:r>
+                      <a:r>
+                        <a:rPr sz="1100" b="0" i="0">
+                          <a:solidFill>
+                            <a:srgbClr val="2B2B2B"/>
+                          </a:solidFill>
+                          <a:latin typeface="Calibri"/>
+                        </a:rPr>
+                        <a:t> (sustentación)</a:t>
+                      </a:r>
+                    </a:p>
+                  </a:txBody>
+                  <a:tcPr anchor="ctr" marL="109728" marR="91440" marT="36576" marB="36576">
+                    <a:solidFill>
+                      <a:srgbClr val="F2F2F2"/>
+                    </a:solidFill>
+                  </a:tcPr>
+                </a:tc>
+                <a:tc>
+                  <a:txBody>
+                    <a:bodyPr/>
+                    <a:lstStyle/>
+                    <a:p>
+                      <a:pPr algn="l"/>
+                      <a:r>
+                        <a:rPr sz="1100" b="0" i="0">
+                          <a:solidFill>
+                            <a:srgbClr val="2B2B2B"/>
+                          </a:solidFill>
+                          <a:latin typeface="Calibri"/>
+                        </a:rPr>
+                        <a:t>Defensa oral ante jurados, con el apoyo visual y las evidencias que pida el programa</a:t>
+                      </a:r>
+                    </a:p>
+                  </a:txBody>
+                  <a:tcPr anchor="ctr" marL="109728" marR="91440" marT="36576" marB="36576">
+                    <a:solidFill>
+                      <a:srgbClr val="F2F2F2"/>
+                    </a:solidFill>
+                  </a:tcPr>
+                </a:tc>
+                <a:tc>
+                  <a:txBody>
+                    <a:bodyPr/>
+                    <a:lstStyle/>
+                    <a:p>
+                      <a:pPr algn="l"/>
+                      <a:r>
+                        <a:rPr sz="1100" b="0" i="0">
+                          <a:solidFill>
+                            <a:srgbClr val="2B2B2B"/>
+                          </a:solidFill>
+                          <a:latin typeface="Calibri"/>
+                        </a:rPr>
+                        <a:t>Dominio del propio trabajo: que explique decisiones, límites y hallazgos sin leer</a:t>
+                      </a:r>
+                    </a:p>
+                  </a:txBody>
+                  <a:tcPr anchor="ctr" marL="109728" marR="91440" marT="36576" marB="36576">
+                    <a:solidFill>
+                      <a:srgbClr val="F2F2F2"/>
+                    </a:solidFill>
+                  </a:tcPr>
+                </a:tc>
+                <a:tc>
+                  <a:txBody>
+                    <a:bodyPr/>
+                    <a:lstStyle/>
+                    <a:p>
+                      <a:pPr algn="l"/>
+                      <a:r>
+                        <a:rPr sz="1100" b="0" i="0">
+                          <a:solidFill>
+                            <a:srgbClr val="2B2B2B"/>
+                          </a:solidFill>
+                          <a:latin typeface="Calibri"/>
+                        </a:rPr>
+                        <a:t>Flojo: leer diapositivas y no saber por qué eligió ese método · Bueno: contar el trabajo en 10 minutos y responder preguntas difíciles con calma</a:t>
+                      </a:r>
+                    </a:p>
+                  </a:txBody>
+                  <a:tcPr anchor="ctr" marL="109728" marR="91440" marT="36576" marB="36576">
+                    <a:solidFill>
+                      <a:srgbClr val="F2F2F2"/>
+                    </a:solidFill>
+                  </a:tcPr>
+                </a:tc>
+              </a:tr>
+            </a:tbl>
+          </a:graphicData>
+        </a:graphic>
+      </p:graphicFrame>
+      <p:sp>
+        <p:nvSpPr>
+          <p:cNvPr id="5" name="TextBox 4"/>
+          <p:cNvSpPr txBox="1"/>
+          <p:nvPr/>
+        </p:nvSpPr>
+        <p:spPr>
+          <a:xfrm>
+            <a:off x="640080" y="3337560"/>
+            <a:ext cx="10911535" cy="548640"/>
+          </a:xfrm>
+          <a:prstGeom prst="rect">
+            <a:avLst/>
+          </a:prstGeom>
+          <a:noFill/>
+        </p:spPr>
+        <p:txBody>
+          <a:bodyPr wrap="square" anchor="t" lIns="0" rIns="0" tIns="0" bIns="0">
+            <a:spAutoFit/>
+          </a:bodyPr>
+          <a:lstStyle/>
+          <a:p>
+            <a:r>
+              <a:rPr sz="1200" b="0" i="1">
+                <a:solidFill>
+                  <a:srgbClr val="2B2B2B"/>
+                </a:solidFill>
+                <a:latin typeface="Calibri"/>
+              </a:rPr>
+              <a:t>Enunciados completos, criterios y </a:t>
+            </a:r>
+            <a:r>
+              <a:rPr sz="1200" b="1" i="1">
+                <a:solidFill>
+                  <a:srgbClr val="2B2B2B"/>
+                </a:solidFill>
+                <a:latin typeface="Calibri"/>
+              </a:rPr>
+              <a:t>fechas exactas</a:t>
+            </a:r>
+            <a:r>
+              <a:rPr sz="1200" b="0" i="1">
+                <a:solidFill>
+                  <a:srgbClr val="2B2B2B"/>
+                </a:solidFill>
+                <a:latin typeface="Calibri"/>
+              </a:rPr>
+              <a:t> por grupo: `Clases/Recursos/ACAs/` y CDigital. La defensa pesa tanto como todo el trabajo escrito: no se improvisa.</a:t>
+            </a:r>
+          </a:p>
+        </p:txBody>
+      </p:sp>
+      <p:sp>
+        <p:nvSpPr>
+          <p:cNvPr id="6" name="TextBox 5"/>
+          <p:cNvSpPr txBox="1"/>
+          <p:nvPr/>
+        </p:nvSpPr>
+        <p:spPr>
+          <a:xfrm>
+            <a:off x="2194560" y="6446520"/>
+            <a:ext cx="5943600" cy="274320"/>
+          </a:xfrm>
+          <a:prstGeom prst="rect">
+            <a:avLst/>
+          </a:prstGeom>
+          <a:noFill/>
+        </p:spPr>
+        <p:txBody>
+          <a:bodyPr wrap="square" anchor="t" lIns="0" rIns="0" tIns="0" bIns="0">
+            <a:spAutoFit/>
+          </a:bodyPr>
+          <a:lstStyle/>
+          <a:p>
+            <a:pPr algn="l"/>
+            <a:r>
+              <a:rPr sz="1000" b="1" i="0">
+                <a:solidFill>
+                  <a:srgbClr val="8F989D"/>
+                </a:solidFill>
+                <a:latin typeface="Calibri"/>
+              </a:rPr>
+              <a:t>Inicio 5:10 pm</a:t>
+            </a:r>
+          </a:p>
+        </p:txBody>
+      </p:sp>
+      <p:sp>
+        <p:nvSpPr>
+          <p:cNvPr id="7" name="TextBox 6"/>
+          <p:cNvSpPr txBox="1"/>
+          <p:nvPr/>
+        </p:nvSpPr>
+        <p:spPr>
+          <a:xfrm>
+            <a:off x="11094415" y="6446520"/>
+            <a:ext cx="548640" cy="274320"/>
+          </a:xfrm>
+          <a:prstGeom prst="rect">
+            <a:avLst/>
+          </a:prstGeom>
+          <a:noFill/>
+        </p:spPr>
+        <p:txBody>
+          <a:bodyPr wrap="square" anchor="t" lIns="0" rIns="0" tIns="0" bIns="0">
+            <a:spAutoFit/>
+          </a:bodyPr>
+          <a:lstStyle/>
+          <a:p>
+            <a:pPr algn="r"/>
+            <a:r>
+              <a:rPr sz="1000" b="1" i="0">
+                <a:solidFill>
+                  <a:srgbClr val="8F989D"/>
+                </a:solidFill>
+                <a:latin typeface="Calibri"/>
+              </a:rPr>
+              <a:t>11</a:t>
+            </a:r>
+          </a:p>
+        </p:txBody>
+      </p:sp>
+    </p:spTree>
+  </p:cSld>
+  <p:clrMapOvr>
+    <a:masterClrMapping/>
+  </p:clrMapOvr>
+</p:sld>
+</file>
+
+<file path=ppt/slides/slide12.xml><?xml version="1.0" encoding="utf-8"?>
+<p:sld xmlns:a="http://schemas.openxmlformats.org/drawingml/2006/main" xmlns:p="http://schemas.openxmlformats.org/presentationml/2006/main" xmlns:r="http://schemas.openxmlformats.org/officeDocument/2006/relationships">
+  <p:cSld>
+    <p:bg>
+      <p:bgPr>
+        <a:solidFill>
+          <a:srgbClr val="FFFFFF"/>
+        </a:solidFill>
+        <a:effectLst/>
+      </p:bgPr>
+    </p:bg>
+    <p:spTree>
+      <p:nvGrpSpPr>
+        <p:cNvPr id="1" name=""/>
+        <p:cNvGrpSpPr/>
+        <p:nvPr/>
+      </p:nvGrpSpPr>
+      <p:grpSpPr/>
+      <p:sp>
+        <p:nvSpPr>
+          <p:cNvPr id="2" name="Rectangle 1"/>
+          <p:cNvSpPr/>
+          <p:nvPr/>
+        </p:nvSpPr>
+        <p:spPr>
+          <a:xfrm>
+            <a:off x="0" y="0"/>
+            <a:ext cx="12191695" cy="1188720"/>
+          </a:xfrm>
+          <a:prstGeom prst="rect">
+            <a:avLst/>
+          </a:prstGeom>
+          <a:solidFill>
+            <a:srgbClr val="0C2340"/>
+          </a:solidFill>
+          <a:ln>
+            <a:noFill/>
+          </a:ln>
+          <a:effectLst/>
+        </p:spPr>
+        <p:style>
+          <a:lnRef idx="1">
+            <a:schemeClr val="accent1"/>
+          </a:lnRef>
+          <a:fillRef idx="3">
+            <a:schemeClr val="accent1"/>
+          </a:fillRef>
+          <a:effectRef idx="2">
+            <a:schemeClr val="accent1"/>
+          </a:effectRef>
+          <a:fontRef idx="minor">
+            <a:schemeClr val="lt1"/>
+          </a:fontRef>
+        </p:style>
+        <p:txBody>
+          <a:bodyPr rtlCol="0" anchor="ctr"/>
+          <a:lstStyle/>
+          <a:p>
+            <a:pPr algn="ctr"/>
+          </a:p>
+        </p:txBody>
+      </p:sp>
+      <p:sp>
+        <p:nvSpPr>
+          <p:cNvPr id="3" name="TextBox 2"/>
+          <p:cNvSpPr txBox="1"/>
+          <p:nvPr/>
+        </p:nvSpPr>
+        <p:spPr>
+          <a:xfrm>
+            <a:off x="640080" y="0"/>
+            <a:ext cx="9082735" cy="1188720"/>
+          </a:xfrm>
+          <a:prstGeom prst="rect">
+            <a:avLst/>
+          </a:prstGeom>
+          <a:noFill/>
+        </p:spPr>
+        <p:txBody>
+          <a:bodyPr wrap="square" anchor="ctr" lIns="0" rIns="0" tIns="0" bIns="0">
+            <a:spAutoFit/>
+          </a:bodyPr>
+          <a:lstStyle/>
+          <a:p>
+            <a:pPr algn="ctr"/>
+            <a:r>
+              <a:rPr sz="2600" b="1" i="0">
+                <a:solidFill>
+                  <a:srgbClr val="FFFFFF"/>
+                </a:solidFill>
+                <a:latin typeface="Calibri"/>
+              </a:rPr>
+              <a:t>Cómo se entrega, paso a paso</a:t>
+            </a:r>
+          </a:p>
+        </p:txBody>
+      </p:sp>
+      <p:sp>
+        <p:nvSpPr>
+          <p:cNvPr id="4" name="TextBox 3"/>
+          <p:cNvSpPr txBox="1"/>
+          <p:nvPr/>
+        </p:nvSpPr>
+        <p:spPr>
+          <a:xfrm>
+            <a:off x="640080" y="1691639"/>
+            <a:ext cx="10911535" cy="4617720"/>
+          </a:xfrm>
+          <a:prstGeom prst="rect">
+            <a:avLst/>
+          </a:prstGeom>
+          <a:noFill/>
+        </p:spPr>
+        <p:txBody>
+          <a:bodyPr wrap="square" anchor="t" lIns="0" rIns="0" tIns="0" bIns="0">
+            <a:spAutoFit/>
+          </a:bodyPr>
+          <a:lstStyle/>
+          <a:p>
+            <a:pPr>
+              <a:spcAft>
+                <a:spcPts val="1000"/>
+              </a:spcAft>
+            </a:pPr>
+            <a:r>
+              <a:rPr sz="1600" b="0" i="0">
+                <a:solidFill>
+                  <a:srgbClr val="2B2B2B"/>
+                </a:solidFill>
+                <a:latin typeface="Calibri"/>
+              </a:rPr>
+              <a:t>–   </a:t>
+            </a:r>
+            <a:r>
+              <a:rPr sz="1600" b="1" i="0">
+                <a:solidFill>
+                  <a:srgbClr val="2B2B2B"/>
+                </a:solidFill>
+                <a:latin typeface="Calibri"/>
+              </a:rPr>
+              <a:t>1.</a:t>
+            </a:r>
+            <a:r>
+              <a:rPr sz="1600" b="0" i="0">
+                <a:solidFill>
+                  <a:srgbClr val="2B2B2B"/>
+                </a:solidFill>
+                <a:latin typeface="Calibri"/>
+              </a:rPr>
+              <a:t> Escriba en </a:t>
+            </a:r>
+            <a:r>
+              <a:rPr sz="1600" b="1" i="0">
+                <a:solidFill>
+                  <a:srgbClr val="2B2B2B"/>
+                </a:solidFill>
+                <a:latin typeface="Calibri"/>
+              </a:rPr>
+              <a:t>Google Docs</a:t>
+            </a:r>
+            <a:r>
+              <a:rPr sz="1600" b="0" i="0">
+                <a:solidFill>
+                  <a:srgbClr val="2B2B2B"/>
+                </a:solidFill>
+                <a:latin typeface="Calibri"/>
+              </a:rPr>
+              <a:t> sobre la </a:t>
+            </a:r>
+            <a:r>
+              <a:rPr sz="1600" b="1" i="0">
+                <a:solidFill>
+                  <a:srgbClr val="2B2B2B"/>
+                </a:solidFill>
+                <a:latin typeface="Calibri"/>
+              </a:rPr>
+              <a:t>plantilla APA CUN</a:t>
+            </a:r>
+            <a:r>
+              <a:rPr sz="1600" b="0" i="0">
+                <a:solidFill>
+                  <a:srgbClr val="2B2B2B"/>
+                </a:solidFill>
+                <a:latin typeface="Calibri"/>
+              </a:rPr>
+              <a:t> de `Clases/Recursos/` (*Archivo → Abrir con → Documentos de Google*).</a:t>
+            </a:r>
+          </a:p>
+          <a:p>
+            <a:pPr>
+              <a:spcAft>
+                <a:spcPts val="1000"/>
+              </a:spcAft>
+            </a:pPr>
+            <a:r>
+              <a:rPr sz="1600" b="0" i="0">
+                <a:solidFill>
+                  <a:srgbClr val="2B2B2B"/>
+                </a:solidFill>
+                <a:latin typeface="Calibri"/>
+              </a:rPr>
+              <a:t>–   </a:t>
+            </a:r>
+            <a:r>
+              <a:rPr sz="1600" b="1" i="0">
+                <a:solidFill>
+                  <a:srgbClr val="2B2B2B"/>
+                </a:solidFill>
+                <a:latin typeface="Calibri"/>
+              </a:rPr>
+              <a:t>2.</a:t>
+            </a:r>
+            <a:r>
+              <a:rPr sz="1600" b="0" i="0">
+                <a:solidFill>
+                  <a:srgbClr val="2B2B2B"/>
+                </a:solidFill>
+                <a:latin typeface="Calibri"/>
+              </a:rPr>
+              <a:t> Trabaje </a:t>
+            </a:r>
+            <a:r>
+              <a:rPr sz="1600" b="1" i="0">
+                <a:solidFill>
+                  <a:srgbClr val="2B2B2B"/>
+                </a:solidFill>
+                <a:latin typeface="Calibri"/>
+              </a:rPr>
+              <a:t>siempre en el mismo documento</a:t>
+            </a:r>
+            <a:r>
+              <a:rPr sz="1600" b="0" i="0">
+                <a:solidFill>
+                  <a:srgbClr val="2B2B2B"/>
+                </a:solidFill>
+                <a:latin typeface="Calibri"/>
+              </a:rPr>
+              <a:t>: el artículo es un texto que crece, no una carpeta de archivos sueltos.</a:t>
+            </a:r>
+          </a:p>
+          <a:p>
+            <a:pPr>
+              <a:spcAft>
+                <a:spcPts val="1000"/>
+              </a:spcAft>
+            </a:pPr>
+            <a:r>
+              <a:rPr sz="1600" b="0" i="0">
+                <a:solidFill>
+                  <a:srgbClr val="2B2B2B"/>
+                </a:solidFill>
+                <a:latin typeface="Calibri"/>
+              </a:rPr>
+              <a:t>–   </a:t>
+            </a:r>
+            <a:r>
+              <a:rPr sz="1600" b="1" i="0">
+                <a:solidFill>
+                  <a:srgbClr val="2B2B2B"/>
+                </a:solidFill>
+                <a:latin typeface="Calibri"/>
+              </a:rPr>
+              <a:t>3.</a:t>
+            </a:r>
+            <a:r>
+              <a:rPr sz="1600" b="0" i="0">
+                <a:solidFill>
+                  <a:srgbClr val="2B2B2B"/>
+                </a:solidFill>
+                <a:latin typeface="Calibri"/>
+              </a:rPr>
+              <a:t> Nombre cada entrega `SNN_Tema_Apellido`. Ejemplo: `S03_Introduccion_Perez`.</a:t>
+            </a:r>
+          </a:p>
+          <a:p>
+            <a:pPr>
+              <a:spcAft>
+                <a:spcPts val="1000"/>
+              </a:spcAft>
+            </a:pPr>
+            <a:r>
+              <a:rPr sz="1600" b="0" i="0">
+                <a:solidFill>
+                  <a:srgbClr val="2B2B2B"/>
+                </a:solidFill>
+                <a:latin typeface="Calibri"/>
+              </a:rPr>
+              <a:t>–   </a:t>
+            </a:r>
+            <a:r>
+              <a:rPr sz="1600" b="1" i="0">
+                <a:solidFill>
+                  <a:srgbClr val="2B2B2B"/>
+                </a:solidFill>
+                <a:latin typeface="Calibri"/>
+              </a:rPr>
+              <a:t>4.</a:t>
+            </a:r>
+            <a:r>
+              <a:rPr sz="1600" b="0" i="0">
+                <a:solidFill>
+                  <a:srgbClr val="2B2B2B"/>
+                </a:solidFill>
+                <a:latin typeface="Calibri"/>
+              </a:rPr>
+              <a:t> Entregue en </a:t>
+            </a:r>
+            <a:r>
+              <a:rPr sz="1600" b="1" i="0">
+                <a:solidFill>
+                  <a:srgbClr val="2B2B2B"/>
+                </a:solidFill>
+                <a:latin typeface="Calibri"/>
+              </a:rPr>
+              <a:t>PDF</a:t>
+            </a:r>
+            <a:r>
+              <a:rPr sz="1600" b="0" i="0">
+                <a:solidFill>
+                  <a:srgbClr val="2B2B2B"/>
+                </a:solidFill>
+                <a:latin typeface="Calibri"/>
+              </a:rPr>
+              <a:t> (*Archivo → Descargar → PDF*), salvo que el Docente pida el enlace del documento.</a:t>
+            </a:r>
+          </a:p>
+          <a:p>
+            <a:pPr>
+              <a:spcAft>
+                <a:spcPts val="1000"/>
+              </a:spcAft>
+            </a:pPr>
+            <a:r>
+              <a:rPr sz="1600" b="0" i="0">
+                <a:solidFill>
+                  <a:srgbClr val="2B2B2B"/>
+                </a:solidFill>
+                <a:latin typeface="Calibri"/>
+              </a:rPr>
+              <a:t>–   </a:t>
+            </a:r>
+            <a:r>
+              <a:rPr sz="1600" b="1" i="0">
+                <a:solidFill>
+                  <a:srgbClr val="2B2B2B"/>
+                </a:solidFill>
+                <a:latin typeface="Calibri"/>
+              </a:rPr>
+              <a:t>5.</a:t>
+            </a:r>
+            <a:r>
+              <a:rPr sz="1600" b="0" i="0">
+                <a:solidFill>
+                  <a:srgbClr val="2B2B2B"/>
+                </a:solidFill>
+                <a:latin typeface="Calibri"/>
+              </a:rPr>
+              <a:t> Suba a </a:t>
+            </a:r>
+            <a:r>
+              <a:rPr sz="1600" b="1" i="0">
+                <a:solidFill>
+                  <a:srgbClr val="2B2B2B"/>
+                </a:solidFill>
+                <a:latin typeface="Calibri"/>
+              </a:rPr>
+              <a:t>CDigital</a:t>
+            </a:r>
+            <a:r>
+              <a:rPr sz="1600" b="0" i="0">
+                <a:solidFill>
+                  <a:srgbClr val="2B2B2B"/>
+                </a:solidFill>
+                <a:latin typeface="Calibri"/>
+              </a:rPr>
+              <a:t> en el espacio de la sesión: [URL CDigital — campus del curso pendiente]</a:t>
+            </a:r>
+          </a:p>
+          <a:p>
+            <a:pPr>
+              <a:spcAft>
+                <a:spcPts val="1000"/>
+              </a:spcAft>
+            </a:pPr>
+            <a:r>
+              <a:rPr sz="1600" b="0" i="0">
+                <a:solidFill>
+                  <a:srgbClr val="2B2B2B"/>
+                </a:solidFill>
+                <a:latin typeface="Calibri"/>
+              </a:rPr>
+              <a:t>–   </a:t>
+            </a:r>
+            <a:r>
+              <a:rPr sz="1600" b="1" i="0">
+                <a:solidFill>
+                  <a:srgbClr val="2B2B2B"/>
+                </a:solidFill>
+                <a:latin typeface="Calibri"/>
+              </a:rPr>
+              <a:t>6.</a:t>
+            </a:r>
+            <a:r>
+              <a:rPr sz="1600" b="0" i="0">
+                <a:solidFill>
+                  <a:srgbClr val="2B2B2B"/>
+                </a:solidFill>
+                <a:latin typeface="Calibri"/>
+              </a:rPr>
+              <a:t> Verifique el estado: </a:t>
+            </a:r>
+            <a:r>
+              <a:rPr sz="1600" b="1" i="0">
+                <a:solidFill>
+                  <a:srgbClr val="2B2B2B"/>
+                </a:solidFill>
+                <a:latin typeface="Calibri"/>
+              </a:rPr>
+              <a:t>subido no es entregado</a:t>
+            </a:r>
+            <a:r>
+              <a:rPr sz="1600" b="0" i="0">
+                <a:solidFill>
+                  <a:srgbClr val="2B2B2B"/>
+                </a:solidFill>
+                <a:latin typeface="Calibri"/>
+              </a:rPr>
+              <a:t>. Guarde la captura del envío si el campus lo permite.</a:t>
+            </a:r>
+          </a:p>
+          <a:p>
+            <a:pPr>
+              <a:spcAft>
+                <a:spcPts val="1000"/>
+              </a:spcAft>
+            </a:pPr>
+            <a:r>
+              <a:rPr sz="1600" b="0" i="0">
+                <a:solidFill>
+                  <a:srgbClr val="2B2B2B"/>
+                </a:solidFill>
+                <a:latin typeface="Calibri"/>
+              </a:rPr>
+              <a:t>–   </a:t>
+            </a:r>
+            <a:r>
+              <a:rPr sz="1600" b="1" i="0">
+                <a:solidFill>
+                  <a:srgbClr val="2B2B2B"/>
+                </a:solidFill>
+                <a:latin typeface="Calibri"/>
+              </a:rPr>
+              <a:t>Si entrega tarde:</a:t>
+            </a:r>
+            <a:r>
+              <a:rPr sz="1600" b="0" i="0">
+                <a:solidFill>
+                  <a:srgbClr val="2B2B2B"/>
+                </a:solidFill>
+                <a:latin typeface="Calibri"/>
+              </a:rPr>
+              <a:t> avise </a:t>
+            </a:r>
+            <a:r>
+              <a:rPr sz="1600" b="1" i="0">
+                <a:solidFill>
+                  <a:srgbClr val="2B2B2B"/>
+                </a:solidFill>
+                <a:latin typeface="Calibri"/>
+              </a:rPr>
+              <a:t>antes</a:t>
+            </a:r>
+            <a:r>
+              <a:rPr sz="1600" b="0" i="0">
+                <a:solidFill>
+                  <a:srgbClr val="2B2B2B"/>
+                </a:solidFill>
+                <a:latin typeface="Calibri"/>
+              </a:rPr>
+              <a:t> del cierre. Se recibe, pero se califica lo que exista dentro del plazo.</a:t>
+            </a:r>
+          </a:p>
+          <a:p>
+            <a:pPr>
+              <a:spcAft>
+                <a:spcPts val="1000"/>
+              </a:spcAft>
+            </a:pPr>
+            <a:r>
+              <a:rPr sz="1600" b="0" i="0">
+                <a:solidFill>
+                  <a:srgbClr val="2B2B2B"/>
+                </a:solidFill>
+                <a:latin typeface="Calibri"/>
+              </a:rPr>
+              <a:t>–   </a:t>
+            </a:r>
+            <a:r>
+              <a:rPr sz="1600" b="1" i="0">
+                <a:solidFill>
+                  <a:srgbClr val="2B2B2B"/>
+                </a:solidFill>
+                <a:latin typeface="Calibri"/>
+              </a:rPr>
+              <a:t>Recepción y cierre varían por grupo.</a:t>
+            </a:r>
+            <a:r>
+              <a:rPr sz="1600" b="0" i="0">
+                <a:solidFill>
+                  <a:srgbClr val="2B2B2B"/>
+                </a:solidFill>
+                <a:latin typeface="Calibri"/>
+              </a:rPr>
+              <a:t> Revise el suyo en la Presentación del Curso y anótelo hoy en su calendario.</a:t>
+            </a:r>
+          </a:p>
+        </p:txBody>
+      </p:sp>
+      <p:sp>
+        <p:nvSpPr>
+          <p:cNvPr id="5" name="TextBox 4"/>
+          <p:cNvSpPr txBox="1"/>
+          <p:nvPr/>
+        </p:nvSpPr>
+        <p:spPr>
+          <a:xfrm>
+            <a:off x="2194560" y="6446520"/>
+            <a:ext cx="5943600" cy="274320"/>
+          </a:xfrm>
+          <a:prstGeom prst="rect">
+            <a:avLst/>
+          </a:prstGeom>
+          <a:noFill/>
+        </p:spPr>
+        <p:txBody>
+          <a:bodyPr wrap="square" anchor="t" lIns="0" rIns="0" tIns="0" bIns="0">
+            <a:spAutoFit/>
+          </a:bodyPr>
+          <a:lstStyle/>
+          <a:p>
+            <a:pPr algn="l"/>
+            <a:r>
+              <a:rPr sz="1000" b="1" i="0">
+                <a:solidFill>
+                  <a:srgbClr val="8F989D"/>
+                </a:solidFill>
+                <a:latin typeface="Calibri"/>
+              </a:rPr>
+              <a:t>Inicio 5:10 pm</a:t>
+            </a:r>
+          </a:p>
+        </p:txBody>
+      </p:sp>
+      <p:sp>
+        <p:nvSpPr>
+          <p:cNvPr id="6" name="TextBox 5"/>
+          <p:cNvSpPr txBox="1"/>
+          <p:nvPr/>
+        </p:nvSpPr>
+        <p:spPr>
+          <a:xfrm>
+            <a:off x="11094415" y="6446520"/>
+            <a:ext cx="548640" cy="274320"/>
+          </a:xfrm>
+          <a:prstGeom prst="rect">
+            <a:avLst/>
+          </a:prstGeom>
+          <a:noFill/>
+        </p:spPr>
+        <p:txBody>
+          <a:bodyPr wrap="square" anchor="t" lIns="0" rIns="0" tIns="0" bIns="0">
+            <a:spAutoFit/>
+          </a:bodyPr>
+          <a:lstStyle/>
+          <a:p>
+            <a:pPr algn="r"/>
+            <a:r>
+              <a:rPr sz="1000" b="1" i="0">
+                <a:solidFill>
+                  <a:srgbClr val="8F989D"/>
+                </a:solidFill>
+                <a:latin typeface="Calibri"/>
+              </a:rPr>
+              <a:t>12</a:t>
+            </a:r>
+          </a:p>
+        </p:txBody>
+      </p:sp>
+    </p:spTree>
+  </p:cSld>
+  <p:clrMapOvr>
+    <a:masterClrMapping/>
+  </p:clrMapOvr>
+</p:sld>
+</file>
+
+<file path=ppt/slides/slide13.xml><?xml version="1.0" encoding="utf-8"?>
+<p:sld xmlns:a="http://schemas.openxmlformats.org/drawingml/2006/main" xmlns:p="http://schemas.openxmlformats.org/presentationml/2006/main" xmlns:r="http://schemas.openxmlformats.org/officeDocument/2006/relationships">
+  <p:cSld>
+    <p:bg>
+      <p:bgPr>
+        <a:solidFill>
+          <a:srgbClr val="FFFFFF"/>
+        </a:solidFill>
+        <a:effectLst/>
+      </p:bgPr>
+    </p:bg>
+    <p:spTree>
+      <p:nvGrpSpPr>
+        <p:cNvPr id="1" name=""/>
+        <p:cNvGrpSpPr/>
+        <p:nvPr/>
+      </p:nvGrpSpPr>
+      <p:grpSpPr/>
+      <p:sp>
+        <p:nvSpPr>
+          <p:cNvPr id="2" name="Rectangle 1"/>
+          <p:cNvSpPr/>
+          <p:nvPr/>
+        </p:nvSpPr>
+        <p:spPr>
+          <a:xfrm>
+            <a:off x="0" y="0"/>
+            <a:ext cx="12191695" cy="1188720"/>
+          </a:xfrm>
+          <a:prstGeom prst="rect">
+            <a:avLst/>
+          </a:prstGeom>
+          <a:solidFill>
+            <a:srgbClr val="0C2340"/>
+          </a:solidFill>
+          <a:ln>
+            <a:noFill/>
+          </a:ln>
+          <a:effectLst/>
+        </p:spPr>
+        <p:style>
+          <a:lnRef idx="1">
+            <a:schemeClr val="accent1"/>
+          </a:lnRef>
+          <a:fillRef idx="3">
+            <a:schemeClr val="accent1"/>
+          </a:fillRef>
+          <a:effectRef idx="2">
+            <a:schemeClr val="accent1"/>
+          </a:effectRef>
+          <a:fontRef idx="minor">
+            <a:schemeClr val="lt1"/>
+          </a:fontRef>
+        </p:style>
+        <p:txBody>
+          <a:bodyPr rtlCol="0" anchor="ctr"/>
+          <a:lstStyle/>
+          <a:p>
+            <a:pPr algn="ctr"/>
+          </a:p>
+        </p:txBody>
+      </p:sp>
+      <p:sp>
+        <p:nvSpPr>
+          <p:cNvPr id="3" name="TextBox 2"/>
+          <p:cNvSpPr txBox="1"/>
+          <p:nvPr/>
+        </p:nvSpPr>
+        <p:spPr>
+          <a:xfrm>
+            <a:off x="640080" y="0"/>
+            <a:ext cx="9082735" cy="1188720"/>
+          </a:xfrm>
+          <a:prstGeom prst="rect">
+            <a:avLst/>
+          </a:prstGeom>
+          <a:noFill/>
+        </p:spPr>
+        <p:txBody>
+          <a:bodyPr wrap="square" anchor="ctr" lIns="0" rIns="0" tIns="0" bIns="0">
+            <a:spAutoFit/>
+          </a:bodyPr>
+          <a:lstStyle/>
+          <a:p>
+            <a:pPr algn="ctr"/>
+            <a:r>
+              <a:rPr sz="2600" b="1" i="0">
+                <a:solidFill>
+                  <a:srgbClr val="FFFFFF"/>
+                </a:solidFill>
+                <a:latin typeface="Calibri"/>
+              </a:rPr>
+              <a:t>Integridad académica: aquí sí pasa por antiplagio</a:t>
+            </a:r>
+          </a:p>
+        </p:txBody>
+      </p:sp>
+      <p:sp>
+        <p:nvSpPr>
+          <p:cNvPr id="4" name="TextBox 3"/>
+          <p:cNvSpPr txBox="1"/>
+          <p:nvPr/>
+        </p:nvSpPr>
+        <p:spPr>
+          <a:xfrm>
+            <a:off x="640080" y="1691639"/>
+            <a:ext cx="10911535" cy="4617720"/>
+          </a:xfrm>
+          <a:prstGeom prst="rect">
+            <a:avLst/>
+          </a:prstGeom>
+          <a:noFill/>
+        </p:spPr>
+        <p:txBody>
+          <a:bodyPr wrap="square" anchor="t" lIns="0" rIns="0" tIns="0" bIns="0">
+            <a:spAutoFit/>
+          </a:bodyPr>
+          <a:lstStyle/>
+          <a:p>
+            <a:pPr>
+              <a:spcAft>
+                <a:spcPts val="1000"/>
+              </a:spcAft>
+            </a:pPr>
+            <a:r>
+              <a:rPr sz="1600" b="0" i="0">
+                <a:solidFill>
+                  <a:srgbClr val="2B2B2B"/>
+                </a:solidFill>
+                <a:latin typeface="Calibri"/>
+              </a:rPr>
+              <a:t>–   Todo lo que no es suyo se </a:t>
+            </a:r>
+            <a:r>
+              <a:rPr sz="1600" b="1" i="0">
+                <a:solidFill>
+                  <a:srgbClr val="2B2B2B"/>
+                </a:solidFill>
+                <a:latin typeface="Calibri"/>
+              </a:rPr>
+              <a:t>cita en APA 7</a:t>
+            </a:r>
+            <a:r>
+              <a:rPr sz="1600" b="0" i="0">
+                <a:solidFill>
+                  <a:srgbClr val="2B2B2B"/>
+                </a:solidFill>
+                <a:latin typeface="Calibri"/>
+              </a:rPr>
+              <a:t>: ideas, datos, tablas, figuras, código y su propio texto de semestres anteriores.</a:t>
+            </a:r>
+          </a:p>
+          <a:p>
+            <a:pPr>
+              <a:spcAft>
+                <a:spcPts val="1000"/>
+              </a:spcAft>
+            </a:pPr>
+            <a:r>
+              <a:rPr sz="1600" b="0" i="0">
+                <a:solidFill>
+                  <a:srgbClr val="2B2B2B"/>
+                </a:solidFill>
+                <a:latin typeface="Calibri"/>
+              </a:rPr>
+              <a:t>–   </a:t>
+            </a:r>
+            <a:r>
+              <a:rPr sz="1600" b="1" i="0">
+                <a:solidFill>
+                  <a:srgbClr val="2B2B2B"/>
+                </a:solidFill>
+                <a:latin typeface="Calibri"/>
+              </a:rPr>
+              <a:t>Parafrasear</a:t>
+            </a:r>
+            <a:r>
+              <a:rPr sz="1600" b="0" i="0">
+                <a:solidFill>
+                  <a:srgbClr val="2B2B2B"/>
+                </a:solidFill>
+                <a:latin typeface="Calibri"/>
+              </a:rPr>
+              <a:t> es reescribir con sus palabras </a:t>
+            </a:r>
+            <a:r>
+              <a:rPr sz="1600" b="1" i="0">
+                <a:solidFill>
+                  <a:srgbClr val="2B2B2B"/>
+                </a:solidFill>
+                <a:latin typeface="Calibri"/>
+              </a:rPr>
+              <a:t>y citar igual</a:t>
+            </a:r>
+            <a:r>
+              <a:rPr sz="1600" b="0" i="0">
+                <a:solidFill>
+                  <a:srgbClr val="2B2B2B"/>
+                </a:solidFill>
+                <a:latin typeface="Calibri"/>
+              </a:rPr>
+              <a:t>. La cita textual es la excepción, y siempre con página.</a:t>
+            </a:r>
+          </a:p>
+          <a:p>
+            <a:pPr>
+              <a:spcAft>
+                <a:spcPts val="1000"/>
+              </a:spcAft>
+            </a:pPr>
+            <a:r>
+              <a:rPr sz="1600" b="0" i="0">
+                <a:solidFill>
+                  <a:srgbClr val="2B2B2B"/>
+                </a:solidFill>
+                <a:latin typeface="Calibri"/>
+              </a:rPr>
+              <a:t>–   Cuenta como plagio:</a:t>
+            </a:r>
+          </a:p>
+          <a:p>
+            <a:pPr lvl="1">
+              <a:spcAft>
+                <a:spcPts val="600"/>
+              </a:spcAft>
+            </a:pPr>
+            <a:r>
+              <a:rPr sz="1500" b="0" i="0">
+                <a:solidFill>
+                  <a:srgbClr val="2B2B2B"/>
+                </a:solidFill>
+                <a:latin typeface="Calibri"/>
+              </a:rPr>
+              <a:t>●   Copiar y pegar sin comillas ni referencia.</a:t>
+            </a:r>
+          </a:p>
+          <a:p>
+            <a:pPr lvl="1">
+              <a:spcAft>
+                <a:spcPts val="600"/>
+              </a:spcAft>
+            </a:pPr>
+            <a:r>
+              <a:rPr sz="1500" b="0" i="0">
+                <a:solidFill>
+                  <a:srgbClr val="2B2B2B"/>
+                </a:solidFill>
+                <a:latin typeface="Calibri"/>
+              </a:rPr>
+              <a:t>●   Traducir un texto ajeno y firmarlo como propio.</a:t>
+            </a:r>
+          </a:p>
+          <a:p>
+            <a:pPr lvl="1">
+              <a:spcAft>
+                <a:spcPts val="600"/>
+              </a:spcAft>
+            </a:pPr>
+            <a:r>
+              <a:rPr sz="1500" b="0" i="0">
+                <a:solidFill>
+                  <a:srgbClr val="2B2B2B"/>
+                </a:solidFill>
+                <a:latin typeface="Calibri"/>
+              </a:rPr>
+              <a:t>●   Reutilizar su trabajo de TG2 sin declararlo (</a:t>
+            </a:r>
+            <a:r>
+              <a:rPr sz="1500" b="1" i="0">
+                <a:solidFill>
+                  <a:srgbClr val="2B2B2B"/>
+                </a:solidFill>
+                <a:latin typeface="Calibri"/>
+              </a:rPr>
+              <a:t>autoplagio</a:t>
+            </a:r>
+            <a:r>
+              <a:rPr sz="1500" b="0" i="0">
+                <a:solidFill>
+                  <a:srgbClr val="2B2B2B"/>
+                </a:solidFill>
+                <a:latin typeface="Calibri"/>
+              </a:rPr>
+              <a:t>).</a:t>
+            </a:r>
+          </a:p>
+          <a:p>
+            <a:pPr>
+              <a:spcAft>
+                <a:spcPts val="1000"/>
+              </a:spcAft>
+            </a:pPr>
+            <a:r>
+              <a:rPr sz="1600" b="0" i="0">
+                <a:solidFill>
+                  <a:srgbClr val="2B2B2B"/>
+                </a:solidFill>
+                <a:latin typeface="Calibri"/>
+              </a:rPr>
+              <a:t>–   En este curso el documento pasa por la </a:t>
+            </a:r>
+            <a:r>
+              <a:rPr sz="1600" b="1" i="0">
+                <a:solidFill>
+                  <a:srgbClr val="2B2B2B"/>
+                </a:solidFill>
+                <a:latin typeface="Calibri"/>
+              </a:rPr>
+              <a:t>herramienta antiplagio institucional del campus</a:t>
+            </a:r>
+            <a:r>
+              <a:rPr sz="1600" b="0" i="0">
+                <a:solidFill>
+                  <a:srgbClr val="2B2B2B"/>
+                </a:solidFill>
+                <a:latin typeface="Calibri"/>
+              </a:rPr>
+              <a:t> antes de la sustentación: no es una amenaza, es un paso del cronograma.</a:t>
+            </a:r>
+          </a:p>
+          <a:p>
+            <a:pPr>
+              <a:spcAft>
+                <a:spcPts val="1000"/>
+              </a:spcAft>
+            </a:pPr>
+            <a:r>
+              <a:rPr sz="1600" b="0" i="0">
+                <a:solidFill>
+                  <a:srgbClr val="2B2B2B"/>
+                </a:solidFill>
+                <a:latin typeface="Calibri"/>
+              </a:rPr>
+              <a:t>–   Si se detecta plagio se activa el </a:t>
+            </a:r>
+            <a:r>
+              <a:rPr sz="1600" b="1" i="0">
+                <a:solidFill>
+                  <a:srgbClr val="2B2B2B"/>
+                </a:solidFill>
+                <a:latin typeface="Calibri"/>
+              </a:rPr>
+              <a:t>debido proceso institucional</a:t>
+            </a:r>
+            <a:r>
+              <a:rPr sz="1600" b="0" i="0">
+                <a:solidFill>
+                  <a:srgbClr val="2B2B2B"/>
+                </a:solidFill>
+                <a:latin typeface="Calibri"/>
+              </a:rPr>
+              <a:t>, y en opción de grado el costo es la titulación, no una nota.</a:t>
+            </a:r>
+          </a:p>
+        </p:txBody>
+      </p:sp>
+      <p:sp>
+        <p:nvSpPr>
+          <p:cNvPr id="5" name="TextBox 4"/>
+          <p:cNvSpPr txBox="1"/>
+          <p:nvPr/>
+        </p:nvSpPr>
+        <p:spPr>
+          <a:xfrm>
+            <a:off x="2194560" y="6446520"/>
+            <a:ext cx="5943600" cy="274320"/>
+          </a:xfrm>
+          <a:prstGeom prst="rect">
+            <a:avLst/>
+          </a:prstGeom>
+          <a:noFill/>
+        </p:spPr>
+        <p:txBody>
+          <a:bodyPr wrap="square" anchor="t" lIns="0" rIns="0" tIns="0" bIns="0">
+            <a:spAutoFit/>
+          </a:bodyPr>
+          <a:lstStyle/>
+          <a:p>
+            <a:pPr algn="l"/>
+            <a:r>
+              <a:rPr sz="1000" b="1" i="0">
+                <a:solidFill>
+                  <a:srgbClr val="8F989D"/>
+                </a:solidFill>
+                <a:latin typeface="Calibri"/>
+              </a:rPr>
+              <a:t>Inicio 5:10 pm</a:t>
+            </a:r>
+          </a:p>
+        </p:txBody>
+      </p:sp>
+      <p:sp>
+        <p:nvSpPr>
+          <p:cNvPr id="6" name="TextBox 5"/>
+          <p:cNvSpPr txBox="1"/>
+          <p:nvPr/>
+        </p:nvSpPr>
+        <p:spPr>
+          <a:xfrm>
+            <a:off x="11094415" y="6446520"/>
+            <a:ext cx="548640" cy="274320"/>
+          </a:xfrm>
+          <a:prstGeom prst="rect">
+            <a:avLst/>
+          </a:prstGeom>
+          <a:noFill/>
+        </p:spPr>
+        <p:txBody>
+          <a:bodyPr wrap="square" anchor="t" lIns="0" rIns="0" tIns="0" bIns="0">
+            <a:spAutoFit/>
+          </a:bodyPr>
+          <a:lstStyle/>
+          <a:p>
+            <a:pPr algn="r"/>
+            <a:r>
+              <a:rPr sz="1000" b="1" i="0">
+                <a:solidFill>
+                  <a:srgbClr val="8F989D"/>
+                </a:solidFill>
+                <a:latin typeface="Calibri"/>
+              </a:rPr>
+              <a:t>13</a:t>
+            </a:r>
+          </a:p>
+        </p:txBody>
+      </p:sp>
+      <p:sp>
+        <p:nvSpPr>
+          <p:cNvPr id="7" name="TextBox 6"/>
+          <p:cNvSpPr txBox="1"/>
+          <p:nvPr/>
+        </p:nvSpPr>
+        <p:spPr>
+          <a:xfrm>
+            <a:off x="640080" y="5943600"/>
+            <a:ext cx="9997135" cy="457200"/>
+          </a:xfrm>
+          <a:prstGeom prst="rect">
+            <a:avLst/>
+          </a:prstGeom>
+          <a:noFill/>
+        </p:spPr>
+        <p:txBody>
+          <a:bodyPr wrap="square" anchor="t" lIns="0" rIns="0" tIns="0" bIns="0">
+            <a:spAutoFit/>
+          </a:bodyPr>
+          <a:lstStyle/>
+          <a:p>
+            <a:r>
+              <a:rPr sz="1200" b="0" i="1">
+                <a:solidFill>
+                  <a:srgbClr val="2B2B2B"/>
+                </a:solidFill>
+                <a:latin typeface="Calibri"/>
+              </a:rPr>
+              <a:t>Regla práctica: </a:t>
+            </a:r>
+            <a:r>
+              <a:rPr sz="1200" b="1" i="1">
+                <a:solidFill>
+                  <a:srgbClr val="2B2B2B"/>
+                </a:solidFill>
+                <a:latin typeface="Calibri"/>
+              </a:rPr>
+              <a:t>anote la fuente en el instante</a:t>
+            </a:r>
+            <a:r>
+              <a:rPr sz="1200" b="0" i="1">
+                <a:solidFill>
+                  <a:srgbClr val="2B2B2B"/>
+                </a:solidFill>
+                <a:latin typeface="Calibri"/>
+              </a:rPr>
+              <a:t> en que pega algo. Con 50 referencias, reconstruir de memoria es imposible.</a:t>
+            </a:r>
+          </a:p>
+        </p:txBody>
+      </p:sp>
+    </p:spTree>
+  </p:cSld>
+  <p:clrMapOvr>
+    <a:masterClrMapping/>
+  </p:clrMapOvr>
+</p:sld>
+</file>
+
+<file path=ppt/slides/slide14.xml><?xml version="1.0" encoding="utf-8"?>
+<p:sld xmlns:a="http://schemas.openxmlformats.org/drawingml/2006/main" xmlns:p="http://schemas.openxmlformats.org/presentationml/2006/main" xmlns:r="http://schemas.openxmlformats.org/officeDocument/2006/relationships">
+  <p:cSld>
+    <p:bg>
+      <p:bgPr>
+        <a:solidFill>
+          <a:srgbClr val="FFFFFF"/>
+        </a:solidFill>
+        <a:effectLst/>
+      </p:bgPr>
+    </p:bg>
+    <p:spTree>
+      <p:nvGrpSpPr>
+        <p:cNvPr id="1" name=""/>
+        <p:cNvGrpSpPr/>
+        <p:nvPr/>
+      </p:nvGrpSpPr>
+      <p:grpSpPr/>
+      <p:sp>
+        <p:nvSpPr>
+          <p:cNvPr id="2" name="Rectangle 1"/>
+          <p:cNvSpPr/>
+          <p:nvPr/>
+        </p:nvSpPr>
+        <p:spPr>
+          <a:xfrm>
+            <a:off x="0" y="0"/>
+            <a:ext cx="12191695" cy="1188720"/>
+          </a:xfrm>
+          <a:prstGeom prst="rect">
+            <a:avLst/>
+          </a:prstGeom>
+          <a:solidFill>
+            <a:srgbClr val="0C2340"/>
+          </a:solidFill>
+          <a:ln>
+            <a:noFill/>
+          </a:ln>
+          <a:effectLst/>
+        </p:spPr>
+        <p:style>
+          <a:lnRef idx="1">
+            <a:schemeClr val="accent1"/>
+          </a:lnRef>
+          <a:fillRef idx="3">
+            <a:schemeClr val="accent1"/>
+          </a:fillRef>
+          <a:effectRef idx="2">
+            <a:schemeClr val="accent1"/>
+          </a:effectRef>
+          <a:fontRef idx="minor">
+            <a:schemeClr val="lt1"/>
+          </a:fontRef>
+        </p:style>
+        <p:txBody>
+          <a:bodyPr rtlCol="0" anchor="ctr"/>
+          <a:lstStyle/>
+          <a:p>
+            <a:pPr algn="ctr"/>
+          </a:p>
+        </p:txBody>
+      </p:sp>
+      <p:sp>
+        <p:nvSpPr>
+          <p:cNvPr id="3" name="TextBox 2"/>
+          <p:cNvSpPr txBox="1"/>
+          <p:nvPr/>
+        </p:nvSpPr>
+        <p:spPr>
+          <a:xfrm>
+            <a:off x="640080" y="0"/>
+            <a:ext cx="9082735" cy="1188720"/>
+          </a:xfrm>
+          <a:prstGeom prst="rect">
+            <a:avLst/>
+          </a:prstGeom>
+          <a:noFill/>
+        </p:spPr>
+        <p:txBody>
+          <a:bodyPr wrap="square" anchor="ctr" lIns="0" rIns="0" tIns="0" bIns="0">
+            <a:spAutoFit/>
+          </a:bodyPr>
+          <a:lstStyle/>
+          <a:p>
+            <a:pPr algn="ctr"/>
+            <a:r>
+              <a:rPr sz="2600" b="1" i="0">
+                <a:solidFill>
+                  <a:srgbClr val="FFFFFF"/>
+                </a:solidFill>
+                <a:latin typeface="Calibri"/>
+              </a:rPr>
+              <a:t>Inteligencia artificial generativa: reglas de la casa</a:t>
+            </a:r>
+          </a:p>
+        </p:txBody>
+      </p:sp>
+      <p:sp>
+        <p:nvSpPr>
+          <p:cNvPr id="4" name="Rounded Rectangle 3"/>
+          <p:cNvSpPr/>
+          <p:nvPr/>
+        </p:nvSpPr>
+        <p:spPr>
+          <a:xfrm>
+            <a:off x="640080" y="1737360"/>
+            <a:ext cx="10911535" cy="969264"/>
+          </a:xfrm>
+          <a:prstGeom prst="roundRect">
+            <a:avLst/>
+          </a:prstGeom>
+          <a:solidFill>
+            <a:srgbClr val="E8F5EC"/>
+          </a:solidFill>
+          <a:ln>
+            <a:noFill/>
+          </a:ln>
+          <a:effectLst/>
+        </p:spPr>
+        <p:style>
+          <a:lnRef idx="1">
+            <a:schemeClr val="accent1"/>
+          </a:lnRef>
+          <a:fillRef idx="3">
+            <a:schemeClr val="accent1"/>
+          </a:fillRef>
+          <a:effectRef idx="2">
+            <a:schemeClr val="accent1"/>
+          </a:effectRef>
+          <a:fontRef idx="minor">
+            <a:schemeClr val="lt1"/>
+          </a:fontRef>
+        </p:style>
+        <p:txBody>
+          <a:bodyPr rtlCol="0" anchor="ctr"/>
+          <a:lstStyle/>
+          <a:p>
+            <a:pPr algn="ctr"/>
+          </a:p>
+        </p:txBody>
+      </p:sp>
+      <p:sp>
+        <p:nvSpPr>
+          <p:cNvPr id="5" name="TextBox 4"/>
+          <p:cNvSpPr txBox="1"/>
+          <p:nvPr/>
+        </p:nvSpPr>
+        <p:spPr>
+          <a:xfrm>
+            <a:off x="868680" y="1847088"/>
+            <a:ext cx="10454335" cy="749808"/>
+          </a:xfrm>
+          <a:prstGeom prst="rect">
+            <a:avLst/>
+          </a:prstGeom>
+          <a:noFill/>
+        </p:spPr>
+        <p:txBody>
+          <a:bodyPr wrap="square" anchor="t" lIns="0" rIns="0" tIns="0" bIns="0">
+            <a:spAutoFit/>
+          </a:bodyPr>
+          <a:lstStyle/>
+          <a:p>
+            <a:r>
+              <a:rPr sz="1300" b="1" i="0">
+                <a:solidFill>
+                  <a:srgbClr val="0C2340"/>
+                </a:solidFill>
+                <a:latin typeface="Calibri"/>
+              </a:rPr>
+              <a:t>ℹ️ Nota institucional</a:t>
+            </a:r>
+          </a:p>
+          <a:p>
+            <a:pPr>
+              <a:spcBef>
+                <a:spcPts val="400"/>
+              </a:spcBef>
+            </a:pPr>
+            <a:r>
+              <a:rPr sz="1300" b="1" i="0">
+                <a:solidFill>
+                  <a:srgbClr val="2B2B2B"/>
+                </a:solidFill>
+                <a:latin typeface="Calibri"/>
+              </a:rPr>
+              <a:t>Sí se puede usar</a:t>
+            </a:r>
+            <a:r>
+              <a:rPr sz="1300" b="0" i="0">
+                <a:solidFill>
+                  <a:srgbClr val="2B2B2B"/>
+                </a:solidFill>
+                <a:latin typeface="Calibri"/>
+              </a:rPr>
+              <a:t> para entender un concepto, ordenar la estructura de una sección o pulir la redacción de un párrafo que usted ya escribió.</a:t>
+            </a:r>
+          </a:p>
+        </p:txBody>
+      </p:sp>
+      <p:sp>
+        <p:nvSpPr>
+          <p:cNvPr id="6" name="Rounded Rectangle 5"/>
+          <p:cNvSpPr/>
+          <p:nvPr/>
+        </p:nvSpPr>
+        <p:spPr>
+          <a:xfrm>
+            <a:off x="640080" y="2935224"/>
+            <a:ext cx="10911535" cy="969264"/>
+          </a:xfrm>
+          <a:prstGeom prst="roundRect">
+            <a:avLst/>
+          </a:prstGeom>
+          <a:solidFill>
+            <a:srgbClr val="FDECD8"/>
+          </a:solidFill>
+          <a:ln>
+            <a:noFill/>
+          </a:ln>
+          <a:effectLst/>
+        </p:spPr>
+        <p:style>
+          <a:lnRef idx="1">
+            <a:schemeClr val="accent1"/>
+          </a:lnRef>
+          <a:fillRef idx="3">
+            <a:schemeClr val="accent1"/>
+          </a:fillRef>
+          <a:effectRef idx="2">
+            <a:schemeClr val="accent1"/>
+          </a:effectRef>
+          <a:fontRef idx="minor">
+            <a:schemeClr val="lt1"/>
+          </a:fontRef>
+        </p:style>
+        <p:txBody>
+          <a:bodyPr rtlCol="0" anchor="ctr"/>
+          <a:lstStyle/>
+          <a:p>
+            <a:pPr algn="ctr"/>
+          </a:p>
+        </p:txBody>
+      </p:sp>
+      <p:sp>
+        <p:nvSpPr>
+          <p:cNvPr id="7" name="TextBox 6"/>
+          <p:cNvSpPr txBox="1"/>
+          <p:nvPr/>
+        </p:nvSpPr>
+        <p:spPr>
+          <a:xfrm>
+            <a:off x="868680" y="3044952"/>
+            <a:ext cx="10454335" cy="749808"/>
+          </a:xfrm>
+          <a:prstGeom prst="rect">
+            <a:avLst/>
+          </a:prstGeom>
+          <a:noFill/>
+        </p:spPr>
+        <p:txBody>
+          <a:bodyPr wrap="square" anchor="t" lIns="0" rIns="0" tIns="0" bIns="0">
+            <a:spAutoFit/>
+          </a:bodyPr>
+          <a:lstStyle/>
+          <a:p>
+            <a:r>
+              <a:rPr sz="1300" b="1" i="0">
+                <a:solidFill>
+                  <a:srgbClr val="0C2340"/>
+                </a:solidFill>
+                <a:latin typeface="Calibri"/>
+              </a:rPr>
+              <a:t>💡 Aclaración</a:t>
+            </a:r>
+          </a:p>
+          <a:p>
+            <a:pPr>
+              <a:spcBef>
+                <a:spcPts val="400"/>
+              </a:spcBef>
+            </a:pPr>
+            <a:r>
+              <a:rPr sz="1300" b="1" i="0">
+                <a:solidFill>
+                  <a:srgbClr val="2B2B2B"/>
+                </a:solidFill>
+                <a:latin typeface="Calibri"/>
+              </a:rPr>
+              <a:t>Se declara.</a:t>
+            </a:r>
+            <a:r>
+              <a:rPr sz="1300" b="0" i="0">
+                <a:solidFill>
+                  <a:srgbClr val="2B2B2B"/>
+                </a:solidFill>
+                <a:latin typeface="Calibri"/>
+              </a:rPr>
+              <a:t> Una línea al final del documento: qué herramienta usó y para qué. Usarla no es falta; ocultarlo sí.</a:t>
+            </a:r>
+          </a:p>
+        </p:txBody>
+      </p:sp>
+      <p:sp>
+        <p:nvSpPr>
+          <p:cNvPr id="8" name="Rounded Rectangle 7"/>
+          <p:cNvSpPr/>
+          <p:nvPr/>
+        </p:nvSpPr>
+        <p:spPr>
+          <a:xfrm>
+            <a:off x="640080" y="4133087"/>
+            <a:ext cx="10911535" cy="1225296"/>
+          </a:xfrm>
+          <a:prstGeom prst="roundRect">
+            <a:avLst/>
+          </a:prstGeom>
+          <a:solidFill>
+            <a:srgbClr val="FBE4E4"/>
+          </a:solidFill>
+          <a:ln>
+            <a:noFill/>
+          </a:ln>
+          <a:effectLst/>
+        </p:spPr>
+        <p:style>
+          <a:lnRef idx="1">
+            <a:schemeClr val="accent1"/>
+          </a:lnRef>
+          <a:fillRef idx="3">
+            <a:schemeClr val="accent1"/>
+          </a:fillRef>
+          <a:effectRef idx="2">
+            <a:schemeClr val="accent1"/>
+          </a:effectRef>
+          <a:fontRef idx="minor">
+            <a:schemeClr val="lt1"/>
+          </a:fontRef>
+        </p:style>
+        <p:txBody>
+          <a:bodyPr rtlCol="0" anchor="ctr"/>
+          <a:lstStyle/>
+          <a:p>
+            <a:pPr algn="ctr"/>
+          </a:p>
+        </p:txBody>
+      </p:sp>
+      <p:sp>
+        <p:nvSpPr>
+          <p:cNvPr id="9" name="TextBox 8"/>
+          <p:cNvSpPr txBox="1"/>
+          <p:nvPr/>
+        </p:nvSpPr>
+        <p:spPr>
+          <a:xfrm>
+            <a:off x="868680" y="4242816"/>
+            <a:ext cx="10454335" cy="1005840"/>
+          </a:xfrm>
+          <a:prstGeom prst="rect">
+            <a:avLst/>
+          </a:prstGeom>
+          <a:noFill/>
+        </p:spPr>
+        <p:txBody>
+          <a:bodyPr wrap="square" anchor="t" lIns="0" rIns="0" tIns="0" bIns="0">
+            <a:spAutoFit/>
+          </a:bodyPr>
+          <a:lstStyle/>
+          <a:p>
+            <a:r>
+              <a:rPr sz="1300" b="1" i="0">
+                <a:solidFill>
+                  <a:srgbClr val="0C2340"/>
+                </a:solidFill>
+                <a:latin typeface="Calibri"/>
+              </a:rPr>
+              <a:t>⚠️ Importante</a:t>
+            </a:r>
+          </a:p>
+          <a:p>
+            <a:pPr>
+              <a:spcBef>
+                <a:spcPts val="400"/>
+              </a:spcBef>
+            </a:pPr>
+            <a:r>
+              <a:rPr sz="1300" b="1" i="0">
+                <a:solidFill>
+                  <a:srgbClr val="2B2B2B"/>
+                </a:solidFill>
+                <a:latin typeface="Calibri"/>
+              </a:rPr>
+              <a:t>Verifique cada referencia: estos modelos inventan autores, títulos y DOIs</a:t>
+            </a:r>
+            <a:r>
+              <a:rPr sz="1300" b="0" i="0">
+                <a:solidFill>
+                  <a:srgbClr val="2B2B2B"/>
+                </a:solidFill>
+                <a:latin typeface="Calibri"/>
+              </a:rPr>
+              <a:t>, y esa bibliografía va al repositorio institucional. Además, frente a jurados usted defiende cada párrafo: lo que no pueda explicar en voz alta se nota en un minuto.</a:t>
+            </a:r>
+          </a:p>
+        </p:txBody>
+      </p:sp>
+      <p:sp>
+        <p:nvSpPr>
+          <p:cNvPr id="10" name="TextBox 9"/>
+          <p:cNvSpPr txBox="1"/>
+          <p:nvPr/>
+        </p:nvSpPr>
+        <p:spPr>
+          <a:xfrm>
+            <a:off x="2194560" y="6446520"/>
+            <a:ext cx="5943600" cy="274320"/>
+          </a:xfrm>
+          <a:prstGeom prst="rect">
+            <a:avLst/>
+          </a:prstGeom>
+          <a:noFill/>
+        </p:spPr>
+        <p:txBody>
+          <a:bodyPr wrap="square" anchor="t" lIns="0" rIns="0" tIns="0" bIns="0">
+            <a:spAutoFit/>
+          </a:bodyPr>
+          <a:lstStyle/>
+          <a:p>
+            <a:pPr algn="l"/>
+            <a:r>
+              <a:rPr sz="1000" b="1" i="0">
+                <a:solidFill>
+                  <a:srgbClr val="8F989D"/>
+                </a:solidFill>
+                <a:latin typeface="Calibri"/>
+              </a:rPr>
+              <a:t>Inicio 5:10 pm</a:t>
+            </a:r>
+          </a:p>
+        </p:txBody>
+      </p:sp>
+      <p:sp>
+        <p:nvSpPr>
+          <p:cNvPr id="11" name="TextBox 10"/>
+          <p:cNvSpPr txBox="1"/>
+          <p:nvPr/>
+        </p:nvSpPr>
+        <p:spPr>
+          <a:xfrm>
+            <a:off x="11094415" y="6446520"/>
+            <a:ext cx="548640" cy="274320"/>
+          </a:xfrm>
+          <a:prstGeom prst="rect">
+            <a:avLst/>
+          </a:prstGeom>
+          <a:noFill/>
+        </p:spPr>
+        <p:txBody>
+          <a:bodyPr wrap="square" anchor="t" lIns="0" rIns="0" tIns="0" bIns="0">
+            <a:spAutoFit/>
+          </a:bodyPr>
+          <a:lstStyle/>
+          <a:p>
+            <a:pPr algn="r"/>
+            <a:r>
+              <a:rPr sz="1000" b="1" i="0">
+                <a:solidFill>
+                  <a:srgbClr val="8F989D"/>
+                </a:solidFill>
+                <a:latin typeface="Calibri"/>
+              </a:rPr>
+              <a:t>14</a:t>
+            </a:r>
+          </a:p>
+        </p:txBody>
+      </p:sp>
+    </p:spTree>
+  </p:cSld>
+  <p:clrMapOvr>
+    <a:masterClrMapping/>
+  </p:clrMapOvr>
+</p:sld>
+</file>
+
+<file path=ppt/slides/slide15.xml><?xml version="1.0" encoding="utf-8"?>
+<p:sld xmlns:a="http://schemas.openxmlformats.org/drawingml/2006/main" xmlns:p="http://schemas.openxmlformats.org/presentationml/2006/main" xmlns:r="http://schemas.openxmlformats.org/officeDocument/2006/relationships">
+  <p:cSld>
+    <p:bg>
+      <p:bgPr>
+        <a:solidFill>
+          <a:srgbClr val="FFFFFF"/>
+        </a:solidFill>
+        <a:effectLst/>
+      </p:bgPr>
+    </p:bg>
+    <p:spTree>
+      <p:nvGrpSpPr>
+        <p:cNvPr id="1" name=""/>
+        <p:cNvGrpSpPr/>
+        <p:nvPr/>
+      </p:nvGrpSpPr>
+      <p:grpSpPr/>
+      <p:sp>
+        <p:nvSpPr>
+          <p:cNvPr id="2" name="Rectangle 1"/>
+          <p:cNvSpPr/>
+          <p:nvPr/>
+        </p:nvSpPr>
+        <p:spPr>
+          <a:xfrm>
+            <a:off x="0" y="0"/>
+            <a:ext cx="12191695" cy="1188720"/>
+          </a:xfrm>
+          <a:prstGeom prst="rect">
+            <a:avLst/>
+          </a:prstGeom>
+          <a:solidFill>
+            <a:srgbClr val="0C2340"/>
+          </a:solidFill>
+          <a:ln>
+            <a:noFill/>
+          </a:ln>
+          <a:effectLst/>
+        </p:spPr>
+        <p:style>
+          <a:lnRef idx="1">
+            <a:schemeClr val="accent1"/>
+          </a:lnRef>
+          <a:fillRef idx="3">
+            <a:schemeClr val="accent1"/>
+          </a:fillRef>
+          <a:effectRef idx="2">
+            <a:schemeClr val="accent1"/>
+          </a:effectRef>
+          <a:fontRef idx="minor">
+            <a:schemeClr val="lt1"/>
+          </a:fontRef>
+        </p:style>
+        <p:txBody>
+          <a:bodyPr rtlCol="0" anchor="ctr"/>
+          <a:lstStyle/>
+          <a:p>
+            <a:pPr algn="ctr"/>
+          </a:p>
+        </p:txBody>
+      </p:sp>
+      <p:sp>
+        <p:nvSpPr>
+          <p:cNvPr id="3" name="TextBox 2"/>
+          <p:cNvSpPr txBox="1"/>
+          <p:nvPr/>
+        </p:nvSpPr>
+        <p:spPr>
+          <a:xfrm>
+            <a:off x="640080" y="0"/>
+            <a:ext cx="9082735" cy="1188720"/>
+          </a:xfrm>
+          <a:prstGeom prst="rect">
+            <a:avLst/>
+          </a:prstGeom>
+          <a:noFill/>
+        </p:spPr>
+        <p:txBody>
+          <a:bodyPr wrap="square" anchor="ctr" lIns="0" rIns="0" tIns="0" bIns="0">
+            <a:spAutoFit/>
+          </a:bodyPr>
+          <a:lstStyle/>
+          <a:p>
+            <a:pPr algn="ctr"/>
+            <a:r>
+              <a:rPr sz="2600" b="1" i="0">
+                <a:solidFill>
+                  <a:srgbClr val="FFFFFF"/>
+                </a:solidFill>
+                <a:latin typeface="Calibri"/>
+              </a:rPr>
+              <a:t>Herramientas del curso: todas gratis, todas en el navegador</a:t>
+            </a:r>
+          </a:p>
+        </p:txBody>
+      </p:sp>
+      <p:graphicFrame>
+        <p:nvGraphicFramePr>
+          <p:cNvPr id="4" name="Table 3"/>
+          <p:cNvGraphicFramePr>
+            <a:graphicFrameLocks noGrp="1"/>
+          </p:cNvGraphicFramePr>
+          <p:nvPr/>
+        </p:nvGraphicFramePr>
+        <p:xfrm>
+          <a:off x="640080" y="1691639"/>
+          <a:ext cx="10911534" cy="4526280"/>
+        </p:xfrm>
+        <a:graphic>
+          <a:graphicData uri="http://schemas.openxmlformats.org/drawingml/2006/table">
+            <a:tbl>
+              <a:tblPr>
+                <a:tableStyleId>{2D5ABB26-0587-4C30-8999-92F81FD0307C}</a:tableStyleId>
+              </a:tblPr>
+              <a:tblGrid>
+                <a:gridCol w="2567420"/>
+                <a:gridCol w="5226533"/>
+                <a:gridCol w="3117581"/>
+              </a:tblGrid>
+              <a:tr h="502920">
+                <a:tc>
+                  <a:txBody>
+                    <a:bodyPr/>
+                    <a:lstStyle/>
+                    <a:p>
+                      <a:pPr algn="l"/>
+                      <a:r>
+                        <a:rPr sz="1300" b="1" i="0">
+                          <a:solidFill>
+                            <a:srgbClr val="FFFFFF"/>
+                          </a:solidFill>
+                          <a:latin typeface="Calibri"/>
+                        </a:rPr>
+                        <a:t>Herramienta</a:t>
+                      </a:r>
+                    </a:p>
+                  </a:txBody>
+                  <a:tcPr anchor="ctr" marL="109728" marR="91440" marT="36576" marB="36576">
+                    <a:solidFill>
+                      <a:srgbClr val="0C2340"/>
+                    </a:solidFill>
+                  </a:tcPr>
+                </a:tc>
+                <a:tc>
+                  <a:txBody>
+                    <a:bodyPr/>
+                    <a:lstStyle/>
+                    <a:p>
+                      <a:pPr algn="l"/>
+                      <a:r>
+                        <a:rPr sz="1300" b="1" i="0">
+                          <a:solidFill>
+                            <a:srgbClr val="FFFFFF"/>
+                          </a:solidFill>
+                          <a:latin typeface="Calibri"/>
+                        </a:rPr>
+                        <a:t>Para qué la usamos</a:t>
+                      </a:r>
+                    </a:p>
+                  </a:txBody>
+                  <a:tcPr anchor="ctr" marL="109728" marR="91440" marT="36576" marB="36576">
+                    <a:solidFill>
+                      <a:srgbClr val="0C2340"/>
+                    </a:solidFill>
+                  </a:tcPr>
+                </a:tc>
+                <a:tc>
+                  <a:txBody>
+                    <a:bodyPr/>
+                    <a:lstStyle/>
+                    <a:p>
+                      <a:pPr algn="l"/>
+                      <a:r>
+                        <a:rPr sz="1300" b="1" i="0">
+                          <a:solidFill>
+                            <a:srgbClr val="FFFFFF"/>
+                          </a:solidFill>
+                          <a:latin typeface="Calibri"/>
+                        </a:rPr>
+                        <a:t>Cuándo aparece</a:t>
+                      </a:r>
+                    </a:p>
+                  </a:txBody>
+                  <a:tcPr anchor="ctr" marL="109728" marR="91440" marT="36576" marB="36576">
+                    <a:solidFill>
+                      <a:srgbClr val="0C2340"/>
+                    </a:solidFill>
+                  </a:tcPr>
+                </a:tc>
+              </a:tr>
+              <a:tr h="502920">
+                <a:tc>
+                  <a:txBody>
+                    <a:bodyPr/>
+                    <a:lstStyle/>
+                    <a:p>
+                      <a:pPr algn="l"/>
+                      <a:r>
+                        <a:rPr sz="1100" b="1" i="0">
+                          <a:solidFill>
+                            <a:srgbClr val="2B2B2B"/>
+                          </a:solidFill>
+                          <a:latin typeface="Calibri"/>
+                        </a:rPr>
+                        <a:t>CDigital</a:t>
+                      </a:r>
+                    </a:p>
+                  </a:txBody>
+                  <a:tcPr anchor="ctr" marL="109728" marR="91440" marT="36576" marB="36576">
+                    <a:solidFill>
+                      <a:srgbClr val="FFFFFF"/>
+                    </a:solidFill>
+                  </a:tcPr>
+                </a:tc>
+                <a:tc>
+                  <a:txBody>
+                    <a:bodyPr/>
+                    <a:lstStyle/>
+                    <a:p>
+                      <a:pPr algn="l"/>
+                      <a:r>
+                        <a:rPr sz="1100" b="0" i="0">
+                          <a:solidFill>
+                            <a:srgbClr val="2B2B2B"/>
+                          </a:solidFill>
+                          <a:latin typeface="Calibri"/>
+                        </a:rPr>
+                        <a:t>Entrega oficial, materiales, antiplagio institucional y notas</a:t>
+                      </a:r>
+                    </a:p>
+                  </a:txBody>
+                  <a:tcPr anchor="ctr" marL="109728" marR="91440" marT="36576" marB="36576">
+                    <a:solidFill>
+                      <a:srgbClr val="FFFFFF"/>
+                    </a:solidFill>
+                  </a:tcPr>
+                </a:tc>
+                <a:tc>
+                  <a:txBody>
+                    <a:bodyPr/>
+                    <a:lstStyle/>
+                    <a:p>
+                      <a:pPr algn="l"/>
+                      <a:r>
+                        <a:rPr sz="1100" b="0" i="0">
+                          <a:solidFill>
+                            <a:srgbClr val="2B2B2B"/>
+                          </a:solidFill>
+                          <a:latin typeface="Calibri"/>
+                        </a:rPr>
+                        <a:t>Siempre</a:t>
+                      </a:r>
+                    </a:p>
+                  </a:txBody>
+                  <a:tcPr anchor="ctr" marL="109728" marR="91440" marT="36576" marB="36576">
+                    <a:solidFill>
+                      <a:srgbClr val="FFFFFF"/>
+                    </a:solidFill>
+                  </a:tcPr>
+                </a:tc>
+              </a:tr>
+              <a:tr h="502920">
+                <a:tc>
+                  <a:txBody>
+                    <a:bodyPr/>
+                    <a:lstStyle/>
+                    <a:p>
+                      <a:pPr algn="l"/>
+                      <a:r>
+                        <a:rPr sz="1100" b="1" i="0">
+                          <a:solidFill>
+                            <a:srgbClr val="2B2B2B"/>
+                          </a:solidFill>
+                          <a:latin typeface="Calibri"/>
+                        </a:rPr>
+                        <a:t>Google Docs</a:t>
+                      </a:r>
+                    </a:p>
+                  </a:txBody>
+                  <a:tcPr anchor="ctr" marL="109728" marR="91440" marT="36576" marB="36576">
+                    <a:solidFill>
+                      <a:srgbClr val="F2F2F2"/>
+                    </a:solidFill>
+                  </a:tcPr>
+                </a:tc>
+                <a:tc>
+                  <a:txBody>
+                    <a:bodyPr/>
+                    <a:lstStyle/>
+                    <a:p>
+                      <a:pPr algn="l"/>
+                      <a:r>
+                        <a:rPr sz="1100" b="0" i="0">
+                          <a:solidFill>
+                            <a:srgbClr val="2B2B2B"/>
+                          </a:solidFill>
+                          <a:latin typeface="Calibri"/>
+                        </a:rPr>
+                        <a:t>Escribir el artículo sobre la plantilla APA CUN, con historial de versiones</a:t>
+                      </a:r>
+                    </a:p>
+                  </a:txBody>
+                  <a:tcPr anchor="ctr" marL="109728" marR="91440" marT="36576" marB="36576">
+                    <a:solidFill>
+                      <a:srgbClr val="F2F2F2"/>
+                    </a:solidFill>
+                  </a:tcPr>
+                </a:tc>
+                <a:tc>
+                  <a:txBody>
+                    <a:bodyPr/>
+                    <a:lstStyle/>
+                    <a:p>
+                      <a:pPr algn="l"/>
+                      <a:r>
+                        <a:rPr sz="1100" b="0" i="0">
+                          <a:solidFill>
+                            <a:srgbClr val="2B2B2B"/>
+                          </a:solidFill>
+                          <a:latin typeface="Calibri"/>
+                        </a:rPr>
+                        <a:t>Todas las sesiones</a:t>
+                      </a:r>
+                    </a:p>
+                  </a:txBody>
+                  <a:tcPr anchor="ctr" marL="109728" marR="91440" marT="36576" marB="36576">
+                    <a:solidFill>
+                      <a:srgbClr val="F2F2F2"/>
+                    </a:solidFill>
+                  </a:tcPr>
+                </a:tc>
+              </a:tr>
+              <a:tr h="502920">
+                <a:tc>
+                  <a:txBody>
+                    <a:bodyPr/>
+                    <a:lstStyle/>
+                    <a:p>
+                      <a:pPr algn="l"/>
+                      <a:r>
+                        <a:rPr sz="1100" b="1" i="0">
+                          <a:solidFill>
+                            <a:srgbClr val="2B2B2B"/>
+                          </a:solidFill>
+                          <a:latin typeface="Calibri"/>
+                        </a:rPr>
+                        <a:t>Google Académico</a:t>
+                      </a:r>
+                    </a:p>
+                  </a:txBody>
+                  <a:tcPr anchor="ctr" marL="109728" marR="91440" marT="36576" marB="36576">
+                    <a:solidFill>
+                      <a:srgbClr val="FFFFFF"/>
+                    </a:solidFill>
+                  </a:tcPr>
+                </a:tc>
+                <a:tc>
+                  <a:txBody>
+                    <a:bodyPr/>
+                    <a:lstStyle/>
+                    <a:p>
+                      <a:pPr algn="l"/>
+                      <a:r>
+                        <a:rPr sz="1100" b="0" i="0">
+                          <a:solidFill>
+                            <a:srgbClr val="2B2B2B"/>
+                          </a:solidFill>
+                          <a:latin typeface="Calibri"/>
+                        </a:rPr>
+                        <a:t>Buscar referentes, ver “citado por” y cerrar huecos del marco</a:t>
+                      </a:r>
+                    </a:p>
+                  </a:txBody>
+                  <a:tcPr anchor="ctr" marL="109728" marR="91440" marT="36576" marB="36576">
+                    <a:solidFill>
+                      <a:srgbClr val="FFFFFF"/>
+                    </a:solidFill>
+                  </a:tcPr>
+                </a:tc>
+                <a:tc>
+                  <a:txBody>
+                    <a:bodyPr/>
+                    <a:lstStyle/>
+                    <a:p>
+                      <a:pPr algn="l"/>
+                      <a:r>
+                        <a:rPr sz="1100" b="0" i="0">
+                          <a:solidFill>
+                            <a:srgbClr val="2B2B2B"/>
+                          </a:solidFill>
+                          <a:latin typeface="Calibri"/>
+                        </a:rPr>
+                        <a:t>Fases de referentes y discusión</a:t>
+                      </a:r>
+                    </a:p>
+                  </a:txBody>
+                  <a:tcPr anchor="ctr" marL="109728" marR="91440" marT="36576" marB="36576">
+                    <a:solidFill>
+                      <a:srgbClr val="FFFFFF"/>
+                    </a:solidFill>
+                  </a:tcPr>
+                </a:tc>
+              </a:tr>
+              <a:tr h="502920">
+                <a:tc>
+                  <a:txBody>
+                    <a:bodyPr/>
+                    <a:lstStyle/>
+                    <a:p>
+                      <a:pPr algn="l"/>
+                      <a:r>
+                        <a:rPr sz="1100" b="1" i="0">
+                          <a:solidFill>
+                            <a:srgbClr val="2B2B2B"/>
+                          </a:solidFill>
+                          <a:latin typeface="Calibri"/>
+                        </a:rPr>
+                        <a:t>SciELO y Redalyc</a:t>
+                      </a:r>
+                    </a:p>
+                  </a:txBody>
+                  <a:tcPr anchor="ctr" marL="109728" marR="91440" marT="36576" marB="36576">
+                    <a:solidFill>
+                      <a:srgbClr val="F2F2F2"/>
+                    </a:solidFill>
+                  </a:tcPr>
+                </a:tc>
+                <a:tc>
+                  <a:txBody>
+                    <a:bodyPr/>
+                    <a:lstStyle/>
+                    <a:p>
+                      <a:pPr algn="l"/>
+                      <a:r>
+                        <a:rPr sz="1100" b="0" i="0">
+                          <a:solidFill>
+                            <a:srgbClr val="2B2B2B"/>
+                          </a:solidFill>
+                          <a:latin typeface="Calibri"/>
+                        </a:rPr>
+                        <a:t>Fuentes abiertas iberoamericanas para el contexto local</a:t>
+                      </a:r>
+                    </a:p>
+                  </a:txBody>
+                  <a:tcPr anchor="ctr" marL="109728" marR="91440" marT="36576" marB="36576">
+                    <a:solidFill>
+                      <a:srgbClr val="F2F2F2"/>
+                    </a:solidFill>
+                  </a:tcPr>
+                </a:tc>
+                <a:tc>
+                  <a:txBody>
+                    <a:bodyPr/>
+                    <a:lstStyle/>
+                    <a:p>
+                      <a:pPr algn="l"/>
+                      <a:r>
+                        <a:rPr sz="1100" b="0" i="0">
+                          <a:solidFill>
+                            <a:srgbClr val="2B2B2B"/>
+                          </a:solidFill>
+                          <a:latin typeface="Calibri"/>
+                        </a:rPr>
+                        <a:t>Marco teórico y discusión</a:t>
+                      </a:r>
+                    </a:p>
+                  </a:txBody>
+                  <a:tcPr anchor="ctr" marL="109728" marR="91440" marT="36576" marB="36576">
+                    <a:solidFill>
+                      <a:srgbClr val="F2F2F2"/>
+                    </a:solidFill>
+                  </a:tcPr>
+                </a:tc>
+              </a:tr>
+              <a:tr h="502920">
+                <a:tc>
+                  <a:txBody>
+                    <a:bodyPr/>
+                    <a:lstStyle/>
+                    <a:p>
+                      <a:pPr algn="l"/>
+                      <a:r>
+                        <a:rPr sz="1100" b="1" i="0">
+                          <a:solidFill>
+                            <a:srgbClr val="2B2B2B"/>
+                          </a:solidFill>
+                          <a:latin typeface="Calibri"/>
+                        </a:rPr>
+                        <a:t>Biblioteca CUN (web)</a:t>
+                      </a:r>
+                    </a:p>
+                  </a:txBody>
+                  <a:tcPr anchor="ctr" marL="109728" marR="91440" marT="36576" marB="36576">
+                    <a:solidFill>
+                      <a:srgbClr val="FFFFFF"/>
+                    </a:solidFill>
+                  </a:tcPr>
+                </a:tc>
+                <a:tc>
+                  <a:txBody>
+                    <a:bodyPr/>
+                    <a:lstStyle/>
+                    <a:p>
+                      <a:pPr algn="l"/>
+                      <a:r>
+                        <a:rPr sz="1100" b="0" i="0">
+                          <a:solidFill>
+                            <a:srgbClr val="2B2B2B"/>
+                          </a:solidFill>
+                          <a:latin typeface="Calibri"/>
+                        </a:rPr>
+                        <a:t>Texto completo de bases suscritas, con login institucional</a:t>
+                      </a:r>
+                    </a:p>
+                  </a:txBody>
+                  <a:tcPr anchor="ctr" marL="109728" marR="91440" marT="36576" marB="36576">
+                    <a:solidFill>
+                      <a:srgbClr val="FFFFFF"/>
+                    </a:solidFill>
+                  </a:tcPr>
+                </a:tc>
+                <a:tc>
+                  <a:txBody>
+                    <a:bodyPr/>
+                    <a:lstStyle/>
+                    <a:p>
+                      <a:pPr algn="l"/>
+                      <a:r>
+                        <a:rPr sz="1100" b="0" i="0">
+                          <a:solidFill>
+                            <a:srgbClr val="2B2B2B"/>
+                          </a:solidFill>
+                          <a:latin typeface="Calibri"/>
+                        </a:rPr>
+                        <a:t>Cuando el PDF no es abierto</a:t>
+                      </a:r>
+                    </a:p>
+                  </a:txBody>
+                  <a:tcPr anchor="ctr" marL="109728" marR="91440" marT="36576" marB="36576">
+                    <a:solidFill>
+                      <a:srgbClr val="FFFFFF"/>
+                    </a:solidFill>
+                  </a:tcPr>
+                </a:tc>
+              </a:tr>
+              <a:tr h="502920">
+                <a:tc>
+                  <a:txBody>
+                    <a:bodyPr/>
+                    <a:lstStyle/>
+                    <a:p>
+                      <a:pPr algn="l"/>
+                      <a:r>
+                        <a:rPr sz="1100" b="1" i="0">
+                          <a:solidFill>
+                            <a:srgbClr val="2B2B2B"/>
+                          </a:solidFill>
+                          <a:latin typeface="Calibri"/>
+                        </a:rPr>
+                        <a:t>ZoteroBib (zbib.org)</a:t>
+                      </a:r>
+                    </a:p>
+                  </a:txBody>
+                  <a:tcPr anchor="ctr" marL="109728" marR="91440" marT="36576" marB="36576">
+                    <a:solidFill>
+                      <a:srgbClr val="F2F2F2"/>
+                    </a:solidFill>
+                  </a:tcPr>
+                </a:tc>
+                <a:tc>
+                  <a:txBody>
+                    <a:bodyPr/>
+                    <a:lstStyle/>
+                    <a:p>
+                      <a:pPr algn="l"/>
+                      <a:r>
+                        <a:rPr sz="1100" b="0" i="0">
+                          <a:solidFill>
+                            <a:srgbClr val="2B2B2B"/>
+                          </a:solidFill>
+                          <a:latin typeface="Calibri"/>
+                        </a:rPr>
+                        <a:t>Generar y ordenar las referencias en APA 7 sin instalar nada</a:t>
+                      </a:r>
+                    </a:p>
+                  </a:txBody>
+                  <a:tcPr anchor="ctr" marL="109728" marR="91440" marT="36576" marB="36576">
+                    <a:solidFill>
+                      <a:srgbClr val="F2F2F2"/>
+                    </a:solidFill>
+                  </a:tcPr>
+                </a:tc>
+                <a:tc>
+                  <a:txBody>
+                    <a:bodyPr/>
+                    <a:lstStyle/>
+                    <a:p>
+                      <a:pPr algn="l"/>
+                      <a:r>
+                        <a:rPr sz="1100" b="0" i="0">
+                          <a:solidFill>
+                            <a:srgbClr val="2B2B2B"/>
+                          </a:solidFill>
+                          <a:latin typeface="Calibri"/>
+                        </a:rPr>
+                        <a:t>Cada vez que cite</a:t>
+                      </a:r>
+                    </a:p>
+                  </a:txBody>
+                  <a:tcPr anchor="ctr" marL="109728" marR="91440" marT="36576" marB="36576">
+                    <a:solidFill>
+                      <a:srgbClr val="F2F2F2"/>
+                    </a:solidFill>
+                  </a:tcPr>
+                </a:tc>
+              </a:tr>
+              <a:tr h="502920">
+                <a:tc>
+                  <a:txBody>
+                    <a:bodyPr/>
+                    <a:lstStyle/>
+                    <a:p>
+                      <a:pPr algn="l"/>
+                      <a:r>
+                        <a:rPr sz="1100" b="1" i="0">
+                          <a:solidFill>
+                            <a:srgbClr val="2B2B2B"/>
+                          </a:solidFill>
+                          <a:latin typeface="Calibri"/>
+                        </a:rPr>
+                        <a:t>Google Slides / Canva free</a:t>
+                      </a:r>
+                    </a:p>
+                  </a:txBody>
+                  <a:tcPr anchor="ctr" marL="109728" marR="91440" marT="36576" marB="36576">
+                    <a:solidFill>
+                      <a:srgbClr val="FFFFFF"/>
+                    </a:solidFill>
+                  </a:tcPr>
+                </a:tc>
+                <a:tc>
+                  <a:txBody>
+                    <a:bodyPr/>
+                    <a:lstStyle/>
+                    <a:p>
+                      <a:pPr algn="l"/>
+                      <a:r>
+                        <a:rPr sz="1100" b="0" i="0">
+                          <a:solidFill>
+                            <a:srgbClr val="2B2B2B"/>
+                          </a:solidFill>
+                          <a:latin typeface="Calibri"/>
+                        </a:rPr>
+                        <a:t>Póster de divulgación y apoyo visual de la sustentación</a:t>
+                      </a:r>
+                    </a:p>
+                  </a:txBody>
+                  <a:tcPr anchor="ctr" marL="109728" marR="91440" marT="36576" marB="36576">
+                    <a:solidFill>
+                      <a:srgbClr val="FFFFFF"/>
+                    </a:solidFill>
+                  </a:tcPr>
+                </a:tc>
+                <a:tc>
+                  <a:txBody>
+                    <a:bodyPr/>
+                    <a:lstStyle/>
+                    <a:p>
+                      <a:pPr algn="l"/>
+                      <a:r>
+                        <a:rPr sz="1100" b="0" i="0">
+                          <a:solidFill>
+                            <a:srgbClr val="2B2B2B"/>
+                          </a:solidFill>
+                          <a:latin typeface="Calibri"/>
+                        </a:rPr>
+                        <a:t>Alistamiento y defensa</a:t>
+                      </a:r>
+                    </a:p>
+                  </a:txBody>
+                  <a:tcPr anchor="ctr" marL="109728" marR="91440" marT="36576" marB="36576">
+                    <a:solidFill>
+                      <a:srgbClr val="FFFFFF"/>
+                    </a:solidFill>
+                  </a:tcPr>
+                </a:tc>
+              </a:tr>
+              <a:tr h="502920">
+                <a:tc>
+                  <a:txBody>
+                    <a:bodyPr/>
+                    <a:lstStyle/>
+                    <a:p>
+                      <a:pPr algn="l"/>
+                      <a:r>
+                        <a:rPr sz="1100" b="1" i="0">
+                          <a:solidFill>
+                            <a:srgbClr val="2B2B2B"/>
+                          </a:solidFill>
+                          <a:latin typeface="Calibri"/>
+                        </a:rPr>
+                        <a:t>Padlet</a:t>
+                      </a:r>
+                    </a:p>
+                  </a:txBody>
+                  <a:tcPr anchor="ctr" marL="109728" marR="91440" marT="36576" marB="36576">
+                    <a:solidFill>
+                      <a:srgbClr val="F2F2F2"/>
+                    </a:solidFill>
+                  </a:tcPr>
+                </a:tc>
+                <a:tc>
+                  <a:txBody>
+                    <a:bodyPr/>
+                    <a:lstStyle/>
+                    <a:p>
+                      <a:pPr algn="l"/>
+                      <a:r>
+                        <a:rPr sz="1100" b="0" i="0">
+                          <a:solidFill>
+                            <a:srgbClr val="2B2B2B"/>
+                          </a:solidFill>
+                          <a:latin typeface="Calibri"/>
+                        </a:rPr>
+                        <a:t>Tablero donde nos presentamos como grupo</a:t>
+                      </a:r>
+                    </a:p>
+                  </a:txBody>
+                  <a:tcPr anchor="ctr" marL="109728" marR="91440" marT="36576" marB="36576">
+                    <a:solidFill>
+                      <a:srgbClr val="F2F2F2"/>
+                    </a:solidFill>
+                  </a:tcPr>
+                </a:tc>
+                <a:tc>
+                  <a:txBody>
+                    <a:bodyPr/>
+                    <a:lstStyle/>
+                    <a:p>
+                      <a:pPr algn="l"/>
+                      <a:r>
+                        <a:rPr sz="1100" b="0" i="0">
+                          <a:solidFill>
+                            <a:srgbClr val="2B2B2B"/>
+                          </a:solidFill>
+                          <a:latin typeface="Calibri"/>
+                        </a:rPr>
+                        <a:t>Hoy</a:t>
+                      </a:r>
+                    </a:p>
+                  </a:txBody>
+                  <a:tcPr anchor="ctr" marL="109728" marR="91440" marT="36576" marB="36576">
+                    <a:solidFill>
+                      <a:srgbClr val="F2F2F2"/>
+                    </a:solidFill>
+                  </a:tcPr>
+                </a:tc>
+              </a:tr>
+            </a:tbl>
+          </a:graphicData>
+        </a:graphic>
+      </p:graphicFrame>
+      <p:sp>
+        <p:nvSpPr>
+          <p:cNvPr id="5" name="TextBox 4"/>
+          <p:cNvSpPr txBox="1"/>
+          <p:nvPr/>
+        </p:nvSpPr>
+        <p:spPr>
+          <a:xfrm>
+            <a:off x="640080" y="6080760"/>
+            <a:ext cx="10911535" cy="548640"/>
+          </a:xfrm>
+          <a:prstGeom prst="rect">
+            <a:avLst/>
+          </a:prstGeom>
+          <a:noFill/>
+        </p:spPr>
+        <p:txBody>
+          <a:bodyPr wrap="square" anchor="t" lIns="0" rIns="0" tIns="0" bIns="0">
+            <a:spAutoFit/>
+          </a:bodyPr>
+          <a:lstStyle/>
+          <a:p>
+            <a:r>
+              <a:rPr sz="1200" b="0" i="1">
+                <a:solidFill>
+                  <a:srgbClr val="2B2B2B"/>
+                </a:solidFill>
+                <a:latin typeface="Calibri"/>
+              </a:rPr>
+              <a:t>No se exige instalar nada: ni Office de escritorio, ni Mendeley, ni Zotero de escritorio. Un navegador y su cuenta institucional bastan.</a:t>
+            </a:r>
+          </a:p>
+        </p:txBody>
+      </p:sp>
+      <p:sp>
+        <p:nvSpPr>
+          <p:cNvPr id="6" name="TextBox 5"/>
+          <p:cNvSpPr txBox="1"/>
+          <p:nvPr/>
+        </p:nvSpPr>
+        <p:spPr>
+          <a:xfrm>
+            <a:off x="2194560" y="6446520"/>
+            <a:ext cx="5943600" cy="274320"/>
+          </a:xfrm>
+          <a:prstGeom prst="rect">
+            <a:avLst/>
+          </a:prstGeom>
+          <a:noFill/>
+        </p:spPr>
+        <p:txBody>
+          <a:bodyPr wrap="square" anchor="t" lIns="0" rIns="0" tIns="0" bIns="0">
+            <a:spAutoFit/>
+          </a:bodyPr>
+          <a:lstStyle/>
+          <a:p>
+            <a:pPr algn="l"/>
+            <a:r>
+              <a:rPr sz="1000" b="1" i="0">
+                <a:solidFill>
+                  <a:srgbClr val="8F989D"/>
+                </a:solidFill>
+                <a:latin typeface="Calibri"/>
+              </a:rPr>
+              <a:t>Inicio 5:10 pm</a:t>
+            </a:r>
+          </a:p>
+        </p:txBody>
+      </p:sp>
+      <p:sp>
+        <p:nvSpPr>
+          <p:cNvPr id="7" name="TextBox 6"/>
+          <p:cNvSpPr txBox="1"/>
+          <p:nvPr/>
+        </p:nvSpPr>
+        <p:spPr>
+          <a:xfrm>
+            <a:off x="11094415" y="6446520"/>
+            <a:ext cx="548640" cy="274320"/>
+          </a:xfrm>
+          <a:prstGeom prst="rect">
+            <a:avLst/>
+          </a:prstGeom>
+          <a:noFill/>
+        </p:spPr>
+        <p:txBody>
+          <a:bodyPr wrap="square" anchor="t" lIns="0" rIns="0" tIns="0" bIns="0">
+            <a:spAutoFit/>
+          </a:bodyPr>
+          <a:lstStyle/>
+          <a:p>
+            <a:pPr algn="r"/>
+            <a:r>
+              <a:rPr sz="1000" b="1" i="0">
+                <a:solidFill>
+                  <a:srgbClr val="8F989D"/>
+                </a:solidFill>
+                <a:latin typeface="Calibri"/>
+              </a:rPr>
+              <a:t>15</a:t>
+            </a:r>
+          </a:p>
+        </p:txBody>
+      </p:sp>
+    </p:spTree>
+  </p:cSld>
+  <p:clrMapOvr>
+    <a:masterClrMapping/>
+  </p:clrMapOvr>
+</p:sld>
+</file>
+
+<file path=ppt/slides/slide16.xml><?xml version="1.0" encoding="utf-8"?>
+<p:sld xmlns:a="http://schemas.openxmlformats.org/drawingml/2006/main" xmlns:p="http://schemas.openxmlformats.org/presentationml/2006/main" xmlns:r="http://schemas.openxmlformats.org/officeDocument/2006/relationships">
+  <p:cSld>
+    <p:bg>
+      <p:bgPr>
+        <a:solidFill>
+          <a:srgbClr val="FFFFFF"/>
+        </a:solidFill>
+        <a:effectLst/>
+      </p:bgPr>
+    </p:bg>
+    <p:spTree>
+      <p:nvGrpSpPr>
+        <p:cNvPr id="1" name=""/>
+        <p:cNvGrpSpPr/>
+        <p:nvPr/>
+      </p:nvGrpSpPr>
+      <p:grpSpPr/>
+      <p:sp>
+        <p:nvSpPr>
+          <p:cNvPr id="2" name="Rectangle 1"/>
+          <p:cNvSpPr/>
+          <p:nvPr/>
+        </p:nvSpPr>
+        <p:spPr>
+          <a:xfrm>
+            <a:off x="0" y="0"/>
+            <a:ext cx="12191695" cy="1188720"/>
+          </a:xfrm>
+          <a:prstGeom prst="rect">
+            <a:avLst/>
+          </a:prstGeom>
+          <a:solidFill>
+            <a:srgbClr val="0C2340"/>
+          </a:solidFill>
+          <a:ln>
+            <a:noFill/>
+          </a:ln>
+          <a:effectLst/>
+        </p:spPr>
+        <p:style>
+          <a:lnRef idx="1">
+            <a:schemeClr val="accent1"/>
+          </a:lnRef>
+          <a:fillRef idx="3">
+            <a:schemeClr val="accent1"/>
+          </a:fillRef>
+          <a:effectRef idx="2">
+            <a:schemeClr val="accent1"/>
+          </a:effectRef>
+          <a:fontRef idx="minor">
+            <a:schemeClr val="lt1"/>
+          </a:fontRef>
+        </p:style>
+        <p:txBody>
+          <a:bodyPr rtlCol="0" anchor="ctr"/>
+          <a:lstStyle/>
+          <a:p>
+            <a:pPr algn="ctr"/>
+          </a:p>
+        </p:txBody>
+      </p:sp>
+      <p:sp>
+        <p:nvSpPr>
+          <p:cNvPr id="3" name="TextBox 2"/>
+          <p:cNvSpPr txBox="1"/>
+          <p:nvPr/>
+        </p:nvSpPr>
+        <p:spPr>
+          <a:xfrm>
+            <a:off x="640080" y="0"/>
+            <a:ext cx="9082735" cy="1188720"/>
+          </a:xfrm>
+          <a:prstGeom prst="rect">
+            <a:avLst/>
+          </a:prstGeom>
+          <a:noFill/>
+        </p:spPr>
+        <p:txBody>
+          <a:bodyPr wrap="square" anchor="ctr" lIns="0" rIns="0" tIns="0" bIns="0">
+            <a:spAutoFit/>
+          </a:bodyPr>
+          <a:lstStyle/>
+          <a:p>
+            <a:pPr algn="ctr"/>
+            <a:r>
+              <a:rPr sz="2600" b="1" i="0">
+                <a:solidFill>
+                  <a:srgbClr val="FFFFFF"/>
+                </a:solidFill>
+                <a:latin typeface="Calibri"/>
+              </a:rPr>
+              <a:t>Cómo pedir ayuda (y cómo pedirla bien)</a:t>
+            </a:r>
+          </a:p>
+        </p:txBody>
+      </p:sp>
+      <p:sp>
+        <p:nvSpPr>
+          <p:cNvPr id="4" name="TextBox 3"/>
+          <p:cNvSpPr txBox="1"/>
+          <p:nvPr/>
+        </p:nvSpPr>
+        <p:spPr>
+          <a:xfrm>
+            <a:off x="640080" y="1691639"/>
+            <a:ext cx="10911535" cy="4617720"/>
+          </a:xfrm>
+          <a:prstGeom prst="rect">
+            <a:avLst/>
+          </a:prstGeom>
+          <a:noFill/>
+        </p:spPr>
+        <p:txBody>
+          <a:bodyPr wrap="square" anchor="t" lIns="0" rIns="0" tIns="0" bIns="0">
+            <a:spAutoFit/>
+          </a:bodyPr>
+          <a:lstStyle/>
+          <a:p>
+            <a:pPr>
+              <a:spcAft>
+                <a:spcPts val="1000"/>
+              </a:spcAft>
+            </a:pPr>
+            <a:r>
+              <a:rPr sz="1600" b="0" i="0">
+                <a:solidFill>
+                  <a:srgbClr val="2B2B2B"/>
+                </a:solidFill>
+                <a:latin typeface="Calibri"/>
+              </a:rPr>
+              <a:t>–   </a:t>
+            </a:r>
+            <a:r>
+              <a:rPr sz="1600" b="1" i="0">
+                <a:solidFill>
+                  <a:srgbClr val="2B2B2B"/>
+                </a:solidFill>
+                <a:latin typeface="Calibri"/>
+              </a:rPr>
+              <a:t>Canal oficial:</a:t>
+            </a:r>
+            <a:r>
+              <a:rPr sz="1600" b="0" i="0">
+                <a:solidFill>
+                  <a:srgbClr val="2B2B2B"/>
+                </a:solidFill>
+                <a:latin typeface="Calibri"/>
+              </a:rPr>
+              <a:t> el espacio de mensajes o foro del curso en </a:t>
+            </a:r>
+            <a:r>
+              <a:rPr sz="1600" b="1" i="0">
+                <a:solidFill>
+                  <a:srgbClr val="2B2B2B"/>
+                </a:solidFill>
+                <a:latin typeface="Calibri"/>
+              </a:rPr>
+              <a:t>CDigital</a:t>
+            </a:r>
+            <a:r>
+              <a:rPr sz="1600" b="0" i="0">
+                <a:solidFill>
+                  <a:srgbClr val="2B2B2B"/>
+                </a:solidFill>
+                <a:latin typeface="Calibri"/>
+              </a:rPr>
+              <a:t>. Ahí queda registro de lo preguntado y lo respondido.</a:t>
+            </a:r>
+          </a:p>
+          <a:p>
+            <a:pPr>
+              <a:spcAft>
+                <a:spcPts val="1000"/>
+              </a:spcAft>
+            </a:pPr>
+            <a:r>
+              <a:rPr sz="1600" b="0" i="0">
+                <a:solidFill>
+                  <a:srgbClr val="2B2B2B"/>
+                </a:solidFill>
+                <a:latin typeface="Calibri"/>
+              </a:rPr>
+              <a:t>–   </a:t>
+            </a:r>
+            <a:r>
+              <a:rPr sz="1600" b="1" i="0">
+                <a:solidFill>
+                  <a:srgbClr val="2B2B2B"/>
+                </a:solidFill>
+                <a:latin typeface="Calibri"/>
+              </a:rPr>
+              <a:t>Correo del Docente</a:t>
+            </a:r>
+            <a:r>
+              <a:rPr sz="1600" b="0" i="0">
+                <a:solidFill>
+                  <a:srgbClr val="2B2B2B"/>
+                </a:solidFill>
+                <a:latin typeface="Calibri"/>
+              </a:rPr>
+              <a:t> (el de la slide *Docente*): novedades personales — incapacidad, cruce de horario, fuerza mayor.</a:t>
+            </a:r>
+          </a:p>
+          <a:p>
+            <a:pPr>
+              <a:spcAft>
+                <a:spcPts val="1000"/>
+              </a:spcAft>
+            </a:pPr>
+            <a:r>
+              <a:rPr sz="1600" b="0" i="0">
+                <a:solidFill>
+                  <a:srgbClr val="2B2B2B"/>
+                </a:solidFill>
+                <a:latin typeface="Calibri"/>
+              </a:rPr>
+              <a:t>–   </a:t>
+            </a:r>
+            <a:r>
+              <a:rPr sz="1600" b="1" i="0">
+                <a:solidFill>
+                  <a:srgbClr val="2B2B2B"/>
+                </a:solidFill>
+                <a:latin typeface="Calibri"/>
+              </a:rPr>
+              <a:t>Tiempo de respuesta:</a:t>
+            </a:r>
+            <a:r>
+              <a:rPr sz="1600" b="0" i="0">
+                <a:solidFill>
+                  <a:srgbClr val="2B2B2B"/>
+                </a:solidFill>
+                <a:latin typeface="Calibri"/>
+              </a:rPr>
+              <a:t> en días hábiles y, en todo caso, </a:t>
+            </a:r>
+            <a:r>
+              <a:rPr sz="1600" b="1" i="0">
+                <a:solidFill>
+                  <a:srgbClr val="2B2B2B"/>
+                </a:solidFill>
+                <a:latin typeface="Calibri"/>
+              </a:rPr>
+              <a:t>antes del siguiente encuentro</a:t>
+            </a:r>
+            <a:r>
+              <a:rPr sz="1600" b="0" i="0">
+                <a:solidFill>
+                  <a:srgbClr val="2B2B2B"/>
+                </a:solidFill>
+                <a:latin typeface="Calibri"/>
+              </a:rPr>
+              <a:t>.</a:t>
+            </a:r>
+          </a:p>
+          <a:p>
+            <a:pPr>
+              <a:spcAft>
+                <a:spcPts val="1000"/>
+              </a:spcAft>
+            </a:pPr>
+            <a:r>
+              <a:rPr sz="1600" b="0" i="0">
+                <a:solidFill>
+                  <a:srgbClr val="2B2B2B"/>
+                </a:solidFill>
+                <a:latin typeface="Calibri"/>
+              </a:rPr>
+              <a:t>–   </a:t>
+            </a:r>
+            <a:r>
+              <a:rPr sz="1600" b="1" i="0">
+                <a:solidFill>
+                  <a:srgbClr val="2B2B2B"/>
+                </a:solidFill>
+                <a:latin typeface="Calibri"/>
+              </a:rPr>
+              <a:t>En el encuentro:</a:t>
+            </a:r>
+            <a:r>
+              <a:rPr sz="1600" b="0" i="0">
+                <a:solidFill>
+                  <a:srgbClr val="2B2B2B"/>
+                </a:solidFill>
+                <a:latin typeface="Calibri"/>
+              </a:rPr>
+              <a:t> la revisión uno a uno se hace sobre su documento. Llegue con la sección abierta y el párrafo señalado.</a:t>
+            </a:r>
+          </a:p>
+          <a:p>
+            <a:pPr>
+              <a:spcAft>
+                <a:spcPts val="1000"/>
+              </a:spcAft>
+            </a:pPr>
+            <a:r>
+              <a:rPr sz="1600" b="0" i="0">
+                <a:solidFill>
+                  <a:srgbClr val="2B2B2B"/>
+                </a:solidFill>
+                <a:latin typeface="Calibri"/>
+              </a:rPr>
+              <a:t>–   </a:t>
+            </a:r>
+            <a:r>
+              <a:rPr sz="1600" b="1" i="0">
+                <a:solidFill>
+                  <a:srgbClr val="2B2B2B"/>
+                </a:solidFill>
+                <a:latin typeface="Calibri"/>
+              </a:rPr>
+              <a:t>Una buena pregunta trae el texto:</a:t>
+            </a:r>
+          </a:p>
+          <a:p>
+            <a:pPr lvl="1">
+              <a:spcAft>
+                <a:spcPts val="600"/>
+              </a:spcAft>
+            </a:pPr>
+            <a:r>
+              <a:rPr sz="1500" b="0" i="0">
+                <a:solidFill>
+                  <a:srgbClr val="2B2B2B"/>
+                </a:solidFill>
+                <a:latin typeface="Calibri"/>
+              </a:rPr>
+              <a:t>●   Mal: “profe, ¿cómo hago la discusión?”.</a:t>
+            </a:r>
+          </a:p>
+          <a:p>
+            <a:pPr lvl="1">
+              <a:spcAft>
+                <a:spcPts val="600"/>
+              </a:spcAft>
+            </a:pPr>
+            <a:r>
+              <a:rPr sz="1500" b="0" i="0">
+                <a:solidFill>
+                  <a:srgbClr val="2B2B2B"/>
+                </a:solidFill>
+                <a:latin typeface="Calibri"/>
+              </a:rPr>
+              <a:t>●   Bien: “tengo este hallazgo y estos dos autores que dicen lo contrario: ¿cómo lo escribo sin contradecirme?”.</a:t>
+            </a:r>
+          </a:p>
+          <a:p>
+            <a:pPr>
+              <a:spcAft>
+                <a:spcPts val="1000"/>
+              </a:spcAft>
+            </a:pPr>
+            <a:r>
+              <a:rPr sz="1600" b="0" i="0">
+                <a:solidFill>
+                  <a:srgbClr val="2B2B2B"/>
+                </a:solidFill>
+                <a:latin typeface="Calibri"/>
+              </a:rPr>
+              <a:t>–   En trámites de sustentación y repositorio, </a:t>
+            </a:r>
+            <a:r>
+              <a:rPr sz="1600" b="1" i="0">
+                <a:solidFill>
+                  <a:srgbClr val="2B2B2B"/>
+                </a:solidFill>
+                <a:latin typeface="Calibri"/>
+              </a:rPr>
+              <a:t>pregunte temprano</a:t>
+            </a:r>
+            <a:r>
+              <a:rPr sz="1600" b="0" i="0">
+                <a:solidFill>
+                  <a:srgbClr val="2B2B2B"/>
+                </a:solidFill>
+                <a:latin typeface="Calibri"/>
+              </a:rPr>
+              <a:t>: los pasos administrativos no se resuelven la víspera.</a:t>
+            </a:r>
+          </a:p>
+        </p:txBody>
+      </p:sp>
+      <p:sp>
+        <p:nvSpPr>
+          <p:cNvPr id="5" name="TextBox 4"/>
+          <p:cNvSpPr txBox="1"/>
+          <p:nvPr/>
+        </p:nvSpPr>
+        <p:spPr>
+          <a:xfrm>
+            <a:off x="2194560" y="6446520"/>
+            <a:ext cx="5943600" cy="274320"/>
+          </a:xfrm>
+          <a:prstGeom prst="rect">
+            <a:avLst/>
+          </a:prstGeom>
+          <a:noFill/>
+        </p:spPr>
+        <p:txBody>
+          <a:bodyPr wrap="square" anchor="t" lIns="0" rIns="0" tIns="0" bIns="0">
+            <a:spAutoFit/>
+          </a:bodyPr>
+          <a:lstStyle/>
+          <a:p>
+            <a:pPr algn="l"/>
+            <a:r>
+              <a:rPr sz="1000" b="1" i="0">
+                <a:solidFill>
+                  <a:srgbClr val="8F989D"/>
+                </a:solidFill>
+                <a:latin typeface="Calibri"/>
+              </a:rPr>
+              <a:t>Inicio 5:10 pm</a:t>
+            </a:r>
+          </a:p>
+        </p:txBody>
+      </p:sp>
+      <p:sp>
+        <p:nvSpPr>
+          <p:cNvPr id="6" name="TextBox 5"/>
+          <p:cNvSpPr txBox="1"/>
+          <p:nvPr/>
+        </p:nvSpPr>
+        <p:spPr>
+          <a:xfrm>
+            <a:off x="11094415" y="6446520"/>
+            <a:ext cx="548640" cy="274320"/>
+          </a:xfrm>
+          <a:prstGeom prst="rect">
+            <a:avLst/>
+          </a:prstGeom>
+          <a:noFill/>
+        </p:spPr>
+        <p:txBody>
+          <a:bodyPr wrap="square" anchor="t" lIns="0" rIns="0" tIns="0" bIns="0">
+            <a:spAutoFit/>
+          </a:bodyPr>
+          <a:lstStyle/>
+          <a:p>
+            <a:pPr algn="r"/>
+            <a:r>
+              <a:rPr sz="1000" b="1" i="0">
+                <a:solidFill>
+                  <a:srgbClr val="8F989D"/>
+                </a:solidFill>
+                <a:latin typeface="Calibri"/>
+              </a:rPr>
+              <a:t>16</a:t>
+            </a:r>
+          </a:p>
+        </p:txBody>
+      </p:sp>
+    </p:spTree>
+  </p:cSld>
+  <p:clrMapOvr>
+    <a:masterClrMapping/>
+  </p:clrMapOvr>
+</p:sld>
+</file>
+
+<file path=ppt/slides/slide17.xml><?xml version="1.0" encoding="utf-8"?>
+<p:sld xmlns:a="http://schemas.openxmlformats.org/drawingml/2006/main" xmlns:p="http://schemas.openxmlformats.org/presentationml/2006/main" xmlns:r="http://schemas.openxmlformats.org/officeDocument/2006/relationships">
+  <p:cSld>
+    <p:bg>
+      <p:bgPr>
+        <a:solidFill>
+          <a:srgbClr val="FFFFFF"/>
+        </a:solidFill>
+        <a:effectLst/>
+      </p:bgPr>
+    </p:bg>
+    <p:spTree>
+      <p:nvGrpSpPr>
+        <p:cNvPr id="1" name=""/>
+        <p:cNvGrpSpPr/>
+        <p:nvPr/>
+      </p:nvGrpSpPr>
+      <p:grpSpPr/>
+      <p:sp>
+        <p:nvSpPr>
+          <p:cNvPr id="2" name="Rectangle 1"/>
+          <p:cNvSpPr/>
+          <p:nvPr/>
+        </p:nvSpPr>
+        <p:spPr>
+          <a:xfrm>
+            <a:off x="0" y="0"/>
+            <a:ext cx="12191695" cy="1188720"/>
+          </a:xfrm>
+          <a:prstGeom prst="rect">
+            <a:avLst/>
+          </a:prstGeom>
+          <a:solidFill>
+            <a:srgbClr val="0C2340"/>
+          </a:solidFill>
+          <a:ln>
+            <a:noFill/>
+          </a:ln>
+          <a:effectLst/>
+        </p:spPr>
+        <p:style>
+          <a:lnRef idx="1">
+            <a:schemeClr val="accent1"/>
+          </a:lnRef>
+          <a:fillRef idx="3">
+            <a:schemeClr val="accent1"/>
+          </a:fillRef>
+          <a:effectRef idx="2">
+            <a:schemeClr val="accent1"/>
+          </a:effectRef>
+          <a:fontRef idx="minor">
+            <a:schemeClr val="lt1"/>
+          </a:fontRef>
+        </p:style>
+        <p:txBody>
+          <a:bodyPr rtlCol="0" anchor="ctr"/>
+          <a:lstStyle/>
+          <a:p>
+            <a:pPr algn="ctr"/>
+          </a:p>
+        </p:txBody>
+      </p:sp>
+      <p:sp>
+        <p:nvSpPr>
+          <p:cNvPr id="3" name="TextBox 2"/>
+          <p:cNvSpPr txBox="1"/>
+          <p:nvPr/>
+        </p:nvSpPr>
+        <p:spPr>
+          <a:xfrm>
+            <a:off x="640080" y="0"/>
+            <a:ext cx="9082735" cy="1188720"/>
+          </a:xfrm>
+          <a:prstGeom prst="rect">
+            <a:avLst/>
+          </a:prstGeom>
+          <a:noFill/>
+        </p:spPr>
+        <p:txBody>
+          <a:bodyPr wrap="square" anchor="ctr" lIns="0" rIns="0" tIns="0" bIns="0">
+            <a:spAutoFit/>
+          </a:bodyPr>
+          <a:lstStyle/>
+          <a:p>
+            <a:pPr algn="ctr"/>
+            <a:r>
+              <a:rPr sz="2600" b="1" i="0">
+                <a:solidFill>
+                  <a:srgbClr val="FFFFFF"/>
+                </a:solidFill>
+                <a:latin typeface="Calibri"/>
+              </a:rPr>
+              <a:t>Acuerdos de convivencia del encuentro virtual</a:t>
+            </a:r>
+          </a:p>
+        </p:txBody>
+      </p:sp>
+      <p:sp>
+        <p:nvSpPr>
+          <p:cNvPr id="4" name="Rounded Rectangle 3"/>
+          <p:cNvSpPr/>
+          <p:nvPr/>
+        </p:nvSpPr>
+        <p:spPr>
+          <a:xfrm>
+            <a:off x="640080" y="1737360"/>
+            <a:ext cx="10911535" cy="1225296"/>
+          </a:xfrm>
+          <a:prstGeom prst="roundRect">
+            <a:avLst/>
+          </a:prstGeom>
+          <a:solidFill>
+            <a:srgbClr val="E8F5EC"/>
+          </a:solidFill>
+          <a:ln>
+            <a:noFill/>
+          </a:ln>
+          <a:effectLst/>
+        </p:spPr>
+        <p:style>
+          <a:lnRef idx="1">
+            <a:schemeClr val="accent1"/>
+          </a:lnRef>
+          <a:fillRef idx="3">
+            <a:schemeClr val="accent1"/>
+          </a:fillRef>
+          <a:effectRef idx="2">
+            <a:schemeClr val="accent1"/>
+          </a:effectRef>
+          <a:fontRef idx="minor">
+            <a:schemeClr val="lt1"/>
+          </a:fontRef>
+        </p:style>
+        <p:txBody>
+          <a:bodyPr rtlCol="0" anchor="ctr"/>
+          <a:lstStyle/>
+          <a:p>
+            <a:pPr algn="ctr"/>
+          </a:p>
+        </p:txBody>
+      </p:sp>
+      <p:sp>
+        <p:nvSpPr>
+          <p:cNvPr id="5" name="TextBox 4"/>
+          <p:cNvSpPr txBox="1"/>
+          <p:nvPr/>
+        </p:nvSpPr>
+        <p:spPr>
+          <a:xfrm>
+            <a:off x="868680" y="1847088"/>
+            <a:ext cx="10454335" cy="1005840"/>
+          </a:xfrm>
+          <a:prstGeom prst="rect">
+            <a:avLst/>
+          </a:prstGeom>
+          <a:noFill/>
+        </p:spPr>
+        <p:txBody>
+          <a:bodyPr wrap="square" anchor="t" lIns="0" rIns="0" tIns="0" bIns="0">
+            <a:spAutoFit/>
+          </a:bodyPr>
+          <a:lstStyle/>
+          <a:p>
+            <a:r>
+              <a:rPr sz="1300" b="1" i="0">
+                <a:solidFill>
+                  <a:srgbClr val="0C2340"/>
+                </a:solidFill>
+                <a:latin typeface="Calibri"/>
+              </a:rPr>
+              <a:t>ℹ️ Nota institucional</a:t>
+            </a:r>
+          </a:p>
+          <a:p>
+            <a:pPr>
+              <a:spcBef>
+                <a:spcPts val="400"/>
+              </a:spcBef>
+            </a:pPr>
+            <a:r>
+              <a:rPr sz="1300" b="1" i="0">
+                <a:solidFill>
+                  <a:srgbClr val="2B2B2B"/>
+                </a:solidFill>
+                <a:latin typeface="Calibri"/>
+              </a:rPr>
+              <a:t>Puntualidad.</a:t>
+            </a:r>
+            <a:r>
+              <a:rPr sz="1300" b="0" i="0">
+                <a:solidFill>
+                  <a:srgbClr val="2B2B2B"/>
+                </a:solidFill>
+                <a:latin typeface="Calibri"/>
+              </a:rPr>
+              <a:t> Se empieza a la hora del pie de estas diapositivas: en una hora semanal, diez minutos tarde son la sexta parte de la clase. </a:t>
+            </a:r>
+            <a:r>
+              <a:rPr sz="1300" b="1" i="0">
+                <a:solidFill>
+                  <a:srgbClr val="2B2B2B"/>
+                </a:solidFill>
+                <a:latin typeface="Calibri"/>
+              </a:rPr>
+              <a:t>Micrófono</a:t>
+            </a:r>
+            <a:r>
+              <a:rPr sz="1300" b="0" i="0">
+                <a:solidFill>
+                  <a:srgbClr val="2B2B2B"/>
+                </a:solidFill>
+                <a:latin typeface="Calibri"/>
+              </a:rPr>
+              <a:t> apagado mientras alguien expone.</a:t>
+            </a:r>
+          </a:p>
+        </p:txBody>
+      </p:sp>
+      <p:sp>
+        <p:nvSpPr>
+          <p:cNvPr id="6" name="Rounded Rectangle 5"/>
+          <p:cNvSpPr/>
+          <p:nvPr/>
+        </p:nvSpPr>
+        <p:spPr>
+          <a:xfrm>
+            <a:off x="640080" y="3191256"/>
+            <a:ext cx="10911535" cy="1225296"/>
+          </a:xfrm>
+          <a:prstGeom prst="roundRect">
+            <a:avLst/>
+          </a:prstGeom>
+          <a:solidFill>
+            <a:srgbClr val="FDECD8"/>
+          </a:solidFill>
+          <a:ln>
+            <a:noFill/>
+          </a:ln>
+          <a:effectLst/>
+        </p:spPr>
+        <p:style>
+          <a:lnRef idx="1">
+            <a:schemeClr val="accent1"/>
+          </a:lnRef>
+          <a:fillRef idx="3">
+            <a:schemeClr val="accent1"/>
+          </a:fillRef>
+          <a:effectRef idx="2">
+            <a:schemeClr val="accent1"/>
+          </a:effectRef>
+          <a:fontRef idx="minor">
+            <a:schemeClr val="lt1"/>
+          </a:fontRef>
+        </p:style>
+        <p:txBody>
+          <a:bodyPr rtlCol="0" anchor="ctr"/>
+          <a:lstStyle/>
+          <a:p>
+            <a:pPr algn="ctr"/>
+          </a:p>
+        </p:txBody>
+      </p:sp>
+      <p:sp>
+        <p:nvSpPr>
+          <p:cNvPr id="7" name="TextBox 6"/>
+          <p:cNvSpPr txBox="1"/>
+          <p:nvPr/>
+        </p:nvSpPr>
+        <p:spPr>
+          <a:xfrm>
+            <a:off x="868680" y="3300984"/>
+            <a:ext cx="10454335" cy="1005840"/>
+          </a:xfrm>
+          <a:prstGeom prst="rect">
+            <a:avLst/>
+          </a:prstGeom>
+          <a:noFill/>
+        </p:spPr>
+        <p:txBody>
+          <a:bodyPr wrap="square" anchor="t" lIns="0" rIns="0" tIns="0" bIns="0">
+            <a:spAutoFit/>
+          </a:bodyPr>
+          <a:lstStyle/>
+          <a:p>
+            <a:r>
+              <a:rPr sz="1300" b="1" i="0">
+                <a:solidFill>
+                  <a:srgbClr val="0C2340"/>
+                </a:solidFill>
+                <a:latin typeface="Calibri"/>
+              </a:rPr>
+              <a:t>💡 Aclaración</a:t>
+            </a:r>
+          </a:p>
+          <a:p>
+            <a:pPr>
+              <a:spcBef>
+                <a:spcPts val="400"/>
+              </a:spcBef>
+            </a:pPr>
+            <a:r>
+              <a:rPr sz="1300" b="1" i="0">
+                <a:solidFill>
+                  <a:srgbClr val="2B2B2B"/>
+                </a:solidFill>
+                <a:latin typeface="Calibri"/>
+              </a:rPr>
+              <a:t>Compartir pantalla es parte del curso.</a:t>
+            </a:r>
+            <a:r>
+              <a:rPr sz="1300" b="0" i="0">
+                <a:solidFill>
+                  <a:srgbClr val="2B2B2B"/>
+                </a:solidFill>
+                <a:latin typeface="Calibri"/>
+              </a:rPr>
+              <a:t> Se proyectan borradores reales, propios y ajenos; la </a:t>
+            </a:r>
+            <a:r>
+              <a:rPr sz="1300" b="1" i="0">
+                <a:solidFill>
+                  <a:srgbClr val="2B2B2B"/>
+                </a:solidFill>
+                <a:latin typeface="Calibri"/>
+              </a:rPr>
+              <a:t>cámara</a:t>
+            </a:r>
+            <a:r>
+              <a:rPr sz="1300" b="0" i="0">
+                <a:solidFill>
+                  <a:srgbClr val="2B2B2B"/>
+                </a:solidFill>
+                <a:latin typeface="Calibri"/>
+              </a:rPr>
+              <a:t> se agradece si su conexión lo permite. Nadie se burla de un texto a medio hacer: para eso venimos.</a:t>
+            </a:r>
+          </a:p>
+        </p:txBody>
+      </p:sp>
+      <p:sp>
+        <p:nvSpPr>
+          <p:cNvPr id="8" name="Rounded Rectangle 7"/>
+          <p:cNvSpPr/>
+          <p:nvPr/>
+        </p:nvSpPr>
+        <p:spPr>
+          <a:xfrm>
+            <a:off x="640080" y="4645152"/>
+            <a:ext cx="10911535" cy="969264"/>
+          </a:xfrm>
+          <a:prstGeom prst="roundRect">
+            <a:avLst/>
+          </a:prstGeom>
+          <a:solidFill>
+            <a:srgbClr val="FBE4E4"/>
+          </a:solidFill>
+          <a:ln>
+            <a:noFill/>
+          </a:ln>
+          <a:effectLst/>
+        </p:spPr>
+        <p:style>
+          <a:lnRef idx="1">
+            <a:schemeClr val="accent1"/>
+          </a:lnRef>
+          <a:fillRef idx="3">
+            <a:schemeClr val="accent1"/>
+          </a:fillRef>
+          <a:effectRef idx="2">
+            <a:schemeClr val="accent1"/>
+          </a:effectRef>
+          <a:fontRef idx="minor">
+            <a:schemeClr val="lt1"/>
+          </a:fontRef>
+        </p:style>
+        <p:txBody>
+          <a:bodyPr rtlCol="0" anchor="ctr"/>
+          <a:lstStyle/>
+          <a:p>
+            <a:pPr algn="ctr"/>
+          </a:p>
+        </p:txBody>
+      </p:sp>
+      <p:sp>
+        <p:nvSpPr>
+          <p:cNvPr id="9" name="TextBox 8"/>
+          <p:cNvSpPr txBox="1"/>
+          <p:nvPr/>
+        </p:nvSpPr>
+        <p:spPr>
+          <a:xfrm>
+            <a:off x="868680" y="4754880"/>
+            <a:ext cx="10454335" cy="749808"/>
+          </a:xfrm>
+          <a:prstGeom prst="rect">
+            <a:avLst/>
+          </a:prstGeom>
+          <a:noFill/>
+        </p:spPr>
+        <p:txBody>
+          <a:bodyPr wrap="square" anchor="t" lIns="0" rIns="0" tIns="0" bIns="0">
+            <a:spAutoFit/>
+          </a:bodyPr>
+          <a:lstStyle/>
+          <a:p>
+            <a:r>
+              <a:rPr sz="1300" b="1" i="0">
+                <a:solidFill>
+                  <a:srgbClr val="0C2340"/>
+                </a:solidFill>
+                <a:latin typeface="Calibri"/>
+              </a:rPr>
+              <a:t>⚠️ Importante</a:t>
+            </a:r>
+          </a:p>
+          <a:p>
+            <a:pPr>
+              <a:spcBef>
+                <a:spcPts val="400"/>
+              </a:spcBef>
+            </a:pPr>
+            <a:r>
+              <a:rPr sz="1300" b="1" i="0">
+                <a:solidFill>
+                  <a:srgbClr val="2B2B2B"/>
+                </a:solidFill>
+                <a:latin typeface="Calibri"/>
+              </a:rPr>
+              <a:t>Retroalimentación exigente y respetuosa.</a:t>
+            </a:r>
+            <a:r>
+              <a:rPr sz="1300" b="0" i="0">
+                <a:solidFill>
+                  <a:srgbClr val="2B2B2B"/>
+                </a:solidFill>
+                <a:latin typeface="Calibri"/>
+              </a:rPr>
+              <a:t> Se comenta el trabajo, nunca a la persona, y siempre con una propuesta concreta. Así es exactamente como pregunta un jurado.</a:t>
+            </a:r>
+          </a:p>
+        </p:txBody>
+      </p:sp>
+      <p:sp>
+        <p:nvSpPr>
+          <p:cNvPr id="10" name="TextBox 9"/>
+          <p:cNvSpPr txBox="1"/>
+          <p:nvPr/>
+        </p:nvSpPr>
+        <p:spPr>
+          <a:xfrm>
+            <a:off x="2194560" y="6446520"/>
+            <a:ext cx="5943600" cy="274320"/>
+          </a:xfrm>
+          <a:prstGeom prst="rect">
+            <a:avLst/>
+          </a:prstGeom>
+          <a:noFill/>
+        </p:spPr>
+        <p:txBody>
+          <a:bodyPr wrap="square" anchor="t" lIns="0" rIns="0" tIns="0" bIns="0">
+            <a:spAutoFit/>
+          </a:bodyPr>
+          <a:lstStyle/>
+          <a:p>
+            <a:pPr algn="l"/>
+            <a:r>
+              <a:rPr sz="1000" b="1" i="0">
+                <a:solidFill>
+                  <a:srgbClr val="8F989D"/>
+                </a:solidFill>
+                <a:latin typeface="Calibri"/>
+              </a:rPr>
+              <a:t>Inicio 5:10 pm</a:t>
+            </a:r>
+          </a:p>
+        </p:txBody>
+      </p:sp>
+      <p:sp>
+        <p:nvSpPr>
+          <p:cNvPr id="11" name="TextBox 10"/>
+          <p:cNvSpPr txBox="1"/>
+          <p:nvPr/>
+        </p:nvSpPr>
+        <p:spPr>
+          <a:xfrm>
+            <a:off x="11094415" y="6446520"/>
+            <a:ext cx="548640" cy="274320"/>
+          </a:xfrm>
+          <a:prstGeom prst="rect">
+            <a:avLst/>
+          </a:prstGeom>
+          <a:noFill/>
+        </p:spPr>
+        <p:txBody>
+          <a:bodyPr wrap="square" anchor="t" lIns="0" rIns="0" tIns="0" bIns="0">
+            <a:spAutoFit/>
+          </a:bodyPr>
+          <a:lstStyle/>
+          <a:p>
+            <a:pPr algn="r"/>
+            <a:r>
+              <a:rPr sz="1000" b="1" i="0">
+                <a:solidFill>
+                  <a:srgbClr val="8F989D"/>
+                </a:solidFill>
+                <a:latin typeface="Calibri"/>
+              </a:rPr>
+              <a:t>17</a:t>
+            </a:r>
+          </a:p>
+        </p:txBody>
+      </p:sp>
+    </p:spTree>
+  </p:cSld>
+  <p:clrMapOvr>
+    <a:masterClrMapping/>
+  </p:clrMapOvr>
+</p:sld>
+</file>
+
+<file path=ppt/slides/slide18.xml><?xml version="1.0" encoding="utf-8"?>
+<p:sld xmlns:a="http://schemas.openxmlformats.org/drawingml/2006/main" xmlns:p="http://schemas.openxmlformats.org/presentationml/2006/main" xmlns:r="http://schemas.openxmlformats.org/officeDocument/2006/relationships">
+  <p:cSld>
+    <p:bg>
+      <p:bgPr>
+        <a:solidFill>
+          <a:srgbClr val="FFFFFF"/>
+        </a:solidFill>
+        <a:effectLst/>
+      </p:bgPr>
+    </p:bg>
+    <p:spTree>
+      <p:nvGrpSpPr>
+        <p:cNvPr id="1" name=""/>
+        <p:cNvGrpSpPr/>
+        <p:nvPr/>
+      </p:nvGrpSpPr>
+      <p:grpSpPr/>
+      <p:sp>
+        <p:nvSpPr>
+          <p:cNvPr id="2" name="Rectangle 1"/>
+          <p:cNvSpPr/>
+          <p:nvPr/>
+        </p:nvSpPr>
+        <p:spPr>
+          <a:xfrm>
+            <a:off x="0" y="0"/>
+            <a:ext cx="12191695" cy="1188720"/>
+          </a:xfrm>
+          <a:prstGeom prst="rect">
+            <a:avLst/>
+          </a:prstGeom>
+          <a:solidFill>
+            <a:srgbClr val="0C2340"/>
+          </a:solidFill>
+          <a:ln>
+            <a:noFill/>
+          </a:ln>
+          <a:effectLst/>
+        </p:spPr>
+        <p:style>
+          <a:lnRef idx="1">
+            <a:schemeClr val="accent1"/>
+          </a:lnRef>
+          <a:fillRef idx="3">
+            <a:schemeClr val="accent1"/>
+          </a:fillRef>
+          <a:effectRef idx="2">
+            <a:schemeClr val="accent1"/>
+          </a:effectRef>
+          <a:fontRef idx="minor">
+            <a:schemeClr val="lt1"/>
+          </a:fontRef>
+        </p:style>
+        <p:txBody>
+          <a:bodyPr rtlCol="0" anchor="ctr"/>
+          <a:lstStyle/>
+          <a:p>
+            <a:pPr algn="ctr"/>
+          </a:p>
+        </p:txBody>
+      </p:sp>
+      <p:sp>
+        <p:nvSpPr>
+          <p:cNvPr id="3" name="TextBox 2"/>
+          <p:cNvSpPr txBox="1"/>
+          <p:nvPr/>
+        </p:nvSpPr>
+        <p:spPr>
+          <a:xfrm>
+            <a:off x="640080" y="0"/>
+            <a:ext cx="9082735" cy="1188720"/>
+          </a:xfrm>
+          <a:prstGeom prst="rect">
+            <a:avLst/>
+          </a:prstGeom>
+          <a:noFill/>
+        </p:spPr>
+        <p:txBody>
+          <a:bodyPr wrap="square" anchor="ctr" lIns="0" rIns="0" tIns="0" bIns="0">
+            <a:spAutoFit/>
+          </a:bodyPr>
+          <a:lstStyle/>
+          <a:p>
+            <a:pPr algn="ctr"/>
+            <a:r>
+              <a:rPr sz="2600" b="1" i="0">
+                <a:solidFill>
+                  <a:srgbClr val="FFFFFF"/>
+                </a:solidFill>
+                <a:latin typeface="Calibri"/>
+              </a:rPr>
+              <a:t>Preguntas frecuentes del primer día</a:t>
+            </a:r>
+          </a:p>
+        </p:txBody>
+      </p:sp>
+      <p:sp>
+        <p:nvSpPr>
+          <p:cNvPr id="4" name="Rounded Rectangle 3"/>
+          <p:cNvSpPr/>
+          <p:nvPr/>
+        </p:nvSpPr>
+        <p:spPr>
+          <a:xfrm>
+            <a:off x="640080" y="1737360"/>
+            <a:ext cx="10911535" cy="969264"/>
+          </a:xfrm>
+          <a:prstGeom prst="roundRect">
+            <a:avLst/>
+          </a:prstGeom>
+          <a:solidFill>
+            <a:srgbClr val="FBE4E4"/>
+          </a:solidFill>
+          <a:ln>
+            <a:noFill/>
+          </a:ln>
+          <a:effectLst/>
+        </p:spPr>
+        <p:style>
+          <a:lnRef idx="1">
+            <a:schemeClr val="accent1"/>
+          </a:lnRef>
+          <a:fillRef idx="3">
+            <a:schemeClr val="accent1"/>
+          </a:fillRef>
+          <a:effectRef idx="2">
+            <a:schemeClr val="accent1"/>
+          </a:effectRef>
+          <a:fontRef idx="minor">
+            <a:schemeClr val="lt1"/>
+          </a:fontRef>
+        </p:style>
+        <p:txBody>
+          <a:bodyPr rtlCol="0" anchor="ctr"/>
+          <a:lstStyle/>
+          <a:p>
+            <a:pPr algn="ctr"/>
+          </a:p>
+        </p:txBody>
+      </p:sp>
+      <p:sp>
+        <p:nvSpPr>
+          <p:cNvPr id="5" name="TextBox 4"/>
+          <p:cNvSpPr txBox="1"/>
+          <p:nvPr/>
+        </p:nvSpPr>
+        <p:spPr>
+          <a:xfrm>
+            <a:off x="868680" y="1847088"/>
+            <a:ext cx="10454335" cy="749808"/>
+          </a:xfrm>
+          <a:prstGeom prst="rect">
+            <a:avLst/>
+          </a:prstGeom>
+          <a:noFill/>
+        </p:spPr>
+        <p:txBody>
+          <a:bodyPr wrap="square" anchor="t" lIns="0" rIns="0" tIns="0" bIns="0">
+            <a:spAutoFit/>
+          </a:bodyPr>
+          <a:lstStyle/>
+          <a:p>
+            <a:r>
+              <a:rPr sz="1300" b="1" i="0">
+                <a:solidFill>
+                  <a:srgbClr val="0C2340"/>
+                </a:solidFill>
+                <a:latin typeface="Calibri"/>
+              </a:rPr>
+              <a:t>⚠️ Importante</a:t>
+            </a:r>
+          </a:p>
+          <a:p>
+            <a:pPr>
+              <a:spcBef>
+                <a:spcPts val="400"/>
+              </a:spcBef>
+            </a:pPr>
+            <a:r>
+              <a:rPr sz="1300" b="1" i="0">
+                <a:solidFill>
+                  <a:srgbClr val="2B2B2B"/>
+                </a:solidFill>
+                <a:latin typeface="Calibri"/>
+              </a:rPr>
+              <a:t>“¿Puedo cambiar de tema?”</a:t>
+            </a:r>
+            <a:r>
+              <a:rPr sz="1300" b="0" i="0">
+                <a:solidFill>
+                  <a:srgbClr val="2B2B2B"/>
+                </a:solidFill>
+                <a:latin typeface="Calibri"/>
+              </a:rPr>
+              <a:t> No a estas alturas, salvo fuerza mayor hablada con el Docente. TG3 </a:t>
+            </a:r>
+            <a:r>
+              <a:rPr sz="1300" b="1" i="0">
+                <a:solidFill>
+                  <a:srgbClr val="2B2B2B"/>
+                </a:solidFill>
+                <a:latin typeface="Calibri"/>
+              </a:rPr>
+              <a:t>culmina</a:t>
+            </a:r>
+            <a:r>
+              <a:rPr sz="1300" b="0" i="0">
+                <a:solidFill>
+                  <a:srgbClr val="2B2B2B"/>
+                </a:solidFill>
+                <a:latin typeface="Calibri"/>
+              </a:rPr>
+              <a:t> un proyecto: cambiarlo aquí es no llegar a sustentar.</a:t>
+            </a:r>
+          </a:p>
+        </p:txBody>
+      </p:sp>
+      <p:sp>
+        <p:nvSpPr>
+          <p:cNvPr id="6" name="Rounded Rectangle 5"/>
+          <p:cNvSpPr/>
+          <p:nvPr/>
+        </p:nvSpPr>
+        <p:spPr>
+          <a:xfrm>
+            <a:off x="640080" y="2935224"/>
+            <a:ext cx="10911535" cy="1225296"/>
+          </a:xfrm>
+          <a:prstGeom prst="roundRect">
+            <a:avLst/>
+          </a:prstGeom>
+          <a:solidFill>
+            <a:srgbClr val="E8F5EC"/>
+          </a:solidFill>
+          <a:ln>
+            <a:noFill/>
+          </a:ln>
+          <a:effectLst/>
+        </p:spPr>
+        <p:style>
+          <a:lnRef idx="1">
+            <a:schemeClr val="accent1"/>
+          </a:lnRef>
+          <a:fillRef idx="3">
+            <a:schemeClr val="accent1"/>
+          </a:fillRef>
+          <a:effectRef idx="2">
+            <a:schemeClr val="accent1"/>
+          </a:effectRef>
+          <a:fontRef idx="minor">
+            <a:schemeClr val="lt1"/>
+          </a:fontRef>
+        </p:style>
+        <p:txBody>
+          <a:bodyPr rtlCol="0" anchor="ctr"/>
+          <a:lstStyle/>
+          <a:p>
+            <a:pPr algn="ctr"/>
+          </a:p>
+        </p:txBody>
+      </p:sp>
+      <p:sp>
+        <p:nvSpPr>
+          <p:cNvPr id="7" name="TextBox 6"/>
+          <p:cNvSpPr txBox="1"/>
+          <p:nvPr/>
+        </p:nvSpPr>
+        <p:spPr>
+          <a:xfrm>
+            <a:off x="868680" y="3044952"/>
+            <a:ext cx="10454335" cy="1005840"/>
+          </a:xfrm>
+          <a:prstGeom prst="rect">
+            <a:avLst/>
+          </a:prstGeom>
+          <a:noFill/>
+        </p:spPr>
+        <p:txBody>
+          <a:bodyPr wrap="square" anchor="t" lIns="0" rIns="0" tIns="0" bIns="0">
+            <a:spAutoFit/>
+          </a:bodyPr>
+          <a:lstStyle/>
+          <a:p>
+            <a:r>
+              <a:rPr sz="1300" b="1" i="0">
+                <a:solidFill>
+                  <a:srgbClr val="0C2340"/>
+                </a:solidFill>
+                <a:latin typeface="Calibri"/>
+              </a:rPr>
+              <a:t>ℹ️ Nota institucional</a:t>
+            </a:r>
+          </a:p>
+          <a:p>
+            <a:pPr>
+              <a:spcBef>
+                <a:spcPts val="400"/>
+              </a:spcBef>
+            </a:pPr>
+            <a:r>
+              <a:rPr sz="1300" b="1" i="0">
+                <a:solidFill>
+                  <a:srgbClr val="2B2B2B"/>
+                </a:solidFill>
+                <a:latin typeface="Calibri"/>
+              </a:rPr>
+              <a:t>“¿50 referencias no es imposible?”</a:t>
+            </a:r>
+            <a:r>
+              <a:rPr sz="1300" b="0" i="0">
+                <a:solidFill>
+                  <a:srgbClr val="2B2B2B"/>
+                </a:solidFill>
+                <a:latin typeface="Calibri"/>
+              </a:rPr>
+              <a:t> No: se arrastran las de TG2 y se suman las nuevas cada semana. Lo imposible es reunirlas la última semana. </a:t>
+            </a:r>
+            <a:r>
+              <a:rPr sz="1300" b="1" i="0">
+                <a:solidFill>
+                  <a:srgbClr val="2B2B2B"/>
+                </a:solidFill>
+                <a:latin typeface="Calibri"/>
+              </a:rPr>
+              <a:t>“¿Me sirve lo de TG2?”</a:t>
+            </a:r>
+            <a:r>
+              <a:rPr sz="1300" b="0" i="0">
+                <a:solidFill>
+                  <a:srgbClr val="2B2B2B"/>
+                </a:solidFill>
+                <a:latin typeface="Calibri"/>
+              </a:rPr>
+              <a:t> Sí: se reutiliza lo bueno y se reescribe lo débil.</a:t>
+            </a:r>
+          </a:p>
+        </p:txBody>
+      </p:sp>
+      <p:sp>
+        <p:nvSpPr>
+          <p:cNvPr id="8" name="Rounded Rectangle 7"/>
+          <p:cNvSpPr/>
+          <p:nvPr/>
+        </p:nvSpPr>
+        <p:spPr>
+          <a:xfrm>
+            <a:off x="640080" y="4389120"/>
+            <a:ext cx="10911535" cy="969264"/>
+          </a:xfrm>
+          <a:prstGeom prst="roundRect">
+            <a:avLst/>
+          </a:prstGeom>
+          <a:solidFill>
+            <a:srgbClr val="FDECD8"/>
+          </a:solidFill>
+          <a:ln>
+            <a:noFill/>
+          </a:ln>
+          <a:effectLst/>
+        </p:spPr>
+        <p:style>
+          <a:lnRef idx="1">
+            <a:schemeClr val="accent1"/>
+          </a:lnRef>
+          <a:fillRef idx="3">
+            <a:schemeClr val="accent1"/>
+          </a:fillRef>
+          <a:effectRef idx="2">
+            <a:schemeClr val="accent1"/>
+          </a:effectRef>
+          <a:fontRef idx="minor">
+            <a:schemeClr val="lt1"/>
+          </a:fontRef>
+        </p:style>
+        <p:txBody>
+          <a:bodyPr rtlCol="0" anchor="ctr"/>
+          <a:lstStyle/>
+          <a:p>
+            <a:pPr algn="ctr"/>
+          </a:p>
+        </p:txBody>
+      </p:sp>
+      <p:sp>
+        <p:nvSpPr>
+          <p:cNvPr id="9" name="TextBox 8"/>
+          <p:cNvSpPr txBox="1"/>
+          <p:nvPr/>
+        </p:nvSpPr>
+        <p:spPr>
+          <a:xfrm>
+            <a:off x="868680" y="4498848"/>
+            <a:ext cx="10454335" cy="749808"/>
+          </a:xfrm>
+          <a:prstGeom prst="rect">
+            <a:avLst/>
+          </a:prstGeom>
+          <a:noFill/>
+        </p:spPr>
+        <p:txBody>
+          <a:bodyPr wrap="square" anchor="t" lIns="0" rIns="0" tIns="0" bIns="0">
+            <a:spAutoFit/>
+          </a:bodyPr>
+          <a:lstStyle/>
+          <a:p>
+            <a:r>
+              <a:rPr sz="1300" b="1" i="0">
+                <a:solidFill>
+                  <a:srgbClr val="0C2340"/>
+                </a:solidFill>
+                <a:latin typeface="Calibri"/>
+              </a:rPr>
+              <a:t>💡 Aclaración</a:t>
+            </a:r>
+          </a:p>
+          <a:p>
+            <a:pPr>
+              <a:spcBef>
+                <a:spcPts val="400"/>
+              </a:spcBef>
+            </a:pPr>
+            <a:r>
+              <a:rPr sz="1300" b="1" i="0">
+                <a:solidFill>
+                  <a:srgbClr val="2B2B2B"/>
+                </a:solidFill>
+                <a:latin typeface="Calibri"/>
+              </a:rPr>
+              <a:t>“¿La sustentación es en vivo y ante quién?”</a:t>
+            </a:r>
+            <a:r>
+              <a:rPr sz="1300" b="0" i="0">
+                <a:solidFill>
+                  <a:srgbClr val="2B2B2B"/>
+                </a:solidFill>
+                <a:latin typeface="Calibri"/>
+              </a:rPr>
+              <a:t> Ante jurados, en la fecha que fije su grupo. Se prepara desde ahora: cada sesión escrita es material de esa defensa.</a:t>
+            </a:r>
+          </a:p>
+        </p:txBody>
+      </p:sp>
+      <p:sp>
+        <p:nvSpPr>
+          <p:cNvPr id="10" name="TextBox 9"/>
+          <p:cNvSpPr txBox="1"/>
+          <p:nvPr/>
+        </p:nvSpPr>
+        <p:spPr>
+          <a:xfrm>
+            <a:off x="2194560" y="6446520"/>
+            <a:ext cx="5943600" cy="274320"/>
+          </a:xfrm>
+          <a:prstGeom prst="rect">
+            <a:avLst/>
+          </a:prstGeom>
+          <a:noFill/>
+        </p:spPr>
+        <p:txBody>
+          <a:bodyPr wrap="square" anchor="t" lIns="0" rIns="0" tIns="0" bIns="0">
+            <a:spAutoFit/>
+          </a:bodyPr>
+          <a:lstStyle/>
+          <a:p>
+            <a:pPr algn="l"/>
+            <a:r>
+              <a:rPr sz="1000" b="1" i="0">
+                <a:solidFill>
+                  <a:srgbClr val="8F989D"/>
+                </a:solidFill>
+                <a:latin typeface="Calibri"/>
+              </a:rPr>
+              <a:t>Inicio 5:10 pm</a:t>
+            </a:r>
+          </a:p>
+        </p:txBody>
+      </p:sp>
+      <p:sp>
+        <p:nvSpPr>
+          <p:cNvPr id="11" name="TextBox 10"/>
+          <p:cNvSpPr txBox="1"/>
+          <p:nvPr/>
+        </p:nvSpPr>
+        <p:spPr>
+          <a:xfrm>
+            <a:off x="11094415" y="6446520"/>
+            <a:ext cx="548640" cy="274320"/>
+          </a:xfrm>
+          <a:prstGeom prst="rect">
+            <a:avLst/>
+          </a:prstGeom>
+          <a:noFill/>
+        </p:spPr>
+        <p:txBody>
+          <a:bodyPr wrap="square" anchor="t" lIns="0" rIns="0" tIns="0" bIns="0">
+            <a:spAutoFit/>
+          </a:bodyPr>
+          <a:lstStyle/>
+          <a:p>
+            <a:pPr algn="r"/>
+            <a:r>
+              <a:rPr sz="1000" b="1" i="0">
+                <a:solidFill>
+                  <a:srgbClr val="8F989D"/>
+                </a:solidFill>
+                <a:latin typeface="Calibri"/>
+              </a:rPr>
+              <a:t>18</a:t>
+            </a:r>
+          </a:p>
+        </p:txBody>
+      </p:sp>
+    </p:spTree>
+  </p:cSld>
+  <p:clrMapOvr>
+    <a:masterClrMapping/>
+  </p:clrMapOvr>
+</p:sld>
+</file>
+
+<file path=ppt/slides/slide19.xml><?xml version="1.0" encoding="utf-8"?>
+<p:sld xmlns:a="http://schemas.openxmlformats.org/drawingml/2006/main" xmlns:p="http://schemas.openxmlformats.org/presentationml/2006/main" xmlns:r="http://schemas.openxmlformats.org/officeDocument/2006/relationships">
+  <p:cSld>
+    <p:bg>
+      <p:bgPr>
+        <a:solidFill>
+          <a:srgbClr val="FFFFFF"/>
+        </a:solidFill>
+        <a:effectLst/>
+      </p:bgPr>
+    </p:bg>
+    <p:spTree>
+      <p:nvGrpSpPr>
+        <p:cNvPr id="1" name=""/>
+        <p:cNvGrpSpPr/>
+        <p:nvPr/>
+      </p:nvGrpSpPr>
+      <p:grpSpPr/>
+      <p:sp>
+        <p:nvSpPr>
+          <p:cNvPr id="2" name="Rectangle 1"/>
+          <p:cNvSpPr/>
+          <p:nvPr/>
+        </p:nvSpPr>
+        <p:spPr>
+          <a:xfrm>
+            <a:off x="0" y="0"/>
+            <a:ext cx="12191695" cy="1188720"/>
+          </a:xfrm>
+          <a:prstGeom prst="rect">
+            <a:avLst/>
+          </a:prstGeom>
+          <a:solidFill>
+            <a:srgbClr val="0C2340"/>
+          </a:solidFill>
+          <a:ln>
+            <a:noFill/>
+          </a:ln>
+          <a:effectLst/>
+        </p:spPr>
+        <p:style>
+          <a:lnRef idx="1">
+            <a:schemeClr val="accent1"/>
+          </a:lnRef>
+          <a:fillRef idx="3">
+            <a:schemeClr val="accent1"/>
+          </a:fillRef>
+          <a:effectRef idx="2">
+            <a:schemeClr val="accent1"/>
+          </a:effectRef>
+          <a:fontRef idx="minor">
+            <a:schemeClr val="lt1"/>
+          </a:fontRef>
+        </p:style>
+        <p:txBody>
+          <a:bodyPr rtlCol="0" anchor="ctr"/>
+          <a:lstStyle/>
+          <a:p>
+            <a:pPr algn="ctr"/>
+          </a:p>
+        </p:txBody>
+      </p:sp>
+      <p:sp>
+        <p:nvSpPr>
+          <p:cNvPr id="3" name="TextBox 2"/>
+          <p:cNvSpPr txBox="1"/>
+          <p:nvPr/>
+        </p:nvSpPr>
+        <p:spPr>
+          <a:xfrm>
+            <a:off x="640080" y="0"/>
+            <a:ext cx="9082735" cy="1188720"/>
+          </a:xfrm>
+          <a:prstGeom prst="rect">
+            <a:avLst/>
+          </a:prstGeom>
+          <a:noFill/>
+        </p:spPr>
+        <p:txBody>
+          <a:bodyPr wrap="square" anchor="ctr" lIns="0" rIns="0" tIns="0" bIns="0">
+            <a:spAutoFit/>
+          </a:bodyPr>
+          <a:lstStyle/>
+          <a:p>
+            <a:pPr algn="ctr"/>
+            <a:r>
+              <a:rPr sz="2600" b="1" i="0">
+                <a:solidFill>
+                  <a:srgbClr val="FFFFFF"/>
+                </a:solidFill>
+                <a:latin typeface="Calibri"/>
+              </a:rPr>
+              <a:t>Lo que debe tener listo para la Sesión 02</a:t>
+            </a:r>
+          </a:p>
+        </p:txBody>
+      </p:sp>
+      <p:sp>
+        <p:nvSpPr>
+          <p:cNvPr id="4" name="TextBox 3"/>
+          <p:cNvSpPr txBox="1"/>
+          <p:nvPr/>
+        </p:nvSpPr>
+        <p:spPr>
+          <a:xfrm>
+            <a:off x="640080" y="1691639"/>
+            <a:ext cx="10911535" cy="4617720"/>
+          </a:xfrm>
+          <a:prstGeom prst="rect">
+            <a:avLst/>
+          </a:prstGeom>
+          <a:noFill/>
+        </p:spPr>
+        <p:txBody>
+          <a:bodyPr wrap="square" anchor="t" lIns="0" rIns="0" tIns="0" bIns="0">
+            <a:spAutoFit/>
+          </a:bodyPr>
+          <a:lstStyle/>
+          <a:p>
+            <a:pPr>
+              <a:spcAft>
+                <a:spcPts val="1000"/>
+              </a:spcAft>
+            </a:pPr>
+            <a:r>
+              <a:rPr sz="1600" b="0" i="0">
+                <a:solidFill>
+                  <a:srgbClr val="2B2B2B"/>
+                </a:solidFill>
+                <a:latin typeface="Calibri"/>
+              </a:rPr>
+              <a:t>–   </a:t>
+            </a:r>
+            <a:r>
+              <a:rPr sz="1600" b="1" i="0">
+                <a:solidFill>
+                  <a:srgbClr val="2B2B2B"/>
+                </a:solidFill>
+                <a:latin typeface="Calibri"/>
+              </a:rPr>
+              <a:t>Lectura autónoma (obligatoria):</a:t>
+            </a:r>
+            <a:r>
+              <a:rPr sz="1600" b="0" i="0">
+                <a:solidFill>
+                  <a:srgbClr val="2B2B2B"/>
+                </a:solidFill>
+                <a:latin typeface="Calibri"/>
+              </a:rPr>
+              <a:t> unidades </a:t>
+            </a:r>
+            <a:r>
+              <a:rPr sz="1600" b="1" i="0">
+                <a:solidFill>
+                  <a:srgbClr val="2B2B2B"/>
+                </a:solidFill>
+                <a:latin typeface="Calibri"/>
+              </a:rPr>
+              <a:t>U1 y U2</a:t>
+            </a:r>
+            <a:r>
+              <a:rPr sz="1600" b="0" i="0">
+                <a:solidFill>
+                  <a:srgbClr val="2B2B2B"/>
+                </a:solidFill>
+                <a:latin typeface="Calibri"/>
+              </a:rPr>
+              <a:t> del Syllabus — </a:t>
+            </a:r>
+            <a:r>
+              <a:rPr sz="1600" b="1" i="0">
+                <a:solidFill>
+                  <a:srgbClr val="2B2B2B"/>
+                </a:solidFill>
+                <a:latin typeface="Calibri"/>
+              </a:rPr>
+              <a:t>casos de éxito</a:t>
+            </a:r>
+            <a:r>
+              <a:rPr sz="1600" b="0" i="0">
+                <a:solidFill>
+                  <a:srgbClr val="2B2B2B"/>
+                </a:solidFill>
+                <a:latin typeface="Calibri"/>
+              </a:rPr>
+              <a:t> y </a:t>
+            </a:r>
+            <a:r>
+              <a:rPr sz="1600" b="1" i="0">
+                <a:solidFill>
+                  <a:srgbClr val="2B2B2B"/>
+                </a:solidFill>
+                <a:latin typeface="Calibri"/>
+              </a:rPr>
+              <a:t>retomar el proyecto</a:t>
+            </a:r>
+            <a:r>
+              <a:rPr sz="1600" b="0" i="0">
+                <a:solidFill>
+                  <a:srgbClr val="2B2B2B"/>
+                </a:solidFill>
+                <a:latin typeface="Calibri"/>
+              </a:rPr>
+              <a:t> (contexto y planteamiento).</a:t>
+            </a:r>
+          </a:p>
+          <a:p>
+            <a:pPr lvl="1">
+              <a:spcAft>
+                <a:spcPts val="600"/>
+              </a:spcAft>
+            </a:pPr>
+            <a:r>
+              <a:rPr sz="1500" b="0" i="0">
+                <a:solidFill>
+                  <a:srgbClr val="2B2B2B"/>
+                </a:solidFill>
+                <a:latin typeface="Calibri"/>
+              </a:rPr>
+              <a:t>●   Hoy no se dictaron: se leen en casa y se </a:t>
+            </a:r>
+            <a:r>
+              <a:rPr sz="1500" b="1" i="0">
+                <a:solidFill>
+                  <a:srgbClr val="2B2B2B"/>
+                </a:solidFill>
+                <a:latin typeface="Calibri"/>
+              </a:rPr>
+              <a:t>retoman al abrir la Sesión 02</a:t>
+            </a:r>
+            <a:r>
+              <a:rPr sz="1500" b="0" i="0">
+                <a:solidFill>
+                  <a:srgbClr val="2B2B2B"/>
+                </a:solidFill>
+                <a:latin typeface="Calibri"/>
+              </a:rPr>
+              <a:t>.</a:t>
+            </a:r>
+          </a:p>
+          <a:p>
+            <a:pPr lvl="1">
+              <a:spcAft>
+                <a:spcPts val="600"/>
+              </a:spcAft>
+            </a:pPr>
+            <a:r>
+              <a:rPr sz="1500" b="0" i="0">
+                <a:solidFill>
+                  <a:srgbClr val="2B2B2B"/>
+                </a:solidFill>
+                <a:latin typeface="Calibri"/>
+              </a:rPr>
+              <a:t>●   Dónde: material de la Sesión 01 en CDigital — [URL CDigital — campus del curso pendiente]</a:t>
+            </a:r>
+          </a:p>
+          <a:p>
+            <a:pPr>
+              <a:spcAft>
+                <a:spcPts val="1000"/>
+              </a:spcAft>
+            </a:pPr>
+            <a:r>
+              <a:rPr sz="1600" b="0" i="0">
+                <a:solidFill>
+                  <a:srgbClr val="2B2B2B"/>
+                </a:solidFill>
+                <a:latin typeface="Calibri"/>
+              </a:rPr>
+              <a:t>–   </a:t>
+            </a:r>
+            <a:r>
+              <a:rPr sz="1600" b="1" i="0">
+                <a:solidFill>
+                  <a:srgbClr val="2B2B2B"/>
+                </a:solidFill>
+                <a:latin typeface="Calibri"/>
+              </a:rPr>
+              <a:t>Arme su matriz de herencia</a:t>
+            </a:r>
+            <a:r>
+              <a:rPr sz="1600" b="0" i="0">
+                <a:solidFill>
+                  <a:srgbClr val="2B2B2B"/>
+                </a:solidFill>
+                <a:latin typeface="Calibri"/>
+              </a:rPr>
+              <a:t> en un Google Doc llamado `S01_AcuerdoRetoma_Apellido`, con tres columnas:</a:t>
+            </a:r>
+          </a:p>
+          <a:p>
+            <a:pPr lvl="1">
+              <a:spcAft>
+                <a:spcPts val="600"/>
+              </a:spcAft>
+            </a:pPr>
+            <a:r>
+              <a:rPr sz="1500" b="0" i="0">
+                <a:solidFill>
+                  <a:srgbClr val="2B2B2B"/>
+                </a:solidFill>
+                <a:latin typeface="Calibri"/>
+              </a:rPr>
+              <a:t>●   </a:t>
+            </a:r>
+            <a:r>
+              <a:rPr sz="1500" b="1" i="0">
+                <a:solidFill>
+                  <a:srgbClr val="2B2B2B"/>
+                </a:solidFill>
+                <a:latin typeface="Calibri"/>
+              </a:rPr>
+              <a:t>Reutilizo tal cual · Reescribo · Creo de cero</a:t>
+            </a:r>
+            <a:r>
+              <a:rPr sz="1500" b="0" i="0">
+                <a:solidFill>
+                  <a:srgbClr val="2B2B2B"/>
+                </a:solidFill>
+                <a:latin typeface="Calibri"/>
+              </a:rPr>
+              <a:t>, sección por sección de lo que trae de TG2.</a:t>
+            </a:r>
+          </a:p>
+          <a:p>
+            <a:pPr lvl="1">
+              <a:spcAft>
+                <a:spcPts val="600"/>
+              </a:spcAft>
+            </a:pPr>
+            <a:r>
+              <a:rPr sz="1500" b="0" i="0">
+                <a:solidFill>
+                  <a:srgbClr val="2B2B2B"/>
+                </a:solidFill>
+                <a:latin typeface="Calibri"/>
+              </a:rPr>
+              <a:t>●   </a:t>
+            </a:r>
+            <a:r>
+              <a:rPr sz="1500" b="1" i="0">
+                <a:solidFill>
+                  <a:srgbClr val="2B2B2B"/>
+                </a:solidFill>
+                <a:latin typeface="Calibri"/>
+              </a:rPr>
+              <a:t>Cuente sus referencias reales</a:t>
+            </a:r>
+            <a:r>
+              <a:rPr sz="1500" b="0" i="0">
+                <a:solidFill>
+                  <a:srgbClr val="2B2B2B"/>
+                </a:solidFill>
+                <a:latin typeface="Calibri"/>
+              </a:rPr>
+              <a:t>: cuántas están citadas hoy en el cuerpo y cuántas le faltan.</a:t>
+            </a:r>
+          </a:p>
+          <a:p>
+            <a:pPr lvl="1">
+              <a:spcAft>
+                <a:spcPts val="600"/>
+              </a:spcAft>
+            </a:pPr>
+            <a:r>
+              <a:rPr sz="1500" b="0" i="0">
+                <a:solidFill>
+                  <a:srgbClr val="2B2B2B"/>
+                </a:solidFill>
+                <a:latin typeface="Calibri"/>
+              </a:rPr>
+              <a:t>●   </a:t>
+            </a:r>
+            <a:r>
+              <a:rPr sz="1500" b="1" i="0">
+                <a:solidFill>
+                  <a:srgbClr val="2B2B2B"/>
+                </a:solidFill>
+                <a:latin typeface="Calibri"/>
+              </a:rPr>
+              <a:t>Tres compromisos</a:t>
+            </a:r>
+            <a:r>
+              <a:rPr sz="1500" b="0" i="0">
+                <a:solidFill>
+                  <a:srgbClr val="2B2B2B"/>
+                </a:solidFill>
+                <a:latin typeface="Calibri"/>
+              </a:rPr>
+              <a:t> concretos suyos para las próximas dos semanas.</a:t>
+            </a:r>
+          </a:p>
+          <a:p>
+            <a:pPr>
+              <a:spcAft>
+                <a:spcPts val="1000"/>
+              </a:spcAft>
+            </a:pPr>
+            <a:r>
+              <a:rPr sz="1600" b="0" i="0">
+                <a:solidFill>
+                  <a:srgbClr val="2B2B2B"/>
+                </a:solidFill>
+                <a:latin typeface="Calibri"/>
+              </a:rPr>
+              <a:t>–   </a:t>
+            </a:r>
+            <a:r>
+              <a:rPr sz="1600" b="1" i="0">
+                <a:solidFill>
+                  <a:srgbClr val="2B2B2B"/>
+                </a:solidFill>
+                <a:latin typeface="Calibri"/>
+              </a:rPr>
+              <a:t>Súbalo a CDigital antes de la Sesión 02</a:t>
+            </a:r>
+            <a:r>
+              <a:rPr sz="1600" b="0" i="0">
+                <a:solidFill>
+                  <a:srgbClr val="2B2B2B"/>
+                </a:solidFill>
+                <a:latin typeface="Calibri"/>
+              </a:rPr>
+              <a:t> y </a:t>
+            </a:r>
+            <a:r>
+              <a:rPr sz="1600" b="1" i="0">
+                <a:solidFill>
+                  <a:srgbClr val="2B2B2B"/>
+                </a:solidFill>
+                <a:latin typeface="Calibri"/>
+              </a:rPr>
+              <a:t>abra los enunciados de las ACAs</a:t>
+            </a:r>
+            <a:r>
+              <a:rPr sz="1600" b="0" i="0">
+                <a:solidFill>
+                  <a:srgbClr val="2B2B2B"/>
+                </a:solidFill>
+                <a:latin typeface="Calibri"/>
+              </a:rPr>
+              <a:t> en `Clases/Recursos/ACAs/`, con las fechas de su grupo.</a:t>
+            </a:r>
+          </a:p>
+        </p:txBody>
+      </p:sp>
+      <p:sp>
+        <p:nvSpPr>
+          <p:cNvPr id="5" name="TextBox 4"/>
+          <p:cNvSpPr txBox="1"/>
+          <p:nvPr/>
+        </p:nvSpPr>
+        <p:spPr>
+          <a:xfrm>
+            <a:off x="2194560" y="6446520"/>
+            <a:ext cx="5943600" cy="274320"/>
+          </a:xfrm>
+          <a:prstGeom prst="rect">
+            <a:avLst/>
+          </a:prstGeom>
+          <a:noFill/>
+        </p:spPr>
+        <p:txBody>
+          <a:bodyPr wrap="square" anchor="t" lIns="0" rIns="0" tIns="0" bIns="0">
+            <a:spAutoFit/>
+          </a:bodyPr>
+          <a:lstStyle/>
+          <a:p>
+            <a:pPr algn="l"/>
+            <a:r>
+              <a:rPr sz="1000" b="1" i="0">
+                <a:solidFill>
+                  <a:srgbClr val="8F989D"/>
+                </a:solidFill>
+                <a:latin typeface="Calibri"/>
+              </a:rPr>
+              <a:t>Inicio 5:10 pm</a:t>
+            </a:r>
+          </a:p>
+        </p:txBody>
+      </p:sp>
+      <p:sp>
+        <p:nvSpPr>
+          <p:cNvPr id="6" name="TextBox 5"/>
+          <p:cNvSpPr txBox="1"/>
+          <p:nvPr/>
+        </p:nvSpPr>
+        <p:spPr>
+          <a:xfrm>
+            <a:off x="11094415" y="6446520"/>
+            <a:ext cx="548640" cy="274320"/>
+          </a:xfrm>
+          <a:prstGeom prst="rect">
+            <a:avLst/>
+          </a:prstGeom>
+          <a:noFill/>
+        </p:spPr>
+        <p:txBody>
+          <a:bodyPr wrap="square" anchor="t" lIns="0" rIns="0" tIns="0" bIns="0">
+            <a:spAutoFit/>
+          </a:bodyPr>
+          <a:lstStyle/>
+          <a:p>
+            <a:pPr algn="r"/>
+            <a:r>
+              <a:rPr sz="1000" b="1" i="0">
+                <a:solidFill>
+                  <a:srgbClr val="8F989D"/>
+                </a:solidFill>
+                <a:latin typeface="Calibri"/>
+              </a:rPr>
+              <a:t>19</a:t>
+            </a:r>
+          </a:p>
+        </p:txBody>
+      </p:sp>
+      <p:sp>
+        <p:nvSpPr>
+          <p:cNvPr id="7" name="TextBox 6"/>
+          <p:cNvSpPr txBox="1"/>
+          <p:nvPr/>
+        </p:nvSpPr>
+        <p:spPr>
+          <a:xfrm>
+            <a:off x="640080" y="5943600"/>
+            <a:ext cx="9997135" cy="457200"/>
+          </a:xfrm>
+          <a:prstGeom prst="rect">
+            <a:avLst/>
+          </a:prstGeom>
+          <a:noFill/>
+        </p:spPr>
+        <p:txBody>
+          <a:bodyPr wrap="square" anchor="t" lIns="0" rIns="0" tIns="0" bIns="0">
+            <a:spAutoFit/>
+          </a:bodyPr>
+          <a:lstStyle/>
+          <a:p>
+            <a:r>
+              <a:rPr sz="1200" b="0" i="1">
+                <a:solidFill>
+                  <a:srgbClr val="2B2B2B"/>
+                </a:solidFill>
+                <a:latin typeface="Calibri"/>
+              </a:rPr>
+              <a:t>Cuente las referencias </a:t>
+            </a:r>
+            <a:r>
+              <a:rPr sz="1200" b="1" i="1">
+                <a:solidFill>
+                  <a:srgbClr val="2B2B2B"/>
+                </a:solidFill>
+                <a:latin typeface="Calibri"/>
+              </a:rPr>
+              <a:t>citadas en el cuerpo</a:t>
+            </a:r>
+            <a:r>
+              <a:rPr sz="1200" b="0" i="1">
+                <a:solidFill>
+                  <a:srgbClr val="2B2B2B"/>
+                </a:solidFill>
+                <a:latin typeface="Calibri"/>
+              </a:rPr>
+              <a:t>, no las de la lista final: esa diferencia es el trabajo real que queda por delante.</a:t>
+            </a:r>
+          </a:p>
+        </p:txBody>
+      </p:sp>
+    </p:spTree>
+  </p:cSld>
+  <p:clrMapOvr>
+    <a:masterClrMapping/>
+  </p:clrMapOvr>
+</p:sld>
+</file>
+
 <file path=ppt/slides/slide2.xml><?xml version="1.0" encoding="utf-8"?>
 <p:sld xmlns:a="http://schemas.openxmlformats.org/drawingml/2006/main" xmlns:p="http://schemas.openxmlformats.org/presentationml/2006/main" xmlns:r="http://schemas.openxmlformats.org/officeDocument/2006/relationships">
   <p:cSld>
@@ -3798,6 +9319,1071 @@
                 <a:latin typeface="Calibri"/>
               </a:rPr>
               <a:t>2</a:t>
+            </a:r>
+          </a:p>
+        </p:txBody>
+      </p:sp>
+    </p:spTree>
+  </p:cSld>
+  <p:clrMapOvr>
+    <a:masterClrMapping/>
+  </p:clrMapOvr>
+</p:sld>
+</file>
+
+<file path=ppt/slides/slide20.xml><?xml version="1.0" encoding="utf-8"?>
+<p:sld xmlns:a="http://schemas.openxmlformats.org/drawingml/2006/main" xmlns:p="http://schemas.openxmlformats.org/presentationml/2006/main" xmlns:r="http://schemas.openxmlformats.org/officeDocument/2006/relationships">
+  <p:cSld>
+    <p:bg>
+      <p:bgPr>
+        <a:solidFill>
+          <a:srgbClr val="FFFFFF"/>
+        </a:solidFill>
+        <a:effectLst/>
+      </p:bgPr>
+    </p:bg>
+    <p:spTree>
+      <p:nvGrpSpPr>
+        <p:cNvPr id="1" name=""/>
+        <p:cNvGrpSpPr/>
+        <p:nvPr/>
+      </p:nvGrpSpPr>
+      <p:grpSpPr/>
+      <p:sp>
+        <p:nvSpPr>
+          <p:cNvPr id="2" name="Rectangle 1"/>
+          <p:cNvSpPr/>
+          <p:nvPr/>
+        </p:nvSpPr>
+        <p:spPr>
+          <a:xfrm>
+            <a:off x="0" y="0"/>
+            <a:ext cx="12191695" cy="1188720"/>
+          </a:xfrm>
+          <a:prstGeom prst="rect">
+            <a:avLst/>
+          </a:prstGeom>
+          <a:solidFill>
+            <a:srgbClr val="0C2340"/>
+          </a:solidFill>
+          <a:ln>
+            <a:noFill/>
+          </a:ln>
+          <a:effectLst/>
+        </p:spPr>
+        <p:style>
+          <a:lnRef idx="1">
+            <a:schemeClr val="accent1"/>
+          </a:lnRef>
+          <a:fillRef idx="3">
+            <a:schemeClr val="accent1"/>
+          </a:fillRef>
+          <a:effectRef idx="2">
+            <a:schemeClr val="accent1"/>
+          </a:effectRef>
+          <a:fontRef idx="minor">
+            <a:schemeClr val="lt1"/>
+          </a:fontRef>
+        </p:style>
+        <p:txBody>
+          <a:bodyPr rtlCol="0" anchor="ctr"/>
+          <a:lstStyle/>
+          <a:p>
+            <a:pPr algn="ctr"/>
+          </a:p>
+        </p:txBody>
+      </p:sp>
+      <p:sp>
+        <p:nvSpPr>
+          <p:cNvPr id="3" name="TextBox 2"/>
+          <p:cNvSpPr txBox="1"/>
+          <p:nvPr/>
+        </p:nvSpPr>
+        <p:spPr>
+          <a:xfrm>
+            <a:off x="640080" y="0"/>
+            <a:ext cx="9082735" cy="1188720"/>
+          </a:xfrm>
+          <a:prstGeom prst="rect">
+            <a:avLst/>
+          </a:prstGeom>
+          <a:noFill/>
+        </p:spPr>
+        <p:txBody>
+          <a:bodyPr wrap="square" anchor="ctr" lIns="0" rIns="0" tIns="0" bIns="0">
+            <a:spAutoFit/>
+          </a:bodyPr>
+          <a:lstStyle/>
+          <a:p>
+            <a:pPr algn="ctr"/>
+            <a:r>
+              <a:rPr sz="2600" b="1" i="0">
+                <a:solidFill>
+                  <a:srgbClr val="FFFFFF"/>
+                </a:solidFill>
+                <a:latin typeface="Calibri"/>
+              </a:rPr>
+              <a:t>ACUERDOS DE TRABAJO</a:t>
+            </a:r>
+          </a:p>
+        </p:txBody>
+      </p:sp>
+      <p:sp>
+        <p:nvSpPr>
+          <p:cNvPr id="4" name="Rounded Rectangle 3"/>
+          <p:cNvSpPr/>
+          <p:nvPr/>
+        </p:nvSpPr>
+        <p:spPr>
+          <a:xfrm>
+            <a:off x="640080" y="1737360"/>
+            <a:ext cx="10911535" cy="713232"/>
+          </a:xfrm>
+          <a:prstGeom prst="roundRect">
+            <a:avLst/>
+          </a:prstGeom>
+          <a:solidFill>
+            <a:srgbClr val="E8F5EC"/>
+          </a:solidFill>
+          <a:ln>
+            <a:noFill/>
+          </a:ln>
+          <a:effectLst/>
+        </p:spPr>
+        <p:style>
+          <a:lnRef idx="1">
+            <a:schemeClr val="accent1"/>
+          </a:lnRef>
+          <a:fillRef idx="3">
+            <a:schemeClr val="accent1"/>
+          </a:fillRef>
+          <a:effectRef idx="2">
+            <a:schemeClr val="accent1"/>
+          </a:effectRef>
+          <a:fontRef idx="minor">
+            <a:schemeClr val="lt1"/>
+          </a:fontRef>
+        </p:style>
+        <p:txBody>
+          <a:bodyPr rtlCol="0" anchor="ctr"/>
+          <a:lstStyle/>
+          <a:p>
+            <a:pPr algn="ctr"/>
+          </a:p>
+        </p:txBody>
+      </p:sp>
+      <p:sp>
+        <p:nvSpPr>
+          <p:cNvPr id="5" name="TextBox 4"/>
+          <p:cNvSpPr txBox="1"/>
+          <p:nvPr/>
+        </p:nvSpPr>
+        <p:spPr>
+          <a:xfrm>
+            <a:off x="868680" y="1847088"/>
+            <a:ext cx="10454335" cy="493776"/>
+          </a:xfrm>
+          <a:prstGeom prst="rect">
+            <a:avLst/>
+          </a:prstGeom>
+          <a:noFill/>
+        </p:spPr>
+        <p:txBody>
+          <a:bodyPr wrap="square" anchor="t" lIns="0" rIns="0" tIns="0" bIns="0">
+            <a:spAutoFit/>
+          </a:bodyPr>
+          <a:lstStyle/>
+          <a:p>
+            <a:r>
+              <a:rPr sz="1300" b="1" i="0">
+                <a:solidFill>
+                  <a:srgbClr val="0C2340"/>
+                </a:solidFill>
+                <a:latin typeface="Calibri"/>
+              </a:rPr>
+              <a:t>ℹ️ Nota institucional</a:t>
+            </a:r>
+          </a:p>
+          <a:p>
+            <a:pPr>
+              <a:spcBef>
+                <a:spcPts val="400"/>
+              </a:spcBef>
+            </a:pPr>
+            <a:r>
+              <a:rPr sz="1300" b="1" i="0">
+                <a:solidFill>
+                  <a:srgbClr val="2B2B2B"/>
+                </a:solidFill>
+                <a:latin typeface="Calibri"/>
+              </a:rPr>
+              <a:t>Entrega oficial: CDigital.</a:t>
+            </a:r>
+            <a:r>
+              <a:rPr sz="1300" b="0" i="0">
+                <a:solidFill>
+                  <a:srgbClr val="2B2B2B"/>
+                </a:solidFill>
+                <a:latin typeface="Calibri"/>
+              </a:rPr>
+              <a:t> Lo que no esté ahí, no está entregado.</a:t>
+            </a:r>
+          </a:p>
+        </p:txBody>
+      </p:sp>
+      <p:sp>
+        <p:nvSpPr>
+          <p:cNvPr id="6" name="Rounded Rectangle 5"/>
+          <p:cNvSpPr/>
+          <p:nvPr/>
+        </p:nvSpPr>
+        <p:spPr>
+          <a:xfrm>
+            <a:off x="640080" y="2679191"/>
+            <a:ext cx="10911535" cy="713232"/>
+          </a:xfrm>
+          <a:prstGeom prst="roundRect">
+            <a:avLst/>
+          </a:prstGeom>
+          <a:solidFill>
+            <a:srgbClr val="FDECD8"/>
+          </a:solidFill>
+          <a:ln>
+            <a:noFill/>
+          </a:ln>
+          <a:effectLst/>
+        </p:spPr>
+        <p:style>
+          <a:lnRef idx="1">
+            <a:schemeClr val="accent1"/>
+          </a:lnRef>
+          <a:fillRef idx="3">
+            <a:schemeClr val="accent1"/>
+          </a:fillRef>
+          <a:effectRef idx="2">
+            <a:schemeClr val="accent1"/>
+          </a:effectRef>
+          <a:fontRef idx="minor">
+            <a:schemeClr val="lt1"/>
+          </a:fontRef>
+        </p:style>
+        <p:txBody>
+          <a:bodyPr rtlCol="0" anchor="ctr"/>
+          <a:lstStyle/>
+          <a:p>
+            <a:pPr algn="ctr"/>
+          </a:p>
+        </p:txBody>
+      </p:sp>
+      <p:sp>
+        <p:nvSpPr>
+          <p:cNvPr id="7" name="TextBox 6"/>
+          <p:cNvSpPr txBox="1"/>
+          <p:nvPr/>
+        </p:nvSpPr>
+        <p:spPr>
+          <a:xfrm>
+            <a:off x="868680" y="2788920"/>
+            <a:ext cx="10454335" cy="493776"/>
+          </a:xfrm>
+          <a:prstGeom prst="rect">
+            <a:avLst/>
+          </a:prstGeom>
+          <a:noFill/>
+        </p:spPr>
+        <p:txBody>
+          <a:bodyPr wrap="square" anchor="t" lIns="0" rIns="0" tIns="0" bIns="0">
+            <a:spAutoFit/>
+          </a:bodyPr>
+          <a:lstStyle/>
+          <a:p>
+            <a:r>
+              <a:rPr sz="1300" b="1" i="0">
+                <a:solidFill>
+                  <a:srgbClr val="0C2340"/>
+                </a:solidFill>
+                <a:latin typeface="Calibri"/>
+              </a:rPr>
+              <a:t>💡 Aclaración</a:t>
+            </a:r>
+          </a:p>
+          <a:p>
+            <a:pPr>
+              <a:spcBef>
+                <a:spcPts val="400"/>
+              </a:spcBef>
+            </a:pPr>
+            <a:r>
+              <a:rPr sz="1300" b="0" i="0">
+                <a:solidFill>
+                  <a:srgbClr val="2B2B2B"/>
+                </a:solidFill>
+                <a:latin typeface="Calibri"/>
+              </a:rPr>
+              <a:t>Traer el avance </a:t>
+            </a:r>
+            <a:r>
+              <a:rPr sz="1300" b="1" i="0">
+                <a:solidFill>
+                  <a:srgbClr val="2B2B2B"/>
+                </a:solidFill>
+                <a:latin typeface="Calibri"/>
+              </a:rPr>
+              <a:t>escrito</a:t>
+            </a:r>
+            <a:r>
+              <a:rPr sz="1300" b="0" i="0">
+                <a:solidFill>
+                  <a:srgbClr val="2B2B2B"/>
+                </a:solidFill>
+                <a:latin typeface="Calibri"/>
+              </a:rPr>
+              <a:t> a cada encuentro: se trabaja sobre lo que ya existe.</a:t>
+            </a:r>
+          </a:p>
+        </p:txBody>
+      </p:sp>
+      <p:sp>
+        <p:nvSpPr>
+          <p:cNvPr id="8" name="Rounded Rectangle 7"/>
+          <p:cNvSpPr/>
+          <p:nvPr/>
+        </p:nvSpPr>
+        <p:spPr>
+          <a:xfrm>
+            <a:off x="640080" y="3621024"/>
+            <a:ext cx="10911535" cy="713232"/>
+          </a:xfrm>
+          <a:prstGeom prst="roundRect">
+            <a:avLst/>
+          </a:prstGeom>
+          <a:solidFill>
+            <a:srgbClr val="FBE4E4"/>
+          </a:solidFill>
+          <a:ln>
+            <a:noFill/>
+          </a:ln>
+          <a:effectLst/>
+        </p:spPr>
+        <p:style>
+          <a:lnRef idx="1">
+            <a:schemeClr val="accent1"/>
+          </a:lnRef>
+          <a:fillRef idx="3">
+            <a:schemeClr val="accent1"/>
+          </a:fillRef>
+          <a:effectRef idx="2">
+            <a:schemeClr val="accent1"/>
+          </a:effectRef>
+          <a:fontRef idx="minor">
+            <a:schemeClr val="lt1"/>
+          </a:fontRef>
+        </p:style>
+        <p:txBody>
+          <a:bodyPr rtlCol="0" anchor="ctr"/>
+          <a:lstStyle/>
+          <a:p>
+            <a:pPr algn="ctr"/>
+          </a:p>
+        </p:txBody>
+      </p:sp>
+      <p:sp>
+        <p:nvSpPr>
+          <p:cNvPr id="9" name="TextBox 8"/>
+          <p:cNvSpPr txBox="1"/>
+          <p:nvPr/>
+        </p:nvSpPr>
+        <p:spPr>
+          <a:xfrm>
+            <a:off x="868680" y="3730752"/>
+            <a:ext cx="10454335" cy="493776"/>
+          </a:xfrm>
+          <a:prstGeom prst="rect">
+            <a:avLst/>
+          </a:prstGeom>
+          <a:noFill/>
+        </p:spPr>
+        <p:txBody>
+          <a:bodyPr wrap="square" anchor="t" lIns="0" rIns="0" tIns="0" bIns="0">
+            <a:spAutoFit/>
+          </a:bodyPr>
+          <a:lstStyle/>
+          <a:p>
+            <a:r>
+              <a:rPr sz="1300" b="1" i="0">
+                <a:solidFill>
+                  <a:srgbClr val="0C2340"/>
+                </a:solidFill>
+                <a:latin typeface="Calibri"/>
+              </a:rPr>
+              <a:t>⚠️ Importante</a:t>
+            </a:r>
+          </a:p>
+          <a:p>
+            <a:pPr>
+              <a:spcBef>
+                <a:spcPts val="400"/>
+              </a:spcBef>
+            </a:pPr>
+            <a:r>
+              <a:rPr sz="1300" b="0" i="0">
+                <a:solidFill>
+                  <a:srgbClr val="2B2B2B"/>
+                </a:solidFill>
+                <a:latin typeface="Calibri"/>
+              </a:rPr>
+              <a:t>Integridad académica: citar siempre en </a:t>
+            </a:r>
+            <a:r>
+              <a:rPr sz="1300" b="1" i="0">
+                <a:solidFill>
+                  <a:srgbClr val="2B2B2B"/>
+                </a:solidFill>
+                <a:latin typeface="Calibri"/>
+              </a:rPr>
+              <a:t>APA 7</a:t>
+            </a:r>
+            <a:r>
+              <a:rPr sz="1300" b="0" i="0">
+                <a:solidFill>
+                  <a:srgbClr val="2B2B2B"/>
+                </a:solidFill>
+                <a:latin typeface="Calibri"/>
+              </a:rPr>
+              <a:t>. El plagio tiene debido proceso.</a:t>
+            </a:r>
+          </a:p>
+        </p:txBody>
+      </p:sp>
+      <p:sp>
+        <p:nvSpPr>
+          <p:cNvPr id="10" name="TextBox 9"/>
+          <p:cNvSpPr txBox="1"/>
+          <p:nvPr/>
+        </p:nvSpPr>
+        <p:spPr>
+          <a:xfrm>
+            <a:off x="2194560" y="6446520"/>
+            <a:ext cx="5943600" cy="274320"/>
+          </a:xfrm>
+          <a:prstGeom prst="rect">
+            <a:avLst/>
+          </a:prstGeom>
+          <a:noFill/>
+        </p:spPr>
+        <p:txBody>
+          <a:bodyPr wrap="square" anchor="t" lIns="0" rIns="0" tIns="0" bIns="0">
+            <a:spAutoFit/>
+          </a:bodyPr>
+          <a:lstStyle/>
+          <a:p>
+            <a:pPr algn="l"/>
+            <a:r>
+              <a:rPr sz="1000" b="1" i="0">
+                <a:solidFill>
+                  <a:srgbClr val="8F989D"/>
+                </a:solidFill>
+                <a:latin typeface="Calibri"/>
+              </a:rPr>
+              <a:t>Inicio 5:10 pm</a:t>
+            </a:r>
+          </a:p>
+        </p:txBody>
+      </p:sp>
+      <p:sp>
+        <p:nvSpPr>
+          <p:cNvPr id="11" name="TextBox 10"/>
+          <p:cNvSpPr txBox="1"/>
+          <p:nvPr/>
+        </p:nvSpPr>
+        <p:spPr>
+          <a:xfrm>
+            <a:off x="11094415" y="6446520"/>
+            <a:ext cx="548640" cy="274320"/>
+          </a:xfrm>
+          <a:prstGeom prst="rect">
+            <a:avLst/>
+          </a:prstGeom>
+          <a:noFill/>
+        </p:spPr>
+        <p:txBody>
+          <a:bodyPr wrap="square" anchor="t" lIns="0" rIns="0" tIns="0" bIns="0">
+            <a:spAutoFit/>
+          </a:bodyPr>
+          <a:lstStyle/>
+          <a:p>
+            <a:pPr algn="r"/>
+            <a:r>
+              <a:rPr sz="1000" b="1" i="0">
+                <a:solidFill>
+                  <a:srgbClr val="8F989D"/>
+                </a:solidFill>
+                <a:latin typeface="Calibri"/>
+              </a:rPr>
+              <a:t>20</a:t>
+            </a:r>
+          </a:p>
+        </p:txBody>
+      </p:sp>
+    </p:spTree>
+  </p:cSld>
+  <p:clrMapOvr>
+    <a:masterClrMapping/>
+  </p:clrMapOvr>
+</p:sld>
+</file>
+
+<file path=ppt/slides/slide21.xml><?xml version="1.0" encoding="utf-8"?>
+<p:sld xmlns:a="http://schemas.openxmlformats.org/drawingml/2006/main" xmlns:p="http://schemas.openxmlformats.org/presentationml/2006/main" xmlns:r="http://schemas.openxmlformats.org/officeDocument/2006/relationships">
+  <p:cSld>
+    <p:bg>
+      <p:bgPr>
+        <a:solidFill>
+          <a:srgbClr val="FFFFFF"/>
+        </a:solidFill>
+        <a:effectLst/>
+      </p:bgPr>
+    </p:bg>
+    <p:spTree>
+      <p:nvGrpSpPr>
+        <p:cNvPr id="1" name=""/>
+        <p:cNvGrpSpPr/>
+        <p:nvPr/>
+      </p:nvGrpSpPr>
+      <p:grpSpPr/>
+      <p:sp>
+        <p:nvSpPr>
+          <p:cNvPr id="2" name="Rectangle 1"/>
+          <p:cNvSpPr/>
+          <p:nvPr/>
+        </p:nvSpPr>
+        <p:spPr>
+          <a:xfrm>
+            <a:off x="0" y="0"/>
+            <a:ext cx="12191695" cy="1188720"/>
+          </a:xfrm>
+          <a:prstGeom prst="rect">
+            <a:avLst/>
+          </a:prstGeom>
+          <a:solidFill>
+            <a:srgbClr val="0C2340"/>
+          </a:solidFill>
+          <a:ln>
+            <a:noFill/>
+          </a:ln>
+          <a:effectLst/>
+        </p:spPr>
+        <p:style>
+          <a:lnRef idx="1">
+            <a:schemeClr val="accent1"/>
+          </a:lnRef>
+          <a:fillRef idx="3">
+            <a:schemeClr val="accent1"/>
+          </a:fillRef>
+          <a:effectRef idx="2">
+            <a:schemeClr val="accent1"/>
+          </a:effectRef>
+          <a:fontRef idx="minor">
+            <a:schemeClr val="lt1"/>
+          </a:fontRef>
+        </p:style>
+        <p:txBody>
+          <a:bodyPr rtlCol="0" anchor="ctr"/>
+          <a:lstStyle/>
+          <a:p>
+            <a:pPr algn="ctr"/>
+          </a:p>
+        </p:txBody>
+      </p:sp>
+      <p:sp>
+        <p:nvSpPr>
+          <p:cNvPr id="3" name="TextBox 2"/>
+          <p:cNvSpPr txBox="1"/>
+          <p:nvPr/>
+        </p:nvSpPr>
+        <p:spPr>
+          <a:xfrm>
+            <a:off x="640080" y="0"/>
+            <a:ext cx="9082735" cy="1188720"/>
+          </a:xfrm>
+          <a:prstGeom prst="rect">
+            <a:avLst/>
+          </a:prstGeom>
+          <a:noFill/>
+        </p:spPr>
+        <p:txBody>
+          <a:bodyPr wrap="square" anchor="ctr" lIns="0" rIns="0" tIns="0" bIns="0">
+            <a:spAutoFit/>
+          </a:bodyPr>
+          <a:lstStyle/>
+          <a:p>
+            <a:pPr algn="ctr"/>
+            <a:r>
+              <a:rPr sz="2600" b="1" i="0">
+                <a:solidFill>
+                  <a:srgbClr val="FFFFFF"/>
+                </a:solidFill>
+                <a:latin typeface="Calibri"/>
+              </a:rPr>
+              <a:t>PARA LA PRÓXIMA SESIÓN</a:t>
+            </a:r>
+          </a:p>
+        </p:txBody>
+      </p:sp>
+      <p:sp>
+        <p:nvSpPr>
+          <p:cNvPr id="4" name="TextBox 3"/>
+          <p:cNvSpPr txBox="1"/>
+          <p:nvPr/>
+        </p:nvSpPr>
+        <p:spPr>
+          <a:xfrm>
+            <a:off x="640080" y="1691639"/>
+            <a:ext cx="10911535" cy="4617720"/>
+          </a:xfrm>
+          <a:prstGeom prst="rect">
+            <a:avLst/>
+          </a:prstGeom>
+          <a:noFill/>
+        </p:spPr>
+        <p:txBody>
+          <a:bodyPr wrap="square" anchor="t" lIns="0" rIns="0" tIns="0" bIns="0">
+            <a:spAutoFit/>
+          </a:bodyPr>
+          <a:lstStyle/>
+          <a:p>
+            <a:pPr>
+              <a:spcAft>
+                <a:spcPts val="1000"/>
+              </a:spcAft>
+            </a:pPr>
+            <a:r>
+              <a:rPr sz="1600" b="0" i="0">
+                <a:solidFill>
+                  <a:srgbClr val="2B2B2B"/>
+                </a:solidFill>
+                <a:latin typeface="Calibri"/>
+              </a:rPr>
+              <a:t>–   </a:t>
+            </a:r>
+            <a:r>
+              <a:rPr sz="1600" b="1" i="0">
+                <a:solidFill>
+                  <a:srgbClr val="2B2B2B"/>
+                </a:solidFill>
+                <a:latin typeface="Calibri"/>
+              </a:rPr>
+              <a:t>Lectura autónoma:</a:t>
+            </a:r>
+            <a:r>
+              <a:rPr sz="1600" b="0" i="0">
+                <a:solidFill>
+                  <a:srgbClr val="2B2B2B"/>
+                </a:solidFill>
+                <a:latin typeface="Calibri"/>
+              </a:rPr>
+              <a:t> U1–U2 (Casos de éxito · retomar proyecto · contexto y planteamiento) — la retomamos al abrir la Sesión 02.</a:t>
+            </a:r>
+          </a:p>
+          <a:p>
+            <a:pPr>
+              <a:spcAft>
+                <a:spcPts val="1000"/>
+              </a:spcAft>
+            </a:pPr>
+            <a:r>
+              <a:rPr sz="1600" b="0" i="0">
+                <a:solidFill>
+                  <a:srgbClr val="2B2B2B"/>
+                </a:solidFill>
+                <a:latin typeface="Calibri"/>
+              </a:rPr>
+              <a:t>–   Revisar la </a:t>
+            </a:r>
+            <a:r>
+              <a:rPr sz="1600" b="1" i="0">
+                <a:solidFill>
+                  <a:srgbClr val="2B2B2B"/>
+                </a:solidFill>
+                <a:latin typeface="Calibri"/>
+              </a:rPr>
+              <a:t>Presentación del Curso</a:t>
+            </a:r>
+            <a:r>
+              <a:rPr sz="1600" b="0" i="0">
+                <a:solidFill>
+                  <a:srgbClr val="2B2B2B"/>
+                </a:solidFill>
+                <a:latin typeface="Calibri"/>
+              </a:rPr>
+              <a:t> completa (fechas, evaluación, contenido de todas las sesiones).</a:t>
+            </a:r>
+          </a:p>
+          <a:p>
+            <a:pPr>
+              <a:spcAft>
+                <a:spcPts val="1000"/>
+              </a:spcAft>
+            </a:pPr>
+            <a:r>
+              <a:rPr sz="1600" b="0" i="0">
+                <a:solidFill>
+                  <a:srgbClr val="2B2B2B"/>
+                </a:solidFill>
+                <a:latin typeface="Calibri"/>
+              </a:rPr>
+              <a:t>–   Abrir el enunciado de la </a:t>
+            </a:r>
+            <a:r>
+              <a:rPr sz="1600" b="1" i="0">
+                <a:solidFill>
+                  <a:srgbClr val="2B2B2B"/>
+                </a:solidFill>
+                <a:latin typeface="Calibri"/>
+              </a:rPr>
+              <a:t>ACA 1</a:t>
+            </a:r>
+            <a:r>
+              <a:rPr sz="1600" b="0" i="0">
+                <a:solidFill>
+                  <a:srgbClr val="2B2B2B"/>
+                </a:solidFill>
+                <a:latin typeface="Calibri"/>
+              </a:rPr>
+              <a:t> en `Clases/Recursos/ACAs/` y leerlo entero.</a:t>
+            </a:r>
+          </a:p>
+        </p:txBody>
+      </p:sp>
+      <p:sp>
+        <p:nvSpPr>
+          <p:cNvPr id="5" name="TextBox 4"/>
+          <p:cNvSpPr txBox="1"/>
+          <p:nvPr/>
+        </p:nvSpPr>
+        <p:spPr>
+          <a:xfrm>
+            <a:off x="2194560" y="6446520"/>
+            <a:ext cx="5943600" cy="274320"/>
+          </a:xfrm>
+          <a:prstGeom prst="rect">
+            <a:avLst/>
+          </a:prstGeom>
+          <a:noFill/>
+        </p:spPr>
+        <p:txBody>
+          <a:bodyPr wrap="square" anchor="t" lIns="0" rIns="0" tIns="0" bIns="0">
+            <a:spAutoFit/>
+          </a:bodyPr>
+          <a:lstStyle/>
+          <a:p>
+            <a:pPr algn="l"/>
+            <a:r>
+              <a:rPr sz="1000" b="1" i="0">
+                <a:solidFill>
+                  <a:srgbClr val="8F989D"/>
+                </a:solidFill>
+                <a:latin typeface="Calibri"/>
+              </a:rPr>
+              <a:t>Inicio 5:10 pm</a:t>
+            </a:r>
+          </a:p>
+        </p:txBody>
+      </p:sp>
+      <p:sp>
+        <p:nvSpPr>
+          <p:cNvPr id="6" name="TextBox 5"/>
+          <p:cNvSpPr txBox="1"/>
+          <p:nvPr/>
+        </p:nvSpPr>
+        <p:spPr>
+          <a:xfrm>
+            <a:off x="11094415" y="6446520"/>
+            <a:ext cx="548640" cy="274320"/>
+          </a:xfrm>
+          <a:prstGeom prst="rect">
+            <a:avLst/>
+          </a:prstGeom>
+          <a:noFill/>
+        </p:spPr>
+        <p:txBody>
+          <a:bodyPr wrap="square" anchor="t" lIns="0" rIns="0" tIns="0" bIns="0">
+            <a:spAutoFit/>
+          </a:bodyPr>
+          <a:lstStyle/>
+          <a:p>
+            <a:pPr algn="r"/>
+            <a:r>
+              <a:rPr sz="1000" b="1" i="0">
+                <a:solidFill>
+                  <a:srgbClr val="8F989D"/>
+                </a:solidFill>
+                <a:latin typeface="Calibri"/>
+              </a:rPr>
+              <a:t>21</a:t>
+            </a:r>
+          </a:p>
+        </p:txBody>
+      </p:sp>
+    </p:spTree>
+  </p:cSld>
+  <p:clrMapOvr>
+    <a:masterClrMapping/>
+  </p:clrMapOvr>
+</p:sld>
+</file>
+
+<file path=ppt/slides/slide22.xml><?xml version="1.0" encoding="utf-8"?>
+<p:sld xmlns:a="http://schemas.openxmlformats.org/drawingml/2006/main" xmlns:p="http://schemas.openxmlformats.org/presentationml/2006/main" xmlns:r="http://schemas.openxmlformats.org/officeDocument/2006/relationships">
+  <p:cSld>
+    <p:bg>
+      <p:bgPr>
+        <a:solidFill>
+          <a:srgbClr val="FFFFFF"/>
+        </a:solidFill>
+        <a:effectLst/>
+      </p:bgPr>
+    </p:bg>
+    <p:spTree>
+      <p:nvGrpSpPr>
+        <p:cNvPr id="1" name=""/>
+        <p:cNvGrpSpPr/>
+        <p:nvPr/>
+      </p:nvGrpSpPr>
+      <p:grpSpPr/>
+      <p:sp>
+        <p:nvSpPr>
+          <p:cNvPr id="2" name="Rectangle 1"/>
+          <p:cNvSpPr/>
+          <p:nvPr/>
+        </p:nvSpPr>
+        <p:spPr>
+          <a:xfrm>
+            <a:off x="0" y="0"/>
+            <a:ext cx="12191695" cy="164592"/>
+          </a:xfrm>
+          <a:prstGeom prst="rect">
+            <a:avLst/>
+          </a:prstGeom>
+          <a:solidFill>
+            <a:srgbClr val="007433"/>
+          </a:solidFill>
+          <a:ln>
+            <a:noFill/>
+          </a:ln>
+          <a:effectLst/>
+        </p:spPr>
+        <p:style>
+          <a:lnRef idx="1">
+            <a:schemeClr val="accent1"/>
+          </a:lnRef>
+          <a:fillRef idx="3">
+            <a:schemeClr val="accent1"/>
+          </a:fillRef>
+          <a:effectRef idx="2">
+            <a:schemeClr val="accent1"/>
+          </a:effectRef>
+          <a:fontRef idx="minor">
+            <a:schemeClr val="lt1"/>
+          </a:fontRef>
+        </p:style>
+        <p:txBody>
+          <a:bodyPr rtlCol="0" anchor="ctr"/>
+          <a:lstStyle/>
+          <a:p>
+            <a:pPr algn="ctr"/>
+          </a:p>
+        </p:txBody>
+      </p:sp>
+      <p:pic>
+        <p:nvPicPr>
+          <p:cNvPr id="3" name="Picture 2" descr="logo_cun_solo.png"/>
+          <p:cNvPicPr>
+            <a:picLocks noChangeAspect="1"/>
+          </p:cNvPicPr>
+          <p:nvPr/>
+        </p:nvPicPr>
+        <p:blipFill>
+          <a:blip r:embed="rId2"/>
+          <a:stretch>
+            <a:fillRect/>
+          </a:stretch>
+        </p:blipFill>
+        <p:spPr>
+          <a:xfrm>
+            <a:off x="10362895" y="5632704"/>
+            <a:ext cx="1371600" cy="950976"/>
+          </a:xfrm>
+          <a:prstGeom prst="rect">
+            <a:avLst/>
+          </a:prstGeom>
+        </p:spPr>
+      </p:pic>
+      <p:sp>
+        <p:nvSpPr>
+          <p:cNvPr id="4" name="TextBox 3"/>
+          <p:cNvSpPr txBox="1"/>
+          <p:nvPr/>
+        </p:nvSpPr>
+        <p:spPr>
+          <a:xfrm>
+            <a:off x="640080" y="1737360"/>
+            <a:ext cx="10911535" cy="1097280"/>
+          </a:xfrm>
+          <a:prstGeom prst="rect">
+            <a:avLst/>
+          </a:prstGeom>
+          <a:noFill/>
+        </p:spPr>
+        <p:txBody>
+          <a:bodyPr wrap="square" anchor="ctr" lIns="0" rIns="0" tIns="0" bIns="0">
+            <a:spAutoFit/>
+          </a:bodyPr>
+          <a:lstStyle/>
+          <a:p>
+            <a:pPr algn="ctr"/>
+            <a:r>
+              <a:rPr sz="3400" b="1" i="0">
+                <a:solidFill>
+                  <a:srgbClr val="0C2340"/>
+                </a:solidFill>
+                <a:latin typeface="Calibri"/>
+              </a:rPr>
+              <a:t>Cierre — Sesión 01</a:t>
+            </a:r>
+          </a:p>
+        </p:txBody>
+      </p:sp>
+      <p:sp>
+        <p:nvSpPr>
+          <p:cNvPr id="5" name="TextBox 4"/>
+          <p:cNvSpPr txBox="1"/>
+          <p:nvPr/>
+        </p:nvSpPr>
+        <p:spPr>
+          <a:xfrm>
+            <a:off x="640080" y="3017520"/>
+            <a:ext cx="10911535" cy="1645920"/>
+          </a:xfrm>
+          <a:prstGeom prst="rect">
+            <a:avLst/>
+          </a:prstGeom>
+          <a:noFill/>
+        </p:spPr>
+        <p:txBody>
+          <a:bodyPr wrap="square" anchor="t" lIns="0" rIns="0" tIns="0" bIns="0">
+            <a:spAutoFit/>
+          </a:bodyPr>
+          <a:lstStyle/>
+          <a:p>
+            <a:pPr algn="ctr">
+              <a:spcAft>
+                <a:spcPts val="600"/>
+              </a:spcAft>
+            </a:pPr>
+            <a:r>
+              <a:rPr sz="1600" b="0" i="0">
+                <a:solidFill>
+                  <a:srgbClr val="2B2B2B"/>
+                </a:solidFill>
+                <a:latin typeface="Calibri"/>
+              </a:rPr>
+              <a:t>Ya sabemos qué haremos, cómo se evalúa y quién es quién.</a:t>
+            </a:r>
+          </a:p>
+          <a:p>
+            <a:pPr algn="ctr">
+              <a:spcAft>
+                <a:spcPts val="600"/>
+              </a:spcAft>
+            </a:pPr>
+            <a:r>
+              <a:rPr sz="1600" b="1" i="0">
+                <a:solidFill>
+                  <a:srgbClr val="2B2B2B"/>
+                </a:solidFill>
+                <a:latin typeface="Calibri"/>
+              </a:rPr>
+              <a:t>Sesión 02:</a:t>
+            </a:r>
+            <a:r>
+              <a:rPr sz="1600" b="0" i="0">
+                <a:solidFill>
+                  <a:srgbClr val="2B2B2B"/>
+                </a:solidFill>
+                <a:latin typeface="Calibri"/>
+              </a:rPr>
+              <a:t> arranca el contenido del curso.</a:t>
+            </a:r>
+          </a:p>
+        </p:txBody>
+      </p:sp>
+      <p:sp>
+        <p:nvSpPr>
+          <p:cNvPr id="6" name="TextBox 5"/>
+          <p:cNvSpPr txBox="1"/>
+          <p:nvPr/>
+        </p:nvSpPr>
+        <p:spPr>
+          <a:xfrm>
+            <a:off x="640080" y="4754880"/>
+            <a:ext cx="10911535" cy="640080"/>
+          </a:xfrm>
+          <a:prstGeom prst="rect">
+            <a:avLst/>
+          </a:prstGeom>
+          <a:noFill/>
+        </p:spPr>
+        <p:txBody>
+          <a:bodyPr wrap="square" anchor="t" lIns="0" rIns="0" tIns="0" bIns="0">
+            <a:spAutoFit/>
+          </a:bodyPr>
+          <a:lstStyle/>
+          <a:p>
+            <a:pPr algn="ctr"/>
+            <a:r>
+              <a:rPr sz="2000" b="1" i="0">
+                <a:solidFill>
+                  <a:srgbClr val="007433"/>
+                </a:solidFill>
+                <a:latin typeface="Calibri"/>
+              </a:rPr>
+              <a:t>TRABAJO DE GRADO 3</a:t>
+            </a:r>
+          </a:p>
+        </p:txBody>
+      </p:sp>
+      <p:sp>
+        <p:nvSpPr>
+          <p:cNvPr id="7" name="TextBox 6"/>
+          <p:cNvSpPr txBox="1"/>
+          <p:nvPr/>
+        </p:nvSpPr>
+        <p:spPr>
+          <a:xfrm>
+            <a:off x="2194560" y="6446520"/>
+            <a:ext cx="5943600" cy="274320"/>
+          </a:xfrm>
+          <a:prstGeom prst="rect">
+            <a:avLst/>
+          </a:prstGeom>
+          <a:noFill/>
+        </p:spPr>
+        <p:txBody>
+          <a:bodyPr wrap="square" anchor="t" lIns="0" rIns="0" tIns="0" bIns="0">
+            <a:spAutoFit/>
+          </a:bodyPr>
+          <a:lstStyle/>
+          <a:p>
+            <a:pPr algn="l"/>
+            <a:r>
+              <a:rPr sz="1000" b="1" i="0">
+                <a:solidFill>
+                  <a:srgbClr val="8F989D"/>
+                </a:solidFill>
+                <a:latin typeface="Calibri"/>
+              </a:rPr>
+              <a:t>Inicio 5:10 pm</a:t>
             </a:r>
           </a:p>
         </p:txBody>
@@ -5282,65 +11868,21 @@
                 </a:solidFill>
                 <a:latin typeface="Calibri"/>
               </a:rPr>
-              <a:t>ACUERDOS DE TRABAJO</a:t>
-            </a:r>
-          </a:p>
-        </p:txBody>
-      </p:sp>
-      <p:sp>
-        <p:nvSpPr>
-          <p:cNvPr id="4" name="Rounded Rectangle 3"/>
-          <p:cNvSpPr/>
-          <p:nvPr/>
-        </p:nvSpPr>
-        <p:spPr>
-          <a:xfrm>
-            <a:off x="640080" y="1737360"/>
-            <a:ext cx="10911535" cy="713232"/>
-          </a:xfrm>
-          <a:prstGeom prst="roundRect">
-            <a:avLst/>
-          </a:prstGeom>
-          <a:solidFill>
-            <a:srgbClr val="E8F5EC"/>
-          </a:solidFill>
-          <a:ln>
-            <a:noFill/>
-          </a:ln>
-          <a:effectLst/>
-        </p:spPr>
-        <p:style>
-          <a:lnRef idx="1">
-            <a:schemeClr val="accent1"/>
-          </a:lnRef>
-          <a:fillRef idx="3">
-            <a:schemeClr val="accent1"/>
-          </a:fillRef>
-          <a:effectRef idx="2">
-            <a:schemeClr val="accent1"/>
-          </a:effectRef>
-          <a:fontRef idx="minor">
-            <a:schemeClr val="lt1"/>
-          </a:fontRef>
-        </p:style>
-        <p:txBody>
-          <a:bodyPr rtlCol="0" anchor="ctr"/>
-          <a:lstStyle/>
-          <a:p>
-            <a:pPr algn="ctr"/>
-          </a:p>
-        </p:txBody>
-      </p:sp>
-      <p:sp>
-        <p:nvSpPr>
-          <p:cNvPr id="5" name="TextBox 4"/>
+              <a:t>Cómo trabajamos: una hora semanal para cerrar el trabajo de grado</a:t>
+            </a:r>
+          </a:p>
+        </p:txBody>
+      </p:sp>
+      <p:sp>
+        <p:nvSpPr>
+          <p:cNvPr id="4" name="TextBox 3"/>
           <p:cNvSpPr txBox="1"/>
           <p:nvPr/>
         </p:nvSpPr>
         <p:spPr>
           <a:xfrm>
-            <a:off x="868680" y="1847088"/>
-            <a:ext cx="10454335" cy="493776"/>
+            <a:off x="640080" y="1691639"/>
+            <a:ext cx="10911535" cy="4617720"/>
           </a:xfrm>
           <a:prstGeom prst="rect">
             <a:avLst/>
@@ -5353,97 +11895,298 @@
           </a:bodyPr>
           <a:lstStyle/>
           <a:p>
-            <a:r>
-              <a:rPr sz="1300" b="1" i="0">
-                <a:solidFill>
-                  <a:srgbClr val="0C2340"/>
-                </a:solidFill>
-                <a:latin typeface="Calibri"/>
-              </a:rPr>
-              <a:t>ℹ️ Nota institucional</a:t>
-            </a:r>
-          </a:p>
-          <a:p>
             <a:pPr>
-              <a:spcBef>
-                <a:spcPts val="400"/>
-              </a:spcBef>
+              <a:spcAft>
+                <a:spcPts val="1000"/>
+              </a:spcAft>
             </a:pPr>
             <a:r>
-              <a:rPr sz="1300" b="1" i="0">
-                <a:solidFill>
-                  <a:srgbClr val="2B2B2B"/>
-                </a:solidFill>
-                <a:latin typeface="Calibri"/>
-              </a:rPr>
-              <a:t>Entrega oficial: CDigital.</a:t>
-            </a:r>
-            <a:r>
-              <a:rPr sz="1300" b="0" i="0">
-                <a:solidFill>
-                  <a:srgbClr val="2B2B2B"/>
-                </a:solidFill>
-                <a:latin typeface="Calibri"/>
-              </a:rPr>
-              <a:t> Lo que no esté ahí, no está entregado.</a:t>
-            </a:r>
-          </a:p>
-        </p:txBody>
-      </p:sp>
-      <p:sp>
-        <p:nvSpPr>
-          <p:cNvPr id="6" name="Rounded Rectangle 5"/>
-          <p:cNvSpPr/>
-          <p:nvPr/>
-        </p:nvSpPr>
-        <p:spPr>
-          <a:xfrm>
-            <a:off x="640080" y="2679191"/>
-            <a:ext cx="10911535" cy="713232"/>
-          </a:xfrm>
-          <a:prstGeom prst="roundRect">
-            <a:avLst/>
-          </a:prstGeom>
-          <a:solidFill>
-            <a:srgbClr val="FDECD8"/>
-          </a:solidFill>
-          <a:ln>
-            <a:noFill/>
-          </a:ln>
-          <a:effectLst/>
-        </p:spPr>
-        <p:style>
-          <a:lnRef idx="1">
-            <a:schemeClr val="accent1"/>
-          </a:lnRef>
-          <a:fillRef idx="3">
-            <a:schemeClr val="accent1"/>
-          </a:fillRef>
-          <a:effectRef idx="2">
-            <a:schemeClr val="accent1"/>
-          </a:effectRef>
-          <a:fontRef idx="minor">
-            <a:schemeClr val="lt1"/>
-          </a:fontRef>
-        </p:style>
-        <p:txBody>
-          <a:bodyPr rtlCol="0" anchor="ctr"/>
-          <a:lstStyle/>
-          <a:p>
-            <a:pPr algn="ctr"/>
-          </a:p>
-        </p:txBody>
-      </p:sp>
-      <p:sp>
-        <p:nvSpPr>
-          <p:cNvPr id="7" name="TextBox 6"/>
+              <a:rPr sz="1600" b="0" i="0">
+                <a:solidFill>
+                  <a:srgbClr val="2B2B2B"/>
+                </a:solidFill>
+                <a:latin typeface="Calibri"/>
+              </a:rPr>
+              <a:t>–   </a:t>
+            </a:r>
+            <a:r>
+              <a:rPr sz="1600" b="1" i="0">
+                <a:solidFill>
+                  <a:srgbClr val="2B2B2B"/>
+                </a:solidFill>
+                <a:latin typeface="Calibri"/>
+              </a:rPr>
+              <a:t>Una hora sincrónica por semana</a:t>
+            </a:r>
+            <a:r>
+              <a:rPr sz="1600" b="0" i="0">
+                <a:solidFill>
+                  <a:srgbClr val="2B2B2B"/>
+                </a:solidFill>
+                <a:latin typeface="Calibri"/>
+              </a:rPr>
+              <a:t> y quince encuentros. TG3 </a:t>
+            </a:r>
+            <a:r>
+              <a:rPr sz="1600" b="1" i="0">
+                <a:solidFill>
+                  <a:srgbClr val="2B2B2B"/>
+                </a:solidFill>
+                <a:latin typeface="Calibri"/>
+              </a:rPr>
+              <a:t>no empieza nada</a:t>
+            </a:r>
+            <a:r>
+              <a:rPr sz="1600" b="0" i="0">
+                <a:solidFill>
+                  <a:srgbClr val="2B2B2B"/>
+                </a:solidFill>
+                <a:latin typeface="Calibri"/>
+              </a:rPr>
+              <a:t>: termina lo que usted viene construyendo desde el semestre anterior.</a:t>
+            </a:r>
+          </a:p>
+          <a:p>
+            <a:pPr>
+              <a:spcAft>
+                <a:spcPts val="1000"/>
+              </a:spcAft>
+            </a:pPr>
+            <a:r>
+              <a:rPr sz="1600" b="0" i="0">
+                <a:solidFill>
+                  <a:srgbClr val="2B2B2B"/>
+                </a:solidFill>
+                <a:latin typeface="Calibri"/>
+              </a:rPr>
+              <a:t>–   </a:t>
+            </a:r>
+            <a:r>
+              <a:rPr sz="1600" b="1" i="0">
+                <a:solidFill>
+                  <a:srgbClr val="2B2B2B"/>
+                </a:solidFill>
+                <a:latin typeface="Calibri"/>
+              </a:rPr>
+              <a:t>Antes de cada encuentro:</a:t>
+            </a:r>
+            <a:r>
+              <a:rPr sz="1600" b="0" i="0">
+                <a:solidFill>
+                  <a:srgbClr val="2B2B2B"/>
+                </a:solidFill>
+                <a:latin typeface="Calibri"/>
+              </a:rPr>
+              <a:t> revisa en CDigital lo que el Docente publica y avanza la sección de la semana.</a:t>
+            </a:r>
+          </a:p>
+          <a:p>
+            <a:pPr>
+              <a:spcAft>
+                <a:spcPts val="1000"/>
+              </a:spcAft>
+            </a:pPr>
+            <a:r>
+              <a:rPr sz="1600" b="0" i="0">
+                <a:solidFill>
+                  <a:srgbClr val="2B2B2B"/>
+                </a:solidFill>
+                <a:latin typeface="Calibri"/>
+              </a:rPr>
+              <a:t>–   </a:t>
+            </a:r>
+            <a:r>
+              <a:rPr sz="1600" b="1" i="0">
+                <a:solidFill>
+                  <a:srgbClr val="2B2B2B"/>
+                </a:solidFill>
+                <a:latin typeface="Calibri"/>
+              </a:rPr>
+              <a:t>Durante el encuentro:</a:t>
+            </a:r>
+            <a:r>
+              <a:rPr sz="1600" b="0" i="0">
+                <a:solidFill>
+                  <a:srgbClr val="2B2B2B"/>
+                </a:solidFill>
+                <a:latin typeface="Calibri"/>
+              </a:rPr>
+              <a:t> criterio y ejemplo en pocos minutos, y luego </a:t>
+            </a:r>
+            <a:r>
+              <a:rPr sz="1600" b="1" i="0">
+                <a:solidFill>
+                  <a:srgbClr val="2B2B2B"/>
+                </a:solidFill>
+                <a:latin typeface="Calibri"/>
+              </a:rPr>
+              <a:t>revisión sobre su documento real</a:t>
+            </a:r>
+            <a:r>
+              <a:rPr sz="1600" b="0" i="0">
+                <a:solidFill>
+                  <a:srgbClr val="2B2B2B"/>
+                </a:solidFill>
+                <a:latin typeface="Calibri"/>
+              </a:rPr>
+              <a:t>. Aquí se corrige texto, no se toma dictado.</a:t>
+            </a:r>
+          </a:p>
+          <a:p>
+            <a:pPr>
+              <a:spcAft>
+                <a:spcPts val="1000"/>
+              </a:spcAft>
+            </a:pPr>
+            <a:r>
+              <a:rPr sz="1600" b="0" i="0">
+                <a:solidFill>
+                  <a:srgbClr val="2B2B2B"/>
+                </a:solidFill>
+                <a:latin typeface="Calibri"/>
+              </a:rPr>
+              <a:t>–   </a:t>
+            </a:r>
+            <a:r>
+              <a:rPr sz="1600" b="1" i="0">
+                <a:solidFill>
+                  <a:srgbClr val="2B2B2B"/>
+                </a:solidFill>
+                <a:latin typeface="Calibri"/>
+              </a:rPr>
+              <a:t>Después:</a:t>
+            </a:r>
+            <a:r>
+              <a:rPr sz="1600" b="0" i="0">
+                <a:solidFill>
+                  <a:srgbClr val="2B2B2B"/>
+                </a:solidFill>
+                <a:latin typeface="Calibri"/>
+              </a:rPr>
+              <a:t> cierra la sección y la sube a CDigital antes de la siguiente clase.</a:t>
+            </a:r>
+          </a:p>
+          <a:p>
+            <a:pPr>
+              <a:spcAft>
+                <a:spcPts val="1000"/>
+              </a:spcAft>
+            </a:pPr>
+            <a:r>
+              <a:rPr sz="1600" b="0" i="0">
+                <a:solidFill>
+                  <a:srgbClr val="2B2B2B"/>
+                </a:solidFill>
+                <a:latin typeface="Calibri"/>
+              </a:rPr>
+              <a:t>–   </a:t>
+            </a:r>
+            <a:r>
+              <a:rPr sz="1600" b="1" i="0">
+                <a:solidFill>
+                  <a:srgbClr val="2B2B2B"/>
+                </a:solidFill>
+                <a:latin typeface="Calibri"/>
+              </a:rPr>
+              <a:t>Qué traer siempre:</a:t>
+            </a:r>
+          </a:p>
+          <a:p>
+            <a:pPr lvl="1">
+              <a:spcAft>
+                <a:spcPts val="600"/>
+              </a:spcAft>
+            </a:pPr>
+            <a:r>
+              <a:rPr sz="1500" b="0" i="0">
+                <a:solidFill>
+                  <a:srgbClr val="2B2B2B"/>
+                </a:solidFill>
+                <a:latin typeface="Calibri"/>
+              </a:rPr>
+              <a:t>●   Su </a:t>
+            </a:r>
+            <a:r>
+              <a:rPr sz="1500" b="1" i="0">
+                <a:solidFill>
+                  <a:srgbClr val="2B2B2B"/>
+                </a:solidFill>
+                <a:latin typeface="Calibri"/>
+              </a:rPr>
+              <a:t>artículo abierto</a:t>
+            </a:r>
+            <a:r>
+              <a:rPr sz="1500" b="0" i="0">
+                <a:solidFill>
+                  <a:srgbClr val="2B2B2B"/>
+                </a:solidFill>
+                <a:latin typeface="Calibri"/>
+              </a:rPr>
+              <a:t>, en la versión vigente (una sola, no cinco copias).</a:t>
+            </a:r>
+          </a:p>
+          <a:p>
+            <a:pPr lvl="1">
+              <a:spcAft>
+                <a:spcPts val="600"/>
+              </a:spcAft>
+            </a:pPr>
+            <a:r>
+              <a:rPr sz="1500" b="0" i="0">
+                <a:solidFill>
+                  <a:srgbClr val="2B2B2B"/>
+                </a:solidFill>
+                <a:latin typeface="Calibri"/>
+              </a:rPr>
+              <a:t>●   Su </a:t>
+            </a:r>
+            <a:r>
+              <a:rPr sz="1500" b="1" i="0">
+                <a:solidFill>
+                  <a:srgbClr val="2B2B2B"/>
+                </a:solidFill>
+                <a:latin typeface="Calibri"/>
+              </a:rPr>
+              <a:t>lista de referencias</a:t>
+            </a:r>
+            <a:r>
+              <a:rPr sz="1500" b="0" i="0">
+                <a:solidFill>
+                  <a:srgbClr val="2B2B2B"/>
+                </a:solidFill>
+                <a:latin typeface="Calibri"/>
+              </a:rPr>
+              <a:t> tal como va hoy, con el conteo real.</a:t>
+            </a:r>
+          </a:p>
+          <a:p>
+            <a:pPr lvl="1">
+              <a:spcAft>
+                <a:spcPts val="600"/>
+              </a:spcAft>
+            </a:pPr>
+            <a:r>
+              <a:rPr sz="1500" b="0" i="0">
+                <a:solidFill>
+                  <a:srgbClr val="2B2B2B"/>
+                </a:solidFill>
+                <a:latin typeface="Calibri"/>
+              </a:rPr>
+              <a:t>●   Una duda concreta: “esta discusión no dialoga con los autores”, no “ayúdeme con el artículo”.</a:t>
+            </a:r>
+          </a:p>
+        </p:txBody>
+      </p:sp>
+      <p:sp>
+        <p:nvSpPr>
+          <p:cNvPr id="5" name="TextBox 4"/>
           <p:cNvSpPr txBox="1"/>
           <p:nvPr/>
         </p:nvSpPr>
         <p:spPr>
           <a:xfrm>
-            <a:off x="868680" y="2788920"/>
-            <a:ext cx="10454335" cy="493776"/>
+            <a:off x="2194560" y="6446520"/>
+            <a:ext cx="5943600" cy="274320"/>
           </a:xfrm>
           <a:prstGeom prst="rect">
             <a:avLst/>
@@ -5456,106 +12199,29 @@
           </a:bodyPr>
           <a:lstStyle/>
           <a:p>
-            <a:r>
-              <a:rPr sz="1300" b="1" i="0">
-                <a:solidFill>
-                  <a:srgbClr val="0C2340"/>
-                </a:solidFill>
-                <a:latin typeface="Calibri"/>
-              </a:rPr>
-              <a:t>💡 Aclaración</a:t>
-            </a:r>
-          </a:p>
-          <a:p>
-            <a:pPr>
-              <a:spcBef>
-                <a:spcPts val="400"/>
-              </a:spcBef>
-            </a:pPr>
-            <a:r>
-              <a:rPr sz="1300" b="0" i="0">
-                <a:solidFill>
-                  <a:srgbClr val="2B2B2B"/>
-                </a:solidFill>
-                <a:latin typeface="Calibri"/>
-              </a:rPr>
-              <a:t>Traer el avance </a:t>
-            </a:r>
-            <a:r>
-              <a:rPr sz="1300" b="1" i="0">
-                <a:solidFill>
-                  <a:srgbClr val="2B2B2B"/>
-                </a:solidFill>
-                <a:latin typeface="Calibri"/>
-              </a:rPr>
-              <a:t>escrito</a:t>
-            </a:r>
-            <a:r>
-              <a:rPr sz="1300" b="0" i="0">
-                <a:solidFill>
-                  <a:srgbClr val="2B2B2B"/>
-                </a:solidFill>
-                <a:latin typeface="Calibri"/>
-              </a:rPr>
-              <a:t> a cada encuentro: se trabaja sobre lo que ya existe.</a:t>
-            </a:r>
-          </a:p>
-        </p:txBody>
-      </p:sp>
-      <p:sp>
-        <p:nvSpPr>
-          <p:cNvPr id="8" name="Rounded Rectangle 7"/>
-          <p:cNvSpPr/>
-          <p:nvPr/>
-        </p:nvSpPr>
-        <p:spPr>
-          <a:xfrm>
-            <a:off x="640080" y="3621024"/>
-            <a:ext cx="10911535" cy="713232"/>
-          </a:xfrm>
-          <a:prstGeom prst="roundRect">
-            <a:avLst/>
-          </a:prstGeom>
-          <a:solidFill>
-            <a:srgbClr val="FBE4E4"/>
-          </a:solidFill>
-          <a:ln>
-            <a:noFill/>
-          </a:ln>
-          <a:effectLst/>
-        </p:spPr>
-        <p:style>
-          <a:lnRef idx="1">
-            <a:schemeClr val="accent1"/>
-          </a:lnRef>
-          <a:fillRef idx="3">
-            <a:schemeClr val="accent1"/>
-          </a:fillRef>
-          <a:effectRef idx="2">
-            <a:schemeClr val="accent1"/>
-          </a:effectRef>
-          <a:fontRef idx="minor">
-            <a:schemeClr val="lt1"/>
-          </a:fontRef>
-        </p:style>
-        <p:txBody>
-          <a:bodyPr rtlCol="0" anchor="ctr"/>
-          <a:lstStyle/>
-          <a:p>
-            <a:pPr algn="ctr"/>
-          </a:p>
-        </p:txBody>
-      </p:sp>
-      <p:sp>
-        <p:nvSpPr>
-          <p:cNvPr id="9" name="TextBox 8"/>
+            <a:pPr algn="l"/>
+            <a:r>
+              <a:rPr sz="1000" b="1" i="0">
+                <a:solidFill>
+                  <a:srgbClr val="8F989D"/>
+                </a:solidFill>
+                <a:latin typeface="Calibri"/>
+              </a:rPr>
+              <a:t>Inicio 5:10 pm</a:t>
+            </a:r>
+          </a:p>
+        </p:txBody>
+      </p:sp>
+      <p:sp>
+        <p:nvSpPr>
+          <p:cNvPr id="6" name="TextBox 5"/>
           <p:cNvSpPr txBox="1"/>
           <p:nvPr/>
         </p:nvSpPr>
         <p:spPr>
           <a:xfrm>
-            <a:off x="868680" y="3730752"/>
-            <a:ext cx="10454335" cy="493776"/>
+            <a:off x="11094415" y="6446520"/>
+            <a:ext cx="548640" cy="274320"/>
           </a:xfrm>
           <a:prstGeom prst="rect">
             <a:avLst/>
@@ -5568,62 +12234,29 @@
           </a:bodyPr>
           <a:lstStyle/>
           <a:p>
-            <a:r>
-              <a:rPr sz="1300" b="1" i="0">
-                <a:solidFill>
-                  <a:srgbClr val="0C2340"/>
-                </a:solidFill>
-                <a:latin typeface="Calibri"/>
-              </a:rPr>
-              <a:t>⚠️ Importante</a:t>
-            </a:r>
-          </a:p>
-          <a:p>
-            <a:pPr>
-              <a:spcBef>
-                <a:spcPts val="400"/>
-              </a:spcBef>
-            </a:pPr>
-            <a:r>
-              <a:rPr sz="1300" b="0" i="0">
-                <a:solidFill>
-                  <a:srgbClr val="2B2B2B"/>
-                </a:solidFill>
-                <a:latin typeface="Calibri"/>
-              </a:rPr>
-              <a:t>Integridad académica: citar siempre en </a:t>
-            </a:r>
-            <a:r>
-              <a:rPr sz="1300" b="1" i="0">
-                <a:solidFill>
-                  <a:srgbClr val="2B2B2B"/>
-                </a:solidFill>
-                <a:latin typeface="Calibri"/>
-              </a:rPr>
-              <a:t>APA 7</a:t>
-            </a:r>
-            <a:r>
-              <a:rPr sz="1300" b="0" i="0">
-                <a:solidFill>
-                  <a:srgbClr val="2B2B2B"/>
-                </a:solidFill>
-                <a:latin typeface="Calibri"/>
-              </a:rPr>
-              <a:t>. El plagio tiene debido proceso.</a:t>
-            </a:r>
-          </a:p>
-        </p:txBody>
-      </p:sp>
-      <p:sp>
-        <p:nvSpPr>
-          <p:cNvPr id="10" name="TextBox 9"/>
+            <a:pPr algn="r"/>
+            <a:r>
+              <a:rPr sz="1000" b="1" i="0">
+                <a:solidFill>
+                  <a:srgbClr val="8F989D"/>
+                </a:solidFill>
+                <a:latin typeface="Calibri"/>
+              </a:rPr>
+              <a:t>6</a:t>
+            </a:r>
+          </a:p>
+        </p:txBody>
+      </p:sp>
+      <p:sp>
+        <p:nvSpPr>
+          <p:cNvPr id="7" name="TextBox 6"/>
           <p:cNvSpPr txBox="1"/>
           <p:nvPr/>
         </p:nvSpPr>
         <p:spPr>
           <a:xfrm>
-            <a:off x="2194560" y="6446520"/>
-            <a:ext cx="5943600" cy="274320"/>
+            <a:off x="640080" y="5943600"/>
+            <a:ext cx="9997135" cy="457200"/>
           </a:xfrm>
           <a:prstGeom prst="rect">
             <a:avLst/>
@@ -5636,50 +12269,14 @@
           </a:bodyPr>
           <a:lstStyle/>
           <a:p>
-            <a:pPr algn="l"/>
-            <a:r>
-              <a:rPr sz="1000" b="1" i="0">
-                <a:solidFill>
-                  <a:srgbClr val="8F989D"/>
-                </a:solidFill>
-                <a:latin typeface="Calibri"/>
-              </a:rPr>
-              <a:t>Inicio 5:10 pm</a:t>
-            </a:r>
-          </a:p>
-        </p:txBody>
-      </p:sp>
-      <p:sp>
-        <p:nvSpPr>
-          <p:cNvPr id="11" name="TextBox 10"/>
-          <p:cNvSpPr txBox="1"/>
-          <p:nvPr/>
-        </p:nvSpPr>
-        <p:spPr>
-          <a:xfrm>
-            <a:off x="11094415" y="6446520"/>
-            <a:ext cx="548640" cy="274320"/>
-          </a:xfrm>
-          <a:prstGeom prst="rect">
-            <a:avLst/>
-          </a:prstGeom>
-          <a:noFill/>
-        </p:spPr>
-        <p:txBody>
-          <a:bodyPr wrap="square" anchor="t" lIns="0" rIns="0" tIns="0" bIns="0">
-            <a:spAutoFit/>
-          </a:bodyPr>
-          <a:lstStyle/>
-          <a:p>
-            <a:pPr algn="r"/>
-            <a:r>
-              <a:rPr sz="1000" b="1" i="0">
-                <a:solidFill>
-                  <a:srgbClr val="8F989D"/>
-                </a:solidFill>
-                <a:latin typeface="Calibri"/>
-              </a:rPr>
-              <a:t>6</a:t>
+            <a:r>
+              <a:rPr sz="1200" b="0" i="1">
+                <a:solidFill>
+                  <a:srgbClr val="2B2B2B"/>
+                </a:solidFill>
+                <a:latin typeface="Calibri"/>
+              </a:rPr>
+              <a:t>El calendario aprieta al final: quien avanza una sección por semana llega a sustentar con dominio; quien deja todo para el cierre, sustenta lo que alcanzó a leer.</a:t>
             </a:r>
           </a:p>
         </p:txBody>
@@ -5784,7 +12381,7 @@
                 </a:solidFill>
                 <a:latin typeface="Calibri"/>
               </a:rPr>
-              <a:t>PARA LA PRÓXIMA SESIÓN</a:t>
+              <a:t>Qué se llevan al final: artículo, sustentación y repositorio</a:t>
             </a:r>
           </a:p>
         </p:txBody>
@@ -5823,7 +12420,7 @@
                 </a:solidFill>
                 <a:latin typeface="Calibri"/>
               </a:rPr>
-              <a:t>–   </a:t>
+              <a:t>–   El producto de TG3 son </a:t>
             </a:r>
             <a:r>
               <a:rPr sz="1600" b="1" i="0">
@@ -5832,7 +12429,7 @@
                 </a:solidFill>
                 <a:latin typeface="Calibri"/>
               </a:rPr>
-              <a:t>Lectura autónoma:</a:t>
+              <a:t>tres cosas encadenadas</a:t>
             </a:r>
             <a:r>
               <a:rPr sz="1600" b="0" i="0">
@@ -5841,7 +12438,145 @@
                 </a:solidFill>
                 <a:latin typeface="Calibri"/>
               </a:rPr>
-              <a:t> U1–U2 (Casos de éxito · retomar proyecto · contexto y planteamiento) — la retomamos al abrir la Sesión 02.</a:t>
+              <a:t>, y las tres se anuncian hoy para que nadie se entere en la recta final:</a:t>
+            </a:r>
+          </a:p>
+          <a:p>
+            <a:pPr lvl="1">
+              <a:spcAft>
+                <a:spcPts val="600"/>
+              </a:spcAft>
+            </a:pPr>
+            <a:r>
+              <a:rPr sz="1500" b="0" i="0">
+                <a:solidFill>
+                  <a:srgbClr val="2B2B2B"/>
+                </a:solidFill>
+                <a:latin typeface="Calibri"/>
+              </a:rPr>
+              <a:t>●   </a:t>
+            </a:r>
+            <a:r>
+              <a:rPr sz="1500" b="1" i="0">
+                <a:solidFill>
+                  <a:srgbClr val="2B2B2B"/>
+                </a:solidFill>
+                <a:latin typeface="Calibri"/>
+              </a:rPr>
+              <a:t>1. Un artículo resultado de investigación</a:t>
+            </a:r>
+            <a:r>
+              <a:rPr sz="1500" b="0" i="0">
+                <a:solidFill>
+                  <a:srgbClr val="2B2B2B"/>
+                </a:solidFill>
+                <a:latin typeface="Calibri"/>
+              </a:rPr>
+              <a:t>, con revisión bibliográfica amplia (el Syllabus habla de </a:t>
+            </a:r>
+            <a:r>
+              <a:rPr sz="1500" b="1" i="0">
+                <a:solidFill>
+                  <a:srgbClr val="2B2B2B"/>
+                </a:solidFill>
+                <a:latin typeface="Calibri"/>
+              </a:rPr>
+              <a:t>al menos 50 referencias</a:t>
+            </a:r>
+            <a:r>
+              <a:rPr sz="1500" b="0" i="0">
+                <a:solidFill>
+                  <a:srgbClr val="2B2B2B"/>
+                </a:solidFill>
+                <a:latin typeface="Calibri"/>
+              </a:rPr>
+              <a:t>) y una </a:t>
+            </a:r>
+            <a:r>
+              <a:rPr sz="1500" b="1" i="0">
+                <a:solidFill>
+                  <a:srgbClr val="2B2B2B"/>
+                </a:solidFill>
+                <a:latin typeface="Calibri"/>
+              </a:rPr>
+              <a:t>extensión no inferior a 4.000 palabras</a:t>
+            </a:r>
+            <a:r>
+              <a:rPr sz="1500" b="0" i="0">
+                <a:solidFill>
+                  <a:srgbClr val="2B2B2B"/>
+                </a:solidFill>
+                <a:latin typeface="Calibri"/>
+              </a:rPr>
+              <a:t>.</a:t>
+            </a:r>
+          </a:p>
+          <a:p>
+            <a:pPr lvl="1">
+              <a:spcAft>
+                <a:spcPts val="600"/>
+              </a:spcAft>
+            </a:pPr>
+            <a:r>
+              <a:rPr sz="1500" b="0" i="0">
+                <a:solidFill>
+                  <a:srgbClr val="2B2B2B"/>
+                </a:solidFill>
+                <a:latin typeface="Calibri"/>
+              </a:rPr>
+              <a:t>●   </a:t>
+            </a:r>
+            <a:r>
+              <a:rPr sz="1500" b="1" i="0">
+                <a:solidFill>
+                  <a:srgbClr val="2B2B2B"/>
+                </a:solidFill>
+                <a:latin typeface="Calibri"/>
+              </a:rPr>
+              <a:t>2. Una sustentación ante jurados</a:t>
+            </a:r>
+            <a:r>
+              <a:rPr sz="1500" b="0" i="0">
+                <a:solidFill>
+                  <a:srgbClr val="2B2B2B"/>
+                </a:solidFill>
+                <a:latin typeface="Calibri"/>
+              </a:rPr>
+              <a:t>: defensa oral de su trabajo, no una lectura de diapositivas.</a:t>
+            </a:r>
+          </a:p>
+          <a:p>
+            <a:pPr lvl="1">
+              <a:spcAft>
+                <a:spcPts val="600"/>
+              </a:spcAft>
+            </a:pPr>
+            <a:r>
+              <a:rPr sz="1500" b="0" i="0">
+                <a:solidFill>
+                  <a:srgbClr val="2B2B2B"/>
+                </a:solidFill>
+                <a:latin typeface="Calibri"/>
+              </a:rPr>
+              <a:t>●   </a:t>
+            </a:r>
+            <a:r>
+              <a:rPr sz="1500" b="1" i="0">
+                <a:solidFill>
+                  <a:srgbClr val="2B2B2B"/>
+                </a:solidFill>
+                <a:latin typeface="Calibri"/>
+              </a:rPr>
+              <a:t>3. La carga al repositorio institucional</a:t>
+            </a:r>
+            <a:r>
+              <a:rPr sz="1500" b="0" i="0">
+                <a:solidFill>
+                  <a:srgbClr val="2B2B2B"/>
+                </a:solidFill>
+                <a:latin typeface="Calibri"/>
+              </a:rPr>
+              <a:t>, con los entregables que exija el instructivo del programa.</a:t>
             </a:r>
           </a:p>
           <a:p>
@@ -5857,7 +12592,7 @@
                 </a:solidFill>
                 <a:latin typeface="Calibri"/>
               </a:rPr>
-              <a:t>–   Revisar la </a:t>
+              <a:t>–   Si su opción de grado incluye un </a:t>
             </a:r>
             <a:r>
               <a:rPr sz="1600" b="1" i="0">
@@ -5866,7 +12601,7 @@
                 </a:solidFill>
                 <a:latin typeface="Calibri"/>
               </a:rPr>
-              <a:t>Presentación del Curso</a:t>
+              <a:t>producto de ingeniería</a:t>
             </a:r>
             <a:r>
               <a:rPr sz="1600" b="0" i="0">
@@ -5875,7 +12610,25 @@
                 </a:solidFill>
                 <a:latin typeface="Calibri"/>
               </a:rPr>
-              <a:t> completa (fechas, evaluación, contenido de todas las sesiones).</a:t>
+              <a:t> (prototipo, sistema, modelo, dataset), el producto no reemplaza al artículo: se </a:t>
+            </a:r>
+            <a:r>
+              <a:rPr sz="1600" b="1" i="0">
+                <a:solidFill>
+                  <a:srgbClr val="2B2B2B"/>
+                </a:solidFill>
+                <a:latin typeface="Calibri"/>
+              </a:rPr>
+              <a:t>documenta e investiga</a:t>
+            </a:r>
+            <a:r>
+              <a:rPr sz="1600" b="0" i="0">
+                <a:solidFill>
+                  <a:srgbClr val="2B2B2B"/>
+                </a:solidFill>
+                <a:latin typeface="Calibri"/>
+              </a:rPr>
+              <a:t> dentro de él.</a:t>
             </a:r>
           </a:p>
           <a:p>
@@ -5891,7 +12644,23 @@
                 </a:solidFill>
                 <a:latin typeface="Calibri"/>
               </a:rPr>
-              <a:t>–   Abrir el enunciado de la </a:t>
+              <a:t>–   Para qué le sirve después: es lo que queda publicado con su nombre. Un artículo bien hecho se muestra en una entrevista, se cita y abre la puerta a posgrado.</a:t>
+            </a:r>
+          </a:p>
+          <a:p>
+            <a:pPr>
+              <a:spcAft>
+                <a:spcPts val="1000"/>
+              </a:spcAft>
+            </a:pPr>
+            <a:r>
+              <a:rPr sz="1600" b="0" i="0">
+                <a:solidFill>
+                  <a:srgbClr val="2B2B2B"/>
+                </a:solidFill>
+                <a:latin typeface="Calibri"/>
+              </a:rPr>
+              <a:t>–   Regla del curso: </a:t>
             </a:r>
             <a:r>
               <a:rPr sz="1600" b="1" i="0">
@@ -5900,7 +12669,7 @@
                 </a:solidFill>
                 <a:latin typeface="Calibri"/>
               </a:rPr>
-              <a:t>ACA 1</a:t>
+              <a:t>cada sesión alimenta ese mismo artículo</a:t>
             </a:r>
             <a:r>
               <a:rPr sz="1600" b="0" i="0">
@@ -5909,7 +12678,7 @@
                 </a:solidFill>
                 <a:latin typeface="Calibri"/>
               </a:rPr>
-              <a:t> en `Clases/Recursos/ACAs/` y leerlo entero.</a:t>
+              <a:t>. No hay talleres isla.</a:t>
             </a:r>
           </a:p>
         </p:txBody>
@@ -5980,6 +12749,40 @@
                 <a:latin typeface="Calibri"/>
               </a:rPr>
               <a:t>7</a:t>
+            </a:r>
+          </a:p>
+        </p:txBody>
+      </p:sp>
+      <p:sp>
+        <p:nvSpPr>
+          <p:cNvPr id="7" name="TextBox 6"/>
+          <p:cNvSpPr txBox="1"/>
+          <p:nvPr/>
+        </p:nvSpPr>
+        <p:spPr>
+          <a:xfrm>
+            <a:off x="640080" y="5943600"/>
+            <a:ext cx="9997135" cy="457200"/>
+          </a:xfrm>
+          <a:prstGeom prst="rect">
+            <a:avLst/>
+          </a:prstGeom>
+          <a:noFill/>
+        </p:spPr>
+        <p:txBody>
+          <a:bodyPr wrap="square" anchor="t" lIns="0" rIns="0" tIns="0" bIns="0">
+            <a:spAutoFit/>
+          </a:bodyPr>
+          <a:lstStyle/>
+          <a:p>
+            <a:r>
+              <a:rPr sz="1200" b="0" i="1">
+                <a:solidFill>
+                  <a:srgbClr val="2B2B2B"/>
+                </a:solidFill>
+                <a:latin typeface="Calibri"/>
+              </a:rPr>
+              <a:t>Extensión y número de referencias son mínimos del Syllabus 94532, no metas opcionales. Se alcanzan sumando cada semana, nunca la última.</a:t>
             </a:r>
           </a:p>
         </p:txBody>
@@ -6019,13 +12822,13 @@
         <p:spPr>
           <a:xfrm>
             <a:off x="0" y="0"/>
-            <a:ext cx="12191695" cy="164592"/>
+            <a:ext cx="12191695" cy="1188720"/>
           </a:xfrm>
           <a:prstGeom prst="rect">
             <a:avLst/>
           </a:prstGeom>
           <a:solidFill>
-            <a:srgbClr val="007433"/>
+            <a:srgbClr val="0C2340"/>
           </a:solidFill>
           <a:ln>
             <a:noFill/>
@@ -6054,40 +12857,16 @@
           </a:p>
         </p:txBody>
       </p:sp>
-      <p:pic>
-        <p:nvPicPr>
-          <p:cNvPr id="3" name="Picture 2" descr="logo_cun_solo.png"/>
-          <p:cNvPicPr>
-            <a:picLocks noChangeAspect="1"/>
-          </p:cNvPicPr>
-          <p:nvPr/>
-        </p:nvPicPr>
-        <p:blipFill>
-          <a:blip r:embed="rId2"/>
-          <a:stretch>
-            <a:fillRect/>
-          </a:stretch>
-        </p:blipFill>
-        <p:spPr>
-          <a:xfrm>
-            <a:off x="10362895" y="5632704"/>
-            <a:ext cx="1371600" cy="950976"/>
-          </a:xfrm>
-          <a:prstGeom prst="rect">
-            <a:avLst/>
-          </a:prstGeom>
-        </p:spPr>
-      </p:pic>
-      <p:sp>
-        <p:nvSpPr>
-          <p:cNvPr id="4" name="TextBox 3"/>
+      <p:sp>
+        <p:nvSpPr>
+          <p:cNvPr id="3" name="TextBox 2"/>
           <p:cNvSpPr txBox="1"/>
           <p:nvPr/>
         </p:nvSpPr>
         <p:spPr>
           <a:xfrm>
-            <a:off x="640080" y="1737360"/>
-            <a:ext cx="10911535" cy="1097280"/>
+            <a:off x="640080" y="0"/>
+            <a:ext cx="9082735" cy="1188720"/>
           </a:xfrm>
           <a:prstGeom prst="rect">
             <a:avLst/>
@@ -6102,17 +12881,701 @@
           <a:p>
             <a:pPr algn="ctr"/>
             <a:r>
-              <a:rPr sz="3400" b="1" i="0">
-                <a:solidFill>
-                  <a:srgbClr val="0C2340"/>
-                </a:solidFill>
-                <a:latin typeface="Calibri"/>
-              </a:rPr>
-              <a:t>Cierre — Sesión 01</a:t>
-            </a:r>
-          </a:p>
-        </p:txBody>
-      </p:sp>
+              <a:rPr sz="2600" b="1" i="0">
+                <a:solidFill>
+                  <a:srgbClr val="FFFFFF"/>
+                </a:solidFill>
+                <a:latin typeface="Calibri"/>
+              </a:rPr>
+              <a:t>Mapa del curso (1/2): escribir el artículo</a:t>
+            </a:r>
+          </a:p>
+        </p:txBody>
+      </p:sp>
+      <p:graphicFrame>
+        <p:nvGraphicFramePr>
+          <p:cNvPr id="4" name="Table 3"/>
+          <p:cNvGraphicFramePr>
+            <a:graphicFrameLocks noGrp="1"/>
+          </p:cNvGraphicFramePr>
+          <p:nvPr/>
+        </p:nvGraphicFramePr>
+        <p:xfrm>
+          <a:off x="640080" y="1691639"/>
+          <a:ext cx="10911533" cy="4526280"/>
+        </p:xfrm>
+        <a:graphic>
+          <a:graphicData uri="http://schemas.openxmlformats.org/drawingml/2006/table">
+            <a:tbl>
+              <a:tblPr>
+                <a:tableStyleId>{2D5ABB26-0587-4C30-8999-92F81FD0307C}</a:tableStyleId>
+              </a:tblPr>
+              <a:tblGrid>
+                <a:gridCol w="1008629"/>
+                <a:gridCol w="4951452"/>
+                <a:gridCol w="4951452"/>
+              </a:tblGrid>
+              <a:tr h="502920">
+                <a:tc>
+                  <a:txBody>
+                    <a:bodyPr/>
+                    <a:lstStyle/>
+                    <a:p>
+                      <a:pPr algn="l"/>
+                      <a:r>
+                        <a:rPr sz="1300" b="1" i="0">
+                          <a:solidFill>
+                            <a:srgbClr val="FFFFFF"/>
+                          </a:solidFill>
+                          <a:latin typeface="Calibri"/>
+                        </a:rPr>
+                        <a:t>Sesión</a:t>
+                      </a:r>
+                    </a:p>
+                  </a:txBody>
+                  <a:tcPr anchor="ctr" marL="109728" marR="91440" marT="36576" marB="36576">
+                    <a:solidFill>
+                      <a:srgbClr val="0C2340"/>
+                    </a:solidFill>
+                  </a:tcPr>
+                </a:tc>
+                <a:tc>
+                  <a:txBody>
+                    <a:bodyPr/>
+                    <a:lstStyle/>
+                    <a:p>
+                      <a:pPr algn="l"/>
+                      <a:r>
+                        <a:rPr sz="1300" b="1" i="0">
+                          <a:solidFill>
+                            <a:srgbClr val="FFFFFF"/>
+                          </a:solidFill>
+                          <a:latin typeface="Calibri"/>
+                        </a:rPr>
+                        <a:t>De qué se ocupa</a:t>
+                      </a:r>
+                    </a:p>
+                  </a:txBody>
+                  <a:tcPr anchor="ctr" marL="109728" marR="91440" marT="36576" marB="36576">
+                    <a:solidFill>
+                      <a:srgbClr val="0C2340"/>
+                    </a:solidFill>
+                  </a:tcPr>
+                </a:tc>
+                <a:tc>
+                  <a:txBody>
+                    <a:bodyPr/>
+                    <a:lstStyle/>
+                    <a:p>
+                      <a:pPr algn="l"/>
+                      <a:r>
+                        <a:rPr sz="1300" b="1" i="0">
+                          <a:solidFill>
+                            <a:srgbClr val="FFFFFF"/>
+                          </a:solidFill>
+                          <a:latin typeface="Calibri"/>
+                        </a:rPr>
+                        <a:t>Qué queda listo</a:t>
+                      </a:r>
+                    </a:p>
+                  </a:txBody>
+                  <a:tcPr anchor="ctr" marL="109728" marR="91440" marT="36576" marB="36576">
+                    <a:solidFill>
+                      <a:srgbClr val="0C2340"/>
+                    </a:solidFill>
+                  </a:tcPr>
+                </a:tc>
+              </a:tr>
+              <a:tr h="502920">
+                <a:tc>
+                  <a:txBody>
+                    <a:bodyPr/>
+                    <a:lstStyle/>
+                    <a:p>
+                      <a:pPr algn="l"/>
+                      <a:r>
+                        <a:rPr sz="1100" b="1" i="0">
+                          <a:solidFill>
+                            <a:srgbClr val="2B2B2B"/>
+                          </a:solidFill>
+                          <a:latin typeface="Calibri"/>
+                        </a:rPr>
+                        <a:t>01</a:t>
+                      </a:r>
+                    </a:p>
+                  </a:txBody>
+                  <a:tcPr anchor="ctr" marL="109728" marR="91440" marT="36576" marB="36576">
+                    <a:solidFill>
+                      <a:srgbClr val="FFFFFF"/>
+                    </a:solidFill>
+                  </a:tcPr>
+                </a:tc>
+                <a:tc>
+                  <a:txBody>
+                    <a:bodyPr/>
+                    <a:lstStyle/>
+                    <a:p>
+                      <a:pPr algn="l"/>
+                      <a:r>
+                        <a:rPr sz="1100" b="0" i="0">
+                          <a:solidFill>
+                            <a:srgbClr val="2B2B2B"/>
+                          </a:solidFill>
+                          <a:latin typeface="Calibri"/>
+                        </a:rPr>
+                        <a:t>Presentación del curso, del Docente, de ustedes y de las ACAs (</a:t>
+                      </a:r>
+                      <a:r>
+                        <a:rPr sz="1100" b="1" i="0">
+                          <a:solidFill>
+                            <a:srgbClr val="2B2B2B"/>
+                          </a:solidFill>
+                          <a:latin typeface="Calibri"/>
+                        </a:rPr>
+                        <a:t>hoy</a:t>
+                      </a:r>
+                      <a:r>
+                        <a:rPr sz="1100" b="0" i="0">
+                          <a:solidFill>
+                            <a:srgbClr val="2B2B2B"/>
+                          </a:solidFill>
+                          <a:latin typeface="Calibri"/>
+                        </a:rPr>
+                        <a:t>)</a:t>
+                      </a:r>
+                    </a:p>
+                  </a:txBody>
+                  <a:tcPr anchor="ctr" marL="109728" marR="91440" marT="36576" marB="36576">
+                    <a:solidFill>
+                      <a:srgbClr val="FFFFFF"/>
+                    </a:solidFill>
+                  </a:tcPr>
+                </a:tc>
+                <a:tc>
+                  <a:txBody>
+                    <a:bodyPr/>
+                    <a:lstStyle/>
+                    <a:p>
+                      <a:pPr algn="l"/>
+                      <a:r>
+                        <a:rPr sz="1100" b="0" i="0">
+                          <a:solidFill>
+                            <a:srgbClr val="2B2B2B"/>
+                          </a:solidFill>
+                          <a:latin typeface="Calibri"/>
+                        </a:rPr>
+                        <a:t>Encuadre, acuerdo pedagógico y encargo autónomo</a:t>
+                      </a:r>
+                    </a:p>
+                  </a:txBody>
+                  <a:tcPr anchor="ctr" marL="109728" marR="91440" marT="36576" marB="36576">
+                    <a:solidFill>
+                      <a:srgbClr val="FFFFFF"/>
+                    </a:solidFill>
+                  </a:tcPr>
+                </a:tc>
+              </a:tr>
+              <a:tr h="502920">
+                <a:tc>
+                  <a:txBody>
+                    <a:bodyPr/>
+                    <a:lstStyle/>
+                    <a:p>
+                      <a:pPr algn="l"/>
+                      <a:r>
+                        <a:rPr sz="1100" b="1" i="0">
+                          <a:solidFill>
+                            <a:srgbClr val="2B2B2B"/>
+                          </a:solidFill>
+                          <a:latin typeface="Calibri"/>
+                        </a:rPr>
+                        <a:t>02</a:t>
+                      </a:r>
+                    </a:p>
+                  </a:txBody>
+                  <a:tcPr anchor="ctr" marL="109728" marR="91440" marT="36576" marB="36576">
+                    <a:solidFill>
+                      <a:srgbClr val="F2F2F2"/>
+                    </a:solidFill>
+                  </a:tcPr>
+                </a:tc>
+                <a:tc>
+                  <a:txBody>
+                    <a:bodyPr/>
+                    <a:lstStyle/>
+                    <a:p>
+                      <a:pPr algn="l"/>
+                      <a:r>
+                        <a:rPr sz="1100" b="0" i="0">
+                          <a:solidFill>
+                            <a:srgbClr val="2B2B2B"/>
+                          </a:solidFill>
+                          <a:latin typeface="Calibri"/>
+                        </a:rPr>
+                        <a:t>Formulación de pregunta, objetivos y título</a:t>
+                      </a:r>
+                    </a:p>
+                  </a:txBody>
+                  <a:tcPr anchor="ctr" marL="109728" marR="91440" marT="36576" marB="36576">
+                    <a:solidFill>
+                      <a:srgbClr val="F2F2F2"/>
+                    </a:solidFill>
+                  </a:tcPr>
+                </a:tc>
+                <a:tc>
+                  <a:txBody>
+                    <a:bodyPr/>
+                    <a:lstStyle/>
+                    <a:p>
+                      <a:pPr algn="l"/>
+                      <a:r>
+                        <a:rPr sz="1100" b="0" i="0">
+                          <a:solidFill>
+                            <a:srgbClr val="2B2B2B"/>
+                          </a:solidFill>
+                          <a:latin typeface="Calibri"/>
+                        </a:rPr>
+                        <a:t>Pregunta y objetivos definitivos, con variables visibles</a:t>
+                      </a:r>
+                    </a:p>
+                  </a:txBody>
+                  <a:tcPr anchor="ctr" marL="109728" marR="91440" marT="36576" marB="36576">
+                    <a:solidFill>
+                      <a:srgbClr val="F2F2F2"/>
+                    </a:solidFill>
+                  </a:tcPr>
+                </a:tc>
+              </a:tr>
+              <a:tr h="502920">
+                <a:tc>
+                  <a:txBody>
+                    <a:bodyPr/>
+                    <a:lstStyle/>
+                    <a:p>
+                      <a:pPr algn="l"/>
+                      <a:r>
+                        <a:rPr sz="1100" b="1" i="0">
+                          <a:solidFill>
+                            <a:srgbClr val="2B2B2B"/>
+                          </a:solidFill>
+                          <a:latin typeface="Calibri"/>
+                        </a:rPr>
+                        <a:t>03</a:t>
+                      </a:r>
+                    </a:p>
+                  </a:txBody>
+                  <a:tcPr anchor="ctr" marL="109728" marR="91440" marT="36576" marB="36576">
+                    <a:solidFill>
+                      <a:srgbClr val="FFFFFF"/>
+                    </a:solidFill>
+                  </a:tcPr>
+                </a:tc>
+                <a:tc>
+                  <a:txBody>
+                    <a:bodyPr/>
+                    <a:lstStyle/>
+                    <a:p>
+                      <a:pPr algn="l"/>
+                      <a:r>
+                        <a:rPr sz="1100" b="0" i="0">
+                          <a:solidFill>
+                            <a:srgbClr val="2B2B2B"/>
+                          </a:solidFill>
+                          <a:latin typeface="Calibri"/>
+                        </a:rPr>
+                        <a:t>Estructura del artículo · taller de introducción</a:t>
+                      </a:r>
+                    </a:p>
+                  </a:txBody>
+                  <a:tcPr anchor="ctr" marL="109728" marR="91440" marT="36576" marB="36576">
+                    <a:solidFill>
+                      <a:srgbClr val="FFFFFF"/>
+                    </a:solidFill>
+                  </a:tcPr>
+                </a:tc>
+                <a:tc>
+                  <a:txBody>
+                    <a:bodyPr/>
+                    <a:lstStyle/>
+                    <a:p>
+                      <a:pPr algn="l"/>
+                      <a:r>
+                        <a:rPr sz="1100" b="0" i="0">
+                          <a:solidFill>
+                            <a:srgbClr val="2B2B2B"/>
+                          </a:solidFill>
+                          <a:latin typeface="Calibri"/>
+                        </a:rPr>
+                        <a:t>Introducción de 3–4 párrafos en plantilla APA CUN</a:t>
+                      </a:r>
+                    </a:p>
+                  </a:txBody>
+                  <a:tcPr anchor="ctr" marL="109728" marR="91440" marT="36576" marB="36576">
+                    <a:solidFill>
+                      <a:srgbClr val="FFFFFF"/>
+                    </a:solidFill>
+                  </a:tcPr>
+                </a:tc>
+              </a:tr>
+              <a:tr h="502920">
+                <a:tc>
+                  <a:txBody>
+                    <a:bodyPr/>
+                    <a:lstStyle/>
+                    <a:p>
+                      <a:pPr algn="l"/>
+                      <a:r>
+                        <a:rPr sz="1100" b="1" i="0">
+                          <a:solidFill>
+                            <a:srgbClr val="2B2B2B"/>
+                          </a:solidFill>
+                          <a:latin typeface="Calibri"/>
+                        </a:rPr>
+                        <a:t>04</a:t>
+                      </a:r>
+                    </a:p>
+                  </a:txBody>
+                  <a:tcPr anchor="ctr" marL="109728" marR="91440" marT="36576" marB="36576">
+                    <a:solidFill>
+                      <a:srgbClr val="F2F2F2"/>
+                    </a:solidFill>
+                  </a:tcPr>
+                </a:tc>
+                <a:tc>
+                  <a:txBody>
+                    <a:bodyPr/>
+                    <a:lstStyle/>
+                    <a:p>
+                      <a:pPr algn="l"/>
+                      <a:r>
+                        <a:rPr sz="1100" b="0" i="0">
+                          <a:solidFill>
+                            <a:srgbClr val="2B2B2B"/>
+                          </a:solidFill>
+                          <a:latin typeface="Calibri"/>
+                        </a:rPr>
+                        <a:t>Fase I de referentes de investigación</a:t>
+                      </a:r>
+                    </a:p>
+                  </a:txBody>
+                  <a:tcPr anchor="ctr" marL="109728" marR="91440" marT="36576" marB="36576">
+                    <a:solidFill>
+                      <a:srgbClr val="F2F2F2"/>
+                    </a:solidFill>
+                  </a:tcPr>
+                </a:tc>
+                <a:tc>
+                  <a:txBody>
+                    <a:bodyPr/>
+                    <a:lstStyle/>
+                    <a:p>
+                      <a:pPr algn="l"/>
+                      <a:r>
+                        <a:rPr sz="1100" b="0" i="0">
+                          <a:solidFill>
+                            <a:srgbClr val="2B2B2B"/>
+                          </a:solidFill>
+                          <a:latin typeface="Calibri"/>
+                        </a:rPr>
+                        <a:t>Primeras fichas y mapa de literatura</a:t>
+                      </a:r>
+                    </a:p>
+                  </a:txBody>
+                  <a:tcPr anchor="ctr" marL="109728" marR="91440" marT="36576" marB="36576">
+                    <a:solidFill>
+                      <a:srgbClr val="F2F2F2"/>
+                    </a:solidFill>
+                  </a:tcPr>
+                </a:tc>
+              </a:tr>
+              <a:tr h="502920">
+                <a:tc>
+                  <a:txBody>
+                    <a:bodyPr/>
+                    <a:lstStyle/>
+                    <a:p>
+                      <a:pPr algn="l"/>
+                      <a:r>
+                        <a:rPr sz="1100" b="1" i="0">
+                          <a:solidFill>
+                            <a:srgbClr val="2B2B2B"/>
+                          </a:solidFill>
+                          <a:latin typeface="Calibri"/>
+                        </a:rPr>
+                        <a:t>05</a:t>
+                      </a:r>
+                    </a:p>
+                  </a:txBody>
+                  <a:tcPr anchor="ctr" marL="109728" marR="91440" marT="36576" marB="36576">
+                    <a:solidFill>
+                      <a:srgbClr val="FFFFFF"/>
+                    </a:solidFill>
+                  </a:tcPr>
+                </a:tc>
+                <a:tc>
+                  <a:txBody>
+                    <a:bodyPr/>
+                    <a:lstStyle/>
+                    <a:p>
+                      <a:pPr algn="l"/>
+                      <a:r>
+                        <a:rPr sz="1100" b="0" i="0">
+                          <a:solidFill>
+                            <a:srgbClr val="2B2B2B"/>
+                          </a:solidFill>
+                          <a:latin typeface="Calibri"/>
+                        </a:rPr>
+                        <a:t>Diseño de instrumento · desarrollo metodológico</a:t>
+                      </a:r>
+                    </a:p>
+                  </a:txBody>
+                  <a:tcPr anchor="ctr" marL="109728" marR="91440" marT="36576" marB="36576">
+                    <a:solidFill>
+                      <a:srgbClr val="FFFFFF"/>
+                    </a:solidFill>
+                  </a:tcPr>
+                </a:tc>
+                <a:tc>
+                  <a:txBody>
+                    <a:bodyPr/>
+                    <a:lstStyle/>
+                    <a:p>
+                      <a:pPr algn="l"/>
+                      <a:r>
+                        <a:rPr sz="1100" b="0" i="0">
+                          <a:solidFill>
+                            <a:srgbClr val="2B2B2B"/>
+                          </a:solidFill>
+                          <a:latin typeface="Calibri"/>
+                        </a:rPr>
+                        <a:t>Método e instrumento coherentes con los objetivos</a:t>
+                      </a:r>
+                    </a:p>
+                  </a:txBody>
+                  <a:tcPr anchor="ctr" marL="109728" marR="91440" marT="36576" marB="36576">
+                    <a:solidFill>
+                      <a:srgbClr val="FFFFFF"/>
+                    </a:solidFill>
+                  </a:tcPr>
+                </a:tc>
+              </a:tr>
+              <a:tr h="502920">
+                <a:tc>
+                  <a:txBody>
+                    <a:bodyPr/>
+                    <a:lstStyle/>
+                    <a:p>
+                      <a:pPr algn="l"/>
+                      <a:r>
+                        <a:rPr sz="1100" b="1" i="0">
+                          <a:solidFill>
+                            <a:srgbClr val="2B2B2B"/>
+                          </a:solidFill>
+                          <a:latin typeface="Calibri"/>
+                        </a:rPr>
+                        <a:t>06</a:t>
+                      </a:r>
+                    </a:p>
+                  </a:txBody>
+                  <a:tcPr anchor="ctr" marL="109728" marR="91440" marT="36576" marB="36576">
+                    <a:solidFill>
+                      <a:srgbClr val="F2F2F2"/>
+                    </a:solidFill>
+                  </a:tcPr>
+                </a:tc>
+                <a:tc>
+                  <a:txBody>
+                    <a:bodyPr/>
+                    <a:lstStyle/>
+                    <a:p>
+                      <a:pPr algn="l"/>
+                      <a:r>
+                        <a:rPr sz="1100" b="0" i="0">
+                          <a:solidFill>
+                            <a:srgbClr val="2B2B2B"/>
+                          </a:solidFill>
+                          <a:latin typeface="Calibri"/>
+                        </a:rPr>
+                        <a:t>Comunidades de práctica y co-creación</a:t>
+                      </a:r>
+                    </a:p>
+                  </a:txBody>
+                  <a:tcPr anchor="ctr" marL="109728" marR="91440" marT="36576" marB="36576">
+                    <a:solidFill>
+                      <a:srgbClr val="F2F2F2"/>
+                    </a:solidFill>
+                  </a:tcPr>
+                </a:tc>
+                <a:tc>
+                  <a:txBody>
+                    <a:bodyPr/>
+                    <a:lstStyle/>
+                    <a:p>
+                      <a:pPr algn="l"/>
+                      <a:r>
+                        <a:rPr sz="1100" b="0" i="0">
+                          <a:solidFill>
+                            <a:srgbClr val="2B2B2B"/>
+                          </a:solidFill>
+                          <a:latin typeface="Calibri"/>
+                        </a:rPr>
+                        <a:t>Bitácora de retroalimentación de pares</a:t>
+                      </a:r>
+                    </a:p>
+                  </a:txBody>
+                  <a:tcPr anchor="ctr" marL="109728" marR="91440" marT="36576" marB="36576">
+                    <a:solidFill>
+                      <a:srgbClr val="F2F2F2"/>
+                    </a:solidFill>
+                  </a:tcPr>
+                </a:tc>
+              </a:tr>
+              <a:tr h="502920">
+                <a:tc>
+                  <a:txBody>
+                    <a:bodyPr/>
+                    <a:lstStyle/>
+                    <a:p>
+                      <a:pPr algn="l"/>
+                      <a:r>
+                        <a:rPr sz="1100" b="1" i="0">
+                          <a:solidFill>
+                            <a:srgbClr val="2B2B2B"/>
+                          </a:solidFill>
+                          <a:latin typeface="Calibri"/>
+                        </a:rPr>
+                        <a:t>07</a:t>
+                      </a:r>
+                    </a:p>
+                  </a:txBody>
+                  <a:tcPr anchor="ctr" marL="109728" marR="91440" marT="36576" marB="36576">
+                    <a:solidFill>
+                      <a:srgbClr val="FFFFFF"/>
+                    </a:solidFill>
+                  </a:tcPr>
+                </a:tc>
+                <a:tc>
+                  <a:txBody>
+                    <a:bodyPr/>
+                    <a:lstStyle/>
+                    <a:p>
+                      <a:pPr algn="l"/>
+                      <a:r>
+                        <a:rPr sz="1100" b="0" i="0">
+                          <a:solidFill>
+                            <a:srgbClr val="2B2B2B"/>
+                          </a:solidFill>
+                          <a:latin typeface="Calibri"/>
+                        </a:rPr>
+                        <a:t>Experiencia creativa · análisis de datos</a:t>
+                      </a:r>
+                    </a:p>
+                  </a:txBody>
+                  <a:tcPr anchor="ctr" marL="109728" marR="91440" marT="36576" marB="36576">
+                    <a:solidFill>
+                      <a:srgbClr val="FFFFFF"/>
+                    </a:solidFill>
+                  </a:tcPr>
+                </a:tc>
+                <a:tc>
+                  <a:txBody>
+                    <a:bodyPr/>
+                    <a:lstStyle/>
+                    <a:p>
+                      <a:pPr algn="l"/>
+                      <a:r>
+                        <a:rPr sz="1100" b="0" i="0">
+                          <a:solidFill>
+                            <a:srgbClr val="2B2B2B"/>
+                          </a:solidFill>
+                          <a:latin typeface="Calibri"/>
+                        </a:rPr>
+                        <a:t>Tabla de hallazgos con lectura escrita</a:t>
+                      </a:r>
+                    </a:p>
+                  </a:txBody>
+                  <a:tcPr anchor="ctr" marL="109728" marR="91440" marT="36576" marB="36576">
+                    <a:solidFill>
+                      <a:srgbClr val="FFFFFF"/>
+                    </a:solidFill>
+                  </a:tcPr>
+                </a:tc>
+              </a:tr>
+              <a:tr h="502920">
+                <a:tc>
+                  <a:txBody>
+                    <a:bodyPr/>
+                    <a:lstStyle/>
+                    <a:p>
+                      <a:pPr algn="l"/>
+                      <a:r>
+                        <a:rPr sz="1100" b="1" i="0">
+                          <a:solidFill>
+                            <a:srgbClr val="2B2B2B"/>
+                          </a:solidFill>
+                          <a:latin typeface="Calibri"/>
+                        </a:rPr>
+                        <a:t>08</a:t>
+                      </a:r>
+                    </a:p>
+                  </a:txBody>
+                  <a:tcPr anchor="ctr" marL="109728" marR="91440" marT="36576" marB="36576">
+                    <a:solidFill>
+                      <a:srgbClr val="F2F2F2"/>
+                    </a:solidFill>
+                  </a:tcPr>
+                </a:tc>
+                <a:tc>
+                  <a:txBody>
+                    <a:bodyPr/>
+                    <a:lstStyle/>
+                    <a:p>
+                      <a:pPr algn="l"/>
+                      <a:r>
+                        <a:rPr sz="1100" b="0" i="0">
+                          <a:solidFill>
+                            <a:srgbClr val="2B2B2B"/>
+                          </a:solidFill>
+                          <a:latin typeface="Calibri"/>
+                        </a:rPr>
+                        <a:t>Fase III de referentes · cierre del marco teórico</a:t>
+                      </a:r>
+                    </a:p>
+                  </a:txBody>
+                  <a:tcPr anchor="ctr" marL="109728" marR="91440" marT="36576" marB="36576">
+                    <a:solidFill>
+                      <a:srgbClr val="F2F2F2"/>
+                    </a:solidFill>
+                  </a:tcPr>
+                </a:tc>
+                <a:tc>
+                  <a:txBody>
+                    <a:bodyPr/>
+                    <a:lstStyle/>
+                    <a:p>
+                      <a:pPr algn="l"/>
+                      <a:r>
+                        <a:rPr sz="1100" b="0" i="0">
+                          <a:solidFill>
+                            <a:srgbClr val="2B2B2B"/>
+                          </a:solidFill>
+                          <a:latin typeface="Calibri"/>
+                        </a:rPr>
+                        <a:t>Marco cerrado, sin huecos pendientes</a:t>
+                      </a:r>
+                    </a:p>
+                  </a:txBody>
+                  <a:tcPr anchor="ctr" marL="109728" marR="91440" marT="36576" marB="36576">
+                    <a:solidFill>
+                      <a:srgbClr val="F2F2F2"/>
+                    </a:solidFill>
+                  </a:tcPr>
+                </a:tc>
+              </a:tr>
+            </a:tbl>
+          </a:graphicData>
+        </a:graphic>
+      </p:graphicFrame>
       <p:sp>
         <p:nvSpPr>
           <p:cNvPr id="5" name="TextBox 4"/>
@@ -6121,8 +13584,8 @@
         </p:nvSpPr>
         <p:spPr>
           <a:xfrm>
-            <a:off x="640080" y="3017520"/>
-            <a:ext cx="10911535" cy="1645920"/>
+            <a:off x="640080" y="6080760"/>
+            <a:ext cx="10911535" cy="548640"/>
           </a:xfrm>
           <a:prstGeom prst="rect">
             <a:avLst/>
@@ -6135,44 +13598,68 @@
           </a:bodyPr>
           <a:lstStyle/>
           <a:p>
-            <a:pPr algn="ctr">
-              <a:spcAft>
-                <a:spcPts val="600"/>
-              </a:spcAft>
-            </a:pPr>
-            <a:r>
-              <a:rPr sz="1600" b="0" i="0">
-                <a:solidFill>
-                  <a:srgbClr val="2B2B2B"/>
-                </a:solidFill>
-                <a:latin typeface="Calibri"/>
-              </a:rPr>
-              <a:t>Ya sabemos qué haremos, cómo se evalúa y quién es quién.</a:t>
-            </a:r>
-          </a:p>
-          <a:p>
-            <a:pPr algn="ctr">
-              <a:spcAft>
-                <a:spcPts val="600"/>
-              </a:spcAft>
-            </a:pPr>
-            <a:r>
-              <a:rPr sz="1600" b="1" i="0">
-                <a:solidFill>
-                  <a:srgbClr val="2B2B2B"/>
-                </a:solidFill>
-                <a:latin typeface="Calibri"/>
-              </a:rPr>
-              <a:t>Sesión 02:</a:t>
-            </a:r>
-            <a:r>
-              <a:rPr sz="1600" b="0" i="0">
-                <a:solidFill>
-                  <a:srgbClr val="2B2B2B"/>
-                </a:solidFill>
-                <a:latin typeface="Calibri"/>
-              </a:rPr>
-              <a:t> arranca el contenido del curso.</a:t>
+            <a:r>
+              <a:rPr sz="1200" b="0" i="1">
+                <a:solidFill>
+                  <a:srgbClr val="2B2B2B"/>
+                </a:solidFill>
+                <a:latin typeface="Calibri"/>
+              </a:rPr>
+              <a:t>Tres tramos: </a:t>
+            </a:r>
+            <a:r>
+              <a:rPr sz="1200" b="1" i="1">
+                <a:solidFill>
+                  <a:srgbClr val="2B2B2B"/>
+                </a:solidFill>
+                <a:latin typeface="Calibri"/>
+              </a:rPr>
+              <a:t>escribir</a:t>
+            </a:r>
+            <a:r>
+              <a:rPr sz="1200" b="0" i="1">
+                <a:solidFill>
+                  <a:srgbClr val="2B2B2B"/>
+                </a:solidFill>
+                <a:latin typeface="Calibri"/>
+              </a:rPr>
+              <a:t> el artículo (02–10), </a:t>
+            </a:r>
+            <a:r>
+              <a:rPr sz="1200" b="1" i="1">
+                <a:solidFill>
+                  <a:srgbClr val="2B2B2B"/>
+                </a:solidFill>
+                <a:latin typeface="Calibri"/>
+              </a:rPr>
+              <a:t>alistar</a:t>
+            </a:r>
+            <a:r>
+              <a:rPr sz="1200" b="0" i="1">
+                <a:solidFill>
+                  <a:srgbClr val="2B2B2B"/>
+                </a:solidFill>
+                <a:latin typeface="Calibri"/>
+              </a:rPr>
+              <a:t> póster y antiplagio (11) y </a:t>
+            </a:r>
+            <a:r>
+              <a:rPr sz="1200" b="1" i="1">
+                <a:solidFill>
+                  <a:srgbClr val="2B2B2B"/>
+                </a:solidFill>
+                <a:latin typeface="Calibri"/>
+              </a:rPr>
+              <a:t>defender y cerrar</a:t>
+            </a:r>
+            <a:r>
+              <a:rPr sz="1200" b="0" i="1">
+                <a:solidFill>
+                  <a:srgbClr val="2B2B2B"/>
+                </a:solidFill>
+                <a:latin typeface="Calibri"/>
+              </a:rPr>
+              <a:t> (12–15).</a:t>
             </a:r>
           </a:p>
         </p:txBody>
@@ -6185,8 +13672,8 @@
         </p:nvSpPr>
         <p:spPr>
           <a:xfrm>
-            <a:off x="640080" y="4754880"/>
-            <a:ext cx="10911535" cy="640080"/>
+            <a:off x="2194560" y="6446520"/>
+            <a:ext cx="5943600" cy="274320"/>
           </a:xfrm>
           <a:prstGeom prst="rect">
             <a:avLst/>
@@ -6199,15 +13686,15 @@
           </a:bodyPr>
           <a:lstStyle/>
           <a:p>
-            <a:pPr algn="ctr"/>
-            <a:r>
-              <a:rPr sz="2000" b="1" i="0">
-                <a:solidFill>
-                  <a:srgbClr val="007433"/>
-                </a:solidFill>
-                <a:latin typeface="Calibri"/>
-              </a:rPr>
-              <a:t>TRABAJO DE GRADO 3</a:t>
+            <a:pPr algn="l"/>
+            <a:r>
+              <a:rPr sz="1000" b="1" i="0">
+                <a:solidFill>
+                  <a:srgbClr val="8F989D"/>
+                </a:solidFill>
+                <a:latin typeface="Calibri"/>
+              </a:rPr>
+              <a:t>Inicio 5:10 pm</a:t>
             </a:r>
           </a:p>
         </p:txBody>
@@ -6220,8 +13707,8 @@
         </p:nvSpPr>
         <p:spPr>
           <a:xfrm>
-            <a:off x="2194560" y="6446520"/>
-            <a:ext cx="5943600" cy="274320"/>
+            <a:off x="11094415" y="6446520"/>
+            <a:ext cx="548640" cy="274320"/>
           </a:xfrm>
           <a:prstGeom prst="rect">
             <a:avLst/>
@@ -6234,6 +13721,793 @@
           </a:bodyPr>
           <a:lstStyle/>
           <a:p>
+            <a:pPr algn="r"/>
+            <a:r>
+              <a:rPr sz="1000" b="1" i="0">
+                <a:solidFill>
+                  <a:srgbClr val="8F989D"/>
+                </a:solidFill>
+                <a:latin typeface="Calibri"/>
+              </a:rPr>
+              <a:t>8</a:t>
+            </a:r>
+          </a:p>
+        </p:txBody>
+      </p:sp>
+    </p:spTree>
+  </p:cSld>
+  <p:clrMapOvr>
+    <a:masterClrMapping/>
+  </p:clrMapOvr>
+</p:sld>
+</file>
+
+<file path=ppt/slides/slide9.xml><?xml version="1.0" encoding="utf-8"?>
+<p:sld xmlns:a="http://schemas.openxmlformats.org/drawingml/2006/main" xmlns:p="http://schemas.openxmlformats.org/presentationml/2006/main" xmlns:r="http://schemas.openxmlformats.org/officeDocument/2006/relationships">
+  <p:cSld>
+    <p:bg>
+      <p:bgPr>
+        <a:solidFill>
+          <a:srgbClr val="FFFFFF"/>
+        </a:solidFill>
+        <a:effectLst/>
+      </p:bgPr>
+    </p:bg>
+    <p:spTree>
+      <p:nvGrpSpPr>
+        <p:cNvPr id="1" name=""/>
+        <p:cNvGrpSpPr/>
+        <p:nvPr/>
+      </p:nvGrpSpPr>
+      <p:grpSpPr/>
+      <p:sp>
+        <p:nvSpPr>
+          <p:cNvPr id="2" name="Rectangle 1"/>
+          <p:cNvSpPr/>
+          <p:nvPr/>
+        </p:nvSpPr>
+        <p:spPr>
+          <a:xfrm>
+            <a:off x="0" y="0"/>
+            <a:ext cx="12191695" cy="1188720"/>
+          </a:xfrm>
+          <a:prstGeom prst="rect">
+            <a:avLst/>
+          </a:prstGeom>
+          <a:solidFill>
+            <a:srgbClr val="0C2340"/>
+          </a:solidFill>
+          <a:ln>
+            <a:noFill/>
+          </a:ln>
+          <a:effectLst/>
+        </p:spPr>
+        <p:style>
+          <a:lnRef idx="1">
+            <a:schemeClr val="accent1"/>
+          </a:lnRef>
+          <a:fillRef idx="3">
+            <a:schemeClr val="accent1"/>
+          </a:fillRef>
+          <a:effectRef idx="2">
+            <a:schemeClr val="accent1"/>
+          </a:effectRef>
+          <a:fontRef idx="minor">
+            <a:schemeClr val="lt1"/>
+          </a:fontRef>
+        </p:style>
+        <p:txBody>
+          <a:bodyPr rtlCol="0" anchor="ctr"/>
+          <a:lstStyle/>
+          <a:p>
+            <a:pPr algn="ctr"/>
+          </a:p>
+        </p:txBody>
+      </p:sp>
+      <p:sp>
+        <p:nvSpPr>
+          <p:cNvPr id="3" name="TextBox 2"/>
+          <p:cNvSpPr txBox="1"/>
+          <p:nvPr/>
+        </p:nvSpPr>
+        <p:spPr>
+          <a:xfrm>
+            <a:off x="640080" y="0"/>
+            <a:ext cx="9082735" cy="1188720"/>
+          </a:xfrm>
+          <a:prstGeom prst="rect">
+            <a:avLst/>
+          </a:prstGeom>
+          <a:noFill/>
+        </p:spPr>
+        <p:txBody>
+          <a:bodyPr wrap="square" anchor="ctr" lIns="0" rIns="0" tIns="0" bIns="0">
+            <a:spAutoFit/>
+          </a:bodyPr>
+          <a:lstStyle/>
+          <a:p>
+            <a:pPr algn="ctr"/>
+            <a:r>
+              <a:rPr sz="2600" b="1" i="0">
+                <a:solidFill>
+                  <a:srgbClr val="FFFFFF"/>
+                </a:solidFill>
+                <a:latin typeface="Calibri"/>
+              </a:rPr>
+              <a:t>Mapa del curso (2/2): cerrar, defender y entregar</a:t>
+            </a:r>
+          </a:p>
+        </p:txBody>
+      </p:sp>
+      <p:graphicFrame>
+        <p:nvGraphicFramePr>
+          <p:cNvPr id="4" name="Table 3"/>
+          <p:cNvGraphicFramePr>
+            <a:graphicFrameLocks noGrp="1"/>
+          </p:cNvGraphicFramePr>
+          <p:nvPr/>
+        </p:nvGraphicFramePr>
+        <p:xfrm>
+          <a:off x="640080" y="1691639"/>
+          <a:ext cx="10911533" cy="4023360"/>
+        </p:xfrm>
+        <a:graphic>
+          <a:graphicData uri="http://schemas.openxmlformats.org/drawingml/2006/table">
+            <a:tbl>
+              <a:tblPr>
+                <a:tableStyleId>{2D5ABB26-0587-4C30-8999-92F81FD0307C}</a:tableStyleId>
+              </a:tblPr>
+              <a:tblGrid>
+                <a:gridCol w="1008629"/>
+                <a:gridCol w="4951452"/>
+                <a:gridCol w="4951452"/>
+              </a:tblGrid>
+              <a:tr h="502920">
+                <a:tc>
+                  <a:txBody>
+                    <a:bodyPr/>
+                    <a:lstStyle/>
+                    <a:p>
+                      <a:pPr algn="l"/>
+                      <a:r>
+                        <a:rPr sz="1300" b="1" i="0">
+                          <a:solidFill>
+                            <a:srgbClr val="FFFFFF"/>
+                          </a:solidFill>
+                          <a:latin typeface="Calibri"/>
+                        </a:rPr>
+                        <a:t>Sesión</a:t>
+                      </a:r>
+                    </a:p>
+                  </a:txBody>
+                  <a:tcPr anchor="ctr" marL="109728" marR="91440" marT="36576" marB="36576">
+                    <a:solidFill>
+                      <a:srgbClr val="0C2340"/>
+                    </a:solidFill>
+                  </a:tcPr>
+                </a:tc>
+                <a:tc>
+                  <a:txBody>
+                    <a:bodyPr/>
+                    <a:lstStyle/>
+                    <a:p>
+                      <a:pPr algn="l"/>
+                      <a:r>
+                        <a:rPr sz="1300" b="1" i="0">
+                          <a:solidFill>
+                            <a:srgbClr val="FFFFFF"/>
+                          </a:solidFill>
+                          <a:latin typeface="Calibri"/>
+                        </a:rPr>
+                        <a:t>De qué se ocupa</a:t>
+                      </a:r>
+                    </a:p>
+                  </a:txBody>
+                  <a:tcPr anchor="ctr" marL="109728" marR="91440" marT="36576" marB="36576">
+                    <a:solidFill>
+                      <a:srgbClr val="0C2340"/>
+                    </a:solidFill>
+                  </a:tcPr>
+                </a:tc>
+                <a:tc>
+                  <a:txBody>
+                    <a:bodyPr/>
+                    <a:lstStyle/>
+                    <a:p>
+                      <a:pPr algn="l"/>
+                      <a:r>
+                        <a:rPr sz="1300" b="1" i="0">
+                          <a:solidFill>
+                            <a:srgbClr val="FFFFFF"/>
+                          </a:solidFill>
+                          <a:latin typeface="Calibri"/>
+                        </a:rPr>
+                        <a:t>Qué queda listo</a:t>
+                      </a:r>
+                    </a:p>
+                  </a:txBody>
+                  <a:tcPr anchor="ctr" marL="109728" marR="91440" marT="36576" marB="36576">
+                    <a:solidFill>
+                      <a:srgbClr val="0C2340"/>
+                    </a:solidFill>
+                  </a:tcPr>
+                </a:tc>
+              </a:tr>
+              <a:tr h="502920">
+                <a:tc>
+                  <a:txBody>
+                    <a:bodyPr/>
+                    <a:lstStyle/>
+                    <a:p>
+                      <a:pPr algn="l"/>
+                      <a:r>
+                        <a:rPr sz="1100" b="1" i="0">
+                          <a:solidFill>
+                            <a:srgbClr val="2B2B2B"/>
+                          </a:solidFill>
+                          <a:latin typeface="Calibri"/>
+                        </a:rPr>
+                        <a:t>09</a:t>
+                      </a:r>
+                    </a:p>
+                  </a:txBody>
+                  <a:tcPr anchor="ctr" marL="109728" marR="91440" marT="36576" marB="36576">
+                    <a:solidFill>
+                      <a:srgbClr val="FFFFFF"/>
+                    </a:solidFill>
+                  </a:tcPr>
+                </a:tc>
+                <a:tc>
+                  <a:txBody>
+                    <a:bodyPr/>
+                    <a:lstStyle/>
+                    <a:p>
+                      <a:pPr algn="l"/>
+                      <a:r>
+                        <a:rPr sz="1100" b="0" i="0">
+                          <a:solidFill>
+                            <a:srgbClr val="2B2B2B"/>
+                          </a:solidFill>
+                          <a:latin typeface="Calibri"/>
+                        </a:rPr>
+                        <a:t>Resultados, discusión y relación con referentes</a:t>
+                      </a:r>
+                    </a:p>
+                  </a:txBody>
+                  <a:tcPr anchor="ctr" marL="109728" marR="91440" marT="36576" marB="36576">
+                    <a:solidFill>
+                      <a:srgbClr val="FFFFFF"/>
+                    </a:solidFill>
+                  </a:tcPr>
+                </a:tc>
+                <a:tc>
+                  <a:txBody>
+                    <a:bodyPr/>
+                    <a:lstStyle/>
+                    <a:p>
+                      <a:pPr algn="l"/>
+                      <a:r>
+                        <a:rPr sz="1100" b="0" i="0">
+                          <a:solidFill>
+                            <a:srgbClr val="2B2B2B"/>
+                          </a:solidFill>
+                          <a:latin typeface="Calibri"/>
+                        </a:rPr>
+                        <a:t>Borrador de resultados y discusión</a:t>
+                      </a:r>
+                    </a:p>
+                  </a:txBody>
+                  <a:tcPr anchor="ctr" marL="109728" marR="91440" marT="36576" marB="36576">
+                    <a:solidFill>
+                      <a:srgbClr val="FFFFFF"/>
+                    </a:solidFill>
+                  </a:tcPr>
+                </a:tc>
+              </a:tr>
+              <a:tr h="502920">
+                <a:tc>
+                  <a:txBody>
+                    <a:bodyPr/>
+                    <a:lstStyle/>
+                    <a:p>
+                      <a:pPr algn="l"/>
+                      <a:r>
+                        <a:rPr sz="1100" b="1" i="0">
+                          <a:solidFill>
+                            <a:srgbClr val="2B2B2B"/>
+                          </a:solidFill>
+                          <a:latin typeface="Calibri"/>
+                        </a:rPr>
+                        <a:t>10</a:t>
+                      </a:r>
+                    </a:p>
+                  </a:txBody>
+                  <a:tcPr anchor="ctr" marL="109728" marR="91440" marT="36576" marB="36576">
+                    <a:solidFill>
+                      <a:srgbClr val="F2F2F2"/>
+                    </a:solidFill>
+                  </a:tcPr>
+                </a:tc>
+                <a:tc>
+                  <a:txBody>
+                    <a:bodyPr/>
+                    <a:lstStyle/>
+                    <a:p>
+                      <a:pPr algn="l"/>
+                      <a:r>
+                        <a:rPr sz="1100" b="0" i="0">
+                          <a:solidFill>
+                            <a:srgbClr val="2B2B2B"/>
+                          </a:solidFill>
+                          <a:latin typeface="Calibri"/>
+                        </a:rPr>
+                        <a:t>Resumen, palabras clave UNESCO, conclusiones y referencias</a:t>
+                      </a:r>
+                    </a:p>
+                  </a:txBody>
+                  <a:tcPr anchor="ctr" marL="109728" marR="91440" marT="36576" marB="36576">
+                    <a:solidFill>
+                      <a:srgbClr val="F2F2F2"/>
+                    </a:solidFill>
+                  </a:tcPr>
+                </a:tc>
+                <a:tc>
+                  <a:txBody>
+                    <a:bodyPr/>
+                    <a:lstStyle/>
+                    <a:p>
+                      <a:pPr algn="l"/>
+                      <a:r>
+                        <a:rPr sz="1100" b="0" i="0">
+                          <a:solidFill>
+                            <a:srgbClr val="2B2B2B"/>
+                          </a:solidFill>
+                          <a:latin typeface="Calibri"/>
+                        </a:rPr>
+                        <a:t>Artículo completo de punta a punta</a:t>
+                      </a:r>
+                    </a:p>
+                  </a:txBody>
+                  <a:tcPr anchor="ctr" marL="109728" marR="91440" marT="36576" marB="36576">
+                    <a:solidFill>
+                      <a:srgbClr val="F2F2F2"/>
+                    </a:solidFill>
+                  </a:tcPr>
+                </a:tc>
+              </a:tr>
+              <a:tr h="502920">
+                <a:tc>
+                  <a:txBody>
+                    <a:bodyPr/>
+                    <a:lstStyle/>
+                    <a:p>
+                      <a:pPr algn="l"/>
+                      <a:r>
+                        <a:rPr sz="1100" b="1" i="0">
+                          <a:solidFill>
+                            <a:srgbClr val="2B2B2B"/>
+                          </a:solidFill>
+                          <a:latin typeface="Calibri"/>
+                        </a:rPr>
+                        <a:t>11</a:t>
+                      </a:r>
+                    </a:p>
+                  </a:txBody>
+                  <a:tcPr anchor="ctr" marL="109728" marR="91440" marT="36576" marB="36576">
+                    <a:solidFill>
+                      <a:srgbClr val="FFFFFF"/>
+                    </a:solidFill>
+                  </a:tcPr>
+                </a:tc>
+                <a:tc>
+                  <a:txBody>
+                    <a:bodyPr/>
+                    <a:lstStyle/>
+                    <a:p>
+                      <a:pPr algn="l"/>
+                      <a:r>
+                        <a:rPr sz="1100" b="0" i="0">
+                          <a:solidFill>
+                            <a:srgbClr val="2B2B2B"/>
+                          </a:solidFill>
+                          <a:latin typeface="Calibri"/>
+                        </a:rPr>
+                        <a:t>Póster · evidencias · verificación antiplagio</a:t>
+                      </a:r>
+                    </a:p>
+                  </a:txBody>
+                  <a:tcPr anchor="ctr" marL="109728" marR="91440" marT="36576" marB="36576">
+                    <a:solidFill>
+                      <a:srgbClr val="FFFFFF"/>
+                    </a:solidFill>
+                  </a:tcPr>
+                </a:tc>
+                <a:tc>
+                  <a:txBody>
+                    <a:bodyPr/>
+                    <a:lstStyle/>
+                    <a:p>
+                      <a:pPr algn="l"/>
+                      <a:r>
+                        <a:rPr sz="1100" b="0" i="0">
+                          <a:solidFill>
+                            <a:srgbClr val="2B2B2B"/>
+                          </a:solidFill>
+                          <a:latin typeface="Calibri"/>
+                        </a:rPr>
+                        <a:t>Póster de una página y revisión de similitud</a:t>
+                      </a:r>
+                    </a:p>
+                  </a:txBody>
+                  <a:tcPr anchor="ctr" marL="109728" marR="91440" marT="36576" marB="36576">
+                    <a:solidFill>
+                      <a:srgbClr val="FFFFFF"/>
+                    </a:solidFill>
+                  </a:tcPr>
+                </a:tc>
+              </a:tr>
+              <a:tr h="502920">
+                <a:tc>
+                  <a:txBody>
+                    <a:bodyPr/>
+                    <a:lstStyle/>
+                    <a:p>
+                      <a:pPr algn="l"/>
+                      <a:r>
+                        <a:rPr sz="1100" b="1" i="0">
+                          <a:solidFill>
+                            <a:srgbClr val="2B2B2B"/>
+                          </a:solidFill>
+                          <a:latin typeface="Calibri"/>
+                        </a:rPr>
+                        <a:t>12</a:t>
+                      </a:r>
+                    </a:p>
+                  </a:txBody>
+                  <a:tcPr anchor="ctr" marL="109728" marR="91440" marT="36576" marB="36576">
+                    <a:solidFill>
+                      <a:srgbClr val="F2F2F2"/>
+                    </a:solidFill>
+                  </a:tcPr>
+                </a:tc>
+                <a:tc>
+                  <a:txBody>
+                    <a:bodyPr/>
+                    <a:lstStyle/>
+                    <a:p>
+                      <a:pPr algn="l"/>
+                      <a:r>
+                        <a:rPr sz="1100" b="0" i="0">
+                          <a:solidFill>
+                            <a:srgbClr val="2B2B2B"/>
+                          </a:solidFill>
+                          <a:latin typeface="Calibri"/>
+                        </a:rPr>
+                        <a:t>Sustentación ante jurados</a:t>
+                      </a:r>
+                    </a:p>
+                  </a:txBody>
+                  <a:tcPr anchor="ctr" marL="109728" marR="91440" marT="36576" marB="36576">
+                    <a:solidFill>
+                      <a:srgbClr val="F2F2F2"/>
+                    </a:solidFill>
+                  </a:tcPr>
+                </a:tc>
+                <a:tc>
+                  <a:txBody>
+                    <a:bodyPr/>
+                    <a:lstStyle/>
+                    <a:p>
+                      <a:pPr algn="l"/>
+                      <a:r>
+                        <a:rPr sz="1100" b="0" i="0">
+                          <a:solidFill>
+                            <a:srgbClr val="2B2B2B"/>
+                          </a:solidFill>
+                          <a:latin typeface="Calibri"/>
+                        </a:rPr>
+                        <a:t>Defensa presentada</a:t>
+                      </a:r>
+                    </a:p>
+                  </a:txBody>
+                  <a:tcPr anchor="ctr" marL="109728" marR="91440" marT="36576" marB="36576">
+                    <a:solidFill>
+                      <a:srgbClr val="F2F2F2"/>
+                    </a:solidFill>
+                  </a:tcPr>
+                </a:tc>
+              </a:tr>
+              <a:tr h="502920">
+                <a:tc>
+                  <a:txBody>
+                    <a:bodyPr/>
+                    <a:lstStyle/>
+                    <a:p>
+                      <a:pPr algn="l"/>
+                      <a:r>
+                        <a:rPr sz="1100" b="1" i="0">
+                          <a:solidFill>
+                            <a:srgbClr val="2B2B2B"/>
+                          </a:solidFill>
+                          <a:latin typeface="Calibri"/>
+                        </a:rPr>
+                        <a:t>13</a:t>
+                      </a:r>
+                    </a:p>
+                  </a:txBody>
+                  <a:tcPr anchor="ctr" marL="109728" marR="91440" marT="36576" marB="36576">
+                    <a:solidFill>
+                      <a:srgbClr val="FFFFFF"/>
+                    </a:solidFill>
+                  </a:tcPr>
+                </a:tc>
+                <a:tc>
+                  <a:txBody>
+                    <a:bodyPr/>
+                    <a:lstStyle/>
+                    <a:p>
+                      <a:pPr algn="l"/>
+                      <a:r>
+                        <a:rPr sz="1100" b="0" i="0">
+                          <a:solidFill>
+                            <a:srgbClr val="2B2B2B"/>
+                          </a:solidFill>
+                          <a:latin typeface="Calibri"/>
+                        </a:rPr>
+                        <a:t>Entregables para repositorio institucional</a:t>
+                      </a:r>
+                    </a:p>
+                  </a:txBody>
+                  <a:tcPr anchor="ctr" marL="109728" marR="91440" marT="36576" marB="36576">
+                    <a:solidFill>
+                      <a:srgbClr val="FFFFFF"/>
+                    </a:solidFill>
+                  </a:tcPr>
+                </a:tc>
+                <a:tc>
+                  <a:txBody>
+                    <a:bodyPr/>
+                    <a:lstStyle/>
+                    <a:p>
+                      <a:pPr algn="l"/>
+                      <a:r>
+                        <a:rPr sz="1100" b="0" i="0">
+                          <a:solidFill>
+                            <a:srgbClr val="2B2B2B"/>
+                          </a:solidFill>
+                          <a:latin typeface="Calibri"/>
+                        </a:rPr>
+                        <a:t>Paquete final verificado</a:t>
+                      </a:r>
+                    </a:p>
+                  </a:txBody>
+                  <a:tcPr anchor="ctr" marL="109728" marR="91440" marT="36576" marB="36576">
+                    <a:solidFill>
+                      <a:srgbClr val="FFFFFF"/>
+                    </a:solidFill>
+                  </a:tcPr>
+                </a:tc>
+              </a:tr>
+              <a:tr h="502920">
+                <a:tc>
+                  <a:txBody>
+                    <a:bodyPr/>
+                    <a:lstStyle/>
+                    <a:p>
+                      <a:pPr algn="l"/>
+                      <a:r>
+                        <a:rPr sz="1100" b="1" i="0">
+                          <a:solidFill>
+                            <a:srgbClr val="2B2B2B"/>
+                          </a:solidFill>
+                          <a:latin typeface="Calibri"/>
+                        </a:rPr>
+                        <a:t>14</a:t>
+                      </a:r>
+                    </a:p>
+                  </a:txBody>
+                  <a:tcPr anchor="ctr" marL="109728" marR="91440" marT="36576" marB="36576">
+                    <a:solidFill>
+                      <a:srgbClr val="F2F2F2"/>
+                    </a:solidFill>
+                  </a:tcPr>
+                </a:tc>
+                <a:tc>
+                  <a:txBody>
+                    <a:bodyPr/>
+                    <a:lstStyle/>
+                    <a:p>
+                      <a:pPr algn="l"/>
+                      <a:r>
+                        <a:rPr sz="1100" b="0" i="0">
+                          <a:solidFill>
+                            <a:srgbClr val="2B2B2B"/>
+                          </a:solidFill>
+                          <a:latin typeface="Calibri"/>
+                        </a:rPr>
+                        <a:t>Ajustes finales · seguimiento post-sustentación</a:t>
+                      </a:r>
+                    </a:p>
+                  </a:txBody>
+                  <a:tcPr anchor="ctr" marL="109728" marR="91440" marT="36576" marB="36576">
+                    <a:solidFill>
+                      <a:srgbClr val="F2F2F2"/>
+                    </a:solidFill>
+                  </a:tcPr>
+                </a:tc>
+                <a:tc>
+                  <a:txBody>
+                    <a:bodyPr/>
+                    <a:lstStyle/>
+                    <a:p>
+                      <a:pPr algn="l"/>
+                      <a:r>
+                        <a:rPr sz="1100" b="0" i="0">
+                          <a:solidFill>
+                            <a:srgbClr val="2B2B2B"/>
+                          </a:solidFill>
+                          <a:latin typeface="Calibri"/>
+                        </a:rPr>
+                        <a:t>Correcciones del jurado incorporadas</a:t>
+                      </a:r>
+                    </a:p>
+                  </a:txBody>
+                  <a:tcPr anchor="ctr" marL="109728" marR="91440" marT="36576" marB="36576">
+                    <a:solidFill>
+                      <a:srgbClr val="F2F2F2"/>
+                    </a:solidFill>
+                  </a:tcPr>
+                </a:tc>
+              </a:tr>
+              <a:tr h="502920">
+                <a:tc>
+                  <a:txBody>
+                    <a:bodyPr/>
+                    <a:lstStyle/>
+                    <a:p>
+                      <a:pPr algn="l"/>
+                      <a:r>
+                        <a:rPr sz="1100" b="1" i="0">
+                          <a:solidFill>
+                            <a:srgbClr val="2B2B2B"/>
+                          </a:solidFill>
+                          <a:latin typeface="Calibri"/>
+                        </a:rPr>
+                        <a:t>15</a:t>
+                      </a:r>
+                    </a:p>
+                  </a:txBody>
+                  <a:tcPr anchor="ctr" marL="109728" marR="91440" marT="36576" marB="36576">
+                    <a:solidFill>
+                      <a:srgbClr val="FFFFFF"/>
+                    </a:solidFill>
+                  </a:tcPr>
+                </a:tc>
+                <a:tc>
+                  <a:txBody>
+                    <a:bodyPr/>
+                    <a:lstStyle/>
+                    <a:p>
+                      <a:pPr algn="l"/>
+                      <a:r>
+                        <a:rPr sz="1100" b="0" i="0">
+                          <a:solidFill>
+                            <a:srgbClr val="2B2B2B"/>
+                          </a:solidFill>
+                          <a:latin typeface="Calibri"/>
+                        </a:rPr>
+                        <a:t>Cierre administrativo · recepción</a:t>
+                      </a:r>
+                    </a:p>
+                  </a:txBody>
+                  <a:tcPr anchor="ctr" marL="109728" marR="91440" marT="36576" marB="36576">
+                    <a:solidFill>
+                      <a:srgbClr val="FFFFFF"/>
+                    </a:solidFill>
+                  </a:tcPr>
+                </a:tc>
+                <a:tc>
+                  <a:txBody>
+                    <a:bodyPr/>
+                    <a:lstStyle/>
+                    <a:p>
+                      <a:pPr algn="l"/>
+                      <a:r>
+                        <a:rPr sz="1100" b="0" i="0">
+                          <a:solidFill>
+                            <a:srgbClr val="2B2B2B"/>
+                          </a:solidFill>
+                          <a:latin typeface="Calibri"/>
+                        </a:rPr>
+                        <a:t>Todo cargado y confirmado como recibido</a:t>
+                      </a:r>
+                    </a:p>
+                  </a:txBody>
+                  <a:tcPr anchor="ctr" marL="109728" marR="91440" marT="36576" marB="36576">
+                    <a:solidFill>
+                      <a:srgbClr val="FFFFFF"/>
+                    </a:solidFill>
+                  </a:tcPr>
+                </a:tc>
+              </a:tr>
+            </a:tbl>
+          </a:graphicData>
+        </a:graphic>
+      </p:graphicFrame>
+      <p:sp>
+        <p:nvSpPr>
+          <p:cNvPr id="5" name="TextBox 4"/>
+          <p:cNvSpPr txBox="1"/>
+          <p:nvPr/>
+        </p:nvSpPr>
+        <p:spPr>
+          <a:xfrm>
+            <a:off x="640080" y="5852160"/>
+            <a:ext cx="10911535" cy="548640"/>
+          </a:xfrm>
+          <a:prstGeom prst="rect">
+            <a:avLst/>
+          </a:prstGeom>
+          <a:noFill/>
+        </p:spPr>
+        <p:txBody>
+          <a:bodyPr wrap="square" anchor="t" lIns="0" rIns="0" tIns="0" bIns="0">
+            <a:spAutoFit/>
+          </a:bodyPr>
+          <a:lstStyle/>
+          <a:p>
+            <a:r>
+              <a:rPr sz="1200" b="0" i="1">
+                <a:solidFill>
+                  <a:srgbClr val="2B2B2B"/>
+                </a:solidFill>
+                <a:latin typeface="Calibri"/>
+              </a:rPr>
+              <a:t>El plazo de </a:t>
+            </a:r>
+            <a:r>
+              <a:rPr sz="1200" b="1" i="1">
+                <a:solidFill>
+                  <a:srgbClr val="2B2B2B"/>
+                </a:solidFill>
+                <a:latin typeface="Calibri"/>
+              </a:rPr>
+              <a:t>recepción y cierre varía según su grupo</a:t>
+            </a:r>
+            <a:r>
+              <a:rPr sz="1200" b="0" i="1">
+                <a:solidFill>
+                  <a:srgbClr val="2B2B2B"/>
+                </a:solidFill>
+                <a:latin typeface="Calibri"/>
+              </a:rPr>
+              <a:t>: consúltelo en la Presentación del Curso y anótelo hoy en su calendario.</a:t>
+            </a:r>
+          </a:p>
+        </p:txBody>
+      </p:sp>
+      <p:sp>
+        <p:nvSpPr>
+          <p:cNvPr id="6" name="TextBox 5"/>
+          <p:cNvSpPr txBox="1"/>
+          <p:nvPr/>
+        </p:nvSpPr>
+        <p:spPr>
+          <a:xfrm>
+            <a:off x="2194560" y="6446520"/>
+            <a:ext cx="5943600" cy="274320"/>
+          </a:xfrm>
+          <a:prstGeom prst="rect">
+            <a:avLst/>
+          </a:prstGeom>
+          <a:noFill/>
+        </p:spPr>
+        <p:txBody>
+          <a:bodyPr wrap="square" anchor="t" lIns="0" rIns="0" tIns="0" bIns="0">
+            <a:spAutoFit/>
+          </a:bodyPr>
+          <a:lstStyle/>
+          <a:p>
             <a:pPr algn="l"/>
             <a:r>
               <a:rPr sz="1000" b="1" i="0">
@@ -6243,6 +14517,41 @@
                 <a:latin typeface="Calibri"/>
               </a:rPr>
               <a:t>Inicio 5:10 pm</a:t>
+            </a:r>
+          </a:p>
+        </p:txBody>
+      </p:sp>
+      <p:sp>
+        <p:nvSpPr>
+          <p:cNvPr id="7" name="TextBox 6"/>
+          <p:cNvSpPr txBox="1"/>
+          <p:nvPr/>
+        </p:nvSpPr>
+        <p:spPr>
+          <a:xfrm>
+            <a:off x="11094415" y="6446520"/>
+            <a:ext cx="548640" cy="274320"/>
+          </a:xfrm>
+          <a:prstGeom prst="rect">
+            <a:avLst/>
+          </a:prstGeom>
+          <a:noFill/>
+        </p:spPr>
+        <p:txBody>
+          <a:bodyPr wrap="square" anchor="t" lIns="0" rIns="0" tIns="0" bIns="0">
+            <a:spAutoFit/>
+          </a:bodyPr>
+          <a:lstStyle/>
+          <a:p>
+            <a:pPr algn="r"/>
+            <a:r>
+              <a:rPr sz="1000" b="1" i="0">
+                <a:solidFill>
+                  <a:srgbClr val="8F989D"/>
+                </a:solidFill>
+                <a:latin typeface="Calibri"/>
+              </a:rPr>
+              <a:t>9</a:t>
             </a:r>
           </a:p>
         </p:txBody>

--- a/Pregrado/Trabajo de grado 3/Clases/Sesion 01 - Presentación del curso · docente · estudiantes · ACAs/Presentacion.pptx
+++ b/Pregrado/Trabajo de grado 3/Clases/Sesion 01 - Presentación del curso · docente · estudiantes · ACAs/Presentacion.pptx
@@ -3378,41 +3378,6 @@
           </a:p>
         </p:txBody>
       </p:sp>
-      <p:sp>
-        <p:nvSpPr>
-          <p:cNvPr id="7" name="TextBox 6"/>
-          <p:cNvSpPr txBox="1"/>
-          <p:nvPr/>
-        </p:nvSpPr>
-        <p:spPr>
-          <a:xfrm>
-            <a:off x="2194560" y="6446520"/>
-            <a:ext cx="5943600" cy="274320"/>
-          </a:xfrm>
-          <a:prstGeom prst="rect">
-            <a:avLst/>
-          </a:prstGeom>
-          <a:noFill/>
-        </p:spPr>
-        <p:txBody>
-          <a:bodyPr wrap="square" anchor="t" lIns="0" rIns="0" tIns="0" bIns="0">
-            <a:spAutoFit/>
-          </a:bodyPr>
-          <a:lstStyle/>
-          <a:p>
-            <a:pPr algn="l"/>
-            <a:r>
-              <a:rPr sz="1000" b="1" i="0">
-                <a:solidFill>
-                  <a:srgbClr val="8F989D"/>
-                </a:solidFill>
-                <a:latin typeface="Calibri"/>
-              </a:rPr>
-              <a:t>Inicio 5:10 pm</a:t>
-            </a:r>
-          </a:p>
-        </p:txBody>
-      </p:sp>
     </p:spTree>
   </p:cSld>
   <p:clrMapOvr>
@@ -3780,41 +3745,6 @@
       <p:sp>
         <p:nvSpPr>
           <p:cNvPr id="5" name="TextBox 4"/>
-          <p:cNvSpPr txBox="1"/>
-          <p:nvPr/>
-        </p:nvSpPr>
-        <p:spPr>
-          <a:xfrm>
-            <a:off x="2194560" y="6446520"/>
-            <a:ext cx="5943600" cy="274320"/>
-          </a:xfrm>
-          <a:prstGeom prst="rect">
-            <a:avLst/>
-          </a:prstGeom>
-          <a:noFill/>
-        </p:spPr>
-        <p:txBody>
-          <a:bodyPr wrap="square" anchor="t" lIns="0" rIns="0" tIns="0" bIns="0">
-            <a:spAutoFit/>
-          </a:bodyPr>
-          <a:lstStyle/>
-          <a:p>
-            <a:pPr algn="l"/>
-            <a:r>
-              <a:rPr sz="1000" b="1" i="0">
-                <a:solidFill>
-                  <a:srgbClr val="8F989D"/>
-                </a:solidFill>
-                <a:latin typeface="Calibri"/>
-              </a:rPr>
-              <a:t>Inicio 5:10 pm</a:t>
-            </a:r>
-          </a:p>
-        </p:txBody>
-      </p:sp>
-      <p:sp>
-        <p:nvSpPr>
-          <p:cNvPr id="6" name="TextBox 5"/>
           <p:cNvSpPr txBox="1"/>
           <p:nvPr/>
         </p:nvSpPr>
@@ -4340,41 +4270,6 @@
         </p:nvSpPr>
         <p:spPr>
           <a:xfrm>
-            <a:off x="2194560" y="6446520"/>
-            <a:ext cx="5943600" cy="274320"/>
-          </a:xfrm>
-          <a:prstGeom prst="rect">
-            <a:avLst/>
-          </a:prstGeom>
-          <a:noFill/>
-        </p:spPr>
-        <p:txBody>
-          <a:bodyPr wrap="square" anchor="t" lIns="0" rIns="0" tIns="0" bIns="0">
-            <a:spAutoFit/>
-          </a:bodyPr>
-          <a:lstStyle/>
-          <a:p>
-            <a:pPr algn="l"/>
-            <a:r>
-              <a:rPr sz="1000" b="1" i="0">
-                <a:solidFill>
-                  <a:srgbClr val="8F989D"/>
-                </a:solidFill>
-                <a:latin typeface="Calibri"/>
-              </a:rPr>
-              <a:t>Inicio 5:10 pm</a:t>
-            </a:r>
-          </a:p>
-        </p:txBody>
-      </p:sp>
-      <p:sp>
-        <p:nvSpPr>
-          <p:cNvPr id="7" name="TextBox 6"/>
-          <p:cNvSpPr txBox="1"/>
-          <p:nvPr/>
-        </p:nvSpPr>
-        <p:spPr>
-          <a:xfrm>
             <a:off x="11094415" y="6446520"/>
             <a:ext cx="548640" cy="274320"/>
           </a:xfrm>
@@ -4936,41 +4831,6 @@
         </p:nvSpPr>
         <p:spPr>
           <a:xfrm>
-            <a:off x="2194560" y="6446520"/>
-            <a:ext cx="5943600" cy="274320"/>
-          </a:xfrm>
-          <a:prstGeom prst="rect">
-            <a:avLst/>
-          </a:prstGeom>
-          <a:noFill/>
-        </p:spPr>
-        <p:txBody>
-          <a:bodyPr wrap="square" anchor="t" lIns="0" rIns="0" tIns="0" bIns="0">
-            <a:spAutoFit/>
-          </a:bodyPr>
-          <a:lstStyle/>
-          <a:p>
-            <a:pPr algn="l"/>
-            <a:r>
-              <a:rPr sz="1000" b="1" i="0">
-                <a:solidFill>
-                  <a:srgbClr val="8F989D"/>
-                </a:solidFill>
-                <a:latin typeface="Calibri"/>
-              </a:rPr>
-              <a:t>Inicio 5:10 pm</a:t>
-            </a:r>
-          </a:p>
-        </p:txBody>
-      </p:sp>
-      <p:sp>
-        <p:nvSpPr>
-          <p:cNvPr id="6" name="TextBox 5"/>
-          <p:cNvSpPr txBox="1"/>
-          <p:nvPr/>
-        </p:nvSpPr>
-        <p:spPr>
-          <a:xfrm>
             <a:off x="11094415" y="6446520"/>
             <a:ext cx="548640" cy="274320"/>
           </a:xfrm>
@@ -5131,7 +4991,7 @@
               </a:spcAft>
             </a:pPr>
             <a:r>
-              <a:rPr sz="1600" b="0" i="0">
+              <a:rPr sz="1500" b="0" i="0">
                 <a:solidFill>
                   <a:srgbClr val="2B2B2B"/>
                 </a:solidFill>
@@ -5140,7 +5000,7 @@
               <a:t>–   Todo lo que no es suyo se </a:t>
             </a:r>
             <a:r>
-              <a:rPr sz="1600" b="1" i="0">
+              <a:rPr sz="1500" b="1" i="0">
                 <a:solidFill>
                   <a:srgbClr val="2B2B2B"/>
                 </a:solidFill>
@@ -5149,7 +5009,7 @@
               <a:t>cita en APA 7</a:t>
             </a:r>
             <a:r>
-              <a:rPr sz="1600" b="0" i="0">
+              <a:rPr sz="1500" b="0" i="0">
                 <a:solidFill>
                   <a:srgbClr val="2B2B2B"/>
                 </a:solidFill>
@@ -5165,7 +5025,7 @@
               </a:spcAft>
             </a:pPr>
             <a:r>
-              <a:rPr sz="1600" b="0" i="0">
+              <a:rPr sz="1500" b="0" i="0">
                 <a:solidFill>
                   <a:srgbClr val="2B2B2B"/>
                 </a:solidFill>
@@ -5174,7 +5034,7 @@
               <a:t>–   </a:t>
             </a:r>
             <a:r>
-              <a:rPr sz="1600" b="1" i="0">
+              <a:rPr sz="1500" b="1" i="0">
                 <a:solidFill>
                   <a:srgbClr val="2B2B2B"/>
                 </a:solidFill>
@@ -5183,7 +5043,7 @@
               <a:t>Parafrasear</a:t>
             </a:r>
             <a:r>
-              <a:rPr sz="1600" b="0" i="0">
+              <a:rPr sz="1500" b="0" i="0">
                 <a:solidFill>
                   <a:srgbClr val="2B2B2B"/>
                 </a:solidFill>
@@ -5192,7 +5052,7 @@
               <a:t> es reescribir con sus palabras </a:t>
             </a:r>
             <a:r>
-              <a:rPr sz="1600" b="1" i="0">
+              <a:rPr sz="1500" b="1" i="0">
                 <a:solidFill>
                   <a:srgbClr val="2B2B2B"/>
                 </a:solidFill>
@@ -5201,7 +5061,7 @@
               <a:t>y citar igual</a:t>
             </a:r>
             <a:r>
-              <a:rPr sz="1600" b="0" i="0">
+              <a:rPr sz="1500" b="0" i="0">
                 <a:solidFill>
                   <a:srgbClr val="2B2B2B"/>
                 </a:solidFill>
@@ -5217,7 +5077,7 @@
               </a:spcAft>
             </a:pPr>
             <a:r>
-              <a:rPr sz="1600" b="0" i="0">
+              <a:rPr sz="1500" b="0" i="0">
                 <a:solidFill>
                   <a:srgbClr val="2B2B2B"/>
                 </a:solidFill>
@@ -5233,7 +5093,7 @@
               </a:spcAft>
             </a:pPr>
             <a:r>
-              <a:rPr sz="1500" b="0" i="0">
+              <a:rPr sz="1400" b="0" i="0">
                 <a:solidFill>
                   <a:srgbClr val="2B2B2B"/>
                 </a:solidFill>
@@ -5249,7 +5109,7 @@
               </a:spcAft>
             </a:pPr>
             <a:r>
-              <a:rPr sz="1500" b="0" i="0">
+              <a:rPr sz="1400" b="0" i="0">
                 <a:solidFill>
                   <a:srgbClr val="2B2B2B"/>
                 </a:solidFill>
@@ -5265,7 +5125,7 @@
               </a:spcAft>
             </a:pPr>
             <a:r>
-              <a:rPr sz="1500" b="0" i="0">
+              <a:rPr sz="1400" b="0" i="0">
                 <a:solidFill>
                   <a:srgbClr val="2B2B2B"/>
                 </a:solidFill>
@@ -5274,7 +5134,7 @@
               <a:t>●   Reutilizar su trabajo de TG2 sin declararlo (</a:t>
             </a:r>
             <a:r>
-              <a:rPr sz="1500" b="1" i="0">
+              <a:rPr sz="1400" b="1" i="0">
                 <a:solidFill>
                   <a:srgbClr val="2B2B2B"/>
                 </a:solidFill>
@@ -5283,7 +5143,7 @@
               <a:t>autoplagio</a:t>
             </a:r>
             <a:r>
-              <a:rPr sz="1500" b="0" i="0">
+              <a:rPr sz="1400" b="0" i="0">
                 <a:solidFill>
                   <a:srgbClr val="2B2B2B"/>
                 </a:solidFill>
@@ -5299,7 +5159,7 @@
               </a:spcAft>
             </a:pPr>
             <a:r>
-              <a:rPr sz="1600" b="0" i="0">
+              <a:rPr sz="1500" b="0" i="0">
                 <a:solidFill>
                   <a:srgbClr val="2B2B2B"/>
                 </a:solidFill>
@@ -5308,7 +5168,7 @@
               <a:t>–   En este curso el documento pasa por la </a:t>
             </a:r>
             <a:r>
-              <a:rPr sz="1600" b="1" i="0">
+              <a:rPr sz="1500" b="1" i="0">
                 <a:solidFill>
                   <a:srgbClr val="2B2B2B"/>
                 </a:solidFill>
@@ -5317,13 +5177,47 @@
               <a:t>herramienta antiplagio institucional del campus</a:t>
             </a:r>
             <a:r>
-              <a:rPr sz="1600" b="0" i="0">
+              <a:rPr sz="1500" b="0" i="0">
                 <a:solidFill>
                   <a:srgbClr val="2B2B2B"/>
                 </a:solidFill>
                 <a:latin typeface="Calibri"/>
               </a:rPr>
               <a:t> antes de la sustentación: no es una amenaza, es un paso del cronograma.</a:t>
+            </a:r>
+          </a:p>
+          <a:p>
+            <a:pPr lvl="1">
+              <a:spcAft>
+                <a:spcPts val="600"/>
+              </a:spcAft>
+            </a:pPr>
+            <a:r>
+              <a:rPr sz="1400" b="0" i="0">
+                <a:solidFill>
+                  <a:srgbClr val="2B2B2B"/>
+                </a:solidFill>
+                <a:latin typeface="Calibri"/>
+              </a:rPr>
+              <a:t>●   </a:t>
+            </a:r>
+            <a:r>
+              <a:rPr sz="1400" b="1" i="0">
+                <a:solidFill>
+                  <a:srgbClr val="2B2B2B"/>
+                </a:solidFill>
+                <a:latin typeface="Calibri"/>
+              </a:rPr>
+              <a:t>El Docente confirma hoy</a:t>
+            </a:r>
+            <a:r>
+              <a:rPr sz="1400" b="0" i="0">
+                <a:solidFill>
+                  <a:srgbClr val="2B2B2B"/>
+                </a:solidFill>
+                <a:latin typeface="Calibri"/>
+              </a:rPr>
+              <a:t> cómo opera esa revisión en este periodo y si el curso pide adjuntar algún informe.</a:t>
             </a:r>
           </a:p>
           <a:p>
@@ -5333,7 +5227,7 @@
               </a:spcAft>
             </a:pPr>
             <a:r>
-              <a:rPr sz="1600" b="0" i="0">
+              <a:rPr sz="1500" b="0" i="0">
                 <a:solidFill>
                   <a:srgbClr val="2B2B2B"/>
                 </a:solidFill>
@@ -5342,7 +5236,7 @@
               <a:t>–   Si se detecta plagio se activa el </a:t>
             </a:r>
             <a:r>
-              <a:rPr sz="1600" b="1" i="0">
+              <a:rPr sz="1500" b="1" i="0">
                 <a:solidFill>
                   <a:srgbClr val="2B2B2B"/>
                 </a:solidFill>
@@ -5351,7 +5245,7 @@
               <a:t>debido proceso institucional</a:t>
             </a:r>
             <a:r>
-              <a:rPr sz="1600" b="0" i="0">
+              <a:rPr sz="1500" b="0" i="0">
                 <a:solidFill>
                   <a:srgbClr val="2B2B2B"/>
                 </a:solidFill>
@@ -5370,8 +5264,8 @@
         </p:nvSpPr>
         <p:spPr>
           <a:xfrm>
-            <a:off x="2194560" y="6446520"/>
-            <a:ext cx="5943600" cy="274320"/>
+            <a:off x="11094415" y="6446520"/>
+            <a:ext cx="548640" cy="274320"/>
           </a:xfrm>
           <a:prstGeom prst="rect">
             <a:avLst/>
@@ -5384,7 +5278,7 @@
           </a:bodyPr>
           <a:lstStyle/>
           <a:p>
-            <a:pPr algn="l"/>
+            <a:pPr algn="r"/>
             <a:r>
               <a:rPr sz="1000" b="1" i="0">
                 <a:solidFill>
@@ -5392,7 +5286,7 @@
                 </a:solidFill>
                 <a:latin typeface="Calibri"/>
               </a:rPr>
-              <a:t>Inicio 5:10 pm</a:t>
+              <a:t>13</a:t>
             </a:r>
           </a:p>
         </p:txBody>
@@ -5400,41 +5294,6 @@
       <p:sp>
         <p:nvSpPr>
           <p:cNvPr id="6" name="TextBox 5"/>
-          <p:cNvSpPr txBox="1"/>
-          <p:nvPr/>
-        </p:nvSpPr>
-        <p:spPr>
-          <a:xfrm>
-            <a:off x="11094415" y="6446520"/>
-            <a:ext cx="548640" cy="274320"/>
-          </a:xfrm>
-          <a:prstGeom prst="rect">
-            <a:avLst/>
-          </a:prstGeom>
-          <a:noFill/>
-        </p:spPr>
-        <p:txBody>
-          <a:bodyPr wrap="square" anchor="t" lIns="0" rIns="0" tIns="0" bIns="0">
-            <a:spAutoFit/>
-          </a:bodyPr>
-          <a:lstStyle/>
-          <a:p>
-            <a:pPr algn="r"/>
-            <a:r>
-              <a:rPr sz="1000" b="1" i="0">
-                <a:solidFill>
-                  <a:srgbClr val="8F989D"/>
-                </a:solidFill>
-                <a:latin typeface="Calibri"/>
-              </a:rPr>
-              <a:t>13</a:t>
-            </a:r>
-          </a:p>
-        </p:txBody>
-      </p:sp>
-      <p:sp>
-        <p:nvSpPr>
-          <p:cNvPr id="7" name="TextBox 6"/>
           <p:cNvSpPr txBox="1"/>
           <p:nvPr/>
         </p:nvSpPr>
@@ -5906,41 +5765,6 @@
         </p:nvSpPr>
         <p:spPr>
           <a:xfrm>
-            <a:off x="2194560" y="6446520"/>
-            <a:ext cx="5943600" cy="274320"/>
-          </a:xfrm>
-          <a:prstGeom prst="rect">
-            <a:avLst/>
-          </a:prstGeom>
-          <a:noFill/>
-        </p:spPr>
-        <p:txBody>
-          <a:bodyPr wrap="square" anchor="t" lIns="0" rIns="0" tIns="0" bIns="0">
-            <a:spAutoFit/>
-          </a:bodyPr>
-          <a:lstStyle/>
-          <a:p>
-            <a:pPr algn="l"/>
-            <a:r>
-              <a:rPr sz="1000" b="1" i="0">
-                <a:solidFill>
-                  <a:srgbClr val="8F989D"/>
-                </a:solidFill>
-                <a:latin typeface="Calibri"/>
-              </a:rPr>
-              <a:t>Inicio 5:10 pm</a:t>
-            </a:r>
-          </a:p>
-        </p:txBody>
-      </p:sp>
-      <p:sp>
-        <p:nvSpPr>
-          <p:cNvPr id="11" name="TextBox 10"/>
-          <p:cNvSpPr txBox="1"/>
-          <p:nvPr/>
-        </p:nvSpPr>
-        <p:spPr>
-          <a:xfrm>
             <a:off x="11094415" y="6446520"/>
             <a:ext cx="548640" cy="274320"/>
           </a:xfrm>
@@ -6083,7 +5907,7 @@
         </p:nvGraphicFramePr>
         <p:xfrm>
           <a:off x="640080" y="1691639"/>
-          <a:ext cx="10911534" cy="4526280"/>
+          <a:ext cx="10911534" cy="4023360"/>
         </p:xfrm>
         <a:graphic>
           <a:graphicData uri="http://schemas.openxmlformats.org/drawingml/2006/table">
@@ -6664,77 +6488,6 @@
                   </a:tcPr>
                 </a:tc>
               </a:tr>
-              <a:tr h="502920">
-                <a:tc>
-                  <a:txBody>
-                    <a:bodyPr/>
-                    <a:lstStyle/>
-                    <a:p>
-                      <a:pPr algn="l"/>
-                      <a:r>
-                        <a:rPr sz="1100" b="1" i="0">
-                          <a:solidFill>
-                            <a:srgbClr val="2B2B2B"/>
-                          </a:solidFill>
-                          <a:latin typeface="Calibri"/>
-                        </a:rPr>
-                        <a:t>Padlet</a:t>
-                      </a:r>
-                    </a:p>
-                  </a:txBody>
-                  <a:tcPr anchor="ctr" marL="109728" marR="91440" marT="36576" marB="36576">
-                    <a:solidFill>
-                      <a:srgbClr val="F2F2F2"/>
-                    </a:solidFill>
-                  </a:tcPr>
-                </a:tc>
-                <a:tc>
-                  <a:txBody>
-                    <a:bodyPr/>
-                    <a:lstStyle/>
-                    <a:p>
-                      <a:pPr algn="l"/>
-                      <a:r>
-                        <a:rPr sz="1100" b="0" i="0">
-                          <a:solidFill>
-                            <a:srgbClr val="2B2B2B"/>
-                          </a:solidFill>
-                          <a:latin typeface="Calibri"/>
-                        </a:rPr>
-                        <a:t>Tablero donde nos presentamos como grupo</a:t>
-                      </a:r>
-                    </a:p>
-                  </a:txBody>
-                  <a:tcPr anchor="ctr" marL="109728" marR="91440" marT="36576" marB="36576">
-                    <a:solidFill>
-                      <a:srgbClr val="F2F2F2"/>
-                    </a:solidFill>
-                  </a:tcPr>
-                </a:tc>
-                <a:tc>
-                  <a:txBody>
-                    <a:bodyPr/>
-                    <a:lstStyle/>
-                    <a:p>
-                      <a:pPr algn="l"/>
-                      <a:r>
-                        <a:rPr sz="1100" b="0" i="0">
-                          <a:solidFill>
-                            <a:srgbClr val="2B2B2B"/>
-                          </a:solidFill>
-                          <a:latin typeface="Calibri"/>
-                        </a:rPr>
-                        <a:t>Hoy</a:t>
-                      </a:r>
-                    </a:p>
-                  </a:txBody>
-                  <a:tcPr anchor="ctr" marL="109728" marR="91440" marT="36576" marB="36576">
-                    <a:solidFill>
-                      <a:srgbClr val="F2F2F2"/>
-                    </a:solidFill>
-                  </a:tcPr>
-                </a:tc>
-              </a:tr>
             </a:tbl>
           </a:graphicData>
         </a:graphic>
@@ -6747,7 +6500,7 @@
         </p:nvSpPr>
         <p:spPr>
           <a:xfrm>
-            <a:off x="640080" y="6080760"/>
+            <a:off x="640080" y="5852160"/>
             <a:ext cx="10911535" cy="548640"/>
           </a:xfrm>
           <a:prstGeom prst="rect">
@@ -6776,41 +6529,6 @@
       <p:sp>
         <p:nvSpPr>
           <p:cNvPr id="6" name="TextBox 5"/>
-          <p:cNvSpPr txBox="1"/>
-          <p:nvPr/>
-        </p:nvSpPr>
-        <p:spPr>
-          <a:xfrm>
-            <a:off x="2194560" y="6446520"/>
-            <a:ext cx="5943600" cy="274320"/>
-          </a:xfrm>
-          <a:prstGeom prst="rect">
-            <a:avLst/>
-          </a:prstGeom>
-          <a:noFill/>
-        </p:spPr>
-        <p:txBody>
-          <a:bodyPr wrap="square" anchor="t" lIns="0" rIns="0" tIns="0" bIns="0">
-            <a:spAutoFit/>
-          </a:bodyPr>
-          <a:lstStyle/>
-          <a:p>
-            <a:pPr algn="l"/>
-            <a:r>
-              <a:rPr sz="1000" b="1" i="0">
-                <a:solidFill>
-                  <a:srgbClr val="8F989D"/>
-                </a:solidFill>
-                <a:latin typeface="Calibri"/>
-              </a:rPr>
-              <a:t>Inicio 5:10 pm</a:t>
-            </a:r>
-          </a:p>
-        </p:txBody>
-      </p:sp>
-      <p:sp>
-        <p:nvSpPr>
-          <p:cNvPr id="7" name="TextBox 6"/>
           <p:cNvSpPr txBox="1"/>
           <p:nvPr/>
         </p:nvSpPr>
@@ -7242,41 +6960,6 @@
         </p:nvSpPr>
         <p:spPr>
           <a:xfrm>
-            <a:off x="2194560" y="6446520"/>
-            <a:ext cx="5943600" cy="274320"/>
-          </a:xfrm>
-          <a:prstGeom prst="rect">
-            <a:avLst/>
-          </a:prstGeom>
-          <a:noFill/>
-        </p:spPr>
-        <p:txBody>
-          <a:bodyPr wrap="square" anchor="t" lIns="0" rIns="0" tIns="0" bIns="0">
-            <a:spAutoFit/>
-          </a:bodyPr>
-          <a:lstStyle/>
-          <a:p>
-            <a:pPr algn="l"/>
-            <a:r>
-              <a:rPr sz="1000" b="1" i="0">
-                <a:solidFill>
-                  <a:srgbClr val="8F989D"/>
-                </a:solidFill>
-                <a:latin typeface="Calibri"/>
-              </a:rPr>
-              <a:t>Inicio 5:10 pm</a:t>
-            </a:r>
-          </a:p>
-        </p:txBody>
-      </p:sp>
-      <p:sp>
-        <p:nvSpPr>
-          <p:cNvPr id="6" name="TextBox 5"/>
-          <p:cNvSpPr txBox="1"/>
-          <p:nvPr/>
-        </p:nvSpPr>
-        <p:spPr>
-          <a:xfrm>
             <a:off x="11094415" y="6446520"/>
             <a:ext cx="548640" cy="274320"/>
           </a:xfrm>
@@ -7762,41 +7445,6 @@
         </p:nvSpPr>
         <p:spPr>
           <a:xfrm>
-            <a:off x="2194560" y="6446520"/>
-            <a:ext cx="5943600" cy="274320"/>
-          </a:xfrm>
-          <a:prstGeom prst="rect">
-            <a:avLst/>
-          </a:prstGeom>
-          <a:noFill/>
-        </p:spPr>
-        <p:txBody>
-          <a:bodyPr wrap="square" anchor="t" lIns="0" rIns="0" tIns="0" bIns="0">
-            <a:spAutoFit/>
-          </a:bodyPr>
-          <a:lstStyle/>
-          <a:p>
-            <a:pPr algn="l"/>
-            <a:r>
-              <a:rPr sz="1000" b="1" i="0">
-                <a:solidFill>
-                  <a:srgbClr val="8F989D"/>
-                </a:solidFill>
-                <a:latin typeface="Calibri"/>
-              </a:rPr>
-              <a:t>Inicio 5:10 pm</a:t>
-            </a:r>
-          </a:p>
-        </p:txBody>
-      </p:sp>
-      <p:sp>
-        <p:nvSpPr>
-          <p:cNvPr id="11" name="TextBox 10"/>
-          <p:cNvSpPr txBox="1"/>
-          <p:nvPr/>
-        </p:nvSpPr>
-        <p:spPr>
-          <a:xfrm>
             <a:off x="11094415" y="6446520"/>
             <a:ext cx="548640" cy="274320"/>
           </a:xfrm>
@@ -8282,41 +7930,6 @@
         </p:nvSpPr>
         <p:spPr>
           <a:xfrm>
-            <a:off x="2194560" y="6446520"/>
-            <a:ext cx="5943600" cy="274320"/>
-          </a:xfrm>
-          <a:prstGeom prst="rect">
-            <a:avLst/>
-          </a:prstGeom>
-          <a:noFill/>
-        </p:spPr>
-        <p:txBody>
-          <a:bodyPr wrap="square" anchor="t" lIns="0" rIns="0" tIns="0" bIns="0">
-            <a:spAutoFit/>
-          </a:bodyPr>
-          <a:lstStyle/>
-          <a:p>
-            <a:pPr algn="l"/>
-            <a:r>
-              <a:rPr sz="1000" b="1" i="0">
-                <a:solidFill>
-                  <a:srgbClr val="8F989D"/>
-                </a:solidFill>
-                <a:latin typeface="Calibri"/>
-              </a:rPr>
-              <a:t>Inicio 5:10 pm</a:t>
-            </a:r>
-          </a:p>
-        </p:txBody>
-      </p:sp>
-      <p:sp>
-        <p:nvSpPr>
-          <p:cNvPr id="11" name="TextBox 10"/>
-          <p:cNvSpPr txBox="1"/>
-          <p:nvPr/>
-        </p:nvSpPr>
-        <p:spPr>
-          <a:xfrm>
             <a:off x="11094415" y="6446520"/>
             <a:ext cx="548640" cy="274320"/>
           </a:xfrm>
@@ -8806,8 +8419,8 @@
         </p:nvSpPr>
         <p:spPr>
           <a:xfrm>
-            <a:off x="2194560" y="6446520"/>
-            <a:ext cx="5943600" cy="274320"/>
+            <a:off x="11094415" y="6446520"/>
+            <a:ext cx="548640" cy="274320"/>
           </a:xfrm>
           <a:prstGeom prst="rect">
             <a:avLst/>
@@ -8820,7 +8433,7 @@
           </a:bodyPr>
           <a:lstStyle/>
           <a:p>
-            <a:pPr algn="l"/>
+            <a:pPr algn="r"/>
             <a:r>
               <a:rPr sz="1000" b="1" i="0">
                 <a:solidFill>
@@ -8828,7 +8441,7 @@
                 </a:solidFill>
                 <a:latin typeface="Calibri"/>
               </a:rPr>
-              <a:t>Inicio 5:10 pm</a:t>
+              <a:t>19</a:t>
             </a:r>
           </a:p>
         </p:txBody>
@@ -8836,41 +8449,6 @@
       <p:sp>
         <p:nvSpPr>
           <p:cNvPr id="6" name="TextBox 5"/>
-          <p:cNvSpPr txBox="1"/>
-          <p:nvPr/>
-        </p:nvSpPr>
-        <p:spPr>
-          <a:xfrm>
-            <a:off x="11094415" y="6446520"/>
-            <a:ext cx="548640" cy="274320"/>
-          </a:xfrm>
-          <a:prstGeom prst="rect">
-            <a:avLst/>
-          </a:prstGeom>
-          <a:noFill/>
-        </p:spPr>
-        <p:txBody>
-          <a:bodyPr wrap="square" anchor="t" lIns="0" rIns="0" tIns="0" bIns="0">
-            <a:spAutoFit/>
-          </a:bodyPr>
-          <a:lstStyle/>
-          <a:p>
-            <a:pPr algn="r"/>
-            <a:r>
-              <a:rPr sz="1000" b="1" i="0">
-                <a:solidFill>
-                  <a:srgbClr val="8F989D"/>
-                </a:solidFill>
-                <a:latin typeface="Calibri"/>
-              </a:rPr>
-              <a:t>19</a:t>
-            </a:r>
-          </a:p>
-        </p:txBody>
-      </p:sp>
-      <p:sp>
-        <p:nvSpPr>
-          <p:cNvPr id="7" name="TextBox 6"/>
           <p:cNvSpPr txBox="1"/>
           <p:nvPr/>
         </p:nvSpPr>
@@ -9261,41 +8839,6 @@
         </p:nvSpPr>
         <p:spPr>
           <a:xfrm>
-            <a:off x="2194560" y="6446520"/>
-            <a:ext cx="5943600" cy="274320"/>
-          </a:xfrm>
-          <a:prstGeom prst="rect">
-            <a:avLst/>
-          </a:prstGeom>
-          <a:noFill/>
-        </p:spPr>
-        <p:txBody>
-          <a:bodyPr wrap="square" anchor="t" lIns="0" rIns="0" tIns="0" bIns="0">
-            <a:spAutoFit/>
-          </a:bodyPr>
-          <a:lstStyle/>
-          <a:p>
-            <a:pPr algn="l"/>
-            <a:r>
-              <a:rPr sz="1000" b="1" i="0">
-                <a:solidFill>
-                  <a:srgbClr val="8F989D"/>
-                </a:solidFill>
-                <a:latin typeface="Calibri"/>
-              </a:rPr>
-              <a:t>Inicio 5:10 pm</a:t>
-            </a:r>
-          </a:p>
-        </p:txBody>
-      </p:sp>
-      <p:sp>
-        <p:nvSpPr>
-          <p:cNvPr id="7" name="TextBox 6"/>
-          <p:cNvSpPr txBox="1"/>
-          <p:nvPr/>
-        </p:nvSpPr>
-        <p:spPr>
-          <a:xfrm>
             <a:off x="11094415" y="6446520"/>
             <a:ext cx="548640" cy="274320"/>
           </a:xfrm>
@@ -9763,41 +9306,6 @@
         </p:nvSpPr>
         <p:spPr>
           <a:xfrm>
-            <a:off x="2194560" y="6446520"/>
-            <a:ext cx="5943600" cy="274320"/>
-          </a:xfrm>
-          <a:prstGeom prst="rect">
-            <a:avLst/>
-          </a:prstGeom>
-          <a:noFill/>
-        </p:spPr>
-        <p:txBody>
-          <a:bodyPr wrap="square" anchor="t" lIns="0" rIns="0" tIns="0" bIns="0">
-            <a:spAutoFit/>
-          </a:bodyPr>
-          <a:lstStyle/>
-          <a:p>
-            <a:pPr algn="l"/>
-            <a:r>
-              <a:rPr sz="1000" b="1" i="0">
-                <a:solidFill>
-                  <a:srgbClr val="8F989D"/>
-                </a:solidFill>
-                <a:latin typeface="Calibri"/>
-              </a:rPr>
-              <a:t>Inicio 5:10 pm</a:t>
-            </a:r>
-          </a:p>
-        </p:txBody>
-      </p:sp>
-      <p:sp>
-        <p:nvSpPr>
-          <p:cNvPr id="11" name="TextBox 10"/>
-          <p:cNvSpPr txBox="1"/>
-          <p:nvPr/>
-        </p:nvSpPr>
-        <p:spPr>
-          <a:xfrm>
             <a:off x="11094415" y="6446520"/>
             <a:ext cx="548640" cy="274320"/>
           </a:xfrm>
@@ -10063,41 +9571,6 @@
         </p:nvSpPr>
         <p:spPr>
           <a:xfrm>
-            <a:off x="2194560" y="6446520"/>
-            <a:ext cx="5943600" cy="274320"/>
-          </a:xfrm>
-          <a:prstGeom prst="rect">
-            <a:avLst/>
-          </a:prstGeom>
-          <a:noFill/>
-        </p:spPr>
-        <p:txBody>
-          <a:bodyPr wrap="square" anchor="t" lIns="0" rIns="0" tIns="0" bIns="0">
-            <a:spAutoFit/>
-          </a:bodyPr>
-          <a:lstStyle/>
-          <a:p>
-            <a:pPr algn="l"/>
-            <a:r>
-              <a:rPr sz="1000" b="1" i="0">
-                <a:solidFill>
-                  <a:srgbClr val="8F989D"/>
-                </a:solidFill>
-                <a:latin typeface="Calibri"/>
-              </a:rPr>
-              <a:t>Inicio 5:10 pm</a:t>
-            </a:r>
-          </a:p>
-        </p:txBody>
-      </p:sp>
-      <p:sp>
-        <p:nvSpPr>
-          <p:cNvPr id="6" name="TextBox 5"/>
-          <p:cNvSpPr txBox="1"/>
-          <p:nvPr/>
-        </p:nvSpPr>
-        <p:spPr>
-          <a:xfrm>
             <a:off x="11094415" y="6446520"/>
             <a:ext cx="548640" cy="274320"/>
           </a:xfrm>
@@ -10353,41 +9826,6 @@
           </a:p>
         </p:txBody>
       </p:sp>
-      <p:sp>
-        <p:nvSpPr>
-          <p:cNvPr id="7" name="TextBox 6"/>
-          <p:cNvSpPr txBox="1"/>
-          <p:nvPr/>
-        </p:nvSpPr>
-        <p:spPr>
-          <a:xfrm>
-            <a:off x="2194560" y="6446520"/>
-            <a:ext cx="5943600" cy="274320"/>
-          </a:xfrm>
-          <a:prstGeom prst="rect">
-            <a:avLst/>
-          </a:prstGeom>
-          <a:noFill/>
-        </p:spPr>
-        <p:txBody>
-          <a:bodyPr wrap="square" anchor="t" lIns="0" rIns="0" tIns="0" bIns="0">
-            <a:spAutoFit/>
-          </a:bodyPr>
-          <a:lstStyle/>
-          <a:p>
-            <a:pPr algn="l"/>
-            <a:r>
-              <a:rPr sz="1000" b="1" i="0">
-                <a:solidFill>
-                  <a:srgbClr val="8F989D"/>
-                </a:solidFill>
-                <a:latin typeface="Calibri"/>
-              </a:rPr>
-              <a:t>Inicio 5:10 pm</a:t>
-            </a:r>
-          </a:p>
-        </p:txBody>
-      </p:sp>
     </p:spTree>
   </p:cSld>
   <p:clrMapOvr>
@@ -10670,41 +10108,6 @@
         </p:nvSpPr>
         <p:spPr>
           <a:xfrm>
-            <a:off x="2194560" y="6446520"/>
-            <a:ext cx="5943600" cy="274320"/>
-          </a:xfrm>
-          <a:prstGeom prst="rect">
-            <a:avLst/>
-          </a:prstGeom>
-          <a:noFill/>
-        </p:spPr>
-        <p:txBody>
-          <a:bodyPr wrap="square" anchor="t" lIns="0" rIns="0" tIns="0" bIns="0">
-            <a:spAutoFit/>
-          </a:bodyPr>
-          <a:lstStyle/>
-          <a:p>
-            <a:pPr algn="l"/>
-            <a:r>
-              <a:rPr sz="1000" b="1" i="0">
-                <a:solidFill>
-                  <a:srgbClr val="8F989D"/>
-                </a:solidFill>
-                <a:latin typeface="Calibri"/>
-              </a:rPr>
-              <a:t>Inicio 5:10 pm</a:t>
-            </a:r>
-          </a:p>
-        </p:txBody>
-      </p:sp>
-      <p:sp>
-        <p:nvSpPr>
-          <p:cNvPr id="9" name="TextBox 8"/>
-          <p:cNvSpPr txBox="1"/>
-          <p:nvPr/>
-        </p:nvSpPr>
-        <p:spPr>
-          <a:xfrm>
             <a:off x="11094415" y="6446520"/>
             <a:ext cx="548640" cy="274320"/>
           </a:xfrm>
@@ -11190,41 +10593,6 @@
       <p:sp>
         <p:nvSpPr>
           <p:cNvPr id="10" name="TextBox 9"/>
-          <p:cNvSpPr txBox="1"/>
-          <p:nvPr/>
-        </p:nvSpPr>
-        <p:spPr>
-          <a:xfrm>
-            <a:off x="2194560" y="6446520"/>
-            <a:ext cx="5943600" cy="274320"/>
-          </a:xfrm>
-          <a:prstGeom prst="rect">
-            <a:avLst/>
-          </a:prstGeom>
-          <a:noFill/>
-        </p:spPr>
-        <p:txBody>
-          <a:bodyPr wrap="square" anchor="t" lIns="0" rIns="0" tIns="0" bIns="0">
-            <a:spAutoFit/>
-          </a:bodyPr>
-          <a:lstStyle/>
-          <a:p>
-            <a:pPr algn="l"/>
-            <a:r>
-              <a:rPr sz="1000" b="1" i="0">
-                <a:solidFill>
-                  <a:srgbClr val="8F989D"/>
-                </a:solidFill>
-                <a:latin typeface="Calibri"/>
-              </a:rPr>
-              <a:t>Inicio 5:10 pm</a:t>
-            </a:r>
-          </a:p>
-        </p:txBody>
-      </p:sp>
-      <p:sp>
-        <p:nvSpPr>
-          <p:cNvPr id="11" name="TextBox 10"/>
           <p:cNvSpPr txBox="1"/>
           <p:nvPr/>
         </p:nvSpPr>
@@ -11706,41 +11074,6 @@
         </p:nvSpPr>
         <p:spPr>
           <a:xfrm>
-            <a:off x="2194560" y="6446520"/>
-            <a:ext cx="5943600" cy="274320"/>
-          </a:xfrm>
-          <a:prstGeom prst="rect">
-            <a:avLst/>
-          </a:prstGeom>
-          <a:noFill/>
-        </p:spPr>
-        <p:txBody>
-          <a:bodyPr wrap="square" anchor="t" lIns="0" rIns="0" tIns="0" bIns="0">
-            <a:spAutoFit/>
-          </a:bodyPr>
-          <a:lstStyle/>
-          <a:p>
-            <a:pPr algn="l"/>
-            <a:r>
-              <a:rPr sz="1000" b="1" i="0">
-                <a:solidFill>
-                  <a:srgbClr val="8F989D"/>
-                </a:solidFill>
-                <a:latin typeface="Calibri"/>
-              </a:rPr>
-              <a:t>Inicio 5:10 pm</a:t>
-            </a:r>
-          </a:p>
-        </p:txBody>
-      </p:sp>
-      <p:sp>
-        <p:nvSpPr>
-          <p:cNvPr id="8" name="TextBox 7"/>
-          <p:cNvSpPr txBox="1"/>
-          <p:nvPr/>
-        </p:nvSpPr>
-        <p:spPr>
-          <a:xfrm>
             <a:off x="11094415" y="6446520"/>
             <a:ext cx="548640" cy="274320"/>
           </a:xfrm>
@@ -12185,8 +11518,8 @@
         </p:nvSpPr>
         <p:spPr>
           <a:xfrm>
-            <a:off x="2194560" y="6446520"/>
-            <a:ext cx="5943600" cy="274320"/>
+            <a:off x="11094415" y="6446520"/>
+            <a:ext cx="548640" cy="274320"/>
           </a:xfrm>
           <a:prstGeom prst="rect">
             <a:avLst/>
@@ -12199,7 +11532,7 @@
           </a:bodyPr>
           <a:lstStyle/>
           <a:p>
-            <a:pPr algn="l"/>
+            <a:pPr algn="r"/>
             <a:r>
               <a:rPr sz="1000" b="1" i="0">
                 <a:solidFill>
@@ -12207,7 +11540,7 @@
                 </a:solidFill>
                 <a:latin typeface="Calibri"/>
               </a:rPr>
-              <a:t>Inicio 5:10 pm</a:t>
+              <a:t>6</a:t>
             </a:r>
           </a:p>
         </p:txBody>
@@ -12215,41 +11548,6 @@
       <p:sp>
         <p:nvSpPr>
           <p:cNvPr id="6" name="TextBox 5"/>
-          <p:cNvSpPr txBox="1"/>
-          <p:nvPr/>
-        </p:nvSpPr>
-        <p:spPr>
-          <a:xfrm>
-            <a:off x="11094415" y="6446520"/>
-            <a:ext cx="548640" cy="274320"/>
-          </a:xfrm>
-          <a:prstGeom prst="rect">
-            <a:avLst/>
-          </a:prstGeom>
-          <a:noFill/>
-        </p:spPr>
-        <p:txBody>
-          <a:bodyPr wrap="square" anchor="t" lIns="0" rIns="0" tIns="0" bIns="0">
-            <a:spAutoFit/>
-          </a:bodyPr>
-          <a:lstStyle/>
-          <a:p>
-            <a:pPr algn="r"/>
-            <a:r>
-              <a:rPr sz="1000" b="1" i="0">
-                <a:solidFill>
-                  <a:srgbClr val="8F989D"/>
-                </a:solidFill>
-                <a:latin typeface="Calibri"/>
-              </a:rPr>
-              <a:t>6</a:t>
-            </a:r>
-          </a:p>
-        </p:txBody>
-      </p:sp>
-      <p:sp>
-        <p:nvSpPr>
-          <p:cNvPr id="7" name="TextBox 6"/>
           <p:cNvSpPr txBox="1"/>
           <p:nvPr/>
         </p:nvSpPr>
@@ -12691,8 +11989,8 @@
         </p:nvSpPr>
         <p:spPr>
           <a:xfrm>
-            <a:off x="2194560" y="6446520"/>
-            <a:ext cx="5943600" cy="274320"/>
+            <a:off x="11094415" y="6446520"/>
+            <a:ext cx="548640" cy="274320"/>
           </a:xfrm>
           <a:prstGeom prst="rect">
             <a:avLst/>
@@ -12705,7 +12003,7 @@
           </a:bodyPr>
           <a:lstStyle/>
           <a:p>
-            <a:pPr algn="l"/>
+            <a:pPr algn="r"/>
             <a:r>
               <a:rPr sz="1000" b="1" i="0">
                 <a:solidFill>
@@ -12713,7 +12011,7 @@
                 </a:solidFill>
                 <a:latin typeface="Calibri"/>
               </a:rPr>
-              <a:t>Inicio 5:10 pm</a:t>
+              <a:t>7</a:t>
             </a:r>
           </a:p>
         </p:txBody>
@@ -12721,41 +12019,6 @@
       <p:sp>
         <p:nvSpPr>
           <p:cNvPr id="6" name="TextBox 5"/>
-          <p:cNvSpPr txBox="1"/>
-          <p:nvPr/>
-        </p:nvSpPr>
-        <p:spPr>
-          <a:xfrm>
-            <a:off x="11094415" y="6446520"/>
-            <a:ext cx="548640" cy="274320"/>
-          </a:xfrm>
-          <a:prstGeom prst="rect">
-            <a:avLst/>
-          </a:prstGeom>
-          <a:noFill/>
-        </p:spPr>
-        <p:txBody>
-          <a:bodyPr wrap="square" anchor="t" lIns="0" rIns="0" tIns="0" bIns="0">
-            <a:spAutoFit/>
-          </a:bodyPr>
-          <a:lstStyle/>
-          <a:p>
-            <a:pPr algn="r"/>
-            <a:r>
-              <a:rPr sz="1000" b="1" i="0">
-                <a:solidFill>
-                  <a:srgbClr val="8F989D"/>
-                </a:solidFill>
-                <a:latin typeface="Calibri"/>
-              </a:rPr>
-              <a:t>7</a:t>
-            </a:r>
-          </a:p>
-        </p:txBody>
-      </p:sp>
-      <p:sp>
-        <p:nvSpPr>
-          <p:cNvPr id="7" name="TextBox 6"/>
           <p:cNvSpPr txBox="1"/>
           <p:nvPr/>
         </p:nvSpPr>
@@ -13672,41 +12935,6 @@
         </p:nvSpPr>
         <p:spPr>
           <a:xfrm>
-            <a:off x="2194560" y="6446520"/>
-            <a:ext cx="5943600" cy="274320"/>
-          </a:xfrm>
-          <a:prstGeom prst="rect">
-            <a:avLst/>
-          </a:prstGeom>
-          <a:noFill/>
-        </p:spPr>
-        <p:txBody>
-          <a:bodyPr wrap="square" anchor="t" lIns="0" rIns="0" tIns="0" bIns="0">
-            <a:spAutoFit/>
-          </a:bodyPr>
-          <a:lstStyle/>
-          <a:p>
-            <a:pPr algn="l"/>
-            <a:r>
-              <a:rPr sz="1000" b="1" i="0">
-                <a:solidFill>
-                  <a:srgbClr val="8F989D"/>
-                </a:solidFill>
-                <a:latin typeface="Calibri"/>
-              </a:rPr>
-              <a:t>Inicio 5:10 pm</a:t>
-            </a:r>
-          </a:p>
-        </p:txBody>
-      </p:sp>
-      <p:sp>
-        <p:nvSpPr>
-          <p:cNvPr id="7" name="TextBox 6"/>
-          <p:cNvSpPr txBox="1"/>
-          <p:nvPr/>
-        </p:nvSpPr>
-        <p:spPr>
-          <a:xfrm>
             <a:off x="11094415" y="6446520"/>
             <a:ext cx="548640" cy="274320"/>
           </a:xfrm>
@@ -14494,41 +13722,6 @@
         </p:nvSpPr>
         <p:spPr>
           <a:xfrm>
-            <a:off x="2194560" y="6446520"/>
-            <a:ext cx="5943600" cy="274320"/>
-          </a:xfrm>
-          <a:prstGeom prst="rect">
-            <a:avLst/>
-          </a:prstGeom>
-          <a:noFill/>
-        </p:spPr>
-        <p:txBody>
-          <a:bodyPr wrap="square" anchor="t" lIns="0" rIns="0" tIns="0" bIns="0">
-            <a:spAutoFit/>
-          </a:bodyPr>
-          <a:lstStyle/>
-          <a:p>
-            <a:pPr algn="l"/>
-            <a:r>
-              <a:rPr sz="1000" b="1" i="0">
-                <a:solidFill>
-                  <a:srgbClr val="8F989D"/>
-                </a:solidFill>
-                <a:latin typeface="Calibri"/>
-              </a:rPr>
-              <a:t>Inicio 5:10 pm</a:t>
-            </a:r>
-          </a:p>
-        </p:txBody>
-      </p:sp>
-      <p:sp>
-        <p:nvSpPr>
-          <p:cNvPr id="7" name="TextBox 6"/>
-          <p:cNvSpPr txBox="1"/>
-          <p:nvPr/>
-        </p:nvSpPr>
-        <p:spPr>
-          <a:xfrm>
             <a:off x="11094415" y="6446520"/>
             <a:ext cx="548640" cy="274320"/>
           </a:xfrm>

--- a/Pregrado/Trabajo de grado 3/Clases/Sesion 01 - Presentación del curso · docente · estudiantes · ACAs/Presentacion.pptx
+++ b/Pregrado/Trabajo de grado 3/Clases/Sesion 01 - Presentación del curso · docente · estudiantes · ACAs/Presentacion.pptx
@@ -8218,7 +8218,25 @@
                 </a:solidFill>
                 <a:latin typeface="Calibri"/>
               </a:rPr>
-              <a:t>●   Dónde: material de la Sesión 01 en CDigital — [URL CDigital — campus del curso pendiente]</a:t>
+              <a:t>●   </a:t>
+            </a:r>
+            <a:r>
+              <a:rPr sz="1500" b="1" i="0">
+                <a:solidFill>
+                  <a:srgbClr val="2B2B2B"/>
+                </a:solidFill>
+                <a:latin typeface="Calibri"/>
+              </a:rPr>
+              <a:t>Dónde está:</a:t>
+            </a:r>
+            <a:r>
+              <a:rPr sz="1500" b="0" i="0">
+                <a:solidFill>
+                  <a:srgbClr val="2B2B2B"/>
+                </a:solidFill>
+                <a:latin typeface="Calibri"/>
+              </a:rPr>
+              <a:t> ya viene en tu carpeta del curso, en `Sesion 01 - …/` (el PDF y el archivo `Lectura autonoma - Sesion 01.txt` con la cita y el enlace). También queda publicada en CDigital.</a:t>
             </a:r>
           </a:p>
           <a:p>

--- a/Pregrado/Trabajo de grado 3/Clases/Sesion 01 - Presentación del curso · docente · estudiantes · ACAs/Presentacion.pptx
+++ b/Pregrado/Trabajo de grado 3/Clases/Sesion 01 - Presentación del curso · docente · estudiantes · ACAs/Presentacion.pptx
@@ -3348,7 +3348,7 @@
                 </a:solidFill>
                 <a:latin typeface="Calibri"/>
               </a:rPr>
-              <a:t> el curso · el Docente · ustedes · las ACAs</a:t>
+              <a:t> el curso · el Docente · ustedes · cómo se evalúa</a:t>
             </a:r>
           </a:p>
           <a:p>
@@ -3877,7 +3877,7 @@
                 </a:solidFill>
                 <a:latin typeface="Calibri"/>
               </a:rPr>
-              <a:t>Las dos ACAs: qué se entrega y qué se mira</a:t>
+              <a:t>Corte por corte: qué hay en el aula y qué se prepara</a:t>
             </a:r>
           </a:p>
         </p:txBody>
@@ -3892,7 +3892,7 @@
         </p:nvGraphicFramePr>
         <p:xfrm>
           <a:off x="640080" y="1691639"/>
-          <a:ext cx="10911533" cy="1508760"/>
+          <a:ext cx="10911534" cy="2011680"/>
         </p:xfrm>
         <a:graphic>
           <a:graphicData uri="http://schemas.openxmlformats.org/drawingml/2006/table">
@@ -3901,10 +3901,10 @@
                 <a:tableStyleId>{2D5ABB26-0587-4C30-8999-92F81FD0307C}</a:tableStyleId>
               </a:tblPr>
               <a:tblGrid>
-                <a:gridCol w="2017258"/>
-                <a:gridCol w="2934194"/>
-                <a:gridCol w="2934194"/>
-                <a:gridCol w="3025887"/>
+                <a:gridCol w="825242"/>
+                <a:gridCol w="3300968"/>
+                <a:gridCol w="3209275"/>
+                <a:gridCol w="3576049"/>
               </a:tblGrid>
               <a:tr h="502920">
                 <a:tc>
@@ -3920,7 +3920,7 @@
                           </a:solidFill>
                           <a:latin typeface="Calibri"/>
                         </a:rPr>
-                        <a:t>ACA</a:t>
+                        <a:t>Corte</a:t>
                       </a:r>
                     </a:p>
                   </a:txBody>
@@ -3943,7 +3943,7 @@
                           </a:solidFill>
                           <a:latin typeface="Calibri"/>
                         </a:rPr>
-                        <a:t>Qué entrega</a:t>
+                        <a:t>Qué hay en el aula (CDigital)</a:t>
                       </a:r>
                     </a:p>
                   </a:txBody>
@@ -3966,7 +3966,7 @@
                           </a:solidFill>
                           <a:latin typeface="Calibri"/>
                         </a:rPr>
-                        <a:t>Qué mira el Docente / el jurado</a:t>
+                        <a:t>Qué se prepara para eso</a:t>
                       </a:r>
                     </a:p>
                   </a:txBody>
@@ -4014,16 +4014,7 @@
                           </a:solidFill>
                           <a:latin typeface="Calibri"/>
                         </a:rPr>
-                        <a:t>ACA 1 · EV05</a:t>
-                      </a:r>
-                      <a:r>
-                        <a:rPr sz="1100" b="0" i="0">
-                          <a:solidFill>
-                            <a:srgbClr val="2B2B2B"/>
-                          </a:solidFill>
-                          <a:latin typeface="Calibri"/>
-                        </a:rPr>
-                        <a:t> (proceso académico)</a:t>
+                        <a:t>Corte 1</a:t>
                       </a:r>
                     </a:p>
                   </a:txBody>
@@ -4040,13 +4031,40 @@
                     <a:p>
                       <a:pPr algn="l"/>
                       <a:r>
+                        <a:rPr sz="1100" b="1" i="0">
+                          <a:solidFill>
+                            <a:srgbClr val="2B2B2B"/>
+                          </a:solidFill>
+                          <a:latin typeface="Calibri"/>
+                        </a:rPr>
+                        <a:t>Quiz 1</a:t>
+                      </a:r>
+                      <a:r>
                         <a:rPr sz="1100" b="0" i="0">
                           <a:solidFill>
                             <a:srgbClr val="2B2B2B"/>
                           </a:solidFill>
                           <a:latin typeface="Calibri"/>
                         </a:rPr>
-                        <a:t>El artículo y sus avances por sesión: introducción, marco, método, resultados, discusión y referencias</a:t>
+                        <a:t> y </a:t>
+                      </a:r>
+                      <a:r>
+                        <a:rPr sz="1100" b="1" i="0">
+                          <a:solidFill>
+                            <a:srgbClr val="2B2B2B"/>
+                          </a:solidFill>
+                          <a:latin typeface="Calibri"/>
+                        </a:rPr>
+                        <a:t>Parcial 1</a:t>
+                      </a:r>
+                      <a:r>
+                        <a:rPr sz="1100" b="0" i="0">
+                          <a:solidFill>
+                            <a:srgbClr val="2B2B2B"/>
+                          </a:solidFill>
+                          <a:latin typeface="Calibri"/>
+                        </a:rPr>
+                        <a:t>: cuestionarios que se resuelven en el aula, dentro de su ventana. No se sube archivo.</a:t>
                       </a:r>
                     </a:p>
                   </a:txBody>
@@ -4069,7 +4087,7 @@
                           </a:solidFill>
                           <a:latin typeface="Calibri"/>
                         </a:rPr>
-                        <a:t>Coherencia de cabo a rabo (problema → pregunta → objetivos → método → resultados → discusión) y referencias realmente citadas en el cuerpo</a:t>
+                        <a:t>Retoma del proyecto: pregunta, objetivos y título definitivos + estructura del artículo e introducción en plantilla APA CUN.</a:t>
                       </a:r>
                     </a:p>
                   </a:txBody>
@@ -4092,7 +4110,7 @@
                           </a:solidFill>
                           <a:latin typeface="Calibri"/>
                         </a:rPr>
-                        <a:t>Flojo: 50 referencias listadas y ninguna citada; resultados que no responden la pregunta · Bueno: cada sección se apoya en la anterior y la discusión dialoga con autores</a:t>
+                        <a:t>Flojo: repetir el TG2 sin revisarlo · Bueno: pregunta afinada, con lo reutilizado y lo reescrito ya decidido</a:t>
                       </a:r>
                     </a:p>
                   </a:txBody>
@@ -4117,16 +4135,7 @@
                           </a:solidFill>
                           <a:latin typeface="Calibri"/>
                         </a:rPr>
-                        <a:t>ACA 2 · EXAM</a:t>
-                      </a:r>
-                      <a:r>
-                        <a:rPr sz="1100" b="0" i="0">
-                          <a:solidFill>
-                            <a:srgbClr val="2B2B2B"/>
-                          </a:solidFill>
-                          <a:latin typeface="Calibri"/>
-                        </a:rPr>
-                        <a:t> (sustentación)</a:t>
+                        <a:t>Corte 2</a:t>
                       </a:r>
                     </a:p>
                   </a:txBody>
@@ -4143,13 +4152,40 @@
                     <a:p>
                       <a:pPr algn="l"/>
                       <a:r>
+                        <a:rPr sz="1100" b="1" i="0">
+                          <a:solidFill>
+                            <a:srgbClr val="2B2B2B"/>
+                          </a:solidFill>
+                          <a:latin typeface="Calibri"/>
+                        </a:rPr>
+                        <a:t>Quiz 2</a:t>
+                      </a:r>
+                      <a:r>
                         <a:rPr sz="1100" b="0" i="0">
                           <a:solidFill>
                             <a:srgbClr val="2B2B2B"/>
                           </a:solidFill>
                           <a:latin typeface="Calibri"/>
                         </a:rPr>
-                        <a:t>Defensa oral ante jurados, con el apoyo visual y las evidencias que pida el programa</a:t>
+                        <a:t> y </a:t>
+                      </a:r>
+                      <a:r>
+                        <a:rPr sz="1100" b="1" i="0">
+                          <a:solidFill>
+                            <a:srgbClr val="2B2B2B"/>
+                          </a:solidFill>
+                          <a:latin typeface="Calibri"/>
+                        </a:rPr>
+                        <a:t>Parcial 2</a:t>
+                      </a:r>
+                      <a:r>
+                        <a:rPr sz="1100" b="0" i="0">
+                          <a:solidFill>
+                            <a:srgbClr val="2B2B2B"/>
+                          </a:solidFill>
+                          <a:latin typeface="Calibri"/>
+                        </a:rPr>
+                        <a:t>: también cuestionarios en el aula.</a:t>
                       </a:r>
                     </a:p>
                   </a:txBody>
@@ -4172,7 +4208,7 @@
                           </a:solidFill>
                           <a:latin typeface="Calibri"/>
                         </a:rPr>
-                        <a:t>Dominio del propio trabajo: que explique decisiones, límites y hallazgos sin leer</a:t>
+                        <a:t>Referentes, método e instrumento; marco cerrado y primeros hallazgos escritos.</a:t>
                       </a:r>
                     </a:p>
                   </a:txBody>
@@ -4195,7 +4231,7 @@
                           </a:solidFill>
                           <a:latin typeface="Calibri"/>
                         </a:rPr>
-                        <a:t>Flojo: leer diapositivas y no saber por qué eligió ese método · Bueno: contar el trabajo en 10 minutos y responder preguntas difíciles con calma</a:t>
+                        <a:t>Flojo: 50 referencias listadas y ninguna citada · Bueno: cada sección se apoya en la anterior y las fuentes se usan como argumento</a:t>
                       </a:r>
                     </a:p>
                   </a:txBody>
@@ -4206,6 +4242,181 @@
                   </a:tcPr>
                 </a:tc>
               </a:tr>
+              <a:tr h="502920">
+                <a:tc>
+                  <a:txBody>
+                    <a:bodyPr/>
+                    <a:lstStyle/>
+                    <a:p>
+                      <a:pPr algn="l"/>
+                      <a:r>
+                        <a:rPr sz="1100" b="1" i="0">
+                          <a:solidFill>
+                            <a:srgbClr val="2B2B2B"/>
+                          </a:solidFill>
+                          <a:latin typeface="Calibri"/>
+                        </a:rPr>
+                        <a:t>Corte 3</a:t>
+                      </a:r>
+                    </a:p>
+                  </a:txBody>
+                  <a:tcPr anchor="ctr" marL="109728" marR="91440" marT="36576" marB="36576">
+                    <a:solidFill>
+                      <a:srgbClr val="FFFFFF"/>
+                    </a:solidFill>
+                  </a:tcPr>
+                </a:tc>
+                <a:tc>
+                  <a:txBody>
+                    <a:bodyPr/>
+                    <a:lstStyle/>
+                    <a:p>
+                      <a:pPr algn="l"/>
+                      <a:r>
+                        <a:rPr sz="1100" b="1" i="0">
+                          <a:solidFill>
+                            <a:srgbClr val="2B2B2B"/>
+                          </a:solidFill>
+                          <a:latin typeface="Calibri"/>
+                        </a:rPr>
+                        <a:t>ACA Final</a:t>
+                      </a:r>
+                      <a:r>
+                        <a:rPr sz="1100" b="0" i="0">
+                          <a:solidFill>
+                            <a:srgbClr val="2B2B2B"/>
+                          </a:solidFill>
+                          <a:latin typeface="Calibri"/>
+                        </a:rPr>
+                        <a:t> (tarea: el artículo, único documento que se sube) + </a:t>
+                      </a:r>
+                      <a:r>
+                        <a:rPr sz="1100" b="1" i="0">
+                          <a:solidFill>
+                            <a:srgbClr val="2B2B2B"/>
+                          </a:solidFill>
+                          <a:latin typeface="Calibri"/>
+                        </a:rPr>
+                        <a:t>Quiz 3</a:t>
+                      </a:r>
+                      <a:r>
+                        <a:rPr sz="1100" b="0" i="0">
+                          <a:solidFill>
+                            <a:srgbClr val="2B2B2B"/>
+                          </a:solidFill>
+                          <a:latin typeface="Calibri"/>
+                        </a:rPr>
+                        <a:t> + </a:t>
+                      </a:r>
+                      <a:r>
+                        <a:rPr sz="1100" b="1" i="0">
+                          <a:solidFill>
+                            <a:srgbClr val="2B2B2B"/>
+                          </a:solidFill>
+                          <a:latin typeface="Calibri"/>
+                        </a:rPr>
+                        <a:t>autoevaluación</a:t>
+                      </a:r>
+                      <a:r>
+                        <a:rPr sz="1100" b="0" i="0">
+                          <a:solidFill>
+                            <a:srgbClr val="2B2B2B"/>
+                          </a:solidFill>
+                          <a:latin typeface="Calibri"/>
+                        </a:rPr>
+                        <a:t> (cuestionario) y </a:t>
+                      </a:r>
+                      <a:r>
+                        <a:rPr sz="1100" b="1" i="0">
+                          <a:solidFill>
+                            <a:srgbClr val="2B2B2B"/>
+                          </a:solidFill>
+                          <a:latin typeface="Calibri"/>
+                        </a:rPr>
+                        <a:t>coevaluación</a:t>
+                      </a:r>
+                      <a:r>
+                        <a:rPr sz="1100" b="0" i="0">
+                          <a:solidFill>
+                            <a:srgbClr val="2B2B2B"/>
+                          </a:solidFill>
+                          <a:latin typeface="Calibri"/>
+                        </a:rPr>
+                        <a:t> (foro).</a:t>
+                      </a:r>
+                    </a:p>
+                  </a:txBody>
+                  <a:tcPr anchor="ctr" marL="109728" marR="91440" marT="36576" marB="36576">
+                    <a:solidFill>
+                      <a:srgbClr val="FFFFFF"/>
+                    </a:solidFill>
+                  </a:tcPr>
+                </a:tc>
+                <a:tc>
+                  <a:txBody>
+                    <a:bodyPr/>
+                    <a:lstStyle/>
+                    <a:p>
+                      <a:pPr algn="l"/>
+                      <a:r>
+                        <a:rPr sz="1100" b="0" i="0">
+                          <a:solidFill>
+                            <a:srgbClr val="2B2B2B"/>
+                          </a:solidFill>
+                          <a:latin typeface="Calibri"/>
+                        </a:rPr>
+                        <a:t>Artículo completo (resultados, discusión, conclusiones y referencias), póster, antiplagio y </a:t>
+                      </a:r>
+                      <a:r>
+                        <a:rPr sz="1100" b="1" i="0">
+                          <a:solidFill>
+                            <a:srgbClr val="2B2B2B"/>
+                          </a:solidFill>
+                          <a:latin typeface="Calibri"/>
+                        </a:rPr>
+                        <a:t>sustentación ante jurados</a:t>
+                      </a:r>
+                      <a:r>
+                        <a:rPr sz="1100" b="0" i="0">
+                          <a:solidFill>
+                            <a:srgbClr val="2B2B2B"/>
+                          </a:solidFill>
+                          <a:latin typeface="Calibri"/>
+                        </a:rPr>
+                        <a:t>.</a:t>
+                      </a:r>
+                    </a:p>
+                  </a:txBody>
+                  <a:tcPr anchor="ctr" marL="109728" marR="91440" marT="36576" marB="36576">
+                    <a:solidFill>
+                      <a:srgbClr val="FFFFFF"/>
+                    </a:solidFill>
+                  </a:tcPr>
+                </a:tc>
+                <a:tc>
+                  <a:txBody>
+                    <a:bodyPr/>
+                    <a:lstStyle/>
+                    <a:p>
+                      <a:pPr algn="l"/>
+                      <a:r>
+                        <a:rPr sz="1100" b="0" i="0">
+                          <a:solidFill>
+                            <a:srgbClr val="2B2B2B"/>
+                          </a:solidFill>
+                          <a:latin typeface="Calibri"/>
+                        </a:rPr>
+                        <a:t>Flojo: leer diapositivas y no saber por qué eligió ese método · Bueno: contar el trabajo en 10 minutos y responder preguntas difíciles con calma</a:t>
+                      </a:r>
+                    </a:p>
+                  </a:txBody>
+                  <a:tcPr anchor="ctr" marL="109728" marR="91440" marT="36576" marB="36576">
+                    <a:solidFill>
+                      <a:srgbClr val="FFFFFF"/>
+                    </a:solidFill>
+                  </a:tcPr>
+                </a:tc>
+              </a:tr>
             </a:tbl>
           </a:graphicData>
         </a:graphic>
@@ -4218,7 +4429,7 @@
         </p:nvSpPr>
         <p:spPr>
           <a:xfrm>
-            <a:off x="640080" y="3337560"/>
+            <a:off x="640080" y="3840480"/>
             <a:ext cx="10911535" cy="548640"/>
           </a:xfrm>
           <a:prstGeom prst="rect">
@@ -4239,7 +4450,7 @@
                 </a:solidFill>
                 <a:latin typeface="Calibri"/>
               </a:rPr>
-              <a:t>Enunciados completos, criterios y </a:t>
+              <a:t>La </a:t>
             </a:r>
             <a:r>
               <a:rPr sz="1200" b="1" i="1">
@@ -4248,7 +4459,7 @@
                 </a:solidFill>
                 <a:latin typeface="Calibri"/>
               </a:rPr>
-              <a:t>fechas exactas</a:t>
+              <a:t>sustentación</a:t>
             </a:r>
             <a:r>
               <a:rPr sz="1200" b="0" i="1">
@@ -4257,7 +4468,43 @@
                 </a:solidFill>
                 <a:latin typeface="Calibri"/>
               </a:rPr>
-              <a:t> por grupo: `Clases/Recursos/ACAs/` y CDigital. La defensa pesa tanto como todo el trabajo escrito: no se improvisa.</a:t>
+              <a:t> no tiene ítem propio en el libro de calificaciones: es requisito del programa y se prepara con el mismo artículo que califica la </a:t>
+            </a:r>
+            <a:r>
+              <a:rPr sz="1200" b="1" i="1">
+                <a:solidFill>
+                  <a:srgbClr val="2B2B2B"/>
+                </a:solidFill>
+                <a:latin typeface="Calibri"/>
+              </a:rPr>
+              <a:t>ACA Final</a:t>
+            </a:r>
+            <a:r>
+              <a:rPr sz="1200" b="0" i="1">
+                <a:solidFill>
+                  <a:srgbClr val="2B2B2B"/>
+                </a:solidFill>
+                <a:latin typeface="Calibri"/>
+              </a:rPr>
+              <a:t>. Pesos: slide «CÓMO SE EVALÚA». </a:t>
+            </a:r>
+            <a:r>
+              <a:rPr sz="1200" b="1" i="1">
+                <a:solidFill>
+                  <a:srgbClr val="2B2B2B"/>
+                </a:solidFill>
+                <a:latin typeface="Calibri"/>
+              </a:rPr>
+              <a:t>La ACA Final, la autoevaluación y la coevaluación cierran en fechas distintas según su grupo</a:t>
+            </a:r>
+            <a:r>
+              <a:rPr sz="1200" b="0" i="1">
+                <a:solidFill>
+                  <a:srgbClr val="2B2B2B"/>
+                </a:solidFill>
+                <a:latin typeface="Calibri"/>
+              </a:rPr>
+              <a:t>: revíselas en la Presentación del Curso.</a:t>
             </a:r>
           </a:p>
         </p:txBody>
@@ -4809,7 +5056,41 @@
                 </a:solidFill>
                 <a:latin typeface="Calibri"/>
               </a:rPr>
-              <a:t>Recepción y cierre varían por grupo.</a:t>
+              <a:t>Los quices y parciales no se suben:</a:t>
+            </a:r>
+            <a:r>
+              <a:rPr sz="1600" b="0" i="0">
+                <a:solidFill>
+                  <a:srgbClr val="2B2B2B"/>
+                </a:solidFill>
+                <a:latin typeface="Calibri"/>
+              </a:rPr>
+              <a:t> son cuestionarios que se resuelven en el aula dentro de su ventana, iguales para los tres grupos.</a:t>
+            </a:r>
+          </a:p>
+          <a:p>
+            <a:pPr>
+              <a:spcAft>
+                <a:spcPts val="1000"/>
+              </a:spcAft>
+            </a:pPr>
+            <a:r>
+              <a:rPr sz="1600" b="0" i="0">
+                <a:solidFill>
+                  <a:srgbClr val="2B2B2B"/>
+                </a:solidFill>
+                <a:latin typeface="Calibri"/>
+              </a:rPr>
+              <a:t>–   </a:t>
+            </a:r>
+            <a:r>
+              <a:rPr sz="1600" b="1" i="0">
+                <a:solidFill>
+                  <a:srgbClr val="2B2B2B"/>
+                </a:solidFill>
+                <a:latin typeface="Calibri"/>
+              </a:rPr>
+              <a:t>La ACA Final y la auto/coevaluación cierran por grupo.</a:t>
             </a:r>
             <a:r>
               <a:rPr sz="1600" b="0" i="0">
@@ -8415,7 +8696,7 @@
                 </a:solidFill>
                 <a:latin typeface="Calibri"/>
               </a:rPr>
-              <a:t>abra los enunciados de las ACAs</a:t>
+              <a:t>abra los enunciados</a:t>
             </a:r>
             <a:r>
               <a:rPr sz="1600" b="0" i="0">
@@ -8424,7 +8705,25 @@
                 </a:solidFill>
                 <a:latin typeface="Calibri"/>
               </a:rPr>
-              <a:t> en `Clases/Recursos/ACAs/`, con las fechas de su grupo.</a:t>
+              <a:t> de `Clases/Recursos/ACAs/` (artículo y sustentación): traen la ventana de la </a:t>
+            </a:r>
+            <a:r>
+              <a:rPr sz="1600" b="1" i="0">
+                <a:solidFill>
+                  <a:srgbClr val="2B2B2B"/>
+                </a:solidFill>
+                <a:latin typeface="Calibri"/>
+              </a:rPr>
+              <a:t>ACA Final</a:t>
+            </a:r>
+            <a:r>
+              <a:rPr sz="1600" b="0" i="0">
+                <a:solidFill>
+                  <a:srgbClr val="2B2B2B"/>
+                </a:solidFill>
+                <a:latin typeface="Calibri"/>
+              </a:rPr>
+              <a:t> de su grupo.</a:t>
             </a:r>
           </a:p>
         </p:txBody>
@@ -8801,7 +9100,7 @@
                 </a:solidFill>
                 <a:latin typeface="Calibri"/>
               </a:rPr>
-              <a:t>Las ACAs:</a:t>
+              <a:t>Cómo se evalúa:</a:t>
             </a:r>
             <a:r>
               <a:rPr sz="1600" b="0" i="0">
@@ -8810,7 +9109,7 @@
                 </a:solidFill>
                 <a:latin typeface="Calibri"/>
               </a:rPr>
-              <a:t> qué se entrega, cuánto pesa y dónde se sube.</a:t>
+              <a:t> qué ítems tiene el aula, cuánto pesa cada uno y qué se hace con él.</a:t>
             </a:r>
           </a:p>
           <a:p>
@@ -9558,25 +9857,7 @@
                 </a:solidFill>
                 <a:latin typeface="Calibri"/>
               </a:rPr>
-              <a:t>–   Abrir el enunciado de la </a:t>
-            </a:r>
-            <a:r>
-              <a:rPr sz="1600" b="1" i="0">
-                <a:solidFill>
-                  <a:srgbClr val="2B2B2B"/>
-                </a:solidFill>
-                <a:latin typeface="Calibri"/>
-              </a:rPr>
-              <a:t>ACA 1</a:t>
-            </a:r>
-            <a:r>
-              <a:rPr sz="1600" b="0" i="0">
-                <a:solidFill>
-                  <a:srgbClr val="2B2B2B"/>
-                </a:solidFill>
-                <a:latin typeface="Calibri"/>
-              </a:rPr>
-              <a:t> en `Clases/Recursos/ACAs/` y leerlo entero.</a:t>
+              <a:t>–   Abrir los enunciados de `Clases/Recursos/ACAs/`: son la guía escrita de lo que evalúa cada corte.</a:t>
             </a:r>
           </a:p>
         </p:txBody>
@@ -10743,7 +11024,7 @@
                 </a:solidFill>
                 <a:latin typeface="Calibri"/>
               </a:rPr>
-              <a:t>LAS ACAs — QUÉ SE EVALÚA</a:t>
+              <a:t>CÓMO SE EVALÚA — LOS ÍTEMS DEL AULA</a:t>
             </a:r>
           </a:p>
         </p:txBody>
@@ -10778,7 +11059,7 @@
                 </a:solidFill>
                 <a:latin typeface="Calibri"/>
               </a:rPr>
-              <a:t>Entrega oficial: </a:t>
+              <a:t>Evaluación y notas: solo en </a:t>
             </a:r>
             <a:r>
               <a:rPr sz="1500" b="1" i="0">
@@ -10788,6 +11069,33 @@
                 <a:latin typeface="Calibri"/>
               </a:rPr>
               <a:t>CDigital</a:t>
+            </a:r>
+            <a:r>
+              <a:rPr sz="1500" b="0" i="0">
+                <a:solidFill>
+                  <a:srgbClr val="2B2B2B"/>
+                </a:solidFill>
+                <a:latin typeface="Calibri"/>
+              </a:rPr>
+              <a:t> · los pesos suman </a:t>
+            </a:r>
+            <a:r>
+              <a:rPr sz="1500" b="1" i="0">
+                <a:solidFill>
+                  <a:srgbClr val="2B2B2B"/>
+                </a:solidFill>
+                <a:latin typeface="Calibri"/>
+              </a:rPr>
+              <a:t>100%</a:t>
+            </a:r>
+            <a:r>
+              <a:rPr sz="1500" b="0" i="0">
+                <a:solidFill>
+                  <a:srgbClr val="2B2B2B"/>
+                </a:solidFill>
+                <a:latin typeface="Calibri"/>
+              </a:rPr>
+              <a:t> · fechas: enunciados y Presentación del Curso</a:t>
             </a:r>
           </a:p>
         </p:txBody>
@@ -10802,7 +11110,7 @@
         </p:nvGraphicFramePr>
         <p:xfrm>
           <a:off x="640080" y="2011679"/>
-          <a:ext cx="10911533" cy="1508760"/>
+          <a:ext cx="10911533" cy="4297680"/>
         </p:xfrm>
         <a:graphic>
           <a:graphicData uri="http://schemas.openxmlformats.org/drawingml/2006/table">
@@ -10811,11 +11119,13 @@
                 <a:tableStyleId>{2D5ABB26-0587-4C30-8999-92F81FD0307C}</a:tableStyleId>
               </a:tblPr>
               <a:tblGrid>
-                <a:gridCol w="1993453"/>
-                <a:gridCol w="7763976"/>
-                <a:gridCol w="1154104"/>
+                <a:gridCol w="1833871"/>
+                <a:gridCol w="1192016"/>
+                <a:gridCol w="1192016"/>
+                <a:gridCol w="825242"/>
+                <a:gridCol w="5868388"/>
               </a:tblGrid>
-              <a:tr h="502920">
+              <a:tr h="477520">
                 <a:tc>
                   <a:txBody>
                     <a:bodyPr/>
@@ -10829,7 +11139,7 @@
                           </a:solidFill>
                           <a:latin typeface="Calibri"/>
                         </a:rPr>
-                        <a:t>ACA</a:t>
+                        <a:t>Ítem en CDigital</a:t>
                       </a:r>
                     </a:p>
                   </a:txBody>
@@ -10852,7 +11162,7 @@
                           </a:solidFill>
                           <a:latin typeface="Calibri"/>
                         </a:rPr>
-                        <a:t>Qué entregas</a:t>
+                        <a:t>Tipo</a:t>
                       </a:r>
                     </a:p>
                   </a:txBody>
@@ -10875,7 +11185,53 @@
                           </a:solidFill>
                           <a:latin typeface="Calibri"/>
                         </a:rPr>
+                        <a:t>Corte (peso)</a:t>
+                      </a:r>
+                    </a:p>
+                  </a:txBody>
+                  <a:tcPr anchor="ctr" marL="109728" marR="91440" marT="36576" marB="36576">
+                    <a:solidFill>
+                      <a:srgbClr val="0C2340"/>
+                    </a:solidFill>
+                  </a:tcPr>
+                </a:tc>
+                <a:tc>
+                  <a:txBody>
+                    <a:bodyPr/>
+                    <a:lstStyle/>
+                    <a:p>
+                      <a:pPr algn="l"/>
+                      <a:r>
+                        <a:rPr sz="1300" b="1" i="0">
+                          <a:solidFill>
+                            <a:srgbClr val="FFFFFF"/>
+                          </a:solidFill>
+                          <a:latin typeface="Calibri"/>
+                        </a:rPr>
                         <a:t>Peso</a:t>
+                      </a:r>
+                    </a:p>
+                  </a:txBody>
+                  <a:tcPr anchor="ctr" marL="109728" marR="91440" marT="36576" marB="36576">
+                    <a:solidFill>
+                      <a:srgbClr val="0C2340"/>
+                    </a:solidFill>
+                  </a:tcPr>
+                </a:tc>
+                <a:tc>
+                  <a:txBody>
+                    <a:bodyPr/>
+                    <a:lstStyle/>
+                    <a:p>
+                      <a:pPr algn="l"/>
+                      <a:r>
+                        <a:rPr sz="1300" b="1" i="0">
+                          <a:solidFill>
+                            <a:srgbClr val="FFFFFF"/>
+                          </a:solidFill>
+                          <a:latin typeface="Calibri"/>
+                        </a:rPr>
+                        <a:t>Qué haces con él</a:t>
                       </a:r>
                     </a:p>
                   </a:txBody>
@@ -10886,7 +11242,7 @@
                   </a:tcPr>
                 </a:tc>
               </a:tr>
-              <a:tr h="502920">
+              <a:tr h="477520">
                 <a:tc>
                   <a:txBody>
                     <a:bodyPr/>
@@ -10894,13 +11250,13 @@
                     <a:p>
                       <a:pPr algn="l"/>
                       <a:r>
-                        <a:rPr sz="1200" b="0" i="0">
+                        <a:rPr sz="1100" b="1" i="0">
                           <a:solidFill>
                             <a:srgbClr val="2B2B2B"/>
                           </a:solidFill>
                           <a:latin typeface="Calibri"/>
                         </a:rPr>
-                        <a:t>ACA 1 (EV05)</a:t>
+                        <a:t>Quiz 1</a:t>
                       </a:r>
                     </a:p>
                   </a:txBody>
@@ -10917,13 +11273,13 @@
                     <a:p>
                       <a:pPr algn="l"/>
                       <a:r>
-                        <a:rPr sz="1200" b="0" i="0">
+                        <a:rPr sz="1100" b="0" i="0">
                           <a:solidFill>
                             <a:srgbClr val="2B2B2B"/>
                           </a:solidFill>
                           <a:latin typeface="Calibri"/>
                         </a:rPr>
-                        <a:t>Proceso académico (artículo)</a:t>
+                        <a:t>Cuestionario</a:t>
                       </a:r>
                     </a:p>
                   </a:txBody>
@@ -10940,13 +11296,59 @@
                     <a:p>
                       <a:pPr algn="l"/>
                       <a:r>
-                        <a:rPr sz="1200" b="0" i="0">
+                        <a:rPr sz="1100" b="0" i="0">
                           <a:solidFill>
                             <a:srgbClr val="2B2B2B"/>
                           </a:solidFill>
                           <a:latin typeface="Calibri"/>
                         </a:rPr>
-                        <a:t>50%</a:t>
+                        <a:t>1 (30%)</a:t>
+                      </a:r>
+                    </a:p>
+                  </a:txBody>
+                  <a:tcPr anchor="ctr" marL="109728" marR="91440" marT="36576" marB="36576">
+                    <a:solidFill>
+                      <a:srgbClr val="FFFFFF"/>
+                    </a:solidFill>
+                  </a:tcPr>
+                </a:tc>
+                <a:tc>
+                  <a:txBody>
+                    <a:bodyPr/>
+                    <a:lstStyle/>
+                    <a:p>
+                      <a:pPr algn="l"/>
+                      <a:r>
+                        <a:rPr sz="1100" b="1" i="0">
+                          <a:solidFill>
+                            <a:srgbClr val="2B2B2B"/>
+                          </a:solidFill>
+                          <a:latin typeface="Calibri"/>
+                        </a:rPr>
+                        <a:t>6%</a:t>
+                      </a:r>
+                    </a:p>
+                  </a:txBody>
+                  <a:tcPr anchor="ctr" marL="109728" marR="91440" marT="36576" marB="36576">
+                    <a:solidFill>
+                      <a:srgbClr val="FFFFFF"/>
+                    </a:solidFill>
+                  </a:tcPr>
+                </a:tc>
+                <a:tc>
+                  <a:txBody>
+                    <a:bodyPr/>
+                    <a:lstStyle/>
+                    <a:p>
+                      <a:pPr algn="l"/>
+                      <a:r>
+                        <a:rPr sz="1100" b="0" i="0">
+                          <a:solidFill>
+                            <a:srgbClr val="2B2B2B"/>
+                          </a:solidFill>
+                          <a:latin typeface="Calibri"/>
+                        </a:rPr>
+                        <a:t>Lo resuelves en CDigital dentro de su ventana. No se sube archivo.</a:t>
                       </a:r>
                     </a:p>
                   </a:txBody>
@@ -10957,7 +11359,7 @@
                   </a:tcPr>
                 </a:tc>
               </a:tr>
-              <a:tr h="502920">
+              <a:tr h="477520">
                 <a:tc>
                   <a:txBody>
                     <a:bodyPr/>
@@ -10965,13 +11367,13 @@
                     <a:p>
                       <a:pPr algn="l"/>
                       <a:r>
-                        <a:rPr sz="1200" b="0" i="0">
+                        <a:rPr sz="1100" b="1" i="0">
                           <a:solidFill>
                             <a:srgbClr val="2B2B2B"/>
                           </a:solidFill>
                           <a:latin typeface="Calibri"/>
                         </a:rPr>
-                        <a:t>ACA 2 (EXAM)</a:t>
+                        <a:t>Parcial 1</a:t>
                       </a:r>
                     </a:p>
                   </a:txBody>
@@ -10988,13 +11390,13 @@
                     <a:p>
                       <a:pPr algn="l"/>
                       <a:r>
-                        <a:rPr sz="1200" b="0" i="0">
+                        <a:rPr sz="1100" b="0" i="0">
                           <a:solidFill>
                             <a:srgbClr val="2B2B2B"/>
                           </a:solidFill>
                           <a:latin typeface="Calibri"/>
                         </a:rPr>
-                        <a:t>Sustentación ante jurados</a:t>
+                        <a:t>Cuestionario</a:t>
                       </a:r>
                     </a:p>
                   </a:txBody>
@@ -11011,13 +11413,761 @@
                     <a:p>
                       <a:pPr algn="l"/>
                       <a:r>
-                        <a:rPr sz="1200" b="0" i="0">
+                        <a:rPr sz="1100" b="0" i="0">
                           <a:solidFill>
                             <a:srgbClr val="2B2B2B"/>
                           </a:solidFill>
                           <a:latin typeface="Calibri"/>
                         </a:rPr>
-                        <a:t>50%</a:t>
+                        <a:t>1 (30%)</a:t>
+                      </a:r>
+                    </a:p>
+                  </a:txBody>
+                  <a:tcPr anchor="ctr" marL="109728" marR="91440" marT="36576" marB="36576">
+                    <a:solidFill>
+                      <a:srgbClr val="F2F2F2"/>
+                    </a:solidFill>
+                  </a:tcPr>
+                </a:tc>
+                <a:tc>
+                  <a:txBody>
+                    <a:bodyPr/>
+                    <a:lstStyle/>
+                    <a:p>
+                      <a:pPr algn="l"/>
+                      <a:r>
+                        <a:rPr sz="1100" b="1" i="0">
+                          <a:solidFill>
+                            <a:srgbClr val="2B2B2B"/>
+                          </a:solidFill>
+                          <a:latin typeface="Calibri"/>
+                        </a:rPr>
+                        <a:t>24%</a:t>
+                      </a:r>
+                    </a:p>
+                  </a:txBody>
+                  <a:tcPr anchor="ctr" marL="109728" marR="91440" marT="36576" marB="36576">
+                    <a:solidFill>
+                      <a:srgbClr val="F2F2F2"/>
+                    </a:solidFill>
+                  </a:tcPr>
+                </a:tc>
+                <a:tc>
+                  <a:txBody>
+                    <a:bodyPr/>
+                    <a:lstStyle/>
+                    <a:p>
+                      <a:pPr algn="l"/>
+                      <a:r>
+                        <a:rPr sz="1100" b="0" i="0">
+                          <a:solidFill>
+                            <a:srgbClr val="2B2B2B"/>
+                          </a:solidFill>
+                          <a:latin typeface="Calibri"/>
+                        </a:rPr>
+                        <a:t>Lo resuelves en CDigital dentro de su ventana. No se sube archivo.</a:t>
+                      </a:r>
+                    </a:p>
+                  </a:txBody>
+                  <a:tcPr anchor="ctr" marL="109728" marR="91440" marT="36576" marB="36576">
+                    <a:solidFill>
+                      <a:srgbClr val="F2F2F2"/>
+                    </a:solidFill>
+                  </a:tcPr>
+                </a:tc>
+              </a:tr>
+              <a:tr h="477520">
+                <a:tc>
+                  <a:txBody>
+                    <a:bodyPr/>
+                    <a:lstStyle/>
+                    <a:p>
+                      <a:pPr algn="l"/>
+                      <a:r>
+                        <a:rPr sz="1100" b="1" i="0">
+                          <a:solidFill>
+                            <a:srgbClr val="2B2B2B"/>
+                          </a:solidFill>
+                          <a:latin typeface="Calibri"/>
+                        </a:rPr>
+                        <a:t>Quiz 2</a:t>
+                      </a:r>
+                    </a:p>
+                  </a:txBody>
+                  <a:tcPr anchor="ctr" marL="109728" marR="91440" marT="36576" marB="36576">
+                    <a:solidFill>
+                      <a:srgbClr val="FFFFFF"/>
+                    </a:solidFill>
+                  </a:tcPr>
+                </a:tc>
+                <a:tc>
+                  <a:txBody>
+                    <a:bodyPr/>
+                    <a:lstStyle/>
+                    <a:p>
+                      <a:pPr algn="l"/>
+                      <a:r>
+                        <a:rPr sz="1100" b="0" i="0">
+                          <a:solidFill>
+                            <a:srgbClr val="2B2B2B"/>
+                          </a:solidFill>
+                          <a:latin typeface="Calibri"/>
+                        </a:rPr>
+                        <a:t>Cuestionario</a:t>
+                      </a:r>
+                    </a:p>
+                  </a:txBody>
+                  <a:tcPr anchor="ctr" marL="109728" marR="91440" marT="36576" marB="36576">
+                    <a:solidFill>
+                      <a:srgbClr val="FFFFFF"/>
+                    </a:solidFill>
+                  </a:tcPr>
+                </a:tc>
+                <a:tc>
+                  <a:txBody>
+                    <a:bodyPr/>
+                    <a:lstStyle/>
+                    <a:p>
+                      <a:pPr algn="l"/>
+                      <a:r>
+                        <a:rPr sz="1100" b="0" i="0">
+                          <a:solidFill>
+                            <a:srgbClr val="2B2B2B"/>
+                          </a:solidFill>
+                          <a:latin typeface="Calibri"/>
+                        </a:rPr>
+                        <a:t>2 (30%)</a:t>
+                      </a:r>
+                    </a:p>
+                  </a:txBody>
+                  <a:tcPr anchor="ctr" marL="109728" marR="91440" marT="36576" marB="36576">
+                    <a:solidFill>
+                      <a:srgbClr val="FFFFFF"/>
+                    </a:solidFill>
+                  </a:tcPr>
+                </a:tc>
+                <a:tc>
+                  <a:txBody>
+                    <a:bodyPr/>
+                    <a:lstStyle/>
+                    <a:p>
+                      <a:pPr algn="l"/>
+                      <a:r>
+                        <a:rPr sz="1100" b="1" i="0">
+                          <a:solidFill>
+                            <a:srgbClr val="2B2B2B"/>
+                          </a:solidFill>
+                          <a:latin typeface="Calibri"/>
+                        </a:rPr>
+                        <a:t>9%</a:t>
+                      </a:r>
+                    </a:p>
+                  </a:txBody>
+                  <a:tcPr anchor="ctr" marL="109728" marR="91440" marT="36576" marB="36576">
+                    <a:solidFill>
+                      <a:srgbClr val="FFFFFF"/>
+                    </a:solidFill>
+                  </a:tcPr>
+                </a:tc>
+                <a:tc>
+                  <a:txBody>
+                    <a:bodyPr/>
+                    <a:lstStyle/>
+                    <a:p>
+                      <a:pPr algn="l"/>
+                      <a:r>
+                        <a:rPr sz="1100" b="0" i="0">
+                          <a:solidFill>
+                            <a:srgbClr val="2B2B2B"/>
+                          </a:solidFill>
+                          <a:latin typeface="Calibri"/>
+                        </a:rPr>
+                        <a:t>Lo resuelves en CDigital dentro de su ventana. No se sube archivo.</a:t>
+                      </a:r>
+                    </a:p>
+                  </a:txBody>
+                  <a:tcPr anchor="ctr" marL="109728" marR="91440" marT="36576" marB="36576">
+                    <a:solidFill>
+                      <a:srgbClr val="FFFFFF"/>
+                    </a:solidFill>
+                  </a:tcPr>
+                </a:tc>
+              </a:tr>
+              <a:tr h="477520">
+                <a:tc>
+                  <a:txBody>
+                    <a:bodyPr/>
+                    <a:lstStyle/>
+                    <a:p>
+                      <a:pPr algn="l"/>
+                      <a:r>
+                        <a:rPr sz="1100" b="1" i="0">
+                          <a:solidFill>
+                            <a:srgbClr val="2B2B2B"/>
+                          </a:solidFill>
+                          <a:latin typeface="Calibri"/>
+                        </a:rPr>
+                        <a:t>Parcial 2</a:t>
+                      </a:r>
+                    </a:p>
+                  </a:txBody>
+                  <a:tcPr anchor="ctr" marL="109728" marR="91440" marT="36576" marB="36576">
+                    <a:solidFill>
+                      <a:srgbClr val="F2F2F2"/>
+                    </a:solidFill>
+                  </a:tcPr>
+                </a:tc>
+                <a:tc>
+                  <a:txBody>
+                    <a:bodyPr/>
+                    <a:lstStyle/>
+                    <a:p>
+                      <a:pPr algn="l"/>
+                      <a:r>
+                        <a:rPr sz="1100" b="0" i="0">
+                          <a:solidFill>
+                            <a:srgbClr val="2B2B2B"/>
+                          </a:solidFill>
+                          <a:latin typeface="Calibri"/>
+                        </a:rPr>
+                        <a:t>Cuestionario</a:t>
+                      </a:r>
+                    </a:p>
+                  </a:txBody>
+                  <a:tcPr anchor="ctr" marL="109728" marR="91440" marT="36576" marB="36576">
+                    <a:solidFill>
+                      <a:srgbClr val="F2F2F2"/>
+                    </a:solidFill>
+                  </a:tcPr>
+                </a:tc>
+                <a:tc>
+                  <a:txBody>
+                    <a:bodyPr/>
+                    <a:lstStyle/>
+                    <a:p>
+                      <a:pPr algn="l"/>
+                      <a:r>
+                        <a:rPr sz="1100" b="0" i="0">
+                          <a:solidFill>
+                            <a:srgbClr val="2B2B2B"/>
+                          </a:solidFill>
+                          <a:latin typeface="Calibri"/>
+                        </a:rPr>
+                        <a:t>2 (30%)</a:t>
+                      </a:r>
+                    </a:p>
+                  </a:txBody>
+                  <a:tcPr anchor="ctr" marL="109728" marR="91440" marT="36576" marB="36576">
+                    <a:solidFill>
+                      <a:srgbClr val="F2F2F2"/>
+                    </a:solidFill>
+                  </a:tcPr>
+                </a:tc>
+                <a:tc>
+                  <a:txBody>
+                    <a:bodyPr/>
+                    <a:lstStyle/>
+                    <a:p>
+                      <a:pPr algn="l"/>
+                      <a:r>
+                        <a:rPr sz="1100" b="1" i="0">
+                          <a:solidFill>
+                            <a:srgbClr val="2B2B2B"/>
+                          </a:solidFill>
+                          <a:latin typeface="Calibri"/>
+                        </a:rPr>
+                        <a:t>21%</a:t>
+                      </a:r>
+                    </a:p>
+                  </a:txBody>
+                  <a:tcPr anchor="ctr" marL="109728" marR="91440" marT="36576" marB="36576">
+                    <a:solidFill>
+                      <a:srgbClr val="F2F2F2"/>
+                    </a:solidFill>
+                  </a:tcPr>
+                </a:tc>
+                <a:tc>
+                  <a:txBody>
+                    <a:bodyPr/>
+                    <a:lstStyle/>
+                    <a:p>
+                      <a:pPr algn="l"/>
+                      <a:r>
+                        <a:rPr sz="1100" b="0" i="0">
+                          <a:solidFill>
+                            <a:srgbClr val="2B2B2B"/>
+                          </a:solidFill>
+                          <a:latin typeface="Calibri"/>
+                        </a:rPr>
+                        <a:t>Lo resuelves en CDigital dentro de su ventana. No se sube archivo.</a:t>
+                      </a:r>
+                    </a:p>
+                  </a:txBody>
+                  <a:tcPr anchor="ctr" marL="109728" marR="91440" marT="36576" marB="36576">
+                    <a:solidFill>
+                      <a:srgbClr val="F2F2F2"/>
+                    </a:solidFill>
+                  </a:tcPr>
+                </a:tc>
+              </a:tr>
+              <a:tr h="477520">
+                <a:tc>
+                  <a:txBody>
+                    <a:bodyPr/>
+                    <a:lstStyle/>
+                    <a:p>
+                      <a:pPr algn="l"/>
+                      <a:r>
+                        <a:rPr sz="1100" b="1" i="0">
+                          <a:solidFill>
+                            <a:srgbClr val="2B2B2B"/>
+                          </a:solidFill>
+                          <a:latin typeface="Calibri"/>
+                        </a:rPr>
+                        <a:t>ACA Final</a:t>
+                      </a:r>
+                    </a:p>
+                  </a:txBody>
+                  <a:tcPr anchor="ctr" marL="109728" marR="91440" marT="36576" marB="36576">
+                    <a:solidFill>
+                      <a:srgbClr val="FFFFFF"/>
+                    </a:solidFill>
+                  </a:tcPr>
+                </a:tc>
+                <a:tc>
+                  <a:txBody>
+                    <a:bodyPr/>
+                    <a:lstStyle/>
+                    <a:p>
+                      <a:pPr algn="l"/>
+                      <a:r>
+                        <a:rPr sz="1100" b="0" i="0">
+                          <a:solidFill>
+                            <a:srgbClr val="2B2B2B"/>
+                          </a:solidFill>
+                          <a:latin typeface="Calibri"/>
+                        </a:rPr>
+                        <a:t>Tarea</a:t>
+                      </a:r>
+                    </a:p>
+                  </a:txBody>
+                  <a:tcPr anchor="ctr" marL="109728" marR="91440" marT="36576" marB="36576">
+                    <a:solidFill>
+                      <a:srgbClr val="FFFFFF"/>
+                    </a:solidFill>
+                  </a:tcPr>
+                </a:tc>
+                <a:tc>
+                  <a:txBody>
+                    <a:bodyPr/>
+                    <a:lstStyle/>
+                    <a:p>
+                      <a:pPr algn="l"/>
+                      <a:r>
+                        <a:rPr sz="1100" b="0" i="0">
+                          <a:solidFill>
+                            <a:srgbClr val="2B2B2B"/>
+                          </a:solidFill>
+                          <a:latin typeface="Calibri"/>
+                        </a:rPr>
+                        <a:t>3 (40%)</a:t>
+                      </a:r>
+                    </a:p>
+                  </a:txBody>
+                  <a:tcPr anchor="ctr" marL="109728" marR="91440" marT="36576" marB="36576">
+                    <a:solidFill>
+                      <a:srgbClr val="FFFFFF"/>
+                    </a:solidFill>
+                  </a:tcPr>
+                </a:tc>
+                <a:tc>
+                  <a:txBody>
+                    <a:bodyPr/>
+                    <a:lstStyle/>
+                    <a:p>
+                      <a:pPr algn="l"/>
+                      <a:r>
+                        <a:rPr sz="1100" b="1" i="0">
+                          <a:solidFill>
+                            <a:srgbClr val="2B2B2B"/>
+                          </a:solidFill>
+                          <a:latin typeface="Calibri"/>
+                        </a:rPr>
+                        <a:t>32%</a:t>
+                      </a:r>
+                    </a:p>
+                  </a:txBody>
+                  <a:tcPr anchor="ctr" marL="109728" marR="91440" marT="36576" marB="36576">
+                    <a:solidFill>
+                      <a:srgbClr val="FFFFFF"/>
+                    </a:solidFill>
+                  </a:tcPr>
+                </a:tc>
+                <a:tc>
+                  <a:txBody>
+                    <a:bodyPr/>
+                    <a:lstStyle/>
+                    <a:p>
+                      <a:pPr algn="l"/>
+                      <a:r>
+                        <a:rPr sz="1100" b="0" i="0">
+                          <a:solidFill>
+                            <a:srgbClr val="2B2B2B"/>
+                          </a:solidFill>
+                          <a:latin typeface="Calibri"/>
+                        </a:rPr>
+                        <a:t>Subes el documento (plantilla APA CUN) al espacio de la tarea.</a:t>
+                      </a:r>
+                    </a:p>
+                  </a:txBody>
+                  <a:tcPr anchor="ctr" marL="109728" marR="91440" marT="36576" marB="36576">
+                    <a:solidFill>
+                      <a:srgbClr val="FFFFFF"/>
+                    </a:solidFill>
+                  </a:tcPr>
+                </a:tc>
+              </a:tr>
+              <a:tr h="477520">
+                <a:tc>
+                  <a:txBody>
+                    <a:bodyPr/>
+                    <a:lstStyle/>
+                    <a:p>
+                      <a:pPr algn="l"/>
+                      <a:r>
+                        <a:rPr sz="1100" b="1" i="0">
+                          <a:solidFill>
+                            <a:srgbClr val="2B2B2B"/>
+                          </a:solidFill>
+                          <a:latin typeface="Calibri"/>
+                        </a:rPr>
+                        <a:t>Quiz 3</a:t>
+                      </a:r>
+                    </a:p>
+                  </a:txBody>
+                  <a:tcPr anchor="ctr" marL="109728" marR="91440" marT="36576" marB="36576">
+                    <a:solidFill>
+                      <a:srgbClr val="F2F2F2"/>
+                    </a:solidFill>
+                  </a:tcPr>
+                </a:tc>
+                <a:tc>
+                  <a:txBody>
+                    <a:bodyPr/>
+                    <a:lstStyle/>
+                    <a:p>
+                      <a:pPr algn="l"/>
+                      <a:r>
+                        <a:rPr sz="1100" b="0" i="0">
+                          <a:solidFill>
+                            <a:srgbClr val="2B2B2B"/>
+                          </a:solidFill>
+                          <a:latin typeface="Calibri"/>
+                        </a:rPr>
+                        <a:t>Cuestionario</a:t>
+                      </a:r>
+                    </a:p>
+                  </a:txBody>
+                  <a:tcPr anchor="ctr" marL="109728" marR="91440" marT="36576" marB="36576">
+                    <a:solidFill>
+                      <a:srgbClr val="F2F2F2"/>
+                    </a:solidFill>
+                  </a:tcPr>
+                </a:tc>
+                <a:tc>
+                  <a:txBody>
+                    <a:bodyPr/>
+                    <a:lstStyle/>
+                    <a:p>
+                      <a:pPr algn="l"/>
+                      <a:r>
+                        <a:rPr sz="1100" b="0" i="0">
+                          <a:solidFill>
+                            <a:srgbClr val="2B2B2B"/>
+                          </a:solidFill>
+                          <a:latin typeface="Calibri"/>
+                        </a:rPr>
+                        <a:t>3 (40%)</a:t>
+                      </a:r>
+                    </a:p>
+                  </a:txBody>
+                  <a:tcPr anchor="ctr" marL="109728" marR="91440" marT="36576" marB="36576">
+                    <a:solidFill>
+                      <a:srgbClr val="F2F2F2"/>
+                    </a:solidFill>
+                  </a:tcPr>
+                </a:tc>
+                <a:tc>
+                  <a:txBody>
+                    <a:bodyPr/>
+                    <a:lstStyle/>
+                    <a:p>
+                      <a:pPr algn="l"/>
+                      <a:r>
+                        <a:rPr sz="1100" b="1" i="0">
+                          <a:solidFill>
+                            <a:srgbClr val="2B2B2B"/>
+                          </a:solidFill>
+                          <a:latin typeface="Calibri"/>
+                        </a:rPr>
+                        <a:t>4%</a:t>
+                      </a:r>
+                    </a:p>
+                  </a:txBody>
+                  <a:tcPr anchor="ctr" marL="109728" marR="91440" marT="36576" marB="36576">
+                    <a:solidFill>
+                      <a:srgbClr val="F2F2F2"/>
+                    </a:solidFill>
+                  </a:tcPr>
+                </a:tc>
+                <a:tc>
+                  <a:txBody>
+                    <a:bodyPr/>
+                    <a:lstStyle/>
+                    <a:p>
+                      <a:pPr algn="l"/>
+                      <a:r>
+                        <a:rPr sz="1100" b="0" i="0">
+                          <a:solidFill>
+                            <a:srgbClr val="2B2B2B"/>
+                          </a:solidFill>
+                          <a:latin typeface="Calibri"/>
+                        </a:rPr>
+                        <a:t>Lo resuelves en CDigital dentro de su ventana. No se sube archivo.</a:t>
+                      </a:r>
+                    </a:p>
+                  </a:txBody>
+                  <a:tcPr anchor="ctr" marL="109728" marR="91440" marT="36576" marB="36576">
+                    <a:solidFill>
+                      <a:srgbClr val="F2F2F2"/>
+                    </a:solidFill>
+                  </a:tcPr>
+                </a:tc>
+              </a:tr>
+              <a:tr h="477520">
+                <a:tc>
+                  <a:txBody>
+                    <a:bodyPr/>
+                    <a:lstStyle/>
+                    <a:p>
+                      <a:pPr algn="l"/>
+                      <a:r>
+                        <a:rPr sz="1100" b="1" i="0">
+                          <a:solidFill>
+                            <a:srgbClr val="2B2B2B"/>
+                          </a:solidFill>
+                          <a:latin typeface="Calibri"/>
+                        </a:rPr>
+                        <a:t>Autoevaluación</a:t>
+                      </a:r>
+                    </a:p>
+                  </a:txBody>
+                  <a:tcPr anchor="ctr" marL="109728" marR="91440" marT="36576" marB="36576">
+                    <a:solidFill>
+                      <a:srgbClr val="FFFFFF"/>
+                    </a:solidFill>
+                  </a:tcPr>
+                </a:tc>
+                <a:tc>
+                  <a:txBody>
+                    <a:bodyPr/>
+                    <a:lstStyle/>
+                    <a:p>
+                      <a:pPr algn="l"/>
+                      <a:r>
+                        <a:rPr sz="1100" b="0" i="0">
+                          <a:solidFill>
+                            <a:srgbClr val="2B2B2B"/>
+                          </a:solidFill>
+                          <a:latin typeface="Calibri"/>
+                        </a:rPr>
+                        <a:t>Cuestionario</a:t>
+                      </a:r>
+                    </a:p>
+                  </a:txBody>
+                  <a:tcPr anchor="ctr" marL="109728" marR="91440" marT="36576" marB="36576">
+                    <a:solidFill>
+                      <a:srgbClr val="FFFFFF"/>
+                    </a:solidFill>
+                  </a:tcPr>
+                </a:tc>
+                <a:tc>
+                  <a:txBody>
+                    <a:bodyPr/>
+                    <a:lstStyle/>
+                    <a:p>
+                      <a:pPr algn="l"/>
+                      <a:r>
+                        <a:rPr sz="1100" b="0" i="0">
+                          <a:solidFill>
+                            <a:srgbClr val="2B2B2B"/>
+                          </a:solidFill>
+                          <a:latin typeface="Calibri"/>
+                        </a:rPr>
+                        <a:t>3 (40%)</a:t>
+                      </a:r>
+                    </a:p>
+                  </a:txBody>
+                  <a:tcPr anchor="ctr" marL="109728" marR="91440" marT="36576" marB="36576">
+                    <a:solidFill>
+                      <a:srgbClr val="FFFFFF"/>
+                    </a:solidFill>
+                  </a:tcPr>
+                </a:tc>
+                <a:tc>
+                  <a:txBody>
+                    <a:bodyPr/>
+                    <a:lstStyle/>
+                    <a:p>
+                      <a:pPr algn="l"/>
+                      <a:r>
+                        <a:rPr sz="1100" b="1" i="0">
+                          <a:solidFill>
+                            <a:srgbClr val="2B2B2B"/>
+                          </a:solidFill>
+                          <a:latin typeface="Calibri"/>
+                        </a:rPr>
+                        <a:t>2%</a:t>
+                      </a:r>
+                    </a:p>
+                  </a:txBody>
+                  <a:tcPr anchor="ctr" marL="109728" marR="91440" marT="36576" marB="36576">
+                    <a:solidFill>
+                      <a:srgbClr val="FFFFFF"/>
+                    </a:solidFill>
+                  </a:tcPr>
+                </a:tc>
+                <a:tc>
+                  <a:txBody>
+                    <a:bodyPr/>
+                    <a:lstStyle/>
+                    <a:p>
+                      <a:pPr algn="l"/>
+                      <a:r>
+                        <a:rPr sz="1100" b="0" i="0">
+                          <a:solidFill>
+                            <a:srgbClr val="2B2B2B"/>
+                          </a:solidFill>
+                          <a:latin typeface="Calibri"/>
+                        </a:rPr>
+                        <a:t>La diligencias tú mismo en el aula (cuestionario individual).</a:t>
+                      </a:r>
+                    </a:p>
+                  </a:txBody>
+                  <a:tcPr anchor="ctr" marL="109728" marR="91440" marT="36576" marB="36576">
+                    <a:solidFill>
+                      <a:srgbClr val="FFFFFF"/>
+                    </a:solidFill>
+                  </a:tcPr>
+                </a:tc>
+              </a:tr>
+              <a:tr h="477520">
+                <a:tc>
+                  <a:txBody>
+                    <a:bodyPr/>
+                    <a:lstStyle/>
+                    <a:p>
+                      <a:pPr algn="l"/>
+                      <a:r>
+                        <a:rPr sz="1100" b="1" i="0">
+                          <a:solidFill>
+                            <a:srgbClr val="2B2B2B"/>
+                          </a:solidFill>
+                          <a:latin typeface="Calibri"/>
+                        </a:rPr>
+                        <a:t>Coevaluación</a:t>
+                      </a:r>
+                    </a:p>
+                  </a:txBody>
+                  <a:tcPr anchor="ctr" marL="109728" marR="91440" marT="36576" marB="36576">
+                    <a:solidFill>
+                      <a:srgbClr val="F2F2F2"/>
+                    </a:solidFill>
+                  </a:tcPr>
+                </a:tc>
+                <a:tc>
+                  <a:txBody>
+                    <a:bodyPr/>
+                    <a:lstStyle/>
+                    <a:p>
+                      <a:pPr algn="l"/>
+                      <a:r>
+                        <a:rPr sz="1100" b="0" i="0">
+                          <a:solidFill>
+                            <a:srgbClr val="2B2B2B"/>
+                          </a:solidFill>
+                          <a:latin typeface="Calibri"/>
+                        </a:rPr>
+                        <a:t>Foro</a:t>
+                      </a:r>
+                    </a:p>
+                  </a:txBody>
+                  <a:tcPr anchor="ctr" marL="109728" marR="91440" marT="36576" marB="36576">
+                    <a:solidFill>
+                      <a:srgbClr val="F2F2F2"/>
+                    </a:solidFill>
+                  </a:tcPr>
+                </a:tc>
+                <a:tc>
+                  <a:txBody>
+                    <a:bodyPr/>
+                    <a:lstStyle/>
+                    <a:p>
+                      <a:pPr algn="l"/>
+                      <a:r>
+                        <a:rPr sz="1100" b="0" i="0">
+                          <a:solidFill>
+                            <a:srgbClr val="2B2B2B"/>
+                          </a:solidFill>
+                          <a:latin typeface="Calibri"/>
+                        </a:rPr>
+                        <a:t>3 (40%)</a:t>
+                      </a:r>
+                    </a:p>
+                  </a:txBody>
+                  <a:tcPr anchor="ctr" marL="109728" marR="91440" marT="36576" marB="36576">
+                    <a:solidFill>
+                      <a:srgbClr val="F2F2F2"/>
+                    </a:solidFill>
+                  </a:tcPr>
+                </a:tc>
+                <a:tc>
+                  <a:txBody>
+                    <a:bodyPr/>
+                    <a:lstStyle/>
+                    <a:p>
+                      <a:pPr algn="l"/>
+                      <a:r>
+                        <a:rPr sz="1100" b="1" i="0">
+                          <a:solidFill>
+                            <a:srgbClr val="2B2B2B"/>
+                          </a:solidFill>
+                          <a:latin typeface="Calibri"/>
+                        </a:rPr>
+                        <a:t>2%</a:t>
+                      </a:r>
+                    </a:p>
+                  </a:txBody>
+                  <a:tcPr anchor="ctr" marL="109728" marR="91440" marT="36576" marB="36576">
+                    <a:solidFill>
+                      <a:srgbClr val="F2F2F2"/>
+                    </a:solidFill>
+                  </a:tcPr>
+                </a:tc>
+                <a:tc>
+                  <a:txBody>
+                    <a:bodyPr/>
+                    <a:lstStyle/>
+                    <a:p>
+                      <a:pPr algn="l"/>
+                      <a:r>
+                        <a:rPr sz="1100" b="0" i="0">
+                          <a:solidFill>
+                            <a:srgbClr val="2B2B2B"/>
+                          </a:solidFill>
+                          <a:latin typeface="Calibri"/>
+                        </a:rPr>
+                        <a:t>Participas en el foro valorando el trabajo de tus pares.</a:t>
                       </a:r>
                     </a:p>
                   </a:txBody>
@@ -11035,58 +12185,6 @@
       <p:sp>
         <p:nvSpPr>
           <p:cNvPr id="6" name="TextBox 5"/>
-          <p:cNvSpPr txBox="1"/>
-          <p:nvPr/>
-        </p:nvSpPr>
-        <p:spPr>
-          <a:xfrm>
-            <a:off x="640080" y="3657599"/>
-            <a:ext cx="10911535" cy="548640"/>
-          </a:xfrm>
-          <a:prstGeom prst="rect">
-            <a:avLst/>
-          </a:prstGeom>
-          <a:noFill/>
-        </p:spPr>
-        <p:txBody>
-          <a:bodyPr wrap="square" anchor="t" lIns="0" rIns="0" tIns="0" bIns="0">
-            <a:spAutoFit/>
-          </a:bodyPr>
-          <a:lstStyle/>
-          <a:p>
-            <a:r>
-              <a:rPr sz="1200" b="0" i="1">
-                <a:solidFill>
-                  <a:srgbClr val="2B2B2B"/>
-                </a:solidFill>
-                <a:latin typeface="Calibri"/>
-              </a:rPr>
-              <a:t>Enunciado completo y </a:t>
-            </a:r>
-            <a:r>
-              <a:rPr sz="1200" b="1" i="1">
-                <a:solidFill>
-                  <a:srgbClr val="2B2B2B"/>
-                </a:solidFill>
-                <a:latin typeface="Calibri"/>
-              </a:rPr>
-              <a:t>fechas exactas</a:t>
-            </a:r>
-            <a:r>
-              <a:rPr sz="1200" b="0" i="1">
-                <a:solidFill>
-                  <a:srgbClr val="2B2B2B"/>
-                </a:solidFill>
-                <a:latin typeface="Calibri"/>
-              </a:rPr>
-              <a:t>: `Clases/Recursos/ACAs/` y la Presentación del Curso.</a:t>
-            </a:r>
-          </a:p>
-        </p:txBody>
-      </p:sp>
-      <p:sp>
-        <p:nvSpPr>
-          <p:cNvPr id="7" name="TextBox 6"/>
           <p:cNvSpPr txBox="1"/>
           <p:nvPr/>
         </p:nvSpPr>
@@ -12173,17 +13271,106 @@
           </a:p>
         </p:txBody>
       </p:sp>
+      <p:sp>
+        <p:nvSpPr>
+          <p:cNvPr id="4" name="TextBox 3"/>
+          <p:cNvSpPr txBox="1"/>
+          <p:nvPr/>
+        </p:nvSpPr>
+        <p:spPr>
+          <a:xfrm>
+            <a:off x="640080" y="1280160"/>
+            <a:ext cx="10911535" cy="411480"/>
+          </a:xfrm>
+          <a:prstGeom prst="rect">
+            <a:avLst/>
+          </a:prstGeom>
+          <a:noFill/>
+        </p:spPr>
+        <p:txBody>
+          <a:bodyPr wrap="square" anchor="t" lIns="0" rIns="0" tIns="0" bIns="0">
+            <a:spAutoFit/>
+          </a:bodyPr>
+          <a:lstStyle/>
+          <a:p>
+            <a:pPr algn="ctr"/>
+            <a:r>
+              <a:rPr sz="1500" b="0" i="0">
+                <a:solidFill>
+                  <a:srgbClr val="2B2B2B"/>
+                </a:solidFill>
+                <a:latin typeface="Calibri"/>
+              </a:rPr>
+              <a:t>Tres tramos: </a:t>
+            </a:r>
+            <a:r>
+              <a:rPr sz="1500" b="1" i="0">
+                <a:solidFill>
+                  <a:srgbClr val="2B2B2B"/>
+                </a:solidFill>
+                <a:latin typeface="Calibri"/>
+              </a:rPr>
+              <a:t>escribir</a:t>
+            </a:r>
+            <a:r>
+              <a:rPr sz="1500" b="0" i="0">
+                <a:solidFill>
+                  <a:srgbClr val="2B2B2B"/>
+                </a:solidFill>
+                <a:latin typeface="Calibri"/>
+              </a:rPr>
+              <a:t> el artículo (02–10), </a:t>
+            </a:r>
+            <a:r>
+              <a:rPr sz="1500" b="1" i="0">
+                <a:solidFill>
+                  <a:srgbClr val="2B2B2B"/>
+                </a:solidFill>
+                <a:latin typeface="Calibri"/>
+              </a:rPr>
+              <a:t>alistar</a:t>
+            </a:r>
+            <a:r>
+              <a:rPr sz="1500" b="0" i="0">
+                <a:solidFill>
+                  <a:srgbClr val="2B2B2B"/>
+                </a:solidFill>
+                <a:latin typeface="Calibri"/>
+              </a:rPr>
+              <a:t> póster y antiplagio (11) y </a:t>
+            </a:r>
+            <a:r>
+              <a:rPr sz="1500" b="1" i="0">
+                <a:solidFill>
+                  <a:srgbClr val="2B2B2B"/>
+                </a:solidFill>
+                <a:latin typeface="Calibri"/>
+              </a:rPr>
+              <a:t>defender y cerrar</a:t>
+            </a:r>
+            <a:r>
+              <a:rPr sz="1500" b="0" i="0">
+                <a:solidFill>
+                  <a:srgbClr val="2B2B2B"/>
+                </a:solidFill>
+                <a:latin typeface="Calibri"/>
+              </a:rPr>
+              <a:t> (12–15).</a:t>
+            </a:r>
+          </a:p>
+        </p:txBody>
+      </p:sp>
       <p:graphicFrame>
         <p:nvGraphicFramePr>
-          <p:cNvPr id="4" name="Table 3"/>
+          <p:cNvPr id="5" name="Table 4"/>
           <p:cNvGraphicFramePr>
             <a:graphicFrameLocks noGrp="1"/>
           </p:cNvGraphicFramePr>
           <p:nvPr/>
         </p:nvGraphicFramePr>
         <p:xfrm>
-          <a:off x="640080" y="1691639"/>
-          <a:ext cx="10911533" cy="4526280"/>
+          <a:off x="640080" y="2011679"/>
+          <a:ext cx="10911533" cy="4297680"/>
         </p:xfrm>
         <a:graphic>
           <a:graphicData uri="http://schemas.openxmlformats.org/drawingml/2006/table">
@@ -12196,7 +13383,7 @@
                 <a:gridCol w="4951452"/>
                 <a:gridCol w="4951452"/>
               </a:tblGrid>
-              <a:tr h="502920">
+              <a:tr h="477520">
                 <a:tc>
                   <a:txBody>
                     <a:bodyPr/>
@@ -12267,7 +13454,7 @@
                   </a:tcPr>
                 </a:tc>
               </a:tr>
-              <a:tr h="502920">
+              <a:tr h="477520">
                 <a:tc>
                   <a:txBody>
                     <a:bodyPr/>
@@ -12304,7 +13491,7 @@
                           </a:solidFill>
                           <a:latin typeface="Calibri"/>
                         </a:rPr>
-                        <a:t>Presentación del curso, del Docente, de ustedes y de las ACAs (</a:t>
+                        <a:t>Presentación del curso, del Docente, de ustedes y de cómo se evalúa (</a:t>
                       </a:r>
                       <a:r>
                         <a:rPr sz="1100" b="1" i="0">
@@ -12356,7 +13543,7 @@
                   </a:tcPr>
                 </a:tc>
               </a:tr>
-              <a:tr h="502920">
+              <a:tr h="477520">
                 <a:tc>
                   <a:txBody>
                     <a:bodyPr/>
@@ -12427,7 +13614,7 @@
                   </a:tcPr>
                 </a:tc>
               </a:tr>
-              <a:tr h="502920">
+              <a:tr h="477520">
                 <a:tc>
                   <a:txBody>
                     <a:bodyPr/>
@@ -12498,7 +13685,7 @@
                   </a:tcPr>
                 </a:tc>
               </a:tr>
-              <a:tr h="502920">
+              <a:tr h="477520">
                 <a:tc>
                   <a:txBody>
                     <a:bodyPr/>
@@ -12569,7 +13756,7 @@
                   </a:tcPr>
                 </a:tc>
               </a:tr>
-              <a:tr h="502920">
+              <a:tr h="477520">
                 <a:tc>
                   <a:txBody>
                     <a:bodyPr/>
@@ -12640,7 +13827,7 @@
                   </a:tcPr>
                 </a:tc>
               </a:tr>
-              <a:tr h="502920">
+              <a:tr h="477520">
                 <a:tc>
                   <a:txBody>
                     <a:bodyPr/>
@@ -12711,7 +13898,7 @@
                   </a:tcPr>
                 </a:tc>
               </a:tr>
-              <a:tr h="502920">
+              <a:tr h="477520">
                 <a:tc>
                   <a:txBody>
                     <a:bodyPr/>
@@ -12782,7 +13969,7 @@
                   </a:tcPr>
                 </a:tc>
               </a:tr>
-              <a:tr h="502920">
+              <a:tr h="477520">
                 <a:tc>
                   <a:txBody>
                     <a:bodyPr/>
@@ -12857,94 +14044,6 @@
           </a:graphicData>
         </a:graphic>
       </p:graphicFrame>
-      <p:sp>
-        <p:nvSpPr>
-          <p:cNvPr id="5" name="TextBox 4"/>
-          <p:cNvSpPr txBox="1"/>
-          <p:nvPr/>
-        </p:nvSpPr>
-        <p:spPr>
-          <a:xfrm>
-            <a:off x="640080" y="6080760"/>
-            <a:ext cx="10911535" cy="548640"/>
-          </a:xfrm>
-          <a:prstGeom prst="rect">
-            <a:avLst/>
-          </a:prstGeom>
-          <a:noFill/>
-        </p:spPr>
-        <p:txBody>
-          <a:bodyPr wrap="square" anchor="t" lIns="0" rIns="0" tIns="0" bIns="0">
-            <a:spAutoFit/>
-          </a:bodyPr>
-          <a:lstStyle/>
-          <a:p>
-            <a:r>
-              <a:rPr sz="1200" b="0" i="1">
-                <a:solidFill>
-                  <a:srgbClr val="2B2B2B"/>
-                </a:solidFill>
-                <a:latin typeface="Calibri"/>
-              </a:rPr>
-              <a:t>Tres tramos: </a:t>
-            </a:r>
-            <a:r>
-              <a:rPr sz="1200" b="1" i="1">
-                <a:solidFill>
-                  <a:srgbClr val="2B2B2B"/>
-                </a:solidFill>
-                <a:latin typeface="Calibri"/>
-              </a:rPr>
-              <a:t>escribir</a:t>
-            </a:r>
-            <a:r>
-              <a:rPr sz="1200" b="0" i="1">
-                <a:solidFill>
-                  <a:srgbClr val="2B2B2B"/>
-                </a:solidFill>
-                <a:latin typeface="Calibri"/>
-              </a:rPr>
-              <a:t> el artículo (02–10), </a:t>
-            </a:r>
-            <a:r>
-              <a:rPr sz="1200" b="1" i="1">
-                <a:solidFill>
-                  <a:srgbClr val="2B2B2B"/>
-                </a:solidFill>
-                <a:latin typeface="Calibri"/>
-              </a:rPr>
-              <a:t>alistar</a:t>
-            </a:r>
-            <a:r>
-              <a:rPr sz="1200" b="0" i="1">
-                <a:solidFill>
-                  <a:srgbClr val="2B2B2B"/>
-                </a:solidFill>
-                <a:latin typeface="Calibri"/>
-              </a:rPr>
-              <a:t> póster y antiplagio (11) y </a:t>
-            </a:r>
-            <a:r>
-              <a:rPr sz="1200" b="1" i="1">
-                <a:solidFill>
-                  <a:srgbClr val="2B2B2B"/>
-                </a:solidFill>
-                <a:latin typeface="Calibri"/>
-              </a:rPr>
-              <a:t>defender y cerrar</a:t>
-            </a:r>
-            <a:r>
-              <a:rPr sz="1200" b="0" i="1">
-                <a:solidFill>
-                  <a:srgbClr val="2B2B2B"/>
-                </a:solidFill>
-                <a:latin typeface="Calibri"/>
-              </a:rPr>
-              <a:t> (12–15).</a:t>
-            </a:r>
-          </a:p>
-        </p:txBody>
-      </p:sp>
       <p:sp>
         <p:nvSpPr>
           <p:cNvPr id="6" name="TextBox 5"/>

--- a/Pregrado/Trabajo de grado 3/Clases/Sesion 01 - Presentación del curso · docente · estudiantes · ACAs/Presentacion.pptx
+++ b/Pregrado/Trabajo de grado 3/Clases/Sesion 01 - Presentación del curso · docente · estudiantes · ACAs/Presentacion.pptx
@@ -27,6 +27,7 @@
     <p:sldId id="275" r:id="rId26"/>
     <p:sldId id="276" r:id="rId27"/>
     <p:sldId id="277" r:id="rId28"/>
+    <p:sldId id="278" r:id="rId29"/>
   </p:sldIdLst>
   <p:sldSz cx="12191695" cy="6858000" type="screen4x3"/>
   <p:notesSz cx="6858000" cy="9144000"/>
@@ -3478,6 +3479,793 @@
                 </a:solidFill>
                 <a:latin typeface="Calibri"/>
               </a:rPr>
+              <a:t>Mapa del curso (2/2): cerrar, defender y entregar</a:t>
+            </a:r>
+          </a:p>
+        </p:txBody>
+      </p:sp>
+      <p:graphicFrame>
+        <p:nvGraphicFramePr>
+          <p:cNvPr id="4" name="Table 3"/>
+          <p:cNvGraphicFramePr>
+            <a:graphicFrameLocks noGrp="1"/>
+          </p:cNvGraphicFramePr>
+          <p:nvPr/>
+        </p:nvGraphicFramePr>
+        <p:xfrm>
+          <a:off x="640080" y="1691639"/>
+          <a:ext cx="10911533" cy="4023360"/>
+        </p:xfrm>
+        <a:graphic>
+          <a:graphicData uri="http://schemas.openxmlformats.org/drawingml/2006/table">
+            <a:tbl>
+              <a:tblPr>
+                <a:tableStyleId>{2D5ABB26-0587-4C30-8999-92F81FD0307C}</a:tableStyleId>
+              </a:tblPr>
+              <a:tblGrid>
+                <a:gridCol w="1008629"/>
+                <a:gridCol w="4951452"/>
+                <a:gridCol w="4951452"/>
+              </a:tblGrid>
+              <a:tr h="502920">
+                <a:tc>
+                  <a:txBody>
+                    <a:bodyPr/>
+                    <a:lstStyle/>
+                    <a:p>
+                      <a:pPr algn="l"/>
+                      <a:r>
+                        <a:rPr sz="1300" b="1" i="0">
+                          <a:solidFill>
+                            <a:srgbClr val="FFFFFF"/>
+                          </a:solidFill>
+                          <a:latin typeface="Calibri"/>
+                        </a:rPr>
+                        <a:t>Sesión</a:t>
+                      </a:r>
+                    </a:p>
+                  </a:txBody>
+                  <a:tcPr anchor="ctr" marL="109728" marR="91440" marT="36576" marB="36576">
+                    <a:solidFill>
+                      <a:srgbClr val="0C2340"/>
+                    </a:solidFill>
+                  </a:tcPr>
+                </a:tc>
+                <a:tc>
+                  <a:txBody>
+                    <a:bodyPr/>
+                    <a:lstStyle/>
+                    <a:p>
+                      <a:pPr algn="l"/>
+                      <a:r>
+                        <a:rPr sz="1300" b="1" i="0">
+                          <a:solidFill>
+                            <a:srgbClr val="FFFFFF"/>
+                          </a:solidFill>
+                          <a:latin typeface="Calibri"/>
+                        </a:rPr>
+                        <a:t>De qué se ocupa</a:t>
+                      </a:r>
+                    </a:p>
+                  </a:txBody>
+                  <a:tcPr anchor="ctr" marL="109728" marR="91440" marT="36576" marB="36576">
+                    <a:solidFill>
+                      <a:srgbClr val="0C2340"/>
+                    </a:solidFill>
+                  </a:tcPr>
+                </a:tc>
+                <a:tc>
+                  <a:txBody>
+                    <a:bodyPr/>
+                    <a:lstStyle/>
+                    <a:p>
+                      <a:pPr algn="l"/>
+                      <a:r>
+                        <a:rPr sz="1300" b="1" i="0">
+                          <a:solidFill>
+                            <a:srgbClr val="FFFFFF"/>
+                          </a:solidFill>
+                          <a:latin typeface="Calibri"/>
+                        </a:rPr>
+                        <a:t>Qué queda listo</a:t>
+                      </a:r>
+                    </a:p>
+                  </a:txBody>
+                  <a:tcPr anchor="ctr" marL="109728" marR="91440" marT="36576" marB="36576">
+                    <a:solidFill>
+                      <a:srgbClr val="0C2340"/>
+                    </a:solidFill>
+                  </a:tcPr>
+                </a:tc>
+              </a:tr>
+              <a:tr h="502920">
+                <a:tc>
+                  <a:txBody>
+                    <a:bodyPr/>
+                    <a:lstStyle/>
+                    <a:p>
+                      <a:pPr algn="l"/>
+                      <a:r>
+                        <a:rPr sz="1100" b="1" i="0">
+                          <a:solidFill>
+                            <a:srgbClr val="2B2B2B"/>
+                          </a:solidFill>
+                          <a:latin typeface="Calibri"/>
+                        </a:rPr>
+                        <a:t>09</a:t>
+                      </a:r>
+                    </a:p>
+                  </a:txBody>
+                  <a:tcPr anchor="ctr" marL="109728" marR="91440" marT="36576" marB="36576">
+                    <a:solidFill>
+                      <a:srgbClr val="FFFFFF"/>
+                    </a:solidFill>
+                  </a:tcPr>
+                </a:tc>
+                <a:tc>
+                  <a:txBody>
+                    <a:bodyPr/>
+                    <a:lstStyle/>
+                    <a:p>
+                      <a:pPr algn="l"/>
+                      <a:r>
+                        <a:rPr sz="1100" b="0" i="0">
+                          <a:solidFill>
+                            <a:srgbClr val="2B2B2B"/>
+                          </a:solidFill>
+                          <a:latin typeface="Calibri"/>
+                        </a:rPr>
+                        <a:t>Resultados, discusión y relación con referentes</a:t>
+                      </a:r>
+                    </a:p>
+                  </a:txBody>
+                  <a:tcPr anchor="ctr" marL="109728" marR="91440" marT="36576" marB="36576">
+                    <a:solidFill>
+                      <a:srgbClr val="FFFFFF"/>
+                    </a:solidFill>
+                  </a:tcPr>
+                </a:tc>
+                <a:tc>
+                  <a:txBody>
+                    <a:bodyPr/>
+                    <a:lstStyle/>
+                    <a:p>
+                      <a:pPr algn="l"/>
+                      <a:r>
+                        <a:rPr sz="1100" b="0" i="0">
+                          <a:solidFill>
+                            <a:srgbClr val="2B2B2B"/>
+                          </a:solidFill>
+                          <a:latin typeface="Calibri"/>
+                        </a:rPr>
+                        <a:t>Borrador de resultados y discusión</a:t>
+                      </a:r>
+                    </a:p>
+                  </a:txBody>
+                  <a:tcPr anchor="ctr" marL="109728" marR="91440" marT="36576" marB="36576">
+                    <a:solidFill>
+                      <a:srgbClr val="FFFFFF"/>
+                    </a:solidFill>
+                  </a:tcPr>
+                </a:tc>
+              </a:tr>
+              <a:tr h="502920">
+                <a:tc>
+                  <a:txBody>
+                    <a:bodyPr/>
+                    <a:lstStyle/>
+                    <a:p>
+                      <a:pPr algn="l"/>
+                      <a:r>
+                        <a:rPr sz="1100" b="1" i="0">
+                          <a:solidFill>
+                            <a:srgbClr val="2B2B2B"/>
+                          </a:solidFill>
+                          <a:latin typeface="Calibri"/>
+                        </a:rPr>
+                        <a:t>10</a:t>
+                      </a:r>
+                    </a:p>
+                  </a:txBody>
+                  <a:tcPr anchor="ctr" marL="109728" marR="91440" marT="36576" marB="36576">
+                    <a:solidFill>
+                      <a:srgbClr val="F2F2F2"/>
+                    </a:solidFill>
+                  </a:tcPr>
+                </a:tc>
+                <a:tc>
+                  <a:txBody>
+                    <a:bodyPr/>
+                    <a:lstStyle/>
+                    <a:p>
+                      <a:pPr algn="l"/>
+                      <a:r>
+                        <a:rPr sz="1100" b="0" i="0">
+                          <a:solidFill>
+                            <a:srgbClr val="2B2B2B"/>
+                          </a:solidFill>
+                          <a:latin typeface="Calibri"/>
+                        </a:rPr>
+                        <a:t>Resumen, palabras clave UNESCO, conclusiones y referencias</a:t>
+                      </a:r>
+                    </a:p>
+                  </a:txBody>
+                  <a:tcPr anchor="ctr" marL="109728" marR="91440" marT="36576" marB="36576">
+                    <a:solidFill>
+                      <a:srgbClr val="F2F2F2"/>
+                    </a:solidFill>
+                  </a:tcPr>
+                </a:tc>
+                <a:tc>
+                  <a:txBody>
+                    <a:bodyPr/>
+                    <a:lstStyle/>
+                    <a:p>
+                      <a:pPr algn="l"/>
+                      <a:r>
+                        <a:rPr sz="1100" b="0" i="0">
+                          <a:solidFill>
+                            <a:srgbClr val="2B2B2B"/>
+                          </a:solidFill>
+                          <a:latin typeface="Calibri"/>
+                        </a:rPr>
+                        <a:t>Artículo completo de punta a punta</a:t>
+                      </a:r>
+                    </a:p>
+                  </a:txBody>
+                  <a:tcPr anchor="ctr" marL="109728" marR="91440" marT="36576" marB="36576">
+                    <a:solidFill>
+                      <a:srgbClr val="F2F2F2"/>
+                    </a:solidFill>
+                  </a:tcPr>
+                </a:tc>
+              </a:tr>
+              <a:tr h="502920">
+                <a:tc>
+                  <a:txBody>
+                    <a:bodyPr/>
+                    <a:lstStyle/>
+                    <a:p>
+                      <a:pPr algn="l"/>
+                      <a:r>
+                        <a:rPr sz="1100" b="1" i="0">
+                          <a:solidFill>
+                            <a:srgbClr val="2B2B2B"/>
+                          </a:solidFill>
+                          <a:latin typeface="Calibri"/>
+                        </a:rPr>
+                        <a:t>11</a:t>
+                      </a:r>
+                    </a:p>
+                  </a:txBody>
+                  <a:tcPr anchor="ctr" marL="109728" marR="91440" marT="36576" marB="36576">
+                    <a:solidFill>
+                      <a:srgbClr val="FFFFFF"/>
+                    </a:solidFill>
+                  </a:tcPr>
+                </a:tc>
+                <a:tc>
+                  <a:txBody>
+                    <a:bodyPr/>
+                    <a:lstStyle/>
+                    <a:p>
+                      <a:pPr algn="l"/>
+                      <a:r>
+                        <a:rPr sz="1100" b="0" i="0">
+                          <a:solidFill>
+                            <a:srgbClr val="2B2B2B"/>
+                          </a:solidFill>
+                          <a:latin typeface="Calibri"/>
+                        </a:rPr>
+                        <a:t>Póster · evidencias · verificación antiplagio</a:t>
+                      </a:r>
+                    </a:p>
+                  </a:txBody>
+                  <a:tcPr anchor="ctr" marL="109728" marR="91440" marT="36576" marB="36576">
+                    <a:solidFill>
+                      <a:srgbClr val="FFFFFF"/>
+                    </a:solidFill>
+                  </a:tcPr>
+                </a:tc>
+                <a:tc>
+                  <a:txBody>
+                    <a:bodyPr/>
+                    <a:lstStyle/>
+                    <a:p>
+                      <a:pPr algn="l"/>
+                      <a:r>
+                        <a:rPr sz="1100" b="0" i="0">
+                          <a:solidFill>
+                            <a:srgbClr val="2B2B2B"/>
+                          </a:solidFill>
+                          <a:latin typeface="Calibri"/>
+                        </a:rPr>
+                        <a:t>Póster de una página y revisión de similitud</a:t>
+                      </a:r>
+                    </a:p>
+                  </a:txBody>
+                  <a:tcPr anchor="ctr" marL="109728" marR="91440" marT="36576" marB="36576">
+                    <a:solidFill>
+                      <a:srgbClr val="FFFFFF"/>
+                    </a:solidFill>
+                  </a:tcPr>
+                </a:tc>
+              </a:tr>
+              <a:tr h="502920">
+                <a:tc>
+                  <a:txBody>
+                    <a:bodyPr/>
+                    <a:lstStyle/>
+                    <a:p>
+                      <a:pPr algn="l"/>
+                      <a:r>
+                        <a:rPr sz="1100" b="1" i="0">
+                          <a:solidFill>
+                            <a:srgbClr val="2B2B2B"/>
+                          </a:solidFill>
+                          <a:latin typeface="Calibri"/>
+                        </a:rPr>
+                        <a:t>12</a:t>
+                      </a:r>
+                    </a:p>
+                  </a:txBody>
+                  <a:tcPr anchor="ctr" marL="109728" marR="91440" marT="36576" marB="36576">
+                    <a:solidFill>
+                      <a:srgbClr val="F2F2F2"/>
+                    </a:solidFill>
+                  </a:tcPr>
+                </a:tc>
+                <a:tc>
+                  <a:txBody>
+                    <a:bodyPr/>
+                    <a:lstStyle/>
+                    <a:p>
+                      <a:pPr algn="l"/>
+                      <a:r>
+                        <a:rPr sz="1100" b="0" i="0">
+                          <a:solidFill>
+                            <a:srgbClr val="2B2B2B"/>
+                          </a:solidFill>
+                          <a:latin typeface="Calibri"/>
+                        </a:rPr>
+                        <a:t>Sustentación ante jurados</a:t>
+                      </a:r>
+                    </a:p>
+                  </a:txBody>
+                  <a:tcPr anchor="ctr" marL="109728" marR="91440" marT="36576" marB="36576">
+                    <a:solidFill>
+                      <a:srgbClr val="F2F2F2"/>
+                    </a:solidFill>
+                  </a:tcPr>
+                </a:tc>
+                <a:tc>
+                  <a:txBody>
+                    <a:bodyPr/>
+                    <a:lstStyle/>
+                    <a:p>
+                      <a:pPr algn="l"/>
+                      <a:r>
+                        <a:rPr sz="1100" b="0" i="0">
+                          <a:solidFill>
+                            <a:srgbClr val="2B2B2B"/>
+                          </a:solidFill>
+                          <a:latin typeface="Calibri"/>
+                        </a:rPr>
+                        <a:t>Defensa presentada</a:t>
+                      </a:r>
+                    </a:p>
+                  </a:txBody>
+                  <a:tcPr anchor="ctr" marL="109728" marR="91440" marT="36576" marB="36576">
+                    <a:solidFill>
+                      <a:srgbClr val="F2F2F2"/>
+                    </a:solidFill>
+                  </a:tcPr>
+                </a:tc>
+              </a:tr>
+              <a:tr h="502920">
+                <a:tc>
+                  <a:txBody>
+                    <a:bodyPr/>
+                    <a:lstStyle/>
+                    <a:p>
+                      <a:pPr algn="l"/>
+                      <a:r>
+                        <a:rPr sz="1100" b="1" i="0">
+                          <a:solidFill>
+                            <a:srgbClr val="2B2B2B"/>
+                          </a:solidFill>
+                          <a:latin typeface="Calibri"/>
+                        </a:rPr>
+                        <a:t>13</a:t>
+                      </a:r>
+                    </a:p>
+                  </a:txBody>
+                  <a:tcPr anchor="ctr" marL="109728" marR="91440" marT="36576" marB="36576">
+                    <a:solidFill>
+                      <a:srgbClr val="FFFFFF"/>
+                    </a:solidFill>
+                  </a:tcPr>
+                </a:tc>
+                <a:tc>
+                  <a:txBody>
+                    <a:bodyPr/>
+                    <a:lstStyle/>
+                    <a:p>
+                      <a:pPr algn="l"/>
+                      <a:r>
+                        <a:rPr sz="1100" b="0" i="0">
+                          <a:solidFill>
+                            <a:srgbClr val="2B2B2B"/>
+                          </a:solidFill>
+                          <a:latin typeface="Calibri"/>
+                        </a:rPr>
+                        <a:t>Entregables para repositorio institucional</a:t>
+                      </a:r>
+                    </a:p>
+                  </a:txBody>
+                  <a:tcPr anchor="ctr" marL="109728" marR="91440" marT="36576" marB="36576">
+                    <a:solidFill>
+                      <a:srgbClr val="FFFFFF"/>
+                    </a:solidFill>
+                  </a:tcPr>
+                </a:tc>
+                <a:tc>
+                  <a:txBody>
+                    <a:bodyPr/>
+                    <a:lstStyle/>
+                    <a:p>
+                      <a:pPr algn="l"/>
+                      <a:r>
+                        <a:rPr sz="1100" b="0" i="0">
+                          <a:solidFill>
+                            <a:srgbClr val="2B2B2B"/>
+                          </a:solidFill>
+                          <a:latin typeface="Calibri"/>
+                        </a:rPr>
+                        <a:t>Paquete final verificado</a:t>
+                      </a:r>
+                    </a:p>
+                  </a:txBody>
+                  <a:tcPr anchor="ctr" marL="109728" marR="91440" marT="36576" marB="36576">
+                    <a:solidFill>
+                      <a:srgbClr val="FFFFFF"/>
+                    </a:solidFill>
+                  </a:tcPr>
+                </a:tc>
+              </a:tr>
+              <a:tr h="502920">
+                <a:tc>
+                  <a:txBody>
+                    <a:bodyPr/>
+                    <a:lstStyle/>
+                    <a:p>
+                      <a:pPr algn="l"/>
+                      <a:r>
+                        <a:rPr sz="1100" b="1" i="0">
+                          <a:solidFill>
+                            <a:srgbClr val="2B2B2B"/>
+                          </a:solidFill>
+                          <a:latin typeface="Calibri"/>
+                        </a:rPr>
+                        <a:t>14</a:t>
+                      </a:r>
+                    </a:p>
+                  </a:txBody>
+                  <a:tcPr anchor="ctr" marL="109728" marR="91440" marT="36576" marB="36576">
+                    <a:solidFill>
+                      <a:srgbClr val="F2F2F2"/>
+                    </a:solidFill>
+                  </a:tcPr>
+                </a:tc>
+                <a:tc>
+                  <a:txBody>
+                    <a:bodyPr/>
+                    <a:lstStyle/>
+                    <a:p>
+                      <a:pPr algn="l"/>
+                      <a:r>
+                        <a:rPr sz="1100" b="0" i="0">
+                          <a:solidFill>
+                            <a:srgbClr val="2B2B2B"/>
+                          </a:solidFill>
+                          <a:latin typeface="Calibri"/>
+                        </a:rPr>
+                        <a:t>Ajustes finales · seguimiento post-sustentación</a:t>
+                      </a:r>
+                    </a:p>
+                  </a:txBody>
+                  <a:tcPr anchor="ctr" marL="109728" marR="91440" marT="36576" marB="36576">
+                    <a:solidFill>
+                      <a:srgbClr val="F2F2F2"/>
+                    </a:solidFill>
+                  </a:tcPr>
+                </a:tc>
+                <a:tc>
+                  <a:txBody>
+                    <a:bodyPr/>
+                    <a:lstStyle/>
+                    <a:p>
+                      <a:pPr algn="l"/>
+                      <a:r>
+                        <a:rPr sz="1100" b="0" i="0">
+                          <a:solidFill>
+                            <a:srgbClr val="2B2B2B"/>
+                          </a:solidFill>
+                          <a:latin typeface="Calibri"/>
+                        </a:rPr>
+                        <a:t>Correcciones del jurado incorporadas</a:t>
+                      </a:r>
+                    </a:p>
+                  </a:txBody>
+                  <a:tcPr anchor="ctr" marL="109728" marR="91440" marT="36576" marB="36576">
+                    <a:solidFill>
+                      <a:srgbClr val="F2F2F2"/>
+                    </a:solidFill>
+                  </a:tcPr>
+                </a:tc>
+              </a:tr>
+              <a:tr h="502920">
+                <a:tc>
+                  <a:txBody>
+                    <a:bodyPr/>
+                    <a:lstStyle/>
+                    <a:p>
+                      <a:pPr algn="l"/>
+                      <a:r>
+                        <a:rPr sz="1100" b="1" i="0">
+                          <a:solidFill>
+                            <a:srgbClr val="2B2B2B"/>
+                          </a:solidFill>
+                          <a:latin typeface="Calibri"/>
+                        </a:rPr>
+                        <a:t>15</a:t>
+                      </a:r>
+                    </a:p>
+                  </a:txBody>
+                  <a:tcPr anchor="ctr" marL="109728" marR="91440" marT="36576" marB="36576">
+                    <a:solidFill>
+                      <a:srgbClr val="FFFFFF"/>
+                    </a:solidFill>
+                  </a:tcPr>
+                </a:tc>
+                <a:tc>
+                  <a:txBody>
+                    <a:bodyPr/>
+                    <a:lstStyle/>
+                    <a:p>
+                      <a:pPr algn="l"/>
+                      <a:r>
+                        <a:rPr sz="1100" b="0" i="0">
+                          <a:solidFill>
+                            <a:srgbClr val="2B2B2B"/>
+                          </a:solidFill>
+                          <a:latin typeface="Calibri"/>
+                        </a:rPr>
+                        <a:t>Cierre administrativo · recepción</a:t>
+                      </a:r>
+                    </a:p>
+                  </a:txBody>
+                  <a:tcPr anchor="ctr" marL="109728" marR="91440" marT="36576" marB="36576">
+                    <a:solidFill>
+                      <a:srgbClr val="FFFFFF"/>
+                    </a:solidFill>
+                  </a:tcPr>
+                </a:tc>
+                <a:tc>
+                  <a:txBody>
+                    <a:bodyPr/>
+                    <a:lstStyle/>
+                    <a:p>
+                      <a:pPr algn="l"/>
+                      <a:r>
+                        <a:rPr sz="1100" b="0" i="0">
+                          <a:solidFill>
+                            <a:srgbClr val="2B2B2B"/>
+                          </a:solidFill>
+                          <a:latin typeface="Calibri"/>
+                        </a:rPr>
+                        <a:t>Todo cargado y confirmado como recibido</a:t>
+                      </a:r>
+                    </a:p>
+                  </a:txBody>
+                  <a:tcPr anchor="ctr" marL="109728" marR="91440" marT="36576" marB="36576">
+                    <a:solidFill>
+                      <a:srgbClr val="FFFFFF"/>
+                    </a:solidFill>
+                  </a:tcPr>
+                </a:tc>
+              </a:tr>
+            </a:tbl>
+          </a:graphicData>
+        </a:graphic>
+      </p:graphicFrame>
+      <p:sp>
+        <p:nvSpPr>
+          <p:cNvPr id="5" name="TextBox 4"/>
+          <p:cNvSpPr txBox="1"/>
+          <p:nvPr/>
+        </p:nvSpPr>
+        <p:spPr>
+          <a:xfrm>
+            <a:off x="640080" y="5852160"/>
+            <a:ext cx="10911535" cy="548640"/>
+          </a:xfrm>
+          <a:prstGeom prst="rect">
+            <a:avLst/>
+          </a:prstGeom>
+          <a:noFill/>
+        </p:spPr>
+        <p:txBody>
+          <a:bodyPr wrap="square" anchor="t" lIns="0" rIns="0" tIns="0" bIns="0">
+            <a:spAutoFit/>
+          </a:bodyPr>
+          <a:lstStyle/>
+          <a:p>
+            <a:r>
+              <a:rPr sz="1200" b="0" i="1">
+                <a:solidFill>
+                  <a:srgbClr val="2B2B2B"/>
+                </a:solidFill>
+                <a:latin typeface="Calibri"/>
+              </a:rPr>
+              <a:t>El plazo de </a:t>
+            </a:r>
+            <a:r>
+              <a:rPr sz="1200" b="1" i="1">
+                <a:solidFill>
+                  <a:srgbClr val="2B2B2B"/>
+                </a:solidFill>
+                <a:latin typeface="Calibri"/>
+              </a:rPr>
+              <a:t>recepción y cierre varía según su grupo</a:t>
+            </a:r>
+            <a:r>
+              <a:rPr sz="1200" b="0" i="1">
+                <a:solidFill>
+                  <a:srgbClr val="2B2B2B"/>
+                </a:solidFill>
+                <a:latin typeface="Calibri"/>
+              </a:rPr>
+              <a:t>: consúltelo en la Presentación del Curso y anótelo hoy en su calendario.</a:t>
+            </a:r>
+          </a:p>
+        </p:txBody>
+      </p:sp>
+      <p:sp>
+        <p:nvSpPr>
+          <p:cNvPr id="6" name="TextBox 5"/>
+          <p:cNvSpPr txBox="1"/>
+          <p:nvPr/>
+        </p:nvSpPr>
+        <p:spPr>
+          <a:xfrm>
+            <a:off x="11094415" y="6446520"/>
+            <a:ext cx="548640" cy="274320"/>
+          </a:xfrm>
+          <a:prstGeom prst="rect">
+            <a:avLst/>
+          </a:prstGeom>
+          <a:noFill/>
+        </p:spPr>
+        <p:txBody>
+          <a:bodyPr wrap="square" anchor="t" lIns="0" rIns="0" tIns="0" bIns="0">
+            <a:spAutoFit/>
+          </a:bodyPr>
+          <a:lstStyle/>
+          <a:p>
+            <a:pPr algn="r"/>
+            <a:r>
+              <a:rPr sz="1000" b="1" i="0">
+                <a:solidFill>
+                  <a:srgbClr val="8F989D"/>
+                </a:solidFill>
+                <a:latin typeface="Calibri"/>
+              </a:rPr>
+              <a:t>10</a:t>
+            </a:r>
+          </a:p>
+        </p:txBody>
+      </p:sp>
+    </p:spTree>
+  </p:cSld>
+  <p:clrMapOvr>
+    <a:masterClrMapping/>
+  </p:clrMapOvr>
+</p:sld>
+</file>
+
+<file path=ppt/slides/slide11.xml><?xml version="1.0" encoding="utf-8"?>
+<p:sld xmlns:a="http://schemas.openxmlformats.org/drawingml/2006/main" xmlns:p="http://schemas.openxmlformats.org/presentationml/2006/main" xmlns:r="http://schemas.openxmlformats.org/officeDocument/2006/relationships">
+  <p:cSld>
+    <p:bg>
+      <p:bgPr>
+        <a:solidFill>
+          <a:srgbClr val="FFFFFF"/>
+        </a:solidFill>
+        <a:effectLst/>
+      </p:bgPr>
+    </p:bg>
+    <p:spTree>
+      <p:nvGrpSpPr>
+        <p:cNvPr id="1" name=""/>
+        <p:cNvGrpSpPr/>
+        <p:nvPr/>
+      </p:nvGrpSpPr>
+      <p:grpSpPr/>
+      <p:sp>
+        <p:nvSpPr>
+          <p:cNvPr id="2" name="Rectangle 1"/>
+          <p:cNvSpPr/>
+          <p:nvPr/>
+        </p:nvSpPr>
+        <p:spPr>
+          <a:xfrm>
+            <a:off x="0" y="0"/>
+            <a:ext cx="12191695" cy="1188720"/>
+          </a:xfrm>
+          <a:prstGeom prst="rect">
+            <a:avLst/>
+          </a:prstGeom>
+          <a:solidFill>
+            <a:srgbClr val="0C2340"/>
+          </a:solidFill>
+          <a:ln>
+            <a:noFill/>
+          </a:ln>
+          <a:effectLst/>
+        </p:spPr>
+        <p:style>
+          <a:lnRef idx="1">
+            <a:schemeClr val="accent1"/>
+          </a:lnRef>
+          <a:fillRef idx="3">
+            <a:schemeClr val="accent1"/>
+          </a:fillRef>
+          <a:effectRef idx="2">
+            <a:schemeClr val="accent1"/>
+          </a:effectRef>
+          <a:fontRef idx="minor">
+            <a:schemeClr val="lt1"/>
+          </a:fontRef>
+        </p:style>
+        <p:txBody>
+          <a:bodyPr rtlCol="0" anchor="ctr"/>
+          <a:lstStyle/>
+          <a:p>
+            <a:pPr algn="ctr"/>
+          </a:p>
+        </p:txBody>
+      </p:sp>
+      <p:sp>
+        <p:nvSpPr>
+          <p:cNvPr id="3" name="TextBox 2"/>
+          <p:cNvSpPr txBox="1"/>
+          <p:nvPr/>
+        </p:nvSpPr>
+        <p:spPr>
+          <a:xfrm>
+            <a:off x="640080" y="0"/>
+            <a:ext cx="9082735" cy="1188720"/>
+          </a:xfrm>
+          <a:prstGeom prst="rect">
+            <a:avLst/>
+          </a:prstGeom>
+          <a:noFill/>
+        </p:spPr>
+        <p:txBody>
+          <a:bodyPr wrap="square" anchor="ctr" lIns="0" rIns="0" tIns="0" bIns="0">
+            <a:spAutoFit/>
+          </a:bodyPr>
+          <a:lstStyle/>
+          <a:p>
+            <a:pPr algn="ctr"/>
+            <a:r>
+              <a:rPr sz="2600" b="1" i="0">
+                <a:solidFill>
+                  <a:srgbClr val="FFFFFF"/>
+                </a:solidFill>
+                <a:latin typeface="Calibri"/>
+              </a:rPr>
               <a:t>El acuerdo pedagógico: qué pactamos hoy</a:t>
             </a:r>
           </a:p>
@@ -3772,7 +4560,7 @@
                 </a:solidFill>
                 <a:latin typeface="Calibri"/>
               </a:rPr>
-              <a:t>10</a:t>
+              <a:t>11</a:t>
             </a:r>
           </a:p>
         </p:txBody>
@@ -3785,7 +4573,7 @@
 </p:sld>
 </file>
 
-<file path=ppt/slides/slide11.xml><?xml version="1.0" encoding="utf-8"?>
+<file path=ppt/slides/slide12.xml><?xml version="1.0" encoding="utf-8"?>
 <p:sld xmlns:a="http://schemas.openxmlformats.org/drawingml/2006/main" xmlns:p="http://schemas.openxmlformats.org/presentationml/2006/main" xmlns:r="http://schemas.openxmlformats.org/officeDocument/2006/relationships">
   <p:cSld>
     <p:bg>
@@ -4539,7 +5327,7 @@
                 </a:solidFill>
                 <a:latin typeface="Calibri"/>
               </a:rPr>
-              <a:t>11</a:t>
+              <a:t>12</a:t>
             </a:r>
           </a:p>
         </p:txBody>
@@ -4552,7 +5340,7 @@
 </p:sld>
 </file>
 
-<file path=ppt/slides/slide12.xml><?xml version="1.0" encoding="utf-8"?>
+<file path=ppt/slides/slide13.xml><?xml version="1.0" encoding="utf-8"?>
 <p:sld xmlns:a="http://schemas.openxmlformats.org/drawingml/2006/main" xmlns:p="http://schemas.openxmlformats.org/presentationml/2006/main" xmlns:r="http://schemas.openxmlformats.org/officeDocument/2006/relationships">
   <p:cSld>
     <p:bg>
@@ -5134,7 +5922,7 @@
                 </a:solidFill>
                 <a:latin typeface="Calibri"/>
               </a:rPr>
-              <a:t>12</a:t>
+              <a:t>13</a:t>
             </a:r>
           </a:p>
         </p:txBody>
@@ -5147,7 +5935,7 @@
 </p:sld>
 </file>
 
-<file path=ppt/slides/slide13.xml><?xml version="1.0" encoding="utf-8"?>
+<file path=ppt/slides/slide14.xml><?xml version="1.0" encoding="utf-8"?>
 <p:sld xmlns:a="http://schemas.openxmlformats.org/drawingml/2006/main" xmlns:p="http://schemas.openxmlformats.org/presentationml/2006/main" xmlns:r="http://schemas.openxmlformats.org/officeDocument/2006/relationships">
   <p:cSld>
     <p:bg>
@@ -5567,7 +6355,7 @@
                 </a:solidFill>
                 <a:latin typeface="Calibri"/>
               </a:rPr>
-              <a:t>13</a:t>
+              <a:t>14</a:t>
             </a:r>
           </a:p>
         </p:txBody>
@@ -5632,7 +6420,7 @@
 </p:sld>
 </file>
 
-<file path=ppt/slides/slide14.xml><?xml version="1.0" encoding="utf-8"?>
+<file path=ppt/slides/slide15.xml><?xml version="1.0" encoding="utf-8"?>
 <p:sld xmlns:a="http://schemas.openxmlformats.org/drawingml/2006/main" xmlns:p="http://schemas.openxmlformats.org/presentationml/2006/main" xmlns:r="http://schemas.openxmlformats.org/officeDocument/2006/relationships">
   <p:cSld>
     <p:bg>
@@ -6068,7 +6856,7 @@
                 </a:solidFill>
                 <a:latin typeface="Calibri"/>
               </a:rPr>
-              <a:t>14</a:t>
+              <a:t>15</a:t>
             </a:r>
           </a:p>
         </p:txBody>
@@ -6081,7 +6869,7 @@
 </p:sld>
 </file>
 
-<file path=ppt/slides/slide15.xml><?xml version="1.0" encoding="utf-8"?>
+<file path=ppt/slides/slide16.xml><?xml version="1.0" encoding="utf-8"?>
 <p:sld xmlns:a="http://schemas.openxmlformats.org/drawingml/2006/main" xmlns:p="http://schemas.openxmlformats.org/presentationml/2006/main" xmlns:r="http://schemas.openxmlformats.org/officeDocument/2006/relationships">
   <p:cSld>
     <p:bg>
@@ -6837,7 +7625,7 @@
                 </a:solidFill>
                 <a:latin typeface="Calibri"/>
               </a:rPr>
-              <a:t>15</a:t>
+              <a:t>16</a:t>
             </a:r>
           </a:p>
         </p:txBody>
@@ -6850,7 +7638,7 @@
 </p:sld>
 </file>
 
-<file path=ppt/slides/slide16.xml><?xml version="1.0" encoding="utf-8"?>
+<file path=ppt/slides/slide17.xml><?xml version="1.0" encoding="utf-8"?>
 <p:sld xmlns:a="http://schemas.openxmlformats.org/drawingml/2006/main" xmlns:p="http://schemas.openxmlformats.org/presentationml/2006/main" xmlns:r="http://schemas.openxmlformats.org/officeDocument/2006/relationships">
   <p:cSld>
     <p:bg>
@@ -7263,7 +8051,7 @@
                 </a:solidFill>
                 <a:latin typeface="Calibri"/>
               </a:rPr>
-              <a:t>16</a:t>
+              <a:t>17</a:t>
             </a:r>
           </a:p>
         </p:txBody>
@@ -7276,7 +8064,7 @@
 </p:sld>
 </file>
 
-<file path=ppt/slides/slide17.xml><?xml version="1.0" encoding="utf-8"?>
+<file path=ppt/slides/slide18.xml><?xml version="1.0" encoding="utf-8"?>
 <p:sld xmlns:a="http://schemas.openxmlformats.org/drawingml/2006/main" xmlns:p="http://schemas.openxmlformats.org/presentationml/2006/main" xmlns:r="http://schemas.openxmlformats.org/officeDocument/2006/relationships">
   <p:cSld>
     <p:bg>
@@ -7748,7 +8536,7 @@
                 </a:solidFill>
                 <a:latin typeface="Calibri"/>
               </a:rPr>
-              <a:t>17</a:t>
+              <a:t>18</a:t>
             </a:r>
           </a:p>
         </p:txBody>
@@ -7761,7 +8549,7 @@
 </p:sld>
 </file>
 
-<file path=ppt/slides/slide18.xml><?xml version="1.0" encoding="utf-8"?>
+<file path=ppt/slides/slide19.xml><?xml version="1.0" encoding="utf-8"?>
 <p:sld xmlns:a="http://schemas.openxmlformats.org/drawingml/2006/main" xmlns:p="http://schemas.openxmlformats.org/presentationml/2006/main" xmlns:r="http://schemas.openxmlformats.org/officeDocument/2006/relationships">
   <p:cSld>
     <p:bg>
@@ -8233,7 +9021,7 @@
                 </a:solidFill>
                 <a:latin typeface="Calibri"/>
               </a:rPr>
-              <a:t>18</a:t>
+              <a:t>19</a:t>
             </a:r>
           </a:p>
         </p:txBody>
@@ -8246,7 +9034,7 @@
 </p:sld>
 </file>
 
-<file path=ppt/slides/slide19.xml><?xml version="1.0" encoding="utf-8"?>
+<file path=ppt/slides/slide2.xml><?xml version="1.0" encoding="utf-8"?>
 <p:sld xmlns:a="http://schemas.openxmlformats.org/drawingml/2006/main" xmlns:p="http://schemas.openxmlformats.org/presentationml/2006/main" xmlns:r="http://schemas.openxmlformats.org/officeDocument/2006/relationships">
   <p:cSld>
     <p:bg>
@@ -8338,7 +9126,7 @@
                 </a:solidFill>
                 <a:latin typeface="Calibri"/>
               </a:rPr>
-              <a:t>Lo que debe tener listo para la Sesión 02</a:t>
+              <a:t>AGENDA DE HOY</a:t>
             </a:r>
           </a:p>
         </p:txBody>
@@ -8351,8 +9139,8 @@
         </p:nvSpPr>
         <p:spPr>
           <a:xfrm>
-            <a:off x="640080" y="1691639"/>
-            <a:ext cx="10911535" cy="4617720"/>
+            <a:off x="640080" y="1280160"/>
+            <a:ext cx="10911535" cy="411480"/>
           </a:xfrm>
           <a:prstGeom prst="rect">
             <a:avLst/>
@@ -8365,6 +9153,41 @@
           </a:bodyPr>
           <a:lstStyle/>
           <a:p>
+            <a:pPr algn="ctr"/>
+            <a:r>
+              <a:rPr sz="1500" b="0" i="0">
+                <a:solidFill>
+                  <a:srgbClr val="2B2B2B"/>
+                </a:solidFill>
+                <a:latin typeface="Calibri"/>
+              </a:rPr>
+              <a:t>Sesión de encuadre — hoy no vemos tema; el contenido arranca en la Sesión 02.</a:t>
+            </a:r>
+          </a:p>
+        </p:txBody>
+      </p:sp>
+      <p:sp>
+        <p:nvSpPr>
+          <p:cNvPr id="5" name="TextBox 4"/>
+          <p:cNvSpPr txBox="1"/>
+          <p:nvPr/>
+        </p:nvSpPr>
+        <p:spPr>
+          <a:xfrm>
+            <a:off x="640080" y="2011679"/>
+            <a:ext cx="10911535" cy="4297680"/>
+          </a:xfrm>
+          <a:prstGeom prst="rect">
+            <a:avLst/>
+          </a:prstGeom>
+          <a:noFill/>
+        </p:spPr>
+        <p:txBody>
+          <a:bodyPr wrap="square" anchor="t" lIns="0" rIns="0" tIns="0" bIns="0">
+            <a:spAutoFit/>
+          </a:bodyPr>
+          <a:lstStyle/>
+          <a:p>
             <a:pPr>
               <a:spcAft>
                 <a:spcPts val="1000"/>
@@ -8386,7 +9209,7 @@
                 </a:solidFill>
                 <a:latin typeface="Calibri"/>
               </a:rPr>
-              <a:t>Lectura autónoma (obligatoria):</a:t>
+              <a:t>El curso:</a:t>
             </a:r>
             <a:r>
               <a:rPr sz="1600" b="0" i="0">
@@ -8395,129 +9218,7 @@
                 </a:solidFill>
                 <a:latin typeface="Calibri"/>
               </a:rPr>
-              <a:t> unidades </a:t>
-            </a:r>
-            <a:r>
-              <a:rPr sz="1600" b="1" i="0">
-                <a:solidFill>
-                  <a:srgbClr val="2B2B2B"/>
-                </a:solidFill>
-                <a:latin typeface="Calibri"/>
-              </a:rPr>
-              <a:t>U1 y U2</a:t>
-            </a:r>
-            <a:r>
-              <a:rPr sz="1600" b="0" i="0">
-                <a:solidFill>
-                  <a:srgbClr val="2B2B2B"/>
-                </a:solidFill>
-                <a:latin typeface="Calibri"/>
-              </a:rPr>
-              <a:t> del Syllabus — </a:t>
-            </a:r>
-            <a:r>
-              <a:rPr sz="1600" b="1" i="0">
-                <a:solidFill>
-                  <a:srgbClr val="2B2B2B"/>
-                </a:solidFill>
-                <a:latin typeface="Calibri"/>
-              </a:rPr>
-              <a:t>casos de éxito</a:t>
-            </a:r>
-            <a:r>
-              <a:rPr sz="1600" b="0" i="0">
-                <a:solidFill>
-                  <a:srgbClr val="2B2B2B"/>
-                </a:solidFill>
-                <a:latin typeface="Calibri"/>
-              </a:rPr>
-              <a:t> y </a:t>
-            </a:r>
-            <a:r>
-              <a:rPr sz="1600" b="1" i="0">
-                <a:solidFill>
-                  <a:srgbClr val="2B2B2B"/>
-                </a:solidFill>
-                <a:latin typeface="Calibri"/>
-              </a:rPr>
-              <a:t>retomar el proyecto</a:t>
-            </a:r>
-            <a:r>
-              <a:rPr sz="1600" b="0" i="0">
-                <a:solidFill>
-                  <a:srgbClr val="2B2B2B"/>
-                </a:solidFill>
-                <a:latin typeface="Calibri"/>
-              </a:rPr>
-              <a:t> (contexto y planteamiento).</a:t>
-            </a:r>
-          </a:p>
-          <a:p>
-            <a:pPr lvl="1">
-              <a:spcAft>
-                <a:spcPts val="600"/>
-              </a:spcAft>
-            </a:pPr>
-            <a:r>
-              <a:rPr sz="1500" b="0" i="0">
-                <a:solidFill>
-                  <a:srgbClr val="2B2B2B"/>
-                </a:solidFill>
-                <a:latin typeface="Calibri"/>
-              </a:rPr>
-              <a:t>●   Hoy no se dictaron: se leen en casa y se </a:t>
-            </a:r>
-            <a:r>
-              <a:rPr sz="1500" b="1" i="0">
-                <a:solidFill>
-                  <a:srgbClr val="2B2B2B"/>
-                </a:solidFill>
-                <a:latin typeface="Calibri"/>
-              </a:rPr>
-              <a:t>retoman al abrir la Sesión 02</a:t>
-            </a:r>
-            <a:r>
-              <a:rPr sz="1500" b="0" i="0">
-                <a:solidFill>
-                  <a:srgbClr val="2B2B2B"/>
-                </a:solidFill>
-                <a:latin typeface="Calibri"/>
-              </a:rPr>
-              <a:t>.</a:t>
-            </a:r>
-          </a:p>
-          <a:p>
-            <a:pPr lvl="1">
-              <a:spcAft>
-                <a:spcPts val="600"/>
-              </a:spcAft>
-            </a:pPr>
-            <a:r>
-              <a:rPr sz="1500" b="0" i="0">
-                <a:solidFill>
-                  <a:srgbClr val="2B2B2B"/>
-                </a:solidFill>
-                <a:latin typeface="Calibri"/>
-              </a:rPr>
-              <a:t>●   </a:t>
-            </a:r>
-            <a:r>
-              <a:rPr sz="1500" b="1" i="0">
-                <a:solidFill>
-                  <a:srgbClr val="2B2B2B"/>
-                </a:solidFill>
-                <a:latin typeface="Calibri"/>
-              </a:rPr>
-              <a:t>Dónde está:</a:t>
-            </a:r>
-            <a:r>
-              <a:rPr sz="1500" b="0" i="0">
-                <a:solidFill>
-                  <a:srgbClr val="2B2B2B"/>
-                </a:solidFill>
-                <a:latin typeface="Calibri"/>
-              </a:rPr>
-              <a:t> ya viene en tu carpeta del curso, en `Sesion 01 - …/` (el PDF y el archivo `Lectura autonoma - Sesion 01.txt` con la cita y el enlace). También queda publicada en CDigital.</a:t>
+              <a:t> de qué se trata, cómo trabajamos y qué se llevan al final.</a:t>
             </a:r>
           </a:p>
           <a:p>
@@ -8542,7 +9243,7 @@
                 </a:solidFill>
                 <a:latin typeface="Calibri"/>
               </a:rPr>
-              <a:t>Arme su matriz de herencia</a:t>
+              <a:t>El Docente:</a:t>
             </a:r>
             <a:r>
               <a:rPr sz="1600" b="0" i="0">
@@ -8551,109 +9252,7 @@
                 </a:solidFill>
                 <a:latin typeface="Calibri"/>
               </a:rPr>
-              <a:t> en un Google Doc llamado `S01_AcuerdoRetoma_Apellido`, con tres columnas:</a:t>
-            </a:r>
-          </a:p>
-          <a:p>
-            <a:pPr lvl="1">
-              <a:spcAft>
-                <a:spcPts val="600"/>
-              </a:spcAft>
-            </a:pPr>
-            <a:r>
-              <a:rPr sz="1500" b="0" i="0">
-                <a:solidFill>
-                  <a:srgbClr val="2B2B2B"/>
-                </a:solidFill>
-                <a:latin typeface="Calibri"/>
-              </a:rPr>
-              <a:t>●   </a:t>
-            </a:r>
-            <a:r>
-              <a:rPr sz="1500" b="1" i="0">
-                <a:solidFill>
-                  <a:srgbClr val="2B2B2B"/>
-                </a:solidFill>
-                <a:latin typeface="Calibri"/>
-              </a:rPr>
-              <a:t>Reutilizo tal cual · Reescribo · Creo de cero</a:t>
-            </a:r>
-            <a:r>
-              <a:rPr sz="1500" b="0" i="0">
-                <a:solidFill>
-                  <a:srgbClr val="2B2B2B"/>
-                </a:solidFill>
-                <a:latin typeface="Calibri"/>
-              </a:rPr>
-              <a:t>, sección por sección de lo que trae de TG2.</a:t>
-            </a:r>
-          </a:p>
-          <a:p>
-            <a:pPr lvl="1">
-              <a:spcAft>
-                <a:spcPts val="600"/>
-              </a:spcAft>
-            </a:pPr>
-            <a:r>
-              <a:rPr sz="1500" b="0" i="0">
-                <a:solidFill>
-                  <a:srgbClr val="2B2B2B"/>
-                </a:solidFill>
-                <a:latin typeface="Calibri"/>
-              </a:rPr>
-              <a:t>●   </a:t>
-            </a:r>
-            <a:r>
-              <a:rPr sz="1500" b="1" i="0">
-                <a:solidFill>
-                  <a:srgbClr val="2B2B2B"/>
-                </a:solidFill>
-                <a:latin typeface="Calibri"/>
-              </a:rPr>
-              <a:t>Cuente sus referencias reales</a:t>
-            </a:r>
-            <a:r>
-              <a:rPr sz="1500" b="0" i="0">
-                <a:solidFill>
-                  <a:srgbClr val="2B2B2B"/>
-                </a:solidFill>
-                <a:latin typeface="Calibri"/>
-              </a:rPr>
-              <a:t>: cuántas están citadas hoy en el cuerpo y cuántas le faltan.</a:t>
-            </a:r>
-          </a:p>
-          <a:p>
-            <a:pPr lvl="1">
-              <a:spcAft>
-                <a:spcPts val="600"/>
-              </a:spcAft>
-            </a:pPr>
-            <a:r>
-              <a:rPr sz="1500" b="0" i="0">
-                <a:solidFill>
-                  <a:srgbClr val="2B2B2B"/>
-                </a:solidFill>
-                <a:latin typeface="Calibri"/>
-              </a:rPr>
-              <a:t>●   </a:t>
-            </a:r>
-            <a:r>
-              <a:rPr sz="1500" b="1" i="0">
-                <a:solidFill>
-                  <a:srgbClr val="2B2B2B"/>
-                </a:solidFill>
-                <a:latin typeface="Calibri"/>
-              </a:rPr>
-              <a:t>Tres compromisos</a:t>
-            </a:r>
-            <a:r>
-              <a:rPr sz="1500" b="0" i="0">
-                <a:solidFill>
-                  <a:srgbClr val="2B2B2B"/>
-                </a:solidFill>
-                <a:latin typeface="Calibri"/>
-              </a:rPr>
-              <a:t> concretos suyos para las próximas dos semanas.</a:t>
+              <a:t> quién los acompaña y cómo contactarlo.</a:t>
             </a:r>
           </a:p>
           <a:p>
@@ -8678,7 +9277,7 @@
                 </a:solidFill>
                 <a:latin typeface="Calibri"/>
               </a:rPr>
-              <a:t>Súbalo a CDigital antes de la Sesión 02</a:t>
+              <a:t>Ustedes:</a:t>
             </a:r>
             <a:r>
               <a:rPr sz="1600" b="0" i="0">
@@ -8687,7 +9286,23 @@
                 </a:solidFill>
                 <a:latin typeface="Calibri"/>
               </a:rPr>
-              <a:t> y </a:t>
+              <a:t> nos presentamos en el tablero colaborativo.</a:t>
+            </a:r>
+          </a:p>
+          <a:p>
+            <a:pPr>
+              <a:spcAft>
+                <a:spcPts val="1000"/>
+              </a:spcAft>
+            </a:pPr>
+            <a:r>
+              <a:rPr sz="1600" b="0" i="0">
+                <a:solidFill>
+                  <a:srgbClr val="2B2B2B"/>
+                </a:solidFill>
+                <a:latin typeface="Calibri"/>
+              </a:rPr>
+              <a:t>–   </a:t>
             </a:r>
             <a:r>
               <a:rPr sz="1600" b="1" i="0">
@@ -8696,7 +9311,7 @@
                 </a:solidFill>
                 <a:latin typeface="Calibri"/>
               </a:rPr>
-              <a:t>abra los enunciados</a:t>
+              <a:t>Cómo se evalúa:</a:t>
             </a:r>
             <a:r>
               <a:rPr sz="1600" b="0" i="0">
@@ -8705,7 +9320,23 @@
                 </a:solidFill>
                 <a:latin typeface="Calibri"/>
               </a:rPr>
-              <a:t> de `Clases/Recursos/ACAs/` (artículo y sustentación): traen la ventana de la </a:t>
+              <a:t> qué ítems tiene el aula, cuánto pesa cada uno y qué se hace con él.</a:t>
+            </a:r>
+          </a:p>
+          <a:p>
+            <a:pPr>
+              <a:spcAft>
+                <a:spcPts val="1000"/>
+              </a:spcAft>
+            </a:pPr>
+            <a:r>
+              <a:rPr sz="1600" b="0" i="0">
+                <a:solidFill>
+                  <a:srgbClr val="2B2B2B"/>
+                </a:solidFill>
+                <a:latin typeface="Calibri"/>
+              </a:rPr>
+              <a:t>–   </a:t>
             </a:r>
             <a:r>
               <a:rPr sz="1600" b="1" i="0">
@@ -8714,7 +9345,7 @@
                 </a:solidFill>
                 <a:latin typeface="Calibri"/>
               </a:rPr>
-              <a:t>ACA Final</a:t>
+              <a:t>Acuerdos</a:t>
             </a:r>
             <a:r>
               <a:rPr sz="1600" b="0" i="0">
@@ -8723,14 +9354,14 @@
                 </a:solidFill>
                 <a:latin typeface="Calibri"/>
               </a:rPr>
-              <a:t> de su grupo.</a:t>
-            </a:r>
-          </a:p>
-        </p:txBody>
-      </p:sp>
-      <p:sp>
-        <p:nvSpPr>
-          <p:cNvPr id="5" name="TextBox 4"/>
+              <a:t> de trabajo y el primer encargo autónomo.</a:t>
+            </a:r>
+          </a:p>
+        </p:txBody>
+      </p:sp>
+      <p:sp>
+        <p:nvSpPr>
+          <p:cNvPr id="6" name="TextBox 5"/>
           <p:cNvSpPr txBox="1"/>
           <p:nvPr/>
         </p:nvSpPr>
@@ -8758,59 +9389,7 @@
                 </a:solidFill>
                 <a:latin typeface="Calibri"/>
               </a:rPr>
-              <a:t>19</a:t>
-            </a:r>
-          </a:p>
-        </p:txBody>
-      </p:sp>
-      <p:sp>
-        <p:nvSpPr>
-          <p:cNvPr id="6" name="TextBox 5"/>
-          <p:cNvSpPr txBox="1"/>
-          <p:nvPr/>
-        </p:nvSpPr>
-        <p:spPr>
-          <a:xfrm>
-            <a:off x="640080" y="5943600"/>
-            <a:ext cx="9997135" cy="457200"/>
-          </a:xfrm>
-          <a:prstGeom prst="rect">
-            <a:avLst/>
-          </a:prstGeom>
-          <a:noFill/>
-        </p:spPr>
-        <p:txBody>
-          <a:bodyPr wrap="square" anchor="t" lIns="0" rIns="0" tIns="0" bIns="0">
-            <a:spAutoFit/>
-          </a:bodyPr>
-          <a:lstStyle/>
-          <a:p>
-            <a:r>
-              <a:rPr sz="1200" b="0" i="1">
-                <a:solidFill>
-                  <a:srgbClr val="2B2B2B"/>
-                </a:solidFill>
-                <a:latin typeface="Calibri"/>
-              </a:rPr>
-              <a:t>Cuente las referencias </a:t>
-            </a:r>
-            <a:r>
-              <a:rPr sz="1200" b="1" i="1">
-                <a:solidFill>
-                  <a:srgbClr val="2B2B2B"/>
-                </a:solidFill>
-                <a:latin typeface="Calibri"/>
-              </a:rPr>
-              <a:t>citadas en el cuerpo</a:t>
-            </a:r>
-            <a:r>
-              <a:rPr sz="1200" b="0" i="1">
-                <a:solidFill>
-                  <a:srgbClr val="2B2B2B"/>
-                </a:solidFill>
-                <a:latin typeface="Calibri"/>
-              </a:rPr>
-              <a:t>, no las de la lista final: esa diferencia es el trabajo real que queda por delante.</a:t>
+              <a:t>2</a:t>
             </a:r>
           </a:p>
         </p:txBody>
@@ -8823,7 +9402,7 @@
 </p:sld>
 </file>
 
-<file path=ppt/slides/slide2.xml><?xml version="1.0" encoding="utf-8"?>
+<file path=ppt/slides/slide20.xml><?xml version="1.0" encoding="utf-8"?>
 <p:sld xmlns:a="http://schemas.openxmlformats.org/drawingml/2006/main" xmlns:p="http://schemas.openxmlformats.org/presentationml/2006/main" xmlns:r="http://schemas.openxmlformats.org/officeDocument/2006/relationships">
   <p:cSld>
     <p:bg>
@@ -8915,7 +9494,7 @@
                 </a:solidFill>
                 <a:latin typeface="Calibri"/>
               </a:rPr>
-              <a:t>AGENDA DE HOY</a:t>
+              <a:t>Lo que debe tener listo para la Sesión 02</a:t>
             </a:r>
           </a:p>
         </p:txBody>
@@ -8928,8 +9507,8 @@
         </p:nvSpPr>
         <p:spPr>
           <a:xfrm>
-            <a:off x="640080" y="1280160"/>
-            <a:ext cx="10911535" cy="411480"/>
+            <a:off x="640080" y="1691639"/>
+            <a:ext cx="10911535" cy="4617720"/>
           </a:xfrm>
           <a:prstGeom prst="rect">
             <a:avLst/>
@@ -8942,41 +9521,6 @@
           </a:bodyPr>
           <a:lstStyle/>
           <a:p>
-            <a:pPr algn="ctr"/>
-            <a:r>
-              <a:rPr sz="1500" b="0" i="0">
-                <a:solidFill>
-                  <a:srgbClr val="2B2B2B"/>
-                </a:solidFill>
-                <a:latin typeface="Calibri"/>
-              </a:rPr>
-              <a:t>Sesión de encuadre — hoy no vemos tema; el contenido arranca en la Sesión 02.</a:t>
-            </a:r>
-          </a:p>
-        </p:txBody>
-      </p:sp>
-      <p:sp>
-        <p:nvSpPr>
-          <p:cNvPr id="5" name="TextBox 4"/>
-          <p:cNvSpPr txBox="1"/>
-          <p:nvPr/>
-        </p:nvSpPr>
-        <p:spPr>
-          <a:xfrm>
-            <a:off x="640080" y="2011679"/>
-            <a:ext cx="10911535" cy="4297680"/>
-          </a:xfrm>
-          <a:prstGeom prst="rect">
-            <a:avLst/>
-          </a:prstGeom>
-          <a:noFill/>
-        </p:spPr>
-        <p:txBody>
-          <a:bodyPr wrap="square" anchor="t" lIns="0" rIns="0" tIns="0" bIns="0">
-            <a:spAutoFit/>
-          </a:bodyPr>
-          <a:lstStyle/>
-          <a:p>
             <a:pPr>
               <a:spcAft>
                 <a:spcPts val="1000"/>
@@ -8998,7 +9542,7 @@
                 </a:solidFill>
                 <a:latin typeface="Calibri"/>
               </a:rPr>
-              <a:t>El curso:</a:t>
+              <a:t>Lectura autónoma (obligatoria):</a:t>
             </a:r>
             <a:r>
               <a:rPr sz="1600" b="0" i="0">
@@ -9007,7 +9551,129 @@
                 </a:solidFill>
                 <a:latin typeface="Calibri"/>
               </a:rPr>
-              <a:t> de qué se trata, cómo trabajamos y qué se llevan al final.</a:t>
+              <a:t> unidades </a:t>
+            </a:r>
+            <a:r>
+              <a:rPr sz="1600" b="1" i="0">
+                <a:solidFill>
+                  <a:srgbClr val="2B2B2B"/>
+                </a:solidFill>
+                <a:latin typeface="Calibri"/>
+              </a:rPr>
+              <a:t>U1 y U2</a:t>
+            </a:r>
+            <a:r>
+              <a:rPr sz="1600" b="0" i="0">
+                <a:solidFill>
+                  <a:srgbClr val="2B2B2B"/>
+                </a:solidFill>
+                <a:latin typeface="Calibri"/>
+              </a:rPr>
+              <a:t> del Syllabus — </a:t>
+            </a:r>
+            <a:r>
+              <a:rPr sz="1600" b="1" i="0">
+                <a:solidFill>
+                  <a:srgbClr val="2B2B2B"/>
+                </a:solidFill>
+                <a:latin typeface="Calibri"/>
+              </a:rPr>
+              <a:t>casos de éxito</a:t>
+            </a:r>
+            <a:r>
+              <a:rPr sz="1600" b="0" i="0">
+                <a:solidFill>
+                  <a:srgbClr val="2B2B2B"/>
+                </a:solidFill>
+                <a:latin typeface="Calibri"/>
+              </a:rPr>
+              <a:t> y </a:t>
+            </a:r>
+            <a:r>
+              <a:rPr sz="1600" b="1" i="0">
+                <a:solidFill>
+                  <a:srgbClr val="2B2B2B"/>
+                </a:solidFill>
+                <a:latin typeface="Calibri"/>
+              </a:rPr>
+              <a:t>retomar el proyecto</a:t>
+            </a:r>
+            <a:r>
+              <a:rPr sz="1600" b="0" i="0">
+                <a:solidFill>
+                  <a:srgbClr val="2B2B2B"/>
+                </a:solidFill>
+                <a:latin typeface="Calibri"/>
+              </a:rPr>
+              <a:t> (contexto y planteamiento).</a:t>
+            </a:r>
+          </a:p>
+          <a:p>
+            <a:pPr lvl="1">
+              <a:spcAft>
+                <a:spcPts val="600"/>
+              </a:spcAft>
+            </a:pPr>
+            <a:r>
+              <a:rPr sz="1500" b="0" i="0">
+                <a:solidFill>
+                  <a:srgbClr val="2B2B2B"/>
+                </a:solidFill>
+                <a:latin typeface="Calibri"/>
+              </a:rPr>
+              <a:t>●   Hoy no se dictaron: se leen en casa y se </a:t>
+            </a:r>
+            <a:r>
+              <a:rPr sz="1500" b="1" i="0">
+                <a:solidFill>
+                  <a:srgbClr val="2B2B2B"/>
+                </a:solidFill>
+                <a:latin typeface="Calibri"/>
+              </a:rPr>
+              <a:t>retoman al abrir la Sesión 02</a:t>
+            </a:r>
+            <a:r>
+              <a:rPr sz="1500" b="0" i="0">
+                <a:solidFill>
+                  <a:srgbClr val="2B2B2B"/>
+                </a:solidFill>
+                <a:latin typeface="Calibri"/>
+              </a:rPr>
+              <a:t>.</a:t>
+            </a:r>
+          </a:p>
+          <a:p>
+            <a:pPr lvl="1">
+              <a:spcAft>
+                <a:spcPts val="600"/>
+              </a:spcAft>
+            </a:pPr>
+            <a:r>
+              <a:rPr sz="1500" b="0" i="0">
+                <a:solidFill>
+                  <a:srgbClr val="2B2B2B"/>
+                </a:solidFill>
+                <a:latin typeface="Calibri"/>
+              </a:rPr>
+              <a:t>●   </a:t>
+            </a:r>
+            <a:r>
+              <a:rPr sz="1500" b="1" i="0">
+                <a:solidFill>
+                  <a:srgbClr val="2B2B2B"/>
+                </a:solidFill>
+                <a:latin typeface="Calibri"/>
+              </a:rPr>
+              <a:t>Dónde está:</a:t>
+            </a:r>
+            <a:r>
+              <a:rPr sz="1500" b="0" i="0">
+                <a:solidFill>
+                  <a:srgbClr val="2B2B2B"/>
+                </a:solidFill>
+                <a:latin typeface="Calibri"/>
+              </a:rPr>
+              <a:t> ya viene en tu carpeta del curso, en `Sesion 01 - …/` (el PDF y el archivo `Lectura autonoma - Sesion 01.txt` con la cita y el enlace). También queda publicada en CDigital.</a:t>
             </a:r>
           </a:p>
           <a:p>
@@ -9032,7 +9698,7 @@
                 </a:solidFill>
                 <a:latin typeface="Calibri"/>
               </a:rPr>
-              <a:t>El Docente:</a:t>
+              <a:t>Arme su matriz de herencia</a:t>
             </a:r>
             <a:r>
               <a:rPr sz="1600" b="0" i="0">
@@ -9041,7 +9707,109 @@
                 </a:solidFill>
                 <a:latin typeface="Calibri"/>
               </a:rPr>
-              <a:t> quién los acompaña y cómo contactarlo.</a:t>
+              <a:t> en un Google Doc llamado `S01_AcuerdoRetoma_Apellido`, con tres columnas:</a:t>
+            </a:r>
+          </a:p>
+          <a:p>
+            <a:pPr lvl="1">
+              <a:spcAft>
+                <a:spcPts val="600"/>
+              </a:spcAft>
+            </a:pPr>
+            <a:r>
+              <a:rPr sz="1500" b="0" i="0">
+                <a:solidFill>
+                  <a:srgbClr val="2B2B2B"/>
+                </a:solidFill>
+                <a:latin typeface="Calibri"/>
+              </a:rPr>
+              <a:t>●   </a:t>
+            </a:r>
+            <a:r>
+              <a:rPr sz="1500" b="1" i="0">
+                <a:solidFill>
+                  <a:srgbClr val="2B2B2B"/>
+                </a:solidFill>
+                <a:latin typeface="Calibri"/>
+              </a:rPr>
+              <a:t>Reutilizo tal cual · Reescribo · Creo de cero</a:t>
+            </a:r>
+            <a:r>
+              <a:rPr sz="1500" b="0" i="0">
+                <a:solidFill>
+                  <a:srgbClr val="2B2B2B"/>
+                </a:solidFill>
+                <a:latin typeface="Calibri"/>
+              </a:rPr>
+              <a:t>, sección por sección de lo que trae de TG2.</a:t>
+            </a:r>
+          </a:p>
+          <a:p>
+            <a:pPr lvl="1">
+              <a:spcAft>
+                <a:spcPts val="600"/>
+              </a:spcAft>
+            </a:pPr>
+            <a:r>
+              <a:rPr sz="1500" b="0" i="0">
+                <a:solidFill>
+                  <a:srgbClr val="2B2B2B"/>
+                </a:solidFill>
+                <a:latin typeface="Calibri"/>
+              </a:rPr>
+              <a:t>●   </a:t>
+            </a:r>
+            <a:r>
+              <a:rPr sz="1500" b="1" i="0">
+                <a:solidFill>
+                  <a:srgbClr val="2B2B2B"/>
+                </a:solidFill>
+                <a:latin typeface="Calibri"/>
+              </a:rPr>
+              <a:t>Cuente sus referencias reales</a:t>
+            </a:r>
+            <a:r>
+              <a:rPr sz="1500" b="0" i="0">
+                <a:solidFill>
+                  <a:srgbClr val="2B2B2B"/>
+                </a:solidFill>
+                <a:latin typeface="Calibri"/>
+              </a:rPr>
+              <a:t>: cuántas están citadas hoy en el cuerpo y cuántas le faltan.</a:t>
+            </a:r>
+          </a:p>
+          <a:p>
+            <a:pPr lvl="1">
+              <a:spcAft>
+                <a:spcPts val="600"/>
+              </a:spcAft>
+            </a:pPr>
+            <a:r>
+              <a:rPr sz="1500" b="0" i="0">
+                <a:solidFill>
+                  <a:srgbClr val="2B2B2B"/>
+                </a:solidFill>
+                <a:latin typeface="Calibri"/>
+              </a:rPr>
+              <a:t>●   </a:t>
+            </a:r>
+            <a:r>
+              <a:rPr sz="1500" b="1" i="0">
+                <a:solidFill>
+                  <a:srgbClr val="2B2B2B"/>
+                </a:solidFill>
+                <a:latin typeface="Calibri"/>
+              </a:rPr>
+              <a:t>Tres compromisos</a:t>
+            </a:r>
+            <a:r>
+              <a:rPr sz="1500" b="0" i="0">
+                <a:solidFill>
+                  <a:srgbClr val="2B2B2B"/>
+                </a:solidFill>
+                <a:latin typeface="Calibri"/>
+              </a:rPr>
+              <a:t> concretos suyos para las próximas dos semanas.</a:t>
             </a:r>
           </a:p>
           <a:p>
@@ -9066,7 +9834,7 @@
                 </a:solidFill>
                 <a:latin typeface="Calibri"/>
               </a:rPr>
-              <a:t>Ustedes:</a:t>
+              <a:t>Súbalo a CDigital antes de la Sesión 02</a:t>
             </a:r>
             <a:r>
               <a:rPr sz="1600" b="0" i="0">
@@ -9075,15 +9843,17 @@
                 </a:solidFill>
                 <a:latin typeface="Calibri"/>
               </a:rPr>
-              <a:t> nos presentamos en el tablero colaborativo.</a:t>
-            </a:r>
-          </a:p>
-          <a:p>
-            <a:pPr>
-              <a:spcAft>
-                <a:spcPts val="1000"/>
-              </a:spcAft>
-            </a:pPr>
+              <a:t> y </a:t>
+            </a:r>
+            <a:r>
+              <a:rPr sz="1600" b="1" i="0">
+                <a:solidFill>
+                  <a:srgbClr val="2B2B2B"/>
+                </a:solidFill>
+                <a:latin typeface="Calibri"/>
+              </a:rPr>
+              <a:t>abra los enunciados</a:t>
+            </a:r>
             <a:r>
               <a:rPr sz="1600" b="0" i="0">
                 <a:solidFill>
@@ -9091,7 +9861,7 @@
                 </a:solidFill>
                 <a:latin typeface="Calibri"/>
               </a:rPr>
-              <a:t>–   </a:t>
+              <a:t> de `Clases/Recursos/ACAs/` (artículo y sustentación): traen la ventana de la </a:t>
             </a:r>
             <a:r>
               <a:rPr sz="1600" b="1" i="0">
@@ -9100,7 +9870,7 @@
                 </a:solidFill>
                 <a:latin typeface="Calibri"/>
               </a:rPr>
-              <a:t>Cómo se evalúa:</a:t>
+              <a:t>ACA Final</a:t>
             </a:r>
             <a:r>
               <a:rPr sz="1600" b="0" i="0">
@@ -9109,48 +9879,14 @@
                 </a:solidFill>
                 <a:latin typeface="Calibri"/>
               </a:rPr>
-              <a:t> qué ítems tiene el aula, cuánto pesa cada uno y qué se hace con él.</a:t>
-            </a:r>
-          </a:p>
-          <a:p>
-            <a:pPr>
-              <a:spcAft>
-                <a:spcPts val="1000"/>
-              </a:spcAft>
-            </a:pPr>
-            <a:r>
-              <a:rPr sz="1600" b="0" i="0">
-                <a:solidFill>
-                  <a:srgbClr val="2B2B2B"/>
-                </a:solidFill>
-                <a:latin typeface="Calibri"/>
-              </a:rPr>
-              <a:t>–   </a:t>
-            </a:r>
-            <a:r>
-              <a:rPr sz="1600" b="1" i="0">
-                <a:solidFill>
-                  <a:srgbClr val="2B2B2B"/>
-                </a:solidFill>
-                <a:latin typeface="Calibri"/>
-              </a:rPr>
-              <a:t>Acuerdos</a:t>
-            </a:r>
-            <a:r>
-              <a:rPr sz="1600" b="0" i="0">
-                <a:solidFill>
-                  <a:srgbClr val="2B2B2B"/>
-                </a:solidFill>
-                <a:latin typeface="Calibri"/>
-              </a:rPr>
-              <a:t> de trabajo y el primer encargo autónomo.</a:t>
-            </a:r>
-          </a:p>
-        </p:txBody>
-      </p:sp>
-      <p:sp>
-        <p:nvSpPr>
-          <p:cNvPr id="6" name="TextBox 5"/>
+              <a:t> de su grupo.</a:t>
+            </a:r>
+          </a:p>
+        </p:txBody>
+      </p:sp>
+      <p:sp>
+        <p:nvSpPr>
+          <p:cNvPr id="5" name="TextBox 4"/>
           <p:cNvSpPr txBox="1"/>
           <p:nvPr/>
         </p:nvSpPr>
@@ -9178,7 +9914,59 @@
                 </a:solidFill>
                 <a:latin typeface="Calibri"/>
               </a:rPr>
-              <a:t>2</a:t>
+              <a:t>20</a:t>
+            </a:r>
+          </a:p>
+        </p:txBody>
+      </p:sp>
+      <p:sp>
+        <p:nvSpPr>
+          <p:cNvPr id="6" name="TextBox 5"/>
+          <p:cNvSpPr txBox="1"/>
+          <p:nvPr/>
+        </p:nvSpPr>
+        <p:spPr>
+          <a:xfrm>
+            <a:off x="640080" y="5943600"/>
+            <a:ext cx="9997135" cy="457200"/>
+          </a:xfrm>
+          <a:prstGeom prst="rect">
+            <a:avLst/>
+          </a:prstGeom>
+          <a:noFill/>
+        </p:spPr>
+        <p:txBody>
+          <a:bodyPr wrap="square" anchor="t" lIns="0" rIns="0" tIns="0" bIns="0">
+            <a:spAutoFit/>
+          </a:bodyPr>
+          <a:lstStyle/>
+          <a:p>
+            <a:r>
+              <a:rPr sz="1200" b="0" i="1">
+                <a:solidFill>
+                  <a:srgbClr val="2B2B2B"/>
+                </a:solidFill>
+                <a:latin typeface="Calibri"/>
+              </a:rPr>
+              <a:t>Cuente las referencias </a:t>
+            </a:r>
+            <a:r>
+              <a:rPr sz="1200" b="1" i="1">
+                <a:solidFill>
+                  <a:srgbClr val="2B2B2B"/>
+                </a:solidFill>
+                <a:latin typeface="Calibri"/>
+              </a:rPr>
+              <a:t>citadas en el cuerpo</a:t>
+            </a:r>
+            <a:r>
+              <a:rPr sz="1200" b="0" i="1">
+                <a:solidFill>
+                  <a:srgbClr val="2B2B2B"/>
+                </a:solidFill>
+                <a:latin typeface="Calibri"/>
+              </a:rPr>
+              <a:t>, no las de la lista final: esa diferencia es el trabajo real que queda por delante.</a:t>
             </a:r>
           </a:p>
         </p:txBody>
@@ -9191,7 +9979,7 @@
 </p:sld>
 </file>
 
-<file path=ppt/slides/slide20.xml><?xml version="1.0" encoding="utf-8"?>
+<file path=ppt/slides/slide21.xml><?xml version="1.0" encoding="utf-8"?>
 <p:sld xmlns:a="http://schemas.openxmlformats.org/drawingml/2006/main" xmlns:p="http://schemas.openxmlformats.org/presentationml/2006/main" xmlns:r="http://schemas.openxmlformats.org/officeDocument/2006/relationships">
   <p:cSld>
     <p:bg>
@@ -9645,7 +10433,7 @@
                 </a:solidFill>
                 <a:latin typeface="Calibri"/>
               </a:rPr>
-              <a:t>20</a:t>
+              <a:t>21</a:t>
             </a:r>
           </a:p>
         </p:txBody>
@@ -9658,7 +10446,7 @@
 </p:sld>
 </file>
 
-<file path=ppt/slides/slide21.xml><?xml version="1.0" encoding="utf-8"?>
+<file path=ppt/slides/slide22.xml><?xml version="1.0" encoding="utf-8"?>
 <p:sld xmlns:a="http://schemas.openxmlformats.org/drawingml/2006/main" xmlns:p="http://schemas.openxmlformats.org/presentationml/2006/main" xmlns:r="http://schemas.openxmlformats.org/officeDocument/2006/relationships">
   <p:cSld>
     <p:bg>
@@ -9892,7 +10680,7 @@
                 </a:solidFill>
                 <a:latin typeface="Calibri"/>
               </a:rPr>
-              <a:t>21</a:t>
+              <a:t>22</a:t>
             </a:r>
           </a:p>
         </p:txBody>
@@ -9905,7 +10693,7 @@
 </p:sld>
 </file>
 
-<file path=ppt/slides/slide22.xml><?xml version="1.0" encoding="utf-8"?>
+<file path=ppt/slides/slide23.xml><?xml version="1.0" encoding="utf-8"?>
 <p:sld xmlns:a="http://schemas.openxmlformats.org/drawingml/2006/main" xmlns:p="http://schemas.openxmlformats.org/presentationml/2006/main" xmlns:r="http://schemas.openxmlformats.org/officeDocument/2006/relationships">
   <p:cSld>
     <p:bg>
@@ -10569,7 +11357,7 @@
                 </a:solidFill>
                 <a:latin typeface="Calibri"/>
               </a:rPr>
-              <a:t>Preséntate: quién eres y qué esperas del curso</a:t>
+              <a:t>Formulario de Google · encuestas y Q&amp;A en el propio Meet</a:t>
             </a:r>
           </a:p>
         </p:txBody>
@@ -10602,7 +11390,7 @@
               </a:spcAft>
             </a:pPr>
             <a:r>
-              <a:rPr sz="1400" b="0" i="0">
+              <a:rPr sz="1300" b="0" i="0">
                 <a:solidFill>
                   <a:srgbClr val="2B2B2B"/>
                 </a:solidFill>
@@ -10611,22 +11399,22 @@
               <a:t>–   </a:t>
             </a:r>
             <a:r>
-              <a:rPr sz="1400" b="1" i="0">
-                <a:solidFill>
-                  <a:srgbClr val="2B2B2B"/>
-                </a:solidFill>
-                <a:latin typeface="Calibri"/>
-              </a:rPr>
-              <a:t>Escanea o abre:</a:t>
-            </a:r>
-            <a:r>
-              <a:rPr sz="1400" b="0" i="0">
-                <a:solidFill>
-                  <a:srgbClr val="2B2B2B"/>
-                </a:solidFill>
-                <a:latin typeface="Calibri"/>
-              </a:rPr>
-              <a:t> https://padlet.com/andres_dfx/cun-wruz81hmf9k06gd7</a:t>
+              <a:rPr sz="1300" b="1" i="0">
+                <a:solidFill>
+                  <a:srgbClr val="2B2B2B"/>
+                </a:solidFill>
+                <a:latin typeface="Calibri"/>
+              </a:rPr>
+              <a:t>Escanea el QR o abre:</a:t>
+            </a:r>
+            <a:r>
+              <a:rPr sz="1300" b="0" i="0">
+                <a:solidFill>
+                  <a:srgbClr val="2B2B2B"/>
+                </a:solidFill>
+                <a:latin typeface="Calibri"/>
+              </a:rPr>
+              <a:t> [URL Formulario Preséntate — pendiente · TRABAJO DE GRADO 3]</a:t>
             </a:r>
           </a:p>
           <a:p>
@@ -10636,16 +11424,34 @@
               </a:spcAft>
             </a:pPr>
             <a:r>
-              <a:rPr sz="1400" b="0" i="0">
-                <a:solidFill>
-                  <a:srgbClr val="2B2B2B"/>
-                </a:solidFill>
-                <a:latin typeface="Calibri"/>
-              </a:rPr>
-              <a:t>–   En un post-it escribe: </a:t>
-            </a:r>
-            <a:r>
-              <a:rPr sz="1400" b="1" i="0">
+              <a:rPr sz="1300" b="0" i="0">
+                <a:solidFill>
+                  <a:srgbClr val="2B2B2B"/>
+                </a:solidFill>
+                <a:latin typeface="Calibri"/>
+              </a:rPr>
+              <a:t>–   </a:t>
+            </a:r>
+            <a:r>
+              <a:rPr sz="1300" b="1" i="0">
+                <a:solidFill>
+                  <a:srgbClr val="2B2B2B"/>
+                </a:solidFill>
+                <a:latin typeface="Calibri"/>
+              </a:rPr>
+              <a:t>Qué respondes (1 min):</a:t>
+            </a:r>
+            <a:r>
+              <a:rPr sz="1300" b="0" i="0">
+                <a:solidFill>
+                  <a:srgbClr val="2B2B2B"/>
+                </a:solidFill>
+                <a:latin typeface="Calibri"/>
+              </a:rPr>
+              <a:t> tu </a:t>
+            </a:r>
+            <a:r>
+              <a:rPr sz="1300" b="1" i="0">
                 <a:solidFill>
                   <a:srgbClr val="2B2B2B"/>
                 </a:solidFill>
@@ -10654,7 +11460,7 @@
               <a:t>nombre</a:t>
             </a:r>
             <a:r>
-              <a:rPr sz="1400" b="0" i="0">
+              <a:rPr sz="1300" b="0" i="0">
                 <a:solidFill>
                   <a:srgbClr val="2B2B2B"/>
                 </a:solidFill>
@@ -10663,40 +11469,40 @@
               <a:t> + </a:t>
             </a:r>
             <a:r>
-              <a:rPr sz="1400" b="1" i="0">
-                <a:solidFill>
-                  <a:srgbClr val="2B2B2B"/>
-                </a:solidFill>
-                <a:latin typeface="Calibri"/>
-              </a:rPr>
-              <a:t>expectativa del curso</a:t>
-            </a:r>
-            <a:r>
-              <a:rPr sz="1400" b="0" i="0">
-                <a:solidFill>
-                  <a:srgbClr val="2B2B2B"/>
-                </a:solidFill>
-                <a:latin typeface="Calibri"/>
-              </a:rPr>
-              <a:t> o </a:t>
-            </a:r>
-            <a:r>
-              <a:rPr sz="1400" b="1" i="0">
-                <a:solidFill>
-                  <a:srgbClr val="2B2B2B"/>
-                </a:solidFill>
-                <a:latin typeface="Calibri"/>
-              </a:rPr>
-              <a:t>tema de interés</a:t>
-            </a:r>
-            <a:r>
-              <a:rPr sz="1400" b="0" i="0">
-                <a:solidFill>
-                  <a:srgbClr val="2B2B2B"/>
-                </a:solidFill>
-                <a:latin typeface="Calibri"/>
-              </a:rPr>
-              <a:t> (1 frase).</a:t>
+              <a:rPr sz="1300" b="1" i="0">
+                <a:solidFill>
+                  <a:srgbClr val="2B2B2B"/>
+                </a:solidFill>
+                <a:latin typeface="Calibri"/>
+              </a:rPr>
+              <a:t>tema del artículo</a:t>
+            </a:r>
+            <a:r>
+              <a:rPr sz="1300" b="0" i="0">
+                <a:solidFill>
+                  <a:srgbClr val="2B2B2B"/>
+                </a:solidFill>
+                <a:latin typeface="Calibri"/>
+              </a:rPr>
+              <a:t> (1 frase) + expectativa del semestre. Entras con tu correo </a:t>
+            </a:r>
+            <a:r>
+              <a:rPr sz="1300" b="1" i="0">
+                <a:solidFill>
+                  <a:srgbClr val="2B2B2B"/>
+                </a:solidFill>
+                <a:latin typeface="Calibri"/>
+              </a:rPr>
+              <a:t>@cun.edu.co</a:t>
+            </a:r>
+            <a:r>
+              <a:rPr sz="1300" b="0" i="0">
+                <a:solidFill>
+                  <a:srgbClr val="2B2B2B"/>
+                </a:solidFill>
+                <a:latin typeface="Calibri"/>
+              </a:rPr>
+              <a:t>: no hay que crear cuenta ni instalar nada.</a:t>
             </a:r>
           </a:p>
           <a:p>
@@ -10706,31 +11512,31 @@
               </a:spcAft>
             </a:pPr>
             <a:r>
-              <a:rPr sz="1400" b="0" i="0">
-                <a:solidFill>
-                  <a:srgbClr val="2B2B2B"/>
-                </a:solidFill>
-                <a:latin typeface="Calibri"/>
-              </a:rPr>
-              <a:t>–   Tablero oficial: </a:t>
-            </a:r>
-            <a:r>
-              <a:rPr sz="1400" b="1" i="0">
-                <a:solidFill>
-                  <a:srgbClr val="2B2B2B"/>
-                </a:solidFill>
-                <a:latin typeface="Calibri"/>
-              </a:rPr>
-              <a:t>Padlet</a:t>
-            </a:r>
-            <a:r>
-              <a:rPr sz="1400" b="0" i="0">
-                <a:solidFill>
-                  <a:srgbClr val="2B2B2B"/>
-                </a:solidFill>
-                <a:latin typeface="Calibri"/>
-              </a:rPr>
-              <a:t> (mismo enlace en los 5 cursos).</a:t>
+              <a:rPr sz="1300" b="0" i="0">
+                <a:solidFill>
+                  <a:srgbClr val="2B2B2B"/>
+                </a:solidFill>
+                <a:latin typeface="Calibri"/>
+              </a:rPr>
+              <a:t>–   </a:t>
+            </a:r>
+            <a:r>
+              <a:rPr sz="1300" b="1" i="0">
+                <a:solidFill>
+                  <a:srgbClr val="2B2B2B"/>
+                </a:solidFill>
+                <a:latin typeface="Calibri"/>
+              </a:rPr>
+              <a:t>Ahora, ~3 min.</a:t>
+            </a:r>
+            <a:r>
+              <a:rPr sz="1300" b="0" i="0">
+                <a:solidFill>
+                  <a:srgbClr val="2B2B2B"/>
+                </a:solidFill>
+                <a:latin typeface="Calibri"/>
+              </a:rPr>
+              <a:t> Somos 112: no alcanzamos a presentarnos uno por uno, así que el formulario nos ordena.</a:t>
             </a:r>
           </a:p>
           <a:p>
@@ -10740,13 +11546,171 @@
               </a:spcAft>
             </a:pPr>
             <a:r>
-              <a:rPr sz="1400" b="0" i="0">
-                <a:solidFill>
-                  <a:srgbClr val="2B2B2B"/>
-                </a:solidFill>
-                <a:latin typeface="Calibri"/>
-              </a:rPr>
-              <a:t>–   Ahora (~7 min). Leemos juntos 3–4 notas (sin juzgar).</a:t>
+              <a:rPr sz="1300" b="0" i="0">
+                <a:solidFill>
+                  <a:srgbClr val="2B2B2B"/>
+                </a:solidFill>
+                <a:latin typeface="Calibri"/>
+              </a:rPr>
+              <a:t>–   </a:t>
+            </a:r>
+            <a:r>
+              <a:rPr sz="1300" b="1" i="0">
+                <a:solidFill>
+                  <a:srgbClr val="2B2B2B"/>
+                </a:solidFill>
+                <a:latin typeface="Calibri"/>
+              </a:rPr>
+              <a:t>Con eso, hoy:</a:t>
+            </a:r>
+            <a:r>
+              <a:rPr sz="1300" b="0" i="0">
+                <a:solidFill>
+                  <a:srgbClr val="2B2B2B"/>
+                </a:solidFill>
+                <a:latin typeface="Calibri"/>
+              </a:rPr>
+              <a:t> el Docente lee en voz alta </a:t>
+            </a:r>
+            <a:r>
+              <a:rPr sz="1300" b="1" i="0">
+                <a:solidFill>
+                  <a:srgbClr val="2B2B2B"/>
+                </a:solidFill>
+                <a:latin typeface="Calibri"/>
+              </a:rPr>
+              <a:t>5 o 6 respuestas</a:t>
+            </a:r>
+            <a:r>
+              <a:rPr sz="1300" b="0" i="0">
+                <a:solidFill>
+                  <a:srgbClr val="2B2B2B"/>
+                </a:solidFill>
+                <a:latin typeface="Calibri"/>
+              </a:rPr>
+              <a:t> y proyecta el </a:t>
+            </a:r>
+            <a:r>
+              <a:rPr sz="1300" b="1" i="0">
+                <a:solidFill>
+                  <a:srgbClr val="2B2B2B"/>
+                </a:solidFill>
+                <a:latin typeface="Calibri"/>
+              </a:rPr>
+              <a:t>resumen</a:t>
+            </a:r>
+            <a:r>
+              <a:rPr sz="1300" b="0" i="0">
+                <a:solidFill>
+                  <a:srgbClr val="2B2B2B"/>
+                </a:solidFill>
+                <a:latin typeface="Calibri"/>
+              </a:rPr>
+              <a:t> del formulario — ahí quedan todas a la vista, no solo las leídas.</a:t>
+            </a:r>
+          </a:p>
+          <a:p>
+            <a:pPr>
+              <a:spcAft>
+                <a:spcPts val="1000"/>
+              </a:spcAft>
+            </a:pPr>
+            <a:r>
+              <a:rPr sz="1300" b="0" i="0">
+                <a:solidFill>
+                  <a:srgbClr val="2B2B2B"/>
+                </a:solidFill>
+                <a:latin typeface="Calibri"/>
+              </a:rPr>
+              <a:t>–   </a:t>
+            </a:r>
+            <a:r>
+              <a:rPr sz="1300" b="1" i="0">
+                <a:solidFill>
+                  <a:srgbClr val="2B2B2B"/>
+                </a:solidFill>
+                <a:latin typeface="Calibri"/>
+              </a:rPr>
+              <a:t>En vivo:</a:t>
+            </a:r>
+            <a:r>
+              <a:rPr sz="1300" b="0" i="0">
+                <a:solidFill>
+                  <a:srgbClr val="2B2B2B"/>
+                </a:solidFill>
+                <a:latin typeface="Calibri"/>
+              </a:rPr>
+              <a:t> las preguntas y las votaciones van por la </a:t>
+            </a:r>
+            <a:r>
+              <a:rPr sz="1300" b="1" i="0">
+                <a:solidFill>
+                  <a:srgbClr val="2B2B2B"/>
+                </a:solidFill>
+                <a:latin typeface="Calibri"/>
+              </a:rPr>
+              <a:t>encuesta</a:t>
+            </a:r>
+            <a:r>
+              <a:rPr sz="1300" b="0" i="0">
+                <a:solidFill>
+                  <a:srgbClr val="2B2B2B"/>
+                </a:solidFill>
+                <a:latin typeface="Calibri"/>
+              </a:rPr>
+              <a:t> y el </a:t>
+            </a:r>
+            <a:r>
+              <a:rPr sz="1300" b="1" i="0">
+                <a:solidFill>
+                  <a:srgbClr val="2B2B2B"/>
+                </a:solidFill>
+                <a:latin typeface="Calibri"/>
+              </a:rPr>
+              <a:t>Q&amp;A</a:t>
+            </a:r>
+            <a:r>
+              <a:rPr sz="1300" b="0" i="0">
+                <a:solidFill>
+                  <a:srgbClr val="2B2B2B"/>
+                </a:solidFill>
+                <a:latin typeface="Calibri"/>
+              </a:rPr>
+              <a:t> del propio Meet; no hay que abrir ninguna otra plataforma.</a:t>
+            </a:r>
+          </a:p>
+          <a:p>
+            <a:pPr>
+              <a:spcAft>
+                <a:spcPts val="1000"/>
+              </a:spcAft>
+            </a:pPr>
+            <a:r>
+              <a:rPr sz="1300" b="0" i="0">
+                <a:solidFill>
+                  <a:srgbClr val="2B2B2B"/>
+                </a:solidFill>
+                <a:latin typeface="Calibri"/>
+              </a:rPr>
+              <a:t>–   </a:t>
+            </a:r>
+            <a:r>
+              <a:rPr sz="1300" b="1" i="0">
+                <a:solidFill>
+                  <a:srgbClr val="2B2B2B"/>
+                </a:solidFill>
+                <a:latin typeface="Calibri"/>
+              </a:rPr>
+              <a:t>Después:</a:t>
+            </a:r>
+            <a:r>
+              <a:rPr sz="1300" b="0" i="0">
+                <a:solidFill>
+                  <a:srgbClr val="2B2B2B"/>
+                </a:solidFill>
+                <a:latin typeface="Calibri"/>
+              </a:rPr>
+              <a:t> las respuestas quedan en una hoja que el Docente usa todo el periodo (equipos, ejemplos y seguimiento).</a:t>
             </a:r>
           </a:p>
         </p:txBody>
@@ -10795,40 +11759,16 @@
           </a:p>
         </p:txBody>
       </p:sp>
-      <p:pic>
-        <p:nvPicPr>
-          <p:cNvPr id="7" name="Picture 6" descr="qr_presentacion_estudiantes.png"/>
-          <p:cNvPicPr>
-            <a:picLocks noChangeAspect="1"/>
-          </p:cNvPicPr>
+      <p:sp>
+        <p:nvSpPr>
+          <p:cNvPr id="7" name="TextBox 6"/>
+          <p:cNvSpPr txBox="1"/>
           <p:nvPr/>
-        </p:nvPicPr>
-        <p:blipFill>
-          <a:blip r:embed="rId2"/>
-          <a:stretch>
-            <a:fillRect/>
-          </a:stretch>
-        </p:blipFill>
+        </p:nvSpPr>
         <p:spPr>
           <a:xfrm>
-            <a:off x="8442655" y="2103120"/>
-            <a:ext cx="3108960" cy="3108960"/>
-          </a:xfrm>
-          <a:prstGeom prst="rect">
-            <a:avLst/>
-          </a:prstGeom>
-        </p:spPr>
-      </p:pic>
-      <p:sp>
-        <p:nvSpPr>
-          <p:cNvPr id="8" name="TextBox 7"/>
-          <p:cNvSpPr txBox="1"/>
-          <p:nvPr/>
-        </p:nvSpPr>
-        <p:spPr>
-          <a:xfrm>
-            <a:off x="8332927" y="5230367"/>
-            <a:ext cx="3328415" cy="256032"/>
+            <a:off x="8579815" y="2926079"/>
+            <a:ext cx="2834640" cy="1463040"/>
           </a:xfrm>
           <a:prstGeom prst="rect">
             <a:avLst/>
@@ -10836,34 +11776,50 @@
           <a:noFill/>
         </p:spPr>
         <p:txBody>
-          <a:bodyPr wrap="square" anchor="t" lIns="0" rIns="0" tIns="0" bIns="0">
+          <a:bodyPr wrap="square" anchor="ctr" lIns="0" rIns="0" tIns="0" bIns="0">
             <a:spAutoFit/>
           </a:bodyPr>
           <a:lstStyle/>
           <a:p>
             <a:pPr algn="ctr"/>
             <a:r>
-              <a:rPr sz="1200" b="1" i="0">
+              <a:rPr sz="1800" b="1" i="0">
                 <a:solidFill>
                   <a:srgbClr val="0C2340"/>
                 </a:solidFill>
                 <a:latin typeface="Calibri"/>
               </a:rPr>
-              <a:t>Escanea o abre</a:t>
-            </a:r>
-          </a:p>
-        </p:txBody>
-      </p:sp>
-      <p:sp>
-        <p:nvSpPr>
-          <p:cNvPr id="9" name="TextBox 8"/>
+              <a:t>QR pendiente</a:t>
+            </a:r>
+          </a:p>
+          <a:p>
+            <a:pPr algn="ctr">
+              <a:spcBef>
+                <a:spcPts val="1000"/>
+              </a:spcBef>
+            </a:pPr>
+            <a:r>
+              <a:rPr sz="1200" b="0" i="0">
+                <a:solidFill>
+                  <a:srgbClr val="2B2B2B"/>
+                </a:solidFill>
+                <a:latin typeface="Calibri"/>
+              </a:rPr>
+              <a:t>Se genera cuando el formulario tenga enlace real.</a:t>
+            </a:r>
+          </a:p>
+        </p:txBody>
+      </p:sp>
+      <p:sp>
+        <p:nvSpPr>
+          <p:cNvPr id="8" name="TextBox 7"/>
           <p:cNvSpPr txBox="1"/>
           <p:nvPr/>
         </p:nvSpPr>
         <p:spPr>
           <a:xfrm>
-            <a:off x="8332927" y="5468112"/>
-            <a:ext cx="3328415" cy="411480"/>
+            <a:off x="8332927" y="5230367"/>
+            <a:ext cx="3328415" cy="640080"/>
           </a:xfrm>
           <a:prstGeom prst="rect">
             <a:avLst/>
@@ -10884,14 +11840,14 @@
                 </a:solidFill>
                 <a:latin typeface="Calibri"/>
               </a:rPr>
-              <a:t>https://padlet.com/andres_dfx/cun-wruz81hmf9k06gd7</a:t>
-            </a:r>
-          </a:p>
-        </p:txBody>
-      </p:sp>
-      <p:sp>
-        <p:nvSpPr>
-          <p:cNvPr id="10" name="TextBox 9"/>
+              <a:t>[URL Formulario Preséntate — pendiente · TRABAJO DE GRADO 3]</a:t>
+            </a:r>
+          </a:p>
+        </p:txBody>
+      </p:sp>
+      <p:sp>
+        <p:nvSpPr>
+          <p:cNvPr id="9" name="TextBox 8"/>
           <p:cNvSpPr txBox="1"/>
           <p:nvPr/>
         </p:nvSpPr>
@@ -12317,7 +13273,7 @@
                 </a:solidFill>
                 <a:latin typeface="Calibri"/>
               </a:rPr>
-              <a:t>Cómo trabajamos: una hora semanal para cerrar el trabajo de grado</a:t>
+              <a:t>Preséntate: el formulario del curso (somos 112)</a:t>
             </a:r>
           </a:p>
         </p:txBody>
@@ -12350,7 +13306,7 @@
               </a:spcAft>
             </a:pPr>
             <a:r>
-              <a:rPr sz="1600" b="0" i="0">
+              <a:rPr sz="1500" b="0" i="0">
                 <a:solidFill>
                   <a:srgbClr val="2B2B2B"/>
                 </a:solidFill>
@@ -12359,40 +13315,22 @@
               <a:t>–   </a:t>
             </a:r>
             <a:r>
-              <a:rPr sz="1600" b="1" i="0">
-                <a:solidFill>
-                  <a:srgbClr val="2B2B2B"/>
-                </a:solidFill>
-                <a:latin typeface="Calibri"/>
-              </a:rPr>
-              <a:t>Una hora sincrónica por semana</a:t>
-            </a:r>
-            <a:r>
-              <a:rPr sz="1600" b="0" i="0">
-                <a:solidFill>
-                  <a:srgbClr val="2B2B2B"/>
-                </a:solidFill>
-                <a:latin typeface="Calibri"/>
-              </a:rPr>
-              <a:t> y quince encuentros. TG3 </a:t>
-            </a:r>
-            <a:r>
-              <a:rPr sz="1600" b="1" i="0">
-                <a:solidFill>
-                  <a:srgbClr val="2B2B2B"/>
-                </a:solidFill>
-                <a:latin typeface="Calibri"/>
-              </a:rPr>
-              <a:t>no empieza nada</a:t>
-            </a:r>
-            <a:r>
-              <a:rPr sz="1600" b="0" i="0">
-                <a:solidFill>
-                  <a:srgbClr val="2B2B2B"/>
-                </a:solidFill>
-                <a:latin typeface="Calibri"/>
-              </a:rPr>
-              <a:t>: termina lo que usted viene construyendo desde el semestre anterior.</a:t>
+              <a:rPr sz="1500" b="1" i="0">
+                <a:solidFill>
+                  <a:srgbClr val="2B2B2B"/>
+                </a:solidFill>
+                <a:latin typeface="Calibri"/>
+              </a:rPr>
+              <a:t>Los tres grupos (54450, 54466 y 54467) ven la clase juntos: 112 matriculados.</a:t>
+            </a:r>
+            <a:r>
+              <a:rPr sz="1500" b="0" i="0">
+                <a:solidFill>
+                  <a:srgbClr val="2B2B2B"/>
+                </a:solidFill>
+                <a:latin typeface="Calibri"/>
+              </a:rPr>
+              <a:t> Presentarse uno por uno se llevaría la hora entera.</a:t>
             </a:r>
           </a:p>
           <a:p>
@@ -12402,31 +13340,13 @@
               </a:spcAft>
             </a:pPr>
             <a:r>
-              <a:rPr sz="1600" b="0" i="0">
-                <a:solidFill>
-                  <a:srgbClr val="2B2B2B"/>
-                </a:solidFill>
-                <a:latin typeface="Calibri"/>
-              </a:rPr>
-              <a:t>–   </a:t>
-            </a:r>
-            <a:r>
-              <a:rPr sz="1600" b="1" i="0">
-                <a:solidFill>
-                  <a:srgbClr val="2B2B2B"/>
-                </a:solidFill>
-                <a:latin typeface="Calibri"/>
-              </a:rPr>
-              <a:t>Antes de cada encuentro:</a:t>
-            </a:r>
-            <a:r>
-              <a:rPr sz="1600" b="0" i="0">
-                <a:solidFill>
-                  <a:srgbClr val="2B2B2B"/>
-                </a:solidFill>
-                <a:latin typeface="Calibri"/>
-              </a:rPr>
-              <a:t> revisa en CDigital lo que el Docente publica y avanza la sección de la semana.</a:t>
+              <a:rPr sz="1500" b="0" i="0">
+                <a:solidFill>
+                  <a:srgbClr val="2B2B2B"/>
+                </a:solidFill>
+                <a:latin typeface="Calibri"/>
+              </a:rPr>
+              <a:t>–   Un muro de notas tampoco sirve a esta escala: con 112 notas nadie alcanza a leer las de los demás.</a:t>
             </a:r>
           </a:p>
           <a:p>
@@ -12436,49 +13356,99 @@
               </a:spcAft>
             </a:pPr>
             <a:r>
-              <a:rPr sz="1600" b="0" i="0">
-                <a:solidFill>
-                  <a:srgbClr val="2B2B2B"/>
-                </a:solidFill>
-                <a:latin typeface="Calibri"/>
-              </a:rPr>
-              <a:t>–   </a:t>
-            </a:r>
-            <a:r>
-              <a:rPr sz="1600" b="1" i="0">
-                <a:solidFill>
-                  <a:srgbClr val="2B2B2B"/>
-                </a:solidFill>
-                <a:latin typeface="Calibri"/>
-              </a:rPr>
-              <a:t>Durante el encuentro:</a:t>
-            </a:r>
-            <a:r>
-              <a:rPr sz="1600" b="0" i="0">
-                <a:solidFill>
-                  <a:srgbClr val="2B2B2B"/>
-                </a:solidFill>
-                <a:latin typeface="Calibri"/>
-              </a:rPr>
-              <a:t> criterio y ejemplo en pocos minutos, y luego </a:t>
-            </a:r>
-            <a:r>
-              <a:rPr sz="1600" b="1" i="0">
-                <a:solidFill>
-                  <a:srgbClr val="2B2B2B"/>
-                </a:solidFill>
-                <a:latin typeface="Calibri"/>
-              </a:rPr>
-              <a:t>revisión sobre su documento real</a:t>
-            </a:r>
-            <a:r>
-              <a:rPr sz="1600" b="0" i="0">
-                <a:solidFill>
-                  <a:srgbClr val="2B2B2B"/>
-                </a:solidFill>
-                <a:latin typeface="Calibri"/>
-              </a:rPr>
-              <a:t>. Aquí se corrige texto, no se toma dictado.</a:t>
+              <a:rPr sz="1500" b="0" i="0">
+                <a:solidFill>
+                  <a:srgbClr val="2B2B2B"/>
+                </a:solidFill>
+                <a:latin typeface="Calibri"/>
+              </a:rPr>
+              <a:t>–   El rompehielos es un </a:t>
+            </a:r>
+            <a:r>
+              <a:rPr sz="1500" b="1" i="0">
+                <a:solidFill>
+                  <a:srgbClr val="2B2B2B"/>
+                </a:solidFill>
+                <a:latin typeface="Calibri"/>
+              </a:rPr>
+              <a:t>formulario de Google</a:t>
+            </a:r>
+            <a:r>
+              <a:rPr sz="1500" b="0" i="0">
+                <a:solidFill>
+                  <a:srgbClr val="2B2B2B"/>
+                </a:solidFill>
+                <a:latin typeface="Calibri"/>
+              </a:rPr>
+              <a:t>: el Docente lo pega en el chat del Meet y queda en el LEEME de `Clases/`.</a:t>
+            </a:r>
+          </a:p>
+          <a:p>
+            <a:pPr lvl="1">
+              <a:spcAft>
+                <a:spcPts val="600"/>
+              </a:spcAft>
+            </a:pPr>
+            <a:r>
+              <a:rPr sz="1400" b="0" i="0">
+                <a:solidFill>
+                  <a:srgbClr val="2B2B2B"/>
+                </a:solidFill>
+                <a:latin typeface="Calibri"/>
+              </a:rPr>
+              <a:t>●   </a:t>
+            </a:r>
+            <a:r>
+              <a:rPr sz="1400" b="1" i="0">
+                <a:solidFill>
+                  <a:srgbClr val="2B2B2B"/>
+                </a:solidFill>
+                <a:latin typeface="Calibri"/>
+              </a:rPr>
+              <a:t>Enlace:</a:t>
+            </a:r>
+            <a:r>
+              <a:rPr sz="1400" b="0" i="0">
+                <a:solidFill>
+                  <a:srgbClr val="2B2B2B"/>
+                </a:solidFill>
+                <a:latin typeface="Calibri"/>
+              </a:rPr>
+              <a:t> [URL Formulario «Preséntate» — pendiente]</a:t>
+            </a:r>
+          </a:p>
+          <a:p>
+            <a:pPr lvl="1">
+              <a:spcAft>
+                <a:spcPts val="600"/>
+              </a:spcAft>
+            </a:pPr>
+            <a:r>
+              <a:rPr sz="1400" b="0" i="0">
+                <a:solidFill>
+                  <a:srgbClr val="2B2B2B"/>
+                </a:solidFill>
+                <a:latin typeface="Calibri"/>
+              </a:rPr>
+              <a:t>●   Se entra con su correo </a:t>
+            </a:r>
+            <a:r>
+              <a:rPr sz="1400" b="1" i="0">
+                <a:solidFill>
+                  <a:srgbClr val="2B2B2B"/>
+                </a:solidFill>
+                <a:latin typeface="Calibri"/>
+              </a:rPr>
+              <a:t>@cun.edu.co</a:t>
+            </a:r>
+            <a:r>
+              <a:rPr sz="1400" b="0" i="0">
+                <a:solidFill>
+                  <a:srgbClr val="2B2B2B"/>
+                </a:solidFill>
+                <a:latin typeface="Calibri"/>
+              </a:rPr>
+              <a:t>: sin cuenta nueva, sin instalar nada y sin costo.</a:t>
             </a:r>
           </a:p>
           <a:p>
@@ -12488,7 +13458,7 @@
               </a:spcAft>
             </a:pPr>
             <a:r>
-              <a:rPr sz="1600" b="0" i="0">
+              <a:rPr sz="1500" b="0" i="0">
                 <a:solidFill>
                   <a:srgbClr val="2B2B2B"/>
                 </a:solidFill>
@@ -12497,22 +13467,58 @@
               <a:t>–   </a:t>
             </a:r>
             <a:r>
-              <a:rPr sz="1600" b="1" i="0">
-                <a:solidFill>
-                  <a:srgbClr val="2B2B2B"/>
-                </a:solidFill>
-                <a:latin typeface="Calibri"/>
-              </a:rPr>
-              <a:t>Después:</a:t>
-            </a:r>
-            <a:r>
-              <a:rPr sz="1600" b="0" i="0">
-                <a:solidFill>
-                  <a:srgbClr val="2B2B2B"/>
-                </a:solidFill>
-                <a:latin typeface="Calibri"/>
-              </a:rPr>
-              <a:t> cierra la sección y la sube a CDigital antes de la siguiente clase.</a:t>
+              <a:rPr sz="1500" b="1" i="0">
+                <a:solidFill>
+                  <a:srgbClr val="2B2B2B"/>
+                </a:solidFill>
+                <a:latin typeface="Calibri"/>
+              </a:rPr>
+              <a:t>Qué responde</a:t>
+            </a:r>
+            <a:r>
+              <a:rPr sz="1500" b="0" i="0">
+                <a:solidFill>
+                  <a:srgbClr val="2B2B2B"/>
+                </a:solidFill>
+                <a:latin typeface="Calibri"/>
+              </a:rPr>
+              <a:t> (2–3 minutos, una sola vez): nombre, </a:t>
+            </a:r>
+            <a:r>
+              <a:rPr sz="1500" b="1" i="0">
+                <a:solidFill>
+                  <a:srgbClr val="2B2B2B"/>
+                </a:solidFill>
+                <a:latin typeface="Calibri"/>
+              </a:rPr>
+              <a:t>su grupo</a:t>
+            </a:r>
+            <a:r>
+              <a:rPr sz="1500" b="0" i="0">
+                <a:solidFill>
+                  <a:srgbClr val="2B2B2B"/>
+                </a:solidFill>
+                <a:latin typeface="Calibri"/>
+              </a:rPr>
+              <a:t>, </a:t>
+            </a:r>
+            <a:r>
+              <a:rPr sz="1500" b="1" i="0">
+                <a:solidFill>
+                  <a:srgbClr val="2B2B2B"/>
+                </a:solidFill>
+                <a:latin typeface="Calibri"/>
+              </a:rPr>
+              <a:t>tema del artículo</a:t>
+            </a:r>
+            <a:r>
+              <a:rPr sz="1500" b="0" i="0">
+                <a:solidFill>
+                  <a:srgbClr val="2B2B2B"/>
+                </a:solidFill>
+                <a:latin typeface="Calibri"/>
+              </a:rPr>
+              <a:t> en una frase y qué espera del semestre.</a:t>
             </a:r>
           </a:p>
           <a:p>
@@ -12522,7 +13528,7 @@
               </a:spcAft>
             </a:pPr>
             <a:r>
-              <a:rPr sz="1600" b="0" i="0">
+              <a:rPr sz="1500" b="0" i="0">
                 <a:solidFill>
                   <a:srgbClr val="2B2B2B"/>
                 </a:solidFill>
@@ -12531,19 +13537,28 @@
               <a:t>–   </a:t>
             </a:r>
             <a:r>
-              <a:rPr sz="1600" b="1" i="0">
-                <a:solidFill>
-                  <a:srgbClr val="2B2B2B"/>
-                </a:solidFill>
-                <a:latin typeface="Calibri"/>
-              </a:rPr>
-              <a:t>Qué traer siempre:</a:t>
-            </a:r>
-          </a:p>
-          <a:p>
-            <a:pPr lvl="1">
+              <a:rPr sz="1500" b="1" i="0">
+                <a:solidFill>
+                  <a:srgbClr val="2B2B2B"/>
+                </a:solidFill>
+                <a:latin typeface="Calibri"/>
+              </a:rPr>
+              <a:t>Cuándo:</a:t>
+            </a:r>
+            <a:r>
+              <a:rPr sz="1500" b="0" i="0">
+                <a:solidFill>
+                  <a:srgbClr val="2B2B2B"/>
+                </a:solidFill>
+                <a:latin typeface="Calibri"/>
+              </a:rPr>
+              <a:t> en los primeros minutos del encuentro. El Docente proyecta el resumen agrupado y lee en voz alta cinco o seis respuestas; el resto queda a la vista.</a:t>
+            </a:r>
+          </a:p>
+          <a:p>
+            <a:pPr>
               <a:spcAft>
-                <a:spcPts val="600"/>
+                <a:spcPts val="1000"/>
               </a:spcAft>
             </a:pPr>
             <a:r>
@@ -12553,7 +13568,7 @@
                 </a:solidFill>
                 <a:latin typeface="Calibri"/>
               </a:rPr>
-              <a:t>●   Su </a:t>
+              <a:t>–   </a:t>
             </a:r>
             <a:r>
               <a:rPr sz="1500" b="1" i="0">
@@ -12562,7 +13577,7 @@
                 </a:solidFill>
                 <a:latin typeface="Calibri"/>
               </a:rPr>
-              <a:t>artículo abierto</a:t>
+              <a:t>En vivo, la participación va por el Meet:</a:t>
             </a:r>
             <a:r>
               <a:rPr sz="1500" b="0" i="0">
@@ -12571,13 +13586,13 @@
                 </a:solidFill>
                 <a:latin typeface="Calibri"/>
               </a:rPr>
-              <a:t>, en la versión vigente (una sola, no cinco copias).</a:t>
-            </a:r>
-          </a:p>
-          <a:p>
-            <a:pPr lvl="1">
+              <a:t> las encuestas y el Q&amp;A de la sala aguantan a los 112 sin cola de micrófono.</a:t>
+            </a:r>
+          </a:p>
+          <a:p>
+            <a:pPr>
               <a:spcAft>
-                <a:spcPts val="600"/>
+                <a:spcPts val="1000"/>
               </a:spcAft>
             </a:pPr>
             <a:r>
@@ -12587,41 +13602,7 @@
                 </a:solidFill>
                 <a:latin typeface="Calibri"/>
               </a:rPr>
-              <a:t>●   Su </a:t>
-            </a:r>
-            <a:r>
-              <a:rPr sz="1500" b="1" i="0">
-                <a:solidFill>
-                  <a:srgbClr val="2B2B2B"/>
-                </a:solidFill>
-                <a:latin typeface="Calibri"/>
-              </a:rPr>
-              <a:t>lista de referencias</a:t>
-            </a:r>
-            <a:r>
-              <a:rPr sz="1500" b="0" i="0">
-                <a:solidFill>
-                  <a:srgbClr val="2B2B2B"/>
-                </a:solidFill>
-                <a:latin typeface="Calibri"/>
-              </a:rPr>
-              <a:t> tal como va hoy, con el conteo real.</a:t>
-            </a:r>
-          </a:p>
-          <a:p>
-            <a:pPr lvl="1">
-              <a:spcAft>
-                <a:spcPts val="600"/>
-              </a:spcAft>
-            </a:pPr>
-            <a:r>
-              <a:rPr sz="1500" b="0" i="0">
-                <a:solidFill>
-                  <a:srgbClr val="2B2B2B"/>
-                </a:solidFill>
-                <a:latin typeface="Calibri"/>
-              </a:rPr>
-              <a:t>●   Una duda concreta: “esta discusión no dialoga con los autores”, no “ayúdeme con el artículo”.</a:t>
+              <a:t>–   Queda abierto hasta la Sesión 02 para quien llegó tarde.</a:t>
             </a:r>
           </a:p>
         </p:txBody>
@@ -12690,7 +13671,7 @@
                 </a:solidFill>
                 <a:latin typeface="Calibri"/>
               </a:rPr>
-              <a:t>El calendario aprieta al final: quien avanza una sección por semana llega a sustentar con dominio; quien deja todo para el cierre, sustenta lo que alcanzó a leer.</a:t>
+              <a:t>El grupo importa: la ACA Final y la sustentación cierran en fechas distintas según el grupo, y el Docente usa esa hoja para no confundirlos.</a:t>
             </a:r>
           </a:p>
         </p:txBody>
@@ -12795,7 +13776,7 @@
                 </a:solidFill>
                 <a:latin typeface="Calibri"/>
               </a:rPr>
-              <a:t>Qué se llevan al final: artículo, sustentación y repositorio</a:t>
+              <a:t>Cómo trabajamos: una hora semanal para cerrar el trabajo de grado</a:t>
             </a:r>
           </a:p>
         </p:txBody>
@@ -12834,7 +13815,7 @@
                 </a:solidFill>
                 <a:latin typeface="Calibri"/>
               </a:rPr>
-              <a:t>–   El producto de TG3 son </a:t>
+              <a:t>–   </a:t>
             </a:r>
             <a:r>
               <a:rPr sz="1600" b="1" i="0">
@@ -12843,7 +13824,7 @@
                 </a:solidFill>
                 <a:latin typeface="Calibri"/>
               </a:rPr>
-              <a:t>tres cosas encadenadas</a:t>
+              <a:t>Una hora sincrónica por semana</a:t>
             </a:r>
             <a:r>
               <a:rPr sz="1600" b="0" i="0">
@@ -12852,7 +13833,170 @@
                 </a:solidFill>
                 <a:latin typeface="Calibri"/>
               </a:rPr>
-              <a:t>, y las tres se anuncian hoy para que nadie se entere en la recta final:</a:t>
+              <a:t> y quince encuentros. TG3 </a:t>
+            </a:r>
+            <a:r>
+              <a:rPr sz="1600" b="1" i="0">
+                <a:solidFill>
+                  <a:srgbClr val="2B2B2B"/>
+                </a:solidFill>
+                <a:latin typeface="Calibri"/>
+              </a:rPr>
+              <a:t>no empieza nada</a:t>
+            </a:r>
+            <a:r>
+              <a:rPr sz="1600" b="0" i="0">
+                <a:solidFill>
+                  <a:srgbClr val="2B2B2B"/>
+                </a:solidFill>
+                <a:latin typeface="Calibri"/>
+              </a:rPr>
+              <a:t>: termina lo que usted viene construyendo desde el semestre anterior.</a:t>
+            </a:r>
+          </a:p>
+          <a:p>
+            <a:pPr>
+              <a:spcAft>
+                <a:spcPts val="1000"/>
+              </a:spcAft>
+            </a:pPr>
+            <a:r>
+              <a:rPr sz="1600" b="0" i="0">
+                <a:solidFill>
+                  <a:srgbClr val="2B2B2B"/>
+                </a:solidFill>
+                <a:latin typeface="Calibri"/>
+              </a:rPr>
+              <a:t>–   </a:t>
+            </a:r>
+            <a:r>
+              <a:rPr sz="1600" b="1" i="0">
+                <a:solidFill>
+                  <a:srgbClr val="2B2B2B"/>
+                </a:solidFill>
+                <a:latin typeface="Calibri"/>
+              </a:rPr>
+              <a:t>Antes de cada encuentro:</a:t>
+            </a:r>
+            <a:r>
+              <a:rPr sz="1600" b="0" i="0">
+                <a:solidFill>
+                  <a:srgbClr val="2B2B2B"/>
+                </a:solidFill>
+                <a:latin typeface="Calibri"/>
+              </a:rPr>
+              <a:t> revisa en CDigital lo que el Docente publica y avanza la sección de la semana.</a:t>
+            </a:r>
+          </a:p>
+          <a:p>
+            <a:pPr>
+              <a:spcAft>
+                <a:spcPts val="1000"/>
+              </a:spcAft>
+            </a:pPr>
+            <a:r>
+              <a:rPr sz="1600" b="0" i="0">
+                <a:solidFill>
+                  <a:srgbClr val="2B2B2B"/>
+                </a:solidFill>
+                <a:latin typeface="Calibri"/>
+              </a:rPr>
+              <a:t>–   </a:t>
+            </a:r>
+            <a:r>
+              <a:rPr sz="1600" b="1" i="0">
+                <a:solidFill>
+                  <a:srgbClr val="2B2B2B"/>
+                </a:solidFill>
+                <a:latin typeface="Calibri"/>
+              </a:rPr>
+              <a:t>Durante el encuentro:</a:t>
+            </a:r>
+            <a:r>
+              <a:rPr sz="1600" b="0" i="0">
+                <a:solidFill>
+                  <a:srgbClr val="2B2B2B"/>
+                </a:solidFill>
+                <a:latin typeface="Calibri"/>
+              </a:rPr>
+              <a:t> criterio y ejemplo en pocos minutos, y luego </a:t>
+            </a:r>
+            <a:r>
+              <a:rPr sz="1600" b="1" i="0">
+                <a:solidFill>
+                  <a:srgbClr val="2B2B2B"/>
+                </a:solidFill>
+                <a:latin typeface="Calibri"/>
+              </a:rPr>
+              <a:t>revisión sobre su documento real</a:t>
+            </a:r>
+            <a:r>
+              <a:rPr sz="1600" b="0" i="0">
+                <a:solidFill>
+                  <a:srgbClr val="2B2B2B"/>
+                </a:solidFill>
+                <a:latin typeface="Calibri"/>
+              </a:rPr>
+              <a:t>. Aquí se corrige texto, no se toma dictado.</a:t>
+            </a:r>
+          </a:p>
+          <a:p>
+            <a:pPr>
+              <a:spcAft>
+                <a:spcPts val="1000"/>
+              </a:spcAft>
+            </a:pPr>
+            <a:r>
+              <a:rPr sz="1600" b="0" i="0">
+                <a:solidFill>
+                  <a:srgbClr val="2B2B2B"/>
+                </a:solidFill>
+                <a:latin typeface="Calibri"/>
+              </a:rPr>
+              <a:t>–   </a:t>
+            </a:r>
+            <a:r>
+              <a:rPr sz="1600" b="1" i="0">
+                <a:solidFill>
+                  <a:srgbClr val="2B2B2B"/>
+                </a:solidFill>
+                <a:latin typeface="Calibri"/>
+              </a:rPr>
+              <a:t>Después:</a:t>
+            </a:r>
+            <a:r>
+              <a:rPr sz="1600" b="0" i="0">
+                <a:solidFill>
+                  <a:srgbClr val="2B2B2B"/>
+                </a:solidFill>
+                <a:latin typeface="Calibri"/>
+              </a:rPr>
+              <a:t> cierra la sección y la sube a CDigital antes de la siguiente clase.</a:t>
+            </a:r>
+          </a:p>
+          <a:p>
+            <a:pPr>
+              <a:spcAft>
+                <a:spcPts val="1000"/>
+              </a:spcAft>
+            </a:pPr>
+            <a:r>
+              <a:rPr sz="1600" b="0" i="0">
+                <a:solidFill>
+                  <a:srgbClr val="2B2B2B"/>
+                </a:solidFill>
+                <a:latin typeface="Calibri"/>
+              </a:rPr>
+              <a:t>–   </a:t>
+            </a:r>
+            <a:r>
+              <a:rPr sz="1600" b="1" i="0">
+                <a:solidFill>
+                  <a:srgbClr val="2B2B2B"/>
+                </a:solidFill>
+                <a:latin typeface="Calibri"/>
+              </a:rPr>
+              <a:t>Qué traer siempre:</a:t>
             </a:r>
           </a:p>
           <a:p>
@@ -12868,7 +14012,7 @@
                 </a:solidFill>
                 <a:latin typeface="Calibri"/>
               </a:rPr>
-              <a:t>●   </a:t>
+              <a:t>●   Su </a:t>
             </a:r>
             <a:r>
               <a:rPr sz="1500" b="1" i="0">
@@ -12877,7 +14021,7 @@
                 </a:solidFill>
                 <a:latin typeface="Calibri"/>
               </a:rPr>
-              <a:t>1. Un artículo resultado de investigación</a:t>
+              <a:t>artículo abierto</a:t>
             </a:r>
             <a:r>
               <a:rPr sz="1500" b="0" i="0">
@@ -12886,43 +14030,7 @@
                 </a:solidFill>
                 <a:latin typeface="Calibri"/>
               </a:rPr>
-              <a:t>, con revisión bibliográfica amplia (el Syllabus habla de </a:t>
-            </a:r>
-            <a:r>
-              <a:rPr sz="1500" b="1" i="0">
-                <a:solidFill>
-                  <a:srgbClr val="2B2B2B"/>
-                </a:solidFill>
-                <a:latin typeface="Calibri"/>
-              </a:rPr>
-              <a:t>al menos 50 referencias</a:t>
-            </a:r>
-            <a:r>
-              <a:rPr sz="1500" b="0" i="0">
-                <a:solidFill>
-                  <a:srgbClr val="2B2B2B"/>
-                </a:solidFill>
-                <a:latin typeface="Calibri"/>
-              </a:rPr>
-              <a:t>) y una </a:t>
-            </a:r>
-            <a:r>
-              <a:rPr sz="1500" b="1" i="0">
-                <a:solidFill>
-                  <a:srgbClr val="2B2B2B"/>
-                </a:solidFill>
-                <a:latin typeface="Calibri"/>
-              </a:rPr>
-              <a:t>extensión no inferior a 4.000 palabras</a:t>
-            </a:r>
-            <a:r>
-              <a:rPr sz="1500" b="0" i="0">
-                <a:solidFill>
-                  <a:srgbClr val="2B2B2B"/>
-                </a:solidFill>
-                <a:latin typeface="Calibri"/>
-              </a:rPr>
-              <a:t>.</a:t>
+              <a:t>, en la versión vigente (una sola, no cinco copias).</a:t>
             </a:r>
           </a:p>
           <a:p>
@@ -12938,7 +14046,7 @@
                 </a:solidFill>
                 <a:latin typeface="Calibri"/>
               </a:rPr>
-              <a:t>●   </a:t>
+              <a:t>●   Su </a:t>
             </a:r>
             <a:r>
               <a:rPr sz="1500" b="1" i="0">
@@ -12947,7 +14055,7 @@
                 </a:solidFill>
                 <a:latin typeface="Calibri"/>
               </a:rPr>
-              <a:t>2. Una sustentación ante jurados</a:t>
+              <a:t>lista de referencias</a:t>
             </a:r>
             <a:r>
               <a:rPr sz="1500" b="0" i="0">
@@ -12956,7 +14064,7 @@
                 </a:solidFill>
                 <a:latin typeface="Calibri"/>
               </a:rPr>
-              <a:t>: defensa oral de su trabajo, no una lectura de diapositivas.</a:t>
+              <a:t> tal como va hoy, con el conteo real.</a:t>
             </a:r>
           </a:p>
           <a:p>
@@ -12972,127 +14080,7 @@
                 </a:solidFill>
                 <a:latin typeface="Calibri"/>
               </a:rPr>
-              <a:t>●   </a:t>
-            </a:r>
-            <a:r>
-              <a:rPr sz="1500" b="1" i="0">
-                <a:solidFill>
-                  <a:srgbClr val="2B2B2B"/>
-                </a:solidFill>
-                <a:latin typeface="Calibri"/>
-              </a:rPr>
-              <a:t>3. La carga al repositorio institucional</a:t>
-            </a:r>
-            <a:r>
-              <a:rPr sz="1500" b="0" i="0">
-                <a:solidFill>
-                  <a:srgbClr val="2B2B2B"/>
-                </a:solidFill>
-                <a:latin typeface="Calibri"/>
-              </a:rPr>
-              <a:t>, con los entregables que exija el instructivo del programa.</a:t>
-            </a:r>
-          </a:p>
-          <a:p>
-            <a:pPr>
-              <a:spcAft>
-                <a:spcPts val="1000"/>
-              </a:spcAft>
-            </a:pPr>
-            <a:r>
-              <a:rPr sz="1600" b="0" i="0">
-                <a:solidFill>
-                  <a:srgbClr val="2B2B2B"/>
-                </a:solidFill>
-                <a:latin typeface="Calibri"/>
-              </a:rPr>
-              <a:t>–   Si su opción de grado incluye un </a:t>
-            </a:r>
-            <a:r>
-              <a:rPr sz="1600" b="1" i="0">
-                <a:solidFill>
-                  <a:srgbClr val="2B2B2B"/>
-                </a:solidFill>
-                <a:latin typeface="Calibri"/>
-              </a:rPr>
-              <a:t>producto de ingeniería</a:t>
-            </a:r>
-            <a:r>
-              <a:rPr sz="1600" b="0" i="0">
-                <a:solidFill>
-                  <a:srgbClr val="2B2B2B"/>
-                </a:solidFill>
-                <a:latin typeface="Calibri"/>
-              </a:rPr>
-              <a:t> (prototipo, sistema, modelo, dataset), el producto no reemplaza al artículo: se </a:t>
-            </a:r>
-            <a:r>
-              <a:rPr sz="1600" b="1" i="0">
-                <a:solidFill>
-                  <a:srgbClr val="2B2B2B"/>
-                </a:solidFill>
-                <a:latin typeface="Calibri"/>
-              </a:rPr>
-              <a:t>documenta e investiga</a:t>
-            </a:r>
-            <a:r>
-              <a:rPr sz="1600" b="0" i="0">
-                <a:solidFill>
-                  <a:srgbClr val="2B2B2B"/>
-                </a:solidFill>
-                <a:latin typeface="Calibri"/>
-              </a:rPr>
-              <a:t> dentro de él.</a:t>
-            </a:r>
-          </a:p>
-          <a:p>
-            <a:pPr>
-              <a:spcAft>
-                <a:spcPts val="1000"/>
-              </a:spcAft>
-            </a:pPr>
-            <a:r>
-              <a:rPr sz="1600" b="0" i="0">
-                <a:solidFill>
-                  <a:srgbClr val="2B2B2B"/>
-                </a:solidFill>
-                <a:latin typeface="Calibri"/>
-              </a:rPr>
-              <a:t>–   Para qué le sirve después: es lo que queda publicado con su nombre. Un artículo bien hecho se muestra en una entrevista, se cita y abre la puerta a posgrado.</a:t>
-            </a:r>
-          </a:p>
-          <a:p>
-            <a:pPr>
-              <a:spcAft>
-                <a:spcPts val="1000"/>
-              </a:spcAft>
-            </a:pPr>
-            <a:r>
-              <a:rPr sz="1600" b="0" i="0">
-                <a:solidFill>
-                  <a:srgbClr val="2B2B2B"/>
-                </a:solidFill>
-                <a:latin typeface="Calibri"/>
-              </a:rPr>
-              <a:t>–   Regla del curso: </a:t>
-            </a:r>
-            <a:r>
-              <a:rPr sz="1600" b="1" i="0">
-                <a:solidFill>
-                  <a:srgbClr val="2B2B2B"/>
-                </a:solidFill>
-                <a:latin typeface="Calibri"/>
-              </a:rPr>
-              <a:t>cada sesión alimenta ese mismo artículo</a:t>
-            </a:r>
-            <a:r>
-              <a:rPr sz="1600" b="0" i="0">
-                <a:solidFill>
-                  <a:srgbClr val="2B2B2B"/>
-                </a:solidFill>
-                <a:latin typeface="Calibri"/>
-              </a:rPr>
-              <a:t>. No hay talleres isla.</a:t>
+              <a:t>●   Una duda concreta: “esta discusión no dialoga con los autores”, no “ayúdeme con el artículo”.</a:t>
             </a:r>
           </a:p>
         </p:txBody>
@@ -13161,7 +14149,7 @@
                 </a:solidFill>
                 <a:latin typeface="Calibri"/>
               </a:rPr>
-              <a:t>Extensión y número de referencias son mínimos del Syllabus 94532, no metas opcionales. Se alcanzan sumando cada semana, nunca la última.</a:t>
+              <a:t>El calendario aprieta al final: quien avanza una sección por semana llega a sustentar con dominio; quien deja todo para el cierre, sustenta lo que alcanzó a leer.</a:t>
             </a:r>
           </a:p>
         </p:txBody>
@@ -13175,6 +14163,477 @@
 </file>
 
 <file path=ppt/slides/slide8.xml><?xml version="1.0" encoding="utf-8"?>
+<p:sld xmlns:a="http://schemas.openxmlformats.org/drawingml/2006/main" xmlns:p="http://schemas.openxmlformats.org/presentationml/2006/main" xmlns:r="http://schemas.openxmlformats.org/officeDocument/2006/relationships">
+  <p:cSld>
+    <p:bg>
+      <p:bgPr>
+        <a:solidFill>
+          <a:srgbClr val="FFFFFF"/>
+        </a:solidFill>
+        <a:effectLst/>
+      </p:bgPr>
+    </p:bg>
+    <p:spTree>
+      <p:nvGrpSpPr>
+        <p:cNvPr id="1" name=""/>
+        <p:cNvGrpSpPr/>
+        <p:nvPr/>
+      </p:nvGrpSpPr>
+      <p:grpSpPr/>
+      <p:sp>
+        <p:nvSpPr>
+          <p:cNvPr id="2" name="Rectangle 1"/>
+          <p:cNvSpPr/>
+          <p:nvPr/>
+        </p:nvSpPr>
+        <p:spPr>
+          <a:xfrm>
+            <a:off x="0" y="0"/>
+            <a:ext cx="12191695" cy="1188720"/>
+          </a:xfrm>
+          <a:prstGeom prst="rect">
+            <a:avLst/>
+          </a:prstGeom>
+          <a:solidFill>
+            <a:srgbClr val="0C2340"/>
+          </a:solidFill>
+          <a:ln>
+            <a:noFill/>
+          </a:ln>
+          <a:effectLst/>
+        </p:spPr>
+        <p:style>
+          <a:lnRef idx="1">
+            <a:schemeClr val="accent1"/>
+          </a:lnRef>
+          <a:fillRef idx="3">
+            <a:schemeClr val="accent1"/>
+          </a:fillRef>
+          <a:effectRef idx="2">
+            <a:schemeClr val="accent1"/>
+          </a:effectRef>
+          <a:fontRef idx="minor">
+            <a:schemeClr val="lt1"/>
+          </a:fontRef>
+        </p:style>
+        <p:txBody>
+          <a:bodyPr rtlCol="0" anchor="ctr"/>
+          <a:lstStyle/>
+          <a:p>
+            <a:pPr algn="ctr"/>
+          </a:p>
+        </p:txBody>
+      </p:sp>
+      <p:sp>
+        <p:nvSpPr>
+          <p:cNvPr id="3" name="TextBox 2"/>
+          <p:cNvSpPr txBox="1"/>
+          <p:nvPr/>
+        </p:nvSpPr>
+        <p:spPr>
+          <a:xfrm>
+            <a:off x="640080" y="0"/>
+            <a:ext cx="9082735" cy="1188720"/>
+          </a:xfrm>
+          <a:prstGeom prst="rect">
+            <a:avLst/>
+          </a:prstGeom>
+          <a:noFill/>
+        </p:spPr>
+        <p:txBody>
+          <a:bodyPr wrap="square" anchor="ctr" lIns="0" rIns="0" tIns="0" bIns="0">
+            <a:spAutoFit/>
+          </a:bodyPr>
+          <a:lstStyle/>
+          <a:p>
+            <a:pPr algn="ctr"/>
+            <a:r>
+              <a:rPr sz="2600" b="1" i="0">
+                <a:solidFill>
+                  <a:srgbClr val="FFFFFF"/>
+                </a:solidFill>
+                <a:latin typeface="Calibri"/>
+              </a:rPr>
+              <a:t>Qué se llevan al final: artículo, sustentación y repositorio</a:t>
+            </a:r>
+          </a:p>
+        </p:txBody>
+      </p:sp>
+      <p:sp>
+        <p:nvSpPr>
+          <p:cNvPr id="4" name="TextBox 3"/>
+          <p:cNvSpPr txBox="1"/>
+          <p:nvPr/>
+        </p:nvSpPr>
+        <p:spPr>
+          <a:xfrm>
+            <a:off x="640080" y="1691639"/>
+            <a:ext cx="10911535" cy="4617720"/>
+          </a:xfrm>
+          <a:prstGeom prst="rect">
+            <a:avLst/>
+          </a:prstGeom>
+          <a:noFill/>
+        </p:spPr>
+        <p:txBody>
+          <a:bodyPr wrap="square" anchor="t" lIns="0" rIns="0" tIns="0" bIns="0">
+            <a:spAutoFit/>
+          </a:bodyPr>
+          <a:lstStyle/>
+          <a:p>
+            <a:pPr>
+              <a:spcAft>
+                <a:spcPts val="1000"/>
+              </a:spcAft>
+            </a:pPr>
+            <a:r>
+              <a:rPr sz="1600" b="0" i="0">
+                <a:solidFill>
+                  <a:srgbClr val="2B2B2B"/>
+                </a:solidFill>
+                <a:latin typeface="Calibri"/>
+              </a:rPr>
+              <a:t>–   El producto de TG3 son </a:t>
+            </a:r>
+            <a:r>
+              <a:rPr sz="1600" b="1" i="0">
+                <a:solidFill>
+                  <a:srgbClr val="2B2B2B"/>
+                </a:solidFill>
+                <a:latin typeface="Calibri"/>
+              </a:rPr>
+              <a:t>tres cosas encadenadas</a:t>
+            </a:r>
+            <a:r>
+              <a:rPr sz="1600" b="0" i="0">
+                <a:solidFill>
+                  <a:srgbClr val="2B2B2B"/>
+                </a:solidFill>
+                <a:latin typeface="Calibri"/>
+              </a:rPr>
+              <a:t>, y las tres se anuncian hoy para que nadie se entere en la recta final:</a:t>
+            </a:r>
+          </a:p>
+          <a:p>
+            <a:pPr lvl="1">
+              <a:spcAft>
+                <a:spcPts val="600"/>
+              </a:spcAft>
+            </a:pPr>
+            <a:r>
+              <a:rPr sz="1500" b="0" i="0">
+                <a:solidFill>
+                  <a:srgbClr val="2B2B2B"/>
+                </a:solidFill>
+                <a:latin typeface="Calibri"/>
+              </a:rPr>
+              <a:t>●   </a:t>
+            </a:r>
+            <a:r>
+              <a:rPr sz="1500" b="1" i="0">
+                <a:solidFill>
+                  <a:srgbClr val="2B2B2B"/>
+                </a:solidFill>
+                <a:latin typeface="Calibri"/>
+              </a:rPr>
+              <a:t>1. Un artículo resultado de investigación</a:t>
+            </a:r>
+            <a:r>
+              <a:rPr sz="1500" b="0" i="0">
+                <a:solidFill>
+                  <a:srgbClr val="2B2B2B"/>
+                </a:solidFill>
+                <a:latin typeface="Calibri"/>
+              </a:rPr>
+              <a:t>, con revisión bibliográfica amplia (el Syllabus habla de </a:t>
+            </a:r>
+            <a:r>
+              <a:rPr sz="1500" b="1" i="0">
+                <a:solidFill>
+                  <a:srgbClr val="2B2B2B"/>
+                </a:solidFill>
+                <a:latin typeface="Calibri"/>
+              </a:rPr>
+              <a:t>al menos 50 referencias</a:t>
+            </a:r>
+            <a:r>
+              <a:rPr sz="1500" b="0" i="0">
+                <a:solidFill>
+                  <a:srgbClr val="2B2B2B"/>
+                </a:solidFill>
+                <a:latin typeface="Calibri"/>
+              </a:rPr>
+              <a:t>) y una </a:t>
+            </a:r>
+            <a:r>
+              <a:rPr sz="1500" b="1" i="0">
+                <a:solidFill>
+                  <a:srgbClr val="2B2B2B"/>
+                </a:solidFill>
+                <a:latin typeface="Calibri"/>
+              </a:rPr>
+              <a:t>extensión no inferior a 4.000 palabras</a:t>
+            </a:r>
+            <a:r>
+              <a:rPr sz="1500" b="0" i="0">
+                <a:solidFill>
+                  <a:srgbClr val="2B2B2B"/>
+                </a:solidFill>
+                <a:latin typeface="Calibri"/>
+              </a:rPr>
+              <a:t>.</a:t>
+            </a:r>
+          </a:p>
+          <a:p>
+            <a:pPr lvl="1">
+              <a:spcAft>
+                <a:spcPts val="600"/>
+              </a:spcAft>
+            </a:pPr>
+            <a:r>
+              <a:rPr sz="1500" b="0" i="0">
+                <a:solidFill>
+                  <a:srgbClr val="2B2B2B"/>
+                </a:solidFill>
+                <a:latin typeface="Calibri"/>
+              </a:rPr>
+              <a:t>●   </a:t>
+            </a:r>
+            <a:r>
+              <a:rPr sz="1500" b="1" i="0">
+                <a:solidFill>
+                  <a:srgbClr val="2B2B2B"/>
+                </a:solidFill>
+                <a:latin typeface="Calibri"/>
+              </a:rPr>
+              <a:t>2. Una sustentación ante jurados</a:t>
+            </a:r>
+            <a:r>
+              <a:rPr sz="1500" b="0" i="0">
+                <a:solidFill>
+                  <a:srgbClr val="2B2B2B"/>
+                </a:solidFill>
+                <a:latin typeface="Calibri"/>
+              </a:rPr>
+              <a:t>: defensa oral de su trabajo, no una lectura de diapositivas.</a:t>
+            </a:r>
+          </a:p>
+          <a:p>
+            <a:pPr lvl="1">
+              <a:spcAft>
+                <a:spcPts val="600"/>
+              </a:spcAft>
+            </a:pPr>
+            <a:r>
+              <a:rPr sz="1500" b="0" i="0">
+                <a:solidFill>
+                  <a:srgbClr val="2B2B2B"/>
+                </a:solidFill>
+                <a:latin typeface="Calibri"/>
+              </a:rPr>
+              <a:t>●   </a:t>
+            </a:r>
+            <a:r>
+              <a:rPr sz="1500" b="1" i="0">
+                <a:solidFill>
+                  <a:srgbClr val="2B2B2B"/>
+                </a:solidFill>
+                <a:latin typeface="Calibri"/>
+              </a:rPr>
+              <a:t>3. La carga al repositorio institucional</a:t>
+            </a:r>
+            <a:r>
+              <a:rPr sz="1500" b="0" i="0">
+                <a:solidFill>
+                  <a:srgbClr val="2B2B2B"/>
+                </a:solidFill>
+                <a:latin typeface="Calibri"/>
+              </a:rPr>
+              <a:t>, con los entregables que exija el instructivo del programa.</a:t>
+            </a:r>
+          </a:p>
+          <a:p>
+            <a:pPr>
+              <a:spcAft>
+                <a:spcPts val="1000"/>
+              </a:spcAft>
+            </a:pPr>
+            <a:r>
+              <a:rPr sz="1600" b="0" i="0">
+                <a:solidFill>
+                  <a:srgbClr val="2B2B2B"/>
+                </a:solidFill>
+                <a:latin typeface="Calibri"/>
+              </a:rPr>
+              <a:t>–   Si su opción de grado incluye un </a:t>
+            </a:r>
+            <a:r>
+              <a:rPr sz="1600" b="1" i="0">
+                <a:solidFill>
+                  <a:srgbClr val="2B2B2B"/>
+                </a:solidFill>
+                <a:latin typeface="Calibri"/>
+              </a:rPr>
+              <a:t>producto de ingeniería</a:t>
+            </a:r>
+            <a:r>
+              <a:rPr sz="1600" b="0" i="0">
+                <a:solidFill>
+                  <a:srgbClr val="2B2B2B"/>
+                </a:solidFill>
+                <a:latin typeface="Calibri"/>
+              </a:rPr>
+              <a:t> (prototipo, sistema, modelo, dataset), el producto no reemplaza al artículo: se </a:t>
+            </a:r>
+            <a:r>
+              <a:rPr sz="1600" b="1" i="0">
+                <a:solidFill>
+                  <a:srgbClr val="2B2B2B"/>
+                </a:solidFill>
+                <a:latin typeface="Calibri"/>
+              </a:rPr>
+              <a:t>documenta e investiga</a:t>
+            </a:r>
+            <a:r>
+              <a:rPr sz="1600" b="0" i="0">
+                <a:solidFill>
+                  <a:srgbClr val="2B2B2B"/>
+                </a:solidFill>
+                <a:latin typeface="Calibri"/>
+              </a:rPr>
+              <a:t> dentro de él.</a:t>
+            </a:r>
+          </a:p>
+          <a:p>
+            <a:pPr>
+              <a:spcAft>
+                <a:spcPts val="1000"/>
+              </a:spcAft>
+            </a:pPr>
+            <a:r>
+              <a:rPr sz="1600" b="0" i="0">
+                <a:solidFill>
+                  <a:srgbClr val="2B2B2B"/>
+                </a:solidFill>
+                <a:latin typeface="Calibri"/>
+              </a:rPr>
+              <a:t>–   Para qué le sirve después: es lo que queda publicado con su nombre. Un artículo bien hecho se muestra en una entrevista, se cita y abre la puerta a posgrado.</a:t>
+            </a:r>
+          </a:p>
+          <a:p>
+            <a:pPr>
+              <a:spcAft>
+                <a:spcPts val="1000"/>
+              </a:spcAft>
+            </a:pPr>
+            <a:r>
+              <a:rPr sz="1600" b="0" i="0">
+                <a:solidFill>
+                  <a:srgbClr val="2B2B2B"/>
+                </a:solidFill>
+                <a:latin typeface="Calibri"/>
+              </a:rPr>
+              <a:t>–   Regla del curso: </a:t>
+            </a:r>
+            <a:r>
+              <a:rPr sz="1600" b="1" i="0">
+                <a:solidFill>
+                  <a:srgbClr val="2B2B2B"/>
+                </a:solidFill>
+                <a:latin typeface="Calibri"/>
+              </a:rPr>
+              <a:t>cada sesión alimenta ese mismo artículo</a:t>
+            </a:r>
+            <a:r>
+              <a:rPr sz="1600" b="0" i="0">
+                <a:solidFill>
+                  <a:srgbClr val="2B2B2B"/>
+                </a:solidFill>
+                <a:latin typeface="Calibri"/>
+              </a:rPr>
+              <a:t>. No hay talleres isla.</a:t>
+            </a:r>
+          </a:p>
+        </p:txBody>
+      </p:sp>
+      <p:sp>
+        <p:nvSpPr>
+          <p:cNvPr id="5" name="TextBox 4"/>
+          <p:cNvSpPr txBox="1"/>
+          <p:nvPr/>
+        </p:nvSpPr>
+        <p:spPr>
+          <a:xfrm>
+            <a:off x="11094415" y="6446520"/>
+            <a:ext cx="548640" cy="274320"/>
+          </a:xfrm>
+          <a:prstGeom prst="rect">
+            <a:avLst/>
+          </a:prstGeom>
+          <a:noFill/>
+        </p:spPr>
+        <p:txBody>
+          <a:bodyPr wrap="square" anchor="t" lIns="0" rIns="0" tIns="0" bIns="0">
+            <a:spAutoFit/>
+          </a:bodyPr>
+          <a:lstStyle/>
+          <a:p>
+            <a:pPr algn="r"/>
+            <a:r>
+              <a:rPr sz="1000" b="1" i="0">
+                <a:solidFill>
+                  <a:srgbClr val="8F989D"/>
+                </a:solidFill>
+                <a:latin typeface="Calibri"/>
+              </a:rPr>
+              <a:t>8</a:t>
+            </a:r>
+          </a:p>
+        </p:txBody>
+      </p:sp>
+      <p:sp>
+        <p:nvSpPr>
+          <p:cNvPr id="6" name="TextBox 5"/>
+          <p:cNvSpPr txBox="1"/>
+          <p:nvPr/>
+        </p:nvSpPr>
+        <p:spPr>
+          <a:xfrm>
+            <a:off x="640080" y="5943600"/>
+            <a:ext cx="9997135" cy="457200"/>
+          </a:xfrm>
+          <a:prstGeom prst="rect">
+            <a:avLst/>
+          </a:prstGeom>
+          <a:noFill/>
+        </p:spPr>
+        <p:txBody>
+          <a:bodyPr wrap="square" anchor="t" lIns="0" rIns="0" tIns="0" bIns="0">
+            <a:spAutoFit/>
+          </a:bodyPr>
+          <a:lstStyle/>
+          <a:p>
+            <a:r>
+              <a:rPr sz="1200" b="0" i="1">
+                <a:solidFill>
+                  <a:srgbClr val="2B2B2B"/>
+                </a:solidFill>
+                <a:latin typeface="Calibri"/>
+              </a:rPr>
+              <a:t>Extensión y número de referencias son mínimos del Syllabus 94532, no metas opcionales. Se alcanzan sumando cada semana, nunca la última.</a:t>
+            </a:r>
+          </a:p>
+        </p:txBody>
+      </p:sp>
+    </p:spTree>
+  </p:cSld>
+  <p:clrMapOvr>
+    <a:masterClrMapping/>
+  </p:clrMapOvr>
+</p:sld>
+</file>
+
+<file path=ppt/slides/slide9.xml><?xml version="1.0" encoding="utf-8"?>
 <p:sld xmlns:a="http://schemas.openxmlformats.org/drawingml/2006/main" xmlns:p="http://schemas.openxmlformats.org/presentationml/2006/main" xmlns:r="http://schemas.openxmlformats.org/officeDocument/2006/relationships">
   <p:cSld>
     <p:bg>
@@ -14074,793 +15533,6 @@
                 </a:solidFill>
                 <a:latin typeface="Calibri"/>
               </a:rPr>
-              <a:t>8</a:t>
-            </a:r>
-          </a:p>
-        </p:txBody>
-      </p:sp>
-    </p:spTree>
-  </p:cSld>
-  <p:clrMapOvr>
-    <a:masterClrMapping/>
-  </p:clrMapOvr>
-</p:sld>
-</file>
-
-<file path=ppt/slides/slide9.xml><?xml version="1.0" encoding="utf-8"?>
-<p:sld xmlns:a="http://schemas.openxmlformats.org/drawingml/2006/main" xmlns:p="http://schemas.openxmlformats.org/presentationml/2006/main" xmlns:r="http://schemas.openxmlformats.org/officeDocument/2006/relationships">
-  <p:cSld>
-    <p:bg>
-      <p:bgPr>
-        <a:solidFill>
-          <a:srgbClr val="FFFFFF"/>
-        </a:solidFill>
-        <a:effectLst/>
-      </p:bgPr>
-    </p:bg>
-    <p:spTree>
-      <p:nvGrpSpPr>
-        <p:cNvPr id="1" name=""/>
-        <p:cNvGrpSpPr/>
-        <p:nvPr/>
-      </p:nvGrpSpPr>
-      <p:grpSpPr/>
-      <p:sp>
-        <p:nvSpPr>
-          <p:cNvPr id="2" name="Rectangle 1"/>
-          <p:cNvSpPr/>
-          <p:nvPr/>
-        </p:nvSpPr>
-        <p:spPr>
-          <a:xfrm>
-            <a:off x="0" y="0"/>
-            <a:ext cx="12191695" cy="1188720"/>
-          </a:xfrm>
-          <a:prstGeom prst="rect">
-            <a:avLst/>
-          </a:prstGeom>
-          <a:solidFill>
-            <a:srgbClr val="0C2340"/>
-          </a:solidFill>
-          <a:ln>
-            <a:noFill/>
-          </a:ln>
-          <a:effectLst/>
-        </p:spPr>
-        <p:style>
-          <a:lnRef idx="1">
-            <a:schemeClr val="accent1"/>
-          </a:lnRef>
-          <a:fillRef idx="3">
-            <a:schemeClr val="accent1"/>
-          </a:fillRef>
-          <a:effectRef idx="2">
-            <a:schemeClr val="accent1"/>
-          </a:effectRef>
-          <a:fontRef idx="minor">
-            <a:schemeClr val="lt1"/>
-          </a:fontRef>
-        </p:style>
-        <p:txBody>
-          <a:bodyPr rtlCol="0" anchor="ctr"/>
-          <a:lstStyle/>
-          <a:p>
-            <a:pPr algn="ctr"/>
-          </a:p>
-        </p:txBody>
-      </p:sp>
-      <p:sp>
-        <p:nvSpPr>
-          <p:cNvPr id="3" name="TextBox 2"/>
-          <p:cNvSpPr txBox="1"/>
-          <p:nvPr/>
-        </p:nvSpPr>
-        <p:spPr>
-          <a:xfrm>
-            <a:off x="640080" y="0"/>
-            <a:ext cx="9082735" cy="1188720"/>
-          </a:xfrm>
-          <a:prstGeom prst="rect">
-            <a:avLst/>
-          </a:prstGeom>
-          <a:noFill/>
-        </p:spPr>
-        <p:txBody>
-          <a:bodyPr wrap="square" anchor="ctr" lIns="0" rIns="0" tIns="0" bIns="0">
-            <a:spAutoFit/>
-          </a:bodyPr>
-          <a:lstStyle/>
-          <a:p>
-            <a:pPr algn="ctr"/>
-            <a:r>
-              <a:rPr sz="2600" b="1" i="0">
-                <a:solidFill>
-                  <a:srgbClr val="FFFFFF"/>
-                </a:solidFill>
-                <a:latin typeface="Calibri"/>
-              </a:rPr>
-              <a:t>Mapa del curso (2/2): cerrar, defender y entregar</a:t>
-            </a:r>
-          </a:p>
-        </p:txBody>
-      </p:sp>
-      <p:graphicFrame>
-        <p:nvGraphicFramePr>
-          <p:cNvPr id="4" name="Table 3"/>
-          <p:cNvGraphicFramePr>
-            <a:graphicFrameLocks noGrp="1"/>
-          </p:cNvGraphicFramePr>
-          <p:nvPr/>
-        </p:nvGraphicFramePr>
-        <p:xfrm>
-          <a:off x="640080" y="1691639"/>
-          <a:ext cx="10911533" cy="4023360"/>
-        </p:xfrm>
-        <a:graphic>
-          <a:graphicData uri="http://schemas.openxmlformats.org/drawingml/2006/table">
-            <a:tbl>
-              <a:tblPr>
-                <a:tableStyleId>{2D5ABB26-0587-4C30-8999-92F81FD0307C}</a:tableStyleId>
-              </a:tblPr>
-              <a:tblGrid>
-                <a:gridCol w="1008629"/>
-                <a:gridCol w="4951452"/>
-                <a:gridCol w="4951452"/>
-              </a:tblGrid>
-              <a:tr h="502920">
-                <a:tc>
-                  <a:txBody>
-                    <a:bodyPr/>
-                    <a:lstStyle/>
-                    <a:p>
-                      <a:pPr algn="l"/>
-                      <a:r>
-                        <a:rPr sz="1300" b="1" i="0">
-                          <a:solidFill>
-                            <a:srgbClr val="FFFFFF"/>
-                          </a:solidFill>
-                          <a:latin typeface="Calibri"/>
-                        </a:rPr>
-                        <a:t>Sesión</a:t>
-                      </a:r>
-                    </a:p>
-                  </a:txBody>
-                  <a:tcPr anchor="ctr" marL="109728" marR="91440" marT="36576" marB="36576">
-                    <a:solidFill>
-                      <a:srgbClr val="0C2340"/>
-                    </a:solidFill>
-                  </a:tcPr>
-                </a:tc>
-                <a:tc>
-                  <a:txBody>
-                    <a:bodyPr/>
-                    <a:lstStyle/>
-                    <a:p>
-                      <a:pPr algn="l"/>
-                      <a:r>
-                        <a:rPr sz="1300" b="1" i="0">
-                          <a:solidFill>
-                            <a:srgbClr val="FFFFFF"/>
-                          </a:solidFill>
-                          <a:latin typeface="Calibri"/>
-                        </a:rPr>
-                        <a:t>De qué se ocupa</a:t>
-                      </a:r>
-                    </a:p>
-                  </a:txBody>
-                  <a:tcPr anchor="ctr" marL="109728" marR="91440" marT="36576" marB="36576">
-                    <a:solidFill>
-                      <a:srgbClr val="0C2340"/>
-                    </a:solidFill>
-                  </a:tcPr>
-                </a:tc>
-                <a:tc>
-                  <a:txBody>
-                    <a:bodyPr/>
-                    <a:lstStyle/>
-                    <a:p>
-                      <a:pPr algn="l"/>
-                      <a:r>
-                        <a:rPr sz="1300" b="1" i="0">
-                          <a:solidFill>
-                            <a:srgbClr val="FFFFFF"/>
-                          </a:solidFill>
-                          <a:latin typeface="Calibri"/>
-                        </a:rPr>
-                        <a:t>Qué queda listo</a:t>
-                      </a:r>
-                    </a:p>
-                  </a:txBody>
-                  <a:tcPr anchor="ctr" marL="109728" marR="91440" marT="36576" marB="36576">
-                    <a:solidFill>
-                      <a:srgbClr val="0C2340"/>
-                    </a:solidFill>
-                  </a:tcPr>
-                </a:tc>
-              </a:tr>
-              <a:tr h="502920">
-                <a:tc>
-                  <a:txBody>
-                    <a:bodyPr/>
-                    <a:lstStyle/>
-                    <a:p>
-                      <a:pPr algn="l"/>
-                      <a:r>
-                        <a:rPr sz="1100" b="1" i="0">
-                          <a:solidFill>
-                            <a:srgbClr val="2B2B2B"/>
-                          </a:solidFill>
-                          <a:latin typeface="Calibri"/>
-                        </a:rPr>
-                        <a:t>09</a:t>
-                      </a:r>
-                    </a:p>
-                  </a:txBody>
-                  <a:tcPr anchor="ctr" marL="109728" marR="91440" marT="36576" marB="36576">
-                    <a:solidFill>
-                      <a:srgbClr val="FFFFFF"/>
-                    </a:solidFill>
-                  </a:tcPr>
-                </a:tc>
-                <a:tc>
-                  <a:txBody>
-                    <a:bodyPr/>
-                    <a:lstStyle/>
-                    <a:p>
-                      <a:pPr algn="l"/>
-                      <a:r>
-                        <a:rPr sz="1100" b="0" i="0">
-                          <a:solidFill>
-                            <a:srgbClr val="2B2B2B"/>
-                          </a:solidFill>
-                          <a:latin typeface="Calibri"/>
-                        </a:rPr>
-                        <a:t>Resultados, discusión y relación con referentes</a:t>
-                      </a:r>
-                    </a:p>
-                  </a:txBody>
-                  <a:tcPr anchor="ctr" marL="109728" marR="91440" marT="36576" marB="36576">
-                    <a:solidFill>
-                      <a:srgbClr val="FFFFFF"/>
-                    </a:solidFill>
-                  </a:tcPr>
-                </a:tc>
-                <a:tc>
-                  <a:txBody>
-                    <a:bodyPr/>
-                    <a:lstStyle/>
-                    <a:p>
-                      <a:pPr algn="l"/>
-                      <a:r>
-                        <a:rPr sz="1100" b="0" i="0">
-                          <a:solidFill>
-                            <a:srgbClr val="2B2B2B"/>
-                          </a:solidFill>
-                          <a:latin typeface="Calibri"/>
-                        </a:rPr>
-                        <a:t>Borrador de resultados y discusión</a:t>
-                      </a:r>
-                    </a:p>
-                  </a:txBody>
-                  <a:tcPr anchor="ctr" marL="109728" marR="91440" marT="36576" marB="36576">
-                    <a:solidFill>
-                      <a:srgbClr val="FFFFFF"/>
-                    </a:solidFill>
-                  </a:tcPr>
-                </a:tc>
-              </a:tr>
-              <a:tr h="502920">
-                <a:tc>
-                  <a:txBody>
-                    <a:bodyPr/>
-                    <a:lstStyle/>
-                    <a:p>
-                      <a:pPr algn="l"/>
-                      <a:r>
-                        <a:rPr sz="1100" b="1" i="0">
-                          <a:solidFill>
-                            <a:srgbClr val="2B2B2B"/>
-                          </a:solidFill>
-                          <a:latin typeface="Calibri"/>
-                        </a:rPr>
-                        <a:t>10</a:t>
-                      </a:r>
-                    </a:p>
-                  </a:txBody>
-                  <a:tcPr anchor="ctr" marL="109728" marR="91440" marT="36576" marB="36576">
-                    <a:solidFill>
-                      <a:srgbClr val="F2F2F2"/>
-                    </a:solidFill>
-                  </a:tcPr>
-                </a:tc>
-                <a:tc>
-                  <a:txBody>
-                    <a:bodyPr/>
-                    <a:lstStyle/>
-                    <a:p>
-                      <a:pPr algn="l"/>
-                      <a:r>
-                        <a:rPr sz="1100" b="0" i="0">
-                          <a:solidFill>
-                            <a:srgbClr val="2B2B2B"/>
-                          </a:solidFill>
-                          <a:latin typeface="Calibri"/>
-                        </a:rPr>
-                        <a:t>Resumen, palabras clave UNESCO, conclusiones y referencias</a:t>
-                      </a:r>
-                    </a:p>
-                  </a:txBody>
-                  <a:tcPr anchor="ctr" marL="109728" marR="91440" marT="36576" marB="36576">
-                    <a:solidFill>
-                      <a:srgbClr val="F2F2F2"/>
-                    </a:solidFill>
-                  </a:tcPr>
-                </a:tc>
-                <a:tc>
-                  <a:txBody>
-                    <a:bodyPr/>
-                    <a:lstStyle/>
-                    <a:p>
-                      <a:pPr algn="l"/>
-                      <a:r>
-                        <a:rPr sz="1100" b="0" i="0">
-                          <a:solidFill>
-                            <a:srgbClr val="2B2B2B"/>
-                          </a:solidFill>
-                          <a:latin typeface="Calibri"/>
-                        </a:rPr>
-                        <a:t>Artículo completo de punta a punta</a:t>
-                      </a:r>
-                    </a:p>
-                  </a:txBody>
-                  <a:tcPr anchor="ctr" marL="109728" marR="91440" marT="36576" marB="36576">
-                    <a:solidFill>
-                      <a:srgbClr val="F2F2F2"/>
-                    </a:solidFill>
-                  </a:tcPr>
-                </a:tc>
-              </a:tr>
-              <a:tr h="502920">
-                <a:tc>
-                  <a:txBody>
-                    <a:bodyPr/>
-                    <a:lstStyle/>
-                    <a:p>
-                      <a:pPr algn="l"/>
-                      <a:r>
-                        <a:rPr sz="1100" b="1" i="0">
-                          <a:solidFill>
-                            <a:srgbClr val="2B2B2B"/>
-                          </a:solidFill>
-                          <a:latin typeface="Calibri"/>
-                        </a:rPr>
-                        <a:t>11</a:t>
-                      </a:r>
-                    </a:p>
-                  </a:txBody>
-                  <a:tcPr anchor="ctr" marL="109728" marR="91440" marT="36576" marB="36576">
-                    <a:solidFill>
-                      <a:srgbClr val="FFFFFF"/>
-                    </a:solidFill>
-                  </a:tcPr>
-                </a:tc>
-                <a:tc>
-                  <a:txBody>
-                    <a:bodyPr/>
-                    <a:lstStyle/>
-                    <a:p>
-                      <a:pPr algn="l"/>
-                      <a:r>
-                        <a:rPr sz="1100" b="0" i="0">
-                          <a:solidFill>
-                            <a:srgbClr val="2B2B2B"/>
-                          </a:solidFill>
-                          <a:latin typeface="Calibri"/>
-                        </a:rPr>
-                        <a:t>Póster · evidencias · verificación antiplagio</a:t>
-                      </a:r>
-                    </a:p>
-                  </a:txBody>
-                  <a:tcPr anchor="ctr" marL="109728" marR="91440" marT="36576" marB="36576">
-                    <a:solidFill>
-                      <a:srgbClr val="FFFFFF"/>
-                    </a:solidFill>
-                  </a:tcPr>
-                </a:tc>
-                <a:tc>
-                  <a:txBody>
-                    <a:bodyPr/>
-                    <a:lstStyle/>
-                    <a:p>
-                      <a:pPr algn="l"/>
-                      <a:r>
-                        <a:rPr sz="1100" b="0" i="0">
-                          <a:solidFill>
-                            <a:srgbClr val="2B2B2B"/>
-                          </a:solidFill>
-                          <a:latin typeface="Calibri"/>
-                        </a:rPr>
-                        <a:t>Póster de una página y revisión de similitud</a:t>
-                      </a:r>
-                    </a:p>
-                  </a:txBody>
-                  <a:tcPr anchor="ctr" marL="109728" marR="91440" marT="36576" marB="36576">
-                    <a:solidFill>
-                      <a:srgbClr val="FFFFFF"/>
-                    </a:solidFill>
-                  </a:tcPr>
-                </a:tc>
-              </a:tr>
-              <a:tr h="502920">
-                <a:tc>
-                  <a:txBody>
-                    <a:bodyPr/>
-                    <a:lstStyle/>
-                    <a:p>
-                      <a:pPr algn="l"/>
-                      <a:r>
-                        <a:rPr sz="1100" b="1" i="0">
-                          <a:solidFill>
-                            <a:srgbClr val="2B2B2B"/>
-                          </a:solidFill>
-                          <a:latin typeface="Calibri"/>
-                        </a:rPr>
-                        <a:t>12</a:t>
-                      </a:r>
-                    </a:p>
-                  </a:txBody>
-                  <a:tcPr anchor="ctr" marL="109728" marR="91440" marT="36576" marB="36576">
-                    <a:solidFill>
-                      <a:srgbClr val="F2F2F2"/>
-                    </a:solidFill>
-                  </a:tcPr>
-                </a:tc>
-                <a:tc>
-                  <a:txBody>
-                    <a:bodyPr/>
-                    <a:lstStyle/>
-                    <a:p>
-                      <a:pPr algn="l"/>
-                      <a:r>
-                        <a:rPr sz="1100" b="0" i="0">
-                          <a:solidFill>
-                            <a:srgbClr val="2B2B2B"/>
-                          </a:solidFill>
-                          <a:latin typeface="Calibri"/>
-                        </a:rPr>
-                        <a:t>Sustentación ante jurados</a:t>
-                      </a:r>
-                    </a:p>
-                  </a:txBody>
-                  <a:tcPr anchor="ctr" marL="109728" marR="91440" marT="36576" marB="36576">
-                    <a:solidFill>
-                      <a:srgbClr val="F2F2F2"/>
-                    </a:solidFill>
-                  </a:tcPr>
-                </a:tc>
-                <a:tc>
-                  <a:txBody>
-                    <a:bodyPr/>
-                    <a:lstStyle/>
-                    <a:p>
-                      <a:pPr algn="l"/>
-                      <a:r>
-                        <a:rPr sz="1100" b="0" i="0">
-                          <a:solidFill>
-                            <a:srgbClr val="2B2B2B"/>
-                          </a:solidFill>
-                          <a:latin typeface="Calibri"/>
-                        </a:rPr>
-                        <a:t>Defensa presentada</a:t>
-                      </a:r>
-                    </a:p>
-                  </a:txBody>
-                  <a:tcPr anchor="ctr" marL="109728" marR="91440" marT="36576" marB="36576">
-                    <a:solidFill>
-                      <a:srgbClr val="F2F2F2"/>
-                    </a:solidFill>
-                  </a:tcPr>
-                </a:tc>
-              </a:tr>
-              <a:tr h="502920">
-                <a:tc>
-                  <a:txBody>
-                    <a:bodyPr/>
-                    <a:lstStyle/>
-                    <a:p>
-                      <a:pPr algn="l"/>
-                      <a:r>
-                        <a:rPr sz="1100" b="1" i="0">
-                          <a:solidFill>
-                            <a:srgbClr val="2B2B2B"/>
-                          </a:solidFill>
-                          <a:latin typeface="Calibri"/>
-                        </a:rPr>
-                        <a:t>13</a:t>
-                      </a:r>
-                    </a:p>
-                  </a:txBody>
-                  <a:tcPr anchor="ctr" marL="109728" marR="91440" marT="36576" marB="36576">
-                    <a:solidFill>
-                      <a:srgbClr val="FFFFFF"/>
-                    </a:solidFill>
-                  </a:tcPr>
-                </a:tc>
-                <a:tc>
-                  <a:txBody>
-                    <a:bodyPr/>
-                    <a:lstStyle/>
-                    <a:p>
-                      <a:pPr algn="l"/>
-                      <a:r>
-                        <a:rPr sz="1100" b="0" i="0">
-                          <a:solidFill>
-                            <a:srgbClr val="2B2B2B"/>
-                          </a:solidFill>
-                          <a:latin typeface="Calibri"/>
-                        </a:rPr>
-                        <a:t>Entregables para repositorio institucional</a:t>
-                      </a:r>
-                    </a:p>
-                  </a:txBody>
-                  <a:tcPr anchor="ctr" marL="109728" marR="91440" marT="36576" marB="36576">
-                    <a:solidFill>
-                      <a:srgbClr val="FFFFFF"/>
-                    </a:solidFill>
-                  </a:tcPr>
-                </a:tc>
-                <a:tc>
-                  <a:txBody>
-                    <a:bodyPr/>
-                    <a:lstStyle/>
-                    <a:p>
-                      <a:pPr algn="l"/>
-                      <a:r>
-                        <a:rPr sz="1100" b="0" i="0">
-                          <a:solidFill>
-                            <a:srgbClr val="2B2B2B"/>
-                          </a:solidFill>
-                          <a:latin typeface="Calibri"/>
-                        </a:rPr>
-                        <a:t>Paquete final verificado</a:t>
-                      </a:r>
-                    </a:p>
-                  </a:txBody>
-                  <a:tcPr anchor="ctr" marL="109728" marR="91440" marT="36576" marB="36576">
-                    <a:solidFill>
-                      <a:srgbClr val="FFFFFF"/>
-                    </a:solidFill>
-                  </a:tcPr>
-                </a:tc>
-              </a:tr>
-              <a:tr h="502920">
-                <a:tc>
-                  <a:txBody>
-                    <a:bodyPr/>
-                    <a:lstStyle/>
-                    <a:p>
-                      <a:pPr algn="l"/>
-                      <a:r>
-                        <a:rPr sz="1100" b="1" i="0">
-                          <a:solidFill>
-                            <a:srgbClr val="2B2B2B"/>
-                          </a:solidFill>
-                          <a:latin typeface="Calibri"/>
-                        </a:rPr>
-                        <a:t>14</a:t>
-                      </a:r>
-                    </a:p>
-                  </a:txBody>
-                  <a:tcPr anchor="ctr" marL="109728" marR="91440" marT="36576" marB="36576">
-                    <a:solidFill>
-                      <a:srgbClr val="F2F2F2"/>
-                    </a:solidFill>
-                  </a:tcPr>
-                </a:tc>
-                <a:tc>
-                  <a:txBody>
-                    <a:bodyPr/>
-                    <a:lstStyle/>
-                    <a:p>
-                      <a:pPr algn="l"/>
-                      <a:r>
-                        <a:rPr sz="1100" b="0" i="0">
-                          <a:solidFill>
-                            <a:srgbClr val="2B2B2B"/>
-                          </a:solidFill>
-                          <a:latin typeface="Calibri"/>
-                        </a:rPr>
-                        <a:t>Ajustes finales · seguimiento post-sustentación</a:t>
-                      </a:r>
-                    </a:p>
-                  </a:txBody>
-                  <a:tcPr anchor="ctr" marL="109728" marR="91440" marT="36576" marB="36576">
-                    <a:solidFill>
-                      <a:srgbClr val="F2F2F2"/>
-                    </a:solidFill>
-                  </a:tcPr>
-                </a:tc>
-                <a:tc>
-                  <a:txBody>
-                    <a:bodyPr/>
-                    <a:lstStyle/>
-                    <a:p>
-                      <a:pPr algn="l"/>
-                      <a:r>
-                        <a:rPr sz="1100" b="0" i="0">
-                          <a:solidFill>
-                            <a:srgbClr val="2B2B2B"/>
-                          </a:solidFill>
-                          <a:latin typeface="Calibri"/>
-                        </a:rPr>
-                        <a:t>Correcciones del jurado incorporadas</a:t>
-                      </a:r>
-                    </a:p>
-                  </a:txBody>
-                  <a:tcPr anchor="ctr" marL="109728" marR="91440" marT="36576" marB="36576">
-                    <a:solidFill>
-                      <a:srgbClr val="F2F2F2"/>
-                    </a:solidFill>
-                  </a:tcPr>
-                </a:tc>
-              </a:tr>
-              <a:tr h="502920">
-                <a:tc>
-                  <a:txBody>
-                    <a:bodyPr/>
-                    <a:lstStyle/>
-                    <a:p>
-                      <a:pPr algn="l"/>
-                      <a:r>
-                        <a:rPr sz="1100" b="1" i="0">
-                          <a:solidFill>
-                            <a:srgbClr val="2B2B2B"/>
-                          </a:solidFill>
-                          <a:latin typeface="Calibri"/>
-                        </a:rPr>
-                        <a:t>15</a:t>
-                      </a:r>
-                    </a:p>
-                  </a:txBody>
-                  <a:tcPr anchor="ctr" marL="109728" marR="91440" marT="36576" marB="36576">
-                    <a:solidFill>
-                      <a:srgbClr val="FFFFFF"/>
-                    </a:solidFill>
-                  </a:tcPr>
-                </a:tc>
-                <a:tc>
-                  <a:txBody>
-                    <a:bodyPr/>
-                    <a:lstStyle/>
-                    <a:p>
-                      <a:pPr algn="l"/>
-                      <a:r>
-                        <a:rPr sz="1100" b="0" i="0">
-                          <a:solidFill>
-                            <a:srgbClr val="2B2B2B"/>
-                          </a:solidFill>
-                          <a:latin typeface="Calibri"/>
-                        </a:rPr>
-                        <a:t>Cierre administrativo · recepción</a:t>
-                      </a:r>
-                    </a:p>
-                  </a:txBody>
-                  <a:tcPr anchor="ctr" marL="109728" marR="91440" marT="36576" marB="36576">
-                    <a:solidFill>
-                      <a:srgbClr val="FFFFFF"/>
-                    </a:solidFill>
-                  </a:tcPr>
-                </a:tc>
-                <a:tc>
-                  <a:txBody>
-                    <a:bodyPr/>
-                    <a:lstStyle/>
-                    <a:p>
-                      <a:pPr algn="l"/>
-                      <a:r>
-                        <a:rPr sz="1100" b="0" i="0">
-                          <a:solidFill>
-                            <a:srgbClr val="2B2B2B"/>
-                          </a:solidFill>
-                          <a:latin typeface="Calibri"/>
-                        </a:rPr>
-                        <a:t>Todo cargado y confirmado como recibido</a:t>
-                      </a:r>
-                    </a:p>
-                  </a:txBody>
-                  <a:tcPr anchor="ctr" marL="109728" marR="91440" marT="36576" marB="36576">
-                    <a:solidFill>
-                      <a:srgbClr val="FFFFFF"/>
-                    </a:solidFill>
-                  </a:tcPr>
-                </a:tc>
-              </a:tr>
-            </a:tbl>
-          </a:graphicData>
-        </a:graphic>
-      </p:graphicFrame>
-      <p:sp>
-        <p:nvSpPr>
-          <p:cNvPr id="5" name="TextBox 4"/>
-          <p:cNvSpPr txBox="1"/>
-          <p:nvPr/>
-        </p:nvSpPr>
-        <p:spPr>
-          <a:xfrm>
-            <a:off x="640080" y="5852160"/>
-            <a:ext cx="10911535" cy="548640"/>
-          </a:xfrm>
-          <a:prstGeom prst="rect">
-            <a:avLst/>
-          </a:prstGeom>
-          <a:noFill/>
-        </p:spPr>
-        <p:txBody>
-          <a:bodyPr wrap="square" anchor="t" lIns="0" rIns="0" tIns="0" bIns="0">
-            <a:spAutoFit/>
-          </a:bodyPr>
-          <a:lstStyle/>
-          <a:p>
-            <a:r>
-              <a:rPr sz="1200" b="0" i="1">
-                <a:solidFill>
-                  <a:srgbClr val="2B2B2B"/>
-                </a:solidFill>
-                <a:latin typeface="Calibri"/>
-              </a:rPr>
-              <a:t>El plazo de </a:t>
-            </a:r>
-            <a:r>
-              <a:rPr sz="1200" b="1" i="1">
-                <a:solidFill>
-                  <a:srgbClr val="2B2B2B"/>
-                </a:solidFill>
-                <a:latin typeface="Calibri"/>
-              </a:rPr>
-              <a:t>recepción y cierre varía según su grupo</a:t>
-            </a:r>
-            <a:r>
-              <a:rPr sz="1200" b="0" i="1">
-                <a:solidFill>
-                  <a:srgbClr val="2B2B2B"/>
-                </a:solidFill>
-                <a:latin typeface="Calibri"/>
-              </a:rPr>
-              <a:t>: consúltelo en la Presentación del Curso y anótelo hoy en su calendario.</a:t>
-            </a:r>
-          </a:p>
-        </p:txBody>
-      </p:sp>
-      <p:sp>
-        <p:nvSpPr>
-          <p:cNvPr id="6" name="TextBox 5"/>
-          <p:cNvSpPr txBox="1"/>
-          <p:nvPr/>
-        </p:nvSpPr>
-        <p:spPr>
-          <a:xfrm>
-            <a:off x="11094415" y="6446520"/>
-            <a:ext cx="548640" cy="274320"/>
-          </a:xfrm>
-          <a:prstGeom prst="rect">
-            <a:avLst/>
-          </a:prstGeom>
-          <a:noFill/>
-        </p:spPr>
-        <p:txBody>
-          <a:bodyPr wrap="square" anchor="t" lIns="0" rIns="0" tIns="0" bIns="0">
-            <a:spAutoFit/>
-          </a:bodyPr>
-          <a:lstStyle/>
-          <a:p>
-            <a:pPr algn="r"/>
-            <a:r>
-              <a:rPr sz="1000" b="1" i="0">
-                <a:solidFill>
-                  <a:srgbClr val="8F989D"/>
-                </a:solidFill>
-                <a:latin typeface="Calibri"/>
-              </a:rPr>
               <a:t>9</a:t>
             </a:r>
           </a:p>

--- a/Pregrado/Trabajo de grado 3/Clases/Sesion 01 - Presentación del curso · docente · estudiantes · ACAs/Presentacion.pptx
+++ b/Pregrado/Trabajo de grado 3/Clases/Sesion 01 - Presentación del curso · docente · estudiantes · ACAs/Presentacion.pptx
@@ -27,7 +27,6 @@
     <p:sldId id="275" r:id="rId26"/>
     <p:sldId id="276" r:id="rId27"/>
     <p:sldId id="277" r:id="rId28"/>
-    <p:sldId id="278" r:id="rId29"/>
   </p:sldIdLst>
   <p:sldSz cx="12191695" cy="6858000" type="screen4x3"/>
   <p:notesSz cx="6858000" cy="9144000"/>
@@ -3479,616 +3478,21 @@
                 </a:solidFill>
                 <a:latin typeface="Calibri"/>
               </a:rPr>
-              <a:t>Mapa del curso (2/2): cerrar, defender y entregar</a:t>
-            </a:r>
-          </a:p>
-        </p:txBody>
-      </p:sp>
-      <p:graphicFrame>
-        <p:nvGraphicFramePr>
-          <p:cNvPr id="4" name="Table 3"/>
-          <p:cNvGraphicFramePr>
-            <a:graphicFrameLocks noGrp="1"/>
-          </p:cNvGraphicFramePr>
-          <p:nvPr/>
-        </p:nvGraphicFramePr>
-        <p:xfrm>
-          <a:off x="640080" y="1691639"/>
-          <a:ext cx="10911533" cy="4023360"/>
-        </p:xfrm>
-        <a:graphic>
-          <a:graphicData uri="http://schemas.openxmlformats.org/drawingml/2006/table">
-            <a:tbl>
-              <a:tblPr>
-                <a:tableStyleId>{2D5ABB26-0587-4C30-8999-92F81FD0307C}</a:tableStyleId>
-              </a:tblPr>
-              <a:tblGrid>
-                <a:gridCol w="1008629"/>
-                <a:gridCol w="4951452"/>
-                <a:gridCol w="4951452"/>
-              </a:tblGrid>
-              <a:tr h="502920">
-                <a:tc>
-                  <a:txBody>
-                    <a:bodyPr/>
-                    <a:lstStyle/>
-                    <a:p>
-                      <a:pPr algn="l"/>
-                      <a:r>
-                        <a:rPr sz="1300" b="1" i="0">
-                          <a:solidFill>
-                            <a:srgbClr val="FFFFFF"/>
-                          </a:solidFill>
-                          <a:latin typeface="Calibri"/>
-                        </a:rPr>
-                        <a:t>Sesión</a:t>
-                      </a:r>
-                    </a:p>
-                  </a:txBody>
-                  <a:tcPr anchor="ctr" marL="109728" marR="91440" marT="36576" marB="36576">
-                    <a:solidFill>
-                      <a:srgbClr val="0C2340"/>
-                    </a:solidFill>
-                  </a:tcPr>
-                </a:tc>
-                <a:tc>
-                  <a:txBody>
-                    <a:bodyPr/>
-                    <a:lstStyle/>
-                    <a:p>
-                      <a:pPr algn="l"/>
-                      <a:r>
-                        <a:rPr sz="1300" b="1" i="0">
-                          <a:solidFill>
-                            <a:srgbClr val="FFFFFF"/>
-                          </a:solidFill>
-                          <a:latin typeface="Calibri"/>
-                        </a:rPr>
-                        <a:t>De qué se ocupa</a:t>
-                      </a:r>
-                    </a:p>
-                  </a:txBody>
-                  <a:tcPr anchor="ctr" marL="109728" marR="91440" marT="36576" marB="36576">
-                    <a:solidFill>
-                      <a:srgbClr val="0C2340"/>
-                    </a:solidFill>
-                  </a:tcPr>
-                </a:tc>
-                <a:tc>
-                  <a:txBody>
-                    <a:bodyPr/>
-                    <a:lstStyle/>
-                    <a:p>
-                      <a:pPr algn="l"/>
-                      <a:r>
-                        <a:rPr sz="1300" b="1" i="0">
-                          <a:solidFill>
-                            <a:srgbClr val="FFFFFF"/>
-                          </a:solidFill>
-                          <a:latin typeface="Calibri"/>
-                        </a:rPr>
-                        <a:t>Qué queda listo</a:t>
-                      </a:r>
-                    </a:p>
-                  </a:txBody>
-                  <a:tcPr anchor="ctr" marL="109728" marR="91440" marT="36576" marB="36576">
-                    <a:solidFill>
-                      <a:srgbClr val="0C2340"/>
-                    </a:solidFill>
-                  </a:tcPr>
-                </a:tc>
-              </a:tr>
-              <a:tr h="502920">
-                <a:tc>
-                  <a:txBody>
-                    <a:bodyPr/>
-                    <a:lstStyle/>
-                    <a:p>
-                      <a:pPr algn="l"/>
-                      <a:r>
-                        <a:rPr sz="1100" b="1" i="0">
-                          <a:solidFill>
-                            <a:srgbClr val="2B2B2B"/>
-                          </a:solidFill>
-                          <a:latin typeface="Calibri"/>
-                        </a:rPr>
-                        <a:t>09</a:t>
-                      </a:r>
-                    </a:p>
-                  </a:txBody>
-                  <a:tcPr anchor="ctr" marL="109728" marR="91440" marT="36576" marB="36576">
-                    <a:solidFill>
-                      <a:srgbClr val="FFFFFF"/>
-                    </a:solidFill>
-                  </a:tcPr>
-                </a:tc>
-                <a:tc>
-                  <a:txBody>
-                    <a:bodyPr/>
-                    <a:lstStyle/>
-                    <a:p>
-                      <a:pPr algn="l"/>
-                      <a:r>
-                        <a:rPr sz="1100" b="0" i="0">
-                          <a:solidFill>
-                            <a:srgbClr val="2B2B2B"/>
-                          </a:solidFill>
-                          <a:latin typeface="Calibri"/>
-                        </a:rPr>
-                        <a:t>Resultados, discusión y relación con referentes</a:t>
-                      </a:r>
-                    </a:p>
-                  </a:txBody>
-                  <a:tcPr anchor="ctr" marL="109728" marR="91440" marT="36576" marB="36576">
-                    <a:solidFill>
-                      <a:srgbClr val="FFFFFF"/>
-                    </a:solidFill>
-                  </a:tcPr>
-                </a:tc>
-                <a:tc>
-                  <a:txBody>
-                    <a:bodyPr/>
-                    <a:lstStyle/>
-                    <a:p>
-                      <a:pPr algn="l"/>
-                      <a:r>
-                        <a:rPr sz="1100" b="0" i="0">
-                          <a:solidFill>
-                            <a:srgbClr val="2B2B2B"/>
-                          </a:solidFill>
-                          <a:latin typeface="Calibri"/>
-                        </a:rPr>
-                        <a:t>Borrador de resultados y discusión</a:t>
-                      </a:r>
-                    </a:p>
-                  </a:txBody>
-                  <a:tcPr anchor="ctr" marL="109728" marR="91440" marT="36576" marB="36576">
-                    <a:solidFill>
-                      <a:srgbClr val="FFFFFF"/>
-                    </a:solidFill>
-                  </a:tcPr>
-                </a:tc>
-              </a:tr>
-              <a:tr h="502920">
-                <a:tc>
-                  <a:txBody>
-                    <a:bodyPr/>
-                    <a:lstStyle/>
-                    <a:p>
-                      <a:pPr algn="l"/>
-                      <a:r>
-                        <a:rPr sz="1100" b="1" i="0">
-                          <a:solidFill>
-                            <a:srgbClr val="2B2B2B"/>
-                          </a:solidFill>
-                          <a:latin typeface="Calibri"/>
-                        </a:rPr>
-                        <a:t>10</a:t>
-                      </a:r>
-                    </a:p>
-                  </a:txBody>
-                  <a:tcPr anchor="ctr" marL="109728" marR="91440" marT="36576" marB="36576">
-                    <a:solidFill>
-                      <a:srgbClr val="F2F2F2"/>
-                    </a:solidFill>
-                  </a:tcPr>
-                </a:tc>
-                <a:tc>
-                  <a:txBody>
-                    <a:bodyPr/>
-                    <a:lstStyle/>
-                    <a:p>
-                      <a:pPr algn="l"/>
-                      <a:r>
-                        <a:rPr sz="1100" b="0" i="0">
-                          <a:solidFill>
-                            <a:srgbClr val="2B2B2B"/>
-                          </a:solidFill>
-                          <a:latin typeface="Calibri"/>
-                        </a:rPr>
-                        <a:t>Resumen, palabras clave UNESCO, conclusiones y referencias</a:t>
-                      </a:r>
-                    </a:p>
-                  </a:txBody>
-                  <a:tcPr anchor="ctr" marL="109728" marR="91440" marT="36576" marB="36576">
-                    <a:solidFill>
-                      <a:srgbClr val="F2F2F2"/>
-                    </a:solidFill>
-                  </a:tcPr>
-                </a:tc>
-                <a:tc>
-                  <a:txBody>
-                    <a:bodyPr/>
-                    <a:lstStyle/>
-                    <a:p>
-                      <a:pPr algn="l"/>
-                      <a:r>
-                        <a:rPr sz="1100" b="0" i="0">
-                          <a:solidFill>
-                            <a:srgbClr val="2B2B2B"/>
-                          </a:solidFill>
-                          <a:latin typeface="Calibri"/>
-                        </a:rPr>
-                        <a:t>Artículo completo de punta a punta</a:t>
-                      </a:r>
-                    </a:p>
-                  </a:txBody>
-                  <a:tcPr anchor="ctr" marL="109728" marR="91440" marT="36576" marB="36576">
-                    <a:solidFill>
-                      <a:srgbClr val="F2F2F2"/>
-                    </a:solidFill>
-                  </a:tcPr>
-                </a:tc>
-              </a:tr>
-              <a:tr h="502920">
-                <a:tc>
-                  <a:txBody>
-                    <a:bodyPr/>
-                    <a:lstStyle/>
-                    <a:p>
-                      <a:pPr algn="l"/>
-                      <a:r>
-                        <a:rPr sz="1100" b="1" i="0">
-                          <a:solidFill>
-                            <a:srgbClr val="2B2B2B"/>
-                          </a:solidFill>
-                          <a:latin typeface="Calibri"/>
-                        </a:rPr>
-                        <a:t>11</a:t>
-                      </a:r>
-                    </a:p>
-                  </a:txBody>
-                  <a:tcPr anchor="ctr" marL="109728" marR="91440" marT="36576" marB="36576">
-                    <a:solidFill>
-                      <a:srgbClr val="FFFFFF"/>
-                    </a:solidFill>
-                  </a:tcPr>
-                </a:tc>
-                <a:tc>
-                  <a:txBody>
-                    <a:bodyPr/>
-                    <a:lstStyle/>
-                    <a:p>
-                      <a:pPr algn="l"/>
-                      <a:r>
-                        <a:rPr sz="1100" b="0" i="0">
-                          <a:solidFill>
-                            <a:srgbClr val="2B2B2B"/>
-                          </a:solidFill>
-                          <a:latin typeface="Calibri"/>
-                        </a:rPr>
-                        <a:t>Póster · evidencias · verificación antiplagio</a:t>
-                      </a:r>
-                    </a:p>
-                  </a:txBody>
-                  <a:tcPr anchor="ctr" marL="109728" marR="91440" marT="36576" marB="36576">
-                    <a:solidFill>
-                      <a:srgbClr val="FFFFFF"/>
-                    </a:solidFill>
-                  </a:tcPr>
-                </a:tc>
-                <a:tc>
-                  <a:txBody>
-                    <a:bodyPr/>
-                    <a:lstStyle/>
-                    <a:p>
-                      <a:pPr algn="l"/>
-                      <a:r>
-                        <a:rPr sz="1100" b="0" i="0">
-                          <a:solidFill>
-                            <a:srgbClr val="2B2B2B"/>
-                          </a:solidFill>
-                          <a:latin typeface="Calibri"/>
-                        </a:rPr>
-                        <a:t>Póster de una página y revisión de similitud</a:t>
-                      </a:r>
-                    </a:p>
-                  </a:txBody>
-                  <a:tcPr anchor="ctr" marL="109728" marR="91440" marT="36576" marB="36576">
-                    <a:solidFill>
-                      <a:srgbClr val="FFFFFF"/>
-                    </a:solidFill>
-                  </a:tcPr>
-                </a:tc>
-              </a:tr>
-              <a:tr h="502920">
-                <a:tc>
-                  <a:txBody>
-                    <a:bodyPr/>
-                    <a:lstStyle/>
-                    <a:p>
-                      <a:pPr algn="l"/>
-                      <a:r>
-                        <a:rPr sz="1100" b="1" i="0">
-                          <a:solidFill>
-                            <a:srgbClr val="2B2B2B"/>
-                          </a:solidFill>
-                          <a:latin typeface="Calibri"/>
-                        </a:rPr>
-                        <a:t>12</a:t>
-                      </a:r>
-                    </a:p>
-                  </a:txBody>
-                  <a:tcPr anchor="ctr" marL="109728" marR="91440" marT="36576" marB="36576">
-                    <a:solidFill>
-                      <a:srgbClr val="F2F2F2"/>
-                    </a:solidFill>
-                  </a:tcPr>
-                </a:tc>
-                <a:tc>
-                  <a:txBody>
-                    <a:bodyPr/>
-                    <a:lstStyle/>
-                    <a:p>
-                      <a:pPr algn="l"/>
-                      <a:r>
-                        <a:rPr sz="1100" b="0" i="0">
-                          <a:solidFill>
-                            <a:srgbClr val="2B2B2B"/>
-                          </a:solidFill>
-                          <a:latin typeface="Calibri"/>
-                        </a:rPr>
-                        <a:t>Sustentación ante jurados</a:t>
-                      </a:r>
-                    </a:p>
-                  </a:txBody>
-                  <a:tcPr anchor="ctr" marL="109728" marR="91440" marT="36576" marB="36576">
-                    <a:solidFill>
-                      <a:srgbClr val="F2F2F2"/>
-                    </a:solidFill>
-                  </a:tcPr>
-                </a:tc>
-                <a:tc>
-                  <a:txBody>
-                    <a:bodyPr/>
-                    <a:lstStyle/>
-                    <a:p>
-                      <a:pPr algn="l"/>
-                      <a:r>
-                        <a:rPr sz="1100" b="0" i="0">
-                          <a:solidFill>
-                            <a:srgbClr val="2B2B2B"/>
-                          </a:solidFill>
-                          <a:latin typeface="Calibri"/>
-                        </a:rPr>
-                        <a:t>Defensa presentada</a:t>
-                      </a:r>
-                    </a:p>
-                  </a:txBody>
-                  <a:tcPr anchor="ctr" marL="109728" marR="91440" marT="36576" marB="36576">
-                    <a:solidFill>
-                      <a:srgbClr val="F2F2F2"/>
-                    </a:solidFill>
-                  </a:tcPr>
-                </a:tc>
-              </a:tr>
-              <a:tr h="502920">
-                <a:tc>
-                  <a:txBody>
-                    <a:bodyPr/>
-                    <a:lstStyle/>
-                    <a:p>
-                      <a:pPr algn="l"/>
-                      <a:r>
-                        <a:rPr sz="1100" b="1" i="0">
-                          <a:solidFill>
-                            <a:srgbClr val="2B2B2B"/>
-                          </a:solidFill>
-                          <a:latin typeface="Calibri"/>
-                        </a:rPr>
-                        <a:t>13</a:t>
-                      </a:r>
-                    </a:p>
-                  </a:txBody>
-                  <a:tcPr anchor="ctr" marL="109728" marR="91440" marT="36576" marB="36576">
-                    <a:solidFill>
-                      <a:srgbClr val="FFFFFF"/>
-                    </a:solidFill>
-                  </a:tcPr>
-                </a:tc>
-                <a:tc>
-                  <a:txBody>
-                    <a:bodyPr/>
-                    <a:lstStyle/>
-                    <a:p>
-                      <a:pPr algn="l"/>
-                      <a:r>
-                        <a:rPr sz="1100" b="0" i="0">
-                          <a:solidFill>
-                            <a:srgbClr val="2B2B2B"/>
-                          </a:solidFill>
-                          <a:latin typeface="Calibri"/>
-                        </a:rPr>
-                        <a:t>Entregables para repositorio institucional</a:t>
-                      </a:r>
-                    </a:p>
-                  </a:txBody>
-                  <a:tcPr anchor="ctr" marL="109728" marR="91440" marT="36576" marB="36576">
-                    <a:solidFill>
-                      <a:srgbClr val="FFFFFF"/>
-                    </a:solidFill>
-                  </a:tcPr>
-                </a:tc>
-                <a:tc>
-                  <a:txBody>
-                    <a:bodyPr/>
-                    <a:lstStyle/>
-                    <a:p>
-                      <a:pPr algn="l"/>
-                      <a:r>
-                        <a:rPr sz="1100" b="0" i="0">
-                          <a:solidFill>
-                            <a:srgbClr val="2B2B2B"/>
-                          </a:solidFill>
-                          <a:latin typeface="Calibri"/>
-                        </a:rPr>
-                        <a:t>Paquete final verificado</a:t>
-                      </a:r>
-                    </a:p>
-                  </a:txBody>
-                  <a:tcPr anchor="ctr" marL="109728" marR="91440" marT="36576" marB="36576">
-                    <a:solidFill>
-                      <a:srgbClr val="FFFFFF"/>
-                    </a:solidFill>
-                  </a:tcPr>
-                </a:tc>
-              </a:tr>
-              <a:tr h="502920">
-                <a:tc>
-                  <a:txBody>
-                    <a:bodyPr/>
-                    <a:lstStyle/>
-                    <a:p>
-                      <a:pPr algn="l"/>
-                      <a:r>
-                        <a:rPr sz="1100" b="1" i="0">
-                          <a:solidFill>
-                            <a:srgbClr val="2B2B2B"/>
-                          </a:solidFill>
-                          <a:latin typeface="Calibri"/>
-                        </a:rPr>
-                        <a:t>14</a:t>
-                      </a:r>
-                    </a:p>
-                  </a:txBody>
-                  <a:tcPr anchor="ctr" marL="109728" marR="91440" marT="36576" marB="36576">
-                    <a:solidFill>
-                      <a:srgbClr val="F2F2F2"/>
-                    </a:solidFill>
-                  </a:tcPr>
-                </a:tc>
-                <a:tc>
-                  <a:txBody>
-                    <a:bodyPr/>
-                    <a:lstStyle/>
-                    <a:p>
-                      <a:pPr algn="l"/>
-                      <a:r>
-                        <a:rPr sz="1100" b="0" i="0">
-                          <a:solidFill>
-                            <a:srgbClr val="2B2B2B"/>
-                          </a:solidFill>
-                          <a:latin typeface="Calibri"/>
-                        </a:rPr>
-                        <a:t>Ajustes finales · seguimiento post-sustentación</a:t>
-                      </a:r>
-                    </a:p>
-                  </a:txBody>
-                  <a:tcPr anchor="ctr" marL="109728" marR="91440" marT="36576" marB="36576">
-                    <a:solidFill>
-                      <a:srgbClr val="F2F2F2"/>
-                    </a:solidFill>
-                  </a:tcPr>
-                </a:tc>
-                <a:tc>
-                  <a:txBody>
-                    <a:bodyPr/>
-                    <a:lstStyle/>
-                    <a:p>
-                      <a:pPr algn="l"/>
-                      <a:r>
-                        <a:rPr sz="1100" b="0" i="0">
-                          <a:solidFill>
-                            <a:srgbClr val="2B2B2B"/>
-                          </a:solidFill>
-                          <a:latin typeface="Calibri"/>
-                        </a:rPr>
-                        <a:t>Correcciones del jurado incorporadas</a:t>
-                      </a:r>
-                    </a:p>
-                  </a:txBody>
-                  <a:tcPr anchor="ctr" marL="109728" marR="91440" marT="36576" marB="36576">
-                    <a:solidFill>
-                      <a:srgbClr val="F2F2F2"/>
-                    </a:solidFill>
-                  </a:tcPr>
-                </a:tc>
-              </a:tr>
-              <a:tr h="502920">
-                <a:tc>
-                  <a:txBody>
-                    <a:bodyPr/>
-                    <a:lstStyle/>
-                    <a:p>
-                      <a:pPr algn="l"/>
-                      <a:r>
-                        <a:rPr sz="1100" b="1" i="0">
-                          <a:solidFill>
-                            <a:srgbClr val="2B2B2B"/>
-                          </a:solidFill>
-                          <a:latin typeface="Calibri"/>
-                        </a:rPr>
-                        <a:t>15</a:t>
-                      </a:r>
-                    </a:p>
-                  </a:txBody>
-                  <a:tcPr anchor="ctr" marL="109728" marR="91440" marT="36576" marB="36576">
-                    <a:solidFill>
-                      <a:srgbClr val="FFFFFF"/>
-                    </a:solidFill>
-                  </a:tcPr>
-                </a:tc>
-                <a:tc>
-                  <a:txBody>
-                    <a:bodyPr/>
-                    <a:lstStyle/>
-                    <a:p>
-                      <a:pPr algn="l"/>
-                      <a:r>
-                        <a:rPr sz="1100" b="0" i="0">
-                          <a:solidFill>
-                            <a:srgbClr val="2B2B2B"/>
-                          </a:solidFill>
-                          <a:latin typeface="Calibri"/>
-                        </a:rPr>
-                        <a:t>Cierre administrativo · recepción</a:t>
-                      </a:r>
-                    </a:p>
-                  </a:txBody>
-                  <a:tcPr anchor="ctr" marL="109728" marR="91440" marT="36576" marB="36576">
-                    <a:solidFill>
-                      <a:srgbClr val="FFFFFF"/>
-                    </a:solidFill>
-                  </a:tcPr>
-                </a:tc>
-                <a:tc>
-                  <a:txBody>
-                    <a:bodyPr/>
-                    <a:lstStyle/>
-                    <a:p>
-                      <a:pPr algn="l"/>
-                      <a:r>
-                        <a:rPr sz="1100" b="0" i="0">
-                          <a:solidFill>
-                            <a:srgbClr val="2B2B2B"/>
-                          </a:solidFill>
-                          <a:latin typeface="Calibri"/>
-                        </a:rPr>
-                        <a:t>Todo cargado y confirmado como recibido</a:t>
-                      </a:r>
-                    </a:p>
-                  </a:txBody>
-                  <a:tcPr anchor="ctr" marL="109728" marR="91440" marT="36576" marB="36576">
-                    <a:solidFill>
-                      <a:srgbClr val="FFFFFF"/>
-                    </a:solidFill>
-                  </a:tcPr>
-                </a:tc>
-              </a:tr>
-            </a:tbl>
-          </a:graphicData>
-        </a:graphic>
-      </p:graphicFrame>
-      <p:sp>
-        <p:nvSpPr>
-          <p:cNvPr id="5" name="TextBox 4"/>
+              <a:t>El acuerdo pedagógico: qué pactamos hoy</a:t>
+            </a:r>
+          </a:p>
+        </p:txBody>
+      </p:sp>
+      <p:sp>
+        <p:nvSpPr>
+          <p:cNvPr id="4" name="TextBox 3"/>
           <p:cNvSpPr txBox="1"/>
           <p:nvPr/>
         </p:nvSpPr>
         <p:spPr>
           <a:xfrm>
-            <a:off x="640080" y="5852160"/>
-            <a:ext cx="10911535" cy="548640"/>
+            <a:off x="640080" y="1691639"/>
+            <a:ext cx="10911535" cy="4617720"/>
           </a:xfrm>
           <a:prstGeom prst="rect">
             <a:avLst/>
@@ -4101,39 +3505,246 @@
           </a:bodyPr>
           <a:lstStyle/>
           <a:p>
-            <a:r>
-              <a:rPr sz="1200" b="0" i="1">
-                <a:solidFill>
-                  <a:srgbClr val="2B2B2B"/>
-                </a:solidFill>
-                <a:latin typeface="Calibri"/>
-              </a:rPr>
-              <a:t>El plazo de </a:t>
-            </a:r>
-            <a:r>
-              <a:rPr sz="1200" b="1" i="1">
-                <a:solidFill>
-                  <a:srgbClr val="2B2B2B"/>
-                </a:solidFill>
-                <a:latin typeface="Calibri"/>
-              </a:rPr>
-              <a:t>recepción y cierre varía según su grupo</a:t>
-            </a:r>
-            <a:r>
-              <a:rPr sz="1200" b="0" i="1">
-                <a:solidFill>
-                  <a:srgbClr val="2B2B2B"/>
-                </a:solidFill>
-                <a:latin typeface="Calibri"/>
-              </a:rPr>
-              <a:t>: consúltelo en la Presentación del Curso y anótelo hoy en su calendario.</a:t>
-            </a:r>
-          </a:p>
-        </p:txBody>
-      </p:sp>
-      <p:sp>
-        <p:nvSpPr>
-          <p:cNvPr id="6" name="TextBox 5"/>
+            <a:pPr>
+              <a:spcAft>
+                <a:spcPts val="1000"/>
+              </a:spcAft>
+            </a:pPr>
+            <a:r>
+              <a:rPr sz="1600" b="0" i="0">
+                <a:solidFill>
+                  <a:srgbClr val="2B2B2B"/>
+                </a:solidFill>
+                <a:latin typeface="Calibri"/>
+              </a:rPr>
+              <a:t>–   Es el </a:t>
+            </a:r>
+            <a:r>
+              <a:rPr sz="1600" b="1" i="0">
+                <a:solidFill>
+                  <a:srgbClr val="2B2B2B"/>
+                </a:solidFill>
+                <a:latin typeface="Calibri"/>
+              </a:rPr>
+              <a:t>pacto de trabajo del curso</a:t>
+            </a:r>
+            <a:r>
+              <a:rPr sz="1600" b="0" i="0">
+                <a:solidFill>
+                  <a:srgbClr val="2B2B2B"/>
+                </a:solidFill>
+                <a:latin typeface="Calibri"/>
+              </a:rPr>
+              <a:t> y se deja por escrito hoy, en el espacio del curso en CDigital.</a:t>
+            </a:r>
+          </a:p>
+          <a:p>
+            <a:pPr>
+              <a:spcAft>
+                <a:spcPts val="1000"/>
+              </a:spcAft>
+            </a:pPr>
+            <a:r>
+              <a:rPr sz="1600" b="0" i="0">
+                <a:solidFill>
+                  <a:srgbClr val="2B2B2B"/>
+                </a:solidFill>
+                <a:latin typeface="Calibri"/>
+              </a:rPr>
+              <a:t>–   Qué contiene:</a:t>
+            </a:r>
+          </a:p>
+          <a:p>
+            <a:pPr lvl="1">
+              <a:spcAft>
+                <a:spcPts val="600"/>
+              </a:spcAft>
+            </a:pPr>
+            <a:r>
+              <a:rPr sz="1500" b="0" i="0">
+                <a:solidFill>
+                  <a:srgbClr val="2B2B2B"/>
+                </a:solidFill>
+                <a:latin typeface="Calibri"/>
+              </a:rPr>
+              <a:t>●   </a:t>
+            </a:r>
+            <a:r>
+              <a:rPr sz="1500" b="1" i="0">
+                <a:solidFill>
+                  <a:srgbClr val="2B2B2B"/>
+                </a:solidFill>
+                <a:latin typeface="Calibri"/>
+              </a:rPr>
+              <a:t>Ritmo:</a:t>
+            </a:r>
+            <a:r>
+              <a:rPr sz="1500" b="0" i="0">
+                <a:solidFill>
+                  <a:srgbClr val="2B2B2B"/>
+                </a:solidFill>
+                <a:latin typeface="Calibri"/>
+              </a:rPr>
+              <a:t> una sección del artículo por sesión, subida antes del siguiente encuentro.</a:t>
+            </a:r>
+          </a:p>
+          <a:p>
+            <a:pPr lvl="1">
+              <a:spcAft>
+                <a:spcPts val="600"/>
+              </a:spcAft>
+            </a:pPr>
+            <a:r>
+              <a:rPr sz="1500" b="0" i="0">
+                <a:solidFill>
+                  <a:srgbClr val="2B2B2B"/>
+                </a:solidFill>
+                <a:latin typeface="Calibri"/>
+              </a:rPr>
+              <a:t>●   </a:t>
+            </a:r>
+            <a:r>
+              <a:rPr sz="1500" b="1" i="0">
+                <a:solidFill>
+                  <a:srgbClr val="2B2B2B"/>
+                </a:solidFill>
+                <a:latin typeface="Calibri"/>
+              </a:rPr>
+              <a:t>Formato:</a:t>
+            </a:r>
+            <a:r>
+              <a:rPr sz="1500" b="0" i="0">
+                <a:solidFill>
+                  <a:srgbClr val="2B2B2B"/>
+                </a:solidFill>
+                <a:latin typeface="Calibri"/>
+              </a:rPr>
+              <a:t> plantilla APA CUN abierta en Google Docs, con referencias en APA 7 desde el primer día.</a:t>
+            </a:r>
+          </a:p>
+          <a:p>
+            <a:pPr lvl="1">
+              <a:spcAft>
+                <a:spcPts val="600"/>
+              </a:spcAft>
+            </a:pPr>
+            <a:r>
+              <a:rPr sz="1500" b="0" i="0">
+                <a:solidFill>
+                  <a:srgbClr val="2B2B2B"/>
+                </a:solidFill>
+                <a:latin typeface="Calibri"/>
+              </a:rPr>
+              <a:t>●   </a:t>
+            </a:r>
+            <a:r>
+              <a:rPr sz="1500" b="1" i="0">
+                <a:solidFill>
+                  <a:srgbClr val="2B2B2B"/>
+                </a:solidFill>
+                <a:latin typeface="Calibri"/>
+              </a:rPr>
+              <a:t>Canal:</a:t>
+            </a:r>
+            <a:r>
+              <a:rPr sz="1500" b="0" i="0">
+                <a:solidFill>
+                  <a:srgbClr val="2B2B2B"/>
+                </a:solidFill>
+                <a:latin typeface="Calibri"/>
+              </a:rPr>
+              <a:t> CDigital para todo lo que se entrega, se comenta y se califica.</a:t>
+            </a:r>
+          </a:p>
+          <a:p>
+            <a:pPr lvl="1">
+              <a:spcAft>
+                <a:spcPts val="600"/>
+              </a:spcAft>
+            </a:pPr>
+            <a:r>
+              <a:rPr sz="1500" b="0" i="0">
+                <a:solidFill>
+                  <a:srgbClr val="2B2B2B"/>
+                </a:solidFill>
+                <a:latin typeface="Calibri"/>
+              </a:rPr>
+              <a:t>●   </a:t>
+            </a:r>
+            <a:r>
+              <a:rPr sz="1500" b="1" i="0">
+                <a:solidFill>
+                  <a:srgbClr val="2B2B2B"/>
+                </a:solidFill>
+                <a:latin typeface="Calibri"/>
+              </a:rPr>
+              <a:t>Retroalimentación:</a:t>
+            </a:r>
+            <a:r>
+              <a:rPr sz="1500" b="0" i="0">
+                <a:solidFill>
+                  <a:srgbClr val="2B2B2B"/>
+                </a:solidFill>
+                <a:latin typeface="Calibri"/>
+              </a:rPr>
+              <a:t> el Docente comenta sobre lo entregado. Sin texto entregado no hay corrección posible.</a:t>
+            </a:r>
+          </a:p>
+          <a:p>
+            <a:pPr lvl="1">
+              <a:spcAft>
+                <a:spcPts val="600"/>
+              </a:spcAft>
+            </a:pPr>
+            <a:r>
+              <a:rPr sz="1500" b="0" i="0">
+                <a:solidFill>
+                  <a:srgbClr val="2B2B2B"/>
+                </a:solidFill>
+                <a:latin typeface="Calibri"/>
+              </a:rPr>
+              <a:t>●   </a:t>
+            </a:r>
+            <a:r>
+              <a:rPr sz="1500" b="1" i="0">
+                <a:solidFill>
+                  <a:srgbClr val="2B2B2B"/>
+                </a:solidFill>
+                <a:latin typeface="Calibri"/>
+              </a:rPr>
+              <a:t>Sustentación:</a:t>
+            </a:r>
+            <a:r>
+              <a:rPr sz="1500" b="0" i="0">
+                <a:solidFill>
+                  <a:srgbClr val="2B2B2B"/>
+                </a:solidFill>
+                <a:latin typeface="Calibri"/>
+              </a:rPr>
+              <a:t> se prepara desde ahora, no la semana anterior; el guion de defensa nace del artículo.</a:t>
+            </a:r>
+          </a:p>
+          <a:p>
+            <a:pPr>
+              <a:spcAft>
+                <a:spcPts val="1000"/>
+              </a:spcAft>
+            </a:pPr>
+            <a:r>
+              <a:rPr sz="1600" b="0" i="0">
+                <a:solidFill>
+                  <a:srgbClr val="2B2B2B"/>
+                </a:solidFill>
+                <a:latin typeface="Calibri"/>
+              </a:rPr>
+              <a:t>–   No es un formalismo: es lo que se invoca cuando alguien dice “yo no sabía”. Léalo antes de aceptarlo.</a:t>
+            </a:r>
+          </a:p>
+        </p:txBody>
+      </p:sp>
+      <p:sp>
+        <p:nvSpPr>
+          <p:cNvPr id="5" name="TextBox 4"/>
           <p:cNvSpPr txBox="1"/>
           <p:nvPr/>
         </p:nvSpPr>
@@ -4175,405 +3786,6 @@
 </file>
 
 <file path=ppt/slides/slide11.xml><?xml version="1.0" encoding="utf-8"?>
-<p:sld xmlns:a="http://schemas.openxmlformats.org/drawingml/2006/main" xmlns:p="http://schemas.openxmlformats.org/presentationml/2006/main" xmlns:r="http://schemas.openxmlformats.org/officeDocument/2006/relationships">
-  <p:cSld>
-    <p:bg>
-      <p:bgPr>
-        <a:solidFill>
-          <a:srgbClr val="FFFFFF"/>
-        </a:solidFill>
-        <a:effectLst/>
-      </p:bgPr>
-    </p:bg>
-    <p:spTree>
-      <p:nvGrpSpPr>
-        <p:cNvPr id="1" name=""/>
-        <p:cNvGrpSpPr/>
-        <p:nvPr/>
-      </p:nvGrpSpPr>
-      <p:grpSpPr/>
-      <p:sp>
-        <p:nvSpPr>
-          <p:cNvPr id="2" name="Rectangle 1"/>
-          <p:cNvSpPr/>
-          <p:nvPr/>
-        </p:nvSpPr>
-        <p:spPr>
-          <a:xfrm>
-            <a:off x="0" y="0"/>
-            <a:ext cx="12191695" cy="1188720"/>
-          </a:xfrm>
-          <a:prstGeom prst="rect">
-            <a:avLst/>
-          </a:prstGeom>
-          <a:solidFill>
-            <a:srgbClr val="0C2340"/>
-          </a:solidFill>
-          <a:ln>
-            <a:noFill/>
-          </a:ln>
-          <a:effectLst/>
-        </p:spPr>
-        <p:style>
-          <a:lnRef idx="1">
-            <a:schemeClr val="accent1"/>
-          </a:lnRef>
-          <a:fillRef idx="3">
-            <a:schemeClr val="accent1"/>
-          </a:fillRef>
-          <a:effectRef idx="2">
-            <a:schemeClr val="accent1"/>
-          </a:effectRef>
-          <a:fontRef idx="minor">
-            <a:schemeClr val="lt1"/>
-          </a:fontRef>
-        </p:style>
-        <p:txBody>
-          <a:bodyPr rtlCol="0" anchor="ctr"/>
-          <a:lstStyle/>
-          <a:p>
-            <a:pPr algn="ctr"/>
-          </a:p>
-        </p:txBody>
-      </p:sp>
-      <p:sp>
-        <p:nvSpPr>
-          <p:cNvPr id="3" name="TextBox 2"/>
-          <p:cNvSpPr txBox="1"/>
-          <p:nvPr/>
-        </p:nvSpPr>
-        <p:spPr>
-          <a:xfrm>
-            <a:off x="640080" y="0"/>
-            <a:ext cx="9082735" cy="1188720"/>
-          </a:xfrm>
-          <a:prstGeom prst="rect">
-            <a:avLst/>
-          </a:prstGeom>
-          <a:noFill/>
-        </p:spPr>
-        <p:txBody>
-          <a:bodyPr wrap="square" anchor="ctr" lIns="0" rIns="0" tIns="0" bIns="0">
-            <a:spAutoFit/>
-          </a:bodyPr>
-          <a:lstStyle/>
-          <a:p>
-            <a:pPr algn="ctr"/>
-            <a:r>
-              <a:rPr sz="2600" b="1" i="0">
-                <a:solidFill>
-                  <a:srgbClr val="FFFFFF"/>
-                </a:solidFill>
-                <a:latin typeface="Calibri"/>
-              </a:rPr>
-              <a:t>El acuerdo pedagógico: qué pactamos hoy</a:t>
-            </a:r>
-          </a:p>
-        </p:txBody>
-      </p:sp>
-      <p:sp>
-        <p:nvSpPr>
-          <p:cNvPr id="4" name="TextBox 3"/>
-          <p:cNvSpPr txBox="1"/>
-          <p:nvPr/>
-        </p:nvSpPr>
-        <p:spPr>
-          <a:xfrm>
-            <a:off x="640080" y="1691639"/>
-            <a:ext cx="10911535" cy="4617720"/>
-          </a:xfrm>
-          <a:prstGeom prst="rect">
-            <a:avLst/>
-          </a:prstGeom>
-          <a:noFill/>
-        </p:spPr>
-        <p:txBody>
-          <a:bodyPr wrap="square" anchor="t" lIns="0" rIns="0" tIns="0" bIns="0">
-            <a:spAutoFit/>
-          </a:bodyPr>
-          <a:lstStyle/>
-          <a:p>
-            <a:pPr>
-              <a:spcAft>
-                <a:spcPts val="1000"/>
-              </a:spcAft>
-            </a:pPr>
-            <a:r>
-              <a:rPr sz="1600" b="0" i="0">
-                <a:solidFill>
-                  <a:srgbClr val="2B2B2B"/>
-                </a:solidFill>
-                <a:latin typeface="Calibri"/>
-              </a:rPr>
-              <a:t>–   Es el </a:t>
-            </a:r>
-            <a:r>
-              <a:rPr sz="1600" b="1" i="0">
-                <a:solidFill>
-                  <a:srgbClr val="2B2B2B"/>
-                </a:solidFill>
-                <a:latin typeface="Calibri"/>
-              </a:rPr>
-              <a:t>pacto de trabajo del curso</a:t>
-            </a:r>
-            <a:r>
-              <a:rPr sz="1600" b="0" i="0">
-                <a:solidFill>
-                  <a:srgbClr val="2B2B2B"/>
-                </a:solidFill>
-                <a:latin typeface="Calibri"/>
-              </a:rPr>
-              <a:t> y se deja por escrito hoy, en el espacio del curso en CDigital.</a:t>
-            </a:r>
-          </a:p>
-          <a:p>
-            <a:pPr>
-              <a:spcAft>
-                <a:spcPts val="1000"/>
-              </a:spcAft>
-            </a:pPr>
-            <a:r>
-              <a:rPr sz="1600" b="0" i="0">
-                <a:solidFill>
-                  <a:srgbClr val="2B2B2B"/>
-                </a:solidFill>
-                <a:latin typeface="Calibri"/>
-              </a:rPr>
-              <a:t>–   Qué contiene:</a:t>
-            </a:r>
-          </a:p>
-          <a:p>
-            <a:pPr lvl="1">
-              <a:spcAft>
-                <a:spcPts val="600"/>
-              </a:spcAft>
-            </a:pPr>
-            <a:r>
-              <a:rPr sz="1500" b="0" i="0">
-                <a:solidFill>
-                  <a:srgbClr val="2B2B2B"/>
-                </a:solidFill>
-                <a:latin typeface="Calibri"/>
-              </a:rPr>
-              <a:t>●   </a:t>
-            </a:r>
-            <a:r>
-              <a:rPr sz="1500" b="1" i="0">
-                <a:solidFill>
-                  <a:srgbClr val="2B2B2B"/>
-                </a:solidFill>
-                <a:latin typeface="Calibri"/>
-              </a:rPr>
-              <a:t>Ritmo:</a:t>
-            </a:r>
-            <a:r>
-              <a:rPr sz="1500" b="0" i="0">
-                <a:solidFill>
-                  <a:srgbClr val="2B2B2B"/>
-                </a:solidFill>
-                <a:latin typeface="Calibri"/>
-              </a:rPr>
-              <a:t> una sección del artículo por sesión, subida antes del siguiente encuentro.</a:t>
-            </a:r>
-          </a:p>
-          <a:p>
-            <a:pPr lvl="1">
-              <a:spcAft>
-                <a:spcPts val="600"/>
-              </a:spcAft>
-            </a:pPr>
-            <a:r>
-              <a:rPr sz="1500" b="0" i="0">
-                <a:solidFill>
-                  <a:srgbClr val="2B2B2B"/>
-                </a:solidFill>
-                <a:latin typeface="Calibri"/>
-              </a:rPr>
-              <a:t>●   </a:t>
-            </a:r>
-            <a:r>
-              <a:rPr sz="1500" b="1" i="0">
-                <a:solidFill>
-                  <a:srgbClr val="2B2B2B"/>
-                </a:solidFill>
-                <a:latin typeface="Calibri"/>
-              </a:rPr>
-              <a:t>Formato:</a:t>
-            </a:r>
-            <a:r>
-              <a:rPr sz="1500" b="0" i="0">
-                <a:solidFill>
-                  <a:srgbClr val="2B2B2B"/>
-                </a:solidFill>
-                <a:latin typeface="Calibri"/>
-              </a:rPr>
-              <a:t> plantilla APA CUN abierta en Google Docs, con referencias en APA 7 desde el primer día.</a:t>
-            </a:r>
-          </a:p>
-          <a:p>
-            <a:pPr lvl="1">
-              <a:spcAft>
-                <a:spcPts val="600"/>
-              </a:spcAft>
-            </a:pPr>
-            <a:r>
-              <a:rPr sz="1500" b="0" i="0">
-                <a:solidFill>
-                  <a:srgbClr val="2B2B2B"/>
-                </a:solidFill>
-                <a:latin typeface="Calibri"/>
-              </a:rPr>
-              <a:t>●   </a:t>
-            </a:r>
-            <a:r>
-              <a:rPr sz="1500" b="1" i="0">
-                <a:solidFill>
-                  <a:srgbClr val="2B2B2B"/>
-                </a:solidFill>
-                <a:latin typeface="Calibri"/>
-              </a:rPr>
-              <a:t>Canal:</a:t>
-            </a:r>
-            <a:r>
-              <a:rPr sz="1500" b="0" i="0">
-                <a:solidFill>
-                  <a:srgbClr val="2B2B2B"/>
-                </a:solidFill>
-                <a:latin typeface="Calibri"/>
-              </a:rPr>
-              <a:t> CDigital para todo lo que se entrega, se comenta y se califica.</a:t>
-            </a:r>
-          </a:p>
-          <a:p>
-            <a:pPr lvl="1">
-              <a:spcAft>
-                <a:spcPts val="600"/>
-              </a:spcAft>
-            </a:pPr>
-            <a:r>
-              <a:rPr sz="1500" b="0" i="0">
-                <a:solidFill>
-                  <a:srgbClr val="2B2B2B"/>
-                </a:solidFill>
-                <a:latin typeface="Calibri"/>
-              </a:rPr>
-              <a:t>●   </a:t>
-            </a:r>
-            <a:r>
-              <a:rPr sz="1500" b="1" i="0">
-                <a:solidFill>
-                  <a:srgbClr val="2B2B2B"/>
-                </a:solidFill>
-                <a:latin typeface="Calibri"/>
-              </a:rPr>
-              <a:t>Retroalimentación:</a:t>
-            </a:r>
-            <a:r>
-              <a:rPr sz="1500" b="0" i="0">
-                <a:solidFill>
-                  <a:srgbClr val="2B2B2B"/>
-                </a:solidFill>
-                <a:latin typeface="Calibri"/>
-              </a:rPr>
-              <a:t> el Docente comenta sobre lo entregado. Sin texto entregado no hay corrección posible.</a:t>
-            </a:r>
-          </a:p>
-          <a:p>
-            <a:pPr lvl="1">
-              <a:spcAft>
-                <a:spcPts val="600"/>
-              </a:spcAft>
-            </a:pPr>
-            <a:r>
-              <a:rPr sz="1500" b="0" i="0">
-                <a:solidFill>
-                  <a:srgbClr val="2B2B2B"/>
-                </a:solidFill>
-                <a:latin typeface="Calibri"/>
-              </a:rPr>
-              <a:t>●   </a:t>
-            </a:r>
-            <a:r>
-              <a:rPr sz="1500" b="1" i="0">
-                <a:solidFill>
-                  <a:srgbClr val="2B2B2B"/>
-                </a:solidFill>
-                <a:latin typeface="Calibri"/>
-              </a:rPr>
-              <a:t>Sustentación:</a:t>
-            </a:r>
-            <a:r>
-              <a:rPr sz="1500" b="0" i="0">
-                <a:solidFill>
-                  <a:srgbClr val="2B2B2B"/>
-                </a:solidFill>
-                <a:latin typeface="Calibri"/>
-              </a:rPr>
-              <a:t> se prepara desde ahora, no la semana anterior; el guion de defensa nace del artículo.</a:t>
-            </a:r>
-          </a:p>
-          <a:p>
-            <a:pPr>
-              <a:spcAft>
-                <a:spcPts val="1000"/>
-              </a:spcAft>
-            </a:pPr>
-            <a:r>
-              <a:rPr sz="1600" b="0" i="0">
-                <a:solidFill>
-                  <a:srgbClr val="2B2B2B"/>
-                </a:solidFill>
-                <a:latin typeface="Calibri"/>
-              </a:rPr>
-              <a:t>–   No es un formalismo: es lo que se invoca cuando alguien dice “yo no sabía”. Léalo antes de aceptarlo.</a:t>
-            </a:r>
-          </a:p>
-        </p:txBody>
-      </p:sp>
-      <p:sp>
-        <p:nvSpPr>
-          <p:cNvPr id="5" name="TextBox 4"/>
-          <p:cNvSpPr txBox="1"/>
-          <p:nvPr/>
-        </p:nvSpPr>
-        <p:spPr>
-          <a:xfrm>
-            <a:off x="11094415" y="6446520"/>
-            <a:ext cx="548640" cy="274320"/>
-          </a:xfrm>
-          <a:prstGeom prst="rect">
-            <a:avLst/>
-          </a:prstGeom>
-          <a:noFill/>
-        </p:spPr>
-        <p:txBody>
-          <a:bodyPr wrap="square" anchor="t" lIns="0" rIns="0" tIns="0" bIns="0">
-            <a:spAutoFit/>
-          </a:bodyPr>
-          <a:lstStyle/>
-          <a:p>
-            <a:pPr algn="r"/>
-            <a:r>
-              <a:rPr sz="1000" b="1" i="0">
-                <a:solidFill>
-                  <a:srgbClr val="8F989D"/>
-                </a:solidFill>
-                <a:latin typeface="Calibri"/>
-              </a:rPr>
-              <a:t>11</a:t>
-            </a:r>
-          </a:p>
-        </p:txBody>
-      </p:sp>
-    </p:spTree>
-  </p:cSld>
-  <p:clrMapOvr>
-    <a:masterClrMapping/>
-  </p:clrMapOvr>
-</p:sld>
-</file>
-
-<file path=ppt/slides/slide12.xml><?xml version="1.0" encoding="utf-8"?>
 <p:sld xmlns:a="http://schemas.openxmlformats.org/drawingml/2006/main" xmlns:p="http://schemas.openxmlformats.org/presentationml/2006/main" xmlns:r="http://schemas.openxmlformats.org/officeDocument/2006/relationships">
   <p:cSld>
     <p:bg>
@@ -5327,7 +4539,7 @@
                 </a:solidFill>
                 <a:latin typeface="Calibri"/>
               </a:rPr>
-              <a:t>12</a:t>
+              <a:t>11</a:t>
             </a:r>
           </a:p>
         </p:txBody>
@@ -5340,7 +4552,7 @@
 </p:sld>
 </file>
 
-<file path=ppt/slides/slide13.xml><?xml version="1.0" encoding="utf-8"?>
+<file path=ppt/slides/slide12.xml><?xml version="1.0" encoding="utf-8"?>
 <p:sld xmlns:a="http://schemas.openxmlformats.org/drawingml/2006/main" xmlns:p="http://schemas.openxmlformats.org/presentationml/2006/main" xmlns:r="http://schemas.openxmlformats.org/officeDocument/2006/relationships">
   <p:cSld>
     <p:bg>
@@ -5922,7 +5134,7 @@
                 </a:solidFill>
                 <a:latin typeface="Calibri"/>
               </a:rPr>
-              <a:t>13</a:t>
+              <a:t>12</a:t>
             </a:r>
           </a:p>
         </p:txBody>
@@ -5935,7 +5147,7 @@
 </p:sld>
 </file>
 
-<file path=ppt/slides/slide14.xml><?xml version="1.0" encoding="utf-8"?>
+<file path=ppt/slides/slide13.xml><?xml version="1.0" encoding="utf-8"?>
 <p:sld xmlns:a="http://schemas.openxmlformats.org/drawingml/2006/main" xmlns:p="http://schemas.openxmlformats.org/presentationml/2006/main" xmlns:r="http://schemas.openxmlformats.org/officeDocument/2006/relationships">
   <p:cSld>
     <p:bg>
@@ -6355,7 +5567,7 @@
                 </a:solidFill>
                 <a:latin typeface="Calibri"/>
               </a:rPr>
-              <a:t>14</a:t>
+              <a:t>13</a:t>
             </a:r>
           </a:p>
         </p:txBody>
@@ -6420,7 +5632,7 @@
 </p:sld>
 </file>
 
-<file path=ppt/slides/slide15.xml><?xml version="1.0" encoding="utf-8"?>
+<file path=ppt/slides/slide14.xml><?xml version="1.0" encoding="utf-8"?>
 <p:sld xmlns:a="http://schemas.openxmlformats.org/drawingml/2006/main" xmlns:p="http://schemas.openxmlformats.org/presentationml/2006/main" xmlns:r="http://schemas.openxmlformats.org/officeDocument/2006/relationships">
   <p:cSld>
     <p:bg>
@@ -6856,7 +6068,7 @@
                 </a:solidFill>
                 <a:latin typeface="Calibri"/>
               </a:rPr>
-              <a:t>15</a:t>
+              <a:t>14</a:t>
             </a:r>
           </a:p>
         </p:txBody>
@@ -6869,7 +6081,7 @@
 </p:sld>
 </file>
 
-<file path=ppt/slides/slide16.xml><?xml version="1.0" encoding="utf-8"?>
+<file path=ppt/slides/slide15.xml><?xml version="1.0" encoding="utf-8"?>
 <p:sld xmlns:a="http://schemas.openxmlformats.org/drawingml/2006/main" xmlns:p="http://schemas.openxmlformats.org/presentationml/2006/main" xmlns:r="http://schemas.openxmlformats.org/officeDocument/2006/relationships">
   <p:cSld>
     <p:bg>
@@ -7625,7 +6837,7 @@
                 </a:solidFill>
                 <a:latin typeface="Calibri"/>
               </a:rPr>
-              <a:t>16</a:t>
+              <a:t>15</a:t>
             </a:r>
           </a:p>
         </p:txBody>
@@ -7638,7 +6850,7 @@
 </p:sld>
 </file>
 
-<file path=ppt/slides/slide17.xml><?xml version="1.0" encoding="utf-8"?>
+<file path=ppt/slides/slide16.xml><?xml version="1.0" encoding="utf-8"?>
 <p:sld xmlns:a="http://schemas.openxmlformats.org/drawingml/2006/main" xmlns:p="http://schemas.openxmlformats.org/presentationml/2006/main" xmlns:r="http://schemas.openxmlformats.org/officeDocument/2006/relationships">
   <p:cSld>
     <p:bg>
@@ -8051,7 +7263,7 @@
                 </a:solidFill>
                 <a:latin typeface="Calibri"/>
               </a:rPr>
-              <a:t>17</a:t>
+              <a:t>16</a:t>
             </a:r>
           </a:p>
         </p:txBody>
@@ -8064,7 +7276,7 @@
 </p:sld>
 </file>
 
-<file path=ppt/slides/slide18.xml><?xml version="1.0" encoding="utf-8"?>
+<file path=ppt/slides/slide17.xml><?xml version="1.0" encoding="utf-8"?>
 <p:sld xmlns:a="http://schemas.openxmlformats.org/drawingml/2006/main" xmlns:p="http://schemas.openxmlformats.org/presentationml/2006/main" xmlns:r="http://schemas.openxmlformats.org/officeDocument/2006/relationships">
   <p:cSld>
     <p:bg>
@@ -8536,7 +7748,7 @@
                 </a:solidFill>
                 <a:latin typeface="Calibri"/>
               </a:rPr>
-              <a:t>18</a:t>
+              <a:t>17</a:t>
             </a:r>
           </a:p>
         </p:txBody>
@@ -8549,7 +7761,7 @@
 </p:sld>
 </file>
 
-<file path=ppt/slides/slide19.xml><?xml version="1.0" encoding="utf-8"?>
+<file path=ppt/slides/slide18.xml><?xml version="1.0" encoding="utf-8"?>
 <p:sld xmlns:a="http://schemas.openxmlformats.org/drawingml/2006/main" xmlns:p="http://schemas.openxmlformats.org/presentationml/2006/main" xmlns:r="http://schemas.openxmlformats.org/officeDocument/2006/relationships">
   <p:cSld>
     <p:bg>
@@ -9021,7 +8233,7 @@
                 </a:solidFill>
                 <a:latin typeface="Calibri"/>
               </a:rPr>
-              <a:t>19</a:t>
+              <a:t>18</a:t>
             </a:r>
           </a:p>
         </p:txBody>
@@ -9034,7 +8246,7 @@
 </p:sld>
 </file>
 
-<file path=ppt/slides/slide2.xml><?xml version="1.0" encoding="utf-8"?>
+<file path=ppt/slides/slide19.xml><?xml version="1.0" encoding="utf-8"?>
 <p:sld xmlns:a="http://schemas.openxmlformats.org/drawingml/2006/main" xmlns:p="http://schemas.openxmlformats.org/presentationml/2006/main" xmlns:r="http://schemas.openxmlformats.org/officeDocument/2006/relationships">
   <p:cSld>
     <p:bg>
@@ -9126,7 +8338,7 @@
                 </a:solidFill>
                 <a:latin typeface="Calibri"/>
               </a:rPr>
-              <a:t>AGENDA DE HOY</a:t>
+              <a:t>Lo que debe tener listo para la Sesión 02</a:t>
             </a:r>
           </a:p>
         </p:txBody>
@@ -9139,8 +8351,8 @@
         </p:nvSpPr>
         <p:spPr>
           <a:xfrm>
-            <a:off x="640080" y="1280160"/>
-            <a:ext cx="10911535" cy="411480"/>
+            <a:off x="640080" y="1691639"/>
+            <a:ext cx="10911535" cy="4617720"/>
           </a:xfrm>
           <a:prstGeom prst="rect">
             <a:avLst/>
@@ -9153,41 +8365,6 @@
           </a:bodyPr>
           <a:lstStyle/>
           <a:p>
-            <a:pPr algn="ctr"/>
-            <a:r>
-              <a:rPr sz="1500" b="0" i="0">
-                <a:solidFill>
-                  <a:srgbClr val="2B2B2B"/>
-                </a:solidFill>
-                <a:latin typeface="Calibri"/>
-              </a:rPr>
-              <a:t>Sesión de encuadre — hoy no vemos tema; el contenido arranca en la Sesión 02.</a:t>
-            </a:r>
-          </a:p>
-        </p:txBody>
-      </p:sp>
-      <p:sp>
-        <p:nvSpPr>
-          <p:cNvPr id="5" name="TextBox 4"/>
-          <p:cNvSpPr txBox="1"/>
-          <p:nvPr/>
-        </p:nvSpPr>
-        <p:spPr>
-          <a:xfrm>
-            <a:off x="640080" y="2011679"/>
-            <a:ext cx="10911535" cy="4297680"/>
-          </a:xfrm>
-          <a:prstGeom prst="rect">
-            <a:avLst/>
-          </a:prstGeom>
-          <a:noFill/>
-        </p:spPr>
-        <p:txBody>
-          <a:bodyPr wrap="square" anchor="t" lIns="0" rIns="0" tIns="0" bIns="0">
-            <a:spAutoFit/>
-          </a:bodyPr>
-          <a:lstStyle/>
-          <a:p>
             <a:pPr>
               <a:spcAft>
                 <a:spcPts val="1000"/>
@@ -9209,7 +8386,7 @@
                 </a:solidFill>
                 <a:latin typeface="Calibri"/>
               </a:rPr>
-              <a:t>El curso:</a:t>
+              <a:t>Lectura autónoma (obligatoria):</a:t>
             </a:r>
             <a:r>
               <a:rPr sz="1600" b="0" i="0">
@@ -9218,7 +8395,129 @@
                 </a:solidFill>
                 <a:latin typeface="Calibri"/>
               </a:rPr>
-              <a:t> de qué se trata, cómo trabajamos y qué se llevan al final.</a:t>
+              <a:t> unidades </a:t>
+            </a:r>
+            <a:r>
+              <a:rPr sz="1600" b="1" i="0">
+                <a:solidFill>
+                  <a:srgbClr val="2B2B2B"/>
+                </a:solidFill>
+                <a:latin typeface="Calibri"/>
+              </a:rPr>
+              <a:t>U1 y U2</a:t>
+            </a:r>
+            <a:r>
+              <a:rPr sz="1600" b="0" i="0">
+                <a:solidFill>
+                  <a:srgbClr val="2B2B2B"/>
+                </a:solidFill>
+                <a:latin typeface="Calibri"/>
+              </a:rPr>
+              <a:t> del Syllabus — </a:t>
+            </a:r>
+            <a:r>
+              <a:rPr sz="1600" b="1" i="0">
+                <a:solidFill>
+                  <a:srgbClr val="2B2B2B"/>
+                </a:solidFill>
+                <a:latin typeface="Calibri"/>
+              </a:rPr>
+              <a:t>casos de éxito</a:t>
+            </a:r>
+            <a:r>
+              <a:rPr sz="1600" b="0" i="0">
+                <a:solidFill>
+                  <a:srgbClr val="2B2B2B"/>
+                </a:solidFill>
+                <a:latin typeface="Calibri"/>
+              </a:rPr>
+              <a:t> y </a:t>
+            </a:r>
+            <a:r>
+              <a:rPr sz="1600" b="1" i="0">
+                <a:solidFill>
+                  <a:srgbClr val="2B2B2B"/>
+                </a:solidFill>
+                <a:latin typeface="Calibri"/>
+              </a:rPr>
+              <a:t>retomar el proyecto</a:t>
+            </a:r>
+            <a:r>
+              <a:rPr sz="1600" b="0" i="0">
+                <a:solidFill>
+                  <a:srgbClr val="2B2B2B"/>
+                </a:solidFill>
+                <a:latin typeface="Calibri"/>
+              </a:rPr>
+              <a:t> (contexto y planteamiento).</a:t>
+            </a:r>
+          </a:p>
+          <a:p>
+            <a:pPr lvl="1">
+              <a:spcAft>
+                <a:spcPts val="600"/>
+              </a:spcAft>
+            </a:pPr>
+            <a:r>
+              <a:rPr sz="1500" b="0" i="0">
+                <a:solidFill>
+                  <a:srgbClr val="2B2B2B"/>
+                </a:solidFill>
+                <a:latin typeface="Calibri"/>
+              </a:rPr>
+              <a:t>●   Hoy no se dictaron: se leen en casa y se </a:t>
+            </a:r>
+            <a:r>
+              <a:rPr sz="1500" b="1" i="0">
+                <a:solidFill>
+                  <a:srgbClr val="2B2B2B"/>
+                </a:solidFill>
+                <a:latin typeface="Calibri"/>
+              </a:rPr>
+              <a:t>retoman al abrir la Sesión 02</a:t>
+            </a:r>
+            <a:r>
+              <a:rPr sz="1500" b="0" i="0">
+                <a:solidFill>
+                  <a:srgbClr val="2B2B2B"/>
+                </a:solidFill>
+                <a:latin typeface="Calibri"/>
+              </a:rPr>
+              <a:t>.</a:t>
+            </a:r>
+          </a:p>
+          <a:p>
+            <a:pPr lvl="1">
+              <a:spcAft>
+                <a:spcPts val="600"/>
+              </a:spcAft>
+            </a:pPr>
+            <a:r>
+              <a:rPr sz="1500" b="0" i="0">
+                <a:solidFill>
+                  <a:srgbClr val="2B2B2B"/>
+                </a:solidFill>
+                <a:latin typeface="Calibri"/>
+              </a:rPr>
+              <a:t>●   </a:t>
+            </a:r>
+            <a:r>
+              <a:rPr sz="1500" b="1" i="0">
+                <a:solidFill>
+                  <a:srgbClr val="2B2B2B"/>
+                </a:solidFill>
+                <a:latin typeface="Calibri"/>
+              </a:rPr>
+              <a:t>Dónde está:</a:t>
+            </a:r>
+            <a:r>
+              <a:rPr sz="1500" b="0" i="0">
+                <a:solidFill>
+                  <a:srgbClr val="2B2B2B"/>
+                </a:solidFill>
+                <a:latin typeface="Calibri"/>
+              </a:rPr>
+              <a:t> ya viene en tu carpeta del curso, en `Sesion 01 - …/` (el PDF y el archivo `Lectura autonoma - Sesion 01.txt` con la cita y el enlace). También queda publicada en CDigital.</a:t>
             </a:r>
           </a:p>
           <a:p>
@@ -9243,7 +8542,7 @@
                 </a:solidFill>
                 <a:latin typeface="Calibri"/>
               </a:rPr>
-              <a:t>El Docente:</a:t>
+              <a:t>Arme su matriz de herencia</a:t>
             </a:r>
             <a:r>
               <a:rPr sz="1600" b="0" i="0">
@@ -9252,7 +8551,109 @@
                 </a:solidFill>
                 <a:latin typeface="Calibri"/>
               </a:rPr>
-              <a:t> quién los acompaña y cómo contactarlo.</a:t>
+              <a:t> en un Google Doc llamado `S01_AcuerdoRetoma_Apellido`, con tres columnas:</a:t>
+            </a:r>
+          </a:p>
+          <a:p>
+            <a:pPr lvl="1">
+              <a:spcAft>
+                <a:spcPts val="600"/>
+              </a:spcAft>
+            </a:pPr>
+            <a:r>
+              <a:rPr sz="1500" b="0" i="0">
+                <a:solidFill>
+                  <a:srgbClr val="2B2B2B"/>
+                </a:solidFill>
+                <a:latin typeface="Calibri"/>
+              </a:rPr>
+              <a:t>●   </a:t>
+            </a:r>
+            <a:r>
+              <a:rPr sz="1500" b="1" i="0">
+                <a:solidFill>
+                  <a:srgbClr val="2B2B2B"/>
+                </a:solidFill>
+                <a:latin typeface="Calibri"/>
+              </a:rPr>
+              <a:t>Reutilizo tal cual · Reescribo · Creo de cero</a:t>
+            </a:r>
+            <a:r>
+              <a:rPr sz="1500" b="0" i="0">
+                <a:solidFill>
+                  <a:srgbClr val="2B2B2B"/>
+                </a:solidFill>
+                <a:latin typeface="Calibri"/>
+              </a:rPr>
+              <a:t>, sección por sección de lo que trae de TG2.</a:t>
+            </a:r>
+          </a:p>
+          <a:p>
+            <a:pPr lvl="1">
+              <a:spcAft>
+                <a:spcPts val="600"/>
+              </a:spcAft>
+            </a:pPr>
+            <a:r>
+              <a:rPr sz="1500" b="0" i="0">
+                <a:solidFill>
+                  <a:srgbClr val="2B2B2B"/>
+                </a:solidFill>
+                <a:latin typeface="Calibri"/>
+              </a:rPr>
+              <a:t>●   </a:t>
+            </a:r>
+            <a:r>
+              <a:rPr sz="1500" b="1" i="0">
+                <a:solidFill>
+                  <a:srgbClr val="2B2B2B"/>
+                </a:solidFill>
+                <a:latin typeface="Calibri"/>
+              </a:rPr>
+              <a:t>Cuente sus referencias reales</a:t>
+            </a:r>
+            <a:r>
+              <a:rPr sz="1500" b="0" i="0">
+                <a:solidFill>
+                  <a:srgbClr val="2B2B2B"/>
+                </a:solidFill>
+                <a:latin typeface="Calibri"/>
+              </a:rPr>
+              <a:t>: cuántas están citadas hoy en el cuerpo y cuántas le faltan.</a:t>
+            </a:r>
+          </a:p>
+          <a:p>
+            <a:pPr lvl="1">
+              <a:spcAft>
+                <a:spcPts val="600"/>
+              </a:spcAft>
+            </a:pPr>
+            <a:r>
+              <a:rPr sz="1500" b="0" i="0">
+                <a:solidFill>
+                  <a:srgbClr val="2B2B2B"/>
+                </a:solidFill>
+                <a:latin typeface="Calibri"/>
+              </a:rPr>
+              <a:t>●   </a:t>
+            </a:r>
+            <a:r>
+              <a:rPr sz="1500" b="1" i="0">
+                <a:solidFill>
+                  <a:srgbClr val="2B2B2B"/>
+                </a:solidFill>
+                <a:latin typeface="Calibri"/>
+              </a:rPr>
+              <a:t>Tres compromisos</a:t>
+            </a:r>
+            <a:r>
+              <a:rPr sz="1500" b="0" i="0">
+                <a:solidFill>
+                  <a:srgbClr val="2B2B2B"/>
+                </a:solidFill>
+                <a:latin typeface="Calibri"/>
+              </a:rPr>
+              <a:t> concretos suyos para las próximas dos semanas.</a:t>
             </a:r>
           </a:p>
           <a:p>
@@ -9277,7 +8678,7 @@
                 </a:solidFill>
                 <a:latin typeface="Calibri"/>
               </a:rPr>
-              <a:t>Ustedes:</a:t>
+              <a:t>Súbalo a CDigital antes de la Sesión 02</a:t>
             </a:r>
             <a:r>
               <a:rPr sz="1600" b="0" i="0">
@@ -9286,15 +8687,17 @@
                 </a:solidFill>
                 <a:latin typeface="Calibri"/>
               </a:rPr>
-              <a:t> nos presentamos en el tablero colaborativo.</a:t>
-            </a:r>
-          </a:p>
-          <a:p>
-            <a:pPr>
-              <a:spcAft>
-                <a:spcPts val="1000"/>
-              </a:spcAft>
-            </a:pPr>
+              <a:t> y </a:t>
+            </a:r>
+            <a:r>
+              <a:rPr sz="1600" b="1" i="0">
+                <a:solidFill>
+                  <a:srgbClr val="2B2B2B"/>
+                </a:solidFill>
+                <a:latin typeface="Calibri"/>
+              </a:rPr>
+              <a:t>abra los enunciados</a:t>
+            </a:r>
             <a:r>
               <a:rPr sz="1600" b="0" i="0">
                 <a:solidFill>
@@ -9302,7 +8705,7 @@
                 </a:solidFill>
                 <a:latin typeface="Calibri"/>
               </a:rPr>
-              <a:t>–   </a:t>
+              <a:t> de `Clases/Recursos/ACAs/` (artículo y sustentación): traen la ventana de la </a:t>
             </a:r>
             <a:r>
               <a:rPr sz="1600" b="1" i="0">
@@ -9311,7 +8714,7 @@
                 </a:solidFill>
                 <a:latin typeface="Calibri"/>
               </a:rPr>
-              <a:t>Cómo se evalúa:</a:t>
+              <a:t>ACA Final</a:t>
             </a:r>
             <a:r>
               <a:rPr sz="1600" b="0" i="0">
@@ -9320,48 +8723,14 @@
                 </a:solidFill>
                 <a:latin typeface="Calibri"/>
               </a:rPr>
-              <a:t> qué ítems tiene el aula, cuánto pesa cada uno y qué se hace con él.</a:t>
-            </a:r>
-          </a:p>
-          <a:p>
-            <a:pPr>
-              <a:spcAft>
-                <a:spcPts val="1000"/>
-              </a:spcAft>
-            </a:pPr>
-            <a:r>
-              <a:rPr sz="1600" b="0" i="0">
-                <a:solidFill>
-                  <a:srgbClr val="2B2B2B"/>
-                </a:solidFill>
-                <a:latin typeface="Calibri"/>
-              </a:rPr>
-              <a:t>–   </a:t>
-            </a:r>
-            <a:r>
-              <a:rPr sz="1600" b="1" i="0">
-                <a:solidFill>
-                  <a:srgbClr val="2B2B2B"/>
-                </a:solidFill>
-                <a:latin typeface="Calibri"/>
-              </a:rPr>
-              <a:t>Acuerdos</a:t>
-            </a:r>
-            <a:r>
-              <a:rPr sz="1600" b="0" i="0">
-                <a:solidFill>
-                  <a:srgbClr val="2B2B2B"/>
-                </a:solidFill>
-                <a:latin typeface="Calibri"/>
-              </a:rPr>
-              <a:t> de trabajo y el primer encargo autónomo.</a:t>
-            </a:r>
-          </a:p>
-        </p:txBody>
-      </p:sp>
-      <p:sp>
-        <p:nvSpPr>
-          <p:cNvPr id="6" name="TextBox 5"/>
+              <a:t> de su grupo.</a:t>
+            </a:r>
+          </a:p>
+        </p:txBody>
+      </p:sp>
+      <p:sp>
+        <p:nvSpPr>
+          <p:cNvPr id="5" name="TextBox 4"/>
           <p:cNvSpPr txBox="1"/>
           <p:nvPr/>
         </p:nvSpPr>
@@ -9389,7 +8758,59 @@
                 </a:solidFill>
                 <a:latin typeface="Calibri"/>
               </a:rPr>
-              <a:t>2</a:t>
+              <a:t>19</a:t>
+            </a:r>
+          </a:p>
+        </p:txBody>
+      </p:sp>
+      <p:sp>
+        <p:nvSpPr>
+          <p:cNvPr id="6" name="TextBox 5"/>
+          <p:cNvSpPr txBox="1"/>
+          <p:nvPr/>
+        </p:nvSpPr>
+        <p:spPr>
+          <a:xfrm>
+            <a:off x="640080" y="5943600"/>
+            <a:ext cx="9997135" cy="457200"/>
+          </a:xfrm>
+          <a:prstGeom prst="rect">
+            <a:avLst/>
+          </a:prstGeom>
+          <a:noFill/>
+        </p:spPr>
+        <p:txBody>
+          <a:bodyPr wrap="square" anchor="t" lIns="0" rIns="0" tIns="0" bIns="0">
+            <a:spAutoFit/>
+          </a:bodyPr>
+          <a:lstStyle/>
+          <a:p>
+            <a:r>
+              <a:rPr sz="1200" b="0" i="1">
+                <a:solidFill>
+                  <a:srgbClr val="2B2B2B"/>
+                </a:solidFill>
+                <a:latin typeface="Calibri"/>
+              </a:rPr>
+              <a:t>Cuente las referencias </a:t>
+            </a:r>
+            <a:r>
+              <a:rPr sz="1200" b="1" i="1">
+                <a:solidFill>
+                  <a:srgbClr val="2B2B2B"/>
+                </a:solidFill>
+                <a:latin typeface="Calibri"/>
+              </a:rPr>
+              <a:t>citadas en el cuerpo</a:t>
+            </a:r>
+            <a:r>
+              <a:rPr sz="1200" b="0" i="1">
+                <a:solidFill>
+                  <a:srgbClr val="2B2B2B"/>
+                </a:solidFill>
+                <a:latin typeface="Calibri"/>
+              </a:rPr>
+              <a:t>, no las de la lista final: esa diferencia es el trabajo real que queda por delante.</a:t>
             </a:r>
           </a:p>
         </p:txBody>
@@ -9402,7 +8823,7 @@
 </p:sld>
 </file>
 
-<file path=ppt/slides/slide20.xml><?xml version="1.0" encoding="utf-8"?>
+<file path=ppt/slides/slide2.xml><?xml version="1.0" encoding="utf-8"?>
 <p:sld xmlns:a="http://schemas.openxmlformats.org/drawingml/2006/main" xmlns:p="http://schemas.openxmlformats.org/presentationml/2006/main" xmlns:r="http://schemas.openxmlformats.org/officeDocument/2006/relationships">
   <p:cSld>
     <p:bg>
@@ -9494,7 +8915,7 @@
                 </a:solidFill>
                 <a:latin typeface="Calibri"/>
               </a:rPr>
-              <a:t>Lo que debe tener listo para la Sesión 02</a:t>
+              <a:t>AGENDA DE HOY</a:t>
             </a:r>
           </a:p>
         </p:txBody>
@@ -9507,8 +8928,8 @@
         </p:nvSpPr>
         <p:spPr>
           <a:xfrm>
-            <a:off x="640080" y="1691639"/>
-            <a:ext cx="10911535" cy="4617720"/>
+            <a:off x="640080" y="1280160"/>
+            <a:ext cx="10911535" cy="411480"/>
           </a:xfrm>
           <a:prstGeom prst="rect">
             <a:avLst/>
@@ -9521,6 +8942,41 @@
           </a:bodyPr>
           <a:lstStyle/>
           <a:p>
+            <a:pPr algn="ctr"/>
+            <a:r>
+              <a:rPr sz="1500" b="0" i="0">
+                <a:solidFill>
+                  <a:srgbClr val="2B2B2B"/>
+                </a:solidFill>
+                <a:latin typeface="Calibri"/>
+              </a:rPr>
+              <a:t>Sesión de encuadre — hoy no vemos tema; el contenido arranca en la Sesión 02.</a:t>
+            </a:r>
+          </a:p>
+        </p:txBody>
+      </p:sp>
+      <p:sp>
+        <p:nvSpPr>
+          <p:cNvPr id="5" name="TextBox 4"/>
+          <p:cNvSpPr txBox="1"/>
+          <p:nvPr/>
+        </p:nvSpPr>
+        <p:spPr>
+          <a:xfrm>
+            <a:off x="640080" y="2011679"/>
+            <a:ext cx="10911535" cy="4297680"/>
+          </a:xfrm>
+          <a:prstGeom prst="rect">
+            <a:avLst/>
+          </a:prstGeom>
+          <a:noFill/>
+        </p:spPr>
+        <p:txBody>
+          <a:bodyPr wrap="square" anchor="t" lIns="0" rIns="0" tIns="0" bIns="0">
+            <a:spAutoFit/>
+          </a:bodyPr>
+          <a:lstStyle/>
+          <a:p>
             <a:pPr>
               <a:spcAft>
                 <a:spcPts val="1000"/>
@@ -9542,7 +8998,7 @@
                 </a:solidFill>
                 <a:latin typeface="Calibri"/>
               </a:rPr>
-              <a:t>Lectura autónoma (obligatoria):</a:t>
+              <a:t>El curso:</a:t>
             </a:r>
             <a:r>
               <a:rPr sz="1600" b="0" i="0">
@@ -9551,129 +9007,7 @@
                 </a:solidFill>
                 <a:latin typeface="Calibri"/>
               </a:rPr>
-              <a:t> unidades </a:t>
-            </a:r>
-            <a:r>
-              <a:rPr sz="1600" b="1" i="0">
-                <a:solidFill>
-                  <a:srgbClr val="2B2B2B"/>
-                </a:solidFill>
-                <a:latin typeface="Calibri"/>
-              </a:rPr>
-              <a:t>U1 y U2</a:t>
-            </a:r>
-            <a:r>
-              <a:rPr sz="1600" b="0" i="0">
-                <a:solidFill>
-                  <a:srgbClr val="2B2B2B"/>
-                </a:solidFill>
-                <a:latin typeface="Calibri"/>
-              </a:rPr>
-              <a:t> del Syllabus — </a:t>
-            </a:r>
-            <a:r>
-              <a:rPr sz="1600" b="1" i="0">
-                <a:solidFill>
-                  <a:srgbClr val="2B2B2B"/>
-                </a:solidFill>
-                <a:latin typeface="Calibri"/>
-              </a:rPr>
-              <a:t>casos de éxito</a:t>
-            </a:r>
-            <a:r>
-              <a:rPr sz="1600" b="0" i="0">
-                <a:solidFill>
-                  <a:srgbClr val="2B2B2B"/>
-                </a:solidFill>
-                <a:latin typeface="Calibri"/>
-              </a:rPr>
-              <a:t> y </a:t>
-            </a:r>
-            <a:r>
-              <a:rPr sz="1600" b="1" i="0">
-                <a:solidFill>
-                  <a:srgbClr val="2B2B2B"/>
-                </a:solidFill>
-                <a:latin typeface="Calibri"/>
-              </a:rPr>
-              <a:t>retomar el proyecto</a:t>
-            </a:r>
-            <a:r>
-              <a:rPr sz="1600" b="0" i="0">
-                <a:solidFill>
-                  <a:srgbClr val="2B2B2B"/>
-                </a:solidFill>
-                <a:latin typeface="Calibri"/>
-              </a:rPr>
-              <a:t> (contexto y planteamiento).</a:t>
-            </a:r>
-          </a:p>
-          <a:p>
-            <a:pPr lvl="1">
-              <a:spcAft>
-                <a:spcPts val="600"/>
-              </a:spcAft>
-            </a:pPr>
-            <a:r>
-              <a:rPr sz="1500" b="0" i="0">
-                <a:solidFill>
-                  <a:srgbClr val="2B2B2B"/>
-                </a:solidFill>
-                <a:latin typeface="Calibri"/>
-              </a:rPr>
-              <a:t>●   Hoy no se dictaron: se leen en casa y se </a:t>
-            </a:r>
-            <a:r>
-              <a:rPr sz="1500" b="1" i="0">
-                <a:solidFill>
-                  <a:srgbClr val="2B2B2B"/>
-                </a:solidFill>
-                <a:latin typeface="Calibri"/>
-              </a:rPr>
-              <a:t>retoman al abrir la Sesión 02</a:t>
-            </a:r>
-            <a:r>
-              <a:rPr sz="1500" b="0" i="0">
-                <a:solidFill>
-                  <a:srgbClr val="2B2B2B"/>
-                </a:solidFill>
-                <a:latin typeface="Calibri"/>
-              </a:rPr>
-              <a:t>.</a:t>
-            </a:r>
-          </a:p>
-          <a:p>
-            <a:pPr lvl="1">
-              <a:spcAft>
-                <a:spcPts val="600"/>
-              </a:spcAft>
-            </a:pPr>
-            <a:r>
-              <a:rPr sz="1500" b="0" i="0">
-                <a:solidFill>
-                  <a:srgbClr val="2B2B2B"/>
-                </a:solidFill>
-                <a:latin typeface="Calibri"/>
-              </a:rPr>
-              <a:t>●   </a:t>
-            </a:r>
-            <a:r>
-              <a:rPr sz="1500" b="1" i="0">
-                <a:solidFill>
-                  <a:srgbClr val="2B2B2B"/>
-                </a:solidFill>
-                <a:latin typeface="Calibri"/>
-              </a:rPr>
-              <a:t>Dónde está:</a:t>
-            </a:r>
-            <a:r>
-              <a:rPr sz="1500" b="0" i="0">
-                <a:solidFill>
-                  <a:srgbClr val="2B2B2B"/>
-                </a:solidFill>
-                <a:latin typeface="Calibri"/>
-              </a:rPr>
-              <a:t> ya viene en tu carpeta del curso, en `Sesion 01 - …/` (el PDF y el archivo `Lectura autonoma - Sesion 01.txt` con la cita y el enlace). También queda publicada en CDigital.</a:t>
+              <a:t> de qué se trata, cómo trabajamos y qué se llevan al final.</a:t>
             </a:r>
           </a:p>
           <a:p>
@@ -9698,7 +9032,7 @@
                 </a:solidFill>
                 <a:latin typeface="Calibri"/>
               </a:rPr>
-              <a:t>Arme su matriz de herencia</a:t>
+              <a:t>El Docente:</a:t>
             </a:r>
             <a:r>
               <a:rPr sz="1600" b="0" i="0">
@@ -9707,109 +9041,7 @@
                 </a:solidFill>
                 <a:latin typeface="Calibri"/>
               </a:rPr>
-              <a:t> en un Google Doc llamado `S01_AcuerdoRetoma_Apellido`, con tres columnas:</a:t>
-            </a:r>
-          </a:p>
-          <a:p>
-            <a:pPr lvl="1">
-              <a:spcAft>
-                <a:spcPts val="600"/>
-              </a:spcAft>
-            </a:pPr>
-            <a:r>
-              <a:rPr sz="1500" b="0" i="0">
-                <a:solidFill>
-                  <a:srgbClr val="2B2B2B"/>
-                </a:solidFill>
-                <a:latin typeface="Calibri"/>
-              </a:rPr>
-              <a:t>●   </a:t>
-            </a:r>
-            <a:r>
-              <a:rPr sz="1500" b="1" i="0">
-                <a:solidFill>
-                  <a:srgbClr val="2B2B2B"/>
-                </a:solidFill>
-                <a:latin typeface="Calibri"/>
-              </a:rPr>
-              <a:t>Reutilizo tal cual · Reescribo · Creo de cero</a:t>
-            </a:r>
-            <a:r>
-              <a:rPr sz="1500" b="0" i="0">
-                <a:solidFill>
-                  <a:srgbClr val="2B2B2B"/>
-                </a:solidFill>
-                <a:latin typeface="Calibri"/>
-              </a:rPr>
-              <a:t>, sección por sección de lo que trae de TG2.</a:t>
-            </a:r>
-          </a:p>
-          <a:p>
-            <a:pPr lvl="1">
-              <a:spcAft>
-                <a:spcPts val="600"/>
-              </a:spcAft>
-            </a:pPr>
-            <a:r>
-              <a:rPr sz="1500" b="0" i="0">
-                <a:solidFill>
-                  <a:srgbClr val="2B2B2B"/>
-                </a:solidFill>
-                <a:latin typeface="Calibri"/>
-              </a:rPr>
-              <a:t>●   </a:t>
-            </a:r>
-            <a:r>
-              <a:rPr sz="1500" b="1" i="0">
-                <a:solidFill>
-                  <a:srgbClr val="2B2B2B"/>
-                </a:solidFill>
-                <a:latin typeface="Calibri"/>
-              </a:rPr>
-              <a:t>Cuente sus referencias reales</a:t>
-            </a:r>
-            <a:r>
-              <a:rPr sz="1500" b="0" i="0">
-                <a:solidFill>
-                  <a:srgbClr val="2B2B2B"/>
-                </a:solidFill>
-                <a:latin typeface="Calibri"/>
-              </a:rPr>
-              <a:t>: cuántas están citadas hoy en el cuerpo y cuántas le faltan.</a:t>
-            </a:r>
-          </a:p>
-          <a:p>
-            <a:pPr lvl="1">
-              <a:spcAft>
-                <a:spcPts val="600"/>
-              </a:spcAft>
-            </a:pPr>
-            <a:r>
-              <a:rPr sz="1500" b="0" i="0">
-                <a:solidFill>
-                  <a:srgbClr val="2B2B2B"/>
-                </a:solidFill>
-                <a:latin typeface="Calibri"/>
-              </a:rPr>
-              <a:t>●   </a:t>
-            </a:r>
-            <a:r>
-              <a:rPr sz="1500" b="1" i="0">
-                <a:solidFill>
-                  <a:srgbClr val="2B2B2B"/>
-                </a:solidFill>
-                <a:latin typeface="Calibri"/>
-              </a:rPr>
-              <a:t>Tres compromisos</a:t>
-            </a:r>
-            <a:r>
-              <a:rPr sz="1500" b="0" i="0">
-                <a:solidFill>
-                  <a:srgbClr val="2B2B2B"/>
-                </a:solidFill>
-                <a:latin typeface="Calibri"/>
-              </a:rPr>
-              <a:t> concretos suyos para las próximas dos semanas.</a:t>
+              <a:t> quién los acompaña y cómo contactarlo.</a:t>
             </a:r>
           </a:p>
           <a:p>
@@ -9834,7 +9066,7 @@
                 </a:solidFill>
                 <a:latin typeface="Calibri"/>
               </a:rPr>
-              <a:t>Súbalo a CDigital antes de la Sesión 02</a:t>
+              <a:t>Ustedes:</a:t>
             </a:r>
             <a:r>
               <a:rPr sz="1600" b="0" i="0">
@@ -9843,7 +9075,23 @@
                 </a:solidFill>
                 <a:latin typeface="Calibri"/>
               </a:rPr>
-              <a:t> y </a:t>
+              <a:t> arrancamos con un juego de 8 minutos —«dos verdades y una mentira»— y hay premio.</a:t>
+            </a:r>
+          </a:p>
+          <a:p>
+            <a:pPr>
+              <a:spcAft>
+                <a:spcPts val="1000"/>
+              </a:spcAft>
+            </a:pPr>
+            <a:r>
+              <a:rPr sz="1600" b="0" i="0">
+                <a:solidFill>
+                  <a:srgbClr val="2B2B2B"/>
+                </a:solidFill>
+                <a:latin typeface="Calibri"/>
+              </a:rPr>
+              <a:t>–   </a:t>
             </a:r>
             <a:r>
               <a:rPr sz="1600" b="1" i="0">
@@ -9852,7 +9100,7 @@
                 </a:solidFill>
                 <a:latin typeface="Calibri"/>
               </a:rPr>
-              <a:t>abra los enunciados</a:t>
+              <a:t>Cómo se evalúa:</a:t>
             </a:r>
             <a:r>
               <a:rPr sz="1600" b="0" i="0">
@@ -9861,7 +9109,23 @@
                 </a:solidFill>
                 <a:latin typeface="Calibri"/>
               </a:rPr>
-              <a:t> de `Clases/Recursos/ACAs/` (artículo y sustentación): traen la ventana de la </a:t>
+              <a:t> qué ítems tiene el aula, cuánto pesa cada uno y qué se hace con él.</a:t>
+            </a:r>
+          </a:p>
+          <a:p>
+            <a:pPr>
+              <a:spcAft>
+                <a:spcPts val="1000"/>
+              </a:spcAft>
+            </a:pPr>
+            <a:r>
+              <a:rPr sz="1600" b="0" i="0">
+                <a:solidFill>
+                  <a:srgbClr val="2B2B2B"/>
+                </a:solidFill>
+                <a:latin typeface="Calibri"/>
+              </a:rPr>
+              <a:t>–   </a:t>
             </a:r>
             <a:r>
               <a:rPr sz="1600" b="1" i="0">
@@ -9870,7 +9134,7 @@
                 </a:solidFill>
                 <a:latin typeface="Calibri"/>
               </a:rPr>
-              <a:t>ACA Final</a:t>
+              <a:t>Acuerdos</a:t>
             </a:r>
             <a:r>
               <a:rPr sz="1600" b="0" i="0">
@@ -9879,14 +9143,14 @@
                 </a:solidFill>
                 <a:latin typeface="Calibri"/>
               </a:rPr>
-              <a:t> de su grupo.</a:t>
-            </a:r>
-          </a:p>
-        </p:txBody>
-      </p:sp>
-      <p:sp>
-        <p:nvSpPr>
-          <p:cNvPr id="5" name="TextBox 4"/>
+              <a:t> de trabajo y el primer encargo autónomo.</a:t>
+            </a:r>
+          </a:p>
+        </p:txBody>
+      </p:sp>
+      <p:sp>
+        <p:nvSpPr>
+          <p:cNvPr id="6" name="TextBox 5"/>
           <p:cNvSpPr txBox="1"/>
           <p:nvPr/>
         </p:nvSpPr>
@@ -9914,59 +9178,7 @@
                 </a:solidFill>
                 <a:latin typeface="Calibri"/>
               </a:rPr>
-              <a:t>20</a:t>
-            </a:r>
-          </a:p>
-        </p:txBody>
-      </p:sp>
-      <p:sp>
-        <p:nvSpPr>
-          <p:cNvPr id="6" name="TextBox 5"/>
-          <p:cNvSpPr txBox="1"/>
-          <p:nvPr/>
-        </p:nvSpPr>
-        <p:spPr>
-          <a:xfrm>
-            <a:off x="640080" y="5943600"/>
-            <a:ext cx="9997135" cy="457200"/>
-          </a:xfrm>
-          <a:prstGeom prst="rect">
-            <a:avLst/>
-          </a:prstGeom>
-          <a:noFill/>
-        </p:spPr>
-        <p:txBody>
-          <a:bodyPr wrap="square" anchor="t" lIns="0" rIns="0" tIns="0" bIns="0">
-            <a:spAutoFit/>
-          </a:bodyPr>
-          <a:lstStyle/>
-          <a:p>
-            <a:r>
-              <a:rPr sz="1200" b="0" i="1">
-                <a:solidFill>
-                  <a:srgbClr val="2B2B2B"/>
-                </a:solidFill>
-                <a:latin typeface="Calibri"/>
-              </a:rPr>
-              <a:t>Cuente las referencias </a:t>
-            </a:r>
-            <a:r>
-              <a:rPr sz="1200" b="1" i="1">
-                <a:solidFill>
-                  <a:srgbClr val="2B2B2B"/>
-                </a:solidFill>
-                <a:latin typeface="Calibri"/>
-              </a:rPr>
-              <a:t>citadas en el cuerpo</a:t>
-            </a:r>
-            <a:r>
-              <a:rPr sz="1200" b="0" i="1">
-                <a:solidFill>
-                  <a:srgbClr val="2B2B2B"/>
-                </a:solidFill>
-                <a:latin typeface="Calibri"/>
-              </a:rPr>
-              <a:t>, no las de la lista final: esa diferencia es el trabajo real que queda por delante.</a:t>
+              <a:t>2</a:t>
             </a:r>
           </a:p>
         </p:txBody>
@@ -9979,7 +9191,7 @@
 </p:sld>
 </file>
 
-<file path=ppt/slides/slide21.xml><?xml version="1.0" encoding="utf-8"?>
+<file path=ppt/slides/slide20.xml><?xml version="1.0" encoding="utf-8"?>
 <p:sld xmlns:a="http://schemas.openxmlformats.org/drawingml/2006/main" xmlns:p="http://schemas.openxmlformats.org/presentationml/2006/main" xmlns:r="http://schemas.openxmlformats.org/officeDocument/2006/relationships">
   <p:cSld>
     <p:bg>
@@ -10433,7 +9645,7 @@
                 </a:solidFill>
                 <a:latin typeface="Calibri"/>
               </a:rPr>
-              <a:t>21</a:t>
+              <a:t>20</a:t>
             </a:r>
           </a:p>
         </p:txBody>
@@ -10446,7 +9658,7 @@
 </p:sld>
 </file>
 
-<file path=ppt/slides/slide22.xml><?xml version="1.0" encoding="utf-8"?>
+<file path=ppt/slides/slide21.xml><?xml version="1.0" encoding="utf-8"?>
 <p:sld xmlns:a="http://schemas.openxmlformats.org/drawingml/2006/main" xmlns:p="http://schemas.openxmlformats.org/presentationml/2006/main" xmlns:r="http://schemas.openxmlformats.org/officeDocument/2006/relationships">
   <p:cSld>
     <p:bg>
@@ -10680,7 +9892,7 @@
                 </a:solidFill>
                 <a:latin typeface="Calibri"/>
               </a:rPr>
-              <a:t>22</a:t>
+              <a:t>21</a:t>
             </a:r>
           </a:p>
         </p:txBody>
@@ -10693,7 +9905,7 @@
 </p:sld>
 </file>
 
-<file path=ppt/slides/slide23.xml><?xml version="1.0" encoding="utf-8"?>
+<file path=ppt/slides/slide22.xml><?xml version="1.0" encoding="utf-8"?>
 <p:sld xmlns:a="http://schemas.openxmlformats.org/drawingml/2006/main" xmlns:p="http://schemas.openxmlformats.org/presentationml/2006/main" xmlns:r="http://schemas.openxmlformats.org/officeDocument/2006/relationships">
   <p:cSld>
     <p:bg>
@@ -11322,7 +10534,7 @@
                 </a:solidFill>
                 <a:latin typeface="Calibri"/>
               </a:rPr>
-              <a:t>PRESÉNTATE — ROMPEHIELOS</a:t>
+              <a:t>ROMPEHIELOS — DOS VERDADES Y UNA MENTIRA</a:t>
             </a:r>
           </a:p>
         </p:txBody>
@@ -11357,7 +10569,7 @@
                 </a:solidFill>
                 <a:latin typeface="Calibri"/>
               </a:rPr>
-              <a:t>Formulario de Google · encuestas y Q&amp;A en el propio Meet</a:t>
+              <a:t>Dos verdades y una mentira · Slido · 8 minutos</a:t>
             </a:r>
           </a:p>
         </p:txBody>
@@ -11405,7 +10617,7 @@
                 </a:solidFill>
                 <a:latin typeface="Calibri"/>
               </a:rPr>
-              <a:t>Escanea el QR o abre:</a:t>
+              <a:t>Entra a slido.com</a:t>
             </a:r>
             <a:r>
               <a:rPr sz="1300" b="0" i="0">
@@ -11414,7 +10626,25 @@
                 </a:solidFill>
                 <a:latin typeface="Calibri"/>
               </a:rPr>
-              <a:t> [URL Formulario Preséntate — pendiente · TRABAJO DE GRADO 3]</a:t>
+              <a:t> y escribe el </a:t>
+            </a:r>
+            <a:r>
+              <a:rPr sz="1300" b="1" i="0">
+                <a:solidFill>
+                  <a:srgbClr val="2B2B2B"/>
+                </a:solidFill>
+                <a:latin typeface="Calibri"/>
+              </a:rPr>
+              <a:t>código del evento</a:t>
+            </a:r>
+            <a:r>
+              <a:rPr sz="1300" b="0" i="0">
+                <a:solidFill>
+                  <a:srgbClr val="2B2B2B"/>
+                </a:solidFill>
+                <a:latin typeface="Calibri"/>
+              </a:rPr>
+              <a:t> que el Docente pega en el chat del Meet. Sin cuenta ni instalar nada.</a:t>
             </a:r>
           </a:p>
           <a:p>
@@ -11439,7 +10669,7 @@
                 </a:solidFill>
                 <a:latin typeface="Calibri"/>
               </a:rPr>
-              <a:t>Qué respondes (1 min):</a:t>
+              <a:t>El juego:</a:t>
             </a:r>
             <a:r>
               <a:rPr sz="1300" b="0" i="0">
@@ -11448,7 +10678,7 @@
                 </a:solidFill>
                 <a:latin typeface="Calibri"/>
               </a:rPr>
-              <a:t> tu </a:t>
+              <a:t> «</a:t>
             </a:r>
             <a:r>
               <a:rPr sz="1300" b="1" i="0">
@@ -11457,7 +10687,7 @@
                 </a:solidFill>
                 <a:latin typeface="Calibri"/>
               </a:rPr>
-              <a:t>nombre</a:t>
+              <a:t>dos verdades y una mentira</a:t>
             </a:r>
             <a:r>
               <a:rPr sz="1300" b="0" i="0">
@@ -11466,7 +10696,7 @@
                 </a:solidFill>
                 <a:latin typeface="Calibri"/>
               </a:rPr>
-              <a:t> + </a:t>
+              <a:t>» sobre el Docente. Se proyectan tres frases suyas y votas </a:t>
             </a:r>
             <a:r>
               <a:rPr sz="1300" b="1" i="0">
@@ -11475,7 +10705,7 @@
                 </a:solidFill>
                 <a:latin typeface="Calibri"/>
               </a:rPr>
-              <a:t>tema del artículo</a:t>
+              <a:t>cuál de las tres NO es cierta</a:t>
             </a:r>
             <a:r>
               <a:rPr sz="1300" b="0" i="0">
@@ -11484,7 +10714,7 @@
                 </a:solidFill>
                 <a:latin typeface="Calibri"/>
               </a:rPr>
-              <a:t> (1 frase) + expectativa del semestre. Entras con tu correo </a:t>
+              <a:t> — acertar es </a:t>
             </a:r>
             <a:r>
               <a:rPr sz="1300" b="1" i="0">
@@ -11493,7 +10723,7 @@
                 </a:solidFill>
                 <a:latin typeface="Calibri"/>
               </a:rPr>
-              <a:t>@cun.edu.co</a:t>
+              <a:t>1 entre 3</a:t>
             </a:r>
             <a:r>
               <a:rPr sz="1300" b="0" i="0">
@@ -11502,7 +10732,7 @@
                 </a:solidFill>
                 <a:latin typeface="Calibri"/>
               </a:rPr>
-              <a:t>: no hay que crear cuenta ni instalar nada.</a:t>
+              <a:t>, así que arrancamos todos iguales.</a:t>
             </a:r>
           </a:p>
           <a:p>
@@ -11527,7 +10757,7 @@
                 </a:solidFill>
                 <a:latin typeface="Calibri"/>
               </a:rPr>
-              <a:t>Ahora, ~3 min.</a:t>
+              <a:t>Tres rondas (~4 min).</a:t>
             </a:r>
             <a:r>
               <a:rPr sz="1300" b="0" i="0">
@@ -11536,7 +10766,7 @@
                 </a:solidFill>
                 <a:latin typeface="Calibri"/>
               </a:rPr>
-              <a:t> Somos 112: no alcanzamos a presentarnos uno por uno, así que el formulario nos ordena.</a:t>
+              <a:t> Al cerrar cada una el Docente revela la mentira y cuenta la historia de la verdad más rara: ahí queda hecha su presentación.</a:t>
             </a:r>
           </a:p>
           <a:p>
@@ -11561,7 +10791,7 @@
                 </a:solidFill>
                 <a:latin typeface="Calibri"/>
               </a:rPr>
-              <a:t>Con eso, hoy:</a:t>
+              <a:t>Ronda final (~2 min):</a:t>
             </a:r>
             <a:r>
               <a:rPr sz="1300" b="0" i="0">
@@ -11570,7 +10800,7 @@
                 </a:solidFill>
                 <a:latin typeface="Calibri"/>
               </a:rPr>
-              <a:t> el Docente lee en voz alta </a:t>
+              <a:t> sale la tabla de posiciones y los </a:t>
             </a:r>
             <a:r>
               <a:rPr sz="1300" b="1" i="0">
@@ -11579,7 +10809,7 @@
                 </a:solidFill>
                 <a:latin typeface="Calibri"/>
               </a:rPr>
-              <a:t>5 o 6 respuestas</a:t>
+              <a:t>tres primeros</a:t>
             </a:r>
             <a:r>
               <a:rPr sz="1300" b="0" i="0">
@@ -11588,7 +10818,7 @@
                 </a:solidFill>
                 <a:latin typeface="Calibri"/>
               </a:rPr>
-              <a:t> y proyecta el </a:t>
+              <a:t> toman el micrófono con </a:t>
             </a:r>
             <a:r>
               <a:rPr sz="1300" b="1" i="0">
@@ -11597,7 +10827,7 @@
                 </a:solidFill>
                 <a:latin typeface="Calibri"/>
               </a:rPr>
-              <a:t>resumen</a:t>
+              <a:t>sus</a:t>
             </a:r>
             <a:r>
               <a:rPr sz="1300" b="0" i="0">
@@ -11606,7 +10836,7 @@
                 </a:solidFill>
                 <a:latin typeface="Calibri"/>
               </a:rPr>
-              <a:t> del formulario — ahí quedan todas a la vista, no solo las leídas.</a:t>
+              <a:t> dos verdades y una mentira. Gana quien engañe a más gente. Hablan tres, no 112.</a:t>
             </a:r>
           </a:p>
           <a:p>
@@ -11631,7 +10861,7 @@
                 </a:solidFill>
                 <a:latin typeface="Calibri"/>
               </a:rPr>
-              <a:t>En vivo:</a:t>
+              <a:t>Premio:</a:t>
             </a:r>
             <a:r>
               <a:rPr sz="1300" b="0" i="0">
@@ -11640,7 +10870,7 @@
                 </a:solidFill>
                 <a:latin typeface="Calibri"/>
               </a:rPr>
-              <a:t> las preguntas y las votaciones van por la </a:t>
+              <a:t> </a:t>
             </a:r>
             <a:r>
               <a:rPr sz="1300" b="1" i="0">
@@ -11649,7 +10879,7 @@
                 </a:solidFill>
                 <a:latin typeface="Calibri"/>
               </a:rPr>
-              <a:t>encuesta</a:t>
+              <a:t>revisión 1 a 1 con el Docente</a:t>
             </a:r>
             <a:r>
               <a:rPr sz="1300" b="0" i="0">
@@ -11658,25 +10888,7 @@
                 </a:solidFill>
                 <a:latin typeface="Calibri"/>
               </a:rPr>
-              <a:t> y el </a:t>
-            </a:r>
-            <a:r>
-              <a:rPr sz="1300" b="1" i="0">
-                <a:solidFill>
-                  <a:srgbClr val="2B2B2B"/>
-                </a:solidFill>
-                <a:latin typeface="Calibri"/>
-              </a:rPr>
-              <a:t>Q&amp;A</a:t>
-            </a:r>
-            <a:r>
-              <a:rPr sz="1300" b="0" i="0">
-                <a:solidFill>
-                  <a:srgbClr val="2B2B2B"/>
-                </a:solidFill>
-                <a:latin typeface="Calibri"/>
-              </a:rPr>
-              <a:t> del propio Meet; no hay que abrir ninguna otra plataforma.</a:t>
+              <a:t> del avance del ganador, antes de la primera entrega.</a:t>
             </a:r>
           </a:p>
           <a:p>
@@ -11701,7 +10913,7 @@
                 </a:solidFill>
                 <a:latin typeface="Calibri"/>
               </a:rPr>
-              <a:t>Después:</a:t>
+              <a:t>Las preguntas</a:t>
             </a:r>
             <a:r>
               <a:rPr sz="1300" b="0" i="0">
@@ -11710,7 +10922,25 @@
                 </a:solidFill>
                 <a:latin typeface="Calibri"/>
               </a:rPr>
-              <a:t> las respuestas quedan en una hoja que el Docente usa todo el periodo (equipos, ejemplos y seguimiento).</a:t>
+              <a:t> de toda la sesión van por el </a:t>
+            </a:r>
+            <a:r>
+              <a:rPr sz="1300" b="1" i="0">
+                <a:solidFill>
+                  <a:srgbClr val="2B2B2B"/>
+                </a:solidFill>
+                <a:latin typeface="Calibri"/>
+              </a:rPr>
+              <a:t>Q&amp;A</a:t>
+            </a:r>
+            <a:r>
+              <a:rPr sz="1300" b="0" i="0">
+                <a:solidFill>
+                  <a:srgbClr val="2B2B2B"/>
+                </a:solidFill>
+                <a:latin typeface="Calibri"/>
+              </a:rPr>
+              <a:t> del mismo Slido.</a:t>
             </a:r>
           </a:p>
         </p:txBody>
@@ -11767,8 +10997,8 @@
         </p:nvSpPr>
         <p:spPr>
           <a:xfrm>
-            <a:off x="8579815" y="2926079"/>
-            <a:ext cx="2834640" cy="1463040"/>
+            <a:off x="8534095" y="2606039"/>
+            <a:ext cx="2926079" cy="2103120"/>
           </a:xfrm>
           <a:prstGeom prst="rect">
             <a:avLst/>
@@ -11783,29 +11013,65 @@
           <a:p>
             <a:pPr algn="ctr"/>
             <a:r>
-              <a:rPr sz="1800" b="1" i="0">
-                <a:solidFill>
-                  <a:srgbClr val="0C2340"/>
-                </a:solidFill>
-                <a:latin typeface="Calibri"/>
-              </a:rPr>
-              <a:t>QR pendiente</a:t>
+              <a:rPr sz="3000" b="1" i="0">
+                <a:solidFill>
+                  <a:srgbClr val="007433"/>
+                </a:solidFill>
+                <a:latin typeface="Calibri"/>
+              </a:rPr>
+              <a:t>slido.com</a:t>
             </a:r>
           </a:p>
           <a:p>
             <a:pPr algn="ctr">
               <a:spcBef>
-                <a:spcPts val="1000"/>
+                <a:spcPts val="1400"/>
               </a:spcBef>
             </a:pPr>
             <a:r>
-              <a:rPr sz="1200" b="0" i="0">
-                <a:solidFill>
-                  <a:srgbClr val="2B2B2B"/>
-                </a:solidFill>
-                <a:latin typeface="Calibri"/>
-              </a:rPr>
-              <a:t>Se genera cuando el formulario tenga enlace real.</a:t>
+              <a:rPr sz="1300" b="0" i="0">
+                <a:solidFill>
+                  <a:srgbClr val="0C2340"/>
+                </a:solidFill>
+                <a:latin typeface="Calibri"/>
+              </a:rPr>
+              <a:t>El </a:t>
+            </a:r>
+            <a:r>
+              <a:rPr sz="1300" b="1" i="0">
+                <a:solidFill>
+                  <a:srgbClr val="0C2340"/>
+                </a:solidFill>
+                <a:latin typeface="Calibri"/>
+              </a:rPr>
+              <a:t>código del evento</a:t>
+            </a:r>
+            <a:r>
+              <a:rPr sz="1300" b="0" i="0">
+                <a:solidFill>
+                  <a:srgbClr val="0C2340"/>
+                </a:solidFill>
+                <a:latin typeface="Calibri"/>
+              </a:rPr>
+              <a:t> te lo pega el Docente en el </a:t>
+            </a:r>
+            <a:r>
+              <a:rPr sz="1300" b="1" i="0">
+                <a:solidFill>
+                  <a:srgbClr val="0C2340"/>
+                </a:solidFill>
+                <a:latin typeface="Calibri"/>
+              </a:rPr>
+              <a:t>chat del Meet</a:t>
+            </a:r>
+            <a:r>
+              <a:rPr sz="1300" b="0" i="0">
+                <a:solidFill>
+                  <a:srgbClr val="0C2340"/>
+                </a:solidFill>
+                <a:latin typeface="Calibri"/>
+              </a:rPr>
+              <a:t>.</a:t>
             </a:r>
           </a:p>
         </p:txBody>
@@ -11840,7 +11106,7 @@
                 </a:solidFill>
                 <a:latin typeface="Calibri"/>
               </a:rPr>
-              <a:t>[URL Formulario Preséntate — pendiente · TRABAJO DE GRADO 3]</a:t>
+              <a:t>[URL Slido — evento del rompehielos pendiente · TRABAJO DE GRADO 3]</a:t>
             </a:r>
           </a:p>
         </p:txBody>
@@ -13273,7 +12539,7 @@
                 </a:solidFill>
                 <a:latin typeface="Calibri"/>
               </a:rPr>
-              <a:t>Preséntate: el formulario del curso (somos 112)</a:t>
+              <a:t>Cómo trabajamos: una hora semanal para cerrar el trabajo de grado</a:t>
             </a:r>
           </a:p>
         </p:txBody>
@@ -13306,7 +12572,7 @@
               </a:spcAft>
             </a:pPr>
             <a:r>
-              <a:rPr sz="1500" b="0" i="0">
+              <a:rPr sz="1600" b="0" i="0">
                 <a:solidFill>
                   <a:srgbClr val="2B2B2B"/>
                 </a:solidFill>
@@ -13315,22 +12581,40 @@
               <a:t>–   </a:t>
             </a:r>
             <a:r>
-              <a:rPr sz="1500" b="1" i="0">
-                <a:solidFill>
-                  <a:srgbClr val="2B2B2B"/>
-                </a:solidFill>
-                <a:latin typeface="Calibri"/>
-              </a:rPr>
-              <a:t>Los tres grupos (54450, 54466 y 54467) ven la clase juntos: 112 matriculados.</a:t>
-            </a:r>
-            <a:r>
-              <a:rPr sz="1500" b="0" i="0">
-                <a:solidFill>
-                  <a:srgbClr val="2B2B2B"/>
-                </a:solidFill>
-                <a:latin typeface="Calibri"/>
-              </a:rPr>
-              <a:t> Presentarse uno por uno se llevaría la hora entera.</a:t>
+              <a:rPr sz="1600" b="1" i="0">
+                <a:solidFill>
+                  <a:srgbClr val="2B2B2B"/>
+                </a:solidFill>
+                <a:latin typeface="Calibri"/>
+              </a:rPr>
+              <a:t>Una hora sincrónica por semana</a:t>
+            </a:r>
+            <a:r>
+              <a:rPr sz="1600" b="0" i="0">
+                <a:solidFill>
+                  <a:srgbClr val="2B2B2B"/>
+                </a:solidFill>
+                <a:latin typeface="Calibri"/>
+              </a:rPr>
+              <a:t> y quince encuentros. TG3 </a:t>
+            </a:r>
+            <a:r>
+              <a:rPr sz="1600" b="1" i="0">
+                <a:solidFill>
+                  <a:srgbClr val="2B2B2B"/>
+                </a:solidFill>
+                <a:latin typeface="Calibri"/>
+              </a:rPr>
+              <a:t>no empieza nada</a:t>
+            </a:r>
+            <a:r>
+              <a:rPr sz="1600" b="0" i="0">
+                <a:solidFill>
+                  <a:srgbClr val="2B2B2B"/>
+                </a:solidFill>
+                <a:latin typeface="Calibri"/>
+              </a:rPr>
+              <a:t>: termina lo que usted viene construyendo desde el semestre anterior.</a:t>
             </a:r>
           </a:p>
           <a:p>
@@ -13340,13 +12624,31 @@
               </a:spcAft>
             </a:pPr>
             <a:r>
-              <a:rPr sz="1500" b="0" i="0">
-                <a:solidFill>
-                  <a:srgbClr val="2B2B2B"/>
-                </a:solidFill>
-                <a:latin typeface="Calibri"/>
-              </a:rPr>
-              <a:t>–   Un muro de notas tampoco sirve a esta escala: con 112 notas nadie alcanza a leer las de los demás.</a:t>
+              <a:rPr sz="1600" b="0" i="0">
+                <a:solidFill>
+                  <a:srgbClr val="2B2B2B"/>
+                </a:solidFill>
+                <a:latin typeface="Calibri"/>
+              </a:rPr>
+              <a:t>–   </a:t>
+            </a:r>
+            <a:r>
+              <a:rPr sz="1600" b="1" i="0">
+                <a:solidFill>
+                  <a:srgbClr val="2B2B2B"/>
+                </a:solidFill>
+                <a:latin typeface="Calibri"/>
+              </a:rPr>
+              <a:t>Antes de cada encuentro:</a:t>
+            </a:r>
+            <a:r>
+              <a:rPr sz="1600" b="0" i="0">
+                <a:solidFill>
+                  <a:srgbClr val="2B2B2B"/>
+                </a:solidFill>
+                <a:latin typeface="Calibri"/>
+              </a:rPr>
+              <a:t> revisa en CDigital lo que el Docente publica y avanza la sección de la semana.</a:t>
             </a:r>
           </a:p>
           <a:p>
@@ -13356,31 +12658,108 @@
               </a:spcAft>
             </a:pPr>
             <a:r>
-              <a:rPr sz="1500" b="0" i="0">
-                <a:solidFill>
-                  <a:srgbClr val="2B2B2B"/>
-                </a:solidFill>
-                <a:latin typeface="Calibri"/>
-              </a:rPr>
-              <a:t>–   El rompehielos es un </a:t>
-            </a:r>
-            <a:r>
-              <a:rPr sz="1500" b="1" i="0">
-                <a:solidFill>
-                  <a:srgbClr val="2B2B2B"/>
-                </a:solidFill>
-                <a:latin typeface="Calibri"/>
-              </a:rPr>
-              <a:t>formulario de Google</a:t>
-            </a:r>
-            <a:r>
-              <a:rPr sz="1500" b="0" i="0">
-                <a:solidFill>
-                  <a:srgbClr val="2B2B2B"/>
-                </a:solidFill>
-                <a:latin typeface="Calibri"/>
-              </a:rPr>
-              <a:t>: el Docente lo pega en el chat del Meet y queda en el LEEME de `Clases/`.</a:t>
+              <a:rPr sz="1600" b="0" i="0">
+                <a:solidFill>
+                  <a:srgbClr val="2B2B2B"/>
+                </a:solidFill>
+                <a:latin typeface="Calibri"/>
+              </a:rPr>
+              <a:t>–   </a:t>
+            </a:r>
+            <a:r>
+              <a:rPr sz="1600" b="1" i="0">
+                <a:solidFill>
+                  <a:srgbClr val="2B2B2B"/>
+                </a:solidFill>
+                <a:latin typeface="Calibri"/>
+              </a:rPr>
+              <a:t>Durante el encuentro:</a:t>
+            </a:r>
+            <a:r>
+              <a:rPr sz="1600" b="0" i="0">
+                <a:solidFill>
+                  <a:srgbClr val="2B2B2B"/>
+                </a:solidFill>
+                <a:latin typeface="Calibri"/>
+              </a:rPr>
+              <a:t> criterio y ejemplo en pocos minutos, y luego </a:t>
+            </a:r>
+            <a:r>
+              <a:rPr sz="1600" b="1" i="0">
+                <a:solidFill>
+                  <a:srgbClr val="2B2B2B"/>
+                </a:solidFill>
+                <a:latin typeface="Calibri"/>
+              </a:rPr>
+              <a:t>revisión sobre su documento real</a:t>
+            </a:r>
+            <a:r>
+              <a:rPr sz="1600" b="0" i="0">
+                <a:solidFill>
+                  <a:srgbClr val="2B2B2B"/>
+                </a:solidFill>
+                <a:latin typeface="Calibri"/>
+              </a:rPr>
+              <a:t>. Aquí se corrige texto, no se toma dictado.</a:t>
+            </a:r>
+          </a:p>
+          <a:p>
+            <a:pPr>
+              <a:spcAft>
+                <a:spcPts val="1000"/>
+              </a:spcAft>
+            </a:pPr>
+            <a:r>
+              <a:rPr sz="1600" b="0" i="0">
+                <a:solidFill>
+                  <a:srgbClr val="2B2B2B"/>
+                </a:solidFill>
+                <a:latin typeface="Calibri"/>
+              </a:rPr>
+              <a:t>–   </a:t>
+            </a:r>
+            <a:r>
+              <a:rPr sz="1600" b="1" i="0">
+                <a:solidFill>
+                  <a:srgbClr val="2B2B2B"/>
+                </a:solidFill>
+                <a:latin typeface="Calibri"/>
+              </a:rPr>
+              <a:t>Después:</a:t>
+            </a:r>
+            <a:r>
+              <a:rPr sz="1600" b="0" i="0">
+                <a:solidFill>
+                  <a:srgbClr val="2B2B2B"/>
+                </a:solidFill>
+                <a:latin typeface="Calibri"/>
+              </a:rPr>
+              <a:t> cierra la sección y la sube a CDigital antes de la siguiente clase.</a:t>
+            </a:r>
+          </a:p>
+          <a:p>
+            <a:pPr>
+              <a:spcAft>
+                <a:spcPts val="1000"/>
+              </a:spcAft>
+            </a:pPr>
+            <a:r>
+              <a:rPr sz="1600" b="0" i="0">
+                <a:solidFill>
+                  <a:srgbClr val="2B2B2B"/>
+                </a:solidFill>
+                <a:latin typeface="Calibri"/>
+              </a:rPr>
+              <a:t>–   </a:t>
+            </a:r>
+            <a:r>
+              <a:rPr sz="1600" b="1" i="0">
+                <a:solidFill>
+                  <a:srgbClr val="2B2B2B"/>
+                </a:solidFill>
+                <a:latin typeface="Calibri"/>
+              </a:rPr>
+              <a:t>Qué traer siempre:</a:t>
             </a:r>
           </a:p>
           <a:p>
@@ -13390,31 +12769,31 @@
               </a:spcAft>
             </a:pPr>
             <a:r>
-              <a:rPr sz="1400" b="0" i="0">
-                <a:solidFill>
-                  <a:srgbClr val="2B2B2B"/>
-                </a:solidFill>
-                <a:latin typeface="Calibri"/>
-              </a:rPr>
-              <a:t>●   </a:t>
-            </a:r>
-            <a:r>
-              <a:rPr sz="1400" b="1" i="0">
-                <a:solidFill>
-                  <a:srgbClr val="2B2B2B"/>
-                </a:solidFill>
-                <a:latin typeface="Calibri"/>
-              </a:rPr>
-              <a:t>Enlace:</a:t>
-            </a:r>
-            <a:r>
-              <a:rPr sz="1400" b="0" i="0">
-                <a:solidFill>
-                  <a:srgbClr val="2B2B2B"/>
-                </a:solidFill>
-                <a:latin typeface="Calibri"/>
-              </a:rPr>
-              <a:t> [URL Formulario «Preséntate» — pendiente]</a:t>
+              <a:rPr sz="1500" b="0" i="0">
+                <a:solidFill>
+                  <a:srgbClr val="2B2B2B"/>
+                </a:solidFill>
+                <a:latin typeface="Calibri"/>
+              </a:rPr>
+              <a:t>●   Su </a:t>
+            </a:r>
+            <a:r>
+              <a:rPr sz="1500" b="1" i="0">
+                <a:solidFill>
+                  <a:srgbClr val="2B2B2B"/>
+                </a:solidFill>
+                <a:latin typeface="Calibri"/>
+              </a:rPr>
+              <a:t>artículo abierto</a:t>
+            </a:r>
+            <a:r>
+              <a:rPr sz="1500" b="0" i="0">
+                <a:solidFill>
+                  <a:srgbClr val="2B2B2B"/>
+                </a:solidFill>
+                <a:latin typeface="Calibri"/>
+              </a:rPr>
+              <a:t>, en la versión vigente (una sola, no cinco copias).</a:t>
             </a:r>
           </a:p>
           <a:p>
@@ -13424,37 +12803,37 @@
               </a:spcAft>
             </a:pPr>
             <a:r>
-              <a:rPr sz="1400" b="0" i="0">
-                <a:solidFill>
-                  <a:srgbClr val="2B2B2B"/>
-                </a:solidFill>
-                <a:latin typeface="Calibri"/>
-              </a:rPr>
-              <a:t>●   Se entra con su correo </a:t>
-            </a:r>
-            <a:r>
-              <a:rPr sz="1400" b="1" i="0">
-                <a:solidFill>
-                  <a:srgbClr val="2B2B2B"/>
-                </a:solidFill>
-                <a:latin typeface="Calibri"/>
-              </a:rPr>
-              <a:t>@cun.edu.co</a:t>
-            </a:r>
-            <a:r>
-              <a:rPr sz="1400" b="0" i="0">
-                <a:solidFill>
-                  <a:srgbClr val="2B2B2B"/>
-                </a:solidFill>
-                <a:latin typeface="Calibri"/>
-              </a:rPr>
-              <a:t>: sin cuenta nueva, sin instalar nada y sin costo.</a:t>
-            </a:r>
-          </a:p>
-          <a:p>
-            <a:pPr>
+              <a:rPr sz="1500" b="0" i="0">
+                <a:solidFill>
+                  <a:srgbClr val="2B2B2B"/>
+                </a:solidFill>
+                <a:latin typeface="Calibri"/>
+              </a:rPr>
+              <a:t>●   Su </a:t>
+            </a:r>
+            <a:r>
+              <a:rPr sz="1500" b="1" i="0">
+                <a:solidFill>
+                  <a:srgbClr val="2B2B2B"/>
+                </a:solidFill>
+                <a:latin typeface="Calibri"/>
+              </a:rPr>
+              <a:t>lista de referencias</a:t>
+            </a:r>
+            <a:r>
+              <a:rPr sz="1500" b="0" i="0">
+                <a:solidFill>
+                  <a:srgbClr val="2B2B2B"/>
+                </a:solidFill>
+                <a:latin typeface="Calibri"/>
+              </a:rPr>
+              <a:t> tal como va hoy, con el conteo real.</a:t>
+            </a:r>
+          </a:p>
+          <a:p>
+            <a:pPr lvl="1">
               <a:spcAft>
-                <a:spcPts val="1000"/>
+                <a:spcPts val="600"/>
               </a:spcAft>
             </a:pPr>
             <a:r>
@@ -13464,145 +12843,7 @@
                 </a:solidFill>
                 <a:latin typeface="Calibri"/>
               </a:rPr>
-              <a:t>–   </a:t>
-            </a:r>
-            <a:r>
-              <a:rPr sz="1500" b="1" i="0">
-                <a:solidFill>
-                  <a:srgbClr val="2B2B2B"/>
-                </a:solidFill>
-                <a:latin typeface="Calibri"/>
-              </a:rPr>
-              <a:t>Qué responde</a:t>
-            </a:r>
-            <a:r>
-              <a:rPr sz="1500" b="0" i="0">
-                <a:solidFill>
-                  <a:srgbClr val="2B2B2B"/>
-                </a:solidFill>
-                <a:latin typeface="Calibri"/>
-              </a:rPr>
-              <a:t> (2–3 minutos, una sola vez): nombre, </a:t>
-            </a:r>
-            <a:r>
-              <a:rPr sz="1500" b="1" i="0">
-                <a:solidFill>
-                  <a:srgbClr val="2B2B2B"/>
-                </a:solidFill>
-                <a:latin typeface="Calibri"/>
-              </a:rPr>
-              <a:t>su grupo</a:t>
-            </a:r>
-            <a:r>
-              <a:rPr sz="1500" b="0" i="0">
-                <a:solidFill>
-                  <a:srgbClr val="2B2B2B"/>
-                </a:solidFill>
-                <a:latin typeface="Calibri"/>
-              </a:rPr>
-              <a:t>, </a:t>
-            </a:r>
-            <a:r>
-              <a:rPr sz="1500" b="1" i="0">
-                <a:solidFill>
-                  <a:srgbClr val="2B2B2B"/>
-                </a:solidFill>
-                <a:latin typeface="Calibri"/>
-              </a:rPr>
-              <a:t>tema del artículo</a:t>
-            </a:r>
-            <a:r>
-              <a:rPr sz="1500" b="0" i="0">
-                <a:solidFill>
-                  <a:srgbClr val="2B2B2B"/>
-                </a:solidFill>
-                <a:latin typeface="Calibri"/>
-              </a:rPr>
-              <a:t> en una frase y qué espera del semestre.</a:t>
-            </a:r>
-          </a:p>
-          <a:p>
-            <a:pPr>
-              <a:spcAft>
-                <a:spcPts val="1000"/>
-              </a:spcAft>
-            </a:pPr>
-            <a:r>
-              <a:rPr sz="1500" b="0" i="0">
-                <a:solidFill>
-                  <a:srgbClr val="2B2B2B"/>
-                </a:solidFill>
-                <a:latin typeface="Calibri"/>
-              </a:rPr>
-              <a:t>–   </a:t>
-            </a:r>
-            <a:r>
-              <a:rPr sz="1500" b="1" i="0">
-                <a:solidFill>
-                  <a:srgbClr val="2B2B2B"/>
-                </a:solidFill>
-                <a:latin typeface="Calibri"/>
-              </a:rPr>
-              <a:t>Cuándo:</a:t>
-            </a:r>
-            <a:r>
-              <a:rPr sz="1500" b="0" i="0">
-                <a:solidFill>
-                  <a:srgbClr val="2B2B2B"/>
-                </a:solidFill>
-                <a:latin typeface="Calibri"/>
-              </a:rPr>
-              <a:t> en los primeros minutos del encuentro. El Docente proyecta el resumen agrupado y lee en voz alta cinco o seis respuestas; el resto queda a la vista.</a:t>
-            </a:r>
-          </a:p>
-          <a:p>
-            <a:pPr>
-              <a:spcAft>
-                <a:spcPts val="1000"/>
-              </a:spcAft>
-            </a:pPr>
-            <a:r>
-              <a:rPr sz="1500" b="0" i="0">
-                <a:solidFill>
-                  <a:srgbClr val="2B2B2B"/>
-                </a:solidFill>
-                <a:latin typeface="Calibri"/>
-              </a:rPr>
-              <a:t>–   </a:t>
-            </a:r>
-            <a:r>
-              <a:rPr sz="1500" b="1" i="0">
-                <a:solidFill>
-                  <a:srgbClr val="2B2B2B"/>
-                </a:solidFill>
-                <a:latin typeface="Calibri"/>
-              </a:rPr>
-              <a:t>En vivo, la participación va por el Meet:</a:t>
-            </a:r>
-            <a:r>
-              <a:rPr sz="1500" b="0" i="0">
-                <a:solidFill>
-                  <a:srgbClr val="2B2B2B"/>
-                </a:solidFill>
-                <a:latin typeface="Calibri"/>
-              </a:rPr>
-              <a:t> las encuestas y el Q&amp;A de la sala aguantan a los 112 sin cola de micrófono.</a:t>
-            </a:r>
-          </a:p>
-          <a:p>
-            <a:pPr>
-              <a:spcAft>
-                <a:spcPts val="1000"/>
-              </a:spcAft>
-            </a:pPr>
-            <a:r>
-              <a:rPr sz="1500" b="0" i="0">
-                <a:solidFill>
-                  <a:srgbClr val="2B2B2B"/>
-                </a:solidFill>
-                <a:latin typeface="Calibri"/>
-              </a:rPr>
-              <a:t>–   Queda abierto hasta la Sesión 02 para quien llegó tarde.</a:t>
+              <a:t>●   Una duda concreta: “esta discusión no dialoga con los autores”, no “ayúdeme con el artículo”.</a:t>
             </a:r>
           </a:p>
         </p:txBody>
@@ -13671,7 +12912,7 @@
                 </a:solidFill>
                 <a:latin typeface="Calibri"/>
               </a:rPr>
-              <a:t>El grupo importa: la ACA Final y la sustentación cierran en fechas distintas según el grupo, y el Docente usa esa hoja para no confundirlos.</a:t>
+              <a:t>El calendario aprieta al final: quien avanza una sección por semana llega a sustentar con dominio; quien deja todo para el cierre, sustenta lo que alcanzó a leer.</a:t>
             </a:r>
           </a:p>
         </p:txBody>
@@ -13776,7 +13017,7 @@
                 </a:solidFill>
                 <a:latin typeface="Calibri"/>
               </a:rPr>
-              <a:t>Cómo trabajamos: una hora semanal para cerrar el trabajo de grado</a:t>
+              <a:t>Qué se llevan al final: artículo, sustentación y repositorio</a:t>
             </a:r>
           </a:p>
         </p:txBody>
@@ -13815,7 +13056,7 @@
                 </a:solidFill>
                 <a:latin typeface="Calibri"/>
               </a:rPr>
-              <a:t>–   </a:t>
+              <a:t>–   El producto de TG3 son </a:t>
             </a:r>
             <a:r>
               <a:rPr sz="1600" b="1" i="0">
@@ -13824,7 +13065,7 @@
                 </a:solidFill>
                 <a:latin typeface="Calibri"/>
               </a:rPr>
-              <a:t>Una hora sincrónica por semana</a:t>
+              <a:t>tres cosas encadenadas</a:t>
             </a:r>
             <a:r>
               <a:rPr sz="1600" b="0" i="0">
@@ -13833,25 +13074,145 @@
                 </a:solidFill>
                 <a:latin typeface="Calibri"/>
               </a:rPr>
-              <a:t> y quince encuentros. TG3 </a:t>
-            </a:r>
-            <a:r>
-              <a:rPr sz="1600" b="1" i="0">
-                <a:solidFill>
-                  <a:srgbClr val="2B2B2B"/>
-                </a:solidFill>
-                <a:latin typeface="Calibri"/>
-              </a:rPr>
-              <a:t>no empieza nada</a:t>
-            </a:r>
-            <a:r>
-              <a:rPr sz="1600" b="0" i="0">
-                <a:solidFill>
-                  <a:srgbClr val="2B2B2B"/>
-                </a:solidFill>
-                <a:latin typeface="Calibri"/>
-              </a:rPr>
-              <a:t>: termina lo que usted viene construyendo desde el semestre anterior.</a:t>
+              <a:t>, y las tres se anuncian hoy para que nadie se entere en la recta final:</a:t>
+            </a:r>
+          </a:p>
+          <a:p>
+            <a:pPr lvl="1">
+              <a:spcAft>
+                <a:spcPts val="600"/>
+              </a:spcAft>
+            </a:pPr>
+            <a:r>
+              <a:rPr sz="1500" b="0" i="0">
+                <a:solidFill>
+                  <a:srgbClr val="2B2B2B"/>
+                </a:solidFill>
+                <a:latin typeface="Calibri"/>
+              </a:rPr>
+              <a:t>●   </a:t>
+            </a:r>
+            <a:r>
+              <a:rPr sz="1500" b="1" i="0">
+                <a:solidFill>
+                  <a:srgbClr val="2B2B2B"/>
+                </a:solidFill>
+                <a:latin typeface="Calibri"/>
+              </a:rPr>
+              <a:t>1. Un artículo resultado de investigación</a:t>
+            </a:r>
+            <a:r>
+              <a:rPr sz="1500" b="0" i="0">
+                <a:solidFill>
+                  <a:srgbClr val="2B2B2B"/>
+                </a:solidFill>
+                <a:latin typeface="Calibri"/>
+              </a:rPr>
+              <a:t>, con revisión bibliográfica amplia (el Syllabus habla de </a:t>
+            </a:r>
+            <a:r>
+              <a:rPr sz="1500" b="1" i="0">
+                <a:solidFill>
+                  <a:srgbClr val="2B2B2B"/>
+                </a:solidFill>
+                <a:latin typeface="Calibri"/>
+              </a:rPr>
+              <a:t>al menos 50 referencias</a:t>
+            </a:r>
+            <a:r>
+              <a:rPr sz="1500" b="0" i="0">
+                <a:solidFill>
+                  <a:srgbClr val="2B2B2B"/>
+                </a:solidFill>
+                <a:latin typeface="Calibri"/>
+              </a:rPr>
+              <a:t>) y una </a:t>
+            </a:r>
+            <a:r>
+              <a:rPr sz="1500" b="1" i="0">
+                <a:solidFill>
+                  <a:srgbClr val="2B2B2B"/>
+                </a:solidFill>
+                <a:latin typeface="Calibri"/>
+              </a:rPr>
+              <a:t>extensión no inferior a 4.000 palabras</a:t>
+            </a:r>
+            <a:r>
+              <a:rPr sz="1500" b="0" i="0">
+                <a:solidFill>
+                  <a:srgbClr val="2B2B2B"/>
+                </a:solidFill>
+                <a:latin typeface="Calibri"/>
+              </a:rPr>
+              <a:t>.</a:t>
+            </a:r>
+          </a:p>
+          <a:p>
+            <a:pPr lvl="1">
+              <a:spcAft>
+                <a:spcPts val="600"/>
+              </a:spcAft>
+            </a:pPr>
+            <a:r>
+              <a:rPr sz="1500" b="0" i="0">
+                <a:solidFill>
+                  <a:srgbClr val="2B2B2B"/>
+                </a:solidFill>
+                <a:latin typeface="Calibri"/>
+              </a:rPr>
+              <a:t>●   </a:t>
+            </a:r>
+            <a:r>
+              <a:rPr sz="1500" b="1" i="0">
+                <a:solidFill>
+                  <a:srgbClr val="2B2B2B"/>
+                </a:solidFill>
+                <a:latin typeface="Calibri"/>
+              </a:rPr>
+              <a:t>2. Una sustentación ante jurados</a:t>
+            </a:r>
+            <a:r>
+              <a:rPr sz="1500" b="0" i="0">
+                <a:solidFill>
+                  <a:srgbClr val="2B2B2B"/>
+                </a:solidFill>
+                <a:latin typeface="Calibri"/>
+              </a:rPr>
+              <a:t>: defensa oral de su trabajo, no una lectura de diapositivas.</a:t>
+            </a:r>
+          </a:p>
+          <a:p>
+            <a:pPr lvl="1">
+              <a:spcAft>
+                <a:spcPts val="600"/>
+              </a:spcAft>
+            </a:pPr>
+            <a:r>
+              <a:rPr sz="1500" b="0" i="0">
+                <a:solidFill>
+                  <a:srgbClr val="2B2B2B"/>
+                </a:solidFill>
+                <a:latin typeface="Calibri"/>
+              </a:rPr>
+              <a:t>●   </a:t>
+            </a:r>
+            <a:r>
+              <a:rPr sz="1500" b="1" i="0">
+                <a:solidFill>
+                  <a:srgbClr val="2B2B2B"/>
+                </a:solidFill>
+                <a:latin typeface="Calibri"/>
+              </a:rPr>
+              <a:t>3. La carga al repositorio institucional</a:t>
+            </a:r>
+            <a:r>
+              <a:rPr sz="1500" b="0" i="0">
+                <a:solidFill>
+                  <a:srgbClr val="2B2B2B"/>
+                </a:solidFill>
+                <a:latin typeface="Calibri"/>
+              </a:rPr>
+              <a:t>, con los entregables que exija el instructivo del programa.</a:t>
             </a:r>
           </a:p>
           <a:p>
@@ -13867,7 +13228,7 @@
                 </a:solidFill>
                 <a:latin typeface="Calibri"/>
               </a:rPr>
-              <a:t>–   </a:t>
+              <a:t>–   Si su opción de grado incluye un </a:t>
             </a:r>
             <a:r>
               <a:rPr sz="1600" b="1" i="0">
@@ -13876,7 +13237,7 @@
                 </a:solidFill>
                 <a:latin typeface="Calibri"/>
               </a:rPr>
-              <a:t>Antes de cada encuentro:</a:t>
+              <a:t>producto de ingeniería</a:t>
             </a:r>
             <a:r>
               <a:rPr sz="1600" b="0" i="0">
@@ -13885,7 +13246,25 @@
                 </a:solidFill>
                 <a:latin typeface="Calibri"/>
               </a:rPr>
-              <a:t> revisa en CDigital lo que el Docente publica y avanza la sección de la semana.</a:t>
+              <a:t> (prototipo, sistema, modelo, dataset), el producto no reemplaza al artículo: se </a:t>
+            </a:r>
+            <a:r>
+              <a:rPr sz="1600" b="1" i="0">
+                <a:solidFill>
+                  <a:srgbClr val="2B2B2B"/>
+                </a:solidFill>
+                <a:latin typeface="Calibri"/>
+              </a:rPr>
+              <a:t>documenta e investiga</a:t>
+            </a:r>
+            <a:r>
+              <a:rPr sz="1600" b="0" i="0">
+                <a:solidFill>
+                  <a:srgbClr val="2B2B2B"/>
+                </a:solidFill>
+                <a:latin typeface="Calibri"/>
+              </a:rPr>
+              <a:t> dentro de él.</a:t>
             </a:r>
           </a:p>
           <a:p>
@@ -13901,43 +13280,7 @@
                 </a:solidFill>
                 <a:latin typeface="Calibri"/>
               </a:rPr>
-              <a:t>–   </a:t>
-            </a:r>
-            <a:r>
-              <a:rPr sz="1600" b="1" i="0">
-                <a:solidFill>
-                  <a:srgbClr val="2B2B2B"/>
-                </a:solidFill>
-                <a:latin typeface="Calibri"/>
-              </a:rPr>
-              <a:t>Durante el encuentro:</a:t>
-            </a:r>
-            <a:r>
-              <a:rPr sz="1600" b="0" i="0">
-                <a:solidFill>
-                  <a:srgbClr val="2B2B2B"/>
-                </a:solidFill>
-                <a:latin typeface="Calibri"/>
-              </a:rPr>
-              <a:t> criterio y ejemplo en pocos minutos, y luego </a:t>
-            </a:r>
-            <a:r>
-              <a:rPr sz="1600" b="1" i="0">
-                <a:solidFill>
-                  <a:srgbClr val="2B2B2B"/>
-                </a:solidFill>
-                <a:latin typeface="Calibri"/>
-              </a:rPr>
-              <a:t>revisión sobre su documento real</a:t>
-            </a:r>
-            <a:r>
-              <a:rPr sz="1600" b="0" i="0">
-                <a:solidFill>
-                  <a:srgbClr val="2B2B2B"/>
-                </a:solidFill>
-                <a:latin typeface="Calibri"/>
-              </a:rPr>
-              <a:t>. Aquí se corrige texto, no se toma dictado.</a:t>
+              <a:t>–   Para qué le sirve después: es lo que queda publicado con su nombre. Un artículo bien hecho se muestra en una entrevista, se cita y abre la puerta a posgrado.</a:t>
             </a:r>
           </a:p>
           <a:p>
@@ -13953,7 +13296,7 @@
                 </a:solidFill>
                 <a:latin typeface="Calibri"/>
               </a:rPr>
-              <a:t>–   </a:t>
+              <a:t>–   Regla del curso: </a:t>
             </a:r>
             <a:r>
               <a:rPr sz="1600" b="1" i="0">
@@ -13962,7 +13305,7 @@
                 </a:solidFill>
                 <a:latin typeface="Calibri"/>
               </a:rPr>
-              <a:t>Después:</a:t>
+              <a:t>cada sesión alimenta ese mismo artículo</a:t>
             </a:r>
             <a:r>
               <a:rPr sz="1600" b="0" i="0">
@@ -13971,116 +13314,7 @@
                 </a:solidFill>
                 <a:latin typeface="Calibri"/>
               </a:rPr>
-              <a:t> cierra la sección y la sube a CDigital antes de la siguiente clase.</a:t>
-            </a:r>
-          </a:p>
-          <a:p>
-            <a:pPr>
-              <a:spcAft>
-                <a:spcPts val="1000"/>
-              </a:spcAft>
-            </a:pPr>
-            <a:r>
-              <a:rPr sz="1600" b="0" i="0">
-                <a:solidFill>
-                  <a:srgbClr val="2B2B2B"/>
-                </a:solidFill>
-                <a:latin typeface="Calibri"/>
-              </a:rPr>
-              <a:t>–   </a:t>
-            </a:r>
-            <a:r>
-              <a:rPr sz="1600" b="1" i="0">
-                <a:solidFill>
-                  <a:srgbClr val="2B2B2B"/>
-                </a:solidFill>
-                <a:latin typeface="Calibri"/>
-              </a:rPr>
-              <a:t>Qué traer siempre:</a:t>
-            </a:r>
-          </a:p>
-          <a:p>
-            <a:pPr lvl="1">
-              <a:spcAft>
-                <a:spcPts val="600"/>
-              </a:spcAft>
-            </a:pPr>
-            <a:r>
-              <a:rPr sz="1500" b="0" i="0">
-                <a:solidFill>
-                  <a:srgbClr val="2B2B2B"/>
-                </a:solidFill>
-                <a:latin typeface="Calibri"/>
-              </a:rPr>
-              <a:t>●   Su </a:t>
-            </a:r>
-            <a:r>
-              <a:rPr sz="1500" b="1" i="0">
-                <a:solidFill>
-                  <a:srgbClr val="2B2B2B"/>
-                </a:solidFill>
-                <a:latin typeface="Calibri"/>
-              </a:rPr>
-              <a:t>artículo abierto</a:t>
-            </a:r>
-            <a:r>
-              <a:rPr sz="1500" b="0" i="0">
-                <a:solidFill>
-                  <a:srgbClr val="2B2B2B"/>
-                </a:solidFill>
-                <a:latin typeface="Calibri"/>
-              </a:rPr>
-              <a:t>, en la versión vigente (una sola, no cinco copias).</a:t>
-            </a:r>
-          </a:p>
-          <a:p>
-            <a:pPr lvl="1">
-              <a:spcAft>
-                <a:spcPts val="600"/>
-              </a:spcAft>
-            </a:pPr>
-            <a:r>
-              <a:rPr sz="1500" b="0" i="0">
-                <a:solidFill>
-                  <a:srgbClr val="2B2B2B"/>
-                </a:solidFill>
-                <a:latin typeface="Calibri"/>
-              </a:rPr>
-              <a:t>●   Su </a:t>
-            </a:r>
-            <a:r>
-              <a:rPr sz="1500" b="1" i="0">
-                <a:solidFill>
-                  <a:srgbClr val="2B2B2B"/>
-                </a:solidFill>
-                <a:latin typeface="Calibri"/>
-              </a:rPr>
-              <a:t>lista de referencias</a:t>
-            </a:r>
-            <a:r>
-              <a:rPr sz="1500" b="0" i="0">
-                <a:solidFill>
-                  <a:srgbClr val="2B2B2B"/>
-                </a:solidFill>
-                <a:latin typeface="Calibri"/>
-              </a:rPr>
-              <a:t> tal como va hoy, con el conteo real.</a:t>
-            </a:r>
-          </a:p>
-          <a:p>
-            <a:pPr lvl="1">
-              <a:spcAft>
-                <a:spcPts val="600"/>
-              </a:spcAft>
-            </a:pPr>
-            <a:r>
-              <a:rPr sz="1500" b="0" i="0">
-                <a:solidFill>
-                  <a:srgbClr val="2B2B2B"/>
-                </a:solidFill>
-                <a:latin typeface="Calibri"/>
-              </a:rPr>
-              <a:t>●   Una duda concreta: “esta discusión no dialoga con los autores”, no “ayúdeme con el artículo”.</a:t>
+              <a:t>. No hay talleres isla.</a:t>
             </a:r>
           </a:p>
         </p:txBody>
@@ -14149,7 +13383,7 @@
                 </a:solidFill>
                 <a:latin typeface="Calibri"/>
               </a:rPr>
-              <a:t>El calendario aprieta al final: quien avanza una sección por semana llega a sustentar con dominio; quien deja todo para el cierre, sustenta lo que alcanzó a leer.</a:t>
+              <a:t>Extensión y número de referencias son mínimos del Syllabus 94532, no metas opcionales. Se alcanzan sumando cada semana, nunca la última.</a:t>
             </a:r>
           </a:p>
         </p:txBody>
@@ -14163,477 +13397,6 @@
 </file>
 
 <file path=ppt/slides/slide8.xml><?xml version="1.0" encoding="utf-8"?>
-<p:sld xmlns:a="http://schemas.openxmlformats.org/drawingml/2006/main" xmlns:p="http://schemas.openxmlformats.org/presentationml/2006/main" xmlns:r="http://schemas.openxmlformats.org/officeDocument/2006/relationships">
-  <p:cSld>
-    <p:bg>
-      <p:bgPr>
-        <a:solidFill>
-          <a:srgbClr val="FFFFFF"/>
-        </a:solidFill>
-        <a:effectLst/>
-      </p:bgPr>
-    </p:bg>
-    <p:spTree>
-      <p:nvGrpSpPr>
-        <p:cNvPr id="1" name=""/>
-        <p:cNvGrpSpPr/>
-        <p:nvPr/>
-      </p:nvGrpSpPr>
-      <p:grpSpPr/>
-      <p:sp>
-        <p:nvSpPr>
-          <p:cNvPr id="2" name="Rectangle 1"/>
-          <p:cNvSpPr/>
-          <p:nvPr/>
-        </p:nvSpPr>
-        <p:spPr>
-          <a:xfrm>
-            <a:off x="0" y="0"/>
-            <a:ext cx="12191695" cy="1188720"/>
-          </a:xfrm>
-          <a:prstGeom prst="rect">
-            <a:avLst/>
-          </a:prstGeom>
-          <a:solidFill>
-            <a:srgbClr val="0C2340"/>
-          </a:solidFill>
-          <a:ln>
-            <a:noFill/>
-          </a:ln>
-          <a:effectLst/>
-        </p:spPr>
-        <p:style>
-          <a:lnRef idx="1">
-            <a:schemeClr val="accent1"/>
-          </a:lnRef>
-          <a:fillRef idx="3">
-            <a:schemeClr val="accent1"/>
-          </a:fillRef>
-          <a:effectRef idx="2">
-            <a:schemeClr val="accent1"/>
-          </a:effectRef>
-          <a:fontRef idx="minor">
-            <a:schemeClr val="lt1"/>
-          </a:fontRef>
-        </p:style>
-        <p:txBody>
-          <a:bodyPr rtlCol="0" anchor="ctr"/>
-          <a:lstStyle/>
-          <a:p>
-            <a:pPr algn="ctr"/>
-          </a:p>
-        </p:txBody>
-      </p:sp>
-      <p:sp>
-        <p:nvSpPr>
-          <p:cNvPr id="3" name="TextBox 2"/>
-          <p:cNvSpPr txBox="1"/>
-          <p:nvPr/>
-        </p:nvSpPr>
-        <p:spPr>
-          <a:xfrm>
-            <a:off x="640080" y="0"/>
-            <a:ext cx="9082735" cy="1188720"/>
-          </a:xfrm>
-          <a:prstGeom prst="rect">
-            <a:avLst/>
-          </a:prstGeom>
-          <a:noFill/>
-        </p:spPr>
-        <p:txBody>
-          <a:bodyPr wrap="square" anchor="ctr" lIns="0" rIns="0" tIns="0" bIns="0">
-            <a:spAutoFit/>
-          </a:bodyPr>
-          <a:lstStyle/>
-          <a:p>
-            <a:pPr algn="ctr"/>
-            <a:r>
-              <a:rPr sz="2600" b="1" i="0">
-                <a:solidFill>
-                  <a:srgbClr val="FFFFFF"/>
-                </a:solidFill>
-                <a:latin typeface="Calibri"/>
-              </a:rPr>
-              <a:t>Qué se llevan al final: artículo, sustentación y repositorio</a:t>
-            </a:r>
-          </a:p>
-        </p:txBody>
-      </p:sp>
-      <p:sp>
-        <p:nvSpPr>
-          <p:cNvPr id="4" name="TextBox 3"/>
-          <p:cNvSpPr txBox="1"/>
-          <p:nvPr/>
-        </p:nvSpPr>
-        <p:spPr>
-          <a:xfrm>
-            <a:off x="640080" y="1691639"/>
-            <a:ext cx="10911535" cy="4617720"/>
-          </a:xfrm>
-          <a:prstGeom prst="rect">
-            <a:avLst/>
-          </a:prstGeom>
-          <a:noFill/>
-        </p:spPr>
-        <p:txBody>
-          <a:bodyPr wrap="square" anchor="t" lIns="0" rIns="0" tIns="0" bIns="0">
-            <a:spAutoFit/>
-          </a:bodyPr>
-          <a:lstStyle/>
-          <a:p>
-            <a:pPr>
-              <a:spcAft>
-                <a:spcPts val="1000"/>
-              </a:spcAft>
-            </a:pPr>
-            <a:r>
-              <a:rPr sz="1600" b="0" i="0">
-                <a:solidFill>
-                  <a:srgbClr val="2B2B2B"/>
-                </a:solidFill>
-                <a:latin typeface="Calibri"/>
-              </a:rPr>
-              <a:t>–   El producto de TG3 son </a:t>
-            </a:r>
-            <a:r>
-              <a:rPr sz="1600" b="1" i="0">
-                <a:solidFill>
-                  <a:srgbClr val="2B2B2B"/>
-                </a:solidFill>
-                <a:latin typeface="Calibri"/>
-              </a:rPr>
-              <a:t>tres cosas encadenadas</a:t>
-            </a:r>
-            <a:r>
-              <a:rPr sz="1600" b="0" i="0">
-                <a:solidFill>
-                  <a:srgbClr val="2B2B2B"/>
-                </a:solidFill>
-                <a:latin typeface="Calibri"/>
-              </a:rPr>
-              <a:t>, y las tres se anuncian hoy para que nadie se entere en la recta final:</a:t>
-            </a:r>
-          </a:p>
-          <a:p>
-            <a:pPr lvl="1">
-              <a:spcAft>
-                <a:spcPts val="600"/>
-              </a:spcAft>
-            </a:pPr>
-            <a:r>
-              <a:rPr sz="1500" b="0" i="0">
-                <a:solidFill>
-                  <a:srgbClr val="2B2B2B"/>
-                </a:solidFill>
-                <a:latin typeface="Calibri"/>
-              </a:rPr>
-              <a:t>●   </a:t>
-            </a:r>
-            <a:r>
-              <a:rPr sz="1500" b="1" i="0">
-                <a:solidFill>
-                  <a:srgbClr val="2B2B2B"/>
-                </a:solidFill>
-                <a:latin typeface="Calibri"/>
-              </a:rPr>
-              <a:t>1. Un artículo resultado de investigación</a:t>
-            </a:r>
-            <a:r>
-              <a:rPr sz="1500" b="0" i="0">
-                <a:solidFill>
-                  <a:srgbClr val="2B2B2B"/>
-                </a:solidFill>
-                <a:latin typeface="Calibri"/>
-              </a:rPr>
-              <a:t>, con revisión bibliográfica amplia (el Syllabus habla de </a:t>
-            </a:r>
-            <a:r>
-              <a:rPr sz="1500" b="1" i="0">
-                <a:solidFill>
-                  <a:srgbClr val="2B2B2B"/>
-                </a:solidFill>
-                <a:latin typeface="Calibri"/>
-              </a:rPr>
-              <a:t>al menos 50 referencias</a:t>
-            </a:r>
-            <a:r>
-              <a:rPr sz="1500" b="0" i="0">
-                <a:solidFill>
-                  <a:srgbClr val="2B2B2B"/>
-                </a:solidFill>
-                <a:latin typeface="Calibri"/>
-              </a:rPr>
-              <a:t>) y una </a:t>
-            </a:r>
-            <a:r>
-              <a:rPr sz="1500" b="1" i="0">
-                <a:solidFill>
-                  <a:srgbClr val="2B2B2B"/>
-                </a:solidFill>
-                <a:latin typeface="Calibri"/>
-              </a:rPr>
-              <a:t>extensión no inferior a 4.000 palabras</a:t>
-            </a:r>
-            <a:r>
-              <a:rPr sz="1500" b="0" i="0">
-                <a:solidFill>
-                  <a:srgbClr val="2B2B2B"/>
-                </a:solidFill>
-                <a:latin typeface="Calibri"/>
-              </a:rPr>
-              <a:t>.</a:t>
-            </a:r>
-          </a:p>
-          <a:p>
-            <a:pPr lvl="1">
-              <a:spcAft>
-                <a:spcPts val="600"/>
-              </a:spcAft>
-            </a:pPr>
-            <a:r>
-              <a:rPr sz="1500" b="0" i="0">
-                <a:solidFill>
-                  <a:srgbClr val="2B2B2B"/>
-                </a:solidFill>
-                <a:latin typeface="Calibri"/>
-              </a:rPr>
-              <a:t>●   </a:t>
-            </a:r>
-            <a:r>
-              <a:rPr sz="1500" b="1" i="0">
-                <a:solidFill>
-                  <a:srgbClr val="2B2B2B"/>
-                </a:solidFill>
-                <a:latin typeface="Calibri"/>
-              </a:rPr>
-              <a:t>2. Una sustentación ante jurados</a:t>
-            </a:r>
-            <a:r>
-              <a:rPr sz="1500" b="0" i="0">
-                <a:solidFill>
-                  <a:srgbClr val="2B2B2B"/>
-                </a:solidFill>
-                <a:latin typeface="Calibri"/>
-              </a:rPr>
-              <a:t>: defensa oral de su trabajo, no una lectura de diapositivas.</a:t>
-            </a:r>
-          </a:p>
-          <a:p>
-            <a:pPr lvl="1">
-              <a:spcAft>
-                <a:spcPts val="600"/>
-              </a:spcAft>
-            </a:pPr>
-            <a:r>
-              <a:rPr sz="1500" b="0" i="0">
-                <a:solidFill>
-                  <a:srgbClr val="2B2B2B"/>
-                </a:solidFill>
-                <a:latin typeface="Calibri"/>
-              </a:rPr>
-              <a:t>●   </a:t>
-            </a:r>
-            <a:r>
-              <a:rPr sz="1500" b="1" i="0">
-                <a:solidFill>
-                  <a:srgbClr val="2B2B2B"/>
-                </a:solidFill>
-                <a:latin typeface="Calibri"/>
-              </a:rPr>
-              <a:t>3. La carga al repositorio institucional</a:t>
-            </a:r>
-            <a:r>
-              <a:rPr sz="1500" b="0" i="0">
-                <a:solidFill>
-                  <a:srgbClr val="2B2B2B"/>
-                </a:solidFill>
-                <a:latin typeface="Calibri"/>
-              </a:rPr>
-              <a:t>, con los entregables que exija el instructivo del programa.</a:t>
-            </a:r>
-          </a:p>
-          <a:p>
-            <a:pPr>
-              <a:spcAft>
-                <a:spcPts val="1000"/>
-              </a:spcAft>
-            </a:pPr>
-            <a:r>
-              <a:rPr sz="1600" b="0" i="0">
-                <a:solidFill>
-                  <a:srgbClr val="2B2B2B"/>
-                </a:solidFill>
-                <a:latin typeface="Calibri"/>
-              </a:rPr>
-              <a:t>–   Si su opción de grado incluye un </a:t>
-            </a:r>
-            <a:r>
-              <a:rPr sz="1600" b="1" i="0">
-                <a:solidFill>
-                  <a:srgbClr val="2B2B2B"/>
-                </a:solidFill>
-                <a:latin typeface="Calibri"/>
-              </a:rPr>
-              <a:t>producto de ingeniería</a:t>
-            </a:r>
-            <a:r>
-              <a:rPr sz="1600" b="0" i="0">
-                <a:solidFill>
-                  <a:srgbClr val="2B2B2B"/>
-                </a:solidFill>
-                <a:latin typeface="Calibri"/>
-              </a:rPr>
-              <a:t> (prototipo, sistema, modelo, dataset), el producto no reemplaza al artículo: se </a:t>
-            </a:r>
-            <a:r>
-              <a:rPr sz="1600" b="1" i="0">
-                <a:solidFill>
-                  <a:srgbClr val="2B2B2B"/>
-                </a:solidFill>
-                <a:latin typeface="Calibri"/>
-              </a:rPr>
-              <a:t>documenta e investiga</a:t>
-            </a:r>
-            <a:r>
-              <a:rPr sz="1600" b="0" i="0">
-                <a:solidFill>
-                  <a:srgbClr val="2B2B2B"/>
-                </a:solidFill>
-                <a:latin typeface="Calibri"/>
-              </a:rPr>
-              <a:t> dentro de él.</a:t>
-            </a:r>
-          </a:p>
-          <a:p>
-            <a:pPr>
-              <a:spcAft>
-                <a:spcPts val="1000"/>
-              </a:spcAft>
-            </a:pPr>
-            <a:r>
-              <a:rPr sz="1600" b="0" i="0">
-                <a:solidFill>
-                  <a:srgbClr val="2B2B2B"/>
-                </a:solidFill>
-                <a:latin typeface="Calibri"/>
-              </a:rPr>
-              <a:t>–   Para qué le sirve después: es lo que queda publicado con su nombre. Un artículo bien hecho se muestra en una entrevista, se cita y abre la puerta a posgrado.</a:t>
-            </a:r>
-          </a:p>
-          <a:p>
-            <a:pPr>
-              <a:spcAft>
-                <a:spcPts val="1000"/>
-              </a:spcAft>
-            </a:pPr>
-            <a:r>
-              <a:rPr sz="1600" b="0" i="0">
-                <a:solidFill>
-                  <a:srgbClr val="2B2B2B"/>
-                </a:solidFill>
-                <a:latin typeface="Calibri"/>
-              </a:rPr>
-              <a:t>–   Regla del curso: </a:t>
-            </a:r>
-            <a:r>
-              <a:rPr sz="1600" b="1" i="0">
-                <a:solidFill>
-                  <a:srgbClr val="2B2B2B"/>
-                </a:solidFill>
-                <a:latin typeface="Calibri"/>
-              </a:rPr>
-              <a:t>cada sesión alimenta ese mismo artículo</a:t>
-            </a:r>
-            <a:r>
-              <a:rPr sz="1600" b="0" i="0">
-                <a:solidFill>
-                  <a:srgbClr val="2B2B2B"/>
-                </a:solidFill>
-                <a:latin typeface="Calibri"/>
-              </a:rPr>
-              <a:t>. No hay talleres isla.</a:t>
-            </a:r>
-          </a:p>
-        </p:txBody>
-      </p:sp>
-      <p:sp>
-        <p:nvSpPr>
-          <p:cNvPr id="5" name="TextBox 4"/>
-          <p:cNvSpPr txBox="1"/>
-          <p:nvPr/>
-        </p:nvSpPr>
-        <p:spPr>
-          <a:xfrm>
-            <a:off x="11094415" y="6446520"/>
-            <a:ext cx="548640" cy="274320"/>
-          </a:xfrm>
-          <a:prstGeom prst="rect">
-            <a:avLst/>
-          </a:prstGeom>
-          <a:noFill/>
-        </p:spPr>
-        <p:txBody>
-          <a:bodyPr wrap="square" anchor="t" lIns="0" rIns="0" tIns="0" bIns="0">
-            <a:spAutoFit/>
-          </a:bodyPr>
-          <a:lstStyle/>
-          <a:p>
-            <a:pPr algn="r"/>
-            <a:r>
-              <a:rPr sz="1000" b="1" i="0">
-                <a:solidFill>
-                  <a:srgbClr val="8F989D"/>
-                </a:solidFill>
-                <a:latin typeface="Calibri"/>
-              </a:rPr>
-              <a:t>8</a:t>
-            </a:r>
-          </a:p>
-        </p:txBody>
-      </p:sp>
-      <p:sp>
-        <p:nvSpPr>
-          <p:cNvPr id="6" name="TextBox 5"/>
-          <p:cNvSpPr txBox="1"/>
-          <p:nvPr/>
-        </p:nvSpPr>
-        <p:spPr>
-          <a:xfrm>
-            <a:off x="640080" y="5943600"/>
-            <a:ext cx="9997135" cy="457200"/>
-          </a:xfrm>
-          <a:prstGeom prst="rect">
-            <a:avLst/>
-          </a:prstGeom>
-          <a:noFill/>
-        </p:spPr>
-        <p:txBody>
-          <a:bodyPr wrap="square" anchor="t" lIns="0" rIns="0" tIns="0" bIns="0">
-            <a:spAutoFit/>
-          </a:bodyPr>
-          <a:lstStyle/>
-          <a:p>
-            <a:r>
-              <a:rPr sz="1200" b="0" i="1">
-                <a:solidFill>
-                  <a:srgbClr val="2B2B2B"/>
-                </a:solidFill>
-                <a:latin typeface="Calibri"/>
-              </a:rPr>
-              <a:t>Extensión y número de referencias son mínimos del Syllabus 94532, no metas opcionales. Se alcanzan sumando cada semana, nunca la última.</a:t>
-            </a:r>
-          </a:p>
-        </p:txBody>
-      </p:sp>
-    </p:spTree>
-  </p:cSld>
-  <p:clrMapOvr>
-    <a:masterClrMapping/>
-  </p:clrMapOvr>
-</p:sld>
-</file>
-
-<file path=ppt/slides/slide9.xml><?xml version="1.0" encoding="utf-8"?>
 <p:sld xmlns:a="http://schemas.openxmlformats.org/drawingml/2006/main" xmlns:p="http://schemas.openxmlformats.org/presentationml/2006/main" xmlns:r="http://schemas.openxmlformats.org/officeDocument/2006/relationships">
   <p:cSld>
     <p:bg>
@@ -15533,6 +14296,793 @@
                 </a:solidFill>
                 <a:latin typeface="Calibri"/>
               </a:rPr>
+              <a:t>8</a:t>
+            </a:r>
+          </a:p>
+        </p:txBody>
+      </p:sp>
+    </p:spTree>
+  </p:cSld>
+  <p:clrMapOvr>
+    <a:masterClrMapping/>
+  </p:clrMapOvr>
+</p:sld>
+</file>
+
+<file path=ppt/slides/slide9.xml><?xml version="1.0" encoding="utf-8"?>
+<p:sld xmlns:a="http://schemas.openxmlformats.org/drawingml/2006/main" xmlns:p="http://schemas.openxmlformats.org/presentationml/2006/main" xmlns:r="http://schemas.openxmlformats.org/officeDocument/2006/relationships">
+  <p:cSld>
+    <p:bg>
+      <p:bgPr>
+        <a:solidFill>
+          <a:srgbClr val="FFFFFF"/>
+        </a:solidFill>
+        <a:effectLst/>
+      </p:bgPr>
+    </p:bg>
+    <p:spTree>
+      <p:nvGrpSpPr>
+        <p:cNvPr id="1" name=""/>
+        <p:cNvGrpSpPr/>
+        <p:nvPr/>
+      </p:nvGrpSpPr>
+      <p:grpSpPr/>
+      <p:sp>
+        <p:nvSpPr>
+          <p:cNvPr id="2" name="Rectangle 1"/>
+          <p:cNvSpPr/>
+          <p:nvPr/>
+        </p:nvSpPr>
+        <p:spPr>
+          <a:xfrm>
+            <a:off x="0" y="0"/>
+            <a:ext cx="12191695" cy="1188720"/>
+          </a:xfrm>
+          <a:prstGeom prst="rect">
+            <a:avLst/>
+          </a:prstGeom>
+          <a:solidFill>
+            <a:srgbClr val="0C2340"/>
+          </a:solidFill>
+          <a:ln>
+            <a:noFill/>
+          </a:ln>
+          <a:effectLst/>
+        </p:spPr>
+        <p:style>
+          <a:lnRef idx="1">
+            <a:schemeClr val="accent1"/>
+          </a:lnRef>
+          <a:fillRef idx="3">
+            <a:schemeClr val="accent1"/>
+          </a:fillRef>
+          <a:effectRef idx="2">
+            <a:schemeClr val="accent1"/>
+          </a:effectRef>
+          <a:fontRef idx="minor">
+            <a:schemeClr val="lt1"/>
+          </a:fontRef>
+        </p:style>
+        <p:txBody>
+          <a:bodyPr rtlCol="0" anchor="ctr"/>
+          <a:lstStyle/>
+          <a:p>
+            <a:pPr algn="ctr"/>
+          </a:p>
+        </p:txBody>
+      </p:sp>
+      <p:sp>
+        <p:nvSpPr>
+          <p:cNvPr id="3" name="TextBox 2"/>
+          <p:cNvSpPr txBox="1"/>
+          <p:nvPr/>
+        </p:nvSpPr>
+        <p:spPr>
+          <a:xfrm>
+            <a:off x="640080" y="0"/>
+            <a:ext cx="9082735" cy="1188720"/>
+          </a:xfrm>
+          <a:prstGeom prst="rect">
+            <a:avLst/>
+          </a:prstGeom>
+          <a:noFill/>
+        </p:spPr>
+        <p:txBody>
+          <a:bodyPr wrap="square" anchor="ctr" lIns="0" rIns="0" tIns="0" bIns="0">
+            <a:spAutoFit/>
+          </a:bodyPr>
+          <a:lstStyle/>
+          <a:p>
+            <a:pPr algn="ctr"/>
+            <a:r>
+              <a:rPr sz="2600" b="1" i="0">
+                <a:solidFill>
+                  <a:srgbClr val="FFFFFF"/>
+                </a:solidFill>
+                <a:latin typeface="Calibri"/>
+              </a:rPr>
+              <a:t>Mapa del curso (2/2): cerrar, defender y entregar</a:t>
+            </a:r>
+          </a:p>
+        </p:txBody>
+      </p:sp>
+      <p:graphicFrame>
+        <p:nvGraphicFramePr>
+          <p:cNvPr id="4" name="Table 3"/>
+          <p:cNvGraphicFramePr>
+            <a:graphicFrameLocks noGrp="1"/>
+          </p:cNvGraphicFramePr>
+          <p:nvPr/>
+        </p:nvGraphicFramePr>
+        <p:xfrm>
+          <a:off x="640080" y="1691639"/>
+          <a:ext cx="10911533" cy="4023360"/>
+        </p:xfrm>
+        <a:graphic>
+          <a:graphicData uri="http://schemas.openxmlformats.org/drawingml/2006/table">
+            <a:tbl>
+              <a:tblPr>
+                <a:tableStyleId>{2D5ABB26-0587-4C30-8999-92F81FD0307C}</a:tableStyleId>
+              </a:tblPr>
+              <a:tblGrid>
+                <a:gridCol w="1008629"/>
+                <a:gridCol w="4951452"/>
+                <a:gridCol w="4951452"/>
+              </a:tblGrid>
+              <a:tr h="502920">
+                <a:tc>
+                  <a:txBody>
+                    <a:bodyPr/>
+                    <a:lstStyle/>
+                    <a:p>
+                      <a:pPr algn="l"/>
+                      <a:r>
+                        <a:rPr sz="1300" b="1" i="0">
+                          <a:solidFill>
+                            <a:srgbClr val="FFFFFF"/>
+                          </a:solidFill>
+                          <a:latin typeface="Calibri"/>
+                        </a:rPr>
+                        <a:t>Sesión</a:t>
+                      </a:r>
+                    </a:p>
+                  </a:txBody>
+                  <a:tcPr anchor="ctr" marL="109728" marR="91440" marT="36576" marB="36576">
+                    <a:solidFill>
+                      <a:srgbClr val="0C2340"/>
+                    </a:solidFill>
+                  </a:tcPr>
+                </a:tc>
+                <a:tc>
+                  <a:txBody>
+                    <a:bodyPr/>
+                    <a:lstStyle/>
+                    <a:p>
+                      <a:pPr algn="l"/>
+                      <a:r>
+                        <a:rPr sz="1300" b="1" i="0">
+                          <a:solidFill>
+                            <a:srgbClr val="FFFFFF"/>
+                          </a:solidFill>
+                          <a:latin typeface="Calibri"/>
+                        </a:rPr>
+                        <a:t>De qué se ocupa</a:t>
+                      </a:r>
+                    </a:p>
+                  </a:txBody>
+                  <a:tcPr anchor="ctr" marL="109728" marR="91440" marT="36576" marB="36576">
+                    <a:solidFill>
+                      <a:srgbClr val="0C2340"/>
+                    </a:solidFill>
+                  </a:tcPr>
+                </a:tc>
+                <a:tc>
+                  <a:txBody>
+                    <a:bodyPr/>
+                    <a:lstStyle/>
+                    <a:p>
+                      <a:pPr algn="l"/>
+                      <a:r>
+                        <a:rPr sz="1300" b="1" i="0">
+                          <a:solidFill>
+                            <a:srgbClr val="FFFFFF"/>
+                          </a:solidFill>
+                          <a:latin typeface="Calibri"/>
+                        </a:rPr>
+                        <a:t>Qué queda listo</a:t>
+                      </a:r>
+                    </a:p>
+                  </a:txBody>
+                  <a:tcPr anchor="ctr" marL="109728" marR="91440" marT="36576" marB="36576">
+                    <a:solidFill>
+                      <a:srgbClr val="0C2340"/>
+                    </a:solidFill>
+                  </a:tcPr>
+                </a:tc>
+              </a:tr>
+              <a:tr h="502920">
+                <a:tc>
+                  <a:txBody>
+                    <a:bodyPr/>
+                    <a:lstStyle/>
+                    <a:p>
+                      <a:pPr algn="l"/>
+                      <a:r>
+                        <a:rPr sz="1100" b="1" i="0">
+                          <a:solidFill>
+                            <a:srgbClr val="2B2B2B"/>
+                          </a:solidFill>
+                          <a:latin typeface="Calibri"/>
+                        </a:rPr>
+                        <a:t>09</a:t>
+                      </a:r>
+                    </a:p>
+                  </a:txBody>
+                  <a:tcPr anchor="ctr" marL="109728" marR="91440" marT="36576" marB="36576">
+                    <a:solidFill>
+                      <a:srgbClr val="FFFFFF"/>
+                    </a:solidFill>
+                  </a:tcPr>
+                </a:tc>
+                <a:tc>
+                  <a:txBody>
+                    <a:bodyPr/>
+                    <a:lstStyle/>
+                    <a:p>
+                      <a:pPr algn="l"/>
+                      <a:r>
+                        <a:rPr sz="1100" b="0" i="0">
+                          <a:solidFill>
+                            <a:srgbClr val="2B2B2B"/>
+                          </a:solidFill>
+                          <a:latin typeface="Calibri"/>
+                        </a:rPr>
+                        <a:t>Resultados, discusión y relación con referentes</a:t>
+                      </a:r>
+                    </a:p>
+                  </a:txBody>
+                  <a:tcPr anchor="ctr" marL="109728" marR="91440" marT="36576" marB="36576">
+                    <a:solidFill>
+                      <a:srgbClr val="FFFFFF"/>
+                    </a:solidFill>
+                  </a:tcPr>
+                </a:tc>
+                <a:tc>
+                  <a:txBody>
+                    <a:bodyPr/>
+                    <a:lstStyle/>
+                    <a:p>
+                      <a:pPr algn="l"/>
+                      <a:r>
+                        <a:rPr sz="1100" b="0" i="0">
+                          <a:solidFill>
+                            <a:srgbClr val="2B2B2B"/>
+                          </a:solidFill>
+                          <a:latin typeface="Calibri"/>
+                        </a:rPr>
+                        <a:t>Borrador de resultados y discusión</a:t>
+                      </a:r>
+                    </a:p>
+                  </a:txBody>
+                  <a:tcPr anchor="ctr" marL="109728" marR="91440" marT="36576" marB="36576">
+                    <a:solidFill>
+                      <a:srgbClr val="FFFFFF"/>
+                    </a:solidFill>
+                  </a:tcPr>
+                </a:tc>
+              </a:tr>
+              <a:tr h="502920">
+                <a:tc>
+                  <a:txBody>
+                    <a:bodyPr/>
+                    <a:lstStyle/>
+                    <a:p>
+                      <a:pPr algn="l"/>
+                      <a:r>
+                        <a:rPr sz="1100" b="1" i="0">
+                          <a:solidFill>
+                            <a:srgbClr val="2B2B2B"/>
+                          </a:solidFill>
+                          <a:latin typeface="Calibri"/>
+                        </a:rPr>
+                        <a:t>10</a:t>
+                      </a:r>
+                    </a:p>
+                  </a:txBody>
+                  <a:tcPr anchor="ctr" marL="109728" marR="91440" marT="36576" marB="36576">
+                    <a:solidFill>
+                      <a:srgbClr val="F2F2F2"/>
+                    </a:solidFill>
+                  </a:tcPr>
+                </a:tc>
+                <a:tc>
+                  <a:txBody>
+                    <a:bodyPr/>
+                    <a:lstStyle/>
+                    <a:p>
+                      <a:pPr algn="l"/>
+                      <a:r>
+                        <a:rPr sz="1100" b="0" i="0">
+                          <a:solidFill>
+                            <a:srgbClr val="2B2B2B"/>
+                          </a:solidFill>
+                          <a:latin typeface="Calibri"/>
+                        </a:rPr>
+                        <a:t>Resumen, palabras clave UNESCO, conclusiones y referencias</a:t>
+                      </a:r>
+                    </a:p>
+                  </a:txBody>
+                  <a:tcPr anchor="ctr" marL="109728" marR="91440" marT="36576" marB="36576">
+                    <a:solidFill>
+                      <a:srgbClr val="F2F2F2"/>
+                    </a:solidFill>
+                  </a:tcPr>
+                </a:tc>
+                <a:tc>
+                  <a:txBody>
+                    <a:bodyPr/>
+                    <a:lstStyle/>
+                    <a:p>
+                      <a:pPr algn="l"/>
+                      <a:r>
+                        <a:rPr sz="1100" b="0" i="0">
+                          <a:solidFill>
+                            <a:srgbClr val="2B2B2B"/>
+                          </a:solidFill>
+                          <a:latin typeface="Calibri"/>
+                        </a:rPr>
+                        <a:t>Artículo completo de punta a punta</a:t>
+                      </a:r>
+                    </a:p>
+                  </a:txBody>
+                  <a:tcPr anchor="ctr" marL="109728" marR="91440" marT="36576" marB="36576">
+                    <a:solidFill>
+                      <a:srgbClr val="F2F2F2"/>
+                    </a:solidFill>
+                  </a:tcPr>
+                </a:tc>
+              </a:tr>
+              <a:tr h="502920">
+                <a:tc>
+                  <a:txBody>
+                    <a:bodyPr/>
+                    <a:lstStyle/>
+                    <a:p>
+                      <a:pPr algn="l"/>
+                      <a:r>
+                        <a:rPr sz="1100" b="1" i="0">
+                          <a:solidFill>
+                            <a:srgbClr val="2B2B2B"/>
+                          </a:solidFill>
+                          <a:latin typeface="Calibri"/>
+                        </a:rPr>
+                        <a:t>11</a:t>
+                      </a:r>
+                    </a:p>
+                  </a:txBody>
+                  <a:tcPr anchor="ctr" marL="109728" marR="91440" marT="36576" marB="36576">
+                    <a:solidFill>
+                      <a:srgbClr val="FFFFFF"/>
+                    </a:solidFill>
+                  </a:tcPr>
+                </a:tc>
+                <a:tc>
+                  <a:txBody>
+                    <a:bodyPr/>
+                    <a:lstStyle/>
+                    <a:p>
+                      <a:pPr algn="l"/>
+                      <a:r>
+                        <a:rPr sz="1100" b="0" i="0">
+                          <a:solidFill>
+                            <a:srgbClr val="2B2B2B"/>
+                          </a:solidFill>
+                          <a:latin typeface="Calibri"/>
+                        </a:rPr>
+                        <a:t>Póster · evidencias · verificación antiplagio</a:t>
+                      </a:r>
+                    </a:p>
+                  </a:txBody>
+                  <a:tcPr anchor="ctr" marL="109728" marR="91440" marT="36576" marB="36576">
+                    <a:solidFill>
+                      <a:srgbClr val="FFFFFF"/>
+                    </a:solidFill>
+                  </a:tcPr>
+                </a:tc>
+                <a:tc>
+                  <a:txBody>
+                    <a:bodyPr/>
+                    <a:lstStyle/>
+                    <a:p>
+                      <a:pPr algn="l"/>
+                      <a:r>
+                        <a:rPr sz="1100" b="0" i="0">
+                          <a:solidFill>
+                            <a:srgbClr val="2B2B2B"/>
+                          </a:solidFill>
+                          <a:latin typeface="Calibri"/>
+                        </a:rPr>
+                        <a:t>Póster de una página y revisión de similitud</a:t>
+                      </a:r>
+                    </a:p>
+                  </a:txBody>
+                  <a:tcPr anchor="ctr" marL="109728" marR="91440" marT="36576" marB="36576">
+                    <a:solidFill>
+                      <a:srgbClr val="FFFFFF"/>
+                    </a:solidFill>
+                  </a:tcPr>
+                </a:tc>
+              </a:tr>
+              <a:tr h="502920">
+                <a:tc>
+                  <a:txBody>
+                    <a:bodyPr/>
+                    <a:lstStyle/>
+                    <a:p>
+                      <a:pPr algn="l"/>
+                      <a:r>
+                        <a:rPr sz="1100" b="1" i="0">
+                          <a:solidFill>
+                            <a:srgbClr val="2B2B2B"/>
+                          </a:solidFill>
+                          <a:latin typeface="Calibri"/>
+                        </a:rPr>
+                        <a:t>12</a:t>
+                      </a:r>
+                    </a:p>
+                  </a:txBody>
+                  <a:tcPr anchor="ctr" marL="109728" marR="91440" marT="36576" marB="36576">
+                    <a:solidFill>
+                      <a:srgbClr val="F2F2F2"/>
+                    </a:solidFill>
+                  </a:tcPr>
+                </a:tc>
+                <a:tc>
+                  <a:txBody>
+                    <a:bodyPr/>
+                    <a:lstStyle/>
+                    <a:p>
+                      <a:pPr algn="l"/>
+                      <a:r>
+                        <a:rPr sz="1100" b="0" i="0">
+                          <a:solidFill>
+                            <a:srgbClr val="2B2B2B"/>
+                          </a:solidFill>
+                          <a:latin typeface="Calibri"/>
+                        </a:rPr>
+                        <a:t>Sustentación ante jurados</a:t>
+                      </a:r>
+                    </a:p>
+                  </a:txBody>
+                  <a:tcPr anchor="ctr" marL="109728" marR="91440" marT="36576" marB="36576">
+                    <a:solidFill>
+                      <a:srgbClr val="F2F2F2"/>
+                    </a:solidFill>
+                  </a:tcPr>
+                </a:tc>
+                <a:tc>
+                  <a:txBody>
+                    <a:bodyPr/>
+                    <a:lstStyle/>
+                    <a:p>
+                      <a:pPr algn="l"/>
+                      <a:r>
+                        <a:rPr sz="1100" b="0" i="0">
+                          <a:solidFill>
+                            <a:srgbClr val="2B2B2B"/>
+                          </a:solidFill>
+                          <a:latin typeface="Calibri"/>
+                        </a:rPr>
+                        <a:t>Defensa presentada</a:t>
+                      </a:r>
+                    </a:p>
+                  </a:txBody>
+                  <a:tcPr anchor="ctr" marL="109728" marR="91440" marT="36576" marB="36576">
+                    <a:solidFill>
+                      <a:srgbClr val="F2F2F2"/>
+                    </a:solidFill>
+                  </a:tcPr>
+                </a:tc>
+              </a:tr>
+              <a:tr h="502920">
+                <a:tc>
+                  <a:txBody>
+                    <a:bodyPr/>
+                    <a:lstStyle/>
+                    <a:p>
+                      <a:pPr algn="l"/>
+                      <a:r>
+                        <a:rPr sz="1100" b="1" i="0">
+                          <a:solidFill>
+                            <a:srgbClr val="2B2B2B"/>
+                          </a:solidFill>
+                          <a:latin typeface="Calibri"/>
+                        </a:rPr>
+                        <a:t>13</a:t>
+                      </a:r>
+                    </a:p>
+                  </a:txBody>
+                  <a:tcPr anchor="ctr" marL="109728" marR="91440" marT="36576" marB="36576">
+                    <a:solidFill>
+                      <a:srgbClr val="FFFFFF"/>
+                    </a:solidFill>
+                  </a:tcPr>
+                </a:tc>
+                <a:tc>
+                  <a:txBody>
+                    <a:bodyPr/>
+                    <a:lstStyle/>
+                    <a:p>
+                      <a:pPr algn="l"/>
+                      <a:r>
+                        <a:rPr sz="1100" b="0" i="0">
+                          <a:solidFill>
+                            <a:srgbClr val="2B2B2B"/>
+                          </a:solidFill>
+                          <a:latin typeface="Calibri"/>
+                        </a:rPr>
+                        <a:t>Entregables para repositorio institucional</a:t>
+                      </a:r>
+                    </a:p>
+                  </a:txBody>
+                  <a:tcPr anchor="ctr" marL="109728" marR="91440" marT="36576" marB="36576">
+                    <a:solidFill>
+                      <a:srgbClr val="FFFFFF"/>
+                    </a:solidFill>
+                  </a:tcPr>
+                </a:tc>
+                <a:tc>
+                  <a:txBody>
+                    <a:bodyPr/>
+                    <a:lstStyle/>
+                    <a:p>
+                      <a:pPr algn="l"/>
+                      <a:r>
+                        <a:rPr sz="1100" b="0" i="0">
+                          <a:solidFill>
+                            <a:srgbClr val="2B2B2B"/>
+                          </a:solidFill>
+                          <a:latin typeface="Calibri"/>
+                        </a:rPr>
+                        <a:t>Paquete final verificado</a:t>
+                      </a:r>
+                    </a:p>
+                  </a:txBody>
+                  <a:tcPr anchor="ctr" marL="109728" marR="91440" marT="36576" marB="36576">
+                    <a:solidFill>
+                      <a:srgbClr val="FFFFFF"/>
+                    </a:solidFill>
+                  </a:tcPr>
+                </a:tc>
+              </a:tr>
+              <a:tr h="502920">
+                <a:tc>
+                  <a:txBody>
+                    <a:bodyPr/>
+                    <a:lstStyle/>
+                    <a:p>
+                      <a:pPr algn="l"/>
+                      <a:r>
+                        <a:rPr sz="1100" b="1" i="0">
+                          <a:solidFill>
+                            <a:srgbClr val="2B2B2B"/>
+                          </a:solidFill>
+                          <a:latin typeface="Calibri"/>
+                        </a:rPr>
+                        <a:t>14</a:t>
+                      </a:r>
+                    </a:p>
+                  </a:txBody>
+                  <a:tcPr anchor="ctr" marL="109728" marR="91440" marT="36576" marB="36576">
+                    <a:solidFill>
+                      <a:srgbClr val="F2F2F2"/>
+                    </a:solidFill>
+                  </a:tcPr>
+                </a:tc>
+                <a:tc>
+                  <a:txBody>
+                    <a:bodyPr/>
+                    <a:lstStyle/>
+                    <a:p>
+                      <a:pPr algn="l"/>
+                      <a:r>
+                        <a:rPr sz="1100" b="0" i="0">
+                          <a:solidFill>
+                            <a:srgbClr val="2B2B2B"/>
+                          </a:solidFill>
+                          <a:latin typeface="Calibri"/>
+                        </a:rPr>
+                        <a:t>Ajustes finales · seguimiento post-sustentación</a:t>
+                      </a:r>
+                    </a:p>
+                  </a:txBody>
+                  <a:tcPr anchor="ctr" marL="109728" marR="91440" marT="36576" marB="36576">
+                    <a:solidFill>
+                      <a:srgbClr val="F2F2F2"/>
+                    </a:solidFill>
+                  </a:tcPr>
+                </a:tc>
+                <a:tc>
+                  <a:txBody>
+                    <a:bodyPr/>
+                    <a:lstStyle/>
+                    <a:p>
+                      <a:pPr algn="l"/>
+                      <a:r>
+                        <a:rPr sz="1100" b="0" i="0">
+                          <a:solidFill>
+                            <a:srgbClr val="2B2B2B"/>
+                          </a:solidFill>
+                          <a:latin typeface="Calibri"/>
+                        </a:rPr>
+                        <a:t>Correcciones del jurado incorporadas</a:t>
+                      </a:r>
+                    </a:p>
+                  </a:txBody>
+                  <a:tcPr anchor="ctr" marL="109728" marR="91440" marT="36576" marB="36576">
+                    <a:solidFill>
+                      <a:srgbClr val="F2F2F2"/>
+                    </a:solidFill>
+                  </a:tcPr>
+                </a:tc>
+              </a:tr>
+              <a:tr h="502920">
+                <a:tc>
+                  <a:txBody>
+                    <a:bodyPr/>
+                    <a:lstStyle/>
+                    <a:p>
+                      <a:pPr algn="l"/>
+                      <a:r>
+                        <a:rPr sz="1100" b="1" i="0">
+                          <a:solidFill>
+                            <a:srgbClr val="2B2B2B"/>
+                          </a:solidFill>
+                          <a:latin typeface="Calibri"/>
+                        </a:rPr>
+                        <a:t>15</a:t>
+                      </a:r>
+                    </a:p>
+                  </a:txBody>
+                  <a:tcPr anchor="ctr" marL="109728" marR="91440" marT="36576" marB="36576">
+                    <a:solidFill>
+                      <a:srgbClr val="FFFFFF"/>
+                    </a:solidFill>
+                  </a:tcPr>
+                </a:tc>
+                <a:tc>
+                  <a:txBody>
+                    <a:bodyPr/>
+                    <a:lstStyle/>
+                    <a:p>
+                      <a:pPr algn="l"/>
+                      <a:r>
+                        <a:rPr sz="1100" b="0" i="0">
+                          <a:solidFill>
+                            <a:srgbClr val="2B2B2B"/>
+                          </a:solidFill>
+                          <a:latin typeface="Calibri"/>
+                        </a:rPr>
+                        <a:t>Cierre administrativo · recepción</a:t>
+                      </a:r>
+                    </a:p>
+                  </a:txBody>
+                  <a:tcPr anchor="ctr" marL="109728" marR="91440" marT="36576" marB="36576">
+                    <a:solidFill>
+                      <a:srgbClr val="FFFFFF"/>
+                    </a:solidFill>
+                  </a:tcPr>
+                </a:tc>
+                <a:tc>
+                  <a:txBody>
+                    <a:bodyPr/>
+                    <a:lstStyle/>
+                    <a:p>
+                      <a:pPr algn="l"/>
+                      <a:r>
+                        <a:rPr sz="1100" b="0" i="0">
+                          <a:solidFill>
+                            <a:srgbClr val="2B2B2B"/>
+                          </a:solidFill>
+                          <a:latin typeface="Calibri"/>
+                        </a:rPr>
+                        <a:t>Todo cargado y confirmado como recibido</a:t>
+                      </a:r>
+                    </a:p>
+                  </a:txBody>
+                  <a:tcPr anchor="ctr" marL="109728" marR="91440" marT="36576" marB="36576">
+                    <a:solidFill>
+                      <a:srgbClr val="FFFFFF"/>
+                    </a:solidFill>
+                  </a:tcPr>
+                </a:tc>
+              </a:tr>
+            </a:tbl>
+          </a:graphicData>
+        </a:graphic>
+      </p:graphicFrame>
+      <p:sp>
+        <p:nvSpPr>
+          <p:cNvPr id="5" name="TextBox 4"/>
+          <p:cNvSpPr txBox="1"/>
+          <p:nvPr/>
+        </p:nvSpPr>
+        <p:spPr>
+          <a:xfrm>
+            <a:off x="640080" y="5852160"/>
+            <a:ext cx="10911535" cy="548640"/>
+          </a:xfrm>
+          <a:prstGeom prst="rect">
+            <a:avLst/>
+          </a:prstGeom>
+          <a:noFill/>
+        </p:spPr>
+        <p:txBody>
+          <a:bodyPr wrap="square" anchor="t" lIns="0" rIns="0" tIns="0" bIns="0">
+            <a:spAutoFit/>
+          </a:bodyPr>
+          <a:lstStyle/>
+          <a:p>
+            <a:r>
+              <a:rPr sz="1200" b="0" i="1">
+                <a:solidFill>
+                  <a:srgbClr val="2B2B2B"/>
+                </a:solidFill>
+                <a:latin typeface="Calibri"/>
+              </a:rPr>
+              <a:t>El plazo de </a:t>
+            </a:r>
+            <a:r>
+              <a:rPr sz="1200" b="1" i="1">
+                <a:solidFill>
+                  <a:srgbClr val="2B2B2B"/>
+                </a:solidFill>
+                <a:latin typeface="Calibri"/>
+              </a:rPr>
+              <a:t>recepción y cierre varía según su grupo</a:t>
+            </a:r>
+            <a:r>
+              <a:rPr sz="1200" b="0" i="1">
+                <a:solidFill>
+                  <a:srgbClr val="2B2B2B"/>
+                </a:solidFill>
+                <a:latin typeface="Calibri"/>
+              </a:rPr>
+              <a:t>: consúltelo en la Presentación del Curso y anótelo hoy en su calendario.</a:t>
+            </a:r>
+          </a:p>
+        </p:txBody>
+      </p:sp>
+      <p:sp>
+        <p:nvSpPr>
+          <p:cNvPr id="6" name="TextBox 5"/>
+          <p:cNvSpPr txBox="1"/>
+          <p:nvPr/>
+        </p:nvSpPr>
+        <p:spPr>
+          <a:xfrm>
+            <a:off x="11094415" y="6446520"/>
+            <a:ext cx="548640" cy="274320"/>
+          </a:xfrm>
+          <a:prstGeom prst="rect">
+            <a:avLst/>
+          </a:prstGeom>
+          <a:noFill/>
+        </p:spPr>
+        <p:txBody>
+          <a:bodyPr wrap="square" anchor="t" lIns="0" rIns="0" tIns="0" bIns="0">
+            <a:spAutoFit/>
+          </a:bodyPr>
+          <a:lstStyle/>
+          <a:p>
+            <a:pPr algn="r"/>
+            <a:r>
+              <a:rPr sz="1000" b="1" i="0">
+                <a:solidFill>
+                  <a:srgbClr val="8F989D"/>
+                </a:solidFill>
+                <a:latin typeface="Calibri"/>
+              </a:rPr>
               <a:t>9</a:t>
             </a:r>
           </a:p>

--- a/Pregrado/Trabajo de grado 3/Clases/Sesion 01 - Presentación del curso · docente · estudiantes · ACAs/Presentacion.pptx
+++ b/Pregrado/Trabajo de grado 3/Clases/Sesion 01 - Presentación del curso · docente · estudiantes · ACAs/Presentacion.pptx
@@ -27,6 +27,7 @@
     <p:sldId id="275" r:id="rId26"/>
     <p:sldId id="276" r:id="rId27"/>
     <p:sldId id="277" r:id="rId28"/>
+    <p:sldId id="278" r:id="rId29"/>
   </p:sldIdLst>
   <p:sldSz cx="12191695" cy="6858000" type="screen4x3"/>
   <p:notesSz cx="6858000" cy="9144000"/>
@@ -3585,7 +3586,7 @@
                 </a:solidFill>
                 <a:latin typeface="Calibri"/>
               </a:rPr>
-              <a:t> una sección del artículo por sesión, subida antes del siguiente encuentro.</a:t>
+              <a:t> una sección del documento por sesión, subida antes del siguiente encuentro.</a:t>
             </a:r>
           </a:p>
           <a:p>
@@ -3721,7 +3722,7 @@
                 </a:solidFill>
                 <a:latin typeface="Calibri"/>
               </a:rPr>
-              <a:t> se prepara desde ahora, no la semana anterior; el guion de defensa nace del artículo.</a:t>
+              <a:t> se prepara desde ahora, no la semana anterior; el guion de defensa nace del documento.</a:t>
             </a:r>
           </a:p>
           <a:p>
@@ -4087,7 +4088,7 @@
                           </a:solidFill>
                           <a:latin typeface="Calibri"/>
                         </a:rPr>
-                        <a:t>Retoma del proyecto: pregunta, objetivos y título definitivos + estructura del artículo e introducción en plantilla APA CUN.</a:t>
+                        <a:t>Retoma del proyecto: pregunta, objetivos y título definitivos + estructura del documento e introducción en plantilla APA CUN.</a:t>
                       </a:r>
                     </a:p>
                   </a:txBody>
@@ -4288,7 +4289,7 @@
                           </a:solidFill>
                           <a:latin typeface="Calibri"/>
                         </a:rPr>
-                        <a:t> (tarea: el artículo, único documento que se sube) + </a:t>
+                        <a:t> (tarea: el documento, lo único que se sube) + </a:t>
                       </a:r>
                       <a:r>
                         <a:rPr sz="1100" b="1" i="0">
@@ -4365,7 +4366,7 @@
                           </a:solidFill>
                           <a:latin typeface="Calibri"/>
                         </a:rPr>
-                        <a:t>Artículo completo (resultados, discusión, conclusiones y referencias), póster, antiplagio y </a:t>
+                        <a:t>Documento completo (resultados, discusión, conclusiones y referencias), póster, antiplagio y </a:t>
                       </a:r>
                       <a:r>
                         <a:rPr sz="1100" b="1" i="0">
@@ -4468,7 +4469,7 @@
                 </a:solidFill>
                 <a:latin typeface="Calibri"/>
               </a:rPr>
-              <a:t> no tiene ítem propio en el libro de calificaciones: es requisito del programa y se prepara con el mismo artículo que califica la </a:t>
+              <a:t> no tiene ítem propio en el libro de calificaciones: es requisito del programa y se prepara con el mismo documento que califica la </a:t>
             </a:r>
             <a:r>
               <a:rPr sz="1200" b="1" i="1">
@@ -4789,7 +4790,7 @@
                 </a:solidFill>
                 <a:latin typeface="Calibri"/>
               </a:rPr>
-              <a:t>: el artículo es un texto que crece, no una carpeta de archivos sueltos.</a:t>
+              <a:t>: el documento es un texto que crece, no una carpeta de archivos sueltos.</a:t>
             </a:r>
           </a:p>
           <a:p>
@@ -4909,7 +4910,7 @@
                 </a:solidFill>
                 <a:latin typeface="Calibri"/>
               </a:rPr>
-              <a:t> Suba a </a:t>
+              <a:t> El aula tiene </a:t>
             </a:r>
             <a:r>
               <a:rPr sz="1600" b="1" i="0">
@@ -4918,7 +4919,7 @@
                 </a:solidFill>
                 <a:latin typeface="Calibri"/>
               </a:rPr>
-              <a:t>CDigital</a:t>
+              <a:t>una sola tarea documental</a:t>
             </a:r>
             <a:r>
               <a:rPr sz="1600" b="0" i="0">
@@ -4927,7 +4928,61 @@
                 </a:solidFill>
                 <a:latin typeface="Calibri"/>
               </a:rPr>
-              <a:t> en el espacio de la sesión: [URL CDigital — campus del curso pendiente]</a:t>
+              <a:t>: la </a:t>
+            </a:r>
+            <a:r>
+              <a:rPr sz="1600" b="1" i="0">
+                <a:solidFill>
+                  <a:srgbClr val="2B2B2B"/>
+                </a:solidFill>
+                <a:latin typeface="Calibri"/>
+              </a:rPr>
+              <a:t>ACA Final</a:t>
+            </a:r>
+            <a:r>
+              <a:rPr sz="1600" b="0" i="0">
+                <a:solidFill>
+                  <a:srgbClr val="2B2B2B"/>
+                </a:solidFill>
+                <a:latin typeface="Calibri"/>
+              </a:rPr>
+              <a:t>. Ese es el archivo que se sube, en el aula de </a:t>
+            </a:r>
+            <a:r>
+              <a:rPr sz="1600" b="1" i="0">
+                <a:solidFill>
+                  <a:srgbClr val="2B2B2B"/>
+                </a:solidFill>
+                <a:latin typeface="Calibri"/>
+              </a:rPr>
+              <a:t>su grupo</a:t>
+            </a:r>
+            <a:r>
+              <a:rPr sz="1600" b="0" i="0">
+                <a:solidFill>
+                  <a:srgbClr val="2B2B2B"/>
+                </a:solidFill>
+                <a:latin typeface="Calibri"/>
+              </a:rPr>
+              <a:t> en CDigital. Los avances de cada sesión </a:t>
+            </a:r>
+            <a:r>
+              <a:rPr sz="1600" b="1" i="0">
+                <a:solidFill>
+                  <a:srgbClr val="2B2B2B"/>
+                </a:solidFill>
+                <a:latin typeface="Calibri"/>
+              </a:rPr>
+              <a:t>no se suben</a:t>
+            </a:r>
+            <a:r>
+              <a:rPr sz="1600" b="0" i="0">
+                <a:solidFill>
+                  <a:srgbClr val="2B2B2B"/>
+                </a:solidFill>
+                <a:latin typeface="Calibri"/>
+              </a:rPr>
+              <a:t>: se guardan en su Drive y se traen a clase.</a:t>
             </a:r>
           </a:p>
           <a:p>
@@ -6380,7 +6435,7 @@
                           </a:solidFill>
                           <a:latin typeface="Calibri"/>
                         </a:rPr>
-                        <a:t>Escribir el artículo sobre la plantilla APA CUN, con historial de versiones</a:t>
+                        <a:t>Escribir el documento sobre la plantilla APA CUN, con historial de versiones</a:t>
                       </a:r>
                     </a:p>
                   </a:txBody>
@@ -8705,7 +8760,7 @@
                 </a:solidFill>
                 <a:latin typeface="Calibri"/>
               </a:rPr>
-              <a:t> de `Clases/Recursos/ACAs/` (artículo y sustentación): traen la ventana de la </a:t>
+              <a:t> de `Clases/Recursos/ACAs/` (documento y sustentación): traen la ventana de la </a:t>
             </a:r>
             <a:r>
               <a:rPr sz="1600" b="1" i="0">
@@ -9906,6 +9961,1214 @@
 </file>
 
 <file path=ppt/slides/slide22.xml><?xml version="1.0" encoding="utf-8"?>
+<p:sld xmlns:a="http://schemas.openxmlformats.org/drawingml/2006/main" xmlns:p="http://schemas.openxmlformats.org/presentationml/2006/main" xmlns:r="http://schemas.openxmlformats.org/officeDocument/2006/relationships">
+  <p:cSld>
+    <p:bg>
+      <p:bgPr>
+        <a:solidFill>
+          <a:srgbClr val="FFFFFF"/>
+        </a:solidFill>
+        <a:effectLst/>
+      </p:bgPr>
+    </p:bg>
+    <p:spTree>
+      <p:nvGrpSpPr>
+        <p:cNvPr id="1" name=""/>
+        <p:cNvGrpSpPr/>
+        <p:nvPr/>
+      </p:nvGrpSpPr>
+      <p:grpSpPr/>
+      <p:sp>
+        <p:nvSpPr>
+          <p:cNvPr id="2" name="Rectangle 1"/>
+          <p:cNvSpPr/>
+          <p:nvPr/>
+        </p:nvSpPr>
+        <p:spPr>
+          <a:xfrm>
+            <a:off x="0" y="0"/>
+            <a:ext cx="12191695" cy="1188720"/>
+          </a:xfrm>
+          <a:prstGeom prst="rect">
+            <a:avLst/>
+          </a:prstGeom>
+          <a:solidFill>
+            <a:srgbClr val="0C2340"/>
+          </a:solidFill>
+          <a:ln>
+            <a:noFill/>
+          </a:ln>
+          <a:effectLst/>
+        </p:spPr>
+        <p:style>
+          <a:lnRef idx="1">
+            <a:schemeClr val="accent1"/>
+          </a:lnRef>
+          <a:fillRef idx="3">
+            <a:schemeClr val="accent1"/>
+          </a:fillRef>
+          <a:effectRef idx="2">
+            <a:schemeClr val="accent1"/>
+          </a:effectRef>
+          <a:fontRef idx="minor">
+            <a:schemeClr val="lt1"/>
+          </a:fontRef>
+        </p:style>
+        <p:txBody>
+          <a:bodyPr rtlCol="0" anchor="ctr"/>
+          <a:lstStyle/>
+          <a:p>
+            <a:pPr algn="ctr"/>
+          </a:p>
+        </p:txBody>
+      </p:sp>
+      <p:sp>
+        <p:nvSpPr>
+          <p:cNvPr id="3" name="TextBox 2"/>
+          <p:cNvSpPr txBox="1"/>
+          <p:nvPr/>
+        </p:nvSpPr>
+        <p:spPr>
+          <a:xfrm>
+            <a:off x="640080" y="0"/>
+            <a:ext cx="9082735" cy="1188720"/>
+          </a:xfrm>
+          <a:prstGeom prst="rect">
+            <a:avLst/>
+          </a:prstGeom>
+          <a:noFill/>
+        </p:spPr>
+        <p:txBody>
+          <a:bodyPr wrap="square" anchor="ctr" lIns="0" rIns="0" tIns="0" bIns="0">
+            <a:spAutoFit/>
+          </a:bodyPr>
+          <a:lstStyle/>
+          <a:p>
+            <a:pPr algn="ctr"/>
+            <a:r>
+              <a:rPr sz="2600" b="1" i="0">
+                <a:solidFill>
+                  <a:srgbClr val="FFFFFF"/>
+                </a:solidFill>
+                <a:latin typeface="Calibri"/>
+              </a:rPr>
+              <a:t>RUTA DE ENTREGABLES DEL CURSO</a:t>
+            </a:r>
+          </a:p>
+        </p:txBody>
+      </p:sp>
+      <p:sp>
+        <p:nvSpPr>
+          <p:cNvPr id="4" name="TextBox 3"/>
+          <p:cNvSpPr txBox="1"/>
+          <p:nvPr/>
+        </p:nvSpPr>
+        <p:spPr>
+          <a:xfrm>
+            <a:off x="640080" y="1280160"/>
+            <a:ext cx="10911535" cy="411480"/>
+          </a:xfrm>
+          <a:prstGeom prst="rect">
+            <a:avLst/>
+          </a:prstGeom>
+          <a:noFill/>
+        </p:spPr>
+        <p:txBody>
+          <a:bodyPr wrap="square" anchor="t" lIns="0" rIns="0" tIns="0" bIns="0">
+            <a:spAutoFit/>
+          </a:bodyPr>
+          <a:lstStyle/>
+          <a:p>
+            <a:pPr algn="ctr"/>
+            <a:r>
+              <a:rPr sz="1500" b="0" i="0">
+                <a:solidFill>
+                  <a:srgbClr val="2B2B2B"/>
+                </a:solidFill>
+                <a:latin typeface="Calibri"/>
+              </a:rPr>
+              <a:t>Sin fechas a propósito: aquí va </a:t>
+            </a:r>
+            <a:r>
+              <a:rPr sz="1500" b="1" i="0">
+                <a:solidFill>
+                  <a:srgbClr val="2B2B2B"/>
+                </a:solidFill>
+                <a:latin typeface="Calibri"/>
+              </a:rPr>
+              <a:t>en qué punto del curso</a:t>
+            </a:r>
+            <a:r>
+              <a:rPr sz="1500" b="0" i="0">
+                <a:solidFill>
+                  <a:srgbClr val="2B2B2B"/>
+                </a:solidFill>
+                <a:latin typeface="Calibri"/>
+              </a:rPr>
+              <a:t> cierra cada ítem · la ventana exacta la fija CDigital</a:t>
+            </a:r>
+          </a:p>
+        </p:txBody>
+      </p:sp>
+      <p:graphicFrame>
+        <p:nvGraphicFramePr>
+          <p:cNvPr id="5" name="Table 4"/>
+          <p:cNvGraphicFramePr>
+            <a:graphicFrameLocks noGrp="1"/>
+          </p:cNvGraphicFramePr>
+          <p:nvPr/>
+        </p:nvGraphicFramePr>
+        <p:xfrm>
+          <a:off x="640080" y="2011679"/>
+          <a:ext cx="10911533" cy="4297680"/>
+        </p:xfrm>
+        <a:graphic>
+          <a:graphicData uri="http://schemas.openxmlformats.org/drawingml/2006/table">
+            <a:tbl>
+              <a:tblPr>
+                <a:tableStyleId>{2D5ABB26-0587-4C30-8999-92F81FD0307C}</a:tableStyleId>
+              </a:tblPr>
+              <a:tblGrid>
+                <a:gridCol w="2659113"/>
+                <a:gridCol w="2659113"/>
+                <a:gridCol w="5593307"/>
+              </a:tblGrid>
+              <a:tr h="477520">
+                <a:tc>
+                  <a:txBody>
+                    <a:bodyPr/>
+                    <a:lstStyle/>
+                    <a:p>
+                      <a:pPr algn="l"/>
+                      <a:r>
+                        <a:rPr sz="1300" b="1" i="0">
+                          <a:solidFill>
+                            <a:srgbClr val="FFFFFF"/>
+                          </a:solidFill>
+                          <a:latin typeface="Calibri"/>
+                        </a:rPr>
+                        <a:t>Cierra en la semana de…</a:t>
+                      </a:r>
+                    </a:p>
+                  </a:txBody>
+                  <a:tcPr anchor="ctr" marL="109728" marR="91440" marT="36576" marB="36576">
+                    <a:solidFill>
+                      <a:srgbClr val="0C2340"/>
+                    </a:solidFill>
+                  </a:tcPr>
+                </a:tc>
+                <a:tc>
+                  <a:txBody>
+                    <a:bodyPr/>
+                    <a:lstStyle/>
+                    <a:p>
+                      <a:pPr algn="l"/>
+                      <a:r>
+                        <a:rPr sz="1300" b="1" i="0">
+                          <a:solidFill>
+                            <a:srgbClr val="FFFFFF"/>
+                          </a:solidFill>
+                          <a:latin typeface="Calibri"/>
+                        </a:rPr>
+                        <a:t>Entregable</a:t>
+                      </a:r>
+                    </a:p>
+                  </a:txBody>
+                  <a:tcPr anchor="ctr" marL="109728" marR="91440" marT="36576" marB="36576">
+                    <a:solidFill>
+                      <a:srgbClr val="0C2340"/>
+                    </a:solidFill>
+                  </a:tcPr>
+                </a:tc>
+                <a:tc>
+                  <a:txBody>
+                    <a:bodyPr/>
+                    <a:lstStyle/>
+                    <a:p>
+                      <a:pPr algn="l"/>
+                      <a:r>
+                        <a:rPr sz="1300" b="1" i="0">
+                          <a:solidFill>
+                            <a:srgbClr val="FFFFFF"/>
+                          </a:solidFill>
+                          <a:latin typeface="Calibri"/>
+                        </a:rPr>
+                        <a:t>Qué debes tener listo</a:t>
+                      </a:r>
+                    </a:p>
+                  </a:txBody>
+                  <a:tcPr anchor="ctr" marL="109728" marR="91440" marT="36576" marB="36576">
+                    <a:solidFill>
+                      <a:srgbClr val="0C2340"/>
+                    </a:solidFill>
+                  </a:tcPr>
+                </a:tc>
+              </a:tr>
+              <a:tr h="477520">
+                <a:tc>
+                  <a:txBody>
+                    <a:bodyPr/>
+                    <a:lstStyle/>
+                    <a:p>
+                      <a:pPr algn="l"/>
+                      <a:r>
+                        <a:rPr sz="1100" b="1" i="0">
+                          <a:solidFill>
+                            <a:srgbClr val="2B2B2B"/>
+                          </a:solidFill>
+                          <a:latin typeface="Calibri"/>
+                        </a:rPr>
+                        <a:t>Sesión 03</a:t>
+                      </a:r>
+                      <a:r>
+                        <a:rPr sz="1100" b="0" i="0">
+                          <a:solidFill>
+                            <a:srgbClr val="2B2B2B"/>
+                          </a:solidFill>
+                          <a:latin typeface="Calibri"/>
+                        </a:rPr>
+                        <a:t> · pendiente</a:t>
+                      </a:r>
+                    </a:p>
+                  </a:txBody>
+                  <a:tcPr anchor="ctr" marL="109728" marR="91440" marT="36576" marB="36576">
+                    <a:solidFill>
+                      <a:srgbClr val="FFFFFF"/>
+                    </a:solidFill>
+                  </a:tcPr>
+                </a:tc>
+                <a:tc>
+                  <a:txBody>
+                    <a:bodyPr/>
+                    <a:lstStyle/>
+                    <a:p>
+                      <a:pPr algn="l"/>
+                      <a:r>
+                        <a:rPr sz="1100" b="1" i="0">
+                          <a:solidFill>
+                            <a:srgbClr val="2B2B2B"/>
+                          </a:solidFill>
+                          <a:latin typeface="Calibri"/>
+                        </a:rPr>
+                        <a:t>Quiz 1</a:t>
+                      </a:r>
+                      <a:r>
+                        <a:rPr sz="1100" b="0" i="0">
+                          <a:solidFill>
+                            <a:srgbClr val="2B2B2B"/>
+                          </a:solidFill>
+                          <a:latin typeface="Calibri"/>
+                        </a:rPr>
+                        <a:t> · Cuestionario · 6%</a:t>
+                      </a:r>
+                    </a:p>
+                  </a:txBody>
+                  <a:tcPr anchor="ctr" marL="109728" marR="91440" marT="36576" marB="36576">
+                    <a:solidFill>
+                      <a:srgbClr val="FFFFFF"/>
+                    </a:solidFill>
+                  </a:tcPr>
+                </a:tc>
+                <a:tc>
+                  <a:txBody>
+                    <a:bodyPr/>
+                    <a:lstStyle/>
+                    <a:p>
+                      <a:pPr algn="l"/>
+                      <a:r>
+                        <a:rPr sz="1100" b="0" i="0">
+                          <a:solidFill>
+                            <a:srgbClr val="2B2B2B"/>
+                          </a:solidFill>
+                          <a:latin typeface="Calibri"/>
+                        </a:rPr>
+                        <a:t>Repasa </a:t>
+                      </a:r>
+                      <a:r>
+                        <a:rPr sz="1100" b="1" i="0">
+                          <a:solidFill>
+                            <a:srgbClr val="2B2B2B"/>
+                          </a:solidFill>
+                          <a:latin typeface="Calibri"/>
+                        </a:rPr>
+                        <a:t>pregunta, objetivos y título</a:t>
+                      </a:r>
+                      <a:r>
+                        <a:rPr sz="1100" b="0" i="0">
+                          <a:solidFill>
+                            <a:srgbClr val="2B2B2B"/>
+                          </a:solidFill>
+                          <a:latin typeface="Calibri"/>
+                        </a:rPr>
+                        <a:t> y las variables de la pregunta-problema.</a:t>
+                      </a:r>
+                    </a:p>
+                  </a:txBody>
+                  <a:tcPr anchor="ctr" marL="109728" marR="91440" marT="36576" marB="36576">
+                    <a:solidFill>
+                      <a:srgbClr val="FFFFFF"/>
+                    </a:solidFill>
+                  </a:tcPr>
+                </a:tc>
+              </a:tr>
+              <a:tr h="477520">
+                <a:tc>
+                  <a:txBody>
+                    <a:bodyPr/>
+                    <a:lstStyle/>
+                    <a:p>
+                      <a:pPr algn="l"/>
+                      <a:r>
+                        <a:rPr sz="1100" b="1" i="0">
+                          <a:solidFill>
+                            <a:srgbClr val="2B2B2B"/>
+                          </a:solidFill>
+                          <a:latin typeface="Calibri"/>
+                        </a:rPr>
+                        <a:t>Sesión 06</a:t>
+                      </a:r>
+                      <a:r>
+                        <a:rPr sz="1100" b="0" i="0">
+                          <a:solidFill>
+                            <a:srgbClr val="2B2B2B"/>
+                          </a:solidFill>
+                          <a:latin typeface="Calibri"/>
+                        </a:rPr>
+                        <a:t> · pendiente</a:t>
+                      </a:r>
+                    </a:p>
+                  </a:txBody>
+                  <a:tcPr anchor="ctr" marL="109728" marR="91440" marT="36576" marB="36576">
+                    <a:solidFill>
+                      <a:srgbClr val="F2F2F2"/>
+                    </a:solidFill>
+                  </a:tcPr>
+                </a:tc>
+                <a:tc>
+                  <a:txBody>
+                    <a:bodyPr/>
+                    <a:lstStyle/>
+                    <a:p>
+                      <a:pPr algn="l"/>
+                      <a:r>
+                        <a:rPr sz="1100" b="1" i="0">
+                          <a:solidFill>
+                            <a:srgbClr val="2B2B2B"/>
+                          </a:solidFill>
+                          <a:latin typeface="Calibri"/>
+                        </a:rPr>
+                        <a:t>Parcial 1</a:t>
+                      </a:r>
+                      <a:r>
+                        <a:rPr sz="1100" b="0" i="0">
+                          <a:solidFill>
+                            <a:srgbClr val="2B2B2B"/>
+                          </a:solidFill>
+                          <a:latin typeface="Calibri"/>
+                        </a:rPr>
+                        <a:t> · Cuestionario · 24%</a:t>
+                      </a:r>
+                    </a:p>
+                  </a:txBody>
+                  <a:tcPr anchor="ctr" marL="109728" marR="91440" marT="36576" marB="36576">
+                    <a:solidFill>
+                      <a:srgbClr val="F2F2F2"/>
+                    </a:solidFill>
+                  </a:tcPr>
+                </a:tc>
+                <a:tc>
+                  <a:txBody>
+                    <a:bodyPr/>
+                    <a:lstStyle/>
+                    <a:p>
+                      <a:pPr algn="l"/>
+                      <a:r>
+                        <a:rPr sz="1100" b="0" i="0">
+                          <a:solidFill>
+                            <a:srgbClr val="2B2B2B"/>
+                          </a:solidFill>
+                          <a:latin typeface="Calibri"/>
+                        </a:rPr>
+                        <a:t>Estudia la </a:t>
+                      </a:r>
+                      <a:r>
+                        <a:rPr sz="1100" b="1" i="0">
+                          <a:solidFill>
+                            <a:srgbClr val="2B2B2B"/>
+                          </a:solidFill>
+                          <a:latin typeface="Calibri"/>
+                        </a:rPr>
+                        <a:t>introducción</a:t>
+                      </a:r>
+                      <a:r>
+                        <a:rPr sz="1100" b="0" i="0">
+                          <a:solidFill>
+                            <a:srgbClr val="2B2B2B"/>
+                          </a:solidFill>
+                          <a:latin typeface="Calibri"/>
+                        </a:rPr>
+                        <a:t>, los referentes Fase I y el instrumento ya diseñado.</a:t>
+                      </a:r>
+                    </a:p>
+                  </a:txBody>
+                  <a:tcPr anchor="ctr" marL="109728" marR="91440" marT="36576" marB="36576">
+                    <a:solidFill>
+                      <a:srgbClr val="F2F2F2"/>
+                    </a:solidFill>
+                  </a:tcPr>
+                </a:tc>
+              </a:tr>
+              <a:tr h="477520">
+                <a:tc>
+                  <a:txBody>
+                    <a:bodyPr/>
+                    <a:lstStyle/>
+                    <a:p>
+                      <a:pPr algn="l"/>
+                      <a:r>
+                        <a:rPr sz="1100" b="1" i="0">
+                          <a:solidFill>
+                            <a:srgbClr val="2B2B2B"/>
+                          </a:solidFill>
+                          <a:latin typeface="Calibri"/>
+                        </a:rPr>
+                        <a:t>Sesión 08</a:t>
+                      </a:r>
+                      <a:r>
+                        <a:rPr sz="1100" b="0" i="0">
+                          <a:solidFill>
+                            <a:srgbClr val="2B2B2B"/>
+                          </a:solidFill>
+                          <a:latin typeface="Calibri"/>
+                        </a:rPr>
+                        <a:t> · pendiente</a:t>
+                      </a:r>
+                    </a:p>
+                  </a:txBody>
+                  <a:tcPr anchor="ctr" marL="109728" marR="91440" marT="36576" marB="36576">
+                    <a:solidFill>
+                      <a:srgbClr val="FFFFFF"/>
+                    </a:solidFill>
+                  </a:tcPr>
+                </a:tc>
+                <a:tc>
+                  <a:txBody>
+                    <a:bodyPr/>
+                    <a:lstStyle/>
+                    <a:p>
+                      <a:pPr algn="l"/>
+                      <a:r>
+                        <a:rPr sz="1100" b="1" i="0">
+                          <a:solidFill>
+                            <a:srgbClr val="2B2B2B"/>
+                          </a:solidFill>
+                          <a:latin typeface="Calibri"/>
+                        </a:rPr>
+                        <a:t>Quiz 2</a:t>
+                      </a:r>
+                      <a:r>
+                        <a:rPr sz="1100" b="0" i="0">
+                          <a:solidFill>
+                            <a:srgbClr val="2B2B2B"/>
+                          </a:solidFill>
+                          <a:latin typeface="Calibri"/>
+                        </a:rPr>
+                        <a:t> · Cuestionario · 9%</a:t>
+                      </a:r>
+                    </a:p>
+                  </a:txBody>
+                  <a:tcPr anchor="ctr" marL="109728" marR="91440" marT="36576" marB="36576">
+                    <a:solidFill>
+                      <a:srgbClr val="FFFFFF"/>
+                    </a:solidFill>
+                  </a:tcPr>
+                </a:tc>
+                <a:tc>
+                  <a:txBody>
+                    <a:bodyPr/>
+                    <a:lstStyle/>
+                    <a:p>
+                      <a:pPr algn="l"/>
+                      <a:r>
+                        <a:rPr sz="1100" b="0" i="0">
+                          <a:solidFill>
+                            <a:srgbClr val="2B2B2B"/>
+                          </a:solidFill>
+                          <a:latin typeface="Calibri"/>
+                        </a:rPr>
+                        <a:t>Estudia </a:t>
+                      </a:r>
+                      <a:r>
+                        <a:rPr sz="1100" b="1" i="0">
+                          <a:solidFill>
+                            <a:srgbClr val="2B2B2B"/>
+                          </a:solidFill>
+                          <a:latin typeface="Calibri"/>
+                        </a:rPr>
+                        <a:t>comunidades de práctica</a:t>
+                      </a:r>
+                      <a:r>
+                        <a:rPr sz="1100" b="0" i="0">
+                          <a:solidFill>
+                            <a:srgbClr val="2B2B2B"/>
+                          </a:solidFill>
+                          <a:latin typeface="Calibri"/>
+                        </a:rPr>
+                        <a:t>, co-creación y análisis de datos.</a:t>
+                      </a:r>
+                    </a:p>
+                  </a:txBody>
+                  <a:tcPr anchor="ctr" marL="109728" marR="91440" marT="36576" marB="36576">
+                    <a:solidFill>
+                      <a:srgbClr val="FFFFFF"/>
+                    </a:solidFill>
+                  </a:tcPr>
+                </a:tc>
+              </a:tr>
+              <a:tr h="477520">
+                <a:tc>
+                  <a:txBody>
+                    <a:bodyPr/>
+                    <a:lstStyle/>
+                    <a:p>
+                      <a:pPr algn="l"/>
+                      <a:r>
+                        <a:rPr sz="1100" b="1" i="0">
+                          <a:solidFill>
+                            <a:srgbClr val="2B2B2B"/>
+                          </a:solidFill>
+                          <a:latin typeface="Calibri"/>
+                        </a:rPr>
+                        <a:t>Sesión 10</a:t>
+                      </a:r>
+                      <a:r>
+                        <a:rPr sz="1100" b="0" i="0">
+                          <a:solidFill>
+                            <a:srgbClr val="2B2B2B"/>
+                          </a:solidFill>
+                          <a:latin typeface="Calibri"/>
+                        </a:rPr>
+                        <a:t> · pendiente</a:t>
+                      </a:r>
+                    </a:p>
+                  </a:txBody>
+                  <a:tcPr anchor="ctr" marL="109728" marR="91440" marT="36576" marB="36576">
+                    <a:solidFill>
+                      <a:srgbClr val="F2F2F2"/>
+                    </a:solidFill>
+                  </a:tcPr>
+                </a:tc>
+                <a:tc>
+                  <a:txBody>
+                    <a:bodyPr/>
+                    <a:lstStyle/>
+                    <a:p>
+                      <a:pPr algn="l"/>
+                      <a:r>
+                        <a:rPr sz="1100" b="1" i="0">
+                          <a:solidFill>
+                            <a:srgbClr val="2B2B2B"/>
+                          </a:solidFill>
+                          <a:latin typeface="Calibri"/>
+                        </a:rPr>
+                        <a:t>Parcial 2</a:t>
+                      </a:r>
+                      <a:r>
+                        <a:rPr sz="1100" b="0" i="0">
+                          <a:solidFill>
+                            <a:srgbClr val="2B2B2B"/>
+                          </a:solidFill>
+                          <a:latin typeface="Calibri"/>
+                        </a:rPr>
+                        <a:t> · Cuestionario · 21%</a:t>
+                      </a:r>
+                    </a:p>
+                  </a:txBody>
+                  <a:tcPr anchor="ctr" marL="109728" marR="91440" marT="36576" marB="36576">
+                    <a:solidFill>
+                      <a:srgbClr val="F2F2F2"/>
+                    </a:solidFill>
+                  </a:tcPr>
+                </a:tc>
+                <a:tc>
+                  <a:txBody>
+                    <a:bodyPr/>
+                    <a:lstStyle/>
+                    <a:p>
+                      <a:pPr algn="l"/>
+                      <a:r>
+                        <a:rPr sz="1100" b="0" i="0">
+                          <a:solidFill>
+                            <a:srgbClr val="2B2B2B"/>
+                          </a:solidFill>
+                          <a:latin typeface="Calibri"/>
+                        </a:rPr>
+                        <a:t>Estudia el cierre del </a:t>
+                      </a:r>
+                      <a:r>
+                        <a:rPr sz="1100" b="1" i="0">
+                          <a:solidFill>
+                            <a:srgbClr val="2B2B2B"/>
+                          </a:solidFill>
+                          <a:latin typeface="Calibri"/>
+                        </a:rPr>
+                        <a:t>marco teórico</a:t>
+                      </a:r>
+                      <a:r>
+                        <a:rPr sz="1100" b="0" i="0">
+                          <a:solidFill>
+                            <a:srgbClr val="2B2B2B"/>
+                          </a:solidFill>
+                          <a:latin typeface="Calibri"/>
+                        </a:rPr>
+                        <a:t>, los resultados y la discusión.</a:t>
+                      </a:r>
+                    </a:p>
+                  </a:txBody>
+                  <a:tcPr anchor="ctr" marL="109728" marR="91440" marT="36576" marB="36576">
+                    <a:solidFill>
+                      <a:srgbClr val="F2F2F2"/>
+                    </a:solidFill>
+                  </a:tcPr>
+                </a:tc>
+              </a:tr>
+              <a:tr h="477520">
+                <a:tc>
+                  <a:txBody>
+                    <a:bodyPr/>
+                    <a:lstStyle/>
+                    <a:p>
+                      <a:pPr algn="l"/>
+                      <a:r>
+                        <a:rPr sz="1100" b="1" i="0">
+                          <a:solidFill>
+                            <a:srgbClr val="2B2B2B"/>
+                          </a:solidFill>
+                          <a:latin typeface="Calibri"/>
+                        </a:rPr>
+                        <a:t>Sesión 12</a:t>
+                      </a:r>
+                      <a:r>
+                        <a:rPr sz="1100" b="0" i="0">
+                          <a:solidFill>
+                            <a:srgbClr val="2B2B2B"/>
+                          </a:solidFill>
+                          <a:latin typeface="Calibri"/>
+                        </a:rPr>
+                        <a:t> · pendiente</a:t>
+                      </a:r>
+                    </a:p>
+                  </a:txBody>
+                  <a:tcPr anchor="ctr" marL="109728" marR="91440" marT="36576" marB="36576">
+                    <a:solidFill>
+                      <a:srgbClr val="FFFFFF"/>
+                    </a:solidFill>
+                  </a:tcPr>
+                </a:tc>
+                <a:tc>
+                  <a:txBody>
+                    <a:bodyPr/>
+                    <a:lstStyle/>
+                    <a:p>
+                      <a:pPr algn="l"/>
+                      <a:r>
+                        <a:rPr sz="1100" b="1" i="0">
+                          <a:solidFill>
+                            <a:srgbClr val="2B2B2B"/>
+                          </a:solidFill>
+                          <a:latin typeface="Calibri"/>
+                        </a:rPr>
+                        <a:t>Quiz 3</a:t>
+                      </a:r>
+                      <a:r>
+                        <a:rPr sz="1100" b="0" i="0">
+                          <a:solidFill>
+                            <a:srgbClr val="2B2B2B"/>
+                          </a:solidFill>
+                          <a:latin typeface="Calibri"/>
+                        </a:rPr>
+                        <a:t> · Cuestionario · 4%</a:t>
+                      </a:r>
+                    </a:p>
+                  </a:txBody>
+                  <a:tcPr anchor="ctr" marL="109728" marR="91440" marT="36576" marB="36576">
+                    <a:solidFill>
+                      <a:srgbClr val="FFFFFF"/>
+                    </a:solidFill>
+                  </a:tcPr>
+                </a:tc>
+                <a:tc>
+                  <a:txBody>
+                    <a:bodyPr/>
+                    <a:lstStyle/>
+                    <a:p>
+                      <a:pPr algn="l"/>
+                      <a:r>
+                        <a:rPr sz="1100" b="0" i="0">
+                          <a:solidFill>
+                            <a:srgbClr val="2B2B2B"/>
+                          </a:solidFill>
+                          <a:latin typeface="Calibri"/>
+                        </a:rPr>
+                        <a:t>Ten claros </a:t>
+                      </a:r>
+                      <a:r>
+                        <a:rPr sz="1100" b="1" i="0">
+                          <a:solidFill>
+                            <a:srgbClr val="2B2B2B"/>
+                          </a:solidFill>
+                          <a:latin typeface="Calibri"/>
+                        </a:rPr>
+                        <a:t>resumen</a:t>
+                      </a:r>
+                      <a:r>
+                        <a:rPr sz="1100" b="0" i="0">
+                          <a:solidFill>
+                            <a:srgbClr val="2B2B2B"/>
+                          </a:solidFill>
+                          <a:latin typeface="Calibri"/>
+                        </a:rPr>
+                        <a:t>, palabras clave UNESCO, póster y verificación antiplagio.</a:t>
+                      </a:r>
+                    </a:p>
+                  </a:txBody>
+                  <a:tcPr anchor="ctr" marL="109728" marR="91440" marT="36576" marB="36576">
+                    <a:solidFill>
+                      <a:srgbClr val="FFFFFF"/>
+                    </a:solidFill>
+                  </a:tcPr>
+                </a:tc>
+              </a:tr>
+              <a:tr h="477520">
+                <a:tc>
+                  <a:txBody>
+                    <a:bodyPr/>
+                    <a:lstStyle/>
+                    <a:p>
+                      <a:pPr algn="l"/>
+                      <a:r>
+                        <a:rPr sz="1100" b="1" i="0">
+                          <a:solidFill>
+                            <a:srgbClr val="2B2B2B"/>
+                          </a:solidFill>
+                          <a:latin typeface="Calibri"/>
+                        </a:rPr>
+                        <a:t>Sesión 13</a:t>
+                      </a:r>
+                      <a:r>
+                        <a:rPr sz="1100" b="0" i="0">
+                          <a:solidFill>
+                            <a:srgbClr val="2B2B2B"/>
+                          </a:solidFill>
+                          <a:latin typeface="Calibri"/>
+                        </a:rPr>
+                        <a:t> · pendiente</a:t>
+                      </a:r>
+                    </a:p>
+                  </a:txBody>
+                  <a:tcPr anchor="ctr" marL="109728" marR="91440" marT="36576" marB="36576">
+                    <a:solidFill>
+                      <a:srgbClr val="F2F2F2"/>
+                    </a:solidFill>
+                  </a:tcPr>
+                </a:tc>
+                <a:tc>
+                  <a:txBody>
+                    <a:bodyPr/>
+                    <a:lstStyle/>
+                    <a:p>
+                      <a:pPr algn="l"/>
+                      <a:r>
+                        <a:rPr sz="1100" b="1" i="0">
+                          <a:solidFill>
+                            <a:srgbClr val="2B2B2B"/>
+                          </a:solidFill>
+                          <a:latin typeface="Calibri"/>
+                        </a:rPr>
+                        <a:t>ACA Final</a:t>
+                      </a:r>
+                      <a:r>
+                        <a:rPr sz="1100" b="0" i="0">
+                          <a:solidFill>
+                            <a:srgbClr val="2B2B2B"/>
+                          </a:solidFill>
+                          <a:latin typeface="Calibri"/>
+                        </a:rPr>
+                        <a:t> · Tarea · 32%</a:t>
+                      </a:r>
+                    </a:p>
+                  </a:txBody>
+                  <a:tcPr anchor="ctr" marL="109728" marR="91440" marT="36576" marB="36576">
+                    <a:solidFill>
+                      <a:srgbClr val="F2F2F2"/>
+                    </a:solidFill>
+                  </a:tcPr>
+                </a:tc>
+                <a:tc>
+                  <a:txBody>
+                    <a:bodyPr/>
+                    <a:lstStyle/>
+                    <a:p>
+                      <a:pPr algn="l"/>
+                      <a:r>
+                        <a:rPr sz="1100" b="0" i="0">
+                          <a:solidFill>
+                            <a:srgbClr val="2B2B2B"/>
+                          </a:solidFill>
+                          <a:latin typeface="Calibri"/>
+                        </a:rPr>
+                        <a:t>Sube el </a:t>
+                      </a:r>
+                      <a:r>
+                        <a:rPr sz="1100" b="1" i="0">
+                          <a:solidFill>
+                            <a:srgbClr val="2B2B2B"/>
+                          </a:solidFill>
+                          <a:latin typeface="Calibri"/>
+                        </a:rPr>
+                        <a:t>documento final</a:t>
+                      </a:r>
+                      <a:r>
+                        <a:rPr sz="1100" b="0" i="0">
+                          <a:solidFill>
+                            <a:srgbClr val="2B2B2B"/>
+                          </a:solidFill>
+                          <a:latin typeface="Calibri"/>
+                        </a:rPr>
+                        <a:t> en plantilla APA CUN: mínimo 4.000 palabras y 50 referencias.</a:t>
+                      </a:r>
+                    </a:p>
+                  </a:txBody>
+                  <a:tcPr anchor="ctr" marL="109728" marR="91440" marT="36576" marB="36576">
+                    <a:solidFill>
+                      <a:srgbClr val="F2F2F2"/>
+                    </a:solidFill>
+                  </a:tcPr>
+                </a:tc>
+              </a:tr>
+              <a:tr h="477520">
+                <a:tc>
+                  <a:txBody>
+                    <a:bodyPr/>
+                    <a:lstStyle/>
+                    <a:p>
+                      <a:pPr algn="l"/>
+                      <a:r>
+                        <a:rPr sz="1100" b="1" i="0">
+                          <a:solidFill>
+                            <a:srgbClr val="2B2B2B"/>
+                          </a:solidFill>
+                          <a:latin typeface="Calibri"/>
+                        </a:rPr>
+                        <a:t>Sesión 14</a:t>
+                      </a:r>
+                      <a:r>
+                        <a:rPr sz="1100" b="0" i="0">
+                          <a:solidFill>
+                            <a:srgbClr val="2B2B2B"/>
+                          </a:solidFill>
+                          <a:latin typeface="Calibri"/>
+                        </a:rPr>
+                        <a:t> · pendiente</a:t>
+                      </a:r>
+                    </a:p>
+                  </a:txBody>
+                  <a:tcPr anchor="ctr" marL="109728" marR="91440" marT="36576" marB="36576">
+                    <a:solidFill>
+                      <a:srgbClr val="FFFFFF"/>
+                    </a:solidFill>
+                  </a:tcPr>
+                </a:tc>
+                <a:tc>
+                  <a:txBody>
+                    <a:bodyPr/>
+                    <a:lstStyle/>
+                    <a:p>
+                      <a:pPr algn="l"/>
+                      <a:r>
+                        <a:rPr sz="1100" b="1" i="0">
+                          <a:solidFill>
+                            <a:srgbClr val="2B2B2B"/>
+                          </a:solidFill>
+                          <a:latin typeface="Calibri"/>
+                        </a:rPr>
+                        <a:t>Autoevaluación</a:t>
+                      </a:r>
+                      <a:r>
+                        <a:rPr sz="1100" b="0" i="0">
+                          <a:solidFill>
+                            <a:srgbClr val="2B2B2B"/>
+                          </a:solidFill>
+                          <a:latin typeface="Calibri"/>
+                        </a:rPr>
+                        <a:t> · Cuestionario · 2%</a:t>
+                      </a:r>
+                    </a:p>
+                  </a:txBody>
+                  <a:tcPr anchor="ctr" marL="109728" marR="91440" marT="36576" marB="36576">
+                    <a:solidFill>
+                      <a:srgbClr val="FFFFFF"/>
+                    </a:solidFill>
+                  </a:tcPr>
+                </a:tc>
+                <a:tc>
+                  <a:txBody>
+                    <a:bodyPr/>
+                    <a:lstStyle/>
+                    <a:p>
+                      <a:pPr algn="l"/>
+                      <a:r>
+                        <a:rPr sz="1100" b="0" i="0">
+                          <a:solidFill>
+                            <a:srgbClr val="2B2B2B"/>
+                          </a:solidFill>
+                          <a:latin typeface="Calibri"/>
+                        </a:rPr>
+                        <a:t>Diligénciala </a:t>
+                      </a:r>
+                      <a:r>
+                        <a:rPr sz="1100" b="1" i="0">
+                          <a:solidFill>
+                            <a:srgbClr val="2B2B2B"/>
+                          </a:solidFill>
+                          <a:latin typeface="Calibri"/>
+                        </a:rPr>
+                        <a:t>tú</a:t>
+                      </a:r>
+                      <a:r>
+                        <a:rPr sz="1100" b="0" i="0">
+                          <a:solidFill>
+                            <a:srgbClr val="2B2B2B"/>
+                          </a:solidFill>
+                          <a:latin typeface="Calibri"/>
+                        </a:rPr>
+                        <a:t>, dentro de su ventana, sobre tu participación real.</a:t>
+                      </a:r>
+                    </a:p>
+                  </a:txBody>
+                  <a:tcPr anchor="ctr" marL="109728" marR="91440" marT="36576" marB="36576">
+                    <a:solidFill>
+                      <a:srgbClr val="FFFFFF"/>
+                    </a:solidFill>
+                  </a:tcPr>
+                </a:tc>
+              </a:tr>
+              <a:tr h="477520">
+                <a:tc>
+                  <a:txBody>
+                    <a:bodyPr/>
+                    <a:lstStyle/>
+                    <a:p>
+                      <a:pPr algn="l"/>
+                      <a:r>
+                        <a:rPr sz="1100" b="1" i="0">
+                          <a:solidFill>
+                            <a:srgbClr val="2B2B2B"/>
+                          </a:solidFill>
+                          <a:latin typeface="Calibri"/>
+                        </a:rPr>
+                        <a:t>Sesión 14</a:t>
+                      </a:r>
+                      <a:r>
+                        <a:rPr sz="1100" b="0" i="0">
+                          <a:solidFill>
+                            <a:srgbClr val="2B2B2B"/>
+                          </a:solidFill>
+                          <a:latin typeface="Calibri"/>
+                        </a:rPr>
+                        <a:t> · pendiente</a:t>
+                      </a:r>
+                    </a:p>
+                  </a:txBody>
+                  <a:tcPr anchor="ctr" marL="109728" marR="91440" marT="36576" marB="36576">
+                    <a:solidFill>
+                      <a:srgbClr val="F2F2F2"/>
+                    </a:solidFill>
+                  </a:tcPr>
+                </a:tc>
+                <a:tc>
+                  <a:txBody>
+                    <a:bodyPr/>
+                    <a:lstStyle/>
+                    <a:p>
+                      <a:pPr algn="l"/>
+                      <a:r>
+                        <a:rPr sz="1100" b="1" i="0">
+                          <a:solidFill>
+                            <a:srgbClr val="2B2B2B"/>
+                          </a:solidFill>
+                          <a:latin typeface="Calibri"/>
+                        </a:rPr>
+                        <a:t>Coevaluación</a:t>
+                      </a:r>
+                      <a:r>
+                        <a:rPr sz="1100" b="0" i="0">
+                          <a:solidFill>
+                            <a:srgbClr val="2B2B2B"/>
+                          </a:solidFill>
+                          <a:latin typeface="Calibri"/>
+                        </a:rPr>
+                        <a:t> · Foro · 2%</a:t>
+                      </a:r>
+                    </a:p>
+                  </a:txBody>
+                  <a:tcPr anchor="ctr" marL="109728" marR="91440" marT="36576" marB="36576">
+                    <a:solidFill>
+                      <a:srgbClr val="F2F2F2"/>
+                    </a:solidFill>
+                  </a:tcPr>
+                </a:tc>
+                <a:tc>
+                  <a:txBody>
+                    <a:bodyPr/>
+                    <a:lstStyle/>
+                    <a:p>
+                      <a:pPr algn="l"/>
+                      <a:r>
+                        <a:rPr sz="1100" b="1" i="0">
+                          <a:solidFill>
+                            <a:srgbClr val="2B2B2B"/>
+                          </a:solidFill>
+                          <a:latin typeface="Calibri"/>
+                        </a:rPr>
+                        <a:t>Publica</a:t>
+                      </a:r>
+                      <a:r>
+                        <a:rPr sz="1100" b="0" i="0">
+                          <a:solidFill>
+                            <a:srgbClr val="2B2B2B"/>
+                          </a:solidFill>
+                          <a:latin typeface="Calibri"/>
+                        </a:rPr>
+                        <a:t> tu aporte dentro de la ventana: un borrador sin enviar no cuenta.</a:t>
+                      </a:r>
+                    </a:p>
+                  </a:txBody>
+                  <a:tcPr anchor="ctr" marL="109728" marR="91440" marT="36576" marB="36576">
+                    <a:solidFill>
+                      <a:srgbClr val="F2F2F2"/>
+                    </a:solidFill>
+                  </a:tcPr>
+                </a:tc>
+              </a:tr>
+            </a:tbl>
+          </a:graphicData>
+        </a:graphic>
+      </p:graphicFrame>
+      <p:sp>
+        <p:nvSpPr>
+          <p:cNvPr id="6" name="TextBox 5"/>
+          <p:cNvSpPr txBox="1"/>
+          <p:nvPr/>
+        </p:nvSpPr>
+        <p:spPr>
+          <a:xfrm>
+            <a:off x="640080" y="6080760"/>
+            <a:ext cx="10911535" cy="548640"/>
+          </a:xfrm>
+          <a:prstGeom prst="rect">
+            <a:avLst/>
+          </a:prstGeom>
+          <a:noFill/>
+        </p:spPr>
+        <p:txBody>
+          <a:bodyPr wrap="square" anchor="t" lIns="0" rIns="0" tIns="0" bIns="0">
+            <a:spAutoFit/>
+          </a:bodyPr>
+          <a:lstStyle/>
+          <a:p>
+            <a:r>
+              <a:rPr sz="1200" b="0" i="1">
+                <a:solidFill>
+                  <a:srgbClr val="2B2B2B"/>
+                </a:solidFill>
+                <a:latin typeface="Calibri"/>
+              </a:rPr>
+              <a:t>Esta misma tabla va al final de todas las sesiones. La </a:t>
+            </a:r>
+            <a:r>
+              <a:rPr sz="1200" b="1" i="1">
+                <a:solidFill>
+                  <a:srgbClr val="2B2B2B"/>
+                </a:solidFill>
+                <a:latin typeface="Calibri"/>
+              </a:rPr>
+              <a:t>fecha</a:t>
+            </a:r>
+            <a:r>
+              <a:rPr sz="1200" b="0" i="1">
+                <a:solidFill>
+                  <a:srgbClr val="2B2B2B"/>
+                </a:solidFill>
+                <a:latin typeface="Calibri"/>
+              </a:rPr>
+              <a:t> de cada ventana está en el enunciado del ítem (`Clases/Recursos/ACAs/`) y en el aula: si el aula y cualquier otro material se contradicen, </a:t>
+            </a:r>
+            <a:r>
+              <a:rPr sz="1200" b="1" i="1">
+                <a:solidFill>
+                  <a:srgbClr val="2B2B2B"/>
+                </a:solidFill>
+                <a:latin typeface="Calibri"/>
+              </a:rPr>
+              <a:t>manda el aula</a:t>
+            </a:r>
+            <a:r>
+              <a:rPr sz="1200" b="0" i="1">
+                <a:solidFill>
+                  <a:srgbClr val="2B2B2B"/>
+                </a:solidFill>
+                <a:latin typeface="Calibri"/>
+              </a:rPr>
+              <a:t>.</a:t>
+            </a:r>
+          </a:p>
+        </p:txBody>
+      </p:sp>
+      <p:sp>
+        <p:nvSpPr>
+          <p:cNvPr id="7" name="TextBox 6"/>
+          <p:cNvSpPr txBox="1"/>
+          <p:nvPr/>
+        </p:nvSpPr>
+        <p:spPr>
+          <a:xfrm>
+            <a:off x="11094415" y="6446520"/>
+            <a:ext cx="548640" cy="274320"/>
+          </a:xfrm>
+          <a:prstGeom prst="rect">
+            <a:avLst/>
+          </a:prstGeom>
+          <a:noFill/>
+        </p:spPr>
+        <p:txBody>
+          <a:bodyPr wrap="square" anchor="t" lIns="0" rIns="0" tIns="0" bIns="0">
+            <a:spAutoFit/>
+          </a:bodyPr>
+          <a:lstStyle/>
+          <a:p>
+            <a:pPr algn="r"/>
+            <a:r>
+              <a:rPr sz="1000" b="1" i="0">
+                <a:solidFill>
+                  <a:srgbClr val="8F989D"/>
+                </a:solidFill>
+                <a:latin typeface="Calibri"/>
+              </a:rPr>
+              <a:t>22</a:t>
+            </a:r>
+          </a:p>
+        </p:txBody>
+      </p:sp>
+    </p:spTree>
+  </p:cSld>
+  <p:clrMapOvr>
+    <a:masterClrMapping/>
+  </p:clrMapOvr>
+</p:sld>
+</file>
+
+<file path=ppt/slides/slide23.xml><?xml version="1.0" encoding="utf-8"?>
 <p:sld xmlns:a="http://schemas.openxmlformats.org/drawingml/2006/main" xmlns:p="http://schemas.openxmlformats.org/presentationml/2006/main" xmlns:r="http://schemas.openxmlformats.org/officeDocument/2006/relationships">
   <p:cSld>
     <p:bg>
@@ -12784,7 +14047,7 @@
                 </a:solidFill>
                 <a:latin typeface="Calibri"/>
               </a:rPr>
-              <a:t>artículo abierto</a:t>
+              <a:t>documento abierto</a:t>
             </a:r>
             <a:r>
               <a:rPr sz="1500" b="0" i="0">
@@ -12843,7 +14106,7 @@
                 </a:solidFill>
                 <a:latin typeface="Calibri"/>
               </a:rPr>
-              <a:t>●   Una duda concreta: “esta discusión no dialoga con los autores”, no “ayúdeme con el artículo”.</a:t>
+              <a:t>●   Una duda concreta: “esta discusión no dialoga con los autores”, no “ayúdeme con el documento”.</a:t>
             </a:r>
           </a:p>
         </p:txBody>
@@ -13017,7 +14280,7 @@
                 </a:solidFill>
                 <a:latin typeface="Calibri"/>
               </a:rPr>
-              <a:t>Qué se llevan al final: artículo, sustentación y repositorio</a:t>
+              <a:t>Qué se llevan al final: documento, sustentación y repositorio</a:t>
             </a:r>
           </a:p>
         </p:txBody>
@@ -13099,7 +14362,7 @@
                 </a:solidFill>
                 <a:latin typeface="Calibri"/>
               </a:rPr>
-              <a:t>1. Un artículo resultado de investigación</a:t>
+              <a:t>1. Un documento escrito</a:t>
             </a:r>
             <a:r>
               <a:rPr sz="1500" b="0" i="0">
@@ -13136,6 +14399,24 @@
                 <a:latin typeface="Calibri"/>
               </a:rPr>
               <a:t>extensión no inferior a 4.000 palabras</a:t>
+            </a:r>
+            <a:r>
+              <a:rPr sz="1500" b="0" i="0">
+                <a:solidFill>
+                  <a:srgbClr val="2B2B2B"/>
+                </a:solidFill>
+                <a:latin typeface="Calibri"/>
+              </a:rPr>
+              <a:t>. Su forma por defecto es el </a:t>
+            </a:r>
+            <a:r>
+              <a:rPr sz="1500" b="1" i="0">
+                <a:solidFill>
+                  <a:srgbClr val="2B2B2B"/>
+                </a:solidFill>
+                <a:latin typeface="Calibri"/>
+              </a:rPr>
+              <a:t>artículo resultado de investigación</a:t>
             </a:r>
             <a:r>
               <a:rPr sz="1500" b="0" i="0">
@@ -13228,7 +14509,7 @@
                 </a:solidFill>
                 <a:latin typeface="Calibri"/>
               </a:rPr>
-              <a:t>–   Si su opción de grado incluye un </a:t>
+              <a:t>–   </a:t>
             </a:r>
             <a:r>
               <a:rPr sz="1600" b="1" i="0">
@@ -13237,7 +14518,7 @@
                 </a:solidFill>
                 <a:latin typeface="Calibri"/>
               </a:rPr>
-              <a:t>producto de ingeniería</a:t>
+              <a:t>El artículo no es la única salida.</a:t>
             </a:r>
             <a:r>
               <a:rPr sz="1600" b="0" i="0">
@@ -13246,7 +14527,7 @@
                 </a:solidFill>
                 <a:latin typeface="Calibri"/>
               </a:rPr>
-              <a:t> (prototipo, sistema, modelo, dataset), el producto no reemplaza al artículo: se </a:t>
+              <a:t> Si su opción de grado es un </a:t>
             </a:r>
             <a:r>
               <a:rPr sz="1600" b="1" i="0">
@@ -13255,6 +14536,96 @@
                 </a:solidFill>
                 <a:latin typeface="Calibri"/>
               </a:rPr>
+              <a:t>proyecto aplicado o de desarrollo</a:t>
+            </a:r>
+            <a:r>
+              <a:rPr sz="1600" b="0" i="0">
+                <a:solidFill>
+                  <a:srgbClr val="2B2B2B"/>
+                </a:solidFill>
+                <a:latin typeface="Calibri"/>
+              </a:rPr>
+              <a:t>, un </a:t>
+            </a:r>
+            <a:r>
+              <a:rPr sz="1600" b="1" i="0">
+                <a:solidFill>
+                  <a:srgbClr val="2B2B2B"/>
+                </a:solidFill>
+                <a:latin typeface="Calibri"/>
+              </a:rPr>
+              <a:t>prototipo o sistema documentado</a:t>
+            </a:r>
+            <a:r>
+              <a:rPr sz="1600" b="0" i="0">
+                <a:solidFill>
+                  <a:srgbClr val="2B2B2B"/>
+                </a:solidFill>
+                <a:latin typeface="Calibri"/>
+              </a:rPr>
+              <a:t>, una </a:t>
+            </a:r>
+            <a:r>
+              <a:rPr sz="1600" b="1" i="0">
+                <a:solidFill>
+                  <a:srgbClr val="2B2B2B"/>
+                </a:solidFill>
+                <a:latin typeface="Calibri"/>
+              </a:rPr>
+              <a:t>sistematización de experiencia</a:t>
+            </a:r>
+            <a:r>
+              <a:rPr sz="1600" b="0" i="0">
+                <a:solidFill>
+                  <a:srgbClr val="2B2B2B"/>
+                </a:solidFill>
+                <a:latin typeface="Calibri"/>
+              </a:rPr>
+              <a:t> o un </a:t>
+            </a:r>
+            <a:r>
+              <a:rPr sz="1600" b="1" i="0">
+                <a:solidFill>
+                  <a:srgbClr val="2B2B2B"/>
+                </a:solidFill>
+                <a:latin typeface="Calibri"/>
+              </a:rPr>
+              <a:t>emprendimiento</a:t>
+            </a:r>
+            <a:r>
+              <a:rPr sz="1600" b="0" i="0">
+                <a:solidFill>
+                  <a:srgbClr val="2B2B2B"/>
+                </a:solidFill>
+                <a:latin typeface="Calibri"/>
+              </a:rPr>
+              <a:t>, el producto </a:t>
+            </a:r>
+            <a:r>
+              <a:rPr sz="1600" b="1" i="0">
+                <a:solidFill>
+                  <a:srgbClr val="2B2B2B"/>
+                </a:solidFill>
+                <a:latin typeface="Calibri"/>
+              </a:rPr>
+              <a:t>no reemplaza al documento</a:t>
+            </a:r>
+            <a:r>
+              <a:rPr sz="1600" b="0" i="0">
+                <a:solidFill>
+                  <a:srgbClr val="2B2B2B"/>
+                </a:solidFill>
+                <a:latin typeface="Calibri"/>
+              </a:rPr>
+              <a:t>: se </a:t>
+            </a:r>
+            <a:r>
+              <a:rPr sz="1600" b="1" i="0">
+                <a:solidFill>
+                  <a:srgbClr val="2B2B2B"/>
+                </a:solidFill>
+                <a:latin typeface="Calibri"/>
+              </a:rPr>
               <a:t>documenta e investiga</a:t>
             </a:r>
             <a:r>
@@ -13264,7 +14635,7 @@
                 </a:solidFill>
                 <a:latin typeface="Calibri"/>
               </a:rPr>
-              <a:t> dentro de él.</a:t>
+              <a:t> dentro de él, con los mismos mínimos. Confirme su modalidad con el Docente.</a:t>
             </a:r>
           </a:p>
           <a:p>
@@ -13280,7 +14651,7 @@
                 </a:solidFill>
                 <a:latin typeface="Calibri"/>
               </a:rPr>
-              <a:t>–   Para qué le sirve después: es lo que queda publicado con su nombre. Un artículo bien hecho se muestra en una entrevista, se cita y abre la puerta a posgrado.</a:t>
+              <a:t>–   Para qué le sirve después: es lo que queda publicado con su nombre. Un documento bien hecho se muestra en una entrevista, se cita y abre la puerta a posgrado.</a:t>
             </a:r>
           </a:p>
           <a:p>
@@ -13305,7 +14676,7 @@
                 </a:solidFill>
                 <a:latin typeface="Calibri"/>
               </a:rPr>
-              <a:t>cada sesión alimenta ese mismo artículo</a:t>
+              <a:t>cada sesión alimenta ese mismo documento</a:t>
             </a:r>
             <a:r>
               <a:rPr sz="1600" b="0" i="0">
@@ -13488,7 +14859,7 @@
                 </a:solidFill>
                 <a:latin typeface="Calibri"/>
               </a:rPr>
-              <a:t>Mapa del curso (1/2): escribir el artículo</a:t>
+              <a:t>Mapa del curso (1/2): escribir el documento</a:t>
             </a:r>
           </a:p>
         </p:txBody>
@@ -13541,7 +14912,7 @@
                 </a:solidFill>
                 <a:latin typeface="Calibri"/>
               </a:rPr>
-              <a:t> el artículo (02–10), </a:t>
+              <a:t> el documento (02–10), </a:t>
             </a:r>
             <a:r>
               <a:rPr sz="1500" b="1" i="0">
@@ -13873,7 +15244,7 @@
                           </a:solidFill>
                           <a:latin typeface="Calibri"/>
                         </a:rPr>
-                        <a:t>Estructura del artículo · taller de introducción</a:t>
+                        <a:t>Estructura del documento · taller de introducción</a:t>
                       </a:r>
                     </a:p>
                   </a:txBody>
@@ -14631,7 +16002,7 @@
                           </a:solidFill>
                           <a:latin typeface="Calibri"/>
                         </a:rPr>
-                        <a:t>Artículo completo de punta a punta</a:t>
+                        <a:t>Documento completo de punta a punta</a:t>
                       </a:r>
                     </a:p>
                   </a:txBody>
